--- a/docs/帮扶管理信息系统介绍.pptx
+++ b/docs/帮扶管理信息系统介绍.pptx
@@ -4612,10 +4612,6 @@
           </a:solidFill>
           <a:ln/>
         </p:spPr>
-        <p:txBody>
-          <a:bodyPr/>
-          <a:p/>
-        </p:txBody>
       </p:sp>
       <p:sp>
         <p:nvSpPr>
@@ -4636,10 +4632,6 @@
           </a:solidFill>
           <a:ln/>
         </p:spPr>
-        <p:txBody>
-          <a:bodyPr/>
-          <a:p/>
-        </p:txBody>
       </p:sp>
       <p:sp>
         <p:nvSpPr>
@@ -4660,10 +4652,6 @@
           </a:solidFill>
           <a:ln/>
         </p:spPr>
-        <p:txBody>
-          <a:bodyPr/>
-          <a:p/>
-        </p:txBody>
       </p:sp>
       <p:sp>
         <p:nvSpPr>
@@ -4877,7 +4865,7 @@
                 <a:ea typeface="微软雅黑" pitchFamily="34" charset="-122"/>
                 <a:cs typeface="微软雅黑" pitchFamily="34" charset="-120"/>
               </a:rPr>
-              <a:t>V1.11.2  |  2026-08-30  |  FastAPI + Vue 3 + Electron + SQLite</a:t>
+              <a:t>V1.12.8  |  2026-09-14  |  FastAPI + Vue 3 + Electron + SQLite</a:t>
             </a:r>
             <a:endParaRPr lang="en-US" sz="1250" dirty="0"/>
           </a:p>
@@ -4934,10 +4922,6 @@
           </a:solidFill>
           <a:ln/>
         </p:spPr>
-        <p:txBody>
-          <a:bodyPr/>
-          <a:p/>
-        </p:txBody>
       </p:sp>
       <p:sp>
         <p:nvSpPr>
@@ -5089,7 +5073,7 @@
                 <a:ea typeface="微软雅黑" pitchFamily="34" charset="-122"/>
                 <a:cs typeface="微软雅黑" pitchFamily="34" charset="-120"/>
               </a:rPr>
-              <a:t>帮扶管理信息系统 v1.12.0</a:t>
+              <a:t>帮扶管理信息系统 v1.12.8</a:t>
             </a:r>
             <a:endParaRPr lang="en-US" sz="1050" dirty="0"/>
           </a:p>
@@ -5123,10 +5107,6 @@
             </a:outerShdw>
           </a:effectLst>
         </p:spPr>
-        <p:txBody>
-          <a:bodyPr/>
-          <a:p/>
-        </p:txBody>
       </p:sp>
       <p:sp>
         <p:nvSpPr>
@@ -5322,10 +5302,6 @@
             </a:outerShdw>
           </a:effectLst>
         </p:spPr>
-        <p:txBody>
-          <a:bodyPr/>
-          <a:p/>
-        </p:txBody>
       </p:sp>
       <p:sp>
         <p:nvSpPr>
@@ -5544,10 +5520,6 @@
           </a:solidFill>
           <a:ln/>
         </p:spPr>
-        <p:txBody>
-          <a:bodyPr/>
-          <a:p/>
-        </p:txBody>
       </p:sp>
       <p:sp>
         <p:nvSpPr>
@@ -5699,7 +5671,7 @@
                 <a:ea typeface="微软雅黑" pitchFamily="34" charset="-122"/>
                 <a:cs typeface="微软雅黑" pitchFamily="34" charset="-120"/>
               </a:rPr>
-              <a:t>帮扶管理信息系统 v1.12.0</a:t>
+              <a:t>帮扶管理信息系统 v1.12.8</a:t>
             </a:r>
             <a:endParaRPr lang="en-US" sz="1050" dirty="0"/>
           </a:p>
@@ -5724,10 +5696,6 @@
           </a:solidFill>
           <a:ln/>
         </p:spPr>
-        <p:txBody>
-          <a:bodyPr/>
-          <a:p/>
-        </p:txBody>
       </p:sp>
       <p:sp>
         <p:nvSpPr>
@@ -5826,10 +5794,6 @@
           </a:solidFill>
           <a:ln/>
         </p:spPr>
-        <p:txBody>
-          <a:bodyPr/>
-          <a:p/>
-        </p:txBody>
       </p:sp>
       <p:sp>
         <p:nvSpPr>
@@ -5928,10 +5892,6 @@
           </a:solidFill>
           <a:ln/>
         </p:spPr>
-        <p:txBody>
-          <a:bodyPr/>
-          <a:p/>
-        </p:txBody>
       </p:sp>
       <p:sp>
         <p:nvSpPr>
@@ -6030,10 +5990,6 @@
           </a:solidFill>
           <a:ln/>
         </p:spPr>
-        <p:txBody>
-          <a:bodyPr/>
-          <a:p/>
-        </p:txBody>
       </p:sp>
       <p:sp>
         <p:nvSpPr>
@@ -6132,10 +6088,6 @@
           </a:solidFill>
           <a:ln/>
         </p:spPr>
-        <p:txBody>
-          <a:bodyPr/>
-          <a:p/>
-        </p:txBody>
       </p:sp>
       <p:sp>
         <p:nvSpPr>
@@ -6243,10 +6195,6 @@
             </a:outerShdw>
           </a:effectLst>
         </p:spPr>
-        <p:txBody>
-          <a:bodyPr/>
-          <a:p/>
-        </p:txBody>
       </p:sp>
       <p:sp>
         <p:nvSpPr>
@@ -6444,10 +6392,6 @@
           </a:solidFill>
           <a:ln/>
         </p:spPr>
-        <p:txBody>
-          <a:bodyPr/>
-          <a:p/>
-        </p:txBody>
       </p:sp>
       <p:sp>
         <p:nvSpPr>
@@ -6599,7 +6543,7 @@
                 <a:ea typeface="微软雅黑" pitchFamily="34" charset="-122"/>
                 <a:cs typeface="微软雅黑" pitchFamily="34" charset="-120"/>
               </a:rPr>
-              <a:t>帮扶管理信息系统 v1.12.0</a:t>
+              <a:t>帮扶管理信息系统 v1.12.8</a:t>
             </a:r>
             <a:endParaRPr lang="en-US" sz="1050" dirty="0"/>
           </a:p>
@@ -6633,10 +6577,6 @@
             </a:outerShdw>
           </a:effectLst>
         </p:spPr>
-        <p:txBody>
-          <a:bodyPr/>
-          <a:p/>
-        </p:txBody>
       </p:sp>
       <p:sp>
         <p:nvSpPr>
@@ -6832,10 +6772,6 @@
             </a:outerShdw>
           </a:effectLst>
         </p:spPr>
-        <p:txBody>
-          <a:bodyPr/>
-          <a:p/>
-        </p:txBody>
       </p:sp>
       <p:sp>
         <p:nvSpPr>
@@ -7054,10 +6990,6 @@
           </a:solidFill>
           <a:ln/>
         </p:spPr>
-        <p:txBody>
-          <a:bodyPr/>
-          <a:p/>
-        </p:txBody>
       </p:sp>
       <p:sp>
         <p:nvSpPr>
@@ -7209,7 +7141,7 @@
                 <a:ea typeface="微软雅黑" pitchFamily="34" charset="-122"/>
                 <a:cs typeface="微软雅黑" pitchFamily="34" charset="-120"/>
               </a:rPr>
-              <a:t>帮扶管理信息系统 v1.12.0</a:t>
+              <a:t>帮扶管理信息系统 v1.12.8</a:t>
             </a:r>
             <a:endParaRPr lang="en-US" sz="1050" dirty="0"/>
           </a:p>
@@ -7243,10 +7175,6 @@
             </a:outerShdw>
           </a:effectLst>
         </p:spPr>
-        <p:txBody>
-          <a:bodyPr/>
-          <a:p/>
-        </p:txBody>
       </p:sp>
       <p:sp>
         <p:nvSpPr>
@@ -7400,10 +7328,6 @@
             </a:outerShdw>
           </a:effectLst>
         </p:spPr>
-        <p:txBody>
-          <a:bodyPr/>
-          <a:p/>
-        </p:txBody>
       </p:sp>
       <p:sp>
         <p:nvSpPr>
@@ -7550,10 +7474,6 @@
           </a:solidFill>
           <a:ln/>
         </p:spPr>
-        <p:txBody>
-          <a:bodyPr/>
-          <a:p/>
-        </p:txBody>
       </p:sp>
       <p:sp>
         <p:nvSpPr>
@@ -7617,10 +7537,6 @@
             <a:tailEnd type="triangle"/>
           </a:ln>
         </p:spPr>
-        <p:txBody>
-          <a:bodyPr/>
-          <a:p/>
-        </p:txBody>
       </p:sp>
       <p:sp>
         <p:nvSpPr>
@@ -7643,10 +7559,6 @@
           </a:solidFill>
           <a:ln/>
         </p:spPr>
-        <p:txBody>
-          <a:bodyPr/>
-          <a:p/>
-        </p:txBody>
       </p:sp>
       <p:sp>
         <p:nvSpPr>
@@ -7710,10 +7622,6 @@
             <a:tailEnd type="triangle"/>
           </a:ln>
         </p:spPr>
-        <p:txBody>
-          <a:bodyPr/>
-          <a:p/>
-        </p:txBody>
       </p:sp>
       <p:sp>
         <p:nvSpPr>
@@ -7736,10 +7644,6 @@
           </a:solidFill>
           <a:ln/>
         </p:spPr>
-        <p:txBody>
-          <a:bodyPr/>
-          <a:p/>
-        </p:txBody>
       </p:sp>
       <p:sp>
         <p:nvSpPr>
@@ -7803,10 +7707,6 @@
             <a:tailEnd type="triangle"/>
           </a:ln>
         </p:spPr>
-        <p:txBody>
-          <a:bodyPr/>
-          <a:p/>
-        </p:txBody>
       </p:sp>
       <p:sp>
         <p:nvSpPr>
@@ -7829,10 +7729,6 @@
           </a:solidFill>
           <a:ln/>
         </p:spPr>
-        <p:txBody>
-          <a:bodyPr/>
-          <a:p/>
-        </p:txBody>
       </p:sp>
       <p:sp>
         <p:nvSpPr>
@@ -7896,10 +7792,6 @@
             <a:tailEnd type="triangle"/>
           </a:ln>
         </p:spPr>
-        <p:txBody>
-          <a:bodyPr/>
-          <a:p/>
-        </p:txBody>
       </p:sp>
       <p:sp>
         <p:nvSpPr>
@@ -7922,10 +7814,6 @@
           </a:solidFill>
           <a:ln/>
         </p:spPr>
-        <p:txBody>
-          <a:bodyPr/>
-          <a:p/>
-        </p:txBody>
       </p:sp>
       <p:sp>
         <p:nvSpPr>
@@ -7989,10 +7877,6 @@
             <a:tailEnd type="triangle"/>
           </a:ln>
         </p:spPr>
-        <p:txBody>
-          <a:bodyPr/>
-          <a:p/>
-        </p:txBody>
       </p:sp>
       <p:sp>
         <p:nvSpPr>
@@ -8015,10 +7899,6 @@
           </a:solidFill>
           <a:ln/>
         </p:spPr>
-        <p:txBody>
-          <a:bodyPr/>
-          <a:p/>
-        </p:txBody>
       </p:sp>
       <p:sp>
         <p:nvSpPr>
@@ -8443,10 +8323,6 @@
           </a:solidFill>
           <a:ln/>
         </p:spPr>
-        <p:txBody>
-          <a:bodyPr/>
-          <a:p/>
-        </p:txBody>
       </p:sp>
       <p:sp>
         <p:nvSpPr>
@@ -8598,7 +8474,7 @@
                 <a:ea typeface="微软雅黑" pitchFamily="34" charset="-122"/>
                 <a:cs typeface="微软雅黑" pitchFamily="34" charset="-120"/>
               </a:rPr>
-              <a:t>帮扶管理信息系统 v1.12.0</a:t>
+              <a:t>帮扶管理信息系统 v1.12.8</a:t>
             </a:r>
             <a:endParaRPr lang="en-US" sz="1050" dirty="0"/>
           </a:p>
@@ -8632,10 +8508,6 @@
             </a:outerShdw>
           </a:effectLst>
         </p:spPr>
-        <p:txBody>
-          <a:bodyPr/>
-          <a:p/>
-        </p:txBody>
       </p:sp>
       <p:sp>
         <p:nvSpPr>
@@ -8782,10 +8654,6 @@
             </a:outerShdw>
           </a:effectLst>
         </p:spPr>
-        <p:txBody>
-          <a:bodyPr/>
-          <a:p/>
-        </p:txBody>
       </p:sp>
       <p:sp>
         <p:nvSpPr>
@@ -8932,10 +8800,6 @@
             </a:outerShdw>
           </a:effectLst>
         </p:spPr>
-        <p:txBody>
-          <a:bodyPr/>
-          <a:p/>
-        </p:txBody>
       </p:sp>
       <p:sp>
         <p:nvSpPr>
@@ -9082,10 +8946,6 @@
             </a:outerShdw>
           </a:effectLst>
         </p:spPr>
-        <p:txBody>
-          <a:bodyPr/>
-          <a:p/>
-        </p:txBody>
       </p:sp>
       <p:sp>
         <p:nvSpPr>
@@ -9232,10 +9092,6 @@
             </a:outerShdw>
           </a:effectLst>
         </p:spPr>
-        <p:txBody>
-          <a:bodyPr/>
-          <a:p/>
-        </p:txBody>
       </p:sp>
       <p:sp>
         <p:nvSpPr>
@@ -9382,10 +9238,6 @@
             </a:outerShdw>
           </a:effectLst>
         </p:spPr>
-        <p:txBody>
-          <a:bodyPr/>
-          <a:p/>
-        </p:txBody>
       </p:sp>
       <p:sp>
         <p:nvSpPr>
@@ -9594,10 +9446,6 @@
           </a:solidFill>
           <a:ln/>
         </p:spPr>
-        <p:txBody>
-          <a:bodyPr/>
-          <a:p/>
-        </p:txBody>
       </p:sp>
       <p:sp>
         <p:nvSpPr>
@@ -9749,7 +9597,7 @@
                 <a:ea typeface="微软雅黑" pitchFamily="34" charset="-122"/>
                 <a:cs typeface="微软雅黑" pitchFamily="34" charset="-120"/>
               </a:rPr>
-              <a:t>帮扶管理信息系统 v1.12.0</a:t>
+              <a:t>帮扶管理信息系统 v1.12.8</a:t>
             </a:r>
             <a:endParaRPr lang="en-US" sz="1050" dirty="0"/>
           </a:p>
@@ -9783,10 +9631,6 @@
             </a:outerShdw>
           </a:effectLst>
         </p:spPr>
-        <p:txBody>
-          <a:bodyPr/>
-          <a:p/>
-        </p:txBody>
       </p:sp>
       <p:sp>
         <p:nvSpPr>
@@ -9982,10 +9826,6 @@
             </a:outerShdw>
           </a:effectLst>
         </p:spPr>
-        <p:txBody>
-          <a:bodyPr/>
-          <a:p/>
-        </p:txBody>
       </p:sp>
       <p:sp>
         <p:nvSpPr>
@@ -10204,10 +10044,6 @@
           </a:solidFill>
           <a:ln/>
         </p:spPr>
-        <p:txBody>
-          <a:bodyPr/>
-          <a:p/>
-        </p:txBody>
       </p:sp>
       <p:sp>
         <p:nvSpPr>
@@ -10359,7 +10195,7 @@
                 <a:ea typeface="微软雅黑" pitchFamily="34" charset="-122"/>
                 <a:cs typeface="微软雅黑" pitchFamily="34" charset="-120"/>
               </a:rPr>
-              <a:t>帮扶管理信息系统 v1.12.0</a:t>
+              <a:t>帮扶管理信息系统 v1.12.8</a:t>
             </a:r>
             <a:endParaRPr lang="en-US" sz="1050" dirty="0"/>
           </a:p>
@@ -10386,10 +10222,6 @@
           </a:solidFill>
           <a:ln/>
         </p:spPr>
-        <p:txBody>
-          <a:bodyPr/>
-          <a:p/>
-        </p:txBody>
       </p:sp>
       <p:sp>
         <p:nvSpPr>
@@ -10451,10 +10283,6 @@
           </a:solidFill>
           <a:ln/>
         </p:spPr>
-        <p:txBody>
-          <a:bodyPr/>
-          <a:p/>
-        </p:txBody>
       </p:sp>
       <p:sp>
         <p:nvSpPr>
@@ -10516,10 +10344,6 @@
           </a:solidFill>
           <a:ln/>
         </p:spPr>
-        <p:txBody>
-          <a:bodyPr/>
-          <a:p/>
-        </p:txBody>
       </p:sp>
       <p:sp>
         <p:nvSpPr>
@@ -10581,10 +10405,6 @@
           </a:solidFill>
           <a:ln/>
         </p:spPr>
-        <p:txBody>
-          <a:bodyPr/>
-          <a:p/>
-        </p:txBody>
       </p:sp>
       <p:sp>
         <p:nvSpPr>
@@ -10646,10 +10466,6 @@
           </a:solidFill>
           <a:ln/>
         </p:spPr>
-        <p:txBody>
-          <a:bodyPr/>
-          <a:p/>
-        </p:txBody>
       </p:sp>
       <p:sp>
         <p:nvSpPr>
@@ -10711,10 +10527,6 @@
           </a:solidFill>
           <a:ln/>
         </p:spPr>
-        <p:txBody>
-          <a:bodyPr/>
-          <a:p/>
-        </p:txBody>
       </p:sp>
       <p:sp>
         <p:nvSpPr>
@@ -10776,10 +10588,6 @@
           </a:solidFill>
           <a:ln/>
         </p:spPr>
-        <p:txBody>
-          <a:bodyPr/>
-          <a:p/>
-        </p:txBody>
       </p:sp>
       <p:sp>
         <p:nvSpPr>
@@ -10841,10 +10649,6 @@
           </a:solidFill>
           <a:ln/>
         </p:spPr>
-        <p:txBody>
-          <a:bodyPr/>
-          <a:p/>
-        </p:txBody>
       </p:sp>
       <p:sp>
         <p:nvSpPr>
@@ -11042,10 +10846,6 @@
           </a:solidFill>
           <a:ln/>
         </p:spPr>
-        <p:txBody>
-          <a:bodyPr/>
-          <a:p/>
-        </p:txBody>
       </p:sp>
       <p:sp>
         <p:nvSpPr>
@@ -11197,7 +10997,7 @@
                 <a:ea typeface="微软雅黑" pitchFamily="34" charset="-122"/>
                 <a:cs typeface="微软雅黑" pitchFamily="34" charset="-120"/>
               </a:rPr>
-              <a:t>帮扶管理信息系统 v1.12.0</a:t>
+              <a:t>帮扶管理信息系统 v1.12.8</a:t>
             </a:r>
             <a:endParaRPr lang="en-US" sz="1050" dirty="0"/>
           </a:p>
@@ -11222,10 +11022,6 @@
           </a:solidFill>
           <a:ln/>
         </p:spPr>
-        <p:txBody>
-          <a:bodyPr/>
-          <a:p/>
-        </p:txBody>
       </p:sp>
       <p:sp>
         <p:nvSpPr>
@@ -11285,10 +11081,6 @@
           </a:solidFill>
           <a:ln/>
         </p:spPr>
-        <p:txBody>
-          <a:bodyPr/>
-          <a:p/>
-        </p:txBody>
       </p:sp>
       <p:sp>
         <p:nvSpPr>
@@ -11348,10 +11140,6 @@
           </a:solidFill>
           <a:ln/>
         </p:spPr>
-        <p:txBody>
-          <a:bodyPr/>
-          <a:p/>
-        </p:txBody>
       </p:sp>
       <p:sp>
         <p:nvSpPr>
@@ -11411,10 +11199,6 @@
           </a:solidFill>
           <a:ln/>
         </p:spPr>
-        <p:txBody>
-          <a:bodyPr/>
-          <a:p/>
-        </p:txBody>
       </p:sp>
       <p:sp>
         <p:nvSpPr>
@@ -11474,10 +11258,6 @@
           </a:solidFill>
           <a:ln/>
         </p:spPr>
-        <p:txBody>
-          <a:bodyPr/>
-          <a:p/>
-        </p:txBody>
       </p:sp>
       <p:sp>
         <p:nvSpPr>
@@ -11537,10 +11317,6 @@
           </a:solidFill>
           <a:ln/>
         </p:spPr>
-        <p:txBody>
-          <a:bodyPr/>
-          <a:p/>
-        </p:txBody>
       </p:sp>
       <p:sp>
         <p:nvSpPr>
@@ -11759,10 +11535,6 @@
           </a:solidFill>
           <a:ln/>
         </p:spPr>
-        <p:txBody>
-          <a:bodyPr/>
-          <a:p/>
-        </p:txBody>
       </p:sp>
       <p:sp>
         <p:nvSpPr>
@@ -11914,7 +11686,7 @@
                 <a:ea typeface="微软雅黑" pitchFamily="34" charset="-122"/>
                 <a:cs typeface="微软雅黑" pitchFamily="34" charset="-120"/>
               </a:rPr>
-              <a:t>帮扶管理信息系统 v1.12.0</a:t>
+              <a:t>帮扶管理信息系统 v1.12.8</a:t>
             </a:r>
             <a:endParaRPr lang="en-US" sz="1050" dirty="0"/>
           </a:p>
@@ -11939,10 +11711,6 @@
           </a:solidFill>
           <a:ln/>
         </p:spPr>
-        <p:txBody>
-          <a:bodyPr/>
-          <a:p/>
-        </p:txBody>
       </p:sp>
       <p:sp>
         <p:nvSpPr>
@@ -12045,10 +11813,6 @@
             <a:tailEnd type="triangle"/>
           </a:ln>
         </p:spPr>
-        <p:txBody>
-          <a:bodyPr/>
-          <a:p/>
-        </p:txBody>
       </p:sp>
       <p:sp>
         <p:nvSpPr>
@@ -12069,10 +11833,6 @@
           </a:solidFill>
           <a:ln/>
         </p:spPr>
-        <p:txBody>
-          <a:bodyPr/>
-          <a:p/>
-        </p:txBody>
       </p:sp>
       <p:sp>
         <p:nvSpPr>
@@ -12175,10 +11935,6 @@
             <a:tailEnd type="triangle"/>
           </a:ln>
         </p:spPr>
-        <p:txBody>
-          <a:bodyPr/>
-          <a:p/>
-        </p:txBody>
       </p:sp>
       <p:sp>
         <p:nvSpPr>
@@ -12199,10 +11955,6 @@
           </a:solidFill>
           <a:ln/>
         </p:spPr>
-        <p:txBody>
-          <a:bodyPr/>
-          <a:p/>
-        </p:txBody>
       </p:sp>
       <p:sp>
         <p:nvSpPr>
@@ -12305,10 +12057,6 @@
             <a:tailEnd type="triangle"/>
           </a:ln>
         </p:spPr>
-        <p:txBody>
-          <a:bodyPr/>
-          <a:p/>
-        </p:txBody>
       </p:sp>
       <p:sp>
         <p:nvSpPr>
@@ -12329,10 +12077,6 @@
           </a:solidFill>
           <a:ln/>
         </p:spPr>
-        <p:txBody>
-          <a:bodyPr/>
-          <a:p/>
-        </p:txBody>
       </p:sp>
       <p:sp>
         <p:nvSpPr>
@@ -12435,10 +12179,6 @@
             <a:tailEnd type="triangle"/>
           </a:ln>
         </p:spPr>
-        <p:txBody>
-          <a:bodyPr/>
-          <a:p/>
-        </p:txBody>
       </p:sp>
       <p:sp>
         <p:nvSpPr>
@@ -12459,10 +12199,6 @@
           </a:solidFill>
           <a:ln/>
         </p:spPr>
-        <p:txBody>
-          <a:bodyPr/>
-          <a:p/>
-        </p:txBody>
       </p:sp>
       <p:sp>
         <p:nvSpPr>
@@ -12565,10 +12301,6 @@
             <a:tailEnd type="triangle"/>
           </a:ln>
         </p:spPr>
-        <p:txBody>
-          <a:bodyPr/>
-          <a:p/>
-        </p:txBody>
       </p:sp>
       <p:sp>
         <p:nvSpPr>
@@ -12589,10 +12321,6 @@
           </a:solidFill>
           <a:ln/>
         </p:spPr>
-        <p:txBody>
-          <a:bodyPr/>
-          <a:p/>
-        </p:txBody>
       </p:sp>
       <p:sp>
         <p:nvSpPr>
@@ -12695,10 +12423,6 @@
             <a:tailEnd type="triangle"/>
           </a:ln>
         </p:spPr>
-        <p:txBody>
-          <a:bodyPr/>
-          <a:p/>
-        </p:txBody>
       </p:sp>
       <p:sp>
         <p:nvSpPr>
@@ -12719,10 +12443,6 @@
           </a:solidFill>
           <a:ln/>
         </p:spPr>
-        <p:txBody>
-          <a:bodyPr/>
-          <a:p/>
-        </p:txBody>
       </p:sp>
       <p:sp>
         <p:nvSpPr>
@@ -12825,10 +12545,6 @@
             <a:tailEnd type="triangle"/>
           </a:ln>
         </p:spPr>
-        <p:txBody>
-          <a:bodyPr/>
-          <a:p/>
-        </p:txBody>
       </p:sp>
       <p:sp>
         <p:nvSpPr>
@@ -12849,10 +12565,6 @@
           </a:solidFill>
           <a:ln/>
         </p:spPr>
-        <p:txBody>
-          <a:bodyPr/>
-          <a:p/>
-        </p:txBody>
       </p:sp>
       <p:sp>
         <p:nvSpPr>
@@ -12960,10 +12672,6 @@
             </a:outerShdw>
           </a:effectLst>
         </p:spPr>
-        <p:txBody>
-          <a:bodyPr/>
-          <a:p/>
-        </p:txBody>
       </p:sp>
       <p:sp>
         <p:nvSpPr>
@@ -13117,10 +12825,6 @@
             </a:outerShdw>
           </a:effectLst>
         </p:spPr>
-        <p:txBody>
-          <a:bodyPr/>
-          <a:p/>
-        </p:txBody>
       </p:sp>
       <p:sp>
         <p:nvSpPr>
@@ -13377,10 +13081,6 @@
           </a:solidFill>
           <a:ln/>
         </p:spPr>
-        <p:txBody>
-          <a:bodyPr/>
-          <a:p/>
-        </p:txBody>
       </p:sp>
       <p:sp>
         <p:nvSpPr>
@@ -13520,10 +13220,6 @@
           </a:solidFill>
           <a:ln/>
         </p:spPr>
-        <p:txBody>
-          <a:bodyPr/>
-          <a:p/>
-        </p:txBody>
       </p:sp>
       <p:sp>
         <p:nvSpPr>
@@ -13663,10 +13359,6 @@
           </a:solidFill>
           <a:ln/>
         </p:spPr>
-        <p:txBody>
-          <a:bodyPr/>
-          <a:p/>
-        </p:txBody>
       </p:sp>
       <p:sp>
         <p:nvSpPr>
@@ -13806,10 +13498,6 @@
           </a:solidFill>
           <a:ln/>
         </p:spPr>
-        <p:txBody>
-          <a:bodyPr/>
-          <a:p/>
-        </p:txBody>
       </p:sp>
       <p:sp>
         <p:nvSpPr>
@@ -13949,10 +13637,6 @@
           </a:solidFill>
           <a:ln/>
         </p:spPr>
-        <p:txBody>
-          <a:bodyPr/>
-          <a:p/>
-        </p:txBody>
       </p:sp>
       <p:sp>
         <p:nvSpPr>
@@ -14092,10 +13776,6 @@
           </a:solidFill>
           <a:ln/>
         </p:spPr>
-        <p:txBody>
-          <a:bodyPr/>
-          <a:p/>
-        </p:txBody>
       </p:sp>
       <p:sp>
         <p:nvSpPr>
@@ -14265,10 +13945,6 @@
           </a:solidFill>
           <a:ln/>
         </p:spPr>
-        <p:txBody>
-          <a:bodyPr/>
-          <a:p/>
-        </p:txBody>
       </p:sp>
       <p:sp>
         <p:nvSpPr>
@@ -14420,7 +14096,7 @@
                 <a:ea typeface="微软雅黑" pitchFamily="34" charset="-122"/>
                 <a:cs typeface="微软雅黑" pitchFamily="34" charset="-120"/>
               </a:rPr>
-              <a:t>帮扶管理信息系统 v1.12.0</a:t>
+              <a:t>帮扶管理信息系统 v1.12.8</a:t>
             </a:r>
             <a:endParaRPr lang="en-US" sz="1050" dirty="0"/>
           </a:p>
@@ -14454,10 +14130,6 @@
             </a:outerShdw>
           </a:effectLst>
         </p:spPr>
-        <p:txBody>
-          <a:bodyPr/>
-          <a:p/>
-        </p:txBody>
       </p:sp>
       <p:sp>
         <p:nvSpPr>
@@ -14653,10 +14325,6 @@
             </a:outerShdw>
           </a:effectLst>
         </p:spPr>
-        <p:txBody>
-          <a:bodyPr/>
-          <a:p/>
-        </p:txBody>
       </p:sp>
       <p:sp>
         <p:nvSpPr>
@@ -14875,10 +14543,6 @@
           </a:solidFill>
           <a:ln/>
         </p:spPr>
-        <p:txBody>
-          <a:bodyPr/>
-          <a:p/>
-        </p:txBody>
       </p:sp>
       <p:sp>
         <p:nvSpPr>
@@ -15030,7 +14694,7 @@
                 <a:ea typeface="微软雅黑" pitchFamily="34" charset="-122"/>
                 <a:cs typeface="微软雅黑" pitchFamily="34" charset="-120"/>
               </a:rPr>
-              <a:t>帮扶管理信息系统 v1.12.0</a:t>
+              <a:t>帮扶管理信息系统 v1.12.8</a:t>
             </a:r>
             <a:endParaRPr lang="en-US" sz="1050" dirty="0"/>
           </a:p>
@@ -15055,10 +14719,6 @@
           </a:solidFill>
           <a:ln/>
         </p:spPr>
-        <p:txBody>
-          <a:bodyPr/>
-          <a:p/>
-        </p:txBody>
       </p:sp>
       <p:sp>
         <p:nvSpPr>
@@ -15118,10 +14778,6 @@
           </a:solidFill>
           <a:ln/>
         </p:spPr>
-        <p:txBody>
-          <a:bodyPr/>
-          <a:p/>
-        </p:txBody>
       </p:sp>
       <p:sp>
         <p:nvSpPr>
@@ -15181,10 +14837,6 @@
           </a:solidFill>
           <a:ln/>
         </p:spPr>
-        <p:txBody>
-          <a:bodyPr/>
-          <a:p/>
-        </p:txBody>
       </p:sp>
       <p:sp>
         <p:nvSpPr>
@@ -15244,10 +14896,6 @@
           </a:solidFill>
           <a:ln/>
         </p:spPr>
-        <p:txBody>
-          <a:bodyPr/>
-          <a:p/>
-        </p:txBody>
       </p:sp>
       <p:sp>
         <p:nvSpPr>
@@ -15307,10 +14955,6 @@
           </a:solidFill>
           <a:ln/>
         </p:spPr>
-        <p:txBody>
-          <a:bodyPr/>
-          <a:p/>
-        </p:txBody>
       </p:sp>
       <p:sp>
         <p:nvSpPr>
@@ -15529,10 +15173,6 @@
           </a:solidFill>
           <a:ln/>
         </p:spPr>
-        <p:txBody>
-          <a:bodyPr/>
-          <a:p/>
-        </p:txBody>
       </p:sp>
       <p:sp>
         <p:nvSpPr>
@@ -15684,7 +15324,7 @@
                 <a:ea typeface="微软雅黑" pitchFamily="34" charset="-122"/>
                 <a:cs typeface="微软雅黑" pitchFamily="34" charset="-120"/>
               </a:rPr>
-              <a:t>帮扶管理信息系统 v1.12.0</a:t>
+              <a:t>帮扶管理信息系统 v1.12.8</a:t>
             </a:r>
             <a:endParaRPr lang="en-US" sz="1050" dirty="0"/>
           </a:p>
@@ -15718,10 +15358,6 @@
             </a:outerShdw>
           </a:effectLst>
         </p:spPr>
-        <p:txBody>
-          <a:bodyPr/>
-          <a:p/>
-        </p:txBody>
       </p:sp>
       <p:sp>
         <p:nvSpPr>
@@ -15896,10 +15532,6 @@
             </a:outerShdw>
           </a:effectLst>
         </p:spPr>
-        <p:txBody>
-          <a:bodyPr/>
-          <a:p/>
-        </p:txBody>
       </p:sp>
       <p:sp>
         <p:nvSpPr>
@@ -16074,10 +15706,6 @@
             </a:outerShdw>
           </a:effectLst>
         </p:spPr>
-        <p:txBody>
-          <a:bodyPr/>
-          <a:p/>
-        </p:txBody>
       </p:sp>
       <p:sp>
         <p:nvSpPr>
@@ -16208,10 +15836,6 @@
           </a:solidFill>
           <a:ln/>
         </p:spPr>
-        <p:txBody>
-          <a:bodyPr/>
-          <a:p/>
-        </p:txBody>
       </p:sp>
       <p:sp>
         <p:nvSpPr>
@@ -16363,7 +15987,7 @@
                 <a:ea typeface="微软雅黑" pitchFamily="34" charset="-122"/>
                 <a:cs typeface="微软雅黑" pitchFamily="34" charset="-120"/>
               </a:rPr>
-              <a:t>帮扶管理信息系统 v1.12.0</a:t>
+              <a:t>帮扶管理信息系统 v1.12.8</a:t>
             </a:r>
             <a:endParaRPr lang="en-US" sz="1050" dirty="0"/>
           </a:p>
@@ -16397,10 +16021,6 @@
             </a:outerShdw>
           </a:effectLst>
         </p:spPr>
-        <p:txBody>
-          <a:bodyPr/>
-          <a:p/>
-        </p:txBody>
       </p:sp>
       <p:sp>
         <p:nvSpPr>
@@ -16508,10 +16128,6 @@
             </a:outerShdw>
           </a:effectLst>
         </p:spPr>
-        <p:txBody>
-          <a:bodyPr/>
-          <a:p/>
-        </p:txBody>
       </p:sp>
       <p:sp>
         <p:nvSpPr>
@@ -16619,10 +16235,6 @@
             </a:outerShdw>
           </a:effectLst>
         </p:spPr>
-        <p:txBody>
-          <a:bodyPr/>
-          <a:p/>
-        </p:txBody>
       </p:sp>
       <p:sp>
         <p:nvSpPr>
@@ -16730,10 +16342,6 @@
             </a:outerShdw>
           </a:effectLst>
         </p:spPr>
-        <p:txBody>
-          <a:bodyPr/>
-          <a:p/>
-        </p:txBody>
       </p:sp>
       <p:sp>
         <p:nvSpPr>
@@ -16841,10 +16449,6 @@
             </a:outerShdw>
           </a:effectLst>
         </p:spPr>
-        <p:txBody>
-          <a:bodyPr/>
-          <a:p/>
-        </p:txBody>
       </p:sp>
       <p:sp>
         <p:nvSpPr>
@@ -16952,10 +16556,6 @@
             </a:outerShdw>
           </a:effectLst>
         </p:spPr>
-        <p:txBody>
-          <a:bodyPr/>
-          <a:p/>
-        </p:txBody>
       </p:sp>
       <p:sp>
         <p:nvSpPr>
@@ -17086,10 +16686,6 @@
           </a:solidFill>
           <a:ln/>
         </p:spPr>
-        <p:txBody>
-          <a:bodyPr/>
-          <a:p/>
-        </p:txBody>
       </p:sp>
       <p:sp>
         <p:nvSpPr>
@@ -17241,7 +16837,7 @@
                 <a:ea typeface="微软雅黑" pitchFamily="34" charset="-122"/>
                 <a:cs typeface="微软雅黑" pitchFamily="34" charset="-120"/>
               </a:rPr>
-              <a:t>帮扶管理信息系统 v1.12.0</a:t>
+              <a:t>帮扶管理信息系统 v1.12.8</a:t>
             </a:r>
             <a:endParaRPr lang="en-US" sz="1050" dirty="0"/>
           </a:p>
@@ -17275,10 +16871,6 @@
             </a:outerShdw>
           </a:effectLst>
         </p:spPr>
-        <p:txBody>
-          <a:bodyPr/>
-          <a:p/>
-        </p:txBody>
       </p:sp>
       <p:sp>
         <p:nvSpPr>
@@ -17386,10 +16978,6 @@
             </a:outerShdw>
           </a:effectLst>
         </p:spPr>
-        <p:txBody>
-          <a:bodyPr/>
-          <a:p/>
-        </p:txBody>
       </p:sp>
       <p:sp>
         <p:nvSpPr>
@@ -17497,10 +17085,6 @@
             </a:outerShdw>
           </a:effectLst>
         </p:spPr>
-        <p:txBody>
-          <a:bodyPr/>
-          <a:p/>
-        </p:txBody>
       </p:sp>
       <p:sp>
         <p:nvSpPr>
@@ -17608,10 +17192,6 @@
             </a:outerShdw>
           </a:effectLst>
         </p:spPr>
-        <p:txBody>
-          <a:bodyPr/>
-          <a:p/>
-        </p:txBody>
       </p:sp>
       <p:sp>
         <p:nvSpPr>
@@ -17719,10 +17299,6 @@
             </a:outerShdw>
           </a:effectLst>
         </p:spPr>
-        <p:txBody>
-          <a:bodyPr/>
-          <a:p/>
-        </p:txBody>
       </p:sp>
       <p:sp>
         <p:nvSpPr>
@@ -17830,10 +17406,6 @@
             </a:outerShdw>
           </a:effectLst>
         </p:spPr>
-        <p:txBody>
-          <a:bodyPr/>
-          <a:p/>
-        </p:txBody>
       </p:sp>
       <p:sp>
         <p:nvSpPr>
@@ -18258,10 +17830,6 @@
           </a:solidFill>
           <a:ln/>
         </p:spPr>
-        <p:txBody>
-          <a:bodyPr/>
-          <a:p/>
-        </p:txBody>
       </p:sp>
       <p:sp>
         <p:nvSpPr>
@@ -18413,7 +17981,7 @@
                 <a:ea typeface="微软雅黑" pitchFamily="34" charset="-122"/>
                 <a:cs typeface="微软雅黑" pitchFamily="34" charset="-120"/>
               </a:rPr>
-              <a:t>帮扶管理信息系统 v1.12.0</a:t>
+              <a:t>帮扶管理信息系统 v1.12.8</a:t>
             </a:r>
             <a:endParaRPr lang="en-US" sz="1050" dirty="0"/>
           </a:p>
@@ -18447,10 +18015,6 @@
             </a:outerShdw>
           </a:effectLst>
         </p:spPr>
-        <p:txBody>
-          <a:bodyPr/>
-          <a:p/>
-        </p:txBody>
       </p:sp>
       <p:sp>
         <p:nvSpPr>
@@ -18473,10 +18037,6 @@
           </a:solidFill>
           <a:ln/>
         </p:spPr>
-        <p:txBody>
-          <a:bodyPr/>
-          <a:p/>
-        </p:txBody>
       </p:sp>
       <p:sp>
         <p:nvSpPr>
@@ -18623,10 +18183,6 @@
             </a:outerShdw>
           </a:effectLst>
         </p:spPr>
-        <p:txBody>
-          <a:bodyPr/>
-          <a:p/>
-        </p:txBody>
       </p:sp>
       <p:sp>
         <p:nvSpPr>
@@ -18649,10 +18205,6 @@
           </a:solidFill>
           <a:ln/>
         </p:spPr>
-        <p:txBody>
-          <a:bodyPr/>
-          <a:p/>
-        </p:txBody>
       </p:sp>
       <p:sp>
         <p:nvSpPr>
@@ -18799,10 +18351,6 @@
             </a:outerShdw>
           </a:effectLst>
         </p:spPr>
-        <p:txBody>
-          <a:bodyPr/>
-          <a:p/>
-        </p:txBody>
       </p:sp>
       <p:sp>
         <p:nvSpPr>
@@ -18825,10 +18373,6 @@
           </a:solidFill>
           <a:ln/>
         </p:spPr>
-        <p:txBody>
-          <a:bodyPr/>
-          <a:p/>
-        </p:txBody>
       </p:sp>
       <p:sp>
         <p:nvSpPr>
@@ -18975,10 +18519,6 @@
             </a:outerShdw>
           </a:effectLst>
         </p:spPr>
-        <p:txBody>
-          <a:bodyPr/>
-          <a:p/>
-        </p:txBody>
       </p:sp>
       <p:sp>
         <p:nvSpPr>
@@ -19001,10 +18541,6 @@
           </a:solidFill>
           <a:ln/>
         </p:spPr>
-        <p:txBody>
-          <a:bodyPr/>
-          <a:p/>
-        </p:txBody>
       </p:sp>
       <p:sp>
         <p:nvSpPr>
@@ -19259,10 +18795,6 @@
           </a:solidFill>
           <a:ln/>
         </p:spPr>
-        <p:txBody>
-          <a:bodyPr/>
-          <a:p/>
-        </p:txBody>
       </p:sp>
       <p:sp>
         <p:nvSpPr>
@@ -19414,7 +18946,7 @@
                 <a:ea typeface="微软雅黑" pitchFamily="34" charset="-122"/>
                 <a:cs typeface="微软雅黑" pitchFamily="34" charset="-120"/>
               </a:rPr>
-              <a:t>帮扶管理信息系统 v1.12.0</a:t>
+              <a:t>帮扶管理信息系统 v1.12.8</a:t>
             </a:r>
             <a:endParaRPr lang="en-US" sz="1050" dirty="0"/>
           </a:p>
@@ -19448,10 +18980,6 @@
             </a:outerShdw>
           </a:effectLst>
         </p:spPr>
-        <p:txBody>
-          <a:bodyPr/>
-          <a:p/>
-        </p:txBody>
       </p:sp>
       <p:sp>
         <p:nvSpPr>
@@ -19598,10 +19126,6 @@
             </a:outerShdw>
           </a:effectLst>
         </p:spPr>
-        <p:txBody>
-          <a:bodyPr/>
-          <a:p/>
-        </p:txBody>
       </p:sp>
       <p:sp>
         <p:nvSpPr>
@@ -19748,10 +19272,6 @@
             </a:outerShdw>
           </a:effectLst>
         </p:spPr>
-        <p:txBody>
-          <a:bodyPr/>
-          <a:p/>
-        </p:txBody>
       </p:sp>
       <p:sp>
         <p:nvSpPr>
@@ -19898,10 +19418,6 @@
             </a:outerShdw>
           </a:effectLst>
         </p:spPr>
-        <p:txBody>
-          <a:bodyPr/>
-          <a:p/>
-        </p:txBody>
       </p:sp>
       <p:sp>
         <p:nvSpPr>
@@ -20078,10 +19594,6 @@
           </a:solidFill>
           <a:ln/>
         </p:spPr>
-        <p:txBody>
-          <a:bodyPr/>
-          <a:p/>
-        </p:txBody>
       </p:sp>
       <p:sp>
         <p:nvSpPr>
@@ -20233,7 +19745,7 @@
                 <a:ea typeface="微软雅黑" pitchFamily="34" charset="-122"/>
                 <a:cs typeface="微软雅黑" pitchFamily="34" charset="-120"/>
               </a:rPr>
-              <a:t>帮扶管理信息系统 v1.12.0</a:t>
+              <a:t>帮扶管理信息系统 v1.12.8</a:t>
             </a:r>
             <a:endParaRPr lang="en-US" sz="1050" dirty="0"/>
           </a:p>
@@ -20267,10 +19779,6 @@
             </a:outerShdw>
           </a:effectLst>
         </p:spPr>
-        <p:txBody>
-          <a:bodyPr/>
-          <a:p/>
-        </p:txBody>
       </p:sp>
       <p:sp>
         <p:nvSpPr>
@@ -20332,10 +19840,6 @@
           </a:solidFill>
           <a:ln/>
         </p:spPr>
-        <p:txBody>
-          <a:bodyPr/>
-          <a:p/>
-        </p:txBody>
       </p:sp>
       <p:sp>
         <p:nvSpPr>
@@ -20399,10 +19903,6 @@
             <a:tailEnd type="triangle"/>
           </a:ln>
         </p:spPr>
-        <p:txBody>
-          <a:bodyPr/>
-          <a:p/>
-        </p:txBody>
       </p:sp>
       <p:sp>
         <p:nvSpPr>
@@ -20425,10 +19925,6 @@
           </a:solidFill>
           <a:ln/>
         </p:spPr>
-        <p:txBody>
-          <a:bodyPr/>
-          <a:p/>
-        </p:txBody>
       </p:sp>
       <p:sp>
         <p:nvSpPr>
@@ -20492,10 +19988,6 @@
             <a:tailEnd type="triangle"/>
           </a:ln>
         </p:spPr>
-        <p:txBody>
-          <a:bodyPr/>
-          <a:p/>
-        </p:txBody>
       </p:sp>
       <p:sp>
         <p:nvSpPr>
@@ -20518,10 +20010,6 @@
           </a:solidFill>
           <a:ln/>
         </p:spPr>
-        <p:txBody>
-          <a:bodyPr/>
-          <a:p/>
-        </p:txBody>
       </p:sp>
       <p:sp>
         <p:nvSpPr>
@@ -20654,10 +20142,6 @@
             </a:outerShdw>
           </a:effectLst>
         </p:spPr>
-        <p:txBody>
-          <a:bodyPr/>
-          <a:p/>
-        </p:txBody>
       </p:sp>
       <p:sp>
         <p:nvSpPr>
@@ -20832,10 +20316,6 @@
             </a:outerShdw>
           </a:effectLst>
         </p:spPr>
-        <p:txBody>
-          <a:bodyPr/>
-          <a:p/>
-        </p:txBody>
       </p:sp>
       <p:sp>
         <p:nvSpPr>
@@ -20966,10 +20446,6 @@
           </a:solidFill>
           <a:ln/>
         </p:spPr>
-        <p:txBody>
-          <a:bodyPr/>
-          <a:p/>
-        </p:txBody>
       </p:sp>
       <p:sp>
         <p:nvSpPr>
@@ -21121,7 +20597,7 @@
                 <a:ea typeface="微软雅黑" pitchFamily="34" charset="-122"/>
                 <a:cs typeface="微软雅黑" pitchFamily="34" charset="-120"/>
               </a:rPr>
-              <a:t>帮扶管理信息系统 v1.12.0</a:t>
+              <a:t>帮扶管理信息系统 v1.12.8</a:t>
             </a:r>
             <a:endParaRPr lang="en-US" sz="1050" dirty="0"/>
           </a:p>
@@ -21146,10 +20622,6 @@
           </a:solidFill>
           <a:ln/>
         </p:spPr>
-        <p:txBody>
-          <a:bodyPr/>
-          <a:p/>
-        </p:txBody>
       </p:sp>
       <p:sp>
         <p:nvSpPr>
@@ -21248,10 +20720,6 @@
           </a:solidFill>
           <a:ln/>
         </p:spPr>
-        <p:txBody>
-          <a:bodyPr/>
-          <a:p/>
-        </p:txBody>
       </p:sp>
       <p:sp>
         <p:nvSpPr>
@@ -21350,10 +20818,6 @@
           </a:solidFill>
           <a:ln/>
         </p:spPr>
-        <p:txBody>
-          <a:bodyPr/>
-          <a:p/>
-        </p:txBody>
       </p:sp>
       <p:sp>
         <p:nvSpPr>
@@ -21452,10 +20916,6 @@
           </a:solidFill>
           <a:ln/>
         </p:spPr>
-        <p:txBody>
-          <a:bodyPr/>
-          <a:p/>
-        </p:txBody>
       </p:sp>
       <p:sp>
         <p:nvSpPr>
@@ -21554,10 +21014,6 @@
           </a:solidFill>
           <a:ln/>
         </p:spPr>
-        <p:txBody>
-          <a:bodyPr/>
-          <a:p/>
-        </p:txBody>
       </p:sp>
       <p:sp>
         <p:nvSpPr>
@@ -21656,10 +21112,6 @@
           </a:solidFill>
           <a:ln/>
         </p:spPr>
-        <p:txBody>
-          <a:bodyPr/>
-          <a:p/>
-        </p:txBody>
       </p:sp>
       <p:sp>
         <p:nvSpPr>
@@ -22084,10 +21536,6 @@
           </a:solidFill>
           <a:ln/>
         </p:spPr>
-        <p:txBody>
-          <a:bodyPr/>
-          <a:p/>
-        </p:txBody>
       </p:sp>
       <p:sp>
         <p:nvSpPr>
@@ -22239,7 +21687,7 @@
                 <a:ea typeface="微软雅黑" pitchFamily="34" charset="-122"/>
                 <a:cs typeface="微软雅黑" pitchFamily="34" charset="-120"/>
               </a:rPr>
-              <a:t>帮扶管理信息系统 v1.12.0</a:t>
+              <a:t>帮扶管理信息系统 v1.12.8</a:t>
             </a:r>
             <a:endParaRPr lang="en-US" sz="1050" dirty="0"/>
           </a:p>
@@ -22264,10 +21712,6 @@
           </a:solidFill>
           <a:ln/>
         </p:spPr>
-        <p:txBody>
-          <a:bodyPr/>
-          <a:p/>
-        </p:txBody>
       </p:sp>
       <p:sp>
         <p:nvSpPr>
@@ -22327,10 +21771,6 @@
           </a:solidFill>
           <a:ln/>
         </p:spPr>
-        <p:txBody>
-          <a:bodyPr/>
-          <a:p/>
-        </p:txBody>
       </p:sp>
       <p:sp>
         <p:nvSpPr>
@@ -22390,10 +21830,6 @@
           </a:solidFill>
           <a:ln/>
         </p:spPr>
-        <p:txBody>
-          <a:bodyPr/>
-          <a:p/>
-        </p:txBody>
       </p:sp>
       <p:sp>
         <p:nvSpPr>
@@ -22453,10 +21889,6 @@
           </a:solidFill>
           <a:ln/>
         </p:spPr>
-        <p:txBody>
-          <a:bodyPr/>
-          <a:p/>
-        </p:txBody>
       </p:sp>
       <p:sp>
         <p:nvSpPr>
@@ -22516,10 +21948,6 @@
           </a:solidFill>
           <a:ln/>
         </p:spPr>
-        <p:txBody>
-          <a:bodyPr/>
-          <a:p/>
-        </p:txBody>
       </p:sp>
       <p:sp>
         <p:nvSpPr>
@@ -23032,10 +22460,6 @@
           </a:solidFill>
           <a:ln/>
         </p:spPr>
-        <p:txBody>
-          <a:bodyPr/>
-          <a:p/>
-        </p:txBody>
       </p:sp>
       <p:sp>
         <p:nvSpPr>
@@ -23187,7 +22611,7 @@
                 <a:ea typeface="微软雅黑" pitchFamily="34" charset="-122"/>
                 <a:cs typeface="微软雅黑" pitchFamily="34" charset="-120"/>
               </a:rPr>
-              <a:t>帮扶管理信息系统 v1.12.0</a:t>
+              <a:t>帮扶管理信息系统 v1.12.8</a:t>
             </a:r>
             <a:endParaRPr lang="en-US" sz="1050" dirty="0"/>
           </a:p>
@@ -23242,7 +22666,7 @@
                 <a:ea typeface="微软雅黑" pitchFamily="34" charset="-122"/>
                 <a:cs typeface="微软雅黑" pitchFamily="34" charset="-120"/>
               </a:rPr>
-              <a:t>数据来源：v1.12.0 全量本地实测（2026-08-30）</a:t>
+              <a:t>数据来源：v1.11.2 全量本地实测（2026-08-30）</a:t>
             </a:r>
             <a:endParaRPr lang="en-US" sz="1100" dirty="0"/>
           </a:p>
@@ -23276,10 +22700,6 @@
             </a:outerShdw>
           </a:effectLst>
         </p:spPr>
-        <p:txBody>
-          <a:bodyPr/>
-          <a:p/>
-        </p:txBody>
       </p:sp>
       <p:sp>
         <p:nvSpPr>
@@ -23317,91 +22737,6 @@
               <a:t>测试纪律</a:t>
             </a:r>
             <a:endParaRPr lang="en-US" sz="1500" dirty="0"/>
-          </a:p>
-          <a:p>
-            <a:pPr indent="0" marL="0">
-              <a:buNone/>
-            </a:pPr>
-            <a:r>
-              <a:rPr lang="en-US" sz="1300" dirty="0">
-                <a:solidFill>
-                  <a:srgbClr val="5F6F66"/>
-                </a:solidFill>
-                <a:latin typeface="微软雅黑" pitchFamily="34" charset="0"/>
-                <a:ea typeface="微软雅黑" pitchFamily="34" charset="-122"/>
-                <a:cs typeface="微软雅黑" pitchFamily="34" charset="-120"/>
-              </a:rPr>
-              <a:t>后端覆盖率门禁 100%（可覆盖集口径，CI 硬阈值）</a:t>
-            </a:r>
-            <a:endParaRPr lang="en-US" sz="1300" dirty="0"/>
-          </a:p>
-          <a:p>
-            <a:pPr indent="0" marL="0">
-              <a:buNone/>
-            </a:pPr>
-            <a:r>
-              <a:rPr lang="en-US" sz="1300" dirty="0">
-                <a:solidFill>
-                  <a:srgbClr val="5F6F66"/>
-                </a:solidFill>
-                <a:latin typeface="微软雅黑" pitchFamily="34" charset="0"/>
-                <a:ea typeface="微软雅黑" pitchFamily="34" charset="-122"/>
-                <a:cs typeface="微软雅黑" pitchFamily="34" charset="-120"/>
-              </a:rPr>
-              <a:t>新增接口/页面必须配套测试（协作约定强制）</a:t>
-            </a:r>
-            <a:endParaRPr lang="en-US" sz="1300" dirty="0"/>
-          </a:p>
-          <a:p>
-            <a:pPr indent="0" marL="0">
-              <a:buNone/>
-            </a:pPr>
-            <a:r>
-              <a:rPr lang="en-US" sz="1300" dirty="0">
-                <a:solidFill>
-                  <a:srgbClr val="5F6F66"/>
-                </a:solidFill>
-                <a:latin typeface="微软雅黑" pitchFamily="34" charset="0"/>
-                <a:ea typeface="微软雅黑" pitchFamily="34" charset="-122"/>
-                <a:cs typeface="微软雅黑" pitchFamily="34" charset="-120"/>
-              </a:rPr>
-              <a:t>安全回归：限流签名 / loopback 门禁 / 错误不泄露 / PII 加密 / 组织守卫 均有专项锁定</a:t>
-            </a:r>
-            <a:endParaRPr lang="en-US" sz="1300" dirty="0"/>
-          </a:p>
-          <a:p>
-            <a:pPr indent="0" marL="0">
-              <a:buNone/>
-            </a:pPr>
-            <a:r>
-              <a:rPr lang="en-US" sz="1300" dirty="0">
-                <a:solidFill>
-                  <a:srgbClr val="5F6F66"/>
-                </a:solidFill>
-                <a:latin typeface="微软雅黑" pitchFamily="34" charset="0"/>
-                <a:ea typeface="微软雅黑" pitchFamily="34" charset="-122"/>
-                <a:cs typeface="微软雅黑" pitchFamily="34" charset="-120"/>
-              </a:rPr>
-              <a:t>深度探测循环：9 轮 252 项真实 HTTP 断言 + 150 项浏览器 E2E 入 CI 门禁，修复 9 个缺陷全部带回归锁定</a:t>
-            </a:r>
-            <a:endParaRPr lang="en-US" sz="1300" dirty="0"/>
-          </a:p>
-          <a:p>
-            <a:pPr indent="0" marL="0">
-              <a:buNone/>
-            </a:pPr>
-            <a:r>
-              <a:rPr lang="en-US" sz="1300" dirty="0">
-                <a:solidFill>
-                  <a:srgbClr val="5F6F66"/>
-                </a:solidFill>
-                <a:latin typeface="微软雅黑" pitchFamily="34" charset="0"/>
-                <a:ea typeface="微软雅黑" pitchFamily="34" charset="-122"/>
-                <a:cs typeface="微软雅黑" pitchFamily="34" charset="-120"/>
-              </a:rPr>
-              <a:t>前后端契约核对：334 个前端调用 0 断裂；已知 flaky 用例公开记录，不允许静默重试掩盖</a:t>
-            </a:r>
-            <a:endParaRPr lang="en-US" sz="1300" dirty="0"/>
           </a:p>
         </p:txBody>
       </p:sp>
@@ -23583,10 +22918,6 @@
           </a:solidFill>
           <a:ln/>
         </p:spPr>
-        <p:txBody>
-          <a:bodyPr/>
-          <a:p/>
-        </p:txBody>
       </p:sp>
       <p:sp>
         <p:nvSpPr>
@@ -23738,7 +23069,7 @@
                 <a:ea typeface="微软雅黑" pitchFamily="34" charset="-122"/>
                 <a:cs typeface="微软雅黑" pitchFamily="34" charset="-120"/>
               </a:rPr>
-              <a:t>帮扶管理信息系统 v1.12.0</a:t>
+              <a:t>帮扶管理信息系统 v1.12.8</a:t>
             </a:r>
             <a:endParaRPr lang="en-US" sz="1050" dirty="0"/>
           </a:p>
@@ -23765,10 +23096,6 @@
           </a:solidFill>
           <a:ln/>
         </p:spPr>
-        <p:txBody>
-          <a:bodyPr/>
-          <a:p/>
-        </p:txBody>
       </p:sp>
       <p:sp>
         <p:nvSpPr>
@@ -23842,7 +23169,7 @@
                 <a:ea typeface="微软雅黑" pitchFamily="34" charset="-122"/>
                 <a:cs typeface="微软雅黑" pitchFamily="34" charset="-120"/>
               </a:rPr>
-              <a:t>六 job：后端/前端/lint/安全/静态分析 + E2E 浏览器套件 150 用例</a:t>
+              <a:t>每次 PR：后端测试 + 前端测试 + flake8 + Codecov 覆盖率对比</a:t>
             </a:r>
             <a:endParaRPr lang="en-US" sz="1300" dirty="0"/>
           </a:p>
@@ -23869,10 +23196,6 @@
           </a:solidFill>
           <a:ln/>
         </p:spPr>
-        <p:txBody>
-          <a:bodyPr/>
-          <a:p/>
-        </p:txBody>
       </p:sp>
       <p:sp>
         <p:nvSpPr>
@@ -23973,10 +23296,6 @@
           </a:solidFill>
           <a:ln/>
         </p:spPr>
-        <p:txBody>
-          <a:bodyPr/>
-          <a:p/>
-        </p:txBody>
       </p:sp>
       <p:sp>
         <p:nvSpPr>
@@ -24077,10 +23396,6 @@
           </a:solidFill>
           <a:ln/>
         </p:spPr>
-        <p:txBody>
-          <a:bodyPr/>
-          <a:p/>
-        </p:txBody>
       </p:sp>
       <p:sp>
         <p:nvSpPr>
@@ -24250,10 +23565,6 @@
           </a:solidFill>
           <a:ln/>
         </p:spPr>
-        <p:txBody>
-          <a:bodyPr/>
-          <a:p/>
-        </p:txBody>
       </p:sp>
       <p:sp>
         <p:nvSpPr>
@@ -24405,7 +23716,7 @@
                 <a:ea typeface="微软雅黑" pitchFamily="34" charset="-122"/>
                 <a:cs typeface="微软雅黑" pitchFamily="34" charset="-120"/>
               </a:rPr>
-              <a:t>帮扶管理信息系统 v1.12.0</a:t>
+              <a:t>帮扶管理信息系统 v1.12.8</a:t>
             </a:r>
             <a:endParaRPr lang="en-US" sz="1050" dirty="0"/>
           </a:p>
@@ -24439,10 +23750,6 @@
             </a:outerShdw>
           </a:effectLst>
         </p:spPr>
-        <p:txBody>
-          <a:bodyPr/>
-          <a:p/>
-        </p:txBody>
       </p:sp>
       <p:sp>
         <p:nvSpPr>
@@ -24638,10 +23945,6 @@
             </a:outerShdw>
           </a:effectLst>
         </p:spPr>
-        <p:txBody>
-          <a:bodyPr/>
-          <a:p/>
-        </p:txBody>
       </p:sp>
       <p:sp>
         <p:nvSpPr>
@@ -25154,10 +24457,6 @@
           </a:solidFill>
           <a:ln/>
         </p:spPr>
-        <p:txBody>
-          <a:bodyPr/>
-          <a:p/>
-        </p:txBody>
       </p:sp>
       <p:sp>
         <p:nvSpPr>
@@ -25309,7 +24608,7 @@
                 <a:ea typeface="微软雅黑" pitchFamily="34" charset="-122"/>
                 <a:cs typeface="微软雅黑" pitchFamily="34" charset="-120"/>
               </a:rPr>
-              <a:t>帮扶管理信息系统 v1.12.0</a:t>
+              <a:t>帮扶管理信息系统 v1.12.8</a:t>
             </a:r>
             <a:endParaRPr lang="en-US" sz="1050" dirty="0"/>
           </a:p>
@@ -25343,10 +24642,6 @@
             </a:outerShdw>
           </a:effectLst>
         </p:spPr>
-        <p:txBody>
-          <a:bodyPr/>
-          <a:p/>
-        </p:txBody>
       </p:sp>
       <p:sp>
         <p:nvSpPr>
@@ -25408,10 +24703,6 @@
           </a:solidFill>
           <a:ln/>
         </p:spPr>
-        <p:txBody>
-          <a:bodyPr/>
-          <a:p/>
-        </p:txBody>
       </p:sp>
       <p:sp>
         <p:nvSpPr>
@@ -25614,10 +24905,6 @@
             </a:outerShdw>
           </a:effectLst>
         </p:spPr>
-        <p:txBody>
-          <a:bodyPr/>
-          <a:p/>
-        </p:txBody>
       </p:sp>
       <p:sp>
         <p:nvSpPr>
@@ -25679,10 +24966,6 @@
           </a:solidFill>
           <a:ln/>
         </p:spPr>
-        <p:txBody>
-          <a:bodyPr/>
-          <a:p/>
-        </p:txBody>
       </p:sp>
       <p:sp>
         <p:nvSpPr>
@@ -25885,10 +25168,6 @@
             </a:outerShdw>
           </a:effectLst>
         </p:spPr>
-        <p:txBody>
-          <a:bodyPr/>
-          <a:p/>
-        </p:txBody>
       </p:sp>
       <p:sp>
         <p:nvSpPr>
@@ -25950,10 +25229,6 @@
           </a:solidFill>
           <a:ln/>
         </p:spPr>
-        <p:txBody>
-          <a:bodyPr/>
-          <a:p/>
-        </p:txBody>
       </p:sp>
       <p:sp>
         <p:nvSpPr>
@@ -26218,10 +25493,6 @@
           </a:solidFill>
           <a:ln/>
         </p:spPr>
-        <p:txBody>
-          <a:bodyPr/>
-          <a:p/>
-        </p:txBody>
       </p:sp>
       <p:sp>
         <p:nvSpPr>
@@ -26373,7 +25644,7 @@
                 <a:ea typeface="微软雅黑" pitchFamily="34" charset="-122"/>
                 <a:cs typeface="微软雅黑" pitchFamily="34" charset="-120"/>
               </a:rPr>
-              <a:t>帮扶管理信息系统 v1.12.0</a:t>
+              <a:t>帮扶管理信息系统 v1.12.8</a:t>
             </a:r>
             <a:endParaRPr lang="en-US" sz="1050" dirty="0"/>
           </a:p>
@@ -26407,10 +25678,6 @@
             </a:outerShdw>
           </a:effectLst>
         </p:spPr>
-        <p:txBody>
-          <a:bodyPr/>
-          <a:p/>
-        </p:txBody>
       </p:sp>
       <p:sp>
         <p:nvSpPr>
@@ -26606,10 +25873,6 @@
             </a:outerShdw>
           </a:effectLst>
         </p:spPr>
-        <p:txBody>
-          <a:bodyPr/>
-          <a:p/>
-        </p:txBody>
       </p:sp>
       <p:sp>
         <p:nvSpPr>
@@ -26828,10 +26091,6 @@
           </a:solidFill>
           <a:ln/>
         </p:spPr>
-        <p:txBody>
-          <a:bodyPr/>
-          <a:p/>
-        </p:txBody>
       </p:sp>
       <p:sp>
         <p:nvSpPr>
@@ -26983,7 +26242,7 @@
                 <a:ea typeface="微软雅黑" pitchFamily="34" charset="-122"/>
                 <a:cs typeface="微软雅黑" pitchFamily="34" charset="-120"/>
               </a:rPr>
-              <a:t>帮扶管理信息系统 v1.12.0</a:t>
+              <a:t>帮扶管理信息系统 v1.12.8</a:t>
             </a:r>
             <a:endParaRPr lang="en-US" sz="1050" dirty="0"/>
           </a:p>
@@ -27011,10 +26270,6 @@
             <a:prstDash val="solid"/>
           </a:ln>
         </p:spPr>
-        <p:txBody>
-          <a:bodyPr/>
-          <a:p/>
-        </p:txBody>
       </p:sp>
       <p:sp>
         <p:nvSpPr>
@@ -27035,10 +26290,6 @@
           </a:solidFill>
           <a:ln/>
         </p:spPr>
-        <p:txBody>
-          <a:bodyPr/>
-          <a:p/>
-        </p:txBody>
       </p:sp>
       <p:sp>
         <p:nvSpPr>
@@ -27073,7 +26324,7 @@
                 <a:ea typeface="微软雅黑" pitchFamily="34" charset="-122"/>
                 <a:cs typeface="微软雅黑" pitchFamily="34" charset="-120"/>
               </a:rPr>
-              <a:t>v1.10.0</a:t>
+              <a:t>v1.11.2</a:t>
             </a:r>
             <a:endParaRPr lang="en-US" sz="1500" dirty="0"/>
           </a:p>
@@ -27112,7 +26363,7 @@
                 <a:ea typeface="微软雅黑" pitchFamily="34" charset="-122"/>
                 <a:cs typeface="微软雅黑" pitchFamily="34" charset="-120"/>
               </a:rPr>
-              <a:t>08-24</a:t>
+              <a:t>08-30</a:t>
             </a:r>
             <a:endParaRPr lang="en-US" sz="1100" dirty="0"/>
           </a:p>
@@ -27151,7 +26402,7 @@
                 <a:ea typeface="微软雅黑" pitchFamily="34" charset="-122"/>
                 <a:cs typeface="微软雅黑" pitchFamily="34" charset="-120"/>
               </a:rPr>
-              <a:t>全板块完善：假成功防线、经费流程、政策 FTS5</a:t>
+              <a:t>403 六类根因修复 + 弹窗裁切修复 + 5 个 500 端点</a:t>
             </a:r>
             <a:endParaRPr lang="en-US" sz="1150" dirty="0"/>
           </a:p>
@@ -27176,10 +26427,6 @@
           </a:solidFill>
           <a:ln/>
         </p:spPr>
-        <p:txBody>
-          <a:bodyPr/>
-          <a:p/>
-        </p:txBody>
       </p:sp>
       <p:sp>
         <p:nvSpPr>
@@ -27214,7 +26461,7 @@
                 <a:ea typeface="微软雅黑" pitchFamily="34" charset="-122"/>
                 <a:cs typeface="微软雅黑" pitchFamily="34" charset="-120"/>
               </a:rPr>
-              <a:t>v1.10.6</a:t>
+              <a:t>v1.12.2</a:t>
             </a:r>
             <a:endParaRPr lang="en-US" sz="1500" dirty="0"/>
           </a:p>
@@ -27253,7 +26500,7 @@
                 <a:ea typeface="微软雅黑" pitchFamily="34" charset="-122"/>
                 <a:cs typeface="微软雅黑" pitchFamily="34" charset="-120"/>
               </a:rPr>
-              <a:t>08-29</a:t>
+              <a:t>09-12</a:t>
             </a:r>
             <a:endParaRPr lang="en-US" sz="1100" dirty="0"/>
           </a:p>
@@ -27292,7 +26539,7 @@
                 <a:ea typeface="微软雅黑" pitchFamily="34" charset="-122"/>
                 <a:cs typeface="微软雅黑" pitchFamily="34" charset="-120"/>
               </a:rPr>
-              <a:t>死代码清理：净删 500+ 文件/5.5 万行，31 依赖精简</a:t>
+              <a:t>架构评估 P0/P1 加固：导出任务重启恢复、导出/备份原子写、备份可恢复性校验</a:t>
             </a:r>
             <a:endParaRPr lang="en-US" sz="1150" dirty="0"/>
           </a:p>
@@ -27317,10 +26564,6 @@
           </a:solidFill>
           <a:ln/>
         </p:spPr>
-        <p:txBody>
-          <a:bodyPr/>
-          <a:p/>
-        </p:txBody>
       </p:sp>
       <p:sp>
         <p:nvSpPr>
@@ -27355,7 +26598,7 @@
                 <a:ea typeface="微软雅黑" pitchFamily="34" charset="-122"/>
                 <a:cs typeface="微软雅黑" pitchFamily="34" charset="-120"/>
               </a:rPr>
-              <a:t>v1.11.0</a:t>
+              <a:t>v1.12.5</a:t>
             </a:r>
             <a:endParaRPr lang="en-US" sz="1500" dirty="0"/>
           </a:p>
@@ -27394,7 +26637,7 @@
                 <a:ea typeface="微软雅黑" pitchFamily="34" charset="-122"/>
                 <a:cs typeface="微软雅黑" pitchFamily="34" charset="-120"/>
               </a:rPr>
-              <a:t>08-30</a:t>
+              <a:t>09-12</a:t>
             </a:r>
             <a:endParaRPr lang="en-US" sz="1100" dirty="0"/>
           </a:p>
@@ -27433,7 +26676,7 @@
                 <a:ea typeface="微软雅黑" pitchFamily="34" charset="-122"/>
                 <a:cs typeface="微软雅黑" pitchFamily="34" charset="-120"/>
               </a:rPr>
-              <a:t>体检修复：PII 加密 / fail-closed / 数据包补全 / 供应链加固</a:t>
+              <a:t>深度审计 13 项修复：目录穿越 / 存储型 XSS / 并发 / 备份 fail-loud</a:t>
             </a:r>
             <a:endParaRPr lang="en-US" sz="1150" dirty="0"/>
           </a:p>
@@ -27458,10 +26701,6 @@
           </a:solidFill>
           <a:ln/>
         </p:spPr>
-        <p:txBody>
-          <a:bodyPr/>
-          <a:p/>
-        </p:txBody>
       </p:sp>
       <p:sp>
         <p:nvSpPr>
@@ -27496,7 +26735,7 @@
                 <a:ea typeface="微软雅黑" pitchFamily="34" charset="-122"/>
                 <a:cs typeface="微软雅黑" pitchFamily="34" charset="-120"/>
               </a:rPr>
-              <a:t>v1.11.1</a:t>
+              <a:t>v1.12.7</a:t>
             </a:r>
             <a:endParaRPr lang="en-US" sz="1500" dirty="0"/>
           </a:p>
@@ -27535,7 +26774,7 @@
                 <a:ea typeface="微软雅黑" pitchFamily="34" charset="-122"/>
                 <a:cs typeface="微软雅黑" pitchFamily="34" charset="-120"/>
               </a:rPr>
-              <a:t>08-30</a:t>
+              <a:t>09-13</a:t>
             </a:r>
             <a:endParaRPr lang="en-US" sz="1100" dirty="0"/>
           </a:p>
@@ -27574,7 +26813,7 @@
                 <a:ea typeface="微软雅黑" pitchFamily="34" charset="-122"/>
                 <a:cs typeface="微软雅黑" pitchFamily="34" charset="-120"/>
               </a:rPr>
-              <a:t>安装器真机修复：NSIS 路径转义根修</a:t>
+              <a:t>遗留风险二批：上传体积三层上限、导出回收、导入拒绝记录、Windows CI 可见性</a:t>
             </a:r>
             <a:endParaRPr lang="en-US" sz="1150" dirty="0"/>
           </a:p>
@@ -27599,10 +26838,6 @@
           </a:solidFill>
           <a:ln/>
         </p:spPr>
-        <p:txBody>
-          <a:bodyPr/>
-          <a:p/>
-        </p:txBody>
       </p:sp>
       <p:sp>
         <p:nvSpPr>
@@ -27637,7 +26872,7 @@
                 <a:ea typeface="微软雅黑" pitchFamily="34" charset="-122"/>
                 <a:cs typeface="微软雅黑" pitchFamily="34" charset="-120"/>
               </a:rPr>
-              <a:t>v1.12.0</a:t>
+              <a:t>v1.12.8</a:t>
             </a:r>
             <a:endParaRPr lang="en-US" sz="1500" dirty="0"/>
           </a:p>
@@ -27676,7 +26911,7 @@
                 <a:ea typeface="微软雅黑" pitchFamily="34" charset="-122"/>
                 <a:cs typeface="微软雅黑" pitchFamily="34" charset="-120"/>
               </a:rPr>
-              <a:t>08-30</a:t>
+              <a:t>09-14</a:t>
             </a:r>
             <a:endParaRPr lang="en-US" sz="1100" dirty="0"/>
           </a:p>
@@ -27715,7 +26950,7 @@
                 <a:ea typeface="微软雅黑" pitchFamily="34" charset="-122"/>
                 <a:cs typeface="微软雅黑" pitchFamily="34" charset="-120"/>
               </a:rPr>
-              <a:t>403 六类根因修复 + 弹窗裁切修复 + 5 个 500 端点</a:t>
+              <a:t>R7 恢复维护闸门 / R12 低危批量 7 项 / R2 残余清零 / P-1~P-3 门禁 / R14 组织树修复</a:t>
             </a:r>
             <a:endParaRPr lang="en-US" sz="1150" dirty="0"/>
           </a:p>
@@ -27749,10 +26984,6 @@
             </a:outerShdw>
           </a:effectLst>
         </p:spPr>
-        <p:txBody>
-          <a:bodyPr/>
-          <a:p/>
-        </p:txBody>
       </p:sp>
       <p:sp>
         <p:nvSpPr>
@@ -27787,7 +27018,7 @@
                 <a:ea typeface="微软雅黑" pitchFamily="34" charset="-122"/>
                 <a:cs typeface="微软雅黑" pitchFamily="34" charset="-120"/>
               </a:rPr>
-              <a:t>净效果：5.5 万行死代码出清后，系统以更小的体积承载了更多功能——10142 + 5691 项测试全绿，双平台安装包全自动构建</a:t>
+              <a:t>净效果：11244 后端用例（覆盖率 100%）+ 6051 前端用例全绿；Windows x64 与麒麟 ARM64 两个离线安装包由 GitHub Actions 全自动构建并发布 Release</a:t>
             </a:r>
             <a:endParaRPr lang="en-US" sz="1350" dirty="0"/>
           </a:p>
@@ -27844,10 +27075,6 @@
           </a:solidFill>
           <a:ln/>
         </p:spPr>
-        <p:txBody>
-          <a:bodyPr/>
-          <a:p/>
-        </p:txBody>
       </p:sp>
       <p:sp>
         <p:nvSpPr>
@@ -27999,7 +27226,7 @@
                 <a:ea typeface="微软雅黑" pitchFamily="34" charset="-122"/>
                 <a:cs typeface="微软雅黑" pitchFamily="34" charset="-120"/>
               </a:rPr>
-              <a:t>帮扶管理信息系统 v1.12.0</a:t>
+              <a:t>帮扶管理信息系统 v1.12.8</a:t>
             </a:r>
             <a:endParaRPr lang="en-US" sz="1050" dirty="0"/>
           </a:p>
@@ -28033,10 +27260,6 @@
             </a:outerShdw>
           </a:effectLst>
         </p:spPr>
-        <p:txBody>
-          <a:bodyPr/>
-          <a:p/>
-        </p:txBody>
       </p:sp>
       <p:sp>
         <p:nvSpPr>
@@ -28071,7 +27294,7 @@
                 <a:ea typeface="微软雅黑" pitchFamily="34" charset="-122"/>
                 <a:cs typeface="微软雅黑" pitchFamily="34" charset="-120"/>
               </a:rPr>
-              <a:t>UI 精美化批量清扫</a:t>
+              <a:t>调度任务注册表（P-2）</a:t>
             </a:r>
             <a:endParaRPr lang="en-US" sz="1500" dirty="0"/>
           </a:p>
@@ -28110,7 +27333,7 @@
                 <a:ea typeface="微软雅黑" pitchFamily="34" charset="-122"/>
                 <a:cs typeface="微软雅黑" pitchFamily="34" charset="-120"/>
               </a:rPr>
-              <a:t>W11-T45：58 个页头标准化、图表引擎统一（chart.js→echarts）、仪表盘配色令牌化</a:t>
+              <a:t>scheduler_registry 清单化 + /health 全量暴露（当前仅落地裸 threading.Timer 扫描门禁）</a:t>
             </a:r>
             <a:endParaRPr lang="en-US" sz="1150" dirty="0"/>
           </a:p>
@@ -28144,10 +27367,6 @@
             </a:outerShdw>
           </a:effectLst>
         </p:spPr>
-        <p:txBody>
-          <a:bodyPr/>
-          <a:p/>
-        </p:txBody>
       </p:sp>
       <p:sp>
         <p:nvSpPr>
@@ -28182,7 +27401,7 @@
                 <a:ea typeface="微软雅黑" pitchFamily="34" charset="-122"/>
                 <a:cs typeface="微软雅黑" pitchFamily="34" charset="-120"/>
               </a:rPr>
-              <a:t>数据同步管道重做</a:t>
+              <a:t>依赖门禁分级（P-4）</a:t>
             </a:r>
             <a:endParaRPr lang="en-US" sz="1500" dirty="0"/>
           </a:p>
@@ -28221,7 +27440,7 @@
                 <a:ea typeface="微软雅黑" pitchFamily="34" charset="-122"/>
                 <a:cs typeface="微软雅黑" pitchFamily="34" charset="-120"/>
               </a:rPr>
-              <a:t>W2-T7：data_sync 裸 SQL → ORM 写入（修复 sync_version 增量语义 + 审计）</a:t>
+              <a:t>pip-audit 分级：有修复版本的高危阻断合入；无修复版本强制登记豁免理由</a:t>
             </a:r>
             <a:endParaRPr lang="en-US" sz="1150" dirty="0"/>
           </a:p>
@@ -28255,10 +27474,6 @@
             </a:outerShdw>
           </a:effectLst>
         </p:spPr>
-        <p:txBody>
-          <a:bodyPr/>
-          <a:p/>
-        </p:txBody>
       </p:sp>
       <p:sp>
         <p:nvSpPr>
@@ -28293,7 +27508,7 @@
                 <a:ea typeface="微软雅黑" pitchFamily="34" charset="-122"/>
                 <a:cs typeface="微软雅黑" pitchFamily="34" charset="-120"/>
               </a:rPr>
-              <a:t>代码签名落地</a:t>
+              <a:t>本地环境标准化（R10）</a:t>
             </a:r>
             <a:endParaRPr lang="en-US" sz="1500" dirty="0"/>
           </a:p>
@@ -28332,7 +27547,7 @@
                 <a:ea typeface="微软雅黑" pitchFamily="34" charset="-122"/>
                 <a:cs typeface="微软雅黑" pitchFamily="34" charset="-120"/>
               </a:rPr>
-              <a:t>W6-T1：采购证书后接入 CSC secrets，安装包/后端 exe 全签名</a:t>
+              <a:t>用 3.11.9+ 重建 .venv + make venv/test-local 固化 PYTHONUTF8 与 IDE 注入清理</a:t>
             </a:r>
             <a:endParaRPr lang="en-US" sz="1150" dirty="0"/>
           </a:p>
@@ -28366,10 +27581,6 @@
             </a:outerShdw>
           </a:effectLst>
         </p:spPr>
-        <p:txBody>
-          <a:bodyPr/>
-          <a:p/>
-        </p:txBody>
       </p:sp>
       <p:sp>
         <p:nvSpPr>
@@ -28404,7 +27615,7 @@
                 <a:ea typeface="微软雅黑" pitchFamily="34" charset="-122"/>
                 <a:cs typeface="微软雅黑" pitchFamily="34" charset="-120"/>
               </a:rPr>
-              <a:t>审计保留策略</a:t>
+              <a:t>代码签名落地</a:t>
             </a:r>
             <a:endParaRPr lang="en-US" sz="1500" dirty="0"/>
           </a:p>
@@ -28443,7 +27654,7 @@
                 <a:ea typeface="微软雅黑" pitchFamily="34" charset="-122"/>
                 <a:cs typeface="微软雅黑" pitchFamily="34" charset="-120"/>
               </a:rPr>
-              <a:t>W5-008：审计四表生命周期 + 请求级双写去重</a:t>
+              <a:t>采购证书后接入 CSC secrets，安装包/后端 exe 全签名（W6-T1）</a:t>
             </a:r>
             <a:endParaRPr lang="en-US" sz="1150" dirty="0"/>
           </a:p>
@@ -28477,10 +27688,6 @@
             </a:outerShdw>
           </a:effectLst>
         </p:spPr>
-        <p:txBody>
-          <a:bodyPr/>
-          <a:p/>
-        </p:txBody>
       </p:sp>
       <p:sp>
         <p:nvSpPr>
@@ -28515,7 +27722,7 @@
                 <a:ea typeface="微软雅黑" pitchFamily="34" charset="-122"/>
                 <a:cs typeface="微软雅黑" pitchFamily="34" charset="-120"/>
               </a:rPr>
-              <a:t>E2E 链路修复</a:t>
+              <a:t>评审清单与 PR 模板（P-5）</a:t>
             </a:r>
             <a:endParaRPr lang="en-US" sz="1500" dirty="0"/>
           </a:p>
@@ -28554,7 +27761,7 @@
                 <a:ea typeface="微软雅黑" pitchFamily="34" charset="-122"/>
                 <a:cs typeface="微软雅黑" pitchFamily="34" charset="-120"/>
               </a:rPr>
-              <a:t>W4-004：Docker E2E 三处断裂修复 + 5 条关键路径 Playwright 用例</a:t>
+              <a:t>新增线程/Timer、except-pass、文件写入、新依赖四类必答项并入 PR 模板</a:t>
             </a:r>
             <a:endParaRPr lang="en-US" sz="1150" dirty="0"/>
           </a:p>
@@ -28588,10 +27795,6 @@
             </a:outerShdw>
           </a:effectLst>
         </p:spPr>
-        <p:txBody>
-          <a:bodyPr/>
-          <a:p/>
-        </p:txBody>
       </p:sp>
       <p:sp>
         <p:nvSpPr>
@@ -28626,7 +27829,7 @@
                 <a:ea typeface="微软雅黑" pitchFamily="34" charset="-122"/>
                 <a:cs typeface="微软雅黑" pitchFamily="34" charset="-120"/>
               </a:rPr>
-              <a:t>弱断言清理</a:t>
+              <a:t>E2E 扩充</a:t>
             </a:r>
             <a:endParaRPr lang="en-US" sz="1500" dirty="0"/>
           </a:p>
@@ -28665,7 +27868,7 @@
                 <a:ea typeface="微软雅黑" pitchFamily="34" charset="-122"/>
                 <a:cs typeface="微软雅黑" pitchFamily="34" charset="-120"/>
               </a:rPr>
-              <a:t>W4-003：30 个接受 HTTP 500 的断言收紧为精确状态码</a:t>
+              <a:t>Docker E2E 关键路径 Playwright 用例扩容（当前 150 例，CI 全绿）</a:t>
             </a:r>
             <a:endParaRPr lang="en-US" sz="1150" dirty="0"/>
           </a:p>
@@ -28722,10 +27925,6 @@
           </a:solidFill>
           <a:ln/>
         </p:spPr>
-        <p:txBody>
-          <a:bodyPr/>
-          <a:p/>
-        </p:txBody>
       </p:sp>
       <p:sp>
         <p:nvSpPr>
@@ -28877,7 +28076,7 @@
                 <a:ea typeface="微软雅黑" pitchFamily="34" charset="-122"/>
                 <a:cs typeface="微软雅黑" pitchFamily="34" charset="-120"/>
               </a:rPr>
-              <a:t>帮扶管理信息系统 v1.12.0</a:t>
+              <a:t>帮扶管理信息系统 v1.12.8</a:t>
             </a:r>
             <a:endParaRPr lang="en-US" sz="1050" dirty="0"/>
           </a:p>
@@ -28941,10 +28140,6 @@
           </a:solidFill>
           <a:ln/>
         </p:spPr>
-        <p:txBody>
-          <a:bodyPr/>
-          <a:p/>
-        </p:txBody>
       </p:sp>
       <p:sp>
         <p:nvSpPr>
@@ -29043,10 +28238,6 @@
           </a:solidFill>
           <a:ln/>
         </p:spPr>
-        <p:txBody>
-          <a:bodyPr/>
-          <a:p/>
-        </p:txBody>
       </p:sp>
       <p:sp>
         <p:nvSpPr>
@@ -29145,10 +28336,6 @@
           </a:solidFill>
           <a:ln/>
         </p:spPr>
-        <p:txBody>
-          <a:bodyPr/>
-          <a:p/>
-        </p:txBody>
       </p:sp>
       <p:sp>
         <p:nvSpPr>
@@ -29279,10 +28466,6 @@
           </a:solidFill>
           <a:ln/>
         </p:spPr>
-        <p:txBody>
-          <a:bodyPr/>
-          <a:p/>
-        </p:txBody>
       </p:sp>
       <p:sp>
         <p:nvSpPr>
@@ -29303,10 +28486,6 @@
           </a:solidFill>
           <a:ln/>
         </p:spPr>
-        <p:txBody>
-          <a:bodyPr/>
-          <a:p/>
-        </p:txBody>
       </p:sp>
       <p:sp>
         <p:nvSpPr>
@@ -29419,7 +28598,7 @@
                 <a:ea typeface="微软雅黑" pitchFamily="34" charset="-122"/>
                 <a:cs typeface="微软雅黑" pitchFamily="34" charset="-120"/>
               </a:rPr>
-              <a:t>帮扶管理信息系统 v1.12.0  ·  仓库：github.com/lzh745200/MRRS  ·  完整文档见 docs/ 目录</a:t>
+              <a:t>帮扶管理信息系统 v1.12.8  ·  仓库：github.com/lzh745200/MRRS  ·  完整文档见 docs/ 目录</a:t>
             </a:r>
             <a:endParaRPr lang="en-US" sz="1350" dirty="0"/>
           </a:p>
@@ -29458,7 +28637,7 @@
                 <a:ea typeface="微软雅黑" pitchFamily="34" charset="-122"/>
                 <a:cs typeface="微软雅黑" pitchFamily="34" charset="-120"/>
               </a:rPr>
-              <a:t>10,692 后端用例 + 5,691 前端用例 全绿守护 · Windows / 麒麟双平台离线交付</a:t>
+              <a:t>11,244 后端用例（覆盖率 100%）+ 6,051 前端用例 全绿守护 · Windows x64 / 麒麟 ARM64 双平台离线交付</a:t>
             </a:r>
             <a:endParaRPr lang="en-US" sz="1350" dirty="0"/>
           </a:p>
@@ -29515,10 +28694,6 @@
           </a:solidFill>
           <a:ln/>
         </p:spPr>
-        <p:txBody>
-          <a:bodyPr/>
-          <a:p/>
-        </p:txBody>
       </p:sp>
       <p:sp>
         <p:nvSpPr>
@@ -29670,7 +28845,7 @@
                 <a:ea typeface="微软雅黑" pitchFamily="34" charset="-122"/>
                 <a:cs typeface="微软雅黑" pitchFamily="34" charset="-120"/>
               </a:rPr>
-              <a:t>帮扶管理信息系统 v1.12.0</a:t>
+              <a:t>帮扶管理信息系统 v1.12.8</a:t>
             </a:r>
             <a:endParaRPr lang="en-US" sz="1050" dirty="0"/>
           </a:p>
@@ -29704,10 +28879,6 @@
             </a:outerShdw>
           </a:effectLst>
         </p:spPr>
-        <p:txBody>
-          <a:bodyPr/>
-          <a:p/>
-        </p:txBody>
       </p:sp>
       <p:sp>
         <p:nvSpPr>
@@ -29728,10 +28899,6 @@
           </a:solidFill>
           <a:ln/>
         </p:spPr>
-        <p:txBody>
-          <a:bodyPr/>
-          <a:p/>
-        </p:txBody>
       </p:sp>
       <p:sp>
         <p:nvSpPr>
@@ -29839,10 +29006,6 @@
             </a:outerShdw>
           </a:effectLst>
         </p:spPr>
-        <p:txBody>
-          <a:bodyPr/>
-          <a:p/>
-        </p:txBody>
       </p:sp>
       <p:sp>
         <p:nvSpPr>
@@ -29863,10 +29026,6 @@
           </a:solidFill>
           <a:ln/>
         </p:spPr>
-        <p:txBody>
-          <a:bodyPr/>
-          <a:p/>
-        </p:txBody>
       </p:sp>
       <p:sp>
         <p:nvSpPr>
@@ -29974,10 +29133,6 @@
             </a:outerShdw>
           </a:effectLst>
         </p:spPr>
-        <p:txBody>
-          <a:bodyPr/>
-          <a:p/>
-        </p:txBody>
       </p:sp>
       <p:sp>
         <p:nvSpPr>
@@ -29998,10 +29153,6 @@
           </a:solidFill>
           <a:ln/>
         </p:spPr>
-        <p:txBody>
-          <a:bodyPr/>
-          <a:p/>
-        </p:txBody>
       </p:sp>
       <p:sp>
         <p:nvSpPr>
@@ -30109,10 +29260,6 @@
             </a:outerShdw>
           </a:effectLst>
         </p:spPr>
-        <p:txBody>
-          <a:bodyPr/>
-          <a:p/>
-        </p:txBody>
       </p:sp>
       <p:sp>
         <p:nvSpPr>
@@ -30133,10 +29280,6 @@
           </a:solidFill>
           <a:ln/>
         </p:spPr>
-        <p:txBody>
-          <a:bodyPr/>
-          <a:p/>
-        </p:txBody>
       </p:sp>
       <p:sp>
         <p:nvSpPr>
@@ -30267,10 +29410,6 @@
           </a:solidFill>
           <a:ln/>
         </p:spPr>
-        <p:txBody>
-          <a:bodyPr/>
-          <a:p/>
-        </p:txBody>
       </p:sp>
       <p:sp>
         <p:nvSpPr>
@@ -30422,7 +29561,7 @@
                 <a:ea typeface="微软雅黑" pitchFamily="34" charset="-122"/>
                 <a:cs typeface="微软雅黑" pitchFamily="34" charset="-120"/>
               </a:rPr>
-              <a:t>帮扶管理信息系统 v1.12.0</a:t>
+              <a:t>帮扶管理信息系统 v1.12.8</a:t>
             </a:r>
             <a:endParaRPr lang="en-US" sz="1050" dirty="0"/>
           </a:p>
@@ -30762,10 +29901,6 @@
             <a:prstDash val="solid"/>
           </a:ln>
         </p:spPr>
-        <p:txBody>
-          <a:bodyPr/>
-          <a:p/>
-        </p:txBody>
       </p:sp>
       <p:sp>
         <p:nvSpPr>
@@ -30956,7 +30091,7 @@
                 <a:ea typeface="微软雅黑" pitchFamily="34" charset="-122"/>
                 <a:cs typeface="微软雅黑" pitchFamily="34" charset="-120"/>
               </a:rPr>
-              <a:t>37</a:t>
+              <a:t>43</a:t>
             </a:r>
             <a:endParaRPr lang="en-US" sz="4000" dirty="0"/>
           </a:p>
@@ -31112,7 +30247,7 @@
                 <a:ea typeface="微软雅黑" pitchFamily="34" charset="-122"/>
                 <a:cs typeface="微软雅黑" pitchFamily="34" charset="-120"/>
               </a:rPr>
-              <a:t>数据来源：仓库实测（2026-08-30，v1.12.0）—— flake8 0 错误 · bandit 0 中高危 · vue-tsc 0 错误 · eslint 0 警告</a:t>
+              <a:t>数据来源：仓库实测（2026-09-14，v1.12.8）—— 后端 11244 用例全绿 / 覆盖率 100% · 前端 6051 用例全绿 · flake8 0 · bandit 0 中高危 · vue-tsc 0 · eslint 0 警告</a:t>
             </a:r>
             <a:endParaRPr lang="en-US" sz="1200" dirty="0"/>
           </a:p>
@@ -31463,10 +30598,6 @@
           </a:solidFill>
           <a:ln/>
         </p:spPr>
-        <p:txBody>
-          <a:bodyPr/>
-          <a:p/>
-        </p:txBody>
       </p:sp>
       <p:sp>
         <p:nvSpPr>
@@ -31618,7 +30749,7 @@
                 <a:ea typeface="微软雅黑" pitchFamily="34" charset="-122"/>
                 <a:cs typeface="微软雅黑" pitchFamily="34" charset="-120"/>
               </a:rPr>
-              <a:t>帮扶管理信息系统 v1.12.0</a:t>
+              <a:t>帮扶管理信息系统 v1.12.8</a:t>
             </a:r>
             <a:endParaRPr lang="en-US" sz="1050" dirty="0"/>
           </a:p>
@@ -31652,10 +30783,6 @@
             </a:outerShdw>
           </a:effectLst>
         </p:spPr>
-        <p:txBody>
-          <a:bodyPr/>
-          <a:p/>
-        </p:txBody>
       </p:sp>
       <p:sp>
         <p:nvSpPr>
@@ -31869,10 +30996,6 @@
             </a:outerShdw>
           </a:effectLst>
         </p:spPr>
-        <p:txBody>
-          <a:bodyPr/>
-          <a:p/>
-        </p:txBody>
       </p:sp>
       <p:sp>
         <p:nvSpPr>
@@ -32086,10 +31209,6 @@
             </a:outerShdw>
           </a:effectLst>
         </p:spPr>
-        <p:txBody>
-          <a:bodyPr/>
-          <a:p/>
-        </p:txBody>
       </p:sp>
       <p:sp>
         <p:nvSpPr>
@@ -32303,10 +31422,6 @@
             </a:outerShdw>
           </a:effectLst>
         </p:spPr>
-        <p:txBody>
-          <a:bodyPr/>
-          <a:p/>
-        </p:txBody>
       </p:sp>
       <p:sp>
         <p:nvSpPr>
@@ -32543,10 +31658,6 @@
           </a:solidFill>
           <a:ln/>
         </p:spPr>
-        <p:txBody>
-          <a:bodyPr/>
-          <a:p/>
-        </p:txBody>
       </p:sp>
       <p:sp>
         <p:nvSpPr>
@@ -32698,7 +31809,7 @@
                 <a:ea typeface="微软雅黑" pitchFamily="34" charset="-122"/>
                 <a:cs typeface="微软雅黑" pitchFamily="34" charset="-120"/>
               </a:rPr>
-              <a:t>帮扶管理信息系统 v1.12.0</a:t>
+              <a:t>帮扶管理信息系统 v1.12.8</a:t>
             </a:r>
             <a:endParaRPr lang="en-US" sz="1050" dirty="0"/>
           </a:p>
@@ -32725,10 +31836,6 @@
           </a:solidFill>
           <a:ln/>
         </p:spPr>
-        <p:txBody>
-          <a:bodyPr/>
-          <a:p/>
-        </p:txBody>
       </p:sp>
       <p:sp>
         <p:nvSpPr>
@@ -32831,10 +31938,6 @@
             <a:tailEnd type="triangle"/>
           </a:ln>
         </p:spPr>
-        <p:txBody>
-          <a:bodyPr/>
-          <a:p/>
-        </p:txBody>
       </p:sp>
       <p:sp>
         <p:nvSpPr>
@@ -32857,10 +31960,6 @@
           </a:solidFill>
           <a:ln/>
         </p:spPr>
-        <p:txBody>
-          <a:bodyPr/>
-          <a:p/>
-        </p:txBody>
       </p:sp>
       <p:sp>
         <p:nvSpPr>
@@ -32963,10 +32062,6 @@
             <a:tailEnd type="triangle"/>
           </a:ln>
         </p:spPr>
-        <p:txBody>
-          <a:bodyPr/>
-          <a:p/>
-        </p:txBody>
       </p:sp>
       <p:sp>
         <p:nvSpPr>
@@ -32989,10 +32084,6 @@
           </a:solidFill>
           <a:ln/>
         </p:spPr>
-        <p:txBody>
-          <a:bodyPr/>
-          <a:p/>
-        </p:txBody>
       </p:sp>
       <p:sp>
         <p:nvSpPr>
@@ -33095,10 +32186,6 @@
             <a:tailEnd type="triangle"/>
           </a:ln>
         </p:spPr>
-        <p:txBody>
-          <a:bodyPr/>
-          <a:p/>
-        </p:txBody>
       </p:sp>
       <p:sp>
         <p:nvSpPr>
@@ -33121,10 +32208,6 @@
           </a:solidFill>
           <a:ln/>
         </p:spPr>
-        <p:txBody>
-          <a:bodyPr/>
-          <a:p/>
-        </p:txBody>
       </p:sp>
       <p:sp>
         <p:nvSpPr>

--- a/docs/帮扶管理信息系统介绍.pptx
+++ b/docs/帮扶管理信息系统介绍.pptx
@@ -6465,7 +6465,7 @@
                 <a:ea typeface="微软雅黑" pitchFamily="34" charset="-122"/>
                 <a:cs typeface="微软雅黑" pitchFamily="34" charset="-120"/>
               </a:rPr>
-              <a:t>数据层：57 个模型的安全基座</a:t>
+              <a:t>数据层：59 个模型的安全基座</a:t>
             </a:r>
             <a:endParaRPr lang="en-US" sz="3000" dirty="0"/>
           </a:p>
@@ -13749,7 +13749,7 @@
                 <a:ea typeface="微软雅黑" pitchFamily="34" charset="-122"/>
                 <a:cs typeface="微软雅黑" pitchFamily="34" charset="-120"/>
               </a:rPr>
-              <a:t>15833 项自动化测试 · CI/CD</a:t>
+              <a:t>17,295 项自动化测试 · CI/CD · 依赖自检</a:t>
             </a:r>
             <a:endParaRPr lang="en-US" sz="1200" dirty="0"/>
           </a:p>
@@ -31325,7 +31325,7 @@
                 <a:ea typeface="微软雅黑" pitchFamily="34" charset="-122"/>
                 <a:cs typeface="微软雅黑" pitchFamily="34" charset="-120"/>
               </a:rPr>
-              <a:t>49 个路由模块 + 5 个子包</a:t>
+              <a:t>93 个路由模块 + 13 个子包</a:t>
             </a:r>
             <a:endParaRPr lang="en-US" sz="1200" dirty="0"/>
           </a:p>
@@ -31346,7 +31346,7 @@
                 <a:ea typeface="微软雅黑" pitchFamily="34" charset="-122"/>
                 <a:cs typeface="微软雅黑" pitchFamily="34" charset="-120"/>
               </a:rPr>
-              <a:t>80 个服务 + 8 个子包</a:t>
+              <a:t>100 个服务 + 13 个子包</a:t>
             </a:r>
             <a:endParaRPr lang="en-US" sz="1200" dirty="0"/>
           </a:p>
@@ -31388,7 +31388,7 @@
                 <a:ea typeface="微软雅黑" pitchFamily="34" charset="-122"/>
                 <a:cs typeface="微软雅黑" pitchFamily="34" charset="-120"/>
               </a:rPr>
-              <a:t>JWT + 黑名单 + 限流 + 审计中间件</a:t>
+              <a:t>依赖登记表单一事实源（三级自检）</a:t>
             </a:r>
             <a:endParaRPr lang="en-US" sz="1200" dirty="0"/>
           </a:p>
@@ -31601,7 +31601,7 @@
                 <a:ea typeface="微软雅黑" pitchFamily="34" charset="-122"/>
                 <a:cs typeface="微软雅黑" pitchFamily="34" charset="-120"/>
               </a:rPr>
-              <a:t>37 个 Alembic 迁移版本</a:t>
+              <a:t>43 个 Alembic 迁移版本</a:t>
             </a:r>
             <a:endParaRPr lang="en-US" sz="1200" dirty="0"/>
           </a:p>

--- a/docs/帮扶管理信息系统介绍.pptx
+++ b/docs/帮扶管理信息系统介绍.pptx
@@ -45,9 +45,10 @@
     <p:sldId id="293" r:id="rId39"/>
     <p:sldId id="294" r:id="rId40"/>
     <p:sldId id="295" r:id="rId41"/>
+    <p:sldId id="296" r:id="rId42"/>
   </p:sldIdLst>
   <p:notesMasterIdLst>
-    <p:notesMasterId r:id="rId42"/>
+    <p:notesMasterId r:id="rId43"/>
   </p:notesMasterIdLst>
   <p:sldSz cx="12192000" cy="6858000"/>
   <p:notesSz cx="6858000" cy="12192000"/>
@@ -3804,6 +3805,94 @@
             <a:fld id="{F7021451-1387-4CA6-816F-3879F97B5CBC}" type="slidenum">
               <a:rPr lang="en-US"/>
               <a:t>40</a:t>
+            </a:fld>
+            <a:endParaRPr lang="en-US"/>
+          </a:p>
+        </p:txBody>
+      </p:sp>
+    </p:spTree>
+    <p:extLst>
+      <p:ext uri="{BB962C8B-B14F-4D97-AF65-F5344CB8AC3E}">
+        <p14:creationId xmlns:p14="http://schemas.microsoft.com/office/powerpoint/2010/main" val="1024086991"/>
+      </p:ext>
+    </p:extLst>
+  </p:cSld>
+  <p:clrMapOvr>
+    <a:masterClrMapping/>
+  </p:clrMapOvr>
+</p:notes>
+</file>
+
+<file path=ppt/notesSlides/notesSlide41.xml><?xml version="1.0" encoding="utf-8"?>
+<p:notes xmlns:a="http://schemas.openxmlformats.org/drawingml/2006/main" xmlns:r="http://schemas.openxmlformats.org/officeDocument/2006/relationships" xmlns:p="http://schemas.openxmlformats.org/presentationml/2006/main">
+  <p:cSld>
+    <p:spTree>
+      <p:nvGrpSpPr>
+        <p:cNvPr id="1" name=""/>
+        <p:cNvGrpSpPr/>
+        <p:nvPr/>
+      </p:nvGrpSpPr>
+      <p:grpSpPr>
+        <a:xfrm>
+          <a:off x="0" y="0"/>
+          <a:ext cx="0" cy="0"/>
+          <a:chOff x="0" y="0"/>
+          <a:chExt cx="0" cy="0"/>
+        </a:xfrm>
+      </p:grpSpPr>
+      <p:sp>
+        <p:nvSpPr>
+          <p:cNvPr id="2" name="Slide Image Placeholder 1"/>
+          <p:cNvSpPr>
+            <a:spLocks noGrp="1" noRot="1" noChangeAspect="1"/>
+          </p:cNvSpPr>
+          <p:nvPr>
+            <p:ph type="sldImg"/>
+          </p:nvPr>
+        </p:nvSpPr>
+        <p:spPr/>
+      </p:sp>
+      <p:sp>
+        <p:nvSpPr>
+          <p:cNvPr id="3" name="Notes Placeholder 2"/>
+          <p:cNvSpPr>
+            <a:spLocks noGrp="1"/>
+          </p:cNvSpPr>
+          <p:nvPr>
+            <p:ph type="body" idx="1"/>
+          </p:nvPr>
+        </p:nvSpPr>
+        <p:spPr/>
+        <p:txBody>
+          <a:bodyPr/>
+          <a:lstStyle/>
+          <a:p>
+            <a:r>
+              <a:rPr lang="en-US" dirty="0"/>
+              <a:t/>
+            </a:r>
+            <a:endParaRPr lang="en-US" dirty="0"/>
+          </a:p>
+        </p:txBody>
+      </p:sp>
+      <p:sp>
+        <p:nvSpPr>
+          <p:cNvPr id="4" name="Slide Number Placeholder 3"/>
+          <p:cNvSpPr>
+            <a:spLocks noGrp="1"/>
+          </p:cNvSpPr>
+          <p:nvPr>
+            <p:ph type="sldNum" sz="quarter" idx="10"/>
+          </p:nvPr>
+        </p:nvSpPr>
+        <p:spPr/>
+        <p:txBody>
+          <a:bodyPr/>
+          <a:lstStyle/>
+          <a:p>
+            <a:fld id="{F7021451-1387-4CA6-816F-3879F97B5CBC}" type="slidenum">
+              <a:rPr lang="en-US"/>
+              <a:t>41</a:t>
             </a:fld>
             <a:endParaRPr lang="en-US"/>
           </a:p>
@@ -22364,6 +22453,27 @@
                 <a:ea typeface="微软雅黑" pitchFamily="34" charset="-122"/>
                 <a:cs typeface="微软雅黑" pitchFamily="34" charset="-120"/>
               </a:rPr>
+              <a:t>AI 代码深度审查（376 文件 / 918 条发现）</a:t>
+            </a:r>
+            <a:endParaRPr lang="en-US" sz="1400" dirty="0"/>
+          </a:p>
+          <a:p>
+            <a:pPr marL="152400" indent="-152400">
+              <a:spcAft>
+                <a:spcPts val="1000"/>
+              </a:spcAft>
+              <a:buSzPct val="100000"/>
+              <a:buChar char="▪"/>
+            </a:pPr>
+            <a:r>
+              <a:rPr lang="en-US" sz="1400" dirty="0">
+                <a:solidFill>
+                  <a:srgbClr val="D7E2DB"/>
+                </a:solidFill>
+                <a:latin typeface="微软雅黑" pitchFamily="34" charset="0"/>
+                <a:ea typeface="微软雅黑" pitchFamily="34" charset="-122"/>
+                <a:cs typeface="微软雅黑" pitchFamily="34" charset="-120"/>
+              </a:rPr>
               <a:t>双平台安装包自动构建</a:t>
             </a:r>
             <a:endParaRPr lang="en-US" sz="1400" dirty="0"/>
@@ -24126,6 +24236,625 @@
     <p:bg>
       <p:bgPr>
         <a:solidFill>
+          <a:srgbClr val="FFFFFF"/>
+        </a:solidFill>
+      </p:bgPr>
+    </p:bg>
+    <p:spTree>
+      <p:nvGrpSpPr>
+        <p:cNvPr id="1" name=""/>
+        <p:cNvGrpSpPr/>
+        <p:nvPr/>
+      </p:nvGrpSpPr>
+      <p:grpSpPr>
+        <a:xfrm>
+          <a:off x="0" y="0"/>
+          <a:ext cx="0" cy="0"/>
+          <a:chOff x="0" y="0"/>
+          <a:chExt cx="0" cy="0"/>
+        </a:xfrm>
+      </p:grpSpPr>
+      <p:sp>
+        <p:nvSpPr>
+          <p:cNvPr id="2" name="Shape 0"/>
+          <p:cNvSpPr/>
+          <p:nvPr/>
+        </p:nvSpPr>
+        <p:spPr>
+          <a:xfrm>
+            <a:off x="457200" y="457200"/>
+            <a:ext cx="128016" cy="128016"/>
+          </a:xfrm>
+          <a:prstGeom prst="rect">
+            <a:avLst/>
+          </a:prstGeom>
+          <a:solidFill>
+            <a:srgbClr val="C9A227"/>
+          </a:solidFill>
+          <a:ln/>
+        </p:spPr>
+      </p:sp>
+      <p:sp>
+        <p:nvSpPr>
+          <p:cNvPr id="3" name="Text 1"/>
+          <p:cNvSpPr/>
+          <p:nvPr/>
+        </p:nvSpPr>
+        <p:spPr>
+          <a:xfrm>
+            <a:off x="676656" y="329184"/>
+            <a:ext cx="7315200" cy="365760"/>
+          </a:xfrm>
+          <a:prstGeom prst="rect">
+            <a:avLst/>
+          </a:prstGeom>
+          <a:noFill/>
+          <a:ln/>
+        </p:spPr>
+        <p:txBody>
+          <a:bodyPr wrap="square" lIns="0" tIns="0" rIns="0" bIns="0" rtlCol="0" anchor="ctr"/>
+          <a:lstStyle/>
+          <a:p>
+            <a:pPr indent="0" marL="0">
+              <a:buNone/>
+            </a:pPr>
+            <a:r>
+              <a:rPr lang="en-US" sz="1250" b="1" spc="300" kern="0" dirty="0">
+                <a:solidFill>
+                  <a:srgbClr val="2D6A4F"/>
+                </a:solidFill>
+                <a:latin typeface="微软雅黑" pitchFamily="34" charset="0"/>
+                <a:ea typeface="微软雅黑" pitchFamily="34" charset="-122"/>
+                <a:cs typeface="微软雅黑" pitchFamily="34" charset="-120"/>
+              </a:rPr>
+              <a:t>05 质量工程</a:t>
+            </a:r>
+            <a:endParaRPr lang="en-US" sz="1250" dirty="0"/>
+          </a:p>
+        </p:txBody>
+      </p:sp>
+      <p:sp>
+        <p:nvSpPr>
+          <p:cNvPr id="4" name="Text 2"/>
+          <p:cNvSpPr/>
+          <p:nvPr/>
+        </p:nvSpPr>
+        <p:spPr>
+          <a:xfrm>
+            <a:off x="457200" y="713232"/>
+            <a:ext cx="11274552" cy="685800"/>
+          </a:xfrm>
+          <a:prstGeom prst="rect">
+            <a:avLst/>
+          </a:prstGeom>
+          <a:noFill/>
+          <a:ln/>
+        </p:spPr>
+        <p:txBody>
+          <a:bodyPr wrap="square" lIns="0" tIns="0" rIns="0" bIns="0" rtlCol="0" anchor="ctr"/>
+          <a:lstStyle/>
+          <a:p>
+            <a:pPr indent="0" marL="0">
+              <a:buNone/>
+            </a:pPr>
+            <a:r>
+              <a:rPr lang="en-US" sz="3000" b="1" dirty="0">
+                <a:solidFill>
+                  <a:srgbClr val="1A2E24"/>
+                </a:solidFill>
+                <a:latin typeface="微软雅黑" pitchFamily="34" charset="0"/>
+                <a:ea typeface="微软雅黑" pitchFamily="34" charset="-122"/>
+                <a:cs typeface="微软雅黑" pitchFamily="34" charset="-120"/>
+              </a:rPr>
+              <a:t>AI 代码深度审查：OpenCodeReview 全量扫描</a:t>
+            </a:r>
+            <a:endParaRPr lang="en-US" sz="3000" dirty="0"/>
+          </a:p>
+        </p:txBody>
+      </p:sp>
+      <p:sp>
+        <p:nvSpPr>
+          <p:cNvPr id="5" name="Text 3"/>
+          <p:cNvSpPr/>
+          <p:nvPr/>
+        </p:nvSpPr>
+        <p:spPr>
+          <a:xfrm>
+            <a:off x="11274552" y="6355080"/>
+            <a:ext cx="457200" cy="274320"/>
+          </a:xfrm>
+          <a:prstGeom prst="rect">
+            <a:avLst/>
+          </a:prstGeom>
+          <a:noFill/>
+          <a:ln/>
+        </p:spPr>
+        <p:txBody>
+          <a:bodyPr wrap="square" lIns="0" tIns="0" rIns="0" bIns="0" rtlCol="0" anchor="ctr"/>
+          <a:lstStyle/>
+          <a:p>
+            <a:pPr algn="r" indent="0" marL="0">
+              <a:buNone/>
+            </a:pPr>
+            <a:r>
+              <a:rPr lang="en-US" sz="1100" dirty="0">
+                <a:solidFill>
+                  <a:srgbClr val="5F6F66"/>
+                </a:solidFill>
+                <a:latin typeface="微软雅黑" pitchFamily="34" charset="0"/>
+                <a:ea typeface="微软雅黑" pitchFamily="34" charset="-122"/>
+                <a:cs typeface="微软雅黑" pitchFamily="34" charset="-120"/>
+              </a:rPr>
+              <a:t>33</a:t>
+            </a:r>
+            <a:endParaRPr lang="en-US" sz="1100" dirty="0"/>
+          </a:p>
+        </p:txBody>
+      </p:sp>
+      <p:sp>
+        <p:nvSpPr>
+          <p:cNvPr id="6" name="Text 4"/>
+          <p:cNvSpPr/>
+          <p:nvPr/>
+        </p:nvSpPr>
+        <p:spPr>
+          <a:xfrm>
+            <a:off x="457200" y="6355080"/>
+            <a:ext cx="3657600" cy="274320"/>
+          </a:xfrm>
+          <a:prstGeom prst="rect">
+            <a:avLst/>
+          </a:prstGeom>
+          <a:noFill/>
+          <a:ln/>
+        </p:spPr>
+        <p:txBody>
+          <a:bodyPr wrap="square" lIns="0" tIns="0" rIns="0" bIns="0" rtlCol="0" anchor="ctr"/>
+          <a:lstStyle/>
+          <a:p>
+            <a:pPr indent="0" marL="0">
+              <a:buNone/>
+            </a:pPr>
+            <a:r>
+              <a:rPr lang="en-US" sz="1050" dirty="0">
+                <a:solidFill>
+                  <a:srgbClr val="5F6F66"/>
+                </a:solidFill>
+                <a:latin typeface="微软雅黑" pitchFamily="34" charset="0"/>
+                <a:ea typeface="微软雅黑" pitchFamily="34" charset="-122"/>
+                <a:cs typeface="微软雅黑" pitchFamily="34" charset="-120"/>
+              </a:rPr>
+              <a:t>帮扶管理信息系统 v1.12.8</a:t>
+            </a:r>
+            <a:endParaRPr lang="en-US" sz="1050" dirty="0"/>
+          </a:p>
+        </p:txBody>
+      </p:sp>
+      <p:sp>
+        <p:nvSpPr>
+          <p:cNvPr id="7" name="Shape 5"/>
+          <p:cNvSpPr/>
+          <p:nvPr/>
+        </p:nvSpPr>
+        <p:spPr>
+          <a:xfrm>
+            <a:off x="457200" y="1645920"/>
+            <a:ext cx="5486400" cy="4480560"/>
+          </a:xfrm>
+          <a:prstGeom prst="roundRect">
+            <a:avLst>
+              <a:gd name="adj" fmla="val 1429"/>
+            </a:avLst>
+          </a:prstGeom>
+          <a:solidFill>
+            <a:srgbClr val="FFFFFF"/>
+          </a:solidFill>
+          <a:ln/>
+          <a:effectLst>
+            <a:outerShdw sx="100000" sy="100000" kx="0" ky="0" algn="bl" rotWithShape="0" blurRad="88900" dist="25400" dir="5400000">
+              <a:srgbClr val="1A2E24">
+                <a:alpha val="13000"/>
+              </a:srgbClr>
+            </a:outerShdw>
+          </a:effectLst>
+        </p:spPr>
+      </p:sp>
+      <p:sp>
+        <p:nvSpPr>
+          <p:cNvPr id="8" name="Text 6"/>
+          <p:cNvSpPr/>
+          <p:nvPr/>
+        </p:nvSpPr>
+        <p:spPr>
+          <a:xfrm>
+            <a:off x="749808" y="1874520"/>
+            <a:ext cx="3657600" cy="365760"/>
+          </a:xfrm>
+          <a:prstGeom prst="rect">
+            <a:avLst/>
+          </a:prstGeom>
+          <a:noFill/>
+          <a:ln/>
+        </p:spPr>
+        <p:txBody>
+          <a:bodyPr wrap="square" lIns="0" tIns="0" rIns="0" bIns="0" rtlCol="0" anchor="ctr"/>
+          <a:lstStyle/>
+          <a:p>
+            <a:pPr indent="0" marL="0">
+              <a:buNone/>
+            </a:pPr>
+            <a:r>
+              <a:rPr lang="en-US" sz="1600" b="1" dirty="0">
+                <a:solidFill>
+                  <a:srgbClr val="1F4A38"/>
+                </a:solidFill>
+                <a:latin typeface="微软雅黑" pitchFamily="34" charset="0"/>
+                <a:ea typeface="微软雅黑" pitchFamily="34" charset="-122"/>
+                <a:cs typeface="微软雅黑" pitchFamily="34" charset="-120"/>
+              </a:rPr>
+              <a:t>扫描规模</a:t>
+            </a:r>
+            <a:endParaRPr lang="en-US" sz="1600" dirty="0"/>
+          </a:p>
+        </p:txBody>
+      </p:sp>
+      <p:sp>
+        <p:nvSpPr>
+          <p:cNvPr id="9" name="Text 7"/>
+          <p:cNvSpPr/>
+          <p:nvPr/>
+        </p:nvSpPr>
+        <p:spPr>
+          <a:xfrm>
+            <a:off x="749808" y="2331720"/>
+            <a:ext cx="4937760" cy="3566160"/>
+          </a:xfrm>
+          <a:prstGeom prst="rect">
+            <a:avLst/>
+          </a:prstGeom>
+          <a:noFill/>
+          <a:ln/>
+        </p:spPr>
+        <p:txBody>
+          <a:bodyPr wrap="square" lIns="0" tIns="0" rIns="0" bIns="0" rtlCol="0" anchor="t"/>
+          <a:lstStyle/>
+          <a:p>
+            <a:pPr algn="l" marL="152400" indent="-152400">
+              <a:spcAft>
+                <a:spcPts val="1000"/>
+              </a:spcAft>
+              <a:buSzPct val="100000"/>
+              <a:buChar char="▪"/>
+            </a:pPr>
+            <a:r>
+              <a:rPr lang="en-US" sz="1300" dirty="0">
+                <a:solidFill>
+                  <a:srgbClr val="1A2E24"/>
+                </a:solidFill>
+                <a:latin typeface="微软雅黑" pitchFamily="34" charset="0"/>
+                <a:ea typeface="微软雅黑" pitchFamily="34" charset="-122"/>
+                <a:cs typeface="微软雅黑" pitchFamily="34" charset="-120"/>
+              </a:rPr>
+              <a:t>工具：alibaba/open-code-review v1.12.4（全文件 scan 模式）</a:t>
+            </a:r>
+            <a:endParaRPr lang="en-US" sz="1300" dirty="0"/>
+          </a:p>
+          <a:p>
+            <a:pPr algn="l" marL="152400" indent="-152400">
+              <a:spcAft>
+                <a:spcPts val="1000"/>
+              </a:spcAft>
+              <a:buSzPct val="100000"/>
+              <a:buChar char="▪"/>
+            </a:pPr>
+            <a:r>
+              <a:rPr lang="en-US" sz="1300" dirty="0">
+                <a:solidFill>
+                  <a:srgbClr val="1A2E24"/>
+                </a:solidFill>
+                <a:latin typeface="微软雅黑" pitchFamily="34" charset="0"/>
+                <a:ea typeface="微软雅黑" pitchFamily="34" charset="-122"/>
+                <a:cs typeface="微软雅黑" pitchFamily="34" charset="-120"/>
+              </a:rPr>
+              <a:t>范围：376 个源文件（backend/app 全覆盖）</a:t>
+            </a:r>
+            <a:endParaRPr lang="en-US" sz="1300" dirty="0"/>
+          </a:p>
+          <a:p>
+            <a:pPr algn="l" marL="152400" indent="-152400">
+              <a:spcAft>
+                <a:spcPts val="1000"/>
+              </a:spcAft>
+              <a:buSzPct val="100000"/>
+              <a:buChar char="▪"/>
+            </a:pPr>
+            <a:r>
+              <a:rPr lang="en-US" sz="1300" dirty="0">
+                <a:solidFill>
+                  <a:srgbClr val="1A2E24"/>
+                </a:solidFill>
+                <a:latin typeface="微软雅黑" pitchFamily="34" charset="0"/>
+                <a:ea typeface="微软雅黑" pitchFamily="34" charset="-122"/>
+                <a:cs typeface="微软雅黑" pitchFamily="34" charset="-120"/>
+              </a:rPr>
+              <a:t>产出：918 条发现 — critical 36 / high 177 / medium 458 / low 247</a:t>
+            </a:r>
+            <a:endParaRPr lang="en-US" sz="1300" dirty="0"/>
+          </a:p>
+          <a:p>
+            <a:pPr algn="l" marL="152400" indent="-152400">
+              <a:spcAft>
+                <a:spcPts val="1000"/>
+              </a:spcAft>
+              <a:buSzPct val="100000"/>
+              <a:buChar char="▪"/>
+            </a:pPr>
+            <a:r>
+              <a:rPr lang="en-US" sz="1300" dirty="0">
+                <a:solidFill>
+                  <a:srgbClr val="1A2E24"/>
+                </a:solidFill>
+                <a:latin typeface="微软雅黑" pitchFamily="34" charset="0"/>
+                <a:ea typeface="微软雅黑" pitchFamily="34" charset="-122"/>
+                <a:cs typeface="微软雅黑" pitchFamily="34" charset="-120"/>
+              </a:rPr>
+              <a:t>消耗约 2,534 万 token，逐条甄别而非机械采纳</a:t>
+            </a:r>
+            <a:endParaRPr lang="en-US" sz="1300" dirty="0"/>
+          </a:p>
+          <a:p>
+            <a:pPr algn="l" marL="152400" indent="-152400">
+              <a:spcAft>
+                <a:spcPts val="1000"/>
+              </a:spcAft>
+              <a:buSzPct val="100000"/>
+              <a:buChar char="▪"/>
+            </a:pPr>
+            <a:r>
+              <a:rPr lang="en-US" sz="1300" dirty="0">
+                <a:solidFill>
+                  <a:srgbClr val="1A2E24"/>
+                </a:solidFill>
+                <a:latin typeface="微软雅黑" pitchFamily="34" charset="0"/>
+                <a:ea typeface="微软雅黑" pitchFamily="34" charset="-122"/>
+                <a:cs typeface="微软雅黑" pitchFamily="34" charset="-120"/>
+              </a:rPr>
+              <a:t>确证缺陷 19 处已修复；有意设计/误报显式记录不改</a:t>
+            </a:r>
+            <a:endParaRPr lang="en-US" sz="1300" dirty="0"/>
+          </a:p>
+        </p:txBody>
+      </p:sp>
+      <p:sp>
+        <p:nvSpPr>
+          <p:cNvPr id="10" name="Shape 8"/>
+          <p:cNvSpPr/>
+          <p:nvPr/>
+        </p:nvSpPr>
+        <p:spPr>
+          <a:xfrm>
+            <a:off x="6263640" y="1645920"/>
+            <a:ext cx="5486400" cy="4480560"/>
+          </a:xfrm>
+          <a:prstGeom prst="roundRect">
+            <a:avLst>
+              <a:gd name="adj" fmla="val 1429"/>
+            </a:avLst>
+          </a:prstGeom>
+          <a:solidFill>
+            <a:srgbClr val="FFFFFF"/>
+          </a:solidFill>
+          <a:ln/>
+          <a:effectLst>
+            <a:outerShdw sx="100000" sy="100000" kx="0" ky="0" algn="bl" rotWithShape="0" blurRad="88900" dist="25400" dir="5400000">
+              <a:srgbClr val="1A2E24">
+                <a:alpha val="13000"/>
+              </a:srgbClr>
+            </a:outerShdw>
+          </a:effectLst>
+        </p:spPr>
+      </p:sp>
+      <p:sp>
+        <p:nvSpPr>
+          <p:cNvPr id="11" name="Text 9"/>
+          <p:cNvSpPr/>
+          <p:nvPr/>
+        </p:nvSpPr>
+        <p:spPr>
+          <a:xfrm>
+            <a:off x="6556248" y="1874520"/>
+            <a:ext cx="3657600" cy="365760"/>
+          </a:xfrm>
+          <a:prstGeom prst="rect">
+            <a:avLst/>
+          </a:prstGeom>
+          <a:noFill/>
+          <a:ln/>
+        </p:spPr>
+        <p:txBody>
+          <a:bodyPr wrap="square" lIns="0" tIns="0" rIns="0" bIns="0" rtlCol="0" anchor="ctr"/>
+          <a:lstStyle/>
+          <a:p>
+            <a:pPr indent="0" marL="0">
+              <a:buNone/>
+            </a:pPr>
+            <a:r>
+              <a:rPr lang="en-US" sz="1600" b="1" dirty="0">
+                <a:solidFill>
+                  <a:srgbClr val="1F4A38"/>
+                </a:solidFill>
+                <a:latin typeface="微软雅黑" pitchFamily="34" charset="0"/>
+                <a:ea typeface="微软雅黑" pitchFamily="34" charset="-122"/>
+                <a:cs typeface="微软雅黑" pitchFamily="34" charset="-120"/>
+              </a:rPr>
+              <a:t>代表性修复</a:t>
+            </a:r>
+            <a:endParaRPr lang="en-US" sz="1600" dirty="0"/>
+          </a:p>
+        </p:txBody>
+      </p:sp>
+      <p:sp>
+        <p:nvSpPr>
+          <p:cNvPr id="12" name="Text 10"/>
+          <p:cNvSpPr/>
+          <p:nvPr/>
+        </p:nvSpPr>
+        <p:spPr>
+          <a:xfrm>
+            <a:off x="6556248" y="2331720"/>
+            <a:ext cx="4937760" cy="3566160"/>
+          </a:xfrm>
+          <a:prstGeom prst="rect">
+            <a:avLst/>
+          </a:prstGeom>
+          <a:noFill/>
+          <a:ln/>
+        </p:spPr>
+        <p:txBody>
+          <a:bodyPr wrap="square" lIns="0" tIns="0" rIns="0" bIns="0" rtlCol="0" anchor="t"/>
+          <a:lstStyle/>
+          <a:p>
+            <a:pPr algn="l" marL="152400" indent="-152400">
+              <a:spcAft>
+                <a:spcPts val="1000"/>
+              </a:spcAft>
+              <a:buSzPct val="100000"/>
+              <a:buChar char="▪"/>
+            </a:pPr>
+            <a:r>
+              <a:rPr lang="en-US" sz="1300" dirty="0">
+                <a:solidFill>
+                  <a:srgbClr val="1A2E24"/>
+                </a:solidFill>
+                <a:latin typeface="微软雅黑" pitchFamily="34" charset="0"/>
+                <a:ea typeface="微软雅黑" pitchFamily="34" charset="-122"/>
+                <a:cs typeface="微软雅黑" pitchFamily="34" charset="-120"/>
+              </a:rPr>
+              <a:t>事务装饰器两条路径均缺 commit：写入被静默丢弃</a:t>
+            </a:r>
+            <a:endParaRPr lang="en-US" sz="1300" dirty="0"/>
+          </a:p>
+          <a:p>
+            <a:pPr algn="l" marL="152400" indent="-152400">
+              <a:spcAft>
+                <a:spcPts val="1000"/>
+              </a:spcAft>
+              <a:buSzPct val="100000"/>
+              <a:buChar char="▪"/>
+            </a:pPr>
+            <a:r>
+              <a:rPr lang="en-US" sz="1300" dirty="0">
+                <a:solidFill>
+                  <a:srgbClr val="1A2E24"/>
+                </a:solidFill>
+                <a:latin typeface="微软雅黑" pitchFamily="34" charset="0"/>
+                <a:ea typeface="微软雅黑" pitchFamily="34" charset="-122"/>
+                <a:cs typeface="微软雅黑" pitchFamily="34" charset="-120"/>
+              </a:rPr>
+              <a:t>令牌 extra_claims 可覆盖 type/exp；缺 type 令牌 fail-open</a:t>
+            </a:r>
+            <a:endParaRPr lang="en-US" sz="1300" dirty="0"/>
+          </a:p>
+          <a:p>
+            <a:pPr algn="l" marL="152400" indent="-152400">
+              <a:spcAft>
+                <a:spcPts val="1000"/>
+              </a:spcAft>
+              <a:buSzPct val="100000"/>
+              <a:buChar char="▪"/>
+            </a:pPr>
+            <a:r>
+              <a:rPr lang="en-US" sz="1300" dirty="0">
+                <a:solidFill>
+                  <a:srgbClr val="1A2E24"/>
+                </a:solidFill>
+                <a:latin typeface="微软雅黑" pitchFamily="34" charset="0"/>
+                <a:ea typeface="微软雅黑" pitchFamily="34" charset="-122"/>
+                <a:cs typeface="微软雅黑" pitchFamily="34" charset="-120"/>
+              </a:rPr>
+              <a:t>永久吊销被降级为 24 小时 —— 已吊销令牌复活</a:t>
+            </a:r>
+            <a:endParaRPr lang="en-US" sz="1300" dirty="0"/>
+          </a:p>
+          <a:p>
+            <a:pPr algn="l" marL="152400" indent="-152400">
+              <a:spcAft>
+                <a:spcPts val="1000"/>
+              </a:spcAft>
+              <a:buSzPct val="100000"/>
+              <a:buChar char="▪"/>
+            </a:pPr>
+            <a:r>
+              <a:rPr lang="en-US" sz="1300" dirty="0">
+                <a:solidFill>
+                  <a:srgbClr val="1A2E24"/>
+                </a:solidFill>
+                <a:latin typeface="微软雅黑" pitchFamily="34" charset="0"/>
+                <a:ea typeface="微软雅黑" pitchFamily="34" charset="-122"/>
+                <a:cs typeface="微软雅黑" pitchFamily="34" charset="-120"/>
+              </a:rPr>
+              <a:t>require_admin 模式判定 fail-open（约 100 处调用）</a:t>
+            </a:r>
+            <a:endParaRPr lang="en-US" sz="1300" dirty="0"/>
+          </a:p>
+          <a:p>
+            <a:pPr algn="l" marL="152400" indent="-152400">
+              <a:spcAft>
+                <a:spcPts val="1000"/>
+              </a:spcAft>
+              <a:buSzPct val="100000"/>
+              <a:buChar char="▪"/>
+            </a:pPr>
+            <a:r>
+              <a:rPr lang="en-US" sz="1300" dirty="0">
+                <a:solidFill>
+                  <a:srgbClr val="1A2E24"/>
+                </a:solidFill>
+                <a:latin typeface="微软雅黑" pitchFamily="34" charset="0"/>
+                <a:ea typeface="微软雅黑" pitchFamily="34" charset="-122"/>
+                <a:cs typeface="微软雅黑" pitchFamily="34" charset="-120"/>
+              </a:rPr>
+              <a:t>AES 密钥长度非法时静默换随机密钥 → 数据永不可解</a:t>
+            </a:r>
+            <a:endParaRPr lang="en-US" sz="1300" dirty="0"/>
+          </a:p>
+          <a:p>
+            <a:pPr algn="l" marL="152400" indent="-152400">
+              <a:spcAft>
+                <a:spcPts val="1000"/>
+              </a:spcAft>
+              <a:buSzPct val="100000"/>
+              <a:buChar char="▪"/>
+            </a:pPr>
+            <a:r>
+              <a:rPr lang="en-US" sz="1300" dirty="0">
+                <a:solidFill>
+                  <a:srgbClr val="1A2E24"/>
+                </a:solidFill>
+                <a:latin typeface="微软雅黑" pitchFamily="34" charset="0"/>
+                <a:ea typeface="微软雅黑" pitchFamily="34" charset="-122"/>
+                <a:cs typeface="微软雅黑" pitchFamily="34" charset="-120"/>
+              </a:rPr>
+              <a:t>归档恢复路径穿越；本地门禁在 cp936 下「通过即崩溃」</a:t>
+            </a:r>
+            <a:endParaRPr lang="en-US" sz="1300" dirty="0"/>
+          </a:p>
+        </p:txBody>
+      </p:sp>
+    </p:spTree>
+  </p:cSld>
+  <p:clrMapOvr>
+    <a:masterClrMapping/>
+  </p:clrMapOvr>
+</p:sld>
+</file>
+
+<file path=ppt/slides/slide36.xml><?xml version="1.0" encoding="utf-8"?>
+<p:sld xmlns:a="http://schemas.openxmlformats.org/drawingml/2006/main" xmlns:r="http://schemas.openxmlformats.org/officeDocument/2006/relationships" xmlns:p="http://schemas.openxmlformats.org/presentationml/2006/main">
+  <p:cSld name="Slide 36">
+    <p:bg>
+      <p:bgPr>
+        <a:solidFill>
           <a:srgbClr val="14291F"/>
         </a:solidFill>
       </p:bgPr>
@@ -24400,1045 +25129,9 @@
                 <a:ea typeface="微软雅黑" pitchFamily="34" charset="-122"/>
                 <a:cs typeface="微软雅黑" pitchFamily="34" charset="-120"/>
               </a:rPr>
-              <a:t>33</a:t>
+              <a:t>34</a:t>
             </a:r>
             <a:endParaRPr lang="en-US" sz="1100" dirty="0"/>
-          </a:p>
-        </p:txBody>
-      </p:sp>
-    </p:spTree>
-  </p:cSld>
-  <p:clrMapOvr>
-    <a:masterClrMapping/>
-  </p:clrMapOvr>
-</p:sld>
-</file>
-
-<file path=ppt/slides/slide36.xml><?xml version="1.0" encoding="utf-8"?>
-<p:sld xmlns:a="http://schemas.openxmlformats.org/drawingml/2006/main" xmlns:r="http://schemas.openxmlformats.org/officeDocument/2006/relationships" xmlns:p="http://schemas.openxmlformats.org/presentationml/2006/main">
-  <p:cSld name="Slide 36">
-    <p:bg>
-      <p:bgPr>
-        <a:solidFill>
-          <a:srgbClr val="FFFFFF"/>
-        </a:solidFill>
-      </p:bgPr>
-    </p:bg>
-    <p:spTree>
-      <p:nvGrpSpPr>
-        <p:cNvPr id="1" name=""/>
-        <p:cNvGrpSpPr/>
-        <p:nvPr/>
-      </p:nvGrpSpPr>
-      <p:grpSpPr>
-        <a:xfrm>
-          <a:off x="0" y="0"/>
-          <a:ext cx="0" cy="0"/>
-          <a:chOff x="0" y="0"/>
-          <a:chExt cx="0" cy="0"/>
-        </a:xfrm>
-      </p:grpSpPr>
-      <p:sp>
-        <p:nvSpPr>
-          <p:cNvPr id="2" name="Shape 0"/>
-          <p:cNvSpPr/>
-          <p:nvPr/>
-        </p:nvSpPr>
-        <p:spPr>
-          <a:xfrm>
-            <a:off x="457200" y="457200"/>
-            <a:ext cx="128016" cy="128016"/>
-          </a:xfrm>
-          <a:prstGeom prst="rect">
-            <a:avLst/>
-          </a:prstGeom>
-          <a:solidFill>
-            <a:srgbClr val="C9A227"/>
-          </a:solidFill>
-          <a:ln/>
-        </p:spPr>
-      </p:sp>
-      <p:sp>
-        <p:nvSpPr>
-          <p:cNvPr id="3" name="Text 1"/>
-          <p:cNvSpPr/>
-          <p:nvPr/>
-        </p:nvSpPr>
-        <p:spPr>
-          <a:xfrm>
-            <a:off x="676656" y="329184"/>
-            <a:ext cx="7315200" cy="365760"/>
-          </a:xfrm>
-          <a:prstGeom prst="rect">
-            <a:avLst/>
-          </a:prstGeom>
-          <a:noFill/>
-          <a:ln/>
-        </p:spPr>
-        <p:txBody>
-          <a:bodyPr wrap="square" lIns="0" tIns="0" rIns="0" bIns="0" rtlCol="0" anchor="ctr"/>
-          <a:lstStyle/>
-          <a:p>
-            <a:pPr indent="0" marL="0">
-              <a:buNone/>
-            </a:pPr>
-            <a:r>
-              <a:rPr lang="en-US" sz="1250" b="1" spc="300" kern="0" dirty="0">
-                <a:solidFill>
-                  <a:srgbClr val="2D6A4F"/>
-                </a:solidFill>
-                <a:latin typeface="微软雅黑" pitchFamily="34" charset="0"/>
-                <a:ea typeface="微软雅黑" pitchFamily="34" charset="-122"/>
-                <a:cs typeface="微软雅黑" pitchFamily="34" charset="-120"/>
-              </a:rPr>
-              <a:t>06 部署运行</a:t>
-            </a:r>
-            <a:endParaRPr lang="en-US" sz="1250" dirty="0"/>
-          </a:p>
-        </p:txBody>
-      </p:sp>
-      <p:sp>
-        <p:nvSpPr>
-          <p:cNvPr id="4" name="Text 2"/>
-          <p:cNvSpPr/>
-          <p:nvPr/>
-        </p:nvSpPr>
-        <p:spPr>
-          <a:xfrm>
-            <a:off x="457200" y="713232"/>
-            <a:ext cx="11274552" cy="685800"/>
-          </a:xfrm>
-          <a:prstGeom prst="rect">
-            <a:avLst/>
-          </a:prstGeom>
-          <a:noFill/>
-          <a:ln/>
-        </p:spPr>
-        <p:txBody>
-          <a:bodyPr wrap="square" lIns="0" tIns="0" rIns="0" bIns="0" rtlCol="0" anchor="ctr"/>
-          <a:lstStyle/>
-          <a:p>
-            <a:pPr indent="0" marL="0">
-              <a:buNone/>
-            </a:pPr>
-            <a:r>
-              <a:rPr lang="en-US" sz="3000" b="1" dirty="0">
-                <a:solidFill>
-                  <a:srgbClr val="1A2E24"/>
-                </a:solidFill>
-                <a:latin typeface="微软雅黑" pitchFamily="34" charset="0"/>
-                <a:ea typeface="微软雅黑" pitchFamily="34" charset="-122"/>
-                <a:cs typeface="微软雅黑" pitchFamily="34" charset="-120"/>
-              </a:rPr>
-              <a:t>三种部署形态：按环境选型</a:t>
-            </a:r>
-            <a:endParaRPr lang="en-US" sz="3000" dirty="0"/>
-          </a:p>
-        </p:txBody>
-      </p:sp>
-      <p:sp>
-        <p:nvSpPr>
-          <p:cNvPr id="5" name="Text 3"/>
-          <p:cNvSpPr/>
-          <p:nvPr/>
-        </p:nvSpPr>
-        <p:spPr>
-          <a:xfrm>
-            <a:off x="11274552" y="6355080"/>
-            <a:ext cx="457200" cy="274320"/>
-          </a:xfrm>
-          <a:prstGeom prst="rect">
-            <a:avLst/>
-          </a:prstGeom>
-          <a:noFill/>
-          <a:ln/>
-        </p:spPr>
-        <p:txBody>
-          <a:bodyPr wrap="square" lIns="0" tIns="0" rIns="0" bIns="0" rtlCol="0" anchor="ctr"/>
-          <a:lstStyle/>
-          <a:p>
-            <a:pPr algn="r" indent="0" marL="0">
-              <a:buNone/>
-            </a:pPr>
-            <a:r>
-              <a:rPr lang="en-US" sz="1100" dirty="0">
-                <a:solidFill>
-                  <a:srgbClr val="5F6F66"/>
-                </a:solidFill>
-                <a:latin typeface="微软雅黑" pitchFamily="34" charset="0"/>
-                <a:ea typeface="微软雅黑" pitchFamily="34" charset="-122"/>
-                <a:cs typeface="微软雅黑" pitchFamily="34" charset="-120"/>
-              </a:rPr>
-              <a:t>34</a:t>
-            </a:r>
-            <a:endParaRPr lang="en-US" sz="1100" dirty="0"/>
-          </a:p>
-        </p:txBody>
-      </p:sp>
-      <p:sp>
-        <p:nvSpPr>
-          <p:cNvPr id="6" name="Text 4"/>
-          <p:cNvSpPr/>
-          <p:nvPr/>
-        </p:nvSpPr>
-        <p:spPr>
-          <a:xfrm>
-            <a:off x="457200" y="6355080"/>
-            <a:ext cx="3657600" cy="274320"/>
-          </a:xfrm>
-          <a:prstGeom prst="rect">
-            <a:avLst/>
-          </a:prstGeom>
-          <a:noFill/>
-          <a:ln/>
-        </p:spPr>
-        <p:txBody>
-          <a:bodyPr wrap="square" lIns="0" tIns="0" rIns="0" bIns="0" rtlCol="0" anchor="ctr"/>
-          <a:lstStyle/>
-          <a:p>
-            <a:pPr indent="0" marL="0">
-              <a:buNone/>
-            </a:pPr>
-            <a:r>
-              <a:rPr lang="en-US" sz="1050" dirty="0">
-                <a:solidFill>
-                  <a:srgbClr val="5F6F66"/>
-                </a:solidFill>
-                <a:latin typeface="微软雅黑" pitchFamily="34" charset="0"/>
-                <a:ea typeface="微软雅黑" pitchFamily="34" charset="-122"/>
-                <a:cs typeface="微软雅黑" pitchFamily="34" charset="-120"/>
-              </a:rPr>
-              <a:t>帮扶管理信息系统 v1.12.8</a:t>
-            </a:r>
-            <a:endParaRPr lang="en-US" sz="1050" dirty="0"/>
-          </a:p>
-        </p:txBody>
-      </p:sp>
-      <p:sp>
-        <p:nvSpPr>
-          <p:cNvPr id="7" name="Shape 5"/>
-          <p:cNvSpPr/>
-          <p:nvPr/>
-        </p:nvSpPr>
-        <p:spPr>
-          <a:xfrm>
-            <a:off x="457200" y="1691640"/>
-            <a:ext cx="3639312" cy="3931920"/>
-          </a:xfrm>
-          <a:prstGeom prst="roundRect">
-            <a:avLst>
-              <a:gd name="adj" fmla="val 1759"/>
-            </a:avLst>
-          </a:prstGeom>
-          <a:solidFill>
-            <a:srgbClr val="FFFFFF"/>
-          </a:solidFill>
-          <a:ln/>
-          <a:effectLst>
-            <a:outerShdw sx="100000" sy="100000" kx="0" ky="0" algn="bl" rotWithShape="0" blurRad="88900" dist="25400" dir="5400000">
-              <a:srgbClr val="1A2E24">
-                <a:alpha val="13000"/>
-              </a:srgbClr>
-            </a:outerShdw>
-          </a:effectLst>
-        </p:spPr>
-      </p:sp>
-      <p:sp>
-        <p:nvSpPr>
-          <p:cNvPr id="8" name="Text 6"/>
-          <p:cNvSpPr/>
-          <p:nvPr/>
-        </p:nvSpPr>
-        <p:spPr>
-          <a:xfrm>
-            <a:off x="731520" y="1920240"/>
-            <a:ext cx="3108960" cy="411480"/>
-          </a:xfrm>
-          <a:prstGeom prst="rect">
-            <a:avLst/>
-          </a:prstGeom>
-          <a:noFill/>
-          <a:ln/>
-        </p:spPr>
-        <p:txBody>
-          <a:bodyPr wrap="square" lIns="0" tIns="0" rIns="0" bIns="0" rtlCol="0" anchor="ctr"/>
-          <a:lstStyle/>
-          <a:p>
-            <a:pPr indent="0" marL="0">
-              <a:buNone/>
-            </a:pPr>
-            <a:r>
-              <a:rPr lang="en-US" sz="1700" b="1" dirty="0">
-                <a:solidFill>
-                  <a:srgbClr val="1F4A38"/>
-                </a:solidFill>
-                <a:latin typeface="微软雅黑" pitchFamily="34" charset="0"/>
-                <a:ea typeface="微软雅黑" pitchFamily="34" charset="-122"/>
-                <a:cs typeface="微软雅黑" pitchFamily="34" charset="-120"/>
-              </a:rPr>
-              <a:t>Windows 单机版</a:t>
-            </a:r>
-            <a:endParaRPr lang="en-US" sz="1700" dirty="0"/>
-          </a:p>
-        </p:txBody>
-      </p:sp>
-      <p:sp>
-        <p:nvSpPr>
-          <p:cNvPr id="9" name="Shape 7"/>
-          <p:cNvSpPr/>
-          <p:nvPr/>
-        </p:nvSpPr>
-        <p:spPr>
-          <a:xfrm>
-            <a:off x="731520" y="2395728"/>
-            <a:ext cx="2011680" cy="384048"/>
-          </a:xfrm>
-          <a:prstGeom prst="roundRect">
-            <a:avLst>
-              <a:gd name="adj" fmla="val 11905"/>
-            </a:avLst>
-          </a:prstGeom>
-          <a:solidFill>
-            <a:srgbClr val="C9A227"/>
-          </a:solidFill>
-          <a:ln/>
-        </p:spPr>
-      </p:sp>
-      <p:sp>
-        <p:nvSpPr>
-          <p:cNvPr id="10" name="Text 8"/>
-          <p:cNvSpPr/>
-          <p:nvPr/>
-        </p:nvSpPr>
-        <p:spPr>
-          <a:xfrm>
-            <a:off x="731520" y="2395728"/>
-            <a:ext cx="2011680" cy="384048"/>
-          </a:xfrm>
-          <a:prstGeom prst="rect">
-            <a:avLst/>
-          </a:prstGeom>
-          <a:noFill/>
-          <a:ln/>
-        </p:spPr>
-        <p:txBody>
-          <a:bodyPr wrap="square" lIns="0" tIns="0" rIns="0" bIns="0" rtlCol="0" anchor="ctr"/>
-          <a:lstStyle/>
-          <a:p>
-            <a:pPr algn="ctr" indent="0" marL="0">
-              <a:buNone/>
-            </a:pPr>
-            <a:r>
-              <a:rPr lang="en-US" sz="1250" b="1" dirty="0">
-                <a:solidFill>
-                  <a:srgbClr val="1A2E24"/>
-                </a:solidFill>
-                <a:latin typeface="微软雅黑" pitchFamily="34" charset="0"/>
-                <a:ea typeface="微软雅黑" pitchFamily="34" charset="-122"/>
-                <a:cs typeface="微软雅黑" pitchFamily="34" charset="-120"/>
-              </a:rPr>
-              <a:t>NSIS 安装包</a:t>
-            </a:r>
-            <a:endParaRPr lang="en-US" sz="1250" dirty="0"/>
-          </a:p>
-        </p:txBody>
-      </p:sp>
-      <p:sp>
-        <p:nvSpPr>
-          <p:cNvPr id="11" name="Text 9"/>
-          <p:cNvSpPr/>
-          <p:nvPr/>
-        </p:nvSpPr>
-        <p:spPr>
-          <a:xfrm>
-            <a:off x="731520" y="3017520"/>
-            <a:ext cx="3108960" cy="1828800"/>
-          </a:xfrm>
-          <a:prstGeom prst="rect">
-            <a:avLst/>
-          </a:prstGeom>
-          <a:noFill/>
-          <a:ln/>
-        </p:spPr>
-        <p:txBody>
-          <a:bodyPr wrap="square" lIns="0" tIns="0" rIns="0" bIns="0" rtlCol="0" anchor="t"/>
-          <a:lstStyle/>
-          <a:p>
-            <a:pPr algn="l" marL="152400" indent="-152400">
-              <a:spcAft>
-                <a:spcPts val="900"/>
-              </a:spcAft>
-              <a:buSzPct val="100000"/>
-              <a:buChar char="▪"/>
-            </a:pPr>
-            <a:r>
-              <a:rPr lang="en-US" sz="1300" dirty="0">
-                <a:solidFill>
-                  <a:srgbClr val="1A2E24"/>
-                </a:solidFill>
-                <a:latin typeface="微软雅黑" pitchFamily="34" charset="0"/>
-                <a:ea typeface="微软雅黑" pitchFamily="34" charset="-122"/>
-                <a:cs typeface="微软雅黑" pitchFamily="34" charset="-120"/>
-              </a:rPr>
-              <a:t>Win10/11 x64</a:t>
-            </a:r>
-            <a:endParaRPr lang="en-US" sz="1300" dirty="0"/>
-          </a:p>
-          <a:p>
-            <a:pPr algn="l" marL="152400" indent="-152400">
-              <a:spcAft>
-                <a:spcPts val="900"/>
-              </a:spcAft>
-              <a:buSzPct val="100000"/>
-              <a:buChar char="▪"/>
-            </a:pPr>
-            <a:r>
-              <a:rPr lang="en-US" sz="1300" dirty="0">
-                <a:solidFill>
-                  <a:srgbClr val="1A2E24"/>
-                </a:solidFill>
-                <a:latin typeface="微软雅黑" pitchFamily="34" charset="0"/>
-                <a:ea typeface="微软雅黑" pitchFamily="34" charset="-122"/>
-                <a:cs typeface="微软雅黑" pitchFamily="34" charset="-120"/>
-              </a:rPr>
-              <a:t>双击安装零依赖</a:t>
-            </a:r>
-            <a:endParaRPr lang="en-US" sz="1300" dirty="0"/>
-          </a:p>
-          <a:p>
-            <a:pPr algn="l" marL="152400" indent="-152400">
-              <a:spcAft>
-                <a:spcPts val="900"/>
-              </a:spcAft>
-              <a:buSzPct val="100000"/>
-              <a:buChar char="▪"/>
-            </a:pPr>
-            <a:r>
-              <a:rPr lang="en-US" sz="1300" dirty="0">
-                <a:solidFill>
-                  <a:srgbClr val="1A2E24"/>
-                </a:solidFill>
-                <a:latin typeface="微软雅黑" pitchFamily="34" charset="0"/>
-                <a:ea typeface="微软雅黑" pitchFamily="34" charset="-122"/>
-                <a:cs typeface="微软雅黑" pitchFamily="34" charset="-120"/>
-              </a:rPr>
-              <a:t>托盘/开机自启</a:t>
-            </a:r>
-            <a:endParaRPr lang="en-US" sz="1300" dirty="0"/>
-          </a:p>
-          <a:p>
-            <a:pPr algn="l" marL="152400" indent="-152400">
-              <a:spcAft>
-                <a:spcPts val="900"/>
-              </a:spcAft>
-              <a:buSzPct val="100000"/>
-              <a:buChar char="▪"/>
-            </a:pPr>
-            <a:r>
-              <a:rPr lang="en-US" sz="1300" dirty="0">
-                <a:solidFill>
-                  <a:srgbClr val="1A2E24"/>
-                </a:solidFill>
-                <a:latin typeface="微软雅黑" pitchFamily="34" charset="0"/>
-                <a:ea typeface="微软雅黑" pitchFamily="34" charset="-122"/>
-                <a:cs typeface="微软雅黑" pitchFamily="34" charset="-120"/>
-              </a:rPr>
-              <a:t>223 MB</a:t>
-            </a:r>
-            <a:endParaRPr lang="en-US" sz="1300" dirty="0"/>
-          </a:p>
-        </p:txBody>
-      </p:sp>
-      <p:sp>
-        <p:nvSpPr>
-          <p:cNvPr id="12" name="Text 10"/>
-          <p:cNvSpPr/>
-          <p:nvPr/>
-        </p:nvSpPr>
-        <p:spPr>
-          <a:xfrm>
-            <a:off x="731520" y="5074920"/>
-            <a:ext cx="1828800" cy="365760"/>
-          </a:xfrm>
-          <a:prstGeom prst="rect">
-            <a:avLst/>
-          </a:prstGeom>
-          <a:noFill/>
-          <a:ln/>
-        </p:spPr>
-        <p:txBody>
-          <a:bodyPr wrap="square" lIns="0" tIns="0" rIns="0" bIns="0" rtlCol="0" anchor="ctr"/>
-          <a:lstStyle/>
-          <a:p>
-            <a:pPr indent="0" marL="0">
-              <a:buNone/>
-            </a:pPr>
-            <a:endParaRPr lang="en-US" sz="1500" dirty="0"/>
-          </a:p>
-        </p:txBody>
-      </p:sp>
-      <p:sp>
-        <p:nvSpPr>
-          <p:cNvPr id="13" name="Shape 11"/>
-          <p:cNvSpPr/>
-          <p:nvPr/>
-        </p:nvSpPr>
-        <p:spPr>
-          <a:xfrm>
-            <a:off x="4370832" y="1691640"/>
-            <a:ext cx="3639312" cy="3931920"/>
-          </a:xfrm>
-          <a:prstGeom prst="roundRect">
-            <a:avLst>
-              <a:gd name="adj" fmla="val 1759"/>
-            </a:avLst>
-          </a:prstGeom>
-          <a:solidFill>
-            <a:srgbClr val="FFFFFF"/>
-          </a:solidFill>
-          <a:ln/>
-          <a:effectLst>
-            <a:outerShdw sx="100000" sy="100000" kx="0" ky="0" algn="bl" rotWithShape="0" blurRad="88900" dist="25400" dir="5400000">
-              <a:srgbClr val="1A2E24">
-                <a:alpha val="13000"/>
-              </a:srgbClr>
-            </a:outerShdw>
-          </a:effectLst>
-        </p:spPr>
-      </p:sp>
-      <p:sp>
-        <p:nvSpPr>
-          <p:cNvPr id="14" name="Text 12"/>
-          <p:cNvSpPr/>
-          <p:nvPr/>
-        </p:nvSpPr>
-        <p:spPr>
-          <a:xfrm>
-            <a:off x="4645152" y="1920240"/>
-            <a:ext cx="3108960" cy="411480"/>
-          </a:xfrm>
-          <a:prstGeom prst="rect">
-            <a:avLst/>
-          </a:prstGeom>
-          <a:noFill/>
-          <a:ln/>
-        </p:spPr>
-        <p:txBody>
-          <a:bodyPr wrap="square" lIns="0" tIns="0" rIns="0" bIns="0" rtlCol="0" anchor="ctr"/>
-          <a:lstStyle/>
-          <a:p>
-            <a:pPr indent="0" marL="0">
-              <a:buNone/>
-            </a:pPr>
-            <a:r>
-              <a:rPr lang="en-US" sz="1700" b="1" dirty="0">
-                <a:solidFill>
-                  <a:srgbClr val="1F4A38"/>
-                </a:solidFill>
-                <a:latin typeface="微软雅黑" pitchFamily="34" charset="0"/>
-                <a:ea typeface="微软雅黑" pitchFamily="34" charset="-122"/>
-                <a:cs typeface="微软雅黑" pitchFamily="34" charset="-120"/>
-              </a:rPr>
-              <a:t>麒麟桌面版</a:t>
-            </a:r>
-            <a:endParaRPr lang="en-US" sz="1700" dirty="0"/>
-          </a:p>
-        </p:txBody>
-      </p:sp>
-      <p:sp>
-        <p:nvSpPr>
-          <p:cNvPr id="15" name="Shape 13"/>
-          <p:cNvSpPr/>
-          <p:nvPr/>
-        </p:nvSpPr>
-        <p:spPr>
-          <a:xfrm>
-            <a:off x="4645152" y="2395728"/>
-            <a:ext cx="2011680" cy="384048"/>
-          </a:xfrm>
-          <a:prstGeom prst="roundRect">
-            <a:avLst>
-              <a:gd name="adj" fmla="val 11905"/>
-            </a:avLst>
-          </a:prstGeom>
-          <a:solidFill>
-            <a:srgbClr val="C9A227"/>
-          </a:solidFill>
-          <a:ln/>
-        </p:spPr>
-      </p:sp>
-      <p:sp>
-        <p:nvSpPr>
-          <p:cNvPr id="16" name="Text 14"/>
-          <p:cNvSpPr/>
-          <p:nvPr/>
-        </p:nvSpPr>
-        <p:spPr>
-          <a:xfrm>
-            <a:off x="4645152" y="2395728"/>
-            <a:ext cx="2011680" cy="384048"/>
-          </a:xfrm>
-          <a:prstGeom prst="rect">
-            <a:avLst/>
-          </a:prstGeom>
-          <a:noFill/>
-          <a:ln/>
-        </p:spPr>
-        <p:txBody>
-          <a:bodyPr wrap="square" lIns="0" tIns="0" rIns="0" bIns="0" rtlCol="0" anchor="ctr"/>
-          <a:lstStyle/>
-          <a:p>
-            <a:pPr algn="ctr" indent="0" marL="0">
-              <a:buNone/>
-            </a:pPr>
-            <a:r>
-              <a:rPr lang="en-US" sz="1250" b="1" dirty="0">
-                <a:solidFill>
-                  <a:srgbClr val="1A2E24"/>
-                </a:solidFill>
-                <a:latin typeface="微软雅黑" pitchFamily="34" charset="0"/>
-                <a:ea typeface="微软雅黑" pitchFamily="34" charset="-122"/>
-                <a:cs typeface="微软雅黑" pitchFamily="34" charset="-120"/>
-              </a:rPr>
-              <a:t>Electron DEB</a:t>
-            </a:r>
-            <a:endParaRPr lang="en-US" sz="1250" dirty="0"/>
-          </a:p>
-        </p:txBody>
-      </p:sp>
-      <p:sp>
-        <p:nvSpPr>
-          <p:cNvPr id="17" name="Text 15"/>
-          <p:cNvSpPr/>
-          <p:nvPr/>
-        </p:nvSpPr>
-        <p:spPr>
-          <a:xfrm>
-            <a:off x="4645152" y="3017520"/>
-            <a:ext cx="3108960" cy="1828800"/>
-          </a:xfrm>
-          <a:prstGeom prst="rect">
-            <a:avLst/>
-          </a:prstGeom>
-          <a:noFill/>
-          <a:ln/>
-        </p:spPr>
-        <p:txBody>
-          <a:bodyPr wrap="square" lIns="0" tIns="0" rIns="0" bIns="0" rtlCol="0" anchor="t"/>
-          <a:lstStyle/>
-          <a:p>
-            <a:pPr algn="l" marL="152400" indent="-152400">
-              <a:spcAft>
-                <a:spcPts val="900"/>
-              </a:spcAft>
-              <a:buSzPct val="100000"/>
-              <a:buChar char="▪"/>
-            </a:pPr>
-            <a:r>
-              <a:rPr lang="en-US" sz="1300" dirty="0">
-                <a:solidFill>
-                  <a:srgbClr val="1A2E24"/>
-                </a:solidFill>
-                <a:latin typeface="微软雅黑" pitchFamily="34" charset="0"/>
-                <a:ea typeface="微软雅黑" pitchFamily="34" charset="-122"/>
-                <a:cs typeface="微软雅黑" pitchFamily="34" charset="-120"/>
-              </a:rPr>
-              <a:t>银河麒麟 V10 ARM64</a:t>
-            </a:r>
-            <a:endParaRPr lang="en-US" sz="1300" dirty="0"/>
-          </a:p>
-          <a:p>
-            <a:pPr algn="l" marL="152400" indent="-152400">
-              <a:spcAft>
-                <a:spcPts val="900"/>
-              </a:spcAft>
-              <a:buSzPct val="100000"/>
-              <a:buChar char="▪"/>
-            </a:pPr>
-            <a:r>
-              <a:rPr lang="en-US" sz="1300" dirty="0">
-                <a:solidFill>
-                  <a:srgbClr val="1A2E24"/>
-                </a:solidFill>
-                <a:latin typeface="微软雅黑" pitchFamily="34" charset="0"/>
-                <a:ea typeface="微软雅黑" pitchFamily="34" charset="-122"/>
-                <a:cs typeface="微软雅黑" pitchFamily="34" charset="-120"/>
-              </a:rPr>
-              <a:t>桌面双击运行</a:t>
-            </a:r>
-            <a:endParaRPr lang="en-US" sz="1300" dirty="0"/>
-          </a:p>
-          <a:p>
-            <a:pPr algn="l" marL="152400" indent="-152400">
-              <a:spcAft>
-                <a:spcPts val="900"/>
-              </a:spcAft>
-              <a:buSzPct val="100000"/>
-              <a:buChar char="▪"/>
-            </a:pPr>
-            <a:r>
-              <a:rPr lang="en-US" sz="1300" dirty="0">
-                <a:solidFill>
-                  <a:srgbClr val="1A2E24"/>
-                </a:solidFill>
-                <a:latin typeface="微软雅黑" pitchFamily="34" charset="0"/>
-                <a:ea typeface="微软雅黑" pitchFamily="34" charset="-122"/>
-                <a:cs typeface="微软雅黑" pitchFamily="34" charset="-120"/>
-              </a:rPr>
-              <a:t>党政机适配</a:t>
-            </a:r>
-            <a:endParaRPr lang="en-US" sz="1300" dirty="0"/>
-          </a:p>
-          <a:p>
-            <a:pPr algn="l" marL="152400" indent="-152400">
-              <a:spcAft>
-                <a:spcPts val="900"/>
-              </a:spcAft>
-              <a:buSzPct val="100000"/>
-              <a:buChar char="▪"/>
-            </a:pPr>
-            <a:r>
-              <a:rPr lang="en-US" sz="1300" dirty="0">
-                <a:solidFill>
-                  <a:srgbClr val="1A2E24"/>
-                </a:solidFill>
-                <a:latin typeface="微软雅黑" pitchFamily="34" charset="0"/>
-                <a:ea typeface="微软雅黑" pitchFamily="34" charset="-122"/>
-                <a:cs typeface="微软雅黑" pitchFamily="34" charset="-120"/>
-              </a:rPr>
-              <a:t>132 MB</a:t>
-            </a:r>
-            <a:endParaRPr lang="en-US" sz="1300" dirty="0"/>
-          </a:p>
-        </p:txBody>
-      </p:sp>
-      <p:sp>
-        <p:nvSpPr>
-          <p:cNvPr id="18" name="Text 16"/>
-          <p:cNvSpPr/>
-          <p:nvPr/>
-        </p:nvSpPr>
-        <p:spPr>
-          <a:xfrm>
-            <a:off x="4645152" y="5074920"/>
-            <a:ext cx="1828800" cy="365760"/>
-          </a:xfrm>
-          <a:prstGeom prst="rect">
-            <a:avLst/>
-          </a:prstGeom>
-          <a:noFill/>
-          <a:ln/>
-        </p:spPr>
-        <p:txBody>
-          <a:bodyPr wrap="square" lIns="0" tIns="0" rIns="0" bIns="0" rtlCol="0" anchor="ctr"/>
-          <a:lstStyle/>
-          <a:p>
-            <a:pPr indent="0" marL="0">
-              <a:buNone/>
-            </a:pPr>
-            <a:endParaRPr lang="en-US" sz="1500" dirty="0"/>
-          </a:p>
-        </p:txBody>
-      </p:sp>
-      <p:sp>
-        <p:nvSpPr>
-          <p:cNvPr id="19" name="Shape 17"/>
-          <p:cNvSpPr/>
-          <p:nvPr/>
-        </p:nvSpPr>
-        <p:spPr>
-          <a:xfrm>
-            <a:off x="8284464" y="1691640"/>
-            <a:ext cx="3639312" cy="3931920"/>
-          </a:xfrm>
-          <a:prstGeom prst="roundRect">
-            <a:avLst>
-              <a:gd name="adj" fmla="val 1759"/>
-            </a:avLst>
-          </a:prstGeom>
-          <a:solidFill>
-            <a:srgbClr val="FFFFFF"/>
-          </a:solidFill>
-          <a:ln/>
-          <a:effectLst>
-            <a:outerShdw sx="100000" sy="100000" kx="0" ky="0" algn="bl" rotWithShape="0" blurRad="88900" dist="25400" dir="5400000">
-              <a:srgbClr val="1A2E24">
-                <a:alpha val="13000"/>
-              </a:srgbClr>
-            </a:outerShdw>
-          </a:effectLst>
-        </p:spPr>
-      </p:sp>
-      <p:sp>
-        <p:nvSpPr>
-          <p:cNvPr id="20" name="Text 18"/>
-          <p:cNvSpPr/>
-          <p:nvPr/>
-        </p:nvSpPr>
-        <p:spPr>
-          <a:xfrm>
-            <a:off x="8558784" y="1920240"/>
-            <a:ext cx="3108960" cy="411480"/>
-          </a:xfrm>
-          <a:prstGeom prst="rect">
-            <a:avLst/>
-          </a:prstGeom>
-          <a:noFill/>
-          <a:ln/>
-        </p:spPr>
-        <p:txBody>
-          <a:bodyPr wrap="square" lIns="0" tIns="0" rIns="0" bIns="0" rtlCol="0" anchor="ctr"/>
-          <a:lstStyle/>
-          <a:p>
-            <a:pPr indent="0" marL="0">
-              <a:buNone/>
-            </a:pPr>
-            <a:r>
-              <a:rPr lang="en-US" sz="1700" b="1" dirty="0">
-                <a:solidFill>
-                  <a:srgbClr val="1F4A38"/>
-                </a:solidFill>
-                <a:latin typeface="微软雅黑" pitchFamily="34" charset="0"/>
-                <a:ea typeface="微软雅黑" pitchFamily="34" charset="-122"/>
-                <a:cs typeface="微软雅黑" pitchFamily="34" charset="-120"/>
-              </a:rPr>
-              <a:t>麒麟服务版</a:t>
-            </a:r>
-            <a:endParaRPr lang="en-US" sz="1700" dirty="0"/>
-          </a:p>
-        </p:txBody>
-      </p:sp>
-      <p:sp>
-        <p:nvSpPr>
-          <p:cNvPr id="21" name="Shape 19"/>
-          <p:cNvSpPr/>
-          <p:nvPr/>
-        </p:nvSpPr>
-        <p:spPr>
-          <a:xfrm>
-            <a:off x="8558784" y="2395728"/>
-            <a:ext cx="2011680" cy="384048"/>
-          </a:xfrm>
-          <a:prstGeom prst="roundRect">
-            <a:avLst>
-              <a:gd name="adj" fmla="val 11905"/>
-            </a:avLst>
-          </a:prstGeom>
-          <a:solidFill>
-            <a:srgbClr val="C9A227"/>
-          </a:solidFill>
-          <a:ln/>
-        </p:spPr>
-      </p:sp>
-      <p:sp>
-        <p:nvSpPr>
-          <p:cNvPr id="22" name="Text 20"/>
-          <p:cNvSpPr/>
-          <p:nvPr/>
-        </p:nvSpPr>
-        <p:spPr>
-          <a:xfrm>
-            <a:off x="8558784" y="2395728"/>
-            <a:ext cx="2011680" cy="384048"/>
-          </a:xfrm>
-          <a:prstGeom prst="rect">
-            <a:avLst/>
-          </a:prstGeom>
-          <a:noFill/>
-          <a:ln/>
-        </p:spPr>
-        <p:txBody>
-          <a:bodyPr wrap="square" lIns="0" tIns="0" rIns="0" bIns="0" rtlCol="0" anchor="ctr"/>
-          <a:lstStyle/>
-          <a:p>
-            <a:pPr algn="ctr" indent="0" marL="0">
-              <a:buNone/>
-            </a:pPr>
-            <a:r>
-              <a:rPr lang="en-US" sz="1250" b="1" dirty="0">
-                <a:solidFill>
-                  <a:srgbClr val="1A2E24"/>
-                </a:solidFill>
-                <a:latin typeface="微软雅黑" pitchFamily="34" charset="0"/>
-                <a:ea typeface="微软雅黑" pitchFamily="34" charset="-122"/>
-                <a:cs typeface="微软雅黑" pitchFamily="34" charset="-120"/>
-              </a:rPr>
-              <a:t>Standalone DEB</a:t>
-            </a:r>
-            <a:endParaRPr lang="en-US" sz="1250" dirty="0"/>
-          </a:p>
-        </p:txBody>
-      </p:sp>
-      <p:sp>
-        <p:nvSpPr>
-          <p:cNvPr id="23" name="Text 21"/>
-          <p:cNvSpPr/>
-          <p:nvPr/>
-        </p:nvSpPr>
-        <p:spPr>
-          <a:xfrm>
-            <a:off x="8558784" y="3017520"/>
-            <a:ext cx="3108960" cy="1828800"/>
-          </a:xfrm>
-          <a:prstGeom prst="rect">
-            <a:avLst/>
-          </a:prstGeom>
-          <a:noFill/>
-          <a:ln/>
-        </p:spPr>
-        <p:txBody>
-          <a:bodyPr wrap="square" lIns="0" tIns="0" rIns="0" bIns="0" rtlCol="0" anchor="t"/>
-          <a:lstStyle/>
-          <a:p>
-            <a:pPr algn="l" marL="152400" indent="-152400">
-              <a:spcAft>
-                <a:spcPts val="900"/>
-              </a:spcAft>
-              <a:buSzPct val="100000"/>
-              <a:buChar char="▪"/>
-            </a:pPr>
-            <a:r>
-              <a:rPr lang="en-US" sz="1300" dirty="0">
-                <a:solidFill>
-                  <a:srgbClr val="1A2E24"/>
-                </a:solidFill>
-                <a:latin typeface="微软雅黑" pitchFamily="34" charset="0"/>
-                <a:ea typeface="微软雅黑" pitchFamily="34" charset="-122"/>
-                <a:cs typeface="微软雅黑" pitchFamily="34" charset="-120"/>
-              </a:rPr>
-              <a:t>纯 Web 无桌面</a:t>
-            </a:r>
-            <a:endParaRPr lang="en-US" sz="1300" dirty="0"/>
-          </a:p>
-          <a:p>
-            <a:pPr algn="l" marL="152400" indent="-152400">
-              <a:spcAft>
-                <a:spcPts val="900"/>
-              </a:spcAft>
-              <a:buSzPct val="100000"/>
-              <a:buChar char="▪"/>
-            </a:pPr>
-            <a:r>
-              <a:rPr lang="en-US" sz="1300" dirty="0">
-                <a:solidFill>
-                  <a:srgbClr val="1A2E24"/>
-                </a:solidFill>
-                <a:latin typeface="微软雅黑" pitchFamily="34" charset="0"/>
-                <a:ea typeface="微软雅黑" pitchFamily="34" charset="-122"/>
-                <a:cs typeface="微软雅黑" pitchFamily="34" charset="-120"/>
-              </a:rPr>
-              <a:t>systemd 托管</a:t>
-            </a:r>
-            <a:endParaRPr lang="en-US" sz="1300" dirty="0"/>
-          </a:p>
-          <a:p>
-            <a:pPr algn="l" marL="152400" indent="-152400">
-              <a:spcAft>
-                <a:spcPts val="900"/>
-              </a:spcAft>
-              <a:buSzPct val="100000"/>
-              <a:buChar char="▪"/>
-            </a:pPr>
-            <a:r>
-              <a:rPr lang="en-US" sz="1300" dirty="0">
-                <a:solidFill>
-                  <a:srgbClr val="1A2E24"/>
-                </a:solidFill>
-                <a:latin typeface="微软雅黑" pitchFamily="34" charset="0"/>
-                <a:ea typeface="微软雅黑" pitchFamily="34" charset="-122"/>
-                <a:cs typeface="微软雅黑" pitchFamily="34" charset="-120"/>
-              </a:rPr>
-              <a:t>浏览器访问</a:t>
-            </a:r>
-            <a:endParaRPr lang="en-US" sz="1300" dirty="0"/>
-          </a:p>
-          <a:p>
-            <a:pPr algn="l" marL="152400" indent="-152400">
-              <a:spcAft>
-                <a:spcPts val="900"/>
-              </a:spcAft>
-              <a:buSzPct val="100000"/>
-              <a:buChar char="▪"/>
-            </a:pPr>
-            <a:r>
-              <a:rPr lang="en-US" sz="1300" dirty="0">
-                <a:solidFill>
-                  <a:srgbClr val="1A2E24"/>
-                </a:solidFill>
-                <a:latin typeface="微软雅黑" pitchFamily="34" charset="0"/>
-                <a:ea typeface="微软雅黑" pitchFamily="34" charset="-122"/>
-                <a:cs typeface="微软雅黑" pitchFamily="34" charset="-120"/>
-              </a:rPr>
-              <a:t>55 MB</a:t>
-            </a:r>
-            <a:endParaRPr lang="en-US" sz="1300" dirty="0"/>
-          </a:p>
-        </p:txBody>
-      </p:sp>
-      <p:sp>
-        <p:nvSpPr>
-          <p:cNvPr id="24" name="Text 22"/>
-          <p:cNvSpPr/>
-          <p:nvPr/>
-        </p:nvSpPr>
-        <p:spPr>
-          <a:xfrm>
-            <a:off x="8558784" y="5074920"/>
-            <a:ext cx="1828800" cy="365760"/>
-          </a:xfrm>
-          <a:prstGeom prst="rect">
-            <a:avLst/>
-          </a:prstGeom>
-          <a:noFill/>
-          <a:ln/>
-        </p:spPr>
-        <p:txBody>
-          <a:bodyPr wrap="square" lIns="0" tIns="0" rIns="0" bIns="0" rtlCol="0" anchor="ctr"/>
-          <a:lstStyle/>
-          <a:p>
-            <a:pPr indent="0" marL="0">
-              <a:buNone/>
-            </a:pPr>
-            <a:endParaRPr lang="en-US" sz="1500" dirty="0"/>
-          </a:p>
-        </p:txBody>
-      </p:sp>
-      <p:sp>
-        <p:nvSpPr>
-          <p:cNvPr id="25" name="Text 23"/>
-          <p:cNvSpPr/>
-          <p:nvPr/>
-        </p:nvSpPr>
-        <p:spPr>
-          <a:xfrm>
-            <a:off x="457200" y="5897880"/>
-            <a:ext cx="11247120" cy="365760"/>
-          </a:xfrm>
-          <a:prstGeom prst="rect">
-            <a:avLst/>
-          </a:prstGeom>
-          <a:noFill/>
-          <a:ln/>
-        </p:spPr>
-        <p:txBody>
-          <a:bodyPr wrap="square" lIns="0" tIns="0" rIns="0" bIns="0" rtlCol="0" anchor="ctr"/>
-          <a:lstStyle/>
-          <a:p>
-            <a:pPr indent="0" marL="0">
-              <a:buNone/>
-            </a:pPr>
-            <a:r>
-              <a:rPr lang="en-US" sz="1250" dirty="0">
-                <a:solidFill>
-                  <a:srgbClr val="5F6F66"/>
-                </a:solidFill>
-                <a:latin typeface="微软雅黑" pitchFamily="34" charset="0"/>
-                <a:ea typeface="微软雅黑" pitchFamily="34" charset="-122"/>
-                <a:cs typeface="微软雅黑" pitchFamily="34" charset="-120"/>
-              </a:rPr>
-              <a:t>全部形态离线可用；安装包内含 VC++ 运行库（Windows）与 Python 运行时，目标机器无需预装任何环境</a:t>
-            </a:r>
-            <a:endParaRPr lang="en-US" sz="1250" dirty="0"/>
           </a:p>
         </p:txBody>
       </p:sp>
@@ -25566,7 +25259,7 @@
                 <a:ea typeface="微软雅黑" pitchFamily="34" charset="-122"/>
                 <a:cs typeface="微软雅黑" pitchFamily="34" charset="-120"/>
               </a:rPr>
-              <a:t>备份恢复与离线升级</a:t>
+              <a:t>三种部署形态：按环境选型</a:t>
             </a:r>
             <a:endParaRPr lang="en-US" sz="3000" dirty="0"/>
           </a:p>
@@ -25658,12 +25351,12 @@
         </p:nvSpPr>
         <p:spPr>
           <a:xfrm>
-            <a:off x="457200" y="1645920"/>
-            <a:ext cx="5486400" cy="4480560"/>
+            <a:off x="457200" y="1691640"/>
+            <a:ext cx="3639312" cy="3931920"/>
           </a:xfrm>
           <a:prstGeom prst="roundRect">
             <a:avLst>
-              <a:gd name="adj" fmla="val 1429"/>
+              <a:gd name="adj" fmla="val 1759"/>
             </a:avLst>
           </a:prstGeom>
           <a:solidFill>
@@ -25687,8 +25380,8 @@
         </p:nvSpPr>
         <p:spPr>
           <a:xfrm>
-            <a:off x="749808" y="1874520"/>
-            <a:ext cx="3657600" cy="365760"/>
+            <a:off x="731520" y="1920240"/>
+            <a:ext cx="3108960" cy="411480"/>
           </a:xfrm>
           <a:prstGeom prst="rect">
             <a:avLst/>
@@ -25704,7 +25397,7 @@
               <a:buNone/>
             </a:pPr>
             <a:r>
-              <a:rPr lang="en-US" sz="1600" b="1" dirty="0">
+              <a:rPr lang="en-US" sz="1700" b="1" dirty="0">
                 <a:solidFill>
                   <a:srgbClr val="1F4A38"/>
                 </a:solidFill>
@@ -25712,22 +25405,83 @@
                 <a:ea typeface="微软雅黑" pitchFamily="34" charset="-122"/>
                 <a:cs typeface="微软雅黑" pitchFamily="34" charset="-120"/>
               </a:rPr>
-              <a:t>备份与恢复</a:t>
-            </a:r>
-            <a:endParaRPr lang="en-US" sz="1600" dirty="0"/>
-          </a:p>
-        </p:txBody>
-      </p:sp>
-      <p:sp>
-        <p:nvSpPr>
-          <p:cNvPr id="9" name="Text 7"/>
-          <p:cNvSpPr/>
-          <p:nvPr/>
-        </p:nvSpPr>
-        <p:spPr>
-          <a:xfrm>
-            <a:off x="749808" y="2331720"/>
-            <a:ext cx="4937760" cy="3566160"/>
+              <a:t>Windows 单机版</a:t>
+            </a:r>
+            <a:endParaRPr lang="en-US" sz="1700" dirty="0"/>
+          </a:p>
+        </p:txBody>
+      </p:sp>
+      <p:sp>
+        <p:nvSpPr>
+          <p:cNvPr id="9" name="Shape 7"/>
+          <p:cNvSpPr/>
+          <p:nvPr/>
+        </p:nvSpPr>
+        <p:spPr>
+          <a:xfrm>
+            <a:off x="731520" y="2395728"/>
+            <a:ext cx="2011680" cy="384048"/>
+          </a:xfrm>
+          <a:prstGeom prst="roundRect">
+            <a:avLst>
+              <a:gd name="adj" fmla="val 11905"/>
+            </a:avLst>
+          </a:prstGeom>
+          <a:solidFill>
+            <a:srgbClr val="C9A227"/>
+          </a:solidFill>
+          <a:ln/>
+        </p:spPr>
+      </p:sp>
+      <p:sp>
+        <p:nvSpPr>
+          <p:cNvPr id="10" name="Text 8"/>
+          <p:cNvSpPr/>
+          <p:nvPr/>
+        </p:nvSpPr>
+        <p:spPr>
+          <a:xfrm>
+            <a:off x="731520" y="2395728"/>
+            <a:ext cx="2011680" cy="384048"/>
+          </a:xfrm>
+          <a:prstGeom prst="rect">
+            <a:avLst/>
+          </a:prstGeom>
+          <a:noFill/>
+          <a:ln/>
+        </p:spPr>
+        <p:txBody>
+          <a:bodyPr wrap="square" lIns="0" tIns="0" rIns="0" bIns="0" rtlCol="0" anchor="ctr"/>
+          <a:lstStyle/>
+          <a:p>
+            <a:pPr algn="ctr" indent="0" marL="0">
+              <a:buNone/>
+            </a:pPr>
+            <a:r>
+              <a:rPr lang="en-US" sz="1250" b="1" dirty="0">
+                <a:solidFill>
+                  <a:srgbClr val="1A2E24"/>
+                </a:solidFill>
+                <a:latin typeface="微软雅黑" pitchFamily="34" charset="0"/>
+                <a:ea typeface="微软雅黑" pitchFamily="34" charset="-122"/>
+                <a:cs typeface="微软雅黑" pitchFamily="34" charset="-120"/>
+              </a:rPr>
+              <a:t>NSIS 安装包</a:t>
+            </a:r>
+            <a:endParaRPr lang="en-US" sz="1250" dirty="0"/>
+          </a:p>
+        </p:txBody>
+      </p:sp>
+      <p:sp>
+        <p:nvSpPr>
+          <p:cNvPr id="11" name="Text 9"/>
+          <p:cNvSpPr/>
+          <p:nvPr/>
+        </p:nvSpPr>
+        <p:spPr>
+          <a:xfrm>
+            <a:off x="731520" y="3017520"/>
+            <a:ext cx="3108960" cy="1828800"/>
           </a:xfrm>
           <a:prstGeom prst="rect">
             <a:avLst/>
@@ -25741,7 +25495,7 @@
           <a:p>
             <a:pPr algn="l" marL="152400" indent="-152400">
               <a:spcAft>
-                <a:spcPts val="1000"/>
+                <a:spcPts val="900"/>
               </a:spcAft>
               <a:buSzPct val="100000"/>
               <a:buChar char="▪"/>
@@ -25755,14 +25509,14 @@
                 <a:ea typeface="微软雅黑" pitchFamily="34" charset="-122"/>
                 <a:cs typeface="微软雅黑" pitchFamily="34" charset="-120"/>
               </a:rPr>
-              <a:t>备份包必含数据库本体，缺失即抛错（fail-loud）</a:t>
+              <a:t>Win10/11 x64</a:t>
             </a:r>
             <a:endParaRPr lang="en-US" sz="1300" dirty="0"/>
           </a:p>
           <a:p>
             <a:pPr algn="l" marL="152400" indent="-152400">
               <a:spcAft>
-                <a:spcPts val="1000"/>
+                <a:spcPts val="900"/>
               </a:spcAft>
               <a:buSzPct val="100000"/>
               <a:buChar char="▪"/>
@@ -25776,14 +25530,14 @@
                 <a:ea typeface="微软雅黑" pitchFamily="34" charset="-122"/>
                 <a:cs typeface="微软雅黑" pitchFamily="34" charset="-120"/>
               </a:rPr>
-              <a:t>列表标注 is_encrypted / database_included</a:t>
+              <a:t>双击安装零依赖</a:t>
             </a:r>
             <a:endParaRPr lang="en-US" sz="1300" dirty="0"/>
           </a:p>
           <a:p>
             <a:pPr algn="l" marL="152400" indent="-152400">
               <a:spcAft>
-                <a:spcPts val="1000"/>
+                <a:spcPts val="900"/>
               </a:spcAft>
               <a:buSzPct val="100000"/>
               <a:buChar char="▪"/>
@@ -25797,14 +25551,14 @@
                 <a:ea typeface="微软雅黑" pitchFamily="34" charset="-122"/>
                 <a:cs typeface="微软雅黑" pitchFamily="34" charset="-120"/>
               </a:rPr>
-              <a:t>上传恢复：8MB 分块流式落盘防 OOM，10GB 防御上限</a:t>
+              <a:t>托盘/开机自启</a:t>
             </a:r>
             <a:endParaRPr lang="en-US" sz="1300" dirty="0"/>
           </a:p>
           <a:p>
             <a:pPr algn="l" marL="152400" indent="-152400">
               <a:spcAft>
-                <a:spcPts val="1000"/>
+                <a:spcPts val="900"/>
               </a:spcAft>
               <a:buSzPct val="100000"/>
               <a:buChar char="▪"/>
@@ -25818,47 +25572,54 @@
                 <a:ea typeface="微软雅黑" pitchFamily="34" charset="-122"/>
                 <a:cs typeface="微软雅黑" pitchFamily="34" charset="-120"/>
               </a:rPr>
-              <a:t>加密备份口令（PBKDF2+Fernet）；全部拒绝路径清理临时文件</a:t>
+              <a:t>223 MB</a:t>
             </a:r>
             <a:endParaRPr lang="en-US" sz="1300" dirty="0"/>
           </a:p>
-          <a:p>
-            <a:pPr algn="l" marL="152400" indent="-152400">
-              <a:spcAft>
-                <a:spcPts val="1000"/>
-              </a:spcAft>
-              <a:buSzPct val="100000"/>
-              <a:buChar char="▪"/>
-            </a:pPr>
-            <a:r>
-              <a:rPr lang="en-US" sz="1300" dirty="0">
-                <a:solidFill>
-                  <a:srgbClr val="1A2E24"/>
-                </a:solidFill>
-                <a:latin typeface="微软雅黑" pitchFamily="34" charset="0"/>
-                <a:ea typeface="微软雅黑" pitchFamily="34" charset="-122"/>
-                <a:cs typeface="微软雅黑" pitchFamily="34" charset="-120"/>
-              </a:rPr>
-              <a:t>路径单一来源：以会话引擎/DATABASE_URL 为准（历史错源事故根治）</a:t>
-            </a:r>
-            <a:endParaRPr lang="en-US" sz="1300" dirty="0"/>
-          </a:p>
-        </p:txBody>
-      </p:sp>
-      <p:sp>
-        <p:nvSpPr>
-          <p:cNvPr id="10" name="Shape 8"/>
-          <p:cNvSpPr/>
-          <p:nvPr/>
-        </p:nvSpPr>
-        <p:spPr>
-          <a:xfrm>
-            <a:off x="6263640" y="1645920"/>
-            <a:ext cx="5486400" cy="4480560"/>
+        </p:txBody>
+      </p:sp>
+      <p:sp>
+        <p:nvSpPr>
+          <p:cNvPr id="12" name="Text 10"/>
+          <p:cNvSpPr/>
+          <p:nvPr/>
+        </p:nvSpPr>
+        <p:spPr>
+          <a:xfrm>
+            <a:off x="731520" y="5074920"/>
+            <a:ext cx="1828800" cy="365760"/>
+          </a:xfrm>
+          <a:prstGeom prst="rect">
+            <a:avLst/>
+          </a:prstGeom>
+          <a:noFill/>
+          <a:ln/>
+        </p:spPr>
+        <p:txBody>
+          <a:bodyPr wrap="square" lIns="0" tIns="0" rIns="0" bIns="0" rtlCol="0" anchor="ctr"/>
+          <a:lstStyle/>
+          <a:p>
+            <a:pPr indent="0" marL="0">
+              <a:buNone/>
+            </a:pPr>
+            <a:endParaRPr lang="en-US" sz="1500" dirty="0"/>
+          </a:p>
+        </p:txBody>
+      </p:sp>
+      <p:sp>
+        <p:nvSpPr>
+          <p:cNvPr id="13" name="Shape 11"/>
+          <p:cNvSpPr/>
+          <p:nvPr/>
+        </p:nvSpPr>
+        <p:spPr>
+          <a:xfrm>
+            <a:off x="4370832" y="1691640"/>
+            <a:ext cx="3639312" cy="3931920"/>
           </a:xfrm>
           <a:prstGeom prst="roundRect">
             <a:avLst>
-              <a:gd name="adj" fmla="val 1429"/>
+              <a:gd name="adj" fmla="val 1759"/>
             </a:avLst>
           </a:prstGeom>
           <a:solidFill>
@@ -25876,14 +25637,14 @@
       </p:sp>
       <p:sp>
         <p:nvSpPr>
-          <p:cNvPr id="11" name="Text 9"/>
-          <p:cNvSpPr/>
-          <p:nvPr/>
-        </p:nvSpPr>
-        <p:spPr>
-          <a:xfrm>
-            <a:off x="6556248" y="1874520"/>
-            <a:ext cx="4114800" cy="365760"/>
+          <p:cNvPr id="14" name="Text 12"/>
+          <p:cNvSpPr/>
+          <p:nvPr/>
+        </p:nvSpPr>
+        <p:spPr>
+          <a:xfrm>
+            <a:off x="4645152" y="1920240"/>
+            <a:ext cx="3108960" cy="411480"/>
           </a:xfrm>
           <a:prstGeom prst="rect">
             <a:avLst/>
@@ -25899,7 +25660,7 @@
               <a:buNone/>
             </a:pPr>
             <a:r>
-              <a:rPr lang="en-US" sz="1600" b="1" dirty="0">
+              <a:rPr lang="en-US" sz="1700" b="1" dirty="0">
                 <a:solidFill>
                   <a:srgbClr val="1F4A38"/>
                 </a:solidFill>
@@ -25907,22 +25668,83 @@
                 <a:ea typeface="微软雅黑" pitchFamily="34" charset="-122"/>
                 <a:cs typeface="微软雅黑" pitchFamily="34" charset="-120"/>
               </a:rPr>
-              <a:t>离线升级（ADR 指南）</a:t>
-            </a:r>
-            <a:endParaRPr lang="en-US" sz="1600" dirty="0"/>
-          </a:p>
-        </p:txBody>
-      </p:sp>
-      <p:sp>
-        <p:nvSpPr>
-          <p:cNvPr id="12" name="Text 10"/>
-          <p:cNvSpPr/>
-          <p:nvPr/>
-        </p:nvSpPr>
-        <p:spPr>
-          <a:xfrm>
-            <a:off x="6556248" y="2331720"/>
-            <a:ext cx="4937760" cy="3566160"/>
+              <a:t>麒麟桌面版</a:t>
+            </a:r>
+            <a:endParaRPr lang="en-US" sz="1700" dirty="0"/>
+          </a:p>
+        </p:txBody>
+      </p:sp>
+      <p:sp>
+        <p:nvSpPr>
+          <p:cNvPr id="15" name="Shape 13"/>
+          <p:cNvSpPr/>
+          <p:nvPr/>
+        </p:nvSpPr>
+        <p:spPr>
+          <a:xfrm>
+            <a:off x="4645152" y="2395728"/>
+            <a:ext cx="2011680" cy="384048"/>
+          </a:xfrm>
+          <a:prstGeom prst="roundRect">
+            <a:avLst>
+              <a:gd name="adj" fmla="val 11905"/>
+            </a:avLst>
+          </a:prstGeom>
+          <a:solidFill>
+            <a:srgbClr val="C9A227"/>
+          </a:solidFill>
+          <a:ln/>
+        </p:spPr>
+      </p:sp>
+      <p:sp>
+        <p:nvSpPr>
+          <p:cNvPr id="16" name="Text 14"/>
+          <p:cNvSpPr/>
+          <p:nvPr/>
+        </p:nvSpPr>
+        <p:spPr>
+          <a:xfrm>
+            <a:off x="4645152" y="2395728"/>
+            <a:ext cx="2011680" cy="384048"/>
+          </a:xfrm>
+          <a:prstGeom prst="rect">
+            <a:avLst/>
+          </a:prstGeom>
+          <a:noFill/>
+          <a:ln/>
+        </p:spPr>
+        <p:txBody>
+          <a:bodyPr wrap="square" lIns="0" tIns="0" rIns="0" bIns="0" rtlCol="0" anchor="ctr"/>
+          <a:lstStyle/>
+          <a:p>
+            <a:pPr algn="ctr" indent="0" marL="0">
+              <a:buNone/>
+            </a:pPr>
+            <a:r>
+              <a:rPr lang="en-US" sz="1250" b="1" dirty="0">
+                <a:solidFill>
+                  <a:srgbClr val="1A2E24"/>
+                </a:solidFill>
+                <a:latin typeface="微软雅黑" pitchFamily="34" charset="0"/>
+                <a:ea typeface="微软雅黑" pitchFamily="34" charset="-122"/>
+                <a:cs typeface="微软雅黑" pitchFamily="34" charset="-120"/>
+              </a:rPr>
+              <a:t>Electron DEB</a:t>
+            </a:r>
+            <a:endParaRPr lang="en-US" sz="1250" dirty="0"/>
+          </a:p>
+        </p:txBody>
+      </p:sp>
+      <p:sp>
+        <p:nvSpPr>
+          <p:cNvPr id="17" name="Text 15"/>
+          <p:cNvSpPr/>
+          <p:nvPr/>
+        </p:nvSpPr>
+        <p:spPr>
+          <a:xfrm>
+            <a:off x="4645152" y="3017520"/>
+            <a:ext cx="3108960" cy="1828800"/>
           </a:xfrm>
           <a:prstGeom prst="rect">
             <a:avLst/>
@@ -25936,7 +25758,7 @@
           <a:p>
             <a:pPr algn="l" marL="152400" indent="-152400">
               <a:spcAft>
-                <a:spcPts val="1000"/>
+                <a:spcPts val="900"/>
               </a:spcAft>
               <a:buSzPct val="100000"/>
               <a:buChar char="▪"/>
@@ -25950,14 +25772,14 @@
                 <a:ea typeface="微软雅黑" pitchFamily="34" charset="-122"/>
                 <a:cs typeface="微软雅黑" pitchFamily="34" charset="-120"/>
               </a:rPr>
-              <a:t>升级四步：备份 → SHA256/签名校验 → 覆盖安装 → Alembic 迁移</a:t>
+              <a:t>银河麒麟 V10 ARM64</a:t>
             </a:r>
             <a:endParaRPr lang="en-US" sz="1300" dirty="0"/>
           </a:p>
           <a:p>
             <a:pPr algn="l" marL="152400" indent="-152400">
               <a:spcAft>
-                <a:spcPts val="1000"/>
+                <a:spcPts val="900"/>
               </a:spcAft>
               <a:buSzPct val="100000"/>
               <a:buChar char="▪"/>
@@ -25971,14 +25793,14 @@
                 <a:ea typeface="微软雅黑" pitchFamily="34" charset="-122"/>
                 <a:cs typeface="微软雅黑" pitchFamily="34" charset="-120"/>
               </a:rPr>
-              <a:t>失败回滚路径文档化；用户数据与安装目录分离</a:t>
+              <a:t>桌面双击运行</a:t>
             </a:r>
             <a:endParaRPr lang="en-US" sz="1300" dirty="0"/>
           </a:p>
           <a:p>
             <a:pPr algn="l" marL="152400" indent="-152400">
               <a:spcAft>
-                <a:spcPts val="1000"/>
+                <a:spcPts val="900"/>
               </a:spcAft>
               <a:buSzPct val="100000"/>
               <a:buChar char="▪"/>
@@ -25992,14 +25814,14 @@
                 <a:ea typeface="微软雅黑" pitchFamily="34" charset="-122"/>
                 <a:cs typeface="微软雅黑" pitchFamily="34" charset="-120"/>
               </a:rPr>
-              <a:t>出厂恢复通道（ADR-0008）：仅本机 + 仅未激活管理员 + 全程审计</a:t>
+              <a:t>党政机适配</a:t>
             </a:r>
             <a:endParaRPr lang="en-US" sz="1300" dirty="0"/>
           </a:p>
           <a:p>
             <a:pPr algn="l" marL="152400" indent="-152400">
               <a:spcAft>
-                <a:spcPts val="1000"/>
+                <a:spcPts val="900"/>
               </a:spcAft>
               <a:buSzPct val="100000"/>
               <a:buChar char="▪"/>
@@ -26013,14 +25835,193 @@
                 <a:ea typeface="微软雅黑" pitchFamily="34" charset="-122"/>
                 <a:cs typeface="微软雅黑" pitchFamily="34" charset="-120"/>
               </a:rPr>
-              <a:t>删库守卫：完整性失败默认 SystemExit 保留现场</a:t>
+              <a:t>132 MB</a:t>
             </a:r>
             <a:endParaRPr lang="en-US" sz="1300" dirty="0"/>
           </a:p>
+        </p:txBody>
+      </p:sp>
+      <p:sp>
+        <p:nvSpPr>
+          <p:cNvPr id="18" name="Text 16"/>
+          <p:cNvSpPr/>
+          <p:nvPr/>
+        </p:nvSpPr>
+        <p:spPr>
+          <a:xfrm>
+            <a:off x="4645152" y="5074920"/>
+            <a:ext cx="1828800" cy="365760"/>
+          </a:xfrm>
+          <a:prstGeom prst="rect">
+            <a:avLst/>
+          </a:prstGeom>
+          <a:noFill/>
+          <a:ln/>
+        </p:spPr>
+        <p:txBody>
+          <a:bodyPr wrap="square" lIns="0" tIns="0" rIns="0" bIns="0" rtlCol="0" anchor="ctr"/>
+          <a:lstStyle/>
+          <a:p>
+            <a:pPr indent="0" marL="0">
+              <a:buNone/>
+            </a:pPr>
+            <a:endParaRPr lang="en-US" sz="1500" dirty="0"/>
+          </a:p>
+        </p:txBody>
+      </p:sp>
+      <p:sp>
+        <p:nvSpPr>
+          <p:cNvPr id="19" name="Shape 17"/>
+          <p:cNvSpPr/>
+          <p:nvPr/>
+        </p:nvSpPr>
+        <p:spPr>
+          <a:xfrm>
+            <a:off x="8284464" y="1691640"/>
+            <a:ext cx="3639312" cy="3931920"/>
+          </a:xfrm>
+          <a:prstGeom prst="roundRect">
+            <a:avLst>
+              <a:gd name="adj" fmla="val 1759"/>
+            </a:avLst>
+          </a:prstGeom>
+          <a:solidFill>
+            <a:srgbClr val="FFFFFF"/>
+          </a:solidFill>
+          <a:ln/>
+          <a:effectLst>
+            <a:outerShdw sx="100000" sy="100000" kx="0" ky="0" algn="bl" rotWithShape="0" blurRad="88900" dist="25400" dir="5400000">
+              <a:srgbClr val="1A2E24">
+                <a:alpha val="13000"/>
+              </a:srgbClr>
+            </a:outerShdw>
+          </a:effectLst>
+        </p:spPr>
+      </p:sp>
+      <p:sp>
+        <p:nvSpPr>
+          <p:cNvPr id="20" name="Text 18"/>
+          <p:cNvSpPr/>
+          <p:nvPr/>
+        </p:nvSpPr>
+        <p:spPr>
+          <a:xfrm>
+            <a:off x="8558784" y="1920240"/>
+            <a:ext cx="3108960" cy="411480"/>
+          </a:xfrm>
+          <a:prstGeom prst="rect">
+            <a:avLst/>
+          </a:prstGeom>
+          <a:noFill/>
+          <a:ln/>
+        </p:spPr>
+        <p:txBody>
+          <a:bodyPr wrap="square" lIns="0" tIns="0" rIns="0" bIns="0" rtlCol="0" anchor="ctr"/>
+          <a:lstStyle/>
+          <a:p>
+            <a:pPr indent="0" marL="0">
+              <a:buNone/>
+            </a:pPr>
+            <a:r>
+              <a:rPr lang="en-US" sz="1700" b="1" dirty="0">
+                <a:solidFill>
+                  <a:srgbClr val="1F4A38"/>
+                </a:solidFill>
+                <a:latin typeface="微软雅黑" pitchFamily="34" charset="0"/>
+                <a:ea typeface="微软雅黑" pitchFamily="34" charset="-122"/>
+                <a:cs typeface="微软雅黑" pitchFamily="34" charset="-120"/>
+              </a:rPr>
+              <a:t>麒麟服务版</a:t>
+            </a:r>
+            <a:endParaRPr lang="en-US" sz="1700" dirty="0"/>
+          </a:p>
+        </p:txBody>
+      </p:sp>
+      <p:sp>
+        <p:nvSpPr>
+          <p:cNvPr id="21" name="Shape 19"/>
+          <p:cNvSpPr/>
+          <p:nvPr/>
+        </p:nvSpPr>
+        <p:spPr>
+          <a:xfrm>
+            <a:off x="8558784" y="2395728"/>
+            <a:ext cx="2011680" cy="384048"/>
+          </a:xfrm>
+          <a:prstGeom prst="roundRect">
+            <a:avLst>
+              <a:gd name="adj" fmla="val 11905"/>
+            </a:avLst>
+          </a:prstGeom>
+          <a:solidFill>
+            <a:srgbClr val="C9A227"/>
+          </a:solidFill>
+          <a:ln/>
+        </p:spPr>
+      </p:sp>
+      <p:sp>
+        <p:nvSpPr>
+          <p:cNvPr id="22" name="Text 20"/>
+          <p:cNvSpPr/>
+          <p:nvPr/>
+        </p:nvSpPr>
+        <p:spPr>
+          <a:xfrm>
+            <a:off x="8558784" y="2395728"/>
+            <a:ext cx="2011680" cy="384048"/>
+          </a:xfrm>
+          <a:prstGeom prst="rect">
+            <a:avLst/>
+          </a:prstGeom>
+          <a:noFill/>
+          <a:ln/>
+        </p:spPr>
+        <p:txBody>
+          <a:bodyPr wrap="square" lIns="0" tIns="0" rIns="0" bIns="0" rtlCol="0" anchor="ctr"/>
+          <a:lstStyle/>
+          <a:p>
+            <a:pPr algn="ctr" indent="0" marL="0">
+              <a:buNone/>
+            </a:pPr>
+            <a:r>
+              <a:rPr lang="en-US" sz="1250" b="1" dirty="0">
+                <a:solidFill>
+                  <a:srgbClr val="1A2E24"/>
+                </a:solidFill>
+                <a:latin typeface="微软雅黑" pitchFamily="34" charset="0"/>
+                <a:ea typeface="微软雅黑" pitchFamily="34" charset="-122"/>
+                <a:cs typeface="微软雅黑" pitchFamily="34" charset="-120"/>
+              </a:rPr>
+              <a:t>Standalone DEB</a:t>
+            </a:r>
+            <a:endParaRPr lang="en-US" sz="1250" dirty="0"/>
+          </a:p>
+        </p:txBody>
+      </p:sp>
+      <p:sp>
+        <p:nvSpPr>
+          <p:cNvPr id="23" name="Text 21"/>
+          <p:cNvSpPr/>
+          <p:nvPr/>
+        </p:nvSpPr>
+        <p:spPr>
+          <a:xfrm>
+            <a:off x="8558784" y="3017520"/>
+            <a:ext cx="3108960" cy="1828800"/>
+          </a:xfrm>
+          <a:prstGeom prst="rect">
+            <a:avLst/>
+          </a:prstGeom>
+          <a:noFill/>
+          <a:ln/>
+        </p:spPr>
+        <p:txBody>
+          <a:bodyPr wrap="square" lIns="0" tIns="0" rIns="0" bIns="0" rtlCol="0" anchor="t"/>
+          <a:lstStyle/>
           <a:p>
             <a:pPr algn="l" marL="152400" indent="-152400">
               <a:spcAft>
-                <a:spcPts val="1000"/>
+                <a:spcPts val="900"/>
               </a:spcAft>
               <a:buSzPct val="100000"/>
               <a:buChar char="▪"/>
@@ -26034,9 +26035,139 @@
                 <a:ea typeface="微软雅黑" pitchFamily="34" charset="-122"/>
                 <a:cs typeface="微软雅黑" pitchFamily="34" charset="-120"/>
               </a:rPr>
-              <a:t>机器码三级回退：Windows 重装也能通过通行码恢复授权</a:t>
+              <a:t>纯 Web 无桌面</a:t>
             </a:r>
             <a:endParaRPr lang="en-US" sz="1300" dirty="0"/>
+          </a:p>
+          <a:p>
+            <a:pPr algn="l" marL="152400" indent="-152400">
+              <a:spcAft>
+                <a:spcPts val="900"/>
+              </a:spcAft>
+              <a:buSzPct val="100000"/>
+              <a:buChar char="▪"/>
+            </a:pPr>
+            <a:r>
+              <a:rPr lang="en-US" sz="1300" dirty="0">
+                <a:solidFill>
+                  <a:srgbClr val="1A2E24"/>
+                </a:solidFill>
+                <a:latin typeface="微软雅黑" pitchFamily="34" charset="0"/>
+                <a:ea typeface="微软雅黑" pitchFamily="34" charset="-122"/>
+                <a:cs typeface="微软雅黑" pitchFamily="34" charset="-120"/>
+              </a:rPr>
+              <a:t>systemd 托管</a:t>
+            </a:r>
+            <a:endParaRPr lang="en-US" sz="1300" dirty="0"/>
+          </a:p>
+          <a:p>
+            <a:pPr algn="l" marL="152400" indent="-152400">
+              <a:spcAft>
+                <a:spcPts val="900"/>
+              </a:spcAft>
+              <a:buSzPct val="100000"/>
+              <a:buChar char="▪"/>
+            </a:pPr>
+            <a:r>
+              <a:rPr lang="en-US" sz="1300" dirty="0">
+                <a:solidFill>
+                  <a:srgbClr val="1A2E24"/>
+                </a:solidFill>
+                <a:latin typeface="微软雅黑" pitchFamily="34" charset="0"/>
+                <a:ea typeface="微软雅黑" pitchFamily="34" charset="-122"/>
+                <a:cs typeface="微软雅黑" pitchFamily="34" charset="-120"/>
+              </a:rPr>
+              <a:t>浏览器访问</a:t>
+            </a:r>
+            <a:endParaRPr lang="en-US" sz="1300" dirty="0"/>
+          </a:p>
+          <a:p>
+            <a:pPr algn="l" marL="152400" indent="-152400">
+              <a:spcAft>
+                <a:spcPts val="900"/>
+              </a:spcAft>
+              <a:buSzPct val="100000"/>
+              <a:buChar char="▪"/>
+            </a:pPr>
+            <a:r>
+              <a:rPr lang="en-US" sz="1300" dirty="0">
+                <a:solidFill>
+                  <a:srgbClr val="1A2E24"/>
+                </a:solidFill>
+                <a:latin typeface="微软雅黑" pitchFamily="34" charset="0"/>
+                <a:ea typeface="微软雅黑" pitchFamily="34" charset="-122"/>
+                <a:cs typeface="微软雅黑" pitchFamily="34" charset="-120"/>
+              </a:rPr>
+              <a:t>55 MB</a:t>
+            </a:r>
+            <a:endParaRPr lang="en-US" sz="1300" dirty="0"/>
+          </a:p>
+        </p:txBody>
+      </p:sp>
+      <p:sp>
+        <p:nvSpPr>
+          <p:cNvPr id="24" name="Text 22"/>
+          <p:cNvSpPr/>
+          <p:nvPr/>
+        </p:nvSpPr>
+        <p:spPr>
+          <a:xfrm>
+            <a:off x="8558784" y="5074920"/>
+            <a:ext cx="1828800" cy="365760"/>
+          </a:xfrm>
+          <a:prstGeom prst="rect">
+            <a:avLst/>
+          </a:prstGeom>
+          <a:noFill/>
+          <a:ln/>
+        </p:spPr>
+        <p:txBody>
+          <a:bodyPr wrap="square" lIns="0" tIns="0" rIns="0" bIns="0" rtlCol="0" anchor="ctr"/>
+          <a:lstStyle/>
+          <a:p>
+            <a:pPr indent="0" marL="0">
+              <a:buNone/>
+            </a:pPr>
+            <a:endParaRPr lang="en-US" sz="1500" dirty="0"/>
+          </a:p>
+        </p:txBody>
+      </p:sp>
+      <p:sp>
+        <p:nvSpPr>
+          <p:cNvPr id="25" name="Text 23"/>
+          <p:cNvSpPr/>
+          <p:nvPr/>
+        </p:nvSpPr>
+        <p:spPr>
+          <a:xfrm>
+            <a:off x="457200" y="5897880"/>
+            <a:ext cx="11247120" cy="365760"/>
+          </a:xfrm>
+          <a:prstGeom prst="rect">
+            <a:avLst/>
+          </a:prstGeom>
+          <a:noFill/>
+          <a:ln/>
+        </p:spPr>
+        <p:txBody>
+          <a:bodyPr wrap="square" lIns="0" tIns="0" rIns="0" bIns="0" rtlCol="0" anchor="ctr"/>
+          <a:lstStyle/>
+          <a:p>
+            <a:pPr indent="0" marL="0">
+              <a:buNone/>
+            </a:pPr>
+            <a:r>
+              <a:rPr lang="en-US" sz="1250" dirty="0">
+                <a:solidFill>
+                  <a:srgbClr val="5F6F66"/>
+                </a:solidFill>
+                <a:latin typeface="微软雅黑" pitchFamily="34" charset="0"/>
+                <a:ea typeface="微软雅黑" pitchFamily="34" charset="-122"/>
+                <a:cs typeface="微软雅黑" pitchFamily="34" charset="-120"/>
+              </a:rPr>
+              <a:t>全部形态离线可用；安装包内含 VC++ 运行库（Windows）与 Python 运行时，目标机器无需预装任何环境</a:t>
+            </a:r>
+            <a:endParaRPr lang="en-US" sz="1250" dirty="0"/>
           </a:p>
         </p:txBody>
       </p:sp>
@@ -26164,7 +26295,7 @@
                 <a:ea typeface="微软雅黑" pitchFamily="34" charset="-122"/>
                 <a:cs typeface="微软雅黑" pitchFamily="34" charset="-120"/>
               </a:rPr>
-              <a:t>版本历程：三个月的密集演进</a:t>
+              <a:t>备份恢复与离线升级</a:t>
             </a:r>
             <a:endParaRPr lang="en-US" sz="3000" dirty="0"/>
           </a:p>
@@ -26256,724 +26387,16 @@
         </p:nvSpPr>
         <p:spPr>
           <a:xfrm>
-            <a:off x="1005840" y="2834640"/>
-            <a:ext cx="10149840" cy="0"/>
-          </a:xfrm>
-          <a:prstGeom prst="line">
-            <a:avLst/>
-          </a:prstGeom>
-          <a:noFill/>
-          <a:ln w="25400">
-            <a:solidFill>
-              <a:srgbClr val="D8E0DA"/>
-            </a:solidFill>
-            <a:prstDash val="solid"/>
-          </a:ln>
-        </p:spPr>
-      </p:sp>
-      <p:sp>
-        <p:nvSpPr>
-          <p:cNvPr id="8" name="Shape 6"/>
-          <p:cNvSpPr/>
-          <p:nvPr/>
-        </p:nvSpPr>
-        <p:spPr>
-          <a:xfrm>
-            <a:off x="841248" y="2706624"/>
-            <a:ext cx="274320" cy="274320"/>
-          </a:xfrm>
-          <a:prstGeom prst="ellipse">
-            <a:avLst/>
-          </a:prstGeom>
-          <a:solidFill>
-            <a:srgbClr val="1F4A38"/>
-          </a:solidFill>
-          <a:ln/>
-        </p:spPr>
-      </p:sp>
-      <p:sp>
-        <p:nvSpPr>
-          <p:cNvPr id="9" name="Text 7"/>
-          <p:cNvSpPr/>
-          <p:nvPr/>
-        </p:nvSpPr>
-        <p:spPr>
-          <a:xfrm>
-            <a:off x="502920" y="2011680"/>
-            <a:ext cx="1280160" cy="365760"/>
-          </a:xfrm>
-          <a:prstGeom prst="rect">
-            <a:avLst/>
-          </a:prstGeom>
-          <a:noFill/>
-          <a:ln/>
-        </p:spPr>
-        <p:txBody>
-          <a:bodyPr wrap="square" lIns="0" tIns="0" rIns="0" bIns="0" rtlCol="0" anchor="ctr"/>
-          <a:lstStyle/>
-          <a:p>
-            <a:pPr algn="ctr" indent="0" marL="0">
-              <a:buNone/>
-            </a:pPr>
-            <a:r>
-              <a:rPr lang="en-US" sz="1500" b="1" dirty="0">
-                <a:solidFill>
-                  <a:srgbClr val="1A2E24"/>
-                </a:solidFill>
-                <a:latin typeface="微软雅黑" pitchFamily="34" charset="0"/>
-                <a:ea typeface="微软雅黑" pitchFamily="34" charset="-122"/>
-                <a:cs typeface="微软雅黑" pitchFamily="34" charset="-120"/>
-              </a:rPr>
-              <a:t>v1.11.2</a:t>
-            </a:r>
-            <a:endParaRPr lang="en-US" sz="1500" dirty="0"/>
-          </a:p>
-        </p:txBody>
-      </p:sp>
-      <p:sp>
-        <p:nvSpPr>
-          <p:cNvPr id="10" name="Text 8"/>
-          <p:cNvSpPr/>
-          <p:nvPr/>
-        </p:nvSpPr>
-        <p:spPr>
-          <a:xfrm>
-            <a:off x="502920" y="3127248"/>
-            <a:ext cx="1280160" cy="292608"/>
-          </a:xfrm>
-          <a:prstGeom prst="rect">
-            <a:avLst/>
-          </a:prstGeom>
-          <a:noFill/>
-          <a:ln/>
-        </p:spPr>
-        <p:txBody>
-          <a:bodyPr wrap="square" lIns="0" tIns="0" rIns="0" bIns="0" rtlCol="0" anchor="ctr"/>
-          <a:lstStyle/>
-          <a:p>
-            <a:pPr algn="ctr" indent="0" marL="0">
-              <a:buNone/>
-            </a:pPr>
-            <a:r>
-              <a:rPr lang="en-US" sz="1100" dirty="0">
-                <a:solidFill>
-                  <a:srgbClr val="5F6F66"/>
-                </a:solidFill>
-                <a:latin typeface="微软雅黑" pitchFamily="34" charset="0"/>
-                <a:ea typeface="微软雅黑" pitchFamily="34" charset="-122"/>
-                <a:cs typeface="微软雅黑" pitchFamily="34" charset="-120"/>
-              </a:rPr>
-              <a:t>08-30</a:t>
-            </a:r>
-            <a:endParaRPr lang="en-US" sz="1100" dirty="0"/>
-          </a:p>
-        </p:txBody>
-      </p:sp>
-      <p:sp>
-        <p:nvSpPr>
-          <p:cNvPr id="11" name="Text 9"/>
-          <p:cNvSpPr/>
-          <p:nvPr/>
-        </p:nvSpPr>
-        <p:spPr>
-          <a:xfrm>
-            <a:off x="320040" y="3566160"/>
-            <a:ext cx="1965960" cy="1737360"/>
-          </a:xfrm>
-          <a:prstGeom prst="rect">
-            <a:avLst/>
-          </a:prstGeom>
-          <a:noFill/>
-          <a:ln/>
-        </p:spPr>
-        <p:txBody>
-          <a:bodyPr wrap="square" lIns="0" tIns="0" rIns="0" bIns="0" rtlCol="0" anchor="ctr"/>
-          <a:lstStyle/>
-          <a:p>
-            <a:pPr algn="l" indent="0" marL="0">
-              <a:buNone/>
-            </a:pPr>
-            <a:r>
-              <a:rPr lang="en-US" sz="1150" dirty="0">
-                <a:solidFill>
-                  <a:srgbClr val="5F6F66"/>
-                </a:solidFill>
-                <a:latin typeface="微软雅黑" pitchFamily="34" charset="0"/>
-                <a:ea typeface="微软雅黑" pitchFamily="34" charset="-122"/>
-                <a:cs typeface="微软雅黑" pitchFamily="34" charset="-120"/>
-              </a:rPr>
-              <a:t>403 六类根因修复 + 弹窗裁切修复 + 5 个 500 端点</a:t>
-            </a:r>
-            <a:endParaRPr lang="en-US" sz="1150" dirty="0"/>
-          </a:p>
-        </p:txBody>
-      </p:sp>
-      <p:sp>
-        <p:nvSpPr>
-          <p:cNvPr id="12" name="Shape 10"/>
-          <p:cNvSpPr/>
-          <p:nvPr/>
-        </p:nvSpPr>
-        <p:spPr>
-          <a:xfrm>
-            <a:off x="3081528" y="2706624"/>
-            <a:ext cx="274320" cy="274320"/>
-          </a:xfrm>
-          <a:prstGeom prst="ellipse">
-            <a:avLst/>
-          </a:prstGeom>
-          <a:solidFill>
-            <a:srgbClr val="1F4A38"/>
-          </a:solidFill>
-          <a:ln/>
-        </p:spPr>
-      </p:sp>
-      <p:sp>
-        <p:nvSpPr>
-          <p:cNvPr id="13" name="Text 11"/>
-          <p:cNvSpPr/>
-          <p:nvPr/>
-        </p:nvSpPr>
-        <p:spPr>
-          <a:xfrm>
-            <a:off x="2743200" y="2011680"/>
-            <a:ext cx="1280160" cy="365760"/>
-          </a:xfrm>
-          <a:prstGeom prst="rect">
-            <a:avLst/>
-          </a:prstGeom>
-          <a:noFill/>
-          <a:ln/>
-        </p:spPr>
-        <p:txBody>
-          <a:bodyPr wrap="square" lIns="0" tIns="0" rIns="0" bIns="0" rtlCol="0" anchor="ctr"/>
-          <a:lstStyle/>
-          <a:p>
-            <a:pPr algn="ctr" indent="0" marL="0">
-              <a:buNone/>
-            </a:pPr>
-            <a:r>
-              <a:rPr lang="en-US" sz="1500" b="1" dirty="0">
-                <a:solidFill>
-                  <a:srgbClr val="1A2E24"/>
-                </a:solidFill>
-                <a:latin typeface="微软雅黑" pitchFamily="34" charset="0"/>
-                <a:ea typeface="微软雅黑" pitchFamily="34" charset="-122"/>
-                <a:cs typeface="微软雅黑" pitchFamily="34" charset="-120"/>
-              </a:rPr>
-              <a:t>v1.12.2</a:t>
-            </a:r>
-            <a:endParaRPr lang="en-US" sz="1500" dirty="0"/>
-          </a:p>
-        </p:txBody>
-      </p:sp>
-      <p:sp>
-        <p:nvSpPr>
-          <p:cNvPr id="14" name="Text 12"/>
-          <p:cNvSpPr/>
-          <p:nvPr/>
-        </p:nvSpPr>
-        <p:spPr>
-          <a:xfrm>
-            <a:off x="2743200" y="3127248"/>
-            <a:ext cx="1280160" cy="292608"/>
-          </a:xfrm>
-          <a:prstGeom prst="rect">
-            <a:avLst/>
-          </a:prstGeom>
-          <a:noFill/>
-          <a:ln/>
-        </p:spPr>
-        <p:txBody>
-          <a:bodyPr wrap="square" lIns="0" tIns="0" rIns="0" bIns="0" rtlCol="0" anchor="ctr"/>
-          <a:lstStyle/>
-          <a:p>
-            <a:pPr algn="ctr" indent="0" marL="0">
-              <a:buNone/>
-            </a:pPr>
-            <a:r>
-              <a:rPr lang="en-US" sz="1100" dirty="0">
-                <a:solidFill>
-                  <a:srgbClr val="5F6F66"/>
-                </a:solidFill>
-                <a:latin typeface="微软雅黑" pitchFamily="34" charset="0"/>
-                <a:ea typeface="微软雅黑" pitchFamily="34" charset="-122"/>
-                <a:cs typeface="微软雅黑" pitchFamily="34" charset="-120"/>
-              </a:rPr>
-              <a:t>09-12</a:t>
-            </a:r>
-            <a:endParaRPr lang="en-US" sz="1100" dirty="0"/>
-          </a:p>
-        </p:txBody>
-      </p:sp>
-      <p:sp>
-        <p:nvSpPr>
-          <p:cNvPr id="15" name="Text 13"/>
-          <p:cNvSpPr/>
-          <p:nvPr/>
-        </p:nvSpPr>
-        <p:spPr>
-          <a:xfrm>
-            <a:off x="2560320" y="3566160"/>
-            <a:ext cx="1965960" cy="1737360"/>
-          </a:xfrm>
-          <a:prstGeom prst="rect">
-            <a:avLst/>
-          </a:prstGeom>
-          <a:noFill/>
-          <a:ln/>
-        </p:spPr>
-        <p:txBody>
-          <a:bodyPr wrap="square" lIns="0" tIns="0" rIns="0" bIns="0" rtlCol="0" anchor="ctr"/>
-          <a:lstStyle/>
-          <a:p>
-            <a:pPr algn="l" indent="0" marL="0">
-              <a:buNone/>
-            </a:pPr>
-            <a:r>
-              <a:rPr lang="en-US" sz="1150" dirty="0">
-                <a:solidFill>
-                  <a:srgbClr val="5F6F66"/>
-                </a:solidFill>
-                <a:latin typeface="微软雅黑" pitchFamily="34" charset="0"/>
-                <a:ea typeface="微软雅黑" pitchFamily="34" charset="-122"/>
-                <a:cs typeface="微软雅黑" pitchFamily="34" charset="-120"/>
-              </a:rPr>
-              <a:t>架构评估 P0/P1 加固：导出任务重启恢复、导出/备份原子写、备份可恢复性校验</a:t>
-            </a:r>
-            <a:endParaRPr lang="en-US" sz="1150" dirty="0"/>
-          </a:p>
-        </p:txBody>
-      </p:sp>
-      <p:sp>
-        <p:nvSpPr>
-          <p:cNvPr id="16" name="Shape 14"/>
-          <p:cNvSpPr/>
-          <p:nvPr/>
-        </p:nvSpPr>
-        <p:spPr>
-          <a:xfrm>
-            <a:off x="5321808" y="2706624"/>
-            <a:ext cx="274320" cy="274320"/>
-          </a:xfrm>
-          <a:prstGeom prst="ellipse">
-            <a:avLst/>
-          </a:prstGeom>
-          <a:solidFill>
-            <a:srgbClr val="1F4A38"/>
-          </a:solidFill>
-          <a:ln/>
-        </p:spPr>
-      </p:sp>
-      <p:sp>
-        <p:nvSpPr>
-          <p:cNvPr id="17" name="Text 15"/>
-          <p:cNvSpPr/>
-          <p:nvPr/>
-        </p:nvSpPr>
-        <p:spPr>
-          <a:xfrm>
-            <a:off x="4983480" y="2011680"/>
-            <a:ext cx="1280160" cy="365760"/>
-          </a:xfrm>
-          <a:prstGeom prst="rect">
-            <a:avLst/>
-          </a:prstGeom>
-          <a:noFill/>
-          <a:ln/>
-        </p:spPr>
-        <p:txBody>
-          <a:bodyPr wrap="square" lIns="0" tIns="0" rIns="0" bIns="0" rtlCol="0" anchor="ctr"/>
-          <a:lstStyle/>
-          <a:p>
-            <a:pPr algn="ctr" indent="0" marL="0">
-              <a:buNone/>
-            </a:pPr>
-            <a:r>
-              <a:rPr lang="en-US" sz="1500" b="1" dirty="0">
-                <a:solidFill>
-                  <a:srgbClr val="1A2E24"/>
-                </a:solidFill>
-                <a:latin typeface="微软雅黑" pitchFamily="34" charset="0"/>
-                <a:ea typeface="微软雅黑" pitchFamily="34" charset="-122"/>
-                <a:cs typeface="微软雅黑" pitchFamily="34" charset="-120"/>
-              </a:rPr>
-              <a:t>v1.12.5</a:t>
-            </a:r>
-            <a:endParaRPr lang="en-US" sz="1500" dirty="0"/>
-          </a:p>
-        </p:txBody>
-      </p:sp>
-      <p:sp>
-        <p:nvSpPr>
-          <p:cNvPr id="18" name="Text 16"/>
-          <p:cNvSpPr/>
-          <p:nvPr/>
-        </p:nvSpPr>
-        <p:spPr>
-          <a:xfrm>
-            <a:off x="4983480" y="3127248"/>
-            <a:ext cx="1280160" cy="292608"/>
-          </a:xfrm>
-          <a:prstGeom prst="rect">
-            <a:avLst/>
-          </a:prstGeom>
-          <a:noFill/>
-          <a:ln/>
-        </p:spPr>
-        <p:txBody>
-          <a:bodyPr wrap="square" lIns="0" tIns="0" rIns="0" bIns="0" rtlCol="0" anchor="ctr"/>
-          <a:lstStyle/>
-          <a:p>
-            <a:pPr algn="ctr" indent="0" marL="0">
-              <a:buNone/>
-            </a:pPr>
-            <a:r>
-              <a:rPr lang="en-US" sz="1100" dirty="0">
-                <a:solidFill>
-                  <a:srgbClr val="5F6F66"/>
-                </a:solidFill>
-                <a:latin typeface="微软雅黑" pitchFamily="34" charset="0"/>
-                <a:ea typeface="微软雅黑" pitchFamily="34" charset="-122"/>
-                <a:cs typeface="微软雅黑" pitchFamily="34" charset="-120"/>
-              </a:rPr>
-              <a:t>09-12</a:t>
-            </a:r>
-            <a:endParaRPr lang="en-US" sz="1100" dirty="0"/>
-          </a:p>
-        </p:txBody>
-      </p:sp>
-      <p:sp>
-        <p:nvSpPr>
-          <p:cNvPr id="19" name="Text 17"/>
-          <p:cNvSpPr/>
-          <p:nvPr/>
-        </p:nvSpPr>
-        <p:spPr>
-          <a:xfrm>
-            <a:off x="4800600" y="3566160"/>
-            <a:ext cx="1965960" cy="1737360"/>
-          </a:xfrm>
-          <a:prstGeom prst="rect">
-            <a:avLst/>
-          </a:prstGeom>
-          <a:noFill/>
-          <a:ln/>
-        </p:spPr>
-        <p:txBody>
-          <a:bodyPr wrap="square" lIns="0" tIns="0" rIns="0" bIns="0" rtlCol="0" anchor="ctr"/>
-          <a:lstStyle/>
-          <a:p>
-            <a:pPr algn="l" indent="0" marL="0">
-              <a:buNone/>
-            </a:pPr>
-            <a:r>
-              <a:rPr lang="en-US" sz="1150" dirty="0">
-                <a:solidFill>
-                  <a:srgbClr val="5F6F66"/>
-                </a:solidFill>
-                <a:latin typeface="微软雅黑" pitchFamily="34" charset="0"/>
-                <a:ea typeface="微软雅黑" pitchFamily="34" charset="-122"/>
-                <a:cs typeface="微软雅黑" pitchFamily="34" charset="-120"/>
-              </a:rPr>
-              <a:t>深度审计 13 项修复：目录穿越 / 存储型 XSS / 并发 / 备份 fail-loud</a:t>
-            </a:r>
-            <a:endParaRPr lang="en-US" sz="1150" dirty="0"/>
-          </a:p>
-        </p:txBody>
-      </p:sp>
-      <p:sp>
-        <p:nvSpPr>
-          <p:cNvPr id="20" name="Shape 18"/>
-          <p:cNvSpPr/>
-          <p:nvPr/>
-        </p:nvSpPr>
-        <p:spPr>
-          <a:xfrm>
-            <a:off x="7562088" y="2706624"/>
-            <a:ext cx="274320" cy="274320"/>
-          </a:xfrm>
-          <a:prstGeom prst="ellipse">
-            <a:avLst/>
-          </a:prstGeom>
-          <a:solidFill>
-            <a:srgbClr val="1F4A38"/>
-          </a:solidFill>
-          <a:ln/>
-        </p:spPr>
-      </p:sp>
-      <p:sp>
-        <p:nvSpPr>
-          <p:cNvPr id="21" name="Text 19"/>
-          <p:cNvSpPr/>
-          <p:nvPr/>
-        </p:nvSpPr>
-        <p:spPr>
-          <a:xfrm>
-            <a:off x="7223760" y="2011680"/>
-            <a:ext cx="1280160" cy="365760"/>
-          </a:xfrm>
-          <a:prstGeom prst="rect">
-            <a:avLst/>
-          </a:prstGeom>
-          <a:noFill/>
-          <a:ln/>
-        </p:spPr>
-        <p:txBody>
-          <a:bodyPr wrap="square" lIns="0" tIns="0" rIns="0" bIns="0" rtlCol="0" anchor="ctr"/>
-          <a:lstStyle/>
-          <a:p>
-            <a:pPr algn="ctr" indent="0" marL="0">
-              <a:buNone/>
-            </a:pPr>
-            <a:r>
-              <a:rPr lang="en-US" sz="1500" b="1" dirty="0">
-                <a:solidFill>
-                  <a:srgbClr val="1A2E24"/>
-                </a:solidFill>
-                <a:latin typeface="微软雅黑" pitchFamily="34" charset="0"/>
-                <a:ea typeface="微软雅黑" pitchFamily="34" charset="-122"/>
-                <a:cs typeface="微软雅黑" pitchFamily="34" charset="-120"/>
-              </a:rPr>
-              <a:t>v1.12.7</a:t>
-            </a:r>
-            <a:endParaRPr lang="en-US" sz="1500" dirty="0"/>
-          </a:p>
-        </p:txBody>
-      </p:sp>
-      <p:sp>
-        <p:nvSpPr>
-          <p:cNvPr id="22" name="Text 20"/>
-          <p:cNvSpPr/>
-          <p:nvPr/>
-        </p:nvSpPr>
-        <p:spPr>
-          <a:xfrm>
-            <a:off x="7223760" y="3127248"/>
-            <a:ext cx="1280160" cy="292608"/>
-          </a:xfrm>
-          <a:prstGeom prst="rect">
-            <a:avLst/>
-          </a:prstGeom>
-          <a:noFill/>
-          <a:ln/>
-        </p:spPr>
-        <p:txBody>
-          <a:bodyPr wrap="square" lIns="0" tIns="0" rIns="0" bIns="0" rtlCol="0" anchor="ctr"/>
-          <a:lstStyle/>
-          <a:p>
-            <a:pPr algn="ctr" indent="0" marL="0">
-              <a:buNone/>
-            </a:pPr>
-            <a:r>
-              <a:rPr lang="en-US" sz="1100" dirty="0">
-                <a:solidFill>
-                  <a:srgbClr val="5F6F66"/>
-                </a:solidFill>
-                <a:latin typeface="微软雅黑" pitchFamily="34" charset="0"/>
-                <a:ea typeface="微软雅黑" pitchFamily="34" charset="-122"/>
-                <a:cs typeface="微软雅黑" pitchFamily="34" charset="-120"/>
-              </a:rPr>
-              <a:t>09-13</a:t>
-            </a:r>
-            <a:endParaRPr lang="en-US" sz="1100" dirty="0"/>
-          </a:p>
-        </p:txBody>
-      </p:sp>
-      <p:sp>
-        <p:nvSpPr>
-          <p:cNvPr id="23" name="Text 21"/>
-          <p:cNvSpPr/>
-          <p:nvPr/>
-        </p:nvSpPr>
-        <p:spPr>
-          <a:xfrm>
-            <a:off x="7040880" y="3566160"/>
-            <a:ext cx="1965960" cy="1737360"/>
-          </a:xfrm>
-          <a:prstGeom prst="rect">
-            <a:avLst/>
-          </a:prstGeom>
-          <a:noFill/>
-          <a:ln/>
-        </p:spPr>
-        <p:txBody>
-          <a:bodyPr wrap="square" lIns="0" tIns="0" rIns="0" bIns="0" rtlCol="0" anchor="ctr"/>
-          <a:lstStyle/>
-          <a:p>
-            <a:pPr algn="l" indent="0" marL="0">
-              <a:buNone/>
-            </a:pPr>
-            <a:r>
-              <a:rPr lang="en-US" sz="1150" dirty="0">
-                <a:solidFill>
-                  <a:srgbClr val="5F6F66"/>
-                </a:solidFill>
-                <a:latin typeface="微软雅黑" pitchFamily="34" charset="0"/>
-                <a:ea typeface="微软雅黑" pitchFamily="34" charset="-122"/>
-                <a:cs typeface="微软雅黑" pitchFamily="34" charset="-120"/>
-              </a:rPr>
-              <a:t>遗留风险二批：上传体积三层上限、导出回收、导入拒绝记录、Windows CI 可见性</a:t>
-            </a:r>
-            <a:endParaRPr lang="en-US" sz="1150" dirty="0"/>
-          </a:p>
-        </p:txBody>
-      </p:sp>
-      <p:sp>
-        <p:nvSpPr>
-          <p:cNvPr id="24" name="Shape 22"/>
-          <p:cNvSpPr/>
-          <p:nvPr/>
-        </p:nvSpPr>
-        <p:spPr>
-          <a:xfrm>
-            <a:off x="9802368" y="2706624"/>
-            <a:ext cx="274320" cy="274320"/>
-          </a:xfrm>
-          <a:prstGeom prst="ellipse">
-            <a:avLst/>
-          </a:prstGeom>
-          <a:solidFill>
-            <a:srgbClr val="C9A227"/>
-          </a:solidFill>
-          <a:ln/>
-        </p:spPr>
-      </p:sp>
-      <p:sp>
-        <p:nvSpPr>
-          <p:cNvPr id="25" name="Text 23"/>
-          <p:cNvSpPr/>
-          <p:nvPr/>
-        </p:nvSpPr>
-        <p:spPr>
-          <a:xfrm>
-            <a:off x="9464040" y="2011680"/>
-            <a:ext cx="1280160" cy="365760"/>
-          </a:xfrm>
-          <a:prstGeom prst="rect">
-            <a:avLst/>
-          </a:prstGeom>
-          <a:noFill/>
-          <a:ln/>
-        </p:spPr>
-        <p:txBody>
-          <a:bodyPr wrap="square" lIns="0" tIns="0" rIns="0" bIns="0" rtlCol="0" anchor="ctr"/>
-          <a:lstStyle/>
-          <a:p>
-            <a:pPr algn="ctr" indent="0" marL="0">
-              <a:buNone/>
-            </a:pPr>
-            <a:r>
-              <a:rPr lang="en-US" sz="1500" b="1" dirty="0">
-                <a:solidFill>
-                  <a:srgbClr val="2D6A4F"/>
-                </a:solidFill>
-                <a:latin typeface="微软雅黑" pitchFamily="34" charset="0"/>
-                <a:ea typeface="微软雅黑" pitchFamily="34" charset="-122"/>
-                <a:cs typeface="微软雅黑" pitchFamily="34" charset="-120"/>
-              </a:rPr>
-              <a:t>v1.12.8</a:t>
-            </a:r>
-            <a:endParaRPr lang="en-US" sz="1500" dirty="0"/>
-          </a:p>
-        </p:txBody>
-      </p:sp>
-      <p:sp>
-        <p:nvSpPr>
-          <p:cNvPr id="26" name="Text 24"/>
-          <p:cNvSpPr/>
-          <p:nvPr/>
-        </p:nvSpPr>
-        <p:spPr>
-          <a:xfrm>
-            <a:off x="9464040" y="3127248"/>
-            <a:ext cx="1280160" cy="292608"/>
-          </a:xfrm>
-          <a:prstGeom prst="rect">
-            <a:avLst/>
-          </a:prstGeom>
-          <a:noFill/>
-          <a:ln/>
-        </p:spPr>
-        <p:txBody>
-          <a:bodyPr wrap="square" lIns="0" tIns="0" rIns="0" bIns="0" rtlCol="0" anchor="ctr"/>
-          <a:lstStyle/>
-          <a:p>
-            <a:pPr algn="ctr" indent="0" marL="0">
-              <a:buNone/>
-            </a:pPr>
-            <a:r>
-              <a:rPr lang="en-US" sz="1100" dirty="0">
-                <a:solidFill>
-                  <a:srgbClr val="5F6F66"/>
-                </a:solidFill>
-                <a:latin typeface="微软雅黑" pitchFamily="34" charset="0"/>
-                <a:ea typeface="微软雅黑" pitchFamily="34" charset="-122"/>
-                <a:cs typeface="微软雅黑" pitchFamily="34" charset="-120"/>
-              </a:rPr>
-              <a:t>09-14</a:t>
-            </a:r>
-            <a:endParaRPr lang="en-US" sz="1100" dirty="0"/>
-          </a:p>
-        </p:txBody>
-      </p:sp>
-      <p:sp>
-        <p:nvSpPr>
-          <p:cNvPr id="27" name="Text 25"/>
-          <p:cNvSpPr/>
-          <p:nvPr/>
-        </p:nvSpPr>
-        <p:spPr>
-          <a:xfrm>
-            <a:off x="9281160" y="3566160"/>
-            <a:ext cx="1965960" cy="1737360"/>
-          </a:xfrm>
-          <a:prstGeom prst="rect">
-            <a:avLst/>
-          </a:prstGeom>
-          <a:noFill/>
-          <a:ln/>
-        </p:spPr>
-        <p:txBody>
-          <a:bodyPr wrap="square" lIns="0" tIns="0" rIns="0" bIns="0" rtlCol="0" anchor="ctr"/>
-          <a:lstStyle/>
-          <a:p>
-            <a:pPr algn="l" indent="0" marL="0">
-              <a:buNone/>
-            </a:pPr>
-            <a:r>
-              <a:rPr lang="en-US" sz="1150" dirty="0">
-                <a:solidFill>
-                  <a:srgbClr val="5F6F66"/>
-                </a:solidFill>
-                <a:latin typeface="微软雅黑" pitchFamily="34" charset="0"/>
-                <a:ea typeface="微软雅黑" pitchFamily="34" charset="-122"/>
-                <a:cs typeface="微软雅黑" pitchFamily="34" charset="-120"/>
-              </a:rPr>
-              <a:t>R7 恢复维护闸门 / R12 低危批量 7 项 / R2 残余清零 / P-1~P-3 门禁 / R14 组织树修复</a:t>
-            </a:r>
-            <a:endParaRPr lang="en-US" sz="1150" dirty="0"/>
-          </a:p>
-        </p:txBody>
-      </p:sp>
-      <p:sp>
-        <p:nvSpPr>
-          <p:cNvPr id="28" name="Shape 26"/>
-          <p:cNvSpPr/>
-          <p:nvPr/>
-        </p:nvSpPr>
-        <p:spPr>
-          <a:xfrm>
-            <a:off x="457200" y="5440680"/>
-            <a:ext cx="11274552" cy="914400"/>
+            <a:off x="457200" y="1645920"/>
+            <a:ext cx="5486400" cy="4480560"/>
           </a:xfrm>
           <a:prstGeom prst="roundRect">
             <a:avLst>
-              <a:gd name="adj" fmla="val 7000"/>
+              <a:gd name="adj" fmla="val 1429"/>
             </a:avLst>
           </a:prstGeom>
           <a:solidFill>
-            <a:srgbClr val="E8EFEA"/>
+            <a:srgbClr val="FFFFFF"/>
           </a:solidFill>
           <a:ln/>
           <a:effectLst>
@@ -26987,14 +26410,14 @@
       </p:sp>
       <p:sp>
         <p:nvSpPr>
-          <p:cNvPr id="29" name="Text 27"/>
-          <p:cNvSpPr/>
-          <p:nvPr/>
-        </p:nvSpPr>
-        <p:spPr>
-          <a:xfrm>
-            <a:off x="749808" y="5440680"/>
-            <a:ext cx="10607040" cy="914400"/>
+          <p:cNvPr id="8" name="Text 6"/>
+          <p:cNvSpPr/>
+          <p:nvPr/>
+        </p:nvSpPr>
+        <p:spPr>
+          <a:xfrm>
+            <a:off x="749808" y="1874520"/>
+            <a:ext cx="3657600" cy="365760"/>
           </a:xfrm>
           <a:prstGeom prst="rect">
             <a:avLst/>
@@ -27010,7 +26433,50 @@
               <a:buNone/>
             </a:pPr>
             <a:r>
-              <a:rPr lang="en-US" sz="1350" b="1" dirty="0">
+              <a:rPr lang="en-US" sz="1600" b="1" dirty="0">
+                <a:solidFill>
+                  <a:srgbClr val="1F4A38"/>
+                </a:solidFill>
+                <a:latin typeface="微软雅黑" pitchFamily="34" charset="0"/>
+                <a:ea typeface="微软雅黑" pitchFamily="34" charset="-122"/>
+                <a:cs typeface="微软雅黑" pitchFamily="34" charset="-120"/>
+              </a:rPr>
+              <a:t>备份与恢复</a:t>
+            </a:r>
+            <a:endParaRPr lang="en-US" sz="1600" dirty="0"/>
+          </a:p>
+        </p:txBody>
+      </p:sp>
+      <p:sp>
+        <p:nvSpPr>
+          <p:cNvPr id="9" name="Text 7"/>
+          <p:cNvSpPr/>
+          <p:nvPr/>
+        </p:nvSpPr>
+        <p:spPr>
+          <a:xfrm>
+            <a:off x="749808" y="2331720"/>
+            <a:ext cx="4937760" cy="3566160"/>
+          </a:xfrm>
+          <a:prstGeom prst="rect">
+            <a:avLst/>
+          </a:prstGeom>
+          <a:noFill/>
+          <a:ln/>
+        </p:spPr>
+        <p:txBody>
+          <a:bodyPr wrap="square" lIns="0" tIns="0" rIns="0" bIns="0" rtlCol="0" anchor="t"/>
+          <a:lstStyle/>
+          <a:p>
+            <a:pPr algn="l" marL="152400" indent="-152400">
+              <a:spcAft>
+                <a:spcPts val="1000"/>
+              </a:spcAft>
+              <a:buSzPct val="100000"/>
+              <a:buChar char="▪"/>
+            </a:pPr>
+            <a:r>
+              <a:rPr lang="en-US" sz="1300" dirty="0">
                 <a:solidFill>
                   <a:srgbClr val="1A2E24"/>
                 </a:solidFill>
@@ -27018,9 +26484,288 @@
                 <a:ea typeface="微软雅黑" pitchFamily="34" charset="-122"/>
                 <a:cs typeface="微软雅黑" pitchFamily="34" charset="-120"/>
               </a:rPr>
-              <a:t>净效果：11244 后端用例（覆盖率 100%）+ 6051 前端用例全绿；Windows x64 与麒麟 ARM64 两个离线安装包由 GitHub Actions 全自动构建并发布 Release</a:t>
-            </a:r>
-            <a:endParaRPr lang="en-US" sz="1350" dirty="0"/>
+              <a:t>备份包必含数据库本体，缺失即抛错（fail-loud）</a:t>
+            </a:r>
+            <a:endParaRPr lang="en-US" sz="1300" dirty="0"/>
+          </a:p>
+          <a:p>
+            <a:pPr algn="l" marL="152400" indent="-152400">
+              <a:spcAft>
+                <a:spcPts val="1000"/>
+              </a:spcAft>
+              <a:buSzPct val="100000"/>
+              <a:buChar char="▪"/>
+            </a:pPr>
+            <a:r>
+              <a:rPr lang="en-US" sz="1300" dirty="0">
+                <a:solidFill>
+                  <a:srgbClr val="1A2E24"/>
+                </a:solidFill>
+                <a:latin typeface="微软雅黑" pitchFamily="34" charset="0"/>
+                <a:ea typeface="微软雅黑" pitchFamily="34" charset="-122"/>
+                <a:cs typeface="微软雅黑" pitchFamily="34" charset="-120"/>
+              </a:rPr>
+              <a:t>列表标注 is_encrypted / database_included</a:t>
+            </a:r>
+            <a:endParaRPr lang="en-US" sz="1300" dirty="0"/>
+          </a:p>
+          <a:p>
+            <a:pPr algn="l" marL="152400" indent="-152400">
+              <a:spcAft>
+                <a:spcPts val="1000"/>
+              </a:spcAft>
+              <a:buSzPct val="100000"/>
+              <a:buChar char="▪"/>
+            </a:pPr>
+            <a:r>
+              <a:rPr lang="en-US" sz="1300" dirty="0">
+                <a:solidFill>
+                  <a:srgbClr val="1A2E24"/>
+                </a:solidFill>
+                <a:latin typeface="微软雅黑" pitchFamily="34" charset="0"/>
+                <a:ea typeface="微软雅黑" pitchFamily="34" charset="-122"/>
+                <a:cs typeface="微软雅黑" pitchFamily="34" charset="-120"/>
+              </a:rPr>
+              <a:t>上传恢复：8MB 分块流式落盘防 OOM，10GB 防御上限</a:t>
+            </a:r>
+            <a:endParaRPr lang="en-US" sz="1300" dirty="0"/>
+          </a:p>
+          <a:p>
+            <a:pPr algn="l" marL="152400" indent="-152400">
+              <a:spcAft>
+                <a:spcPts val="1000"/>
+              </a:spcAft>
+              <a:buSzPct val="100000"/>
+              <a:buChar char="▪"/>
+            </a:pPr>
+            <a:r>
+              <a:rPr lang="en-US" sz="1300" dirty="0">
+                <a:solidFill>
+                  <a:srgbClr val="1A2E24"/>
+                </a:solidFill>
+                <a:latin typeface="微软雅黑" pitchFamily="34" charset="0"/>
+                <a:ea typeface="微软雅黑" pitchFamily="34" charset="-122"/>
+                <a:cs typeface="微软雅黑" pitchFamily="34" charset="-120"/>
+              </a:rPr>
+              <a:t>加密备份口令（PBKDF2+Fernet）；全部拒绝路径清理临时文件</a:t>
+            </a:r>
+            <a:endParaRPr lang="en-US" sz="1300" dirty="0"/>
+          </a:p>
+          <a:p>
+            <a:pPr algn="l" marL="152400" indent="-152400">
+              <a:spcAft>
+                <a:spcPts val="1000"/>
+              </a:spcAft>
+              <a:buSzPct val="100000"/>
+              <a:buChar char="▪"/>
+            </a:pPr>
+            <a:r>
+              <a:rPr lang="en-US" sz="1300" dirty="0">
+                <a:solidFill>
+                  <a:srgbClr val="1A2E24"/>
+                </a:solidFill>
+                <a:latin typeface="微软雅黑" pitchFamily="34" charset="0"/>
+                <a:ea typeface="微软雅黑" pitchFamily="34" charset="-122"/>
+                <a:cs typeface="微软雅黑" pitchFamily="34" charset="-120"/>
+              </a:rPr>
+              <a:t>路径单一来源：以会话引擎/DATABASE_URL 为准（历史错源事故根治）</a:t>
+            </a:r>
+            <a:endParaRPr lang="en-US" sz="1300" dirty="0"/>
+          </a:p>
+        </p:txBody>
+      </p:sp>
+      <p:sp>
+        <p:nvSpPr>
+          <p:cNvPr id="10" name="Shape 8"/>
+          <p:cNvSpPr/>
+          <p:nvPr/>
+        </p:nvSpPr>
+        <p:spPr>
+          <a:xfrm>
+            <a:off x="6263640" y="1645920"/>
+            <a:ext cx="5486400" cy="4480560"/>
+          </a:xfrm>
+          <a:prstGeom prst="roundRect">
+            <a:avLst>
+              <a:gd name="adj" fmla="val 1429"/>
+            </a:avLst>
+          </a:prstGeom>
+          <a:solidFill>
+            <a:srgbClr val="FFFFFF"/>
+          </a:solidFill>
+          <a:ln/>
+          <a:effectLst>
+            <a:outerShdw sx="100000" sy="100000" kx="0" ky="0" algn="bl" rotWithShape="0" blurRad="88900" dist="25400" dir="5400000">
+              <a:srgbClr val="1A2E24">
+                <a:alpha val="13000"/>
+              </a:srgbClr>
+            </a:outerShdw>
+          </a:effectLst>
+        </p:spPr>
+      </p:sp>
+      <p:sp>
+        <p:nvSpPr>
+          <p:cNvPr id="11" name="Text 9"/>
+          <p:cNvSpPr/>
+          <p:nvPr/>
+        </p:nvSpPr>
+        <p:spPr>
+          <a:xfrm>
+            <a:off x="6556248" y="1874520"/>
+            <a:ext cx="4114800" cy="365760"/>
+          </a:xfrm>
+          <a:prstGeom prst="rect">
+            <a:avLst/>
+          </a:prstGeom>
+          <a:noFill/>
+          <a:ln/>
+        </p:spPr>
+        <p:txBody>
+          <a:bodyPr wrap="square" lIns="0" tIns="0" rIns="0" bIns="0" rtlCol="0" anchor="ctr"/>
+          <a:lstStyle/>
+          <a:p>
+            <a:pPr indent="0" marL="0">
+              <a:buNone/>
+            </a:pPr>
+            <a:r>
+              <a:rPr lang="en-US" sz="1600" b="1" dirty="0">
+                <a:solidFill>
+                  <a:srgbClr val="1F4A38"/>
+                </a:solidFill>
+                <a:latin typeface="微软雅黑" pitchFamily="34" charset="0"/>
+                <a:ea typeface="微软雅黑" pitchFamily="34" charset="-122"/>
+                <a:cs typeface="微软雅黑" pitchFamily="34" charset="-120"/>
+              </a:rPr>
+              <a:t>离线升级（ADR 指南）</a:t>
+            </a:r>
+            <a:endParaRPr lang="en-US" sz="1600" dirty="0"/>
+          </a:p>
+        </p:txBody>
+      </p:sp>
+      <p:sp>
+        <p:nvSpPr>
+          <p:cNvPr id="12" name="Text 10"/>
+          <p:cNvSpPr/>
+          <p:nvPr/>
+        </p:nvSpPr>
+        <p:spPr>
+          <a:xfrm>
+            <a:off x="6556248" y="2331720"/>
+            <a:ext cx="4937760" cy="3566160"/>
+          </a:xfrm>
+          <a:prstGeom prst="rect">
+            <a:avLst/>
+          </a:prstGeom>
+          <a:noFill/>
+          <a:ln/>
+        </p:spPr>
+        <p:txBody>
+          <a:bodyPr wrap="square" lIns="0" tIns="0" rIns="0" bIns="0" rtlCol="0" anchor="t"/>
+          <a:lstStyle/>
+          <a:p>
+            <a:pPr algn="l" marL="152400" indent="-152400">
+              <a:spcAft>
+                <a:spcPts val="1000"/>
+              </a:spcAft>
+              <a:buSzPct val="100000"/>
+              <a:buChar char="▪"/>
+            </a:pPr>
+            <a:r>
+              <a:rPr lang="en-US" sz="1300" dirty="0">
+                <a:solidFill>
+                  <a:srgbClr val="1A2E24"/>
+                </a:solidFill>
+                <a:latin typeface="微软雅黑" pitchFamily="34" charset="0"/>
+                <a:ea typeface="微软雅黑" pitchFamily="34" charset="-122"/>
+                <a:cs typeface="微软雅黑" pitchFamily="34" charset="-120"/>
+              </a:rPr>
+              <a:t>升级四步：备份 → SHA256/签名校验 → 覆盖安装 → Alembic 迁移</a:t>
+            </a:r>
+            <a:endParaRPr lang="en-US" sz="1300" dirty="0"/>
+          </a:p>
+          <a:p>
+            <a:pPr algn="l" marL="152400" indent="-152400">
+              <a:spcAft>
+                <a:spcPts val="1000"/>
+              </a:spcAft>
+              <a:buSzPct val="100000"/>
+              <a:buChar char="▪"/>
+            </a:pPr>
+            <a:r>
+              <a:rPr lang="en-US" sz="1300" dirty="0">
+                <a:solidFill>
+                  <a:srgbClr val="1A2E24"/>
+                </a:solidFill>
+                <a:latin typeface="微软雅黑" pitchFamily="34" charset="0"/>
+                <a:ea typeface="微软雅黑" pitchFamily="34" charset="-122"/>
+                <a:cs typeface="微软雅黑" pitchFamily="34" charset="-120"/>
+              </a:rPr>
+              <a:t>失败回滚路径文档化；用户数据与安装目录分离</a:t>
+            </a:r>
+            <a:endParaRPr lang="en-US" sz="1300" dirty="0"/>
+          </a:p>
+          <a:p>
+            <a:pPr algn="l" marL="152400" indent="-152400">
+              <a:spcAft>
+                <a:spcPts val="1000"/>
+              </a:spcAft>
+              <a:buSzPct val="100000"/>
+              <a:buChar char="▪"/>
+            </a:pPr>
+            <a:r>
+              <a:rPr lang="en-US" sz="1300" dirty="0">
+                <a:solidFill>
+                  <a:srgbClr val="1A2E24"/>
+                </a:solidFill>
+                <a:latin typeface="微软雅黑" pitchFamily="34" charset="0"/>
+                <a:ea typeface="微软雅黑" pitchFamily="34" charset="-122"/>
+                <a:cs typeface="微软雅黑" pitchFamily="34" charset="-120"/>
+              </a:rPr>
+              <a:t>出厂恢复通道（ADR-0008）：仅本机 + 仅未激活管理员 + 全程审计</a:t>
+            </a:r>
+            <a:endParaRPr lang="en-US" sz="1300" dirty="0"/>
+          </a:p>
+          <a:p>
+            <a:pPr algn="l" marL="152400" indent="-152400">
+              <a:spcAft>
+                <a:spcPts val="1000"/>
+              </a:spcAft>
+              <a:buSzPct val="100000"/>
+              <a:buChar char="▪"/>
+            </a:pPr>
+            <a:r>
+              <a:rPr lang="en-US" sz="1300" dirty="0">
+                <a:solidFill>
+                  <a:srgbClr val="1A2E24"/>
+                </a:solidFill>
+                <a:latin typeface="微软雅黑" pitchFamily="34" charset="0"/>
+                <a:ea typeface="微软雅黑" pitchFamily="34" charset="-122"/>
+                <a:cs typeface="微软雅黑" pitchFamily="34" charset="-120"/>
+              </a:rPr>
+              <a:t>删库守卫：完整性失败默认 SystemExit 保留现场</a:t>
+            </a:r>
+            <a:endParaRPr lang="en-US" sz="1300" dirty="0"/>
+          </a:p>
+          <a:p>
+            <a:pPr algn="l" marL="152400" indent="-152400">
+              <a:spcAft>
+                <a:spcPts val="1000"/>
+              </a:spcAft>
+              <a:buSzPct val="100000"/>
+              <a:buChar char="▪"/>
+            </a:pPr>
+            <a:r>
+              <a:rPr lang="en-US" sz="1300" dirty="0">
+                <a:solidFill>
+                  <a:srgbClr val="1A2E24"/>
+                </a:solidFill>
+                <a:latin typeface="微软雅黑" pitchFamily="34" charset="0"/>
+                <a:ea typeface="微软雅黑" pitchFamily="34" charset="-122"/>
+                <a:cs typeface="微软雅黑" pitchFamily="34" charset="-120"/>
+              </a:rPr>
+              <a:t>机器码三级回退：Windows 重装也能通过通行码恢复授权</a:t>
+            </a:r>
+            <a:endParaRPr lang="en-US" sz="1300" dirty="0"/>
           </a:p>
         </p:txBody>
       </p:sp>
@@ -27148,7 +26893,7 @@
                 <a:ea typeface="微软雅黑" pitchFamily="34" charset="-122"/>
                 <a:cs typeface="微软雅黑" pitchFamily="34" charset="-120"/>
               </a:rPr>
-              <a:t>后续演进：已立项的工单</a:t>
+              <a:t>版本历程：三个月的密集演进</a:t>
             </a:r>
             <a:endParaRPr lang="en-US" sz="3000" dirty="0"/>
           </a:p>
@@ -27240,16 +26985,724 @@
         </p:nvSpPr>
         <p:spPr>
           <a:xfrm>
-            <a:off x="457200" y="1691640"/>
-            <a:ext cx="5440680" cy="1234440"/>
+            <a:off x="1005840" y="2834640"/>
+            <a:ext cx="10149840" cy="0"/>
+          </a:xfrm>
+          <a:prstGeom prst="line">
+            <a:avLst/>
+          </a:prstGeom>
+          <a:noFill/>
+          <a:ln w="25400">
+            <a:solidFill>
+              <a:srgbClr val="D8E0DA"/>
+            </a:solidFill>
+            <a:prstDash val="solid"/>
+          </a:ln>
+        </p:spPr>
+      </p:sp>
+      <p:sp>
+        <p:nvSpPr>
+          <p:cNvPr id="8" name="Shape 6"/>
+          <p:cNvSpPr/>
+          <p:nvPr/>
+        </p:nvSpPr>
+        <p:spPr>
+          <a:xfrm>
+            <a:off x="841248" y="2706624"/>
+            <a:ext cx="274320" cy="274320"/>
+          </a:xfrm>
+          <a:prstGeom prst="ellipse">
+            <a:avLst/>
+          </a:prstGeom>
+          <a:solidFill>
+            <a:srgbClr val="1F4A38"/>
+          </a:solidFill>
+          <a:ln/>
+        </p:spPr>
+      </p:sp>
+      <p:sp>
+        <p:nvSpPr>
+          <p:cNvPr id="9" name="Text 7"/>
+          <p:cNvSpPr/>
+          <p:nvPr/>
+        </p:nvSpPr>
+        <p:spPr>
+          <a:xfrm>
+            <a:off x="502920" y="2011680"/>
+            <a:ext cx="1280160" cy="365760"/>
+          </a:xfrm>
+          <a:prstGeom prst="rect">
+            <a:avLst/>
+          </a:prstGeom>
+          <a:noFill/>
+          <a:ln/>
+        </p:spPr>
+        <p:txBody>
+          <a:bodyPr wrap="square" lIns="0" tIns="0" rIns="0" bIns="0" rtlCol="0" anchor="ctr"/>
+          <a:lstStyle/>
+          <a:p>
+            <a:pPr algn="ctr" indent="0" marL="0">
+              <a:buNone/>
+            </a:pPr>
+            <a:r>
+              <a:rPr lang="en-US" sz="1500" b="1" dirty="0">
+                <a:solidFill>
+                  <a:srgbClr val="1A2E24"/>
+                </a:solidFill>
+                <a:latin typeface="微软雅黑" pitchFamily="34" charset="0"/>
+                <a:ea typeface="微软雅黑" pitchFamily="34" charset="-122"/>
+                <a:cs typeface="微软雅黑" pitchFamily="34" charset="-120"/>
+              </a:rPr>
+              <a:t>v1.11.2</a:t>
+            </a:r>
+            <a:endParaRPr lang="en-US" sz="1500" dirty="0"/>
+          </a:p>
+        </p:txBody>
+      </p:sp>
+      <p:sp>
+        <p:nvSpPr>
+          <p:cNvPr id="10" name="Text 8"/>
+          <p:cNvSpPr/>
+          <p:nvPr/>
+        </p:nvSpPr>
+        <p:spPr>
+          <a:xfrm>
+            <a:off x="502920" y="3127248"/>
+            <a:ext cx="1280160" cy="292608"/>
+          </a:xfrm>
+          <a:prstGeom prst="rect">
+            <a:avLst/>
+          </a:prstGeom>
+          <a:noFill/>
+          <a:ln/>
+        </p:spPr>
+        <p:txBody>
+          <a:bodyPr wrap="square" lIns="0" tIns="0" rIns="0" bIns="0" rtlCol="0" anchor="ctr"/>
+          <a:lstStyle/>
+          <a:p>
+            <a:pPr algn="ctr" indent="0" marL="0">
+              <a:buNone/>
+            </a:pPr>
+            <a:r>
+              <a:rPr lang="en-US" sz="1100" dirty="0">
+                <a:solidFill>
+                  <a:srgbClr val="5F6F66"/>
+                </a:solidFill>
+                <a:latin typeface="微软雅黑" pitchFamily="34" charset="0"/>
+                <a:ea typeface="微软雅黑" pitchFamily="34" charset="-122"/>
+                <a:cs typeface="微软雅黑" pitchFamily="34" charset="-120"/>
+              </a:rPr>
+              <a:t>08-30</a:t>
+            </a:r>
+            <a:endParaRPr lang="en-US" sz="1100" dirty="0"/>
+          </a:p>
+        </p:txBody>
+      </p:sp>
+      <p:sp>
+        <p:nvSpPr>
+          <p:cNvPr id="11" name="Text 9"/>
+          <p:cNvSpPr/>
+          <p:nvPr/>
+        </p:nvSpPr>
+        <p:spPr>
+          <a:xfrm>
+            <a:off x="320040" y="3566160"/>
+            <a:ext cx="1965960" cy="1737360"/>
+          </a:xfrm>
+          <a:prstGeom prst="rect">
+            <a:avLst/>
+          </a:prstGeom>
+          <a:noFill/>
+          <a:ln/>
+        </p:spPr>
+        <p:txBody>
+          <a:bodyPr wrap="square" lIns="0" tIns="0" rIns="0" bIns="0" rtlCol="0" anchor="ctr"/>
+          <a:lstStyle/>
+          <a:p>
+            <a:pPr algn="l" indent="0" marL="0">
+              <a:buNone/>
+            </a:pPr>
+            <a:r>
+              <a:rPr lang="en-US" sz="1150" dirty="0">
+                <a:solidFill>
+                  <a:srgbClr val="5F6F66"/>
+                </a:solidFill>
+                <a:latin typeface="微软雅黑" pitchFamily="34" charset="0"/>
+                <a:ea typeface="微软雅黑" pitchFamily="34" charset="-122"/>
+                <a:cs typeface="微软雅黑" pitchFamily="34" charset="-120"/>
+              </a:rPr>
+              <a:t>403 六类根因修复 + 弹窗裁切修复 + 5 个 500 端点</a:t>
+            </a:r>
+            <a:endParaRPr lang="en-US" sz="1150" dirty="0"/>
+          </a:p>
+        </p:txBody>
+      </p:sp>
+      <p:sp>
+        <p:nvSpPr>
+          <p:cNvPr id="12" name="Shape 10"/>
+          <p:cNvSpPr/>
+          <p:nvPr/>
+        </p:nvSpPr>
+        <p:spPr>
+          <a:xfrm>
+            <a:off x="3081528" y="2706624"/>
+            <a:ext cx="274320" cy="274320"/>
+          </a:xfrm>
+          <a:prstGeom prst="ellipse">
+            <a:avLst/>
+          </a:prstGeom>
+          <a:solidFill>
+            <a:srgbClr val="1F4A38"/>
+          </a:solidFill>
+          <a:ln/>
+        </p:spPr>
+      </p:sp>
+      <p:sp>
+        <p:nvSpPr>
+          <p:cNvPr id="13" name="Text 11"/>
+          <p:cNvSpPr/>
+          <p:nvPr/>
+        </p:nvSpPr>
+        <p:spPr>
+          <a:xfrm>
+            <a:off x="2743200" y="2011680"/>
+            <a:ext cx="1280160" cy="365760"/>
+          </a:xfrm>
+          <a:prstGeom prst="rect">
+            <a:avLst/>
+          </a:prstGeom>
+          <a:noFill/>
+          <a:ln/>
+        </p:spPr>
+        <p:txBody>
+          <a:bodyPr wrap="square" lIns="0" tIns="0" rIns="0" bIns="0" rtlCol="0" anchor="ctr"/>
+          <a:lstStyle/>
+          <a:p>
+            <a:pPr algn="ctr" indent="0" marL="0">
+              <a:buNone/>
+            </a:pPr>
+            <a:r>
+              <a:rPr lang="en-US" sz="1500" b="1" dirty="0">
+                <a:solidFill>
+                  <a:srgbClr val="1A2E24"/>
+                </a:solidFill>
+                <a:latin typeface="微软雅黑" pitchFamily="34" charset="0"/>
+                <a:ea typeface="微软雅黑" pitchFamily="34" charset="-122"/>
+                <a:cs typeface="微软雅黑" pitchFamily="34" charset="-120"/>
+              </a:rPr>
+              <a:t>v1.12.2</a:t>
+            </a:r>
+            <a:endParaRPr lang="en-US" sz="1500" dirty="0"/>
+          </a:p>
+        </p:txBody>
+      </p:sp>
+      <p:sp>
+        <p:nvSpPr>
+          <p:cNvPr id="14" name="Text 12"/>
+          <p:cNvSpPr/>
+          <p:nvPr/>
+        </p:nvSpPr>
+        <p:spPr>
+          <a:xfrm>
+            <a:off x="2743200" y="3127248"/>
+            <a:ext cx="1280160" cy="292608"/>
+          </a:xfrm>
+          <a:prstGeom prst="rect">
+            <a:avLst/>
+          </a:prstGeom>
+          <a:noFill/>
+          <a:ln/>
+        </p:spPr>
+        <p:txBody>
+          <a:bodyPr wrap="square" lIns="0" tIns="0" rIns="0" bIns="0" rtlCol="0" anchor="ctr"/>
+          <a:lstStyle/>
+          <a:p>
+            <a:pPr algn="ctr" indent="0" marL="0">
+              <a:buNone/>
+            </a:pPr>
+            <a:r>
+              <a:rPr lang="en-US" sz="1100" dirty="0">
+                <a:solidFill>
+                  <a:srgbClr val="5F6F66"/>
+                </a:solidFill>
+                <a:latin typeface="微软雅黑" pitchFamily="34" charset="0"/>
+                <a:ea typeface="微软雅黑" pitchFamily="34" charset="-122"/>
+                <a:cs typeface="微软雅黑" pitchFamily="34" charset="-120"/>
+              </a:rPr>
+              <a:t>09-12</a:t>
+            </a:r>
+            <a:endParaRPr lang="en-US" sz="1100" dirty="0"/>
+          </a:p>
+        </p:txBody>
+      </p:sp>
+      <p:sp>
+        <p:nvSpPr>
+          <p:cNvPr id="15" name="Text 13"/>
+          <p:cNvSpPr/>
+          <p:nvPr/>
+        </p:nvSpPr>
+        <p:spPr>
+          <a:xfrm>
+            <a:off x="2560320" y="3566160"/>
+            <a:ext cx="1965960" cy="1737360"/>
+          </a:xfrm>
+          <a:prstGeom prst="rect">
+            <a:avLst/>
+          </a:prstGeom>
+          <a:noFill/>
+          <a:ln/>
+        </p:spPr>
+        <p:txBody>
+          <a:bodyPr wrap="square" lIns="0" tIns="0" rIns="0" bIns="0" rtlCol="0" anchor="ctr"/>
+          <a:lstStyle/>
+          <a:p>
+            <a:pPr algn="l" indent="0" marL="0">
+              <a:buNone/>
+            </a:pPr>
+            <a:r>
+              <a:rPr lang="en-US" sz="1150" dirty="0">
+                <a:solidFill>
+                  <a:srgbClr val="5F6F66"/>
+                </a:solidFill>
+                <a:latin typeface="微软雅黑" pitchFamily="34" charset="0"/>
+                <a:ea typeface="微软雅黑" pitchFamily="34" charset="-122"/>
+                <a:cs typeface="微软雅黑" pitchFamily="34" charset="-120"/>
+              </a:rPr>
+              <a:t>架构评估 P0/P1 加固：导出任务重启恢复、导出/备份原子写、备份可恢复性校验</a:t>
+            </a:r>
+            <a:endParaRPr lang="en-US" sz="1150" dirty="0"/>
+          </a:p>
+        </p:txBody>
+      </p:sp>
+      <p:sp>
+        <p:nvSpPr>
+          <p:cNvPr id="16" name="Shape 14"/>
+          <p:cNvSpPr/>
+          <p:nvPr/>
+        </p:nvSpPr>
+        <p:spPr>
+          <a:xfrm>
+            <a:off x="5321808" y="2706624"/>
+            <a:ext cx="274320" cy="274320"/>
+          </a:xfrm>
+          <a:prstGeom prst="ellipse">
+            <a:avLst/>
+          </a:prstGeom>
+          <a:solidFill>
+            <a:srgbClr val="1F4A38"/>
+          </a:solidFill>
+          <a:ln/>
+        </p:spPr>
+      </p:sp>
+      <p:sp>
+        <p:nvSpPr>
+          <p:cNvPr id="17" name="Text 15"/>
+          <p:cNvSpPr/>
+          <p:nvPr/>
+        </p:nvSpPr>
+        <p:spPr>
+          <a:xfrm>
+            <a:off x="4983480" y="2011680"/>
+            <a:ext cx="1280160" cy="365760"/>
+          </a:xfrm>
+          <a:prstGeom prst="rect">
+            <a:avLst/>
+          </a:prstGeom>
+          <a:noFill/>
+          <a:ln/>
+        </p:spPr>
+        <p:txBody>
+          <a:bodyPr wrap="square" lIns="0" tIns="0" rIns="0" bIns="0" rtlCol="0" anchor="ctr"/>
+          <a:lstStyle/>
+          <a:p>
+            <a:pPr algn="ctr" indent="0" marL="0">
+              <a:buNone/>
+            </a:pPr>
+            <a:r>
+              <a:rPr lang="en-US" sz="1500" b="1" dirty="0">
+                <a:solidFill>
+                  <a:srgbClr val="1A2E24"/>
+                </a:solidFill>
+                <a:latin typeface="微软雅黑" pitchFamily="34" charset="0"/>
+                <a:ea typeface="微软雅黑" pitchFamily="34" charset="-122"/>
+                <a:cs typeface="微软雅黑" pitchFamily="34" charset="-120"/>
+              </a:rPr>
+              <a:t>v1.12.5</a:t>
+            </a:r>
+            <a:endParaRPr lang="en-US" sz="1500" dirty="0"/>
+          </a:p>
+        </p:txBody>
+      </p:sp>
+      <p:sp>
+        <p:nvSpPr>
+          <p:cNvPr id="18" name="Text 16"/>
+          <p:cNvSpPr/>
+          <p:nvPr/>
+        </p:nvSpPr>
+        <p:spPr>
+          <a:xfrm>
+            <a:off x="4983480" y="3127248"/>
+            <a:ext cx="1280160" cy="292608"/>
+          </a:xfrm>
+          <a:prstGeom prst="rect">
+            <a:avLst/>
+          </a:prstGeom>
+          <a:noFill/>
+          <a:ln/>
+        </p:spPr>
+        <p:txBody>
+          <a:bodyPr wrap="square" lIns="0" tIns="0" rIns="0" bIns="0" rtlCol="0" anchor="ctr"/>
+          <a:lstStyle/>
+          <a:p>
+            <a:pPr algn="ctr" indent="0" marL="0">
+              <a:buNone/>
+            </a:pPr>
+            <a:r>
+              <a:rPr lang="en-US" sz="1100" dirty="0">
+                <a:solidFill>
+                  <a:srgbClr val="5F6F66"/>
+                </a:solidFill>
+                <a:latin typeface="微软雅黑" pitchFamily="34" charset="0"/>
+                <a:ea typeface="微软雅黑" pitchFamily="34" charset="-122"/>
+                <a:cs typeface="微软雅黑" pitchFamily="34" charset="-120"/>
+              </a:rPr>
+              <a:t>09-12</a:t>
+            </a:r>
+            <a:endParaRPr lang="en-US" sz="1100" dirty="0"/>
+          </a:p>
+        </p:txBody>
+      </p:sp>
+      <p:sp>
+        <p:nvSpPr>
+          <p:cNvPr id="19" name="Text 17"/>
+          <p:cNvSpPr/>
+          <p:nvPr/>
+        </p:nvSpPr>
+        <p:spPr>
+          <a:xfrm>
+            <a:off x="4800600" y="3566160"/>
+            <a:ext cx="1965960" cy="1737360"/>
+          </a:xfrm>
+          <a:prstGeom prst="rect">
+            <a:avLst/>
+          </a:prstGeom>
+          <a:noFill/>
+          <a:ln/>
+        </p:spPr>
+        <p:txBody>
+          <a:bodyPr wrap="square" lIns="0" tIns="0" rIns="0" bIns="0" rtlCol="0" anchor="ctr"/>
+          <a:lstStyle/>
+          <a:p>
+            <a:pPr algn="l" indent="0" marL="0">
+              <a:buNone/>
+            </a:pPr>
+            <a:r>
+              <a:rPr lang="en-US" sz="1150" dirty="0">
+                <a:solidFill>
+                  <a:srgbClr val="5F6F66"/>
+                </a:solidFill>
+                <a:latin typeface="微软雅黑" pitchFamily="34" charset="0"/>
+                <a:ea typeface="微软雅黑" pitchFamily="34" charset="-122"/>
+                <a:cs typeface="微软雅黑" pitchFamily="34" charset="-120"/>
+              </a:rPr>
+              <a:t>深度审计 13 项修复：目录穿越 / 存储型 XSS / 并发 / 备份 fail-loud</a:t>
+            </a:r>
+            <a:endParaRPr lang="en-US" sz="1150" dirty="0"/>
+          </a:p>
+        </p:txBody>
+      </p:sp>
+      <p:sp>
+        <p:nvSpPr>
+          <p:cNvPr id="20" name="Shape 18"/>
+          <p:cNvSpPr/>
+          <p:nvPr/>
+        </p:nvSpPr>
+        <p:spPr>
+          <a:xfrm>
+            <a:off x="7562088" y="2706624"/>
+            <a:ext cx="274320" cy="274320"/>
+          </a:xfrm>
+          <a:prstGeom prst="ellipse">
+            <a:avLst/>
+          </a:prstGeom>
+          <a:solidFill>
+            <a:srgbClr val="1F4A38"/>
+          </a:solidFill>
+          <a:ln/>
+        </p:spPr>
+      </p:sp>
+      <p:sp>
+        <p:nvSpPr>
+          <p:cNvPr id="21" name="Text 19"/>
+          <p:cNvSpPr/>
+          <p:nvPr/>
+        </p:nvSpPr>
+        <p:spPr>
+          <a:xfrm>
+            <a:off x="7223760" y="2011680"/>
+            <a:ext cx="1280160" cy="365760"/>
+          </a:xfrm>
+          <a:prstGeom prst="rect">
+            <a:avLst/>
+          </a:prstGeom>
+          <a:noFill/>
+          <a:ln/>
+        </p:spPr>
+        <p:txBody>
+          <a:bodyPr wrap="square" lIns="0" tIns="0" rIns="0" bIns="0" rtlCol="0" anchor="ctr"/>
+          <a:lstStyle/>
+          <a:p>
+            <a:pPr algn="ctr" indent="0" marL="0">
+              <a:buNone/>
+            </a:pPr>
+            <a:r>
+              <a:rPr lang="en-US" sz="1500" b="1" dirty="0">
+                <a:solidFill>
+                  <a:srgbClr val="1A2E24"/>
+                </a:solidFill>
+                <a:latin typeface="微软雅黑" pitchFamily="34" charset="0"/>
+                <a:ea typeface="微软雅黑" pitchFamily="34" charset="-122"/>
+                <a:cs typeface="微软雅黑" pitchFamily="34" charset="-120"/>
+              </a:rPr>
+              <a:t>v1.12.7</a:t>
+            </a:r>
+            <a:endParaRPr lang="en-US" sz="1500" dirty="0"/>
+          </a:p>
+        </p:txBody>
+      </p:sp>
+      <p:sp>
+        <p:nvSpPr>
+          <p:cNvPr id="22" name="Text 20"/>
+          <p:cNvSpPr/>
+          <p:nvPr/>
+        </p:nvSpPr>
+        <p:spPr>
+          <a:xfrm>
+            <a:off x="7223760" y="3127248"/>
+            <a:ext cx="1280160" cy="292608"/>
+          </a:xfrm>
+          <a:prstGeom prst="rect">
+            <a:avLst/>
+          </a:prstGeom>
+          <a:noFill/>
+          <a:ln/>
+        </p:spPr>
+        <p:txBody>
+          <a:bodyPr wrap="square" lIns="0" tIns="0" rIns="0" bIns="0" rtlCol="0" anchor="ctr"/>
+          <a:lstStyle/>
+          <a:p>
+            <a:pPr algn="ctr" indent="0" marL="0">
+              <a:buNone/>
+            </a:pPr>
+            <a:r>
+              <a:rPr lang="en-US" sz="1100" dirty="0">
+                <a:solidFill>
+                  <a:srgbClr val="5F6F66"/>
+                </a:solidFill>
+                <a:latin typeface="微软雅黑" pitchFamily="34" charset="0"/>
+                <a:ea typeface="微软雅黑" pitchFamily="34" charset="-122"/>
+                <a:cs typeface="微软雅黑" pitchFamily="34" charset="-120"/>
+              </a:rPr>
+              <a:t>09-13</a:t>
+            </a:r>
+            <a:endParaRPr lang="en-US" sz="1100" dirty="0"/>
+          </a:p>
+        </p:txBody>
+      </p:sp>
+      <p:sp>
+        <p:nvSpPr>
+          <p:cNvPr id="23" name="Text 21"/>
+          <p:cNvSpPr/>
+          <p:nvPr/>
+        </p:nvSpPr>
+        <p:spPr>
+          <a:xfrm>
+            <a:off x="7040880" y="3566160"/>
+            <a:ext cx="1965960" cy="1737360"/>
+          </a:xfrm>
+          <a:prstGeom prst="rect">
+            <a:avLst/>
+          </a:prstGeom>
+          <a:noFill/>
+          <a:ln/>
+        </p:spPr>
+        <p:txBody>
+          <a:bodyPr wrap="square" lIns="0" tIns="0" rIns="0" bIns="0" rtlCol="0" anchor="ctr"/>
+          <a:lstStyle/>
+          <a:p>
+            <a:pPr algn="l" indent="0" marL="0">
+              <a:buNone/>
+            </a:pPr>
+            <a:r>
+              <a:rPr lang="en-US" sz="1150" dirty="0">
+                <a:solidFill>
+                  <a:srgbClr val="5F6F66"/>
+                </a:solidFill>
+                <a:latin typeface="微软雅黑" pitchFamily="34" charset="0"/>
+                <a:ea typeface="微软雅黑" pitchFamily="34" charset="-122"/>
+                <a:cs typeface="微软雅黑" pitchFamily="34" charset="-120"/>
+              </a:rPr>
+              <a:t>遗留风险二批：上传体积三层上限、导出回收、导入拒绝记录、Windows CI 可见性</a:t>
+            </a:r>
+            <a:endParaRPr lang="en-US" sz="1150" dirty="0"/>
+          </a:p>
+        </p:txBody>
+      </p:sp>
+      <p:sp>
+        <p:nvSpPr>
+          <p:cNvPr id="24" name="Shape 22"/>
+          <p:cNvSpPr/>
+          <p:nvPr/>
+        </p:nvSpPr>
+        <p:spPr>
+          <a:xfrm>
+            <a:off x="9802368" y="2706624"/>
+            <a:ext cx="274320" cy="274320"/>
+          </a:xfrm>
+          <a:prstGeom prst="ellipse">
+            <a:avLst/>
+          </a:prstGeom>
+          <a:solidFill>
+            <a:srgbClr val="C9A227"/>
+          </a:solidFill>
+          <a:ln/>
+        </p:spPr>
+      </p:sp>
+      <p:sp>
+        <p:nvSpPr>
+          <p:cNvPr id="25" name="Text 23"/>
+          <p:cNvSpPr/>
+          <p:nvPr/>
+        </p:nvSpPr>
+        <p:spPr>
+          <a:xfrm>
+            <a:off x="9464040" y="2011680"/>
+            <a:ext cx="1280160" cy="365760"/>
+          </a:xfrm>
+          <a:prstGeom prst="rect">
+            <a:avLst/>
+          </a:prstGeom>
+          <a:noFill/>
+          <a:ln/>
+        </p:spPr>
+        <p:txBody>
+          <a:bodyPr wrap="square" lIns="0" tIns="0" rIns="0" bIns="0" rtlCol="0" anchor="ctr"/>
+          <a:lstStyle/>
+          <a:p>
+            <a:pPr algn="ctr" indent="0" marL="0">
+              <a:buNone/>
+            </a:pPr>
+            <a:r>
+              <a:rPr lang="en-US" sz="1500" b="1" dirty="0">
+                <a:solidFill>
+                  <a:srgbClr val="2D6A4F"/>
+                </a:solidFill>
+                <a:latin typeface="微软雅黑" pitchFamily="34" charset="0"/>
+                <a:ea typeface="微软雅黑" pitchFamily="34" charset="-122"/>
+                <a:cs typeface="微软雅黑" pitchFamily="34" charset="-120"/>
+              </a:rPr>
+              <a:t>v1.12.8</a:t>
+            </a:r>
+            <a:endParaRPr lang="en-US" sz="1500" dirty="0"/>
+          </a:p>
+        </p:txBody>
+      </p:sp>
+      <p:sp>
+        <p:nvSpPr>
+          <p:cNvPr id="26" name="Text 24"/>
+          <p:cNvSpPr/>
+          <p:nvPr/>
+        </p:nvSpPr>
+        <p:spPr>
+          <a:xfrm>
+            <a:off x="9464040" y="3127248"/>
+            <a:ext cx="1280160" cy="292608"/>
+          </a:xfrm>
+          <a:prstGeom prst="rect">
+            <a:avLst/>
+          </a:prstGeom>
+          <a:noFill/>
+          <a:ln/>
+        </p:spPr>
+        <p:txBody>
+          <a:bodyPr wrap="square" lIns="0" tIns="0" rIns="0" bIns="0" rtlCol="0" anchor="ctr"/>
+          <a:lstStyle/>
+          <a:p>
+            <a:pPr algn="ctr" indent="0" marL="0">
+              <a:buNone/>
+            </a:pPr>
+            <a:r>
+              <a:rPr lang="en-US" sz="1100" dirty="0">
+                <a:solidFill>
+                  <a:srgbClr val="5F6F66"/>
+                </a:solidFill>
+                <a:latin typeface="微软雅黑" pitchFamily="34" charset="0"/>
+                <a:ea typeface="微软雅黑" pitchFamily="34" charset="-122"/>
+                <a:cs typeface="微软雅黑" pitchFamily="34" charset="-120"/>
+              </a:rPr>
+              <a:t>09-14</a:t>
+            </a:r>
+            <a:endParaRPr lang="en-US" sz="1100" dirty="0"/>
+          </a:p>
+        </p:txBody>
+      </p:sp>
+      <p:sp>
+        <p:nvSpPr>
+          <p:cNvPr id="27" name="Text 25"/>
+          <p:cNvSpPr/>
+          <p:nvPr/>
+        </p:nvSpPr>
+        <p:spPr>
+          <a:xfrm>
+            <a:off x="9281160" y="3566160"/>
+            <a:ext cx="1965960" cy="1737360"/>
+          </a:xfrm>
+          <a:prstGeom prst="rect">
+            <a:avLst/>
+          </a:prstGeom>
+          <a:noFill/>
+          <a:ln/>
+        </p:spPr>
+        <p:txBody>
+          <a:bodyPr wrap="square" lIns="0" tIns="0" rIns="0" bIns="0" rtlCol="0" anchor="ctr"/>
+          <a:lstStyle/>
+          <a:p>
+            <a:pPr algn="l" indent="0" marL="0">
+              <a:buNone/>
+            </a:pPr>
+            <a:r>
+              <a:rPr lang="en-US" sz="1150" dirty="0">
+                <a:solidFill>
+                  <a:srgbClr val="5F6F66"/>
+                </a:solidFill>
+                <a:latin typeface="微软雅黑" pitchFamily="34" charset="0"/>
+                <a:ea typeface="微软雅黑" pitchFamily="34" charset="-122"/>
+                <a:cs typeface="微软雅黑" pitchFamily="34" charset="-120"/>
+              </a:rPr>
+              <a:t>R7 恢复维护闸门 / R12 低危批量 7 项 / R2 残余清零 / P-1~P-3 门禁 / R14 组织树修复</a:t>
+            </a:r>
+            <a:endParaRPr lang="en-US" sz="1150" dirty="0"/>
+          </a:p>
+        </p:txBody>
+      </p:sp>
+      <p:sp>
+        <p:nvSpPr>
+          <p:cNvPr id="28" name="Shape 26"/>
+          <p:cNvSpPr/>
+          <p:nvPr/>
+        </p:nvSpPr>
+        <p:spPr>
+          <a:xfrm>
+            <a:off x="457200" y="5440680"/>
+            <a:ext cx="11274552" cy="914400"/>
           </a:xfrm>
           <a:prstGeom prst="roundRect">
             <a:avLst>
-              <a:gd name="adj" fmla="val 5185"/>
+              <a:gd name="adj" fmla="val 7000"/>
             </a:avLst>
           </a:prstGeom>
           <a:solidFill>
-            <a:srgbClr val="FFFFFF"/>
+            <a:srgbClr val="E8EFEA"/>
           </a:solidFill>
           <a:ln/>
           <a:effectLst>
@@ -27263,14 +27716,14 @@
       </p:sp>
       <p:sp>
         <p:nvSpPr>
-          <p:cNvPr id="8" name="Text 6"/>
-          <p:cNvSpPr/>
-          <p:nvPr/>
-        </p:nvSpPr>
-        <p:spPr>
-          <a:xfrm>
-            <a:off x="731520" y="1819656"/>
-            <a:ext cx="4846320" cy="365760"/>
+          <p:cNvPr id="29" name="Text 27"/>
+          <p:cNvSpPr/>
+          <p:nvPr/>
+        </p:nvSpPr>
+        <p:spPr>
+          <a:xfrm>
+            <a:off x="749808" y="5440680"/>
+            <a:ext cx="10607040" cy="914400"/>
           </a:xfrm>
           <a:prstGeom prst="rect">
             <a:avLst/>
@@ -27286,591 +27739,17 @@
               <a:buNone/>
             </a:pPr>
             <a:r>
-              <a:rPr lang="en-US" sz="1500" b="1" dirty="0">
-                <a:solidFill>
-                  <a:srgbClr val="1F4A38"/>
-                </a:solidFill>
-                <a:latin typeface="微软雅黑" pitchFamily="34" charset="0"/>
-                <a:ea typeface="微软雅黑" pitchFamily="34" charset="-122"/>
-                <a:cs typeface="微软雅黑" pitchFamily="34" charset="-120"/>
-              </a:rPr>
-              <a:t>调度任务注册表（P-2）</a:t>
-            </a:r>
-            <a:endParaRPr lang="en-US" sz="1500" dirty="0"/>
-          </a:p>
-        </p:txBody>
-      </p:sp>
-      <p:sp>
-        <p:nvSpPr>
-          <p:cNvPr id="9" name="Text 7"/>
-          <p:cNvSpPr/>
-          <p:nvPr/>
-        </p:nvSpPr>
-        <p:spPr>
-          <a:xfrm>
-            <a:off x="731520" y="2203704"/>
-            <a:ext cx="4892040" cy="640080"/>
-          </a:xfrm>
-          <a:prstGeom prst="rect">
-            <a:avLst/>
-          </a:prstGeom>
-          <a:noFill/>
-          <a:ln/>
-        </p:spPr>
-        <p:txBody>
-          <a:bodyPr wrap="square" lIns="0" tIns="0" rIns="0" bIns="0" rtlCol="0" anchor="ctr"/>
-          <a:lstStyle/>
-          <a:p>
-            <a:pPr indent="0" marL="0">
-              <a:buNone/>
-            </a:pPr>
-            <a:r>
-              <a:rPr lang="en-US" sz="1150" dirty="0">
-                <a:solidFill>
-                  <a:srgbClr val="5F6F66"/>
-                </a:solidFill>
-                <a:latin typeface="微软雅黑" pitchFamily="34" charset="0"/>
-                <a:ea typeface="微软雅黑" pitchFamily="34" charset="-122"/>
-                <a:cs typeface="微软雅黑" pitchFamily="34" charset="-120"/>
-              </a:rPr>
-              <a:t>scheduler_registry 清单化 + /health 全量暴露（当前仅落地裸 threading.Timer 扫描门禁）</a:t>
-            </a:r>
-            <a:endParaRPr lang="en-US" sz="1150" dirty="0"/>
-          </a:p>
-        </p:txBody>
-      </p:sp>
-      <p:sp>
-        <p:nvSpPr>
-          <p:cNvPr id="10" name="Shape 8"/>
-          <p:cNvSpPr/>
-          <p:nvPr/>
-        </p:nvSpPr>
-        <p:spPr>
-          <a:xfrm>
-            <a:off x="6263640" y="1691640"/>
-            <a:ext cx="5440680" cy="1234440"/>
-          </a:xfrm>
-          <a:prstGeom prst="roundRect">
-            <a:avLst>
-              <a:gd name="adj" fmla="val 5185"/>
-            </a:avLst>
-          </a:prstGeom>
-          <a:solidFill>
-            <a:srgbClr val="FFFFFF"/>
-          </a:solidFill>
-          <a:ln/>
-          <a:effectLst>
-            <a:outerShdw sx="100000" sy="100000" kx="0" ky="0" algn="bl" rotWithShape="0" blurRad="88900" dist="25400" dir="5400000">
-              <a:srgbClr val="1A2E24">
-                <a:alpha val="13000"/>
-              </a:srgbClr>
-            </a:outerShdw>
-          </a:effectLst>
-        </p:spPr>
-      </p:sp>
-      <p:sp>
-        <p:nvSpPr>
-          <p:cNvPr id="11" name="Text 9"/>
-          <p:cNvSpPr/>
-          <p:nvPr/>
-        </p:nvSpPr>
-        <p:spPr>
-          <a:xfrm>
-            <a:off x="6537960" y="1819656"/>
-            <a:ext cx="4846320" cy="365760"/>
-          </a:xfrm>
-          <a:prstGeom prst="rect">
-            <a:avLst/>
-          </a:prstGeom>
-          <a:noFill/>
-          <a:ln/>
-        </p:spPr>
-        <p:txBody>
-          <a:bodyPr wrap="square" lIns="0" tIns="0" rIns="0" bIns="0" rtlCol="0" anchor="ctr"/>
-          <a:lstStyle/>
-          <a:p>
-            <a:pPr indent="0" marL="0">
-              <a:buNone/>
-            </a:pPr>
-            <a:r>
-              <a:rPr lang="en-US" sz="1500" b="1" dirty="0">
-                <a:solidFill>
-                  <a:srgbClr val="1F4A38"/>
-                </a:solidFill>
-                <a:latin typeface="微软雅黑" pitchFamily="34" charset="0"/>
-                <a:ea typeface="微软雅黑" pitchFamily="34" charset="-122"/>
-                <a:cs typeface="微软雅黑" pitchFamily="34" charset="-120"/>
-              </a:rPr>
-              <a:t>依赖门禁分级（P-4）</a:t>
-            </a:r>
-            <a:endParaRPr lang="en-US" sz="1500" dirty="0"/>
-          </a:p>
-        </p:txBody>
-      </p:sp>
-      <p:sp>
-        <p:nvSpPr>
-          <p:cNvPr id="12" name="Text 10"/>
-          <p:cNvSpPr/>
-          <p:nvPr/>
-        </p:nvSpPr>
-        <p:spPr>
-          <a:xfrm>
-            <a:off x="6537960" y="2203704"/>
-            <a:ext cx="4892040" cy="640080"/>
-          </a:xfrm>
-          <a:prstGeom prst="rect">
-            <a:avLst/>
-          </a:prstGeom>
-          <a:noFill/>
-          <a:ln/>
-        </p:spPr>
-        <p:txBody>
-          <a:bodyPr wrap="square" lIns="0" tIns="0" rIns="0" bIns="0" rtlCol="0" anchor="ctr"/>
-          <a:lstStyle/>
-          <a:p>
-            <a:pPr indent="0" marL="0">
-              <a:buNone/>
-            </a:pPr>
-            <a:r>
-              <a:rPr lang="en-US" sz="1150" dirty="0">
-                <a:solidFill>
-                  <a:srgbClr val="5F6F66"/>
-                </a:solidFill>
-                <a:latin typeface="微软雅黑" pitchFamily="34" charset="0"/>
-                <a:ea typeface="微软雅黑" pitchFamily="34" charset="-122"/>
-                <a:cs typeface="微软雅黑" pitchFamily="34" charset="-120"/>
-              </a:rPr>
-              <a:t>pip-audit 分级：有修复版本的高危阻断合入；无修复版本强制登记豁免理由</a:t>
-            </a:r>
-            <a:endParaRPr lang="en-US" sz="1150" dirty="0"/>
-          </a:p>
-        </p:txBody>
-      </p:sp>
-      <p:sp>
-        <p:nvSpPr>
-          <p:cNvPr id="13" name="Shape 11"/>
-          <p:cNvSpPr/>
-          <p:nvPr/>
-        </p:nvSpPr>
-        <p:spPr>
-          <a:xfrm>
-            <a:off x="457200" y="3172968"/>
-            <a:ext cx="5440680" cy="1234440"/>
-          </a:xfrm>
-          <a:prstGeom prst="roundRect">
-            <a:avLst>
-              <a:gd name="adj" fmla="val 5185"/>
-            </a:avLst>
-          </a:prstGeom>
-          <a:solidFill>
-            <a:srgbClr val="FFFFFF"/>
-          </a:solidFill>
-          <a:ln/>
-          <a:effectLst>
-            <a:outerShdw sx="100000" sy="100000" kx="0" ky="0" algn="bl" rotWithShape="0" blurRad="88900" dist="25400" dir="5400000">
-              <a:srgbClr val="1A2E24">
-                <a:alpha val="13000"/>
-              </a:srgbClr>
-            </a:outerShdw>
-          </a:effectLst>
-        </p:spPr>
-      </p:sp>
-      <p:sp>
-        <p:nvSpPr>
-          <p:cNvPr id="14" name="Text 12"/>
-          <p:cNvSpPr/>
-          <p:nvPr/>
-        </p:nvSpPr>
-        <p:spPr>
-          <a:xfrm>
-            <a:off x="731520" y="3300984"/>
-            <a:ext cx="4846320" cy="365760"/>
-          </a:xfrm>
-          <a:prstGeom prst="rect">
-            <a:avLst/>
-          </a:prstGeom>
-          <a:noFill/>
-          <a:ln/>
-        </p:spPr>
-        <p:txBody>
-          <a:bodyPr wrap="square" lIns="0" tIns="0" rIns="0" bIns="0" rtlCol="0" anchor="ctr"/>
-          <a:lstStyle/>
-          <a:p>
-            <a:pPr indent="0" marL="0">
-              <a:buNone/>
-            </a:pPr>
-            <a:r>
-              <a:rPr lang="en-US" sz="1500" b="1" dirty="0">
-                <a:solidFill>
-                  <a:srgbClr val="1F4A38"/>
-                </a:solidFill>
-                <a:latin typeface="微软雅黑" pitchFamily="34" charset="0"/>
-                <a:ea typeface="微软雅黑" pitchFamily="34" charset="-122"/>
-                <a:cs typeface="微软雅黑" pitchFamily="34" charset="-120"/>
-              </a:rPr>
-              <a:t>本地环境标准化（R10）</a:t>
-            </a:r>
-            <a:endParaRPr lang="en-US" sz="1500" dirty="0"/>
-          </a:p>
-        </p:txBody>
-      </p:sp>
-      <p:sp>
-        <p:nvSpPr>
-          <p:cNvPr id="15" name="Text 13"/>
-          <p:cNvSpPr/>
-          <p:nvPr/>
-        </p:nvSpPr>
-        <p:spPr>
-          <a:xfrm>
-            <a:off x="731520" y="3685032"/>
-            <a:ext cx="4892040" cy="640080"/>
-          </a:xfrm>
-          <a:prstGeom prst="rect">
-            <a:avLst/>
-          </a:prstGeom>
-          <a:noFill/>
-          <a:ln/>
-        </p:spPr>
-        <p:txBody>
-          <a:bodyPr wrap="square" lIns="0" tIns="0" rIns="0" bIns="0" rtlCol="0" anchor="ctr"/>
-          <a:lstStyle/>
-          <a:p>
-            <a:pPr indent="0" marL="0">
-              <a:buNone/>
-            </a:pPr>
-            <a:r>
-              <a:rPr lang="en-US" sz="1150" dirty="0">
-                <a:solidFill>
-                  <a:srgbClr val="5F6F66"/>
-                </a:solidFill>
-                <a:latin typeface="微软雅黑" pitchFamily="34" charset="0"/>
-                <a:ea typeface="微软雅黑" pitchFamily="34" charset="-122"/>
-                <a:cs typeface="微软雅黑" pitchFamily="34" charset="-120"/>
-              </a:rPr>
-              <a:t>用 3.11.9+ 重建 .venv + make venv/test-local 固化 PYTHONUTF8 与 IDE 注入清理</a:t>
-            </a:r>
-            <a:endParaRPr lang="en-US" sz="1150" dirty="0"/>
-          </a:p>
-        </p:txBody>
-      </p:sp>
-      <p:sp>
-        <p:nvSpPr>
-          <p:cNvPr id="16" name="Shape 14"/>
-          <p:cNvSpPr/>
-          <p:nvPr/>
-        </p:nvSpPr>
-        <p:spPr>
-          <a:xfrm>
-            <a:off x="6263640" y="3172968"/>
-            <a:ext cx="5440680" cy="1234440"/>
-          </a:xfrm>
-          <a:prstGeom prst="roundRect">
-            <a:avLst>
-              <a:gd name="adj" fmla="val 5185"/>
-            </a:avLst>
-          </a:prstGeom>
-          <a:solidFill>
-            <a:srgbClr val="FFFFFF"/>
-          </a:solidFill>
-          <a:ln/>
-          <a:effectLst>
-            <a:outerShdw sx="100000" sy="100000" kx="0" ky="0" algn="bl" rotWithShape="0" blurRad="88900" dist="25400" dir="5400000">
-              <a:srgbClr val="1A2E24">
-                <a:alpha val="13000"/>
-              </a:srgbClr>
-            </a:outerShdw>
-          </a:effectLst>
-        </p:spPr>
-      </p:sp>
-      <p:sp>
-        <p:nvSpPr>
-          <p:cNvPr id="17" name="Text 15"/>
-          <p:cNvSpPr/>
-          <p:nvPr/>
-        </p:nvSpPr>
-        <p:spPr>
-          <a:xfrm>
-            <a:off x="6537960" y="3300984"/>
-            <a:ext cx="4846320" cy="365760"/>
-          </a:xfrm>
-          <a:prstGeom prst="rect">
-            <a:avLst/>
-          </a:prstGeom>
-          <a:noFill/>
-          <a:ln/>
-        </p:spPr>
-        <p:txBody>
-          <a:bodyPr wrap="square" lIns="0" tIns="0" rIns="0" bIns="0" rtlCol="0" anchor="ctr"/>
-          <a:lstStyle/>
-          <a:p>
-            <a:pPr indent="0" marL="0">
-              <a:buNone/>
-            </a:pPr>
-            <a:r>
-              <a:rPr lang="en-US" sz="1500" b="1" dirty="0">
-                <a:solidFill>
-                  <a:srgbClr val="1F4A38"/>
-                </a:solidFill>
-                <a:latin typeface="微软雅黑" pitchFamily="34" charset="0"/>
-                <a:ea typeface="微软雅黑" pitchFamily="34" charset="-122"/>
-                <a:cs typeface="微软雅黑" pitchFamily="34" charset="-120"/>
-              </a:rPr>
-              <a:t>代码签名落地</a:t>
-            </a:r>
-            <a:endParaRPr lang="en-US" sz="1500" dirty="0"/>
-          </a:p>
-        </p:txBody>
-      </p:sp>
-      <p:sp>
-        <p:nvSpPr>
-          <p:cNvPr id="18" name="Text 16"/>
-          <p:cNvSpPr/>
-          <p:nvPr/>
-        </p:nvSpPr>
-        <p:spPr>
-          <a:xfrm>
-            <a:off x="6537960" y="3685032"/>
-            <a:ext cx="4892040" cy="640080"/>
-          </a:xfrm>
-          <a:prstGeom prst="rect">
-            <a:avLst/>
-          </a:prstGeom>
-          <a:noFill/>
-          <a:ln/>
-        </p:spPr>
-        <p:txBody>
-          <a:bodyPr wrap="square" lIns="0" tIns="0" rIns="0" bIns="0" rtlCol="0" anchor="ctr"/>
-          <a:lstStyle/>
-          <a:p>
-            <a:pPr indent="0" marL="0">
-              <a:buNone/>
-            </a:pPr>
-            <a:r>
-              <a:rPr lang="en-US" sz="1150" dirty="0">
-                <a:solidFill>
-                  <a:srgbClr val="5F6F66"/>
-                </a:solidFill>
-                <a:latin typeface="微软雅黑" pitchFamily="34" charset="0"/>
-                <a:ea typeface="微软雅黑" pitchFamily="34" charset="-122"/>
-                <a:cs typeface="微软雅黑" pitchFamily="34" charset="-120"/>
-              </a:rPr>
-              <a:t>采购证书后接入 CSC secrets，安装包/后端 exe 全签名（W6-T1）</a:t>
-            </a:r>
-            <a:endParaRPr lang="en-US" sz="1150" dirty="0"/>
-          </a:p>
-        </p:txBody>
-      </p:sp>
-      <p:sp>
-        <p:nvSpPr>
-          <p:cNvPr id="19" name="Shape 17"/>
-          <p:cNvSpPr/>
-          <p:nvPr/>
-        </p:nvSpPr>
-        <p:spPr>
-          <a:xfrm>
-            <a:off x="457200" y="4654296"/>
-            <a:ext cx="5440680" cy="1234440"/>
-          </a:xfrm>
-          <a:prstGeom prst="roundRect">
-            <a:avLst>
-              <a:gd name="adj" fmla="val 5185"/>
-            </a:avLst>
-          </a:prstGeom>
-          <a:solidFill>
-            <a:srgbClr val="FFFFFF"/>
-          </a:solidFill>
-          <a:ln/>
-          <a:effectLst>
-            <a:outerShdw sx="100000" sy="100000" kx="0" ky="0" algn="bl" rotWithShape="0" blurRad="88900" dist="25400" dir="5400000">
-              <a:srgbClr val="1A2E24">
-                <a:alpha val="13000"/>
-              </a:srgbClr>
-            </a:outerShdw>
-          </a:effectLst>
-        </p:spPr>
-      </p:sp>
-      <p:sp>
-        <p:nvSpPr>
-          <p:cNvPr id="20" name="Text 18"/>
-          <p:cNvSpPr/>
-          <p:nvPr/>
-        </p:nvSpPr>
-        <p:spPr>
-          <a:xfrm>
-            <a:off x="731520" y="4782312"/>
-            <a:ext cx="4846320" cy="365760"/>
-          </a:xfrm>
-          <a:prstGeom prst="rect">
-            <a:avLst/>
-          </a:prstGeom>
-          <a:noFill/>
-          <a:ln/>
-        </p:spPr>
-        <p:txBody>
-          <a:bodyPr wrap="square" lIns="0" tIns="0" rIns="0" bIns="0" rtlCol="0" anchor="ctr"/>
-          <a:lstStyle/>
-          <a:p>
-            <a:pPr indent="0" marL="0">
-              <a:buNone/>
-            </a:pPr>
-            <a:r>
-              <a:rPr lang="en-US" sz="1500" b="1" dirty="0">
-                <a:solidFill>
-                  <a:srgbClr val="1F4A38"/>
-                </a:solidFill>
-                <a:latin typeface="微软雅黑" pitchFamily="34" charset="0"/>
-                <a:ea typeface="微软雅黑" pitchFamily="34" charset="-122"/>
-                <a:cs typeface="微软雅黑" pitchFamily="34" charset="-120"/>
-              </a:rPr>
-              <a:t>评审清单与 PR 模板（P-5）</a:t>
-            </a:r>
-            <a:endParaRPr lang="en-US" sz="1500" dirty="0"/>
-          </a:p>
-        </p:txBody>
-      </p:sp>
-      <p:sp>
-        <p:nvSpPr>
-          <p:cNvPr id="21" name="Text 19"/>
-          <p:cNvSpPr/>
-          <p:nvPr/>
-        </p:nvSpPr>
-        <p:spPr>
-          <a:xfrm>
-            <a:off x="731520" y="5166360"/>
-            <a:ext cx="4892040" cy="640080"/>
-          </a:xfrm>
-          <a:prstGeom prst="rect">
-            <a:avLst/>
-          </a:prstGeom>
-          <a:noFill/>
-          <a:ln/>
-        </p:spPr>
-        <p:txBody>
-          <a:bodyPr wrap="square" lIns="0" tIns="0" rIns="0" bIns="0" rtlCol="0" anchor="ctr"/>
-          <a:lstStyle/>
-          <a:p>
-            <a:pPr indent="0" marL="0">
-              <a:buNone/>
-            </a:pPr>
-            <a:r>
-              <a:rPr lang="en-US" sz="1150" dirty="0">
-                <a:solidFill>
-                  <a:srgbClr val="5F6F66"/>
-                </a:solidFill>
-                <a:latin typeface="微软雅黑" pitchFamily="34" charset="0"/>
-                <a:ea typeface="微软雅黑" pitchFamily="34" charset="-122"/>
-                <a:cs typeface="微软雅黑" pitchFamily="34" charset="-120"/>
-              </a:rPr>
-              <a:t>新增线程/Timer、except-pass、文件写入、新依赖四类必答项并入 PR 模板</a:t>
-            </a:r>
-            <a:endParaRPr lang="en-US" sz="1150" dirty="0"/>
-          </a:p>
-        </p:txBody>
-      </p:sp>
-      <p:sp>
-        <p:nvSpPr>
-          <p:cNvPr id="22" name="Shape 20"/>
-          <p:cNvSpPr/>
-          <p:nvPr/>
-        </p:nvSpPr>
-        <p:spPr>
-          <a:xfrm>
-            <a:off x="6263640" y="4654296"/>
-            <a:ext cx="5440680" cy="1234440"/>
-          </a:xfrm>
-          <a:prstGeom prst="roundRect">
-            <a:avLst>
-              <a:gd name="adj" fmla="val 5185"/>
-            </a:avLst>
-          </a:prstGeom>
-          <a:solidFill>
-            <a:srgbClr val="FFFFFF"/>
-          </a:solidFill>
-          <a:ln/>
-          <a:effectLst>
-            <a:outerShdw sx="100000" sy="100000" kx="0" ky="0" algn="bl" rotWithShape="0" blurRad="88900" dist="25400" dir="5400000">
-              <a:srgbClr val="1A2E24">
-                <a:alpha val="13000"/>
-              </a:srgbClr>
-            </a:outerShdw>
-          </a:effectLst>
-        </p:spPr>
-      </p:sp>
-      <p:sp>
-        <p:nvSpPr>
-          <p:cNvPr id="23" name="Text 21"/>
-          <p:cNvSpPr/>
-          <p:nvPr/>
-        </p:nvSpPr>
-        <p:spPr>
-          <a:xfrm>
-            <a:off x="6537960" y="4782312"/>
-            <a:ext cx="4846320" cy="365760"/>
-          </a:xfrm>
-          <a:prstGeom prst="rect">
-            <a:avLst/>
-          </a:prstGeom>
-          <a:noFill/>
-          <a:ln/>
-        </p:spPr>
-        <p:txBody>
-          <a:bodyPr wrap="square" lIns="0" tIns="0" rIns="0" bIns="0" rtlCol="0" anchor="ctr"/>
-          <a:lstStyle/>
-          <a:p>
-            <a:pPr indent="0" marL="0">
-              <a:buNone/>
-            </a:pPr>
-            <a:r>
-              <a:rPr lang="en-US" sz="1500" b="1" dirty="0">
-                <a:solidFill>
-                  <a:srgbClr val="1F4A38"/>
-                </a:solidFill>
-                <a:latin typeface="微软雅黑" pitchFamily="34" charset="0"/>
-                <a:ea typeface="微软雅黑" pitchFamily="34" charset="-122"/>
-                <a:cs typeface="微软雅黑" pitchFamily="34" charset="-120"/>
-              </a:rPr>
-              <a:t>E2E 扩充</a:t>
-            </a:r>
-            <a:endParaRPr lang="en-US" sz="1500" dirty="0"/>
-          </a:p>
-        </p:txBody>
-      </p:sp>
-      <p:sp>
-        <p:nvSpPr>
-          <p:cNvPr id="24" name="Text 22"/>
-          <p:cNvSpPr/>
-          <p:nvPr/>
-        </p:nvSpPr>
-        <p:spPr>
-          <a:xfrm>
-            <a:off x="6537960" y="5166360"/>
-            <a:ext cx="4892040" cy="640080"/>
-          </a:xfrm>
-          <a:prstGeom prst="rect">
-            <a:avLst/>
-          </a:prstGeom>
-          <a:noFill/>
-          <a:ln/>
-        </p:spPr>
-        <p:txBody>
-          <a:bodyPr wrap="square" lIns="0" tIns="0" rIns="0" bIns="0" rtlCol="0" anchor="ctr"/>
-          <a:lstStyle/>
-          <a:p>
-            <a:pPr indent="0" marL="0">
-              <a:buNone/>
-            </a:pPr>
-            <a:r>
-              <a:rPr lang="en-US" sz="1150" dirty="0">
-                <a:solidFill>
-                  <a:srgbClr val="5F6F66"/>
-                </a:solidFill>
-                <a:latin typeface="微软雅黑" pitchFamily="34" charset="0"/>
-                <a:ea typeface="微软雅黑" pitchFamily="34" charset="-122"/>
-                <a:cs typeface="微软雅黑" pitchFamily="34" charset="-120"/>
-              </a:rPr>
-              <a:t>Docker E2E 关键路径 Playwright 用例扩容（当前 150 例，CI 全绿）</a:t>
-            </a:r>
-            <a:endParaRPr lang="en-US" sz="1150" dirty="0"/>
+              <a:rPr lang="en-US" sz="1350" b="1" dirty="0">
+                <a:solidFill>
+                  <a:srgbClr val="1A2E24"/>
+                </a:solidFill>
+                <a:latin typeface="微软雅黑" pitchFamily="34" charset="0"/>
+                <a:ea typeface="微软雅黑" pitchFamily="34" charset="-122"/>
+                <a:cs typeface="微软雅黑" pitchFamily="34" charset="-120"/>
+              </a:rPr>
+              <a:t>净效果：11244 后端用例（覆盖率 100%）+ 6051 前端用例全绿；Windows x64 与麒麟 ARM64 两个离线安装包由 GitHub Actions 全自动构建并发布 Release</a:t>
+            </a:r>
+            <a:endParaRPr lang="en-US" sz="1350" dirty="0"/>
           </a:p>
         </p:txBody>
       </p:sp>
@@ -28426,6 +28305,856 @@
 <file path=ppt/slides/slide40.xml><?xml version="1.0" encoding="utf-8"?>
 <p:sld xmlns:a="http://schemas.openxmlformats.org/drawingml/2006/main" xmlns:r="http://schemas.openxmlformats.org/officeDocument/2006/relationships" xmlns:p="http://schemas.openxmlformats.org/presentationml/2006/main">
   <p:cSld name="Slide 40">
+    <p:bg>
+      <p:bgPr>
+        <a:solidFill>
+          <a:srgbClr val="FFFFFF"/>
+        </a:solidFill>
+      </p:bgPr>
+    </p:bg>
+    <p:spTree>
+      <p:nvGrpSpPr>
+        <p:cNvPr id="1" name=""/>
+        <p:cNvGrpSpPr/>
+        <p:nvPr/>
+      </p:nvGrpSpPr>
+      <p:grpSpPr>
+        <a:xfrm>
+          <a:off x="0" y="0"/>
+          <a:ext cx="0" cy="0"/>
+          <a:chOff x="0" y="0"/>
+          <a:chExt cx="0" cy="0"/>
+        </a:xfrm>
+      </p:grpSpPr>
+      <p:sp>
+        <p:nvSpPr>
+          <p:cNvPr id="2" name="Shape 0"/>
+          <p:cNvSpPr/>
+          <p:nvPr/>
+        </p:nvSpPr>
+        <p:spPr>
+          <a:xfrm>
+            <a:off x="457200" y="457200"/>
+            <a:ext cx="128016" cy="128016"/>
+          </a:xfrm>
+          <a:prstGeom prst="rect">
+            <a:avLst/>
+          </a:prstGeom>
+          <a:solidFill>
+            <a:srgbClr val="C9A227"/>
+          </a:solidFill>
+          <a:ln/>
+        </p:spPr>
+      </p:sp>
+      <p:sp>
+        <p:nvSpPr>
+          <p:cNvPr id="3" name="Text 1"/>
+          <p:cNvSpPr/>
+          <p:nvPr/>
+        </p:nvSpPr>
+        <p:spPr>
+          <a:xfrm>
+            <a:off x="676656" y="329184"/>
+            <a:ext cx="7315200" cy="365760"/>
+          </a:xfrm>
+          <a:prstGeom prst="rect">
+            <a:avLst/>
+          </a:prstGeom>
+          <a:noFill/>
+          <a:ln/>
+        </p:spPr>
+        <p:txBody>
+          <a:bodyPr wrap="square" lIns="0" tIns="0" rIns="0" bIns="0" rtlCol="0" anchor="ctr"/>
+          <a:lstStyle/>
+          <a:p>
+            <a:pPr indent="0" marL="0">
+              <a:buNone/>
+            </a:pPr>
+            <a:r>
+              <a:rPr lang="en-US" sz="1250" b="1" spc="300" kern="0" dirty="0">
+                <a:solidFill>
+                  <a:srgbClr val="2D6A4F"/>
+                </a:solidFill>
+                <a:latin typeface="微软雅黑" pitchFamily="34" charset="0"/>
+                <a:ea typeface="微软雅黑" pitchFamily="34" charset="-122"/>
+                <a:cs typeface="微软雅黑" pitchFamily="34" charset="-120"/>
+              </a:rPr>
+              <a:t>06 部署运行</a:t>
+            </a:r>
+            <a:endParaRPr lang="en-US" sz="1250" dirty="0"/>
+          </a:p>
+        </p:txBody>
+      </p:sp>
+      <p:sp>
+        <p:nvSpPr>
+          <p:cNvPr id="4" name="Text 2"/>
+          <p:cNvSpPr/>
+          <p:nvPr/>
+        </p:nvSpPr>
+        <p:spPr>
+          <a:xfrm>
+            <a:off x="457200" y="713232"/>
+            <a:ext cx="11274552" cy="685800"/>
+          </a:xfrm>
+          <a:prstGeom prst="rect">
+            <a:avLst/>
+          </a:prstGeom>
+          <a:noFill/>
+          <a:ln/>
+        </p:spPr>
+        <p:txBody>
+          <a:bodyPr wrap="square" lIns="0" tIns="0" rIns="0" bIns="0" rtlCol="0" anchor="ctr"/>
+          <a:lstStyle/>
+          <a:p>
+            <a:pPr indent="0" marL="0">
+              <a:buNone/>
+            </a:pPr>
+            <a:r>
+              <a:rPr lang="en-US" sz="3000" b="1" dirty="0">
+                <a:solidFill>
+                  <a:srgbClr val="1A2E24"/>
+                </a:solidFill>
+                <a:latin typeface="微软雅黑" pitchFamily="34" charset="0"/>
+                <a:ea typeface="微软雅黑" pitchFamily="34" charset="-122"/>
+                <a:cs typeface="微软雅黑" pitchFamily="34" charset="-120"/>
+              </a:rPr>
+              <a:t>后续演进：已立项的工单</a:t>
+            </a:r>
+            <a:endParaRPr lang="en-US" sz="3000" dirty="0"/>
+          </a:p>
+        </p:txBody>
+      </p:sp>
+      <p:sp>
+        <p:nvSpPr>
+          <p:cNvPr id="5" name="Text 3"/>
+          <p:cNvSpPr/>
+          <p:nvPr/>
+        </p:nvSpPr>
+        <p:spPr>
+          <a:xfrm>
+            <a:off x="11274552" y="6355080"/>
+            <a:ext cx="457200" cy="274320"/>
+          </a:xfrm>
+          <a:prstGeom prst="rect">
+            <a:avLst/>
+          </a:prstGeom>
+          <a:noFill/>
+          <a:ln/>
+        </p:spPr>
+        <p:txBody>
+          <a:bodyPr wrap="square" lIns="0" tIns="0" rIns="0" bIns="0" rtlCol="0" anchor="ctr"/>
+          <a:lstStyle/>
+          <a:p>
+            <a:pPr algn="r" indent="0" marL="0">
+              <a:buNone/>
+            </a:pPr>
+            <a:r>
+              <a:rPr lang="en-US" sz="1100" dirty="0">
+                <a:solidFill>
+                  <a:srgbClr val="5F6F66"/>
+                </a:solidFill>
+                <a:latin typeface="微软雅黑" pitchFamily="34" charset="0"/>
+                <a:ea typeface="微软雅黑" pitchFamily="34" charset="-122"/>
+                <a:cs typeface="微软雅黑" pitchFamily="34" charset="-120"/>
+              </a:rPr>
+              <a:t>38</a:t>
+            </a:r>
+            <a:endParaRPr lang="en-US" sz="1100" dirty="0"/>
+          </a:p>
+        </p:txBody>
+      </p:sp>
+      <p:sp>
+        <p:nvSpPr>
+          <p:cNvPr id="6" name="Text 4"/>
+          <p:cNvSpPr/>
+          <p:nvPr/>
+        </p:nvSpPr>
+        <p:spPr>
+          <a:xfrm>
+            <a:off x="457200" y="6355080"/>
+            <a:ext cx="3657600" cy="274320"/>
+          </a:xfrm>
+          <a:prstGeom prst="rect">
+            <a:avLst/>
+          </a:prstGeom>
+          <a:noFill/>
+          <a:ln/>
+        </p:spPr>
+        <p:txBody>
+          <a:bodyPr wrap="square" lIns="0" tIns="0" rIns="0" bIns="0" rtlCol="0" anchor="ctr"/>
+          <a:lstStyle/>
+          <a:p>
+            <a:pPr indent="0" marL="0">
+              <a:buNone/>
+            </a:pPr>
+            <a:r>
+              <a:rPr lang="en-US" sz="1050" dirty="0">
+                <a:solidFill>
+                  <a:srgbClr val="5F6F66"/>
+                </a:solidFill>
+                <a:latin typeface="微软雅黑" pitchFamily="34" charset="0"/>
+                <a:ea typeface="微软雅黑" pitchFamily="34" charset="-122"/>
+                <a:cs typeface="微软雅黑" pitchFamily="34" charset="-120"/>
+              </a:rPr>
+              <a:t>帮扶管理信息系统 v1.12.8</a:t>
+            </a:r>
+            <a:endParaRPr lang="en-US" sz="1050" dirty="0"/>
+          </a:p>
+        </p:txBody>
+      </p:sp>
+      <p:sp>
+        <p:nvSpPr>
+          <p:cNvPr id="7" name="Shape 5"/>
+          <p:cNvSpPr/>
+          <p:nvPr/>
+        </p:nvSpPr>
+        <p:spPr>
+          <a:xfrm>
+            <a:off x="457200" y="1691640"/>
+            <a:ext cx="5440680" cy="1234440"/>
+          </a:xfrm>
+          <a:prstGeom prst="roundRect">
+            <a:avLst>
+              <a:gd name="adj" fmla="val 5185"/>
+            </a:avLst>
+          </a:prstGeom>
+          <a:solidFill>
+            <a:srgbClr val="FFFFFF"/>
+          </a:solidFill>
+          <a:ln/>
+          <a:effectLst>
+            <a:outerShdw sx="100000" sy="100000" kx="0" ky="0" algn="bl" rotWithShape="0" blurRad="88900" dist="25400" dir="5400000">
+              <a:srgbClr val="1A2E24">
+                <a:alpha val="13000"/>
+              </a:srgbClr>
+            </a:outerShdw>
+          </a:effectLst>
+        </p:spPr>
+      </p:sp>
+      <p:sp>
+        <p:nvSpPr>
+          <p:cNvPr id="8" name="Text 6"/>
+          <p:cNvSpPr/>
+          <p:nvPr/>
+        </p:nvSpPr>
+        <p:spPr>
+          <a:xfrm>
+            <a:off x="731520" y="1819656"/>
+            <a:ext cx="4846320" cy="365760"/>
+          </a:xfrm>
+          <a:prstGeom prst="rect">
+            <a:avLst/>
+          </a:prstGeom>
+          <a:noFill/>
+          <a:ln/>
+        </p:spPr>
+        <p:txBody>
+          <a:bodyPr wrap="square" lIns="0" tIns="0" rIns="0" bIns="0" rtlCol="0" anchor="ctr"/>
+          <a:lstStyle/>
+          <a:p>
+            <a:pPr indent="0" marL="0">
+              <a:buNone/>
+            </a:pPr>
+            <a:r>
+              <a:rPr lang="en-US" sz="1500" b="1" dirty="0">
+                <a:solidFill>
+                  <a:srgbClr val="1F4A38"/>
+                </a:solidFill>
+                <a:latin typeface="微软雅黑" pitchFamily="34" charset="0"/>
+                <a:ea typeface="微软雅黑" pitchFamily="34" charset="-122"/>
+                <a:cs typeface="微软雅黑" pitchFamily="34" charset="-120"/>
+              </a:rPr>
+              <a:t>调度任务注册表（P-2）</a:t>
+            </a:r>
+            <a:endParaRPr lang="en-US" sz="1500" dirty="0"/>
+          </a:p>
+        </p:txBody>
+      </p:sp>
+      <p:sp>
+        <p:nvSpPr>
+          <p:cNvPr id="9" name="Text 7"/>
+          <p:cNvSpPr/>
+          <p:nvPr/>
+        </p:nvSpPr>
+        <p:spPr>
+          <a:xfrm>
+            <a:off x="731520" y="2203704"/>
+            <a:ext cx="4892040" cy="640080"/>
+          </a:xfrm>
+          <a:prstGeom prst="rect">
+            <a:avLst/>
+          </a:prstGeom>
+          <a:noFill/>
+          <a:ln/>
+        </p:spPr>
+        <p:txBody>
+          <a:bodyPr wrap="square" lIns="0" tIns="0" rIns="0" bIns="0" rtlCol="0" anchor="ctr"/>
+          <a:lstStyle/>
+          <a:p>
+            <a:pPr indent="0" marL="0">
+              <a:buNone/>
+            </a:pPr>
+            <a:r>
+              <a:rPr lang="en-US" sz="1150" dirty="0">
+                <a:solidFill>
+                  <a:srgbClr val="5F6F66"/>
+                </a:solidFill>
+                <a:latin typeface="微软雅黑" pitchFamily="34" charset="0"/>
+                <a:ea typeface="微软雅黑" pitchFamily="34" charset="-122"/>
+                <a:cs typeface="微软雅黑" pitchFamily="34" charset="-120"/>
+              </a:rPr>
+              <a:t>scheduler_registry 清单化 + /health 全量暴露（当前仅落地裸 threading.Timer 扫描门禁）</a:t>
+            </a:r>
+            <a:endParaRPr lang="en-US" sz="1150" dirty="0"/>
+          </a:p>
+        </p:txBody>
+      </p:sp>
+      <p:sp>
+        <p:nvSpPr>
+          <p:cNvPr id="10" name="Shape 8"/>
+          <p:cNvSpPr/>
+          <p:nvPr/>
+        </p:nvSpPr>
+        <p:spPr>
+          <a:xfrm>
+            <a:off x="6263640" y="1691640"/>
+            <a:ext cx="5440680" cy="1234440"/>
+          </a:xfrm>
+          <a:prstGeom prst="roundRect">
+            <a:avLst>
+              <a:gd name="adj" fmla="val 5185"/>
+            </a:avLst>
+          </a:prstGeom>
+          <a:solidFill>
+            <a:srgbClr val="FFFFFF"/>
+          </a:solidFill>
+          <a:ln/>
+          <a:effectLst>
+            <a:outerShdw sx="100000" sy="100000" kx="0" ky="0" algn="bl" rotWithShape="0" blurRad="88900" dist="25400" dir="5400000">
+              <a:srgbClr val="1A2E24">
+                <a:alpha val="13000"/>
+              </a:srgbClr>
+            </a:outerShdw>
+          </a:effectLst>
+        </p:spPr>
+      </p:sp>
+      <p:sp>
+        <p:nvSpPr>
+          <p:cNvPr id="11" name="Text 9"/>
+          <p:cNvSpPr/>
+          <p:nvPr/>
+        </p:nvSpPr>
+        <p:spPr>
+          <a:xfrm>
+            <a:off x="6537960" y="1819656"/>
+            <a:ext cx="4846320" cy="365760"/>
+          </a:xfrm>
+          <a:prstGeom prst="rect">
+            <a:avLst/>
+          </a:prstGeom>
+          <a:noFill/>
+          <a:ln/>
+        </p:spPr>
+        <p:txBody>
+          <a:bodyPr wrap="square" lIns="0" tIns="0" rIns="0" bIns="0" rtlCol="0" anchor="ctr"/>
+          <a:lstStyle/>
+          <a:p>
+            <a:pPr indent="0" marL="0">
+              <a:buNone/>
+            </a:pPr>
+            <a:r>
+              <a:rPr lang="en-US" sz="1500" b="1" dirty="0">
+                <a:solidFill>
+                  <a:srgbClr val="1F4A38"/>
+                </a:solidFill>
+                <a:latin typeface="微软雅黑" pitchFamily="34" charset="0"/>
+                <a:ea typeface="微软雅黑" pitchFamily="34" charset="-122"/>
+                <a:cs typeface="微软雅黑" pitchFamily="34" charset="-120"/>
+              </a:rPr>
+              <a:t>依赖门禁分级（P-4）</a:t>
+            </a:r>
+            <a:endParaRPr lang="en-US" sz="1500" dirty="0"/>
+          </a:p>
+        </p:txBody>
+      </p:sp>
+      <p:sp>
+        <p:nvSpPr>
+          <p:cNvPr id="12" name="Text 10"/>
+          <p:cNvSpPr/>
+          <p:nvPr/>
+        </p:nvSpPr>
+        <p:spPr>
+          <a:xfrm>
+            <a:off x="6537960" y="2203704"/>
+            <a:ext cx="4892040" cy="640080"/>
+          </a:xfrm>
+          <a:prstGeom prst="rect">
+            <a:avLst/>
+          </a:prstGeom>
+          <a:noFill/>
+          <a:ln/>
+        </p:spPr>
+        <p:txBody>
+          <a:bodyPr wrap="square" lIns="0" tIns="0" rIns="0" bIns="0" rtlCol="0" anchor="ctr"/>
+          <a:lstStyle/>
+          <a:p>
+            <a:pPr indent="0" marL="0">
+              <a:buNone/>
+            </a:pPr>
+            <a:r>
+              <a:rPr lang="en-US" sz="1150" dirty="0">
+                <a:solidFill>
+                  <a:srgbClr val="5F6F66"/>
+                </a:solidFill>
+                <a:latin typeface="微软雅黑" pitchFamily="34" charset="0"/>
+                <a:ea typeface="微软雅黑" pitchFamily="34" charset="-122"/>
+                <a:cs typeface="微软雅黑" pitchFamily="34" charset="-120"/>
+              </a:rPr>
+              <a:t>pip-audit 分级：有修复版本的高危阻断合入；无修复版本强制登记豁免理由</a:t>
+            </a:r>
+            <a:endParaRPr lang="en-US" sz="1150" dirty="0"/>
+          </a:p>
+        </p:txBody>
+      </p:sp>
+      <p:sp>
+        <p:nvSpPr>
+          <p:cNvPr id="13" name="Shape 11"/>
+          <p:cNvSpPr/>
+          <p:nvPr/>
+        </p:nvSpPr>
+        <p:spPr>
+          <a:xfrm>
+            <a:off x="457200" y="3172968"/>
+            <a:ext cx="5440680" cy="1234440"/>
+          </a:xfrm>
+          <a:prstGeom prst="roundRect">
+            <a:avLst>
+              <a:gd name="adj" fmla="val 5185"/>
+            </a:avLst>
+          </a:prstGeom>
+          <a:solidFill>
+            <a:srgbClr val="FFFFFF"/>
+          </a:solidFill>
+          <a:ln/>
+          <a:effectLst>
+            <a:outerShdw sx="100000" sy="100000" kx="0" ky="0" algn="bl" rotWithShape="0" blurRad="88900" dist="25400" dir="5400000">
+              <a:srgbClr val="1A2E24">
+                <a:alpha val="13000"/>
+              </a:srgbClr>
+            </a:outerShdw>
+          </a:effectLst>
+        </p:spPr>
+      </p:sp>
+      <p:sp>
+        <p:nvSpPr>
+          <p:cNvPr id="14" name="Text 12"/>
+          <p:cNvSpPr/>
+          <p:nvPr/>
+        </p:nvSpPr>
+        <p:spPr>
+          <a:xfrm>
+            <a:off x="731520" y="3300984"/>
+            <a:ext cx="4846320" cy="365760"/>
+          </a:xfrm>
+          <a:prstGeom prst="rect">
+            <a:avLst/>
+          </a:prstGeom>
+          <a:noFill/>
+          <a:ln/>
+        </p:spPr>
+        <p:txBody>
+          <a:bodyPr wrap="square" lIns="0" tIns="0" rIns="0" bIns="0" rtlCol="0" anchor="ctr"/>
+          <a:lstStyle/>
+          <a:p>
+            <a:pPr indent="0" marL="0">
+              <a:buNone/>
+            </a:pPr>
+            <a:r>
+              <a:rPr lang="en-US" sz="1500" b="1" dirty="0">
+                <a:solidFill>
+                  <a:srgbClr val="1F4A38"/>
+                </a:solidFill>
+                <a:latin typeface="微软雅黑" pitchFamily="34" charset="0"/>
+                <a:ea typeface="微软雅黑" pitchFamily="34" charset="-122"/>
+                <a:cs typeface="微软雅黑" pitchFamily="34" charset="-120"/>
+              </a:rPr>
+              <a:t>本地环境标准化（R10）</a:t>
+            </a:r>
+            <a:endParaRPr lang="en-US" sz="1500" dirty="0"/>
+          </a:p>
+        </p:txBody>
+      </p:sp>
+      <p:sp>
+        <p:nvSpPr>
+          <p:cNvPr id="15" name="Text 13"/>
+          <p:cNvSpPr/>
+          <p:nvPr/>
+        </p:nvSpPr>
+        <p:spPr>
+          <a:xfrm>
+            <a:off x="731520" y="3685032"/>
+            <a:ext cx="4892040" cy="640080"/>
+          </a:xfrm>
+          <a:prstGeom prst="rect">
+            <a:avLst/>
+          </a:prstGeom>
+          <a:noFill/>
+          <a:ln/>
+        </p:spPr>
+        <p:txBody>
+          <a:bodyPr wrap="square" lIns="0" tIns="0" rIns="0" bIns="0" rtlCol="0" anchor="ctr"/>
+          <a:lstStyle/>
+          <a:p>
+            <a:pPr indent="0" marL="0">
+              <a:buNone/>
+            </a:pPr>
+            <a:r>
+              <a:rPr lang="en-US" sz="1150" dirty="0">
+                <a:solidFill>
+                  <a:srgbClr val="5F6F66"/>
+                </a:solidFill>
+                <a:latin typeface="微软雅黑" pitchFamily="34" charset="0"/>
+                <a:ea typeface="微软雅黑" pitchFamily="34" charset="-122"/>
+                <a:cs typeface="微软雅黑" pitchFamily="34" charset="-120"/>
+              </a:rPr>
+              <a:t>用 3.11.9+ 重建 .venv + make venv/test-local 固化 PYTHONUTF8 与 IDE 注入清理</a:t>
+            </a:r>
+            <a:endParaRPr lang="en-US" sz="1150" dirty="0"/>
+          </a:p>
+        </p:txBody>
+      </p:sp>
+      <p:sp>
+        <p:nvSpPr>
+          <p:cNvPr id="16" name="Shape 14"/>
+          <p:cNvSpPr/>
+          <p:nvPr/>
+        </p:nvSpPr>
+        <p:spPr>
+          <a:xfrm>
+            <a:off x="6263640" y="3172968"/>
+            <a:ext cx="5440680" cy="1234440"/>
+          </a:xfrm>
+          <a:prstGeom prst="roundRect">
+            <a:avLst>
+              <a:gd name="adj" fmla="val 5185"/>
+            </a:avLst>
+          </a:prstGeom>
+          <a:solidFill>
+            <a:srgbClr val="FFFFFF"/>
+          </a:solidFill>
+          <a:ln/>
+          <a:effectLst>
+            <a:outerShdw sx="100000" sy="100000" kx="0" ky="0" algn="bl" rotWithShape="0" blurRad="88900" dist="25400" dir="5400000">
+              <a:srgbClr val="1A2E24">
+                <a:alpha val="13000"/>
+              </a:srgbClr>
+            </a:outerShdw>
+          </a:effectLst>
+        </p:spPr>
+      </p:sp>
+      <p:sp>
+        <p:nvSpPr>
+          <p:cNvPr id="17" name="Text 15"/>
+          <p:cNvSpPr/>
+          <p:nvPr/>
+        </p:nvSpPr>
+        <p:spPr>
+          <a:xfrm>
+            <a:off x="6537960" y="3300984"/>
+            <a:ext cx="4846320" cy="365760"/>
+          </a:xfrm>
+          <a:prstGeom prst="rect">
+            <a:avLst/>
+          </a:prstGeom>
+          <a:noFill/>
+          <a:ln/>
+        </p:spPr>
+        <p:txBody>
+          <a:bodyPr wrap="square" lIns="0" tIns="0" rIns="0" bIns="0" rtlCol="0" anchor="ctr"/>
+          <a:lstStyle/>
+          <a:p>
+            <a:pPr indent="0" marL="0">
+              <a:buNone/>
+            </a:pPr>
+            <a:r>
+              <a:rPr lang="en-US" sz="1500" b="1" dirty="0">
+                <a:solidFill>
+                  <a:srgbClr val="1F4A38"/>
+                </a:solidFill>
+                <a:latin typeface="微软雅黑" pitchFamily="34" charset="0"/>
+                <a:ea typeface="微软雅黑" pitchFamily="34" charset="-122"/>
+                <a:cs typeface="微软雅黑" pitchFamily="34" charset="-120"/>
+              </a:rPr>
+              <a:t>代码签名落地</a:t>
+            </a:r>
+            <a:endParaRPr lang="en-US" sz="1500" dirty="0"/>
+          </a:p>
+        </p:txBody>
+      </p:sp>
+      <p:sp>
+        <p:nvSpPr>
+          <p:cNvPr id="18" name="Text 16"/>
+          <p:cNvSpPr/>
+          <p:nvPr/>
+        </p:nvSpPr>
+        <p:spPr>
+          <a:xfrm>
+            <a:off x="6537960" y="3685032"/>
+            <a:ext cx="4892040" cy="640080"/>
+          </a:xfrm>
+          <a:prstGeom prst="rect">
+            <a:avLst/>
+          </a:prstGeom>
+          <a:noFill/>
+          <a:ln/>
+        </p:spPr>
+        <p:txBody>
+          <a:bodyPr wrap="square" lIns="0" tIns="0" rIns="0" bIns="0" rtlCol="0" anchor="ctr"/>
+          <a:lstStyle/>
+          <a:p>
+            <a:pPr indent="0" marL="0">
+              <a:buNone/>
+            </a:pPr>
+            <a:r>
+              <a:rPr lang="en-US" sz="1150" dirty="0">
+                <a:solidFill>
+                  <a:srgbClr val="5F6F66"/>
+                </a:solidFill>
+                <a:latin typeface="微软雅黑" pitchFamily="34" charset="0"/>
+                <a:ea typeface="微软雅黑" pitchFamily="34" charset="-122"/>
+                <a:cs typeface="微软雅黑" pitchFamily="34" charset="-120"/>
+              </a:rPr>
+              <a:t>采购证书后接入 CSC secrets，安装包/后端 exe 全签名（W6-T1）</a:t>
+            </a:r>
+            <a:endParaRPr lang="en-US" sz="1150" dirty="0"/>
+          </a:p>
+        </p:txBody>
+      </p:sp>
+      <p:sp>
+        <p:nvSpPr>
+          <p:cNvPr id="19" name="Shape 17"/>
+          <p:cNvSpPr/>
+          <p:nvPr/>
+        </p:nvSpPr>
+        <p:spPr>
+          <a:xfrm>
+            <a:off x="457200" y="4654296"/>
+            <a:ext cx="5440680" cy="1234440"/>
+          </a:xfrm>
+          <a:prstGeom prst="roundRect">
+            <a:avLst>
+              <a:gd name="adj" fmla="val 5185"/>
+            </a:avLst>
+          </a:prstGeom>
+          <a:solidFill>
+            <a:srgbClr val="FFFFFF"/>
+          </a:solidFill>
+          <a:ln/>
+          <a:effectLst>
+            <a:outerShdw sx="100000" sy="100000" kx="0" ky="0" algn="bl" rotWithShape="0" blurRad="88900" dist="25400" dir="5400000">
+              <a:srgbClr val="1A2E24">
+                <a:alpha val="13000"/>
+              </a:srgbClr>
+            </a:outerShdw>
+          </a:effectLst>
+        </p:spPr>
+      </p:sp>
+      <p:sp>
+        <p:nvSpPr>
+          <p:cNvPr id="20" name="Text 18"/>
+          <p:cNvSpPr/>
+          <p:nvPr/>
+        </p:nvSpPr>
+        <p:spPr>
+          <a:xfrm>
+            <a:off x="731520" y="4782312"/>
+            <a:ext cx="4846320" cy="365760"/>
+          </a:xfrm>
+          <a:prstGeom prst="rect">
+            <a:avLst/>
+          </a:prstGeom>
+          <a:noFill/>
+          <a:ln/>
+        </p:spPr>
+        <p:txBody>
+          <a:bodyPr wrap="square" lIns="0" tIns="0" rIns="0" bIns="0" rtlCol="0" anchor="ctr"/>
+          <a:lstStyle/>
+          <a:p>
+            <a:pPr indent="0" marL="0">
+              <a:buNone/>
+            </a:pPr>
+            <a:r>
+              <a:rPr lang="en-US" sz="1500" b="1" dirty="0">
+                <a:solidFill>
+                  <a:srgbClr val="1F4A38"/>
+                </a:solidFill>
+                <a:latin typeface="微软雅黑" pitchFamily="34" charset="0"/>
+                <a:ea typeface="微软雅黑" pitchFamily="34" charset="-122"/>
+                <a:cs typeface="微软雅黑" pitchFamily="34" charset="-120"/>
+              </a:rPr>
+              <a:t>评审清单与 PR 模板（P-5）</a:t>
+            </a:r>
+            <a:endParaRPr lang="en-US" sz="1500" dirty="0"/>
+          </a:p>
+        </p:txBody>
+      </p:sp>
+      <p:sp>
+        <p:nvSpPr>
+          <p:cNvPr id="21" name="Text 19"/>
+          <p:cNvSpPr/>
+          <p:nvPr/>
+        </p:nvSpPr>
+        <p:spPr>
+          <a:xfrm>
+            <a:off x="731520" y="5166360"/>
+            <a:ext cx="4892040" cy="640080"/>
+          </a:xfrm>
+          <a:prstGeom prst="rect">
+            <a:avLst/>
+          </a:prstGeom>
+          <a:noFill/>
+          <a:ln/>
+        </p:spPr>
+        <p:txBody>
+          <a:bodyPr wrap="square" lIns="0" tIns="0" rIns="0" bIns="0" rtlCol="0" anchor="ctr"/>
+          <a:lstStyle/>
+          <a:p>
+            <a:pPr indent="0" marL="0">
+              <a:buNone/>
+            </a:pPr>
+            <a:r>
+              <a:rPr lang="en-US" sz="1150" dirty="0">
+                <a:solidFill>
+                  <a:srgbClr val="5F6F66"/>
+                </a:solidFill>
+                <a:latin typeface="微软雅黑" pitchFamily="34" charset="0"/>
+                <a:ea typeface="微软雅黑" pitchFamily="34" charset="-122"/>
+                <a:cs typeface="微软雅黑" pitchFamily="34" charset="-120"/>
+              </a:rPr>
+              <a:t>新增线程/Timer、except-pass、文件写入、新依赖四类必答项并入 PR 模板</a:t>
+            </a:r>
+            <a:endParaRPr lang="en-US" sz="1150" dirty="0"/>
+          </a:p>
+        </p:txBody>
+      </p:sp>
+      <p:sp>
+        <p:nvSpPr>
+          <p:cNvPr id="22" name="Shape 20"/>
+          <p:cNvSpPr/>
+          <p:nvPr/>
+        </p:nvSpPr>
+        <p:spPr>
+          <a:xfrm>
+            <a:off x="6263640" y="4654296"/>
+            <a:ext cx="5440680" cy="1234440"/>
+          </a:xfrm>
+          <a:prstGeom prst="roundRect">
+            <a:avLst>
+              <a:gd name="adj" fmla="val 5185"/>
+            </a:avLst>
+          </a:prstGeom>
+          <a:solidFill>
+            <a:srgbClr val="FFFFFF"/>
+          </a:solidFill>
+          <a:ln/>
+          <a:effectLst>
+            <a:outerShdw sx="100000" sy="100000" kx="0" ky="0" algn="bl" rotWithShape="0" blurRad="88900" dist="25400" dir="5400000">
+              <a:srgbClr val="1A2E24">
+                <a:alpha val="13000"/>
+              </a:srgbClr>
+            </a:outerShdw>
+          </a:effectLst>
+        </p:spPr>
+      </p:sp>
+      <p:sp>
+        <p:nvSpPr>
+          <p:cNvPr id="23" name="Text 21"/>
+          <p:cNvSpPr/>
+          <p:nvPr/>
+        </p:nvSpPr>
+        <p:spPr>
+          <a:xfrm>
+            <a:off x="6537960" y="4782312"/>
+            <a:ext cx="4846320" cy="365760"/>
+          </a:xfrm>
+          <a:prstGeom prst="rect">
+            <a:avLst/>
+          </a:prstGeom>
+          <a:noFill/>
+          <a:ln/>
+        </p:spPr>
+        <p:txBody>
+          <a:bodyPr wrap="square" lIns="0" tIns="0" rIns="0" bIns="0" rtlCol="0" anchor="ctr"/>
+          <a:lstStyle/>
+          <a:p>
+            <a:pPr indent="0" marL="0">
+              <a:buNone/>
+            </a:pPr>
+            <a:r>
+              <a:rPr lang="en-US" sz="1500" b="1" dirty="0">
+                <a:solidFill>
+                  <a:srgbClr val="1F4A38"/>
+                </a:solidFill>
+                <a:latin typeface="微软雅黑" pitchFamily="34" charset="0"/>
+                <a:ea typeface="微软雅黑" pitchFamily="34" charset="-122"/>
+                <a:cs typeface="微软雅黑" pitchFamily="34" charset="-120"/>
+              </a:rPr>
+              <a:t>E2E 扩充</a:t>
+            </a:r>
+            <a:endParaRPr lang="en-US" sz="1500" dirty="0"/>
+          </a:p>
+        </p:txBody>
+      </p:sp>
+      <p:sp>
+        <p:nvSpPr>
+          <p:cNvPr id="24" name="Text 22"/>
+          <p:cNvSpPr/>
+          <p:nvPr/>
+        </p:nvSpPr>
+        <p:spPr>
+          <a:xfrm>
+            <a:off x="6537960" y="5166360"/>
+            <a:ext cx="4892040" cy="640080"/>
+          </a:xfrm>
+          <a:prstGeom prst="rect">
+            <a:avLst/>
+          </a:prstGeom>
+          <a:noFill/>
+          <a:ln/>
+        </p:spPr>
+        <p:txBody>
+          <a:bodyPr wrap="square" lIns="0" tIns="0" rIns="0" bIns="0" rtlCol="0" anchor="ctr"/>
+          <a:lstStyle/>
+          <a:p>
+            <a:pPr indent="0" marL="0">
+              <a:buNone/>
+            </a:pPr>
+            <a:r>
+              <a:rPr lang="en-US" sz="1150" dirty="0">
+                <a:solidFill>
+                  <a:srgbClr val="5F6F66"/>
+                </a:solidFill>
+                <a:latin typeface="微软雅黑" pitchFamily="34" charset="0"/>
+                <a:ea typeface="微软雅黑" pitchFamily="34" charset="-122"/>
+                <a:cs typeface="微软雅黑" pitchFamily="34" charset="-120"/>
+              </a:rPr>
+              <a:t>Docker E2E 关键路径 Playwright 用例扩容（当前 150 例，CI 全绿）</a:t>
+            </a:r>
+            <a:endParaRPr lang="en-US" sz="1150" dirty="0"/>
+          </a:p>
+        </p:txBody>
+      </p:sp>
+    </p:spTree>
+  </p:cSld>
+  <p:clrMapOvr>
+    <a:masterClrMapping/>
+  </p:clrMapOvr>
+</p:sld>
+</file>
+
+<file path=ppt/slides/slide41.xml><?xml version="1.0" encoding="utf-8"?>
+<p:sld xmlns:a="http://schemas.openxmlformats.org/drawingml/2006/main" xmlns:r="http://schemas.openxmlformats.org/officeDocument/2006/relationships" xmlns:p="http://schemas.openxmlformats.org/presentationml/2006/main">
+  <p:cSld name="Slide 41">
     <p:bg>
       <p:bgPr>
         <a:solidFill>

--- a/docs/帮扶管理信息系统介绍.pptx
+++ b/docs/帮扶管理信息系统介绍.pptx
@@ -4701,6 +4701,10 @@
           </a:solidFill>
           <a:ln/>
         </p:spPr>
+        <p:txBody>
+          <a:bodyPr/>
+          <a:p/>
+        </p:txBody>
       </p:sp>
       <p:sp>
         <p:nvSpPr>
@@ -4721,6 +4725,10 @@
           </a:solidFill>
           <a:ln/>
         </p:spPr>
+        <p:txBody>
+          <a:bodyPr/>
+          <a:p/>
+        </p:txBody>
       </p:sp>
       <p:sp>
         <p:nvSpPr>
@@ -4741,6 +4749,10 @@
           </a:solidFill>
           <a:ln/>
         </p:spPr>
+        <p:txBody>
+          <a:bodyPr/>
+          <a:p/>
+        </p:txBody>
       </p:sp>
       <p:sp>
         <p:nvSpPr>
@@ -4954,7 +4966,7 @@
                 <a:ea typeface="微软雅黑" pitchFamily="34" charset="-122"/>
                 <a:cs typeface="微软雅黑" pitchFamily="34" charset="-120"/>
               </a:rPr>
-              <a:t>V1.12.8  |  2026-09-14  |  FastAPI + Vue 3 + Electron + SQLite</a:t>
+              <a:t>V1.12.9  |  2026-09-30  |  FastAPI + Vue 3 + Electron + SQLite</a:t>
             </a:r>
             <a:endParaRPr lang="en-US" sz="1250" dirty="0"/>
           </a:p>
@@ -5011,6 +5023,10 @@
           </a:solidFill>
           <a:ln/>
         </p:spPr>
+        <p:txBody>
+          <a:bodyPr/>
+          <a:p/>
+        </p:txBody>
       </p:sp>
       <p:sp>
         <p:nvSpPr>
@@ -5162,7 +5178,7 @@
                 <a:ea typeface="微软雅黑" pitchFamily="34" charset="-122"/>
                 <a:cs typeface="微软雅黑" pitchFamily="34" charset="-120"/>
               </a:rPr>
-              <a:t>帮扶管理信息系统 v1.12.8</a:t>
+              <a:t>帮扶管理信息系统 v1.12.9</a:t>
             </a:r>
             <a:endParaRPr lang="en-US" sz="1050" dirty="0"/>
           </a:p>
@@ -5196,6 +5212,10 @@
             </a:outerShdw>
           </a:effectLst>
         </p:spPr>
+        <p:txBody>
+          <a:bodyPr/>
+          <a:p/>
+        </p:txBody>
       </p:sp>
       <p:sp>
         <p:nvSpPr>
@@ -5336,7 +5356,7 @@
                 <a:ea typeface="微软雅黑" pitchFamily="34" charset="-122"/>
                 <a:cs typeface="微软雅黑" pitchFamily="34" charset="-120"/>
               </a:rPr>
-              <a:t>292 个测试文件 · 5,691 个用例</a:t>
+              <a:t>302 个测试文件 · 6,124 个用例</a:t>
             </a:r>
             <a:endParaRPr lang="en-US" sz="1350" dirty="0"/>
           </a:p>
@@ -5391,6 +5411,10 @@
             </a:outerShdw>
           </a:effectLst>
         </p:spPr>
+        <p:txBody>
+          <a:bodyPr/>
+          <a:p/>
+        </p:txBody>
       </p:sp>
       <p:sp>
         <p:nvSpPr>
@@ -5609,6 +5633,10 @@
           </a:solidFill>
           <a:ln/>
         </p:spPr>
+        <p:txBody>
+          <a:bodyPr/>
+          <a:p/>
+        </p:txBody>
       </p:sp>
       <p:sp>
         <p:nvSpPr>
@@ -5760,7 +5788,7 @@
                 <a:ea typeface="微软雅黑" pitchFamily="34" charset="-122"/>
                 <a:cs typeface="微软雅黑" pitchFamily="34" charset="-120"/>
               </a:rPr>
-              <a:t>帮扶管理信息系统 v1.12.8</a:t>
+              <a:t>帮扶管理信息系统 v1.12.9</a:t>
             </a:r>
             <a:endParaRPr lang="en-US" sz="1050" dirty="0"/>
           </a:p>
@@ -5785,6 +5813,10 @@
           </a:solidFill>
           <a:ln/>
         </p:spPr>
+        <p:txBody>
+          <a:bodyPr/>
+          <a:p/>
+        </p:txBody>
       </p:sp>
       <p:sp>
         <p:nvSpPr>
@@ -5883,6 +5915,10 @@
           </a:solidFill>
           <a:ln/>
         </p:spPr>
+        <p:txBody>
+          <a:bodyPr/>
+          <a:p/>
+        </p:txBody>
       </p:sp>
       <p:sp>
         <p:nvSpPr>
@@ -5981,6 +6017,10 @@
           </a:solidFill>
           <a:ln/>
         </p:spPr>
+        <p:txBody>
+          <a:bodyPr/>
+          <a:p/>
+        </p:txBody>
       </p:sp>
       <p:sp>
         <p:nvSpPr>
@@ -6079,6 +6119,10 @@
           </a:solidFill>
           <a:ln/>
         </p:spPr>
+        <p:txBody>
+          <a:bodyPr/>
+          <a:p/>
+        </p:txBody>
       </p:sp>
       <p:sp>
         <p:nvSpPr>
@@ -6177,6 +6221,10 @@
           </a:solidFill>
           <a:ln/>
         </p:spPr>
+        <p:txBody>
+          <a:bodyPr/>
+          <a:p/>
+        </p:txBody>
       </p:sp>
       <p:sp>
         <p:nvSpPr>
@@ -6284,6 +6332,10 @@
             </a:outerShdw>
           </a:effectLst>
         </p:spPr>
+        <p:txBody>
+          <a:bodyPr/>
+          <a:p/>
+        </p:txBody>
       </p:sp>
       <p:sp>
         <p:nvSpPr>
@@ -6481,6 +6533,10 @@
           </a:solidFill>
           <a:ln/>
         </p:spPr>
+        <p:txBody>
+          <a:bodyPr/>
+          <a:p/>
+        </p:txBody>
       </p:sp>
       <p:sp>
         <p:nvSpPr>
@@ -6632,7 +6688,7 @@
                 <a:ea typeface="微软雅黑" pitchFamily="34" charset="-122"/>
                 <a:cs typeface="微软雅黑" pitchFamily="34" charset="-120"/>
               </a:rPr>
-              <a:t>帮扶管理信息系统 v1.12.8</a:t>
+              <a:t>帮扶管理信息系统 v1.12.9</a:t>
             </a:r>
             <a:endParaRPr lang="en-US" sz="1050" dirty="0"/>
           </a:p>
@@ -6666,6 +6722,10 @@
             </a:outerShdw>
           </a:effectLst>
         </p:spPr>
+        <p:txBody>
+          <a:bodyPr/>
+          <a:p/>
+        </p:txBody>
       </p:sp>
       <p:sp>
         <p:nvSpPr>
@@ -6806,7 +6866,7 @@
                 <a:ea typeface="微软雅黑" pitchFamily="34" charset="-122"/>
                 <a:cs typeface="微软雅黑" pitchFamily="34" charset="-120"/>
               </a:rPr>
-              <a:t>37 个 Alembic 迁移：含 PII 存量回填（幂等可重跑）与外键守护</a:t>
+              <a:t>44 个 Alembic 迁移：含 PII 存量回填（幂等可重跑）与外键守护</a:t>
             </a:r>
             <a:endParaRPr lang="en-US" sz="1350" dirty="0"/>
           </a:p>
@@ -6861,6 +6921,10 @@
             </a:outerShdw>
           </a:effectLst>
         </p:spPr>
+        <p:txBody>
+          <a:bodyPr/>
+          <a:p/>
+        </p:txBody>
       </p:sp>
       <p:sp>
         <p:nvSpPr>
@@ -7079,6 +7143,10 @@
           </a:solidFill>
           <a:ln/>
         </p:spPr>
+        <p:txBody>
+          <a:bodyPr/>
+          <a:p/>
+        </p:txBody>
       </p:sp>
       <p:sp>
         <p:nvSpPr>
@@ -7230,7 +7298,7 @@
                 <a:ea typeface="微软雅黑" pitchFamily="34" charset="-122"/>
                 <a:cs typeface="微软雅黑" pitchFamily="34" charset="-120"/>
               </a:rPr>
-              <a:t>帮扶管理信息系统 v1.12.8</a:t>
+              <a:t>帮扶管理信息系统 v1.12.9</a:t>
             </a:r>
             <a:endParaRPr lang="en-US" sz="1050" dirty="0"/>
           </a:p>
@@ -7264,6 +7332,10 @@
             </a:outerShdw>
           </a:effectLst>
         </p:spPr>
+        <p:txBody>
+          <a:bodyPr/>
+          <a:p/>
+        </p:txBody>
       </p:sp>
       <p:sp>
         <p:nvSpPr>
@@ -7417,6 +7489,10 @@
             </a:outerShdw>
           </a:effectLst>
         </p:spPr>
+        <p:txBody>
+          <a:bodyPr/>
+          <a:p/>
+        </p:txBody>
       </p:sp>
       <p:sp>
         <p:nvSpPr>
@@ -7563,6 +7639,10 @@
           </a:solidFill>
           <a:ln/>
         </p:spPr>
+        <p:txBody>
+          <a:bodyPr/>
+          <a:p/>
+        </p:txBody>
       </p:sp>
       <p:sp>
         <p:nvSpPr>
@@ -7626,6 +7706,10 @@
             <a:tailEnd type="triangle"/>
           </a:ln>
         </p:spPr>
+        <p:txBody>
+          <a:bodyPr/>
+          <a:p/>
+        </p:txBody>
       </p:sp>
       <p:sp>
         <p:nvSpPr>
@@ -7648,6 +7732,10 @@
           </a:solidFill>
           <a:ln/>
         </p:spPr>
+        <p:txBody>
+          <a:bodyPr/>
+          <a:p/>
+        </p:txBody>
       </p:sp>
       <p:sp>
         <p:nvSpPr>
@@ -7711,6 +7799,10 @@
             <a:tailEnd type="triangle"/>
           </a:ln>
         </p:spPr>
+        <p:txBody>
+          <a:bodyPr/>
+          <a:p/>
+        </p:txBody>
       </p:sp>
       <p:sp>
         <p:nvSpPr>
@@ -7733,6 +7825,10 @@
           </a:solidFill>
           <a:ln/>
         </p:spPr>
+        <p:txBody>
+          <a:bodyPr/>
+          <a:p/>
+        </p:txBody>
       </p:sp>
       <p:sp>
         <p:nvSpPr>
@@ -7796,6 +7892,10 @@
             <a:tailEnd type="triangle"/>
           </a:ln>
         </p:spPr>
+        <p:txBody>
+          <a:bodyPr/>
+          <a:p/>
+        </p:txBody>
       </p:sp>
       <p:sp>
         <p:nvSpPr>
@@ -7818,6 +7918,10 @@
           </a:solidFill>
           <a:ln/>
         </p:spPr>
+        <p:txBody>
+          <a:bodyPr/>
+          <a:p/>
+        </p:txBody>
       </p:sp>
       <p:sp>
         <p:nvSpPr>
@@ -7881,6 +7985,10 @@
             <a:tailEnd type="triangle"/>
           </a:ln>
         </p:spPr>
+        <p:txBody>
+          <a:bodyPr/>
+          <a:p/>
+        </p:txBody>
       </p:sp>
       <p:sp>
         <p:nvSpPr>
@@ -7903,6 +8011,10 @@
           </a:solidFill>
           <a:ln/>
         </p:spPr>
+        <p:txBody>
+          <a:bodyPr/>
+          <a:p/>
+        </p:txBody>
       </p:sp>
       <p:sp>
         <p:nvSpPr>
@@ -7966,6 +8078,10 @@
             <a:tailEnd type="triangle"/>
           </a:ln>
         </p:spPr>
+        <p:txBody>
+          <a:bodyPr/>
+          <a:p/>
+        </p:txBody>
       </p:sp>
       <p:sp>
         <p:nvSpPr>
@@ -7988,6 +8104,10 @@
           </a:solidFill>
           <a:ln/>
         </p:spPr>
+        <p:txBody>
+          <a:bodyPr/>
+          <a:p/>
+        </p:txBody>
       </p:sp>
       <p:sp>
         <p:nvSpPr>
@@ -8412,6 +8532,10 @@
           </a:solidFill>
           <a:ln/>
         </p:spPr>
+        <p:txBody>
+          <a:bodyPr/>
+          <a:p/>
+        </p:txBody>
       </p:sp>
       <p:sp>
         <p:nvSpPr>
@@ -8563,7 +8687,7 @@
                 <a:ea typeface="微软雅黑" pitchFamily="34" charset="-122"/>
                 <a:cs typeface="微软雅黑" pitchFamily="34" charset="-120"/>
               </a:rPr>
-              <a:t>帮扶管理信息系统 v1.12.8</a:t>
+              <a:t>帮扶管理信息系统 v1.12.9</a:t>
             </a:r>
             <a:endParaRPr lang="en-US" sz="1050" dirty="0"/>
           </a:p>
@@ -8597,6 +8721,10 @@
             </a:outerShdw>
           </a:effectLst>
         </p:spPr>
+        <p:txBody>
+          <a:bodyPr/>
+          <a:p/>
+        </p:txBody>
       </p:sp>
       <p:sp>
         <p:nvSpPr>
@@ -8743,6 +8871,10 @@
             </a:outerShdw>
           </a:effectLst>
         </p:spPr>
+        <p:txBody>
+          <a:bodyPr/>
+          <a:p/>
+        </p:txBody>
       </p:sp>
       <p:sp>
         <p:nvSpPr>
@@ -8889,6 +9021,10 @@
             </a:outerShdw>
           </a:effectLst>
         </p:spPr>
+        <p:txBody>
+          <a:bodyPr/>
+          <a:p/>
+        </p:txBody>
       </p:sp>
       <p:sp>
         <p:nvSpPr>
@@ -9035,6 +9171,10 @@
             </a:outerShdw>
           </a:effectLst>
         </p:spPr>
+        <p:txBody>
+          <a:bodyPr/>
+          <a:p/>
+        </p:txBody>
       </p:sp>
       <p:sp>
         <p:nvSpPr>
@@ -9181,6 +9321,10 @@
             </a:outerShdw>
           </a:effectLst>
         </p:spPr>
+        <p:txBody>
+          <a:bodyPr/>
+          <a:p/>
+        </p:txBody>
       </p:sp>
       <p:sp>
         <p:nvSpPr>
@@ -9327,6 +9471,10 @@
             </a:outerShdw>
           </a:effectLst>
         </p:spPr>
+        <p:txBody>
+          <a:bodyPr/>
+          <a:p/>
+        </p:txBody>
       </p:sp>
       <p:sp>
         <p:nvSpPr>
@@ -9535,6 +9683,10 @@
           </a:solidFill>
           <a:ln/>
         </p:spPr>
+        <p:txBody>
+          <a:bodyPr/>
+          <a:p/>
+        </p:txBody>
       </p:sp>
       <p:sp>
         <p:nvSpPr>
@@ -9686,7 +9838,7 @@
                 <a:ea typeface="微软雅黑" pitchFamily="34" charset="-122"/>
                 <a:cs typeface="微软雅黑" pitchFamily="34" charset="-120"/>
               </a:rPr>
-              <a:t>帮扶管理信息系统 v1.12.8</a:t>
+              <a:t>帮扶管理信息系统 v1.12.9</a:t>
             </a:r>
             <a:endParaRPr lang="en-US" sz="1050" dirty="0"/>
           </a:p>
@@ -9720,6 +9872,10 @@
             </a:outerShdw>
           </a:effectLst>
         </p:spPr>
+        <p:txBody>
+          <a:bodyPr/>
+          <a:p/>
+        </p:txBody>
       </p:sp>
       <p:sp>
         <p:nvSpPr>
@@ -9915,6 +10071,10 @@
             </a:outerShdw>
           </a:effectLst>
         </p:spPr>
+        <p:txBody>
+          <a:bodyPr/>
+          <a:p/>
+        </p:txBody>
       </p:sp>
       <p:sp>
         <p:nvSpPr>
@@ -10133,6 +10293,10 @@
           </a:solidFill>
           <a:ln/>
         </p:spPr>
+        <p:txBody>
+          <a:bodyPr/>
+          <a:p/>
+        </p:txBody>
       </p:sp>
       <p:sp>
         <p:nvSpPr>
@@ -10284,7 +10448,7 @@
                 <a:ea typeface="微软雅黑" pitchFamily="34" charset="-122"/>
                 <a:cs typeface="微软雅黑" pitchFamily="34" charset="-120"/>
               </a:rPr>
-              <a:t>帮扶管理信息系统 v1.12.8</a:t>
+              <a:t>帮扶管理信息系统 v1.12.9</a:t>
             </a:r>
             <a:endParaRPr lang="en-US" sz="1050" dirty="0"/>
           </a:p>
@@ -10311,6 +10475,10 @@
           </a:solidFill>
           <a:ln/>
         </p:spPr>
+        <p:txBody>
+          <a:bodyPr/>
+          <a:p/>
+        </p:txBody>
       </p:sp>
       <p:sp>
         <p:nvSpPr>
@@ -10372,6 +10540,10 @@
           </a:solidFill>
           <a:ln/>
         </p:spPr>
+        <p:txBody>
+          <a:bodyPr/>
+          <a:p/>
+        </p:txBody>
       </p:sp>
       <p:sp>
         <p:nvSpPr>
@@ -10433,6 +10605,10 @@
           </a:solidFill>
           <a:ln/>
         </p:spPr>
+        <p:txBody>
+          <a:bodyPr/>
+          <a:p/>
+        </p:txBody>
       </p:sp>
       <p:sp>
         <p:nvSpPr>
@@ -10494,6 +10670,10 @@
           </a:solidFill>
           <a:ln/>
         </p:spPr>
+        <p:txBody>
+          <a:bodyPr/>
+          <a:p/>
+        </p:txBody>
       </p:sp>
       <p:sp>
         <p:nvSpPr>
@@ -10555,6 +10735,10 @@
           </a:solidFill>
           <a:ln/>
         </p:spPr>
+        <p:txBody>
+          <a:bodyPr/>
+          <a:p/>
+        </p:txBody>
       </p:sp>
       <p:sp>
         <p:nvSpPr>
@@ -10616,6 +10800,10 @@
           </a:solidFill>
           <a:ln/>
         </p:spPr>
+        <p:txBody>
+          <a:bodyPr/>
+          <a:p/>
+        </p:txBody>
       </p:sp>
       <p:sp>
         <p:nvSpPr>
@@ -10677,6 +10865,10 @@
           </a:solidFill>
           <a:ln/>
         </p:spPr>
+        <p:txBody>
+          <a:bodyPr/>
+          <a:p/>
+        </p:txBody>
       </p:sp>
       <p:sp>
         <p:nvSpPr>
@@ -10738,6 +10930,10 @@
           </a:solidFill>
           <a:ln/>
         </p:spPr>
+        <p:txBody>
+          <a:bodyPr/>
+          <a:p/>
+        </p:txBody>
       </p:sp>
       <p:sp>
         <p:nvSpPr>
@@ -10935,6 +11131,10 @@
           </a:solidFill>
           <a:ln/>
         </p:spPr>
+        <p:txBody>
+          <a:bodyPr/>
+          <a:p/>
+        </p:txBody>
       </p:sp>
       <p:sp>
         <p:nvSpPr>
@@ -11086,7 +11286,7 @@
                 <a:ea typeface="微软雅黑" pitchFamily="34" charset="-122"/>
                 <a:cs typeface="微软雅黑" pitchFamily="34" charset="-120"/>
               </a:rPr>
-              <a:t>帮扶管理信息系统 v1.12.8</a:t>
+              <a:t>帮扶管理信息系统 v1.12.9</a:t>
             </a:r>
             <a:endParaRPr lang="en-US" sz="1050" dirty="0"/>
           </a:p>
@@ -11111,6 +11311,10 @@
           </a:solidFill>
           <a:ln/>
         </p:spPr>
+        <p:txBody>
+          <a:bodyPr/>
+          <a:p/>
+        </p:txBody>
       </p:sp>
       <p:sp>
         <p:nvSpPr>
@@ -11170,6 +11374,10 @@
           </a:solidFill>
           <a:ln/>
         </p:spPr>
+        <p:txBody>
+          <a:bodyPr/>
+          <a:p/>
+        </p:txBody>
       </p:sp>
       <p:sp>
         <p:nvSpPr>
@@ -11229,6 +11437,10 @@
           </a:solidFill>
           <a:ln/>
         </p:spPr>
+        <p:txBody>
+          <a:bodyPr/>
+          <a:p/>
+        </p:txBody>
       </p:sp>
       <p:sp>
         <p:nvSpPr>
@@ -11288,6 +11500,10 @@
           </a:solidFill>
           <a:ln/>
         </p:spPr>
+        <p:txBody>
+          <a:bodyPr/>
+          <a:p/>
+        </p:txBody>
       </p:sp>
       <p:sp>
         <p:nvSpPr>
@@ -11347,6 +11563,10 @@
           </a:solidFill>
           <a:ln/>
         </p:spPr>
+        <p:txBody>
+          <a:bodyPr/>
+          <a:p/>
+        </p:txBody>
       </p:sp>
       <p:sp>
         <p:nvSpPr>
@@ -11406,6 +11626,10 @@
           </a:solidFill>
           <a:ln/>
         </p:spPr>
+        <p:txBody>
+          <a:bodyPr/>
+          <a:p/>
+        </p:txBody>
       </p:sp>
       <p:sp>
         <p:nvSpPr>
@@ -11624,6 +11848,10 @@
           </a:solidFill>
           <a:ln/>
         </p:spPr>
+        <p:txBody>
+          <a:bodyPr/>
+          <a:p/>
+        </p:txBody>
       </p:sp>
       <p:sp>
         <p:nvSpPr>
@@ -11775,7 +12003,7 @@
                 <a:ea typeface="微软雅黑" pitchFamily="34" charset="-122"/>
                 <a:cs typeface="微软雅黑" pitchFamily="34" charset="-120"/>
               </a:rPr>
-              <a:t>帮扶管理信息系统 v1.12.8</a:t>
+              <a:t>帮扶管理信息系统 v1.12.9</a:t>
             </a:r>
             <a:endParaRPr lang="en-US" sz="1050" dirty="0"/>
           </a:p>
@@ -11800,6 +12028,10 @@
           </a:solidFill>
           <a:ln/>
         </p:spPr>
+        <p:txBody>
+          <a:bodyPr/>
+          <a:p/>
+        </p:txBody>
       </p:sp>
       <p:sp>
         <p:nvSpPr>
@@ -11902,6 +12134,10 @@
             <a:tailEnd type="triangle"/>
           </a:ln>
         </p:spPr>
+        <p:txBody>
+          <a:bodyPr/>
+          <a:p/>
+        </p:txBody>
       </p:sp>
       <p:sp>
         <p:nvSpPr>
@@ -11922,6 +12158,10 @@
           </a:solidFill>
           <a:ln/>
         </p:spPr>
+        <p:txBody>
+          <a:bodyPr/>
+          <a:p/>
+        </p:txBody>
       </p:sp>
       <p:sp>
         <p:nvSpPr>
@@ -12024,6 +12264,10 @@
             <a:tailEnd type="triangle"/>
           </a:ln>
         </p:spPr>
+        <p:txBody>
+          <a:bodyPr/>
+          <a:p/>
+        </p:txBody>
       </p:sp>
       <p:sp>
         <p:nvSpPr>
@@ -12044,6 +12288,10 @@
           </a:solidFill>
           <a:ln/>
         </p:spPr>
+        <p:txBody>
+          <a:bodyPr/>
+          <a:p/>
+        </p:txBody>
       </p:sp>
       <p:sp>
         <p:nvSpPr>
@@ -12146,6 +12394,10 @@
             <a:tailEnd type="triangle"/>
           </a:ln>
         </p:spPr>
+        <p:txBody>
+          <a:bodyPr/>
+          <a:p/>
+        </p:txBody>
       </p:sp>
       <p:sp>
         <p:nvSpPr>
@@ -12166,6 +12418,10 @@
           </a:solidFill>
           <a:ln/>
         </p:spPr>
+        <p:txBody>
+          <a:bodyPr/>
+          <a:p/>
+        </p:txBody>
       </p:sp>
       <p:sp>
         <p:nvSpPr>
@@ -12268,6 +12524,10 @@
             <a:tailEnd type="triangle"/>
           </a:ln>
         </p:spPr>
+        <p:txBody>
+          <a:bodyPr/>
+          <a:p/>
+        </p:txBody>
       </p:sp>
       <p:sp>
         <p:nvSpPr>
@@ -12288,6 +12548,10 @@
           </a:solidFill>
           <a:ln/>
         </p:spPr>
+        <p:txBody>
+          <a:bodyPr/>
+          <a:p/>
+        </p:txBody>
       </p:sp>
       <p:sp>
         <p:nvSpPr>
@@ -12390,6 +12654,10 @@
             <a:tailEnd type="triangle"/>
           </a:ln>
         </p:spPr>
+        <p:txBody>
+          <a:bodyPr/>
+          <a:p/>
+        </p:txBody>
       </p:sp>
       <p:sp>
         <p:nvSpPr>
@@ -12410,6 +12678,10 @@
           </a:solidFill>
           <a:ln/>
         </p:spPr>
+        <p:txBody>
+          <a:bodyPr/>
+          <a:p/>
+        </p:txBody>
       </p:sp>
       <p:sp>
         <p:nvSpPr>
@@ -12512,6 +12784,10 @@
             <a:tailEnd type="triangle"/>
           </a:ln>
         </p:spPr>
+        <p:txBody>
+          <a:bodyPr/>
+          <a:p/>
+        </p:txBody>
       </p:sp>
       <p:sp>
         <p:nvSpPr>
@@ -12532,6 +12808,10 @@
           </a:solidFill>
           <a:ln/>
         </p:spPr>
+        <p:txBody>
+          <a:bodyPr/>
+          <a:p/>
+        </p:txBody>
       </p:sp>
       <p:sp>
         <p:nvSpPr>
@@ -12634,6 +12914,10 @@
             <a:tailEnd type="triangle"/>
           </a:ln>
         </p:spPr>
+        <p:txBody>
+          <a:bodyPr/>
+          <a:p/>
+        </p:txBody>
       </p:sp>
       <p:sp>
         <p:nvSpPr>
@@ -12654,6 +12938,10 @@
           </a:solidFill>
           <a:ln/>
         </p:spPr>
+        <p:txBody>
+          <a:bodyPr/>
+          <a:p/>
+        </p:txBody>
       </p:sp>
       <p:sp>
         <p:nvSpPr>
@@ -12761,6 +13049,10 @@
             </a:outerShdw>
           </a:effectLst>
         </p:spPr>
+        <p:txBody>
+          <a:bodyPr/>
+          <a:p/>
+        </p:txBody>
       </p:sp>
       <p:sp>
         <p:nvSpPr>
@@ -12914,6 +13206,10 @@
             </a:outerShdw>
           </a:effectLst>
         </p:spPr>
+        <p:txBody>
+          <a:bodyPr/>
+          <a:p/>
+        </p:txBody>
       </p:sp>
       <p:sp>
         <p:nvSpPr>
@@ -13170,6 +13466,10 @@
           </a:solidFill>
           <a:ln/>
         </p:spPr>
+        <p:txBody>
+          <a:bodyPr/>
+          <a:p/>
+        </p:txBody>
       </p:sp>
       <p:sp>
         <p:nvSpPr>
@@ -13309,6 +13609,10 @@
           </a:solidFill>
           <a:ln/>
         </p:spPr>
+        <p:txBody>
+          <a:bodyPr/>
+          <a:p/>
+        </p:txBody>
       </p:sp>
       <p:sp>
         <p:nvSpPr>
@@ -13448,6 +13752,10 @@
           </a:solidFill>
           <a:ln/>
         </p:spPr>
+        <p:txBody>
+          <a:bodyPr/>
+          <a:p/>
+        </p:txBody>
       </p:sp>
       <p:sp>
         <p:nvSpPr>
@@ -13587,6 +13895,10 @@
           </a:solidFill>
           <a:ln/>
         </p:spPr>
+        <p:txBody>
+          <a:bodyPr/>
+          <a:p/>
+        </p:txBody>
       </p:sp>
       <p:sp>
         <p:nvSpPr>
@@ -13726,6 +14038,10 @@
           </a:solidFill>
           <a:ln/>
         </p:spPr>
+        <p:txBody>
+          <a:bodyPr/>
+          <a:p/>
+        </p:txBody>
       </p:sp>
       <p:sp>
         <p:nvSpPr>
@@ -13838,7 +14154,7 @@
                 <a:ea typeface="微软雅黑" pitchFamily="34" charset="-122"/>
                 <a:cs typeface="微软雅黑" pitchFamily="34" charset="-120"/>
               </a:rPr>
-              <a:t>17,295 项自动化测试 · CI/CD · 依赖自检</a:t>
+              <a:t>17,672 项自动化测试 · CI/CD · 依赖自检</a:t>
             </a:r>
             <a:endParaRPr lang="en-US" sz="1200" dirty="0"/>
           </a:p>
@@ -13865,6 +14181,10 @@
           </a:solidFill>
           <a:ln/>
         </p:spPr>
+        <p:txBody>
+          <a:bodyPr/>
+          <a:p/>
+        </p:txBody>
       </p:sp>
       <p:sp>
         <p:nvSpPr>
@@ -14034,6 +14354,10 @@
           </a:solidFill>
           <a:ln/>
         </p:spPr>
+        <p:txBody>
+          <a:bodyPr/>
+          <a:p/>
+        </p:txBody>
       </p:sp>
       <p:sp>
         <p:nvSpPr>
@@ -14185,7 +14509,7 @@
                 <a:ea typeface="微软雅黑" pitchFamily="34" charset="-122"/>
                 <a:cs typeface="微软雅黑" pitchFamily="34" charset="-120"/>
               </a:rPr>
-              <a:t>帮扶管理信息系统 v1.12.8</a:t>
+              <a:t>帮扶管理信息系统 v1.12.9</a:t>
             </a:r>
             <a:endParaRPr lang="en-US" sz="1050" dirty="0"/>
           </a:p>
@@ -14219,6 +14543,10 @@
             </a:outerShdw>
           </a:effectLst>
         </p:spPr>
+        <p:txBody>
+          <a:bodyPr/>
+          <a:p/>
+        </p:txBody>
       </p:sp>
       <p:sp>
         <p:nvSpPr>
@@ -14414,6 +14742,10 @@
             </a:outerShdw>
           </a:effectLst>
         </p:spPr>
+        <p:txBody>
+          <a:bodyPr/>
+          <a:p/>
+        </p:txBody>
       </p:sp>
       <p:sp>
         <p:nvSpPr>
@@ -14632,6 +14964,10 @@
           </a:solidFill>
           <a:ln/>
         </p:spPr>
+        <p:txBody>
+          <a:bodyPr/>
+          <a:p/>
+        </p:txBody>
       </p:sp>
       <p:sp>
         <p:nvSpPr>
@@ -14783,7 +15119,7 @@
                 <a:ea typeface="微软雅黑" pitchFamily="34" charset="-122"/>
                 <a:cs typeface="微软雅黑" pitchFamily="34" charset="-120"/>
               </a:rPr>
-              <a:t>帮扶管理信息系统 v1.12.8</a:t>
+              <a:t>帮扶管理信息系统 v1.12.9</a:t>
             </a:r>
             <a:endParaRPr lang="en-US" sz="1050" dirty="0"/>
           </a:p>
@@ -14808,6 +15144,10 @@
           </a:solidFill>
           <a:ln/>
         </p:spPr>
+        <p:txBody>
+          <a:bodyPr/>
+          <a:p/>
+        </p:txBody>
       </p:sp>
       <p:sp>
         <p:nvSpPr>
@@ -14867,6 +15207,10 @@
           </a:solidFill>
           <a:ln/>
         </p:spPr>
+        <p:txBody>
+          <a:bodyPr/>
+          <a:p/>
+        </p:txBody>
       </p:sp>
       <p:sp>
         <p:nvSpPr>
@@ -14926,6 +15270,10 @@
           </a:solidFill>
           <a:ln/>
         </p:spPr>
+        <p:txBody>
+          <a:bodyPr/>
+          <a:p/>
+        </p:txBody>
       </p:sp>
       <p:sp>
         <p:nvSpPr>
@@ -14985,6 +15333,10 @@
           </a:solidFill>
           <a:ln/>
         </p:spPr>
+        <p:txBody>
+          <a:bodyPr/>
+          <a:p/>
+        </p:txBody>
       </p:sp>
       <p:sp>
         <p:nvSpPr>
@@ -15044,6 +15396,10 @@
           </a:solidFill>
           <a:ln/>
         </p:spPr>
+        <p:txBody>
+          <a:bodyPr/>
+          <a:p/>
+        </p:txBody>
       </p:sp>
       <p:sp>
         <p:nvSpPr>
@@ -15262,6 +15618,10 @@
           </a:solidFill>
           <a:ln/>
         </p:spPr>
+        <p:txBody>
+          <a:bodyPr/>
+          <a:p/>
+        </p:txBody>
       </p:sp>
       <p:sp>
         <p:nvSpPr>
@@ -15413,7 +15773,7 @@
                 <a:ea typeface="微软雅黑" pitchFamily="34" charset="-122"/>
                 <a:cs typeface="微软雅黑" pitchFamily="34" charset="-120"/>
               </a:rPr>
-              <a:t>帮扶管理信息系统 v1.12.8</a:t>
+              <a:t>帮扶管理信息系统 v1.12.9</a:t>
             </a:r>
             <a:endParaRPr lang="en-US" sz="1050" dirty="0"/>
           </a:p>
@@ -15447,6 +15807,10 @@
             </a:outerShdw>
           </a:effectLst>
         </p:spPr>
+        <p:txBody>
+          <a:bodyPr/>
+          <a:p/>
+        </p:txBody>
       </p:sp>
       <p:sp>
         <p:nvSpPr>
@@ -15621,6 +15985,10 @@
             </a:outerShdw>
           </a:effectLst>
         </p:spPr>
+        <p:txBody>
+          <a:bodyPr/>
+          <a:p/>
+        </p:txBody>
       </p:sp>
       <p:sp>
         <p:nvSpPr>
@@ -15795,6 +16163,10 @@
             </a:outerShdw>
           </a:effectLst>
         </p:spPr>
+        <p:txBody>
+          <a:bodyPr/>
+          <a:p/>
+        </p:txBody>
       </p:sp>
       <p:sp>
         <p:nvSpPr>
@@ -15925,6 +16297,10 @@
           </a:solidFill>
           <a:ln/>
         </p:spPr>
+        <p:txBody>
+          <a:bodyPr/>
+          <a:p/>
+        </p:txBody>
       </p:sp>
       <p:sp>
         <p:nvSpPr>
@@ -16076,7 +16452,7 @@
                 <a:ea typeface="微软雅黑" pitchFamily="34" charset="-122"/>
                 <a:cs typeface="微软雅黑" pitchFamily="34" charset="-120"/>
               </a:rPr>
-              <a:t>帮扶管理信息系统 v1.12.8</a:t>
+              <a:t>帮扶管理信息系统 v1.12.9</a:t>
             </a:r>
             <a:endParaRPr lang="en-US" sz="1050" dirty="0"/>
           </a:p>
@@ -16110,6 +16486,10 @@
             </a:outerShdw>
           </a:effectLst>
         </p:spPr>
+        <p:txBody>
+          <a:bodyPr/>
+          <a:p/>
+        </p:txBody>
       </p:sp>
       <p:sp>
         <p:nvSpPr>
@@ -16217,6 +16597,10 @@
             </a:outerShdw>
           </a:effectLst>
         </p:spPr>
+        <p:txBody>
+          <a:bodyPr/>
+          <a:p/>
+        </p:txBody>
       </p:sp>
       <p:sp>
         <p:nvSpPr>
@@ -16324,6 +16708,10 @@
             </a:outerShdw>
           </a:effectLst>
         </p:spPr>
+        <p:txBody>
+          <a:bodyPr/>
+          <a:p/>
+        </p:txBody>
       </p:sp>
       <p:sp>
         <p:nvSpPr>
@@ -16431,6 +16819,10 @@
             </a:outerShdw>
           </a:effectLst>
         </p:spPr>
+        <p:txBody>
+          <a:bodyPr/>
+          <a:p/>
+        </p:txBody>
       </p:sp>
       <p:sp>
         <p:nvSpPr>
@@ -16538,6 +16930,10 @@
             </a:outerShdw>
           </a:effectLst>
         </p:spPr>
+        <p:txBody>
+          <a:bodyPr/>
+          <a:p/>
+        </p:txBody>
       </p:sp>
       <p:sp>
         <p:nvSpPr>
@@ -16645,6 +17041,10 @@
             </a:outerShdw>
           </a:effectLst>
         </p:spPr>
+        <p:txBody>
+          <a:bodyPr/>
+          <a:p/>
+        </p:txBody>
       </p:sp>
       <p:sp>
         <p:nvSpPr>
@@ -16775,6 +17175,10 @@
           </a:solidFill>
           <a:ln/>
         </p:spPr>
+        <p:txBody>
+          <a:bodyPr/>
+          <a:p/>
+        </p:txBody>
       </p:sp>
       <p:sp>
         <p:nvSpPr>
@@ -16926,7 +17330,7 @@
                 <a:ea typeface="微软雅黑" pitchFamily="34" charset="-122"/>
                 <a:cs typeface="微软雅黑" pitchFamily="34" charset="-120"/>
               </a:rPr>
-              <a:t>帮扶管理信息系统 v1.12.8</a:t>
+              <a:t>帮扶管理信息系统 v1.12.9</a:t>
             </a:r>
             <a:endParaRPr lang="en-US" sz="1050" dirty="0"/>
           </a:p>
@@ -16960,6 +17364,10 @@
             </a:outerShdw>
           </a:effectLst>
         </p:spPr>
+        <p:txBody>
+          <a:bodyPr/>
+          <a:p/>
+        </p:txBody>
       </p:sp>
       <p:sp>
         <p:nvSpPr>
@@ -17067,6 +17475,10 @@
             </a:outerShdw>
           </a:effectLst>
         </p:spPr>
+        <p:txBody>
+          <a:bodyPr/>
+          <a:p/>
+        </p:txBody>
       </p:sp>
       <p:sp>
         <p:nvSpPr>
@@ -17174,6 +17586,10 @@
             </a:outerShdw>
           </a:effectLst>
         </p:spPr>
+        <p:txBody>
+          <a:bodyPr/>
+          <a:p/>
+        </p:txBody>
       </p:sp>
       <p:sp>
         <p:nvSpPr>
@@ -17281,6 +17697,10 @@
             </a:outerShdw>
           </a:effectLst>
         </p:spPr>
+        <p:txBody>
+          <a:bodyPr/>
+          <a:p/>
+        </p:txBody>
       </p:sp>
       <p:sp>
         <p:nvSpPr>
@@ -17388,6 +17808,10 @@
             </a:outerShdw>
           </a:effectLst>
         </p:spPr>
+        <p:txBody>
+          <a:bodyPr/>
+          <a:p/>
+        </p:txBody>
       </p:sp>
       <p:sp>
         <p:nvSpPr>
@@ -17495,6 +17919,10 @@
             </a:outerShdw>
           </a:effectLst>
         </p:spPr>
+        <p:txBody>
+          <a:bodyPr/>
+          <a:p/>
+        </p:txBody>
       </p:sp>
       <p:sp>
         <p:nvSpPr>
@@ -17919,6 +18347,10 @@
           </a:solidFill>
           <a:ln/>
         </p:spPr>
+        <p:txBody>
+          <a:bodyPr/>
+          <a:p/>
+        </p:txBody>
       </p:sp>
       <p:sp>
         <p:nvSpPr>
@@ -18070,7 +18502,7 @@
                 <a:ea typeface="微软雅黑" pitchFamily="34" charset="-122"/>
                 <a:cs typeface="微软雅黑" pitchFamily="34" charset="-120"/>
               </a:rPr>
-              <a:t>帮扶管理信息系统 v1.12.8</a:t>
+              <a:t>帮扶管理信息系统 v1.12.9</a:t>
             </a:r>
             <a:endParaRPr lang="en-US" sz="1050" dirty="0"/>
           </a:p>
@@ -18104,6 +18536,10 @@
             </a:outerShdw>
           </a:effectLst>
         </p:spPr>
+        <p:txBody>
+          <a:bodyPr/>
+          <a:p/>
+        </p:txBody>
       </p:sp>
       <p:sp>
         <p:nvSpPr>
@@ -18126,6 +18562,10 @@
           </a:solidFill>
           <a:ln/>
         </p:spPr>
+        <p:txBody>
+          <a:bodyPr/>
+          <a:p/>
+        </p:txBody>
       </p:sp>
       <p:sp>
         <p:nvSpPr>
@@ -18272,6 +18712,10 @@
             </a:outerShdw>
           </a:effectLst>
         </p:spPr>
+        <p:txBody>
+          <a:bodyPr/>
+          <a:p/>
+        </p:txBody>
       </p:sp>
       <p:sp>
         <p:nvSpPr>
@@ -18294,6 +18738,10 @@
           </a:solidFill>
           <a:ln/>
         </p:spPr>
+        <p:txBody>
+          <a:bodyPr/>
+          <a:p/>
+        </p:txBody>
       </p:sp>
       <p:sp>
         <p:nvSpPr>
@@ -18440,6 +18888,10 @@
             </a:outerShdw>
           </a:effectLst>
         </p:spPr>
+        <p:txBody>
+          <a:bodyPr/>
+          <a:p/>
+        </p:txBody>
       </p:sp>
       <p:sp>
         <p:nvSpPr>
@@ -18462,6 +18914,10 @@
           </a:solidFill>
           <a:ln/>
         </p:spPr>
+        <p:txBody>
+          <a:bodyPr/>
+          <a:p/>
+        </p:txBody>
       </p:sp>
       <p:sp>
         <p:nvSpPr>
@@ -18608,6 +19064,10 @@
             </a:outerShdw>
           </a:effectLst>
         </p:spPr>
+        <p:txBody>
+          <a:bodyPr/>
+          <a:p/>
+        </p:txBody>
       </p:sp>
       <p:sp>
         <p:nvSpPr>
@@ -18630,6 +19090,10 @@
           </a:solidFill>
           <a:ln/>
         </p:spPr>
+        <p:txBody>
+          <a:bodyPr/>
+          <a:p/>
+        </p:txBody>
       </p:sp>
       <p:sp>
         <p:nvSpPr>
@@ -18884,6 +19348,10 @@
           </a:solidFill>
           <a:ln/>
         </p:spPr>
+        <p:txBody>
+          <a:bodyPr/>
+          <a:p/>
+        </p:txBody>
       </p:sp>
       <p:sp>
         <p:nvSpPr>
@@ -19035,7 +19503,7 @@
                 <a:ea typeface="微软雅黑" pitchFamily="34" charset="-122"/>
                 <a:cs typeface="微软雅黑" pitchFamily="34" charset="-120"/>
               </a:rPr>
-              <a:t>帮扶管理信息系统 v1.12.8</a:t>
+              <a:t>帮扶管理信息系统 v1.12.9</a:t>
             </a:r>
             <a:endParaRPr lang="en-US" sz="1050" dirty="0"/>
           </a:p>
@@ -19069,6 +19537,10 @@
             </a:outerShdw>
           </a:effectLst>
         </p:spPr>
+        <p:txBody>
+          <a:bodyPr/>
+          <a:p/>
+        </p:txBody>
       </p:sp>
       <p:sp>
         <p:nvSpPr>
@@ -19215,6 +19687,10 @@
             </a:outerShdw>
           </a:effectLst>
         </p:spPr>
+        <p:txBody>
+          <a:bodyPr/>
+          <a:p/>
+        </p:txBody>
       </p:sp>
       <p:sp>
         <p:nvSpPr>
@@ -19361,6 +19837,10 @@
             </a:outerShdw>
           </a:effectLst>
         </p:spPr>
+        <p:txBody>
+          <a:bodyPr/>
+          <a:p/>
+        </p:txBody>
       </p:sp>
       <p:sp>
         <p:nvSpPr>
@@ -19507,6 +19987,10 @@
             </a:outerShdw>
           </a:effectLst>
         </p:spPr>
+        <p:txBody>
+          <a:bodyPr/>
+          <a:p/>
+        </p:txBody>
       </p:sp>
       <p:sp>
         <p:nvSpPr>
@@ -19683,6 +20167,10 @@
           </a:solidFill>
           <a:ln/>
         </p:spPr>
+        <p:txBody>
+          <a:bodyPr/>
+          <a:p/>
+        </p:txBody>
       </p:sp>
       <p:sp>
         <p:nvSpPr>
@@ -19834,7 +20322,7 @@
                 <a:ea typeface="微软雅黑" pitchFamily="34" charset="-122"/>
                 <a:cs typeface="微软雅黑" pitchFamily="34" charset="-120"/>
               </a:rPr>
-              <a:t>帮扶管理信息系统 v1.12.8</a:t>
+              <a:t>帮扶管理信息系统 v1.12.9</a:t>
             </a:r>
             <a:endParaRPr lang="en-US" sz="1050" dirty="0"/>
           </a:p>
@@ -19868,6 +20356,10 @@
             </a:outerShdw>
           </a:effectLst>
         </p:spPr>
+        <p:txBody>
+          <a:bodyPr/>
+          <a:p/>
+        </p:txBody>
       </p:sp>
       <p:sp>
         <p:nvSpPr>
@@ -19929,6 +20421,10 @@
           </a:solidFill>
           <a:ln/>
         </p:spPr>
+        <p:txBody>
+          <a:bodyPr/>
+          <a:p/>
+        </p:txBody>
       </p:sp>
       <p:sp>
         <p:nvSpPr>
@@ -19992,6 +20488,10 @@
             <a:tailEnd type="triangle"/>
           </a:ln>
         </p:spPr>
+        <p:txBody>
+          <a:bodyPr/>
+          <a:p/>
+        </p:txBody>
       </p:sp>
       <p:sp>
         <p:nvSpPr>
@@ -20014,6 +20514,10 @@
           </a:solidFill>
           <a:ln/>
         </p:spPr>
+        <p:txBody>
+          <a:bodyPr/>
+          <a:p/>
+        </p:txBody>
       </p:sp>
       <p:sp>
         <p:nvSpPr>
@@ -20077,6 +20581,10 @@
             <a:tailEnd type="triangle"/>
           </a:ln>
         </p:spPr>
+        <p:txBody>
+          <a:bodyPr/>
+          <a:p/>
+        </p:txBody>
       </p:sp>
       <p:sp>
         <p:nvSpPr>
@@ -20099,6 +20607,10 @@
           </a:solidFill>
           <a:ln/>
         </p:spPr>
+        <p:txBody>
+          <a:bodyPr/>
+          <a:p/>
+        </p:txBody>
       </p:sp>
       <p:sp>
         <p:nvSpPr>
@@ -20231,6 +20743,10 @@
             </a:outerShdw>
           </a:effectLst>
         </p:spPr>
+        <p:txBody>
+          <a:bodyPr/>
+          <a:p/>
+        </p:txBody>
       </p:sp>
       <p:sp>
         <p:nvSpPr>
@@ -20405,6 +20921,10 @@
             </a:outerShdw>
           </a:effectLst>
         </p:spPr>
+        <p:txBody>
+          <a:bodyPr/>
+          <a:p/>
+        </p:txBody>
       </p:sp>
       <p:sp>
         <p:nvSpPr>
@@ -20535,6 +21055,10 @@
           </a:solidFill>
           <a:ln/>
         </p:spPr>
+        <p:txBody>
+          <a:bodyPr/>
+          <a:p/>
+        </p:txBody>
       </p:sp>
       <p:sp>
         <p:nvSpPr>
@@ -20686,7 +21210,7 @@
                 <a:ea typeface="微软雅黑" pitchFamily="34" charset="-122"/>
                 <a:cs typeface="微软雅黑" pitchFamily="34" charset="-120"/>
               </a:rPr>
-              <a:t>帮扶管理信息系统 v1.12.8</a:t>
+              <a:t>帮扶管理信息系统 v1.12.9</a:t>
             </a:r>
             <a:endParaRPr lang="en-US" sz="1050" dirty="0"/>
           </a:p>
@@ -20711,6 +21235,10 @@
           </a:solidFill>
           <a:ln/>
         </p:spPr>
+        <p:txBody>
+          <a:bodyPr/>
+          <a:p/>
+        </p:txBody>
       </p:sp>
       <p:sp>
         <p:nvSpPr>
@@ -20809,6 +21337,10 @@
           </a:solidFill>
           <a:ln/>
         </p:spPr>
+        <p:txBody>
+          <a:bodyPr/>
+          <a:p/>
+        </p:txBody>
       </p:sp>
       <p:sp>
         <p:nvSpPr>
@@ -20907,6 +21439,10 @@
           </a:solidFill>
           <a:ln/>
         </p:spPr>
+        <p:txBody>
+          <a:bodyPr/>
+          <a:p/>
+        </p:txBody>
       </p:sp>
       <p:sp>
         <p:nvSpPr>
@@ -21005,6 +21541,10 @@
           </a:solidFill>
           <a:ln/>
         </p:spPr>
+        <p:txBody>
+          <a:bodyPr/>
+          <a:p/>
+        </p:txBody>
       </p:sp>
       <p:sp>
         <p:nvSpPr>
@@ -21103,6 +21643,10 @@
           </a:solidFill>
           <a:ln/>
         </p:spPr>
+        <p:txBody>
+          <a:bodyPr/>
+          <a:p/>
+        </p:txBody>
       </p:sp>
       <p:sp>
         <p:nvSpPr>
@@ -21201,6 +21745,10 @@
           </a:solidFill>
           <a:ln/>
         </p:spPr>
+        <p:txBody>
+          <a:bodyPr/>
+          <a:p/>
+        </p:txBody>
       </p:sp>
       <p:sp>
         <p:nvSpPr>
@@ -21625,6 +22173,10 @@
           </a:solidFill>
           <a:ln/>
         </p:spPr>
+        <p:txBody>
+          <a:bodyPr/>
+          <a:p/>
+        </p:txBody>
       </p:sp>
       <p:sp>
         <p:nvSpPr>
@@ -21776,7 +22328,7 @@
                 <a:ea typeface="微软雅黑" pitchFamily="34" charset="-122"/>
                 <a:cs typeface="微软雅黑" pitchFamily="34" charset="-120"/>
               </a:rPr>
-              <a:t>帮扶管理信息系统 v1.12.8</a:t>
+              <a:t>帮扶管理信息系统 v1.12.9</a:t>
             </a:r>
             <a:endParaRPr lang="en-US" sz="1050" dirty="0"/>
           </a:p>
@@ -21801,6 +22353,10 @@
           </a:solidFill>
           <a:ln/>
         </p:spPr>
+        <p:txBody>
+          <a:bodyPr/>
+          <a:p/>
+        </p:txBody>
       </p:sp>
       <p:sp>
         <p:nvSpPr>
@@ -21860,6 +22416,10 @@
           </a:solidFill>
           <a:ln/>
         </p:spPr>
+        <p:txBody>
+          <a:bodyPr/>
+          <a:p/>
+        </p:txBody>
       </p:sp>
       <p:sp>
         <p:nvSpPr>
@@ -21919,6 +22479,10 @@
           </a:solidFill>
           <a:ln/>
         </p:spPr>
+        <p:txBody>
+          <a:bodyPr/>
+          <a:p/>
+        </p:txBody>
       </p:sp>
       <p:sp>
         <p:nvSpPr>
@@ -21978,6 +22542,10 @@
           </a:solidFill>
           <a:ln/>
         </p:spPr>
+        <p:txBody>
+          <a:bodyPr/>
+          <a:p/>
+        </p:txBody>
       </p:sp>
       <p:sp>
         <p:nvSpPr>
@@ -22037,6 +22605,10 @@
           </a:solidFill>
           <a:ln/>
         </p:spPr>
+        <p:txBody>
+          <a:bodyPr/>
+          <a:p/>
+        </p:txBody>
       </p:sp>
       <p:sp>
         <p:nvSpPr>
@@ -22570,6 +23142,10 @@
           </a:solidFill>
           <a:ln/>
         </p:spPr>
+        <p:txBody>
+          <a:bodyPr/>
+          <a:p/>
+        </p:txBody>
       </p:sp>
       <p:sp>
         <p:nvSpPr>
@@ -22721,7 +23297,7 @@
                 <a:ea typeface="微软雅黑" pitchFamily="34" charset="-122"/>
                 <a:cs typeface="微软雅黑" pitchFamily="34" charset="-120"/>
               </a:rPr>
-              <a:t>帮扶管理信息系统 v1.12.8</a:t>
+              <a:t>帮扶管理信息系统 v1.12.9</a:t>
             </a:r>
             <a:endParaRPr lang="en-US" sz="1050" dirty="0"/>
           </a:p>
@@ -22810,6 +23386,10 @@
             </a:outerShdw>
           </a:effectLst>
         </p:spPr>
+        <p:txBody>
+          <a:bodyPr/>
+          <a:p/>
+        </p:txBody>
       </p:sp>
       <p:sp>
         <p:nvSpPr>
@@ -23028,6 +23608,10 @@
           </a:solidFill>
           <a:ln/>
         </p:spPr>
+        <p:txBody>
+          <a:bodyPr/>
+          <a:p/>
+        </p:txBody>
       </p:sp>
       <p:sp>
         <p:nvSpPr>
@@ -23179,7 +23763,7 @@
                 <a:ea typeface="微软雅黑" pitchFamily="34" charset="-122"/>
                 <a:cs typeface="微软雅黑" pitchFamily="34" charset="-120"/>
               </a:rPr>
-              <a:t>帮扶管理信息系统 v1.12.8</a:t>
+              <a:t>帮扶管理信息系统 v1.12.9</a:t>
             </a:r>
             <a:endParaRPr lang="en-US" sz="1050" dirty="0"/>
           </a:p>
@@ -23206,6 +23790,10 @@
           </a:solidFill>
           <a:ln/>
         </p:spPr>
+        <p:txBody>
+          <a:bodyPr/>
+          <a:p/>
+        </p:txBody>
       </p:sp>
       <p:sp>
         <p:nvSpPr>
@@ -23306,6 +23894,10 @@
           </a:solidFill>
           <a:ln/>
         </p:spPr>
+        <p:txBody>
+          <a:bodyPr/>
+          <a:p/>
+        </p:txBody>
       </p:sp>
       <p:sp>
         <p:nvSpPr>
@@ -23406,6 +23998,10 @@
           </a:solidFill>
           <a:ln/>
         </p:spPr>
+        <p:txBody>
+          <a:bodyPr/>
+          <a:p/>
+        </p:txBody>
       </p:sp>
       <p:sp>
         <p:nvSpPr>
@@ -23506,6 +24102,10 @@
           </a:solidFill>
           <a:ln/>
         </p:spPr>
+        <p:txBody>
+          <a:bodyPr/>
+          <a:p/>
+        </p:txBody>
       </p:sp>
       <p:sp>
         <p:nvSpPr>
@@ -23675,6 +24275,10 @@
           </a:solidFill>
           <a:ln/>
         </p:spPr>
+        <p:txBody>
+          <a:bodyPr/>
+          <a:p/>
+        </p:txBody>
       </p:sp>
       <p:sp>
         <p:nvSpPr>
@@ -23826,7 +24430,7 @@
                 <a:ea typeface="微软雅黑" pitchFamily="34" charset="-122"/>
                 <a:cs typeface="微软雅黑" pitchFamily="34" charset="-120"/>
               </a:rPr>
-              <a:t>帮扶管理信息系统 v1.12.8</a:t>
+              <a:t>帮扶管理信息系统 v1.12.9</a:t>
             </a:r>
             <a:endParaRPr lang="en-US" sz="1050" dirty="0"/>
           </a:p>
@@ -23860,6 +24464,10 @@
             </a:outerShdw>
           </a:effectLst>
         </p:spPr>
+        <p:txBody>
+          <a:bodyPr/>
+          <a:p/>
+        </p:txBody>
       </p:sp>
       <p:sp>
         <p:nvSpPr>
@@ -24055,6 +24663,10 @@
             </a:outerShdw>
           </a:effectLst>
         </p:spPr>
+        <p:txBody>
+          <a:bodyPr/>
+          <a:p/>
+        </p:txBody>
       </p:sp>
       <p:sp>
         <p:nvSpPr>
@@ -24273,6 +24885,10 @@
           </a:solidFill>
           <a:ln/>
         </p:spPr>
+        <p:txBody>
+          <a:bodyPr/>
+          <a:p/>
+        </p:txBody>
       </p:sp>
       <p:sp>
         <p:nvSpPr>
@@ -24424,7 +25040,7 @@
                 <a:ea typeface="微软雅黑" pitchFamily="34" charset="-122"/>
                 <a:cs typeface="微软雅黑" pitchFamily="34" charset="-120"/>
               </a:rPr>
-              <a:t>帮扶管理信息系统 v1.12.8</a:t>
+              <a:t>帮扶管理信息系统 v1.12.9</a:t>
             </a:r>
             <a:endParaRPr lang="en-US" sz="1050" dirty="0"/>
           </a:p>
@@ -24458,6 +25074,10 @@
             </a:outerShdw>
           </a:effectLst>
         </p:spPr>
+        <p:txBody>
+          <a:bodyPr/>
+          <a:p/>
+        </p:txBody>
       </p:sp>
       <p:sp>
         <p:nvSpPr>
@@ -24653,6 +25273,10 @@
             </a:outerShdw>
           </a:effectLst>
         </p:spPr>
+        <p:txBody>
+          <a:bodyPr/>
+          <a:p/>
+        </p:txBody>
       </p:sp>
       <p:sp>
         <p:nvSpPr>
@@ -25186,6 +25810,10 @@
           </a:solidFill>
           <a:ln/>
         </p:spPr>
+        <p:txBody>
+          <a:bodyPr/>
+          <a:p/>
+        </p:txBody>
       </p:sp>
       <p:sp>
         <p:nvSpPr>
@@ -25337,7 +25965,7 @@
                 <a:ea typeface="微软雅黑" pitchFamily="34" charset="-122"/>
                 <a:cs typeface="微软雅黑" pitchFamily="34" charset="-120"/>
               </a:rPr>
-              <a:t>帮扶管理信息系统 v1.12.8</a:t>
+              <a:t>帮扶管理信息系统 v1.12.9</a:t>
             </a:r>
             <a:endParaRPr lang="en-US" sz="1050" dirty="0"/>
           </a:p>
@@ -25371,6 +25999,10 @@
             </a:outerShdw>
           </a:effectLst>
         </p:spPr>
+        <p:txBody>
+          <a:bodyPr/>
+          <a:p/>
+        </p:txBody>
       </p:sp>
       <p:sp>
         <p:nvSpPr>
@@ -25432,6 +26064,10 @@
           </a:solidFill>
           <a:ln/>
         </p:spPr>
+        <p:txBody>
+          <a:bodyPr/>
+          <a:p/>
+        </p:txBody>
       </p:sp>
       <p:sp>
         <p:nvSpPr>
@@ -25634,6 +26270,10 @@
             </a:outerShdw>
           </a:effectLst>
         </p:spPr>
+        <p:txBody>
+          <a:bodyPr/>
+          <a:p/>
+        </p:txBody>
       </p:sp>
       <p:sp>
         <p:nvSpPr>
@@ -25695,6 +26335,10 @@
           </a:solidFill>
           <a:ln/>
         </p:spPr>
+        <p:txBody>
+          <a:bodyPr/>
+          <a:p/>
+        </p:txBody>
       </p:sp>
       <p:sp>
         <p:nvSpPr>
@@ -25897,6 +26541,10 @@
             </a:outerShdw>
           </a:effectLst>
         </p:spPr>
+        <p:txBody>
+          <a:bodyPr/>
+          <a:p/>
+        </p:txBody>
       </p:sp>
       <p:sp>
         <p:nvSpPr>
@@ -25958,6 +26606,10 @@
           </a:solidFill>
           <a:ln/>
         </p:spPr>
+        <p:txBody>
+          <a:bodyPr/>
+          <a:p/>
+        </p:txBody>
       </p:sp>
       <p:sp>
         <p:nvSpPr>
@@ -26222,6 +26874,10 @@
           </a:solidFill>
           <a:ln/>
         </p:spPr>
+        <p:txBody>
+          <a:bodyPr/>
+          <a:p/>
+        </p:txBody>
       </p:sp>
       <p:sp>
         <p:nvSpPr>
@@ -26373,7 +27029,7 @@
                 <a:ea typeface="微软雅黑" pitchFamily="34" charset="-122"/>
                 <a:cs typeface="微软雅黑" pitchFamily="34" charset="-120"/>
               </a:rPr>
-              <a:t>帮扶管理信息系统 v1.12.8</a:t>
+              <a:t>帮扶管理信息系统 v1.12.9</a:t>
             </a:r>
             <a:endParaRPr lang="en-US" sz="1050" dirty="0"/>
           </a:p>
@@ -26407,6 +27063,10 @@
             </a:outerShdw>
           </a:effectLst>
         </p:spPr>
+        <p:txBody>
+          <a:bodyPr/>
+          <a:p/>
+        </p:txBody>
       </p:sp>
       <p:sp>
         <p:nvSpPr>
@@ -26602,6 +27262,10 @@
             </a:outerShdw>
           </a:effectLst>
         </p:spPr>
+        <p:txBody>
+          <a:bodyPr/>
+          <a:p/>
+        </p:txBody>
       </p:sp>
       <p:sp>
         <p:nvSpPr>
@@ -26820,6 +27484,10 @@
           </a:solidFill>
           <a:ln/>
         </p:spPr>
+        <p:txBody>
+          <a:bodyPr/>
+          <a:p/>
+        </p:txBody>
       </p:sp>
       <p:sp>
         <p:nvSpPr>
@@ -26971,7 +27639,7 @@
                 <a:ea typeface="微软雅黑" pitchFamily="34" charset="-122"/>
                 <a:cs typeface="微软雅黑" pitchFamily="34" charset="-120"/>
               </a:rPr>
-              <a:t>帮扶管理信息系统 v1.12.8</a:t>
+              <a:t>帮扶管理信息系统 v1.12.9</a:t>
             </a:r>
             <a:endParaRPr lang="en-US" sz="1050" dirty="0"/>
           </a:p>
@@ -26999,6 +27667,10 @@
             <a:prstDash val="solid"/>
           </a:ln>
         </p:spPr>
+        <p:txBody>
+          <a:bodyPr/>
+          <a:p/>
+        </p:txBody>
       </p:sp>
       <p:sp>
         <p:nvSpPr>
@@ -27019,6 +27691,10 @@
           </a:solidFill>
           <a:ln/>
         </p:spPr>
+        <p:txBody>
+          <a:bodyPr/>
+          <a:p/>
+        </p:txBody>
       </p:sp>
       <p:sp>
         <p:nvSpPr>
@@ -27156,6 +27832,10 @@
           </a:solidFill>
           <a:ln/>
         </p:spPr>
+        <p:txBody>
+          <a:bodyPr/>
+          <a:p/>
+        </p:txBody>
       </p:sp>
       <p:sp>
         <p:nvSpPr>
@@ -27293,6 +27973,10 @@
           </a:solidFill>
           <a:ln/>
         </p:spPr>
+        <p:txBody>
+          <a:bodyPr/>
+          <a:p/>
+        </p:txBody>
       </p:sp>
       <p:sp>
         <p:nvSpPr>
@@ -27430,6 +28114,10 @@
           </a:solidFill>
           <a:ln/>
         </p:spPr>
+        <p:txBody>
+          <a:bodyPr/>
+          <a:p/>
+        </p:txBody>
       </p:sp>
       <p:sp>
         <p:nvSpPr>
@@ -27567,6 +28255,10 @@
           </a:solidFill>
           <a:ln/>
         </p:spPr>
+        <p:txBody>
+          <a:bodyPr/>
+          <a:p/>
+        </p:txBody>
       </p:sp>
       <p:sp>
         <p:nvSpPr>
@@ -27601,7 +28293,7 @@
                 <a:ea typeface="微软雅黑" pitchFamily="34" charset="-122"/>
                 <a:cs typeface="微软雅黑" pitchFamily="34" charset="-120"/>
               </a:rPr>
-              <a:t>v1.12.8</a:t>
+              <a:t>v1.12.9</a:t>
             </a:r>
             <a:endParaRPr lang="en-US" sz="1500" dirty="0"/>
           </a:p>
@@ -27713,6 +28405,10 @@
             </a:outerShdw>
           </a:effectLst>
         </p:spPr>
+        <p:txBody>
+          <a:bodyPr/>
+          <a:p/>
+        </p:txBody>
       </p:sp>
       <p:sp>
         <p:nvSpPr>
@@ -27747,7 +28443,7 @@
                 <a:ea typeface="微软雅黑" pitchFamily="34" charset="-122"/>
                 <a:cs typeface="微软雅黑" pitchFamily="34" charset="-120"/>
               </a:rPr>
-              <a:t>净效果：11244 后端用例（覆盖率 100%）+ 6051 前端用例全绿；Windows x64 与麒麟 ARM64 两个离线安装包由 GitHub Actions 全自动构建并发布 Release</a:t>
+              <a:t>净效果：11,548 后端用例（覆盖率 100%）+ 6,124 前端用例全绿；Windows x64 与麒麟 ARM64 两个离线安装包由 GitHub Actions 全自动构建并发布 Release</a:t>
             </a:r>
             <a:endParaRPr lang="en-US" sz="1350" dirty="0"/>
           </a:p>
@@ -27804,6 +28500,10 @@
           </a:solidFill>
           <a:ln/>
         </p:spPr>
+        <p:txBody>
+          <a:bodyPr/>
+          <a:p/>
+        </p:txBody>
       </p:sp>
       <p:sp>
         <p:nvSpPr>
@@ -27955,7 +28655,7 @@
                 <a:ea typeface="微软雅黑" pitchFamily="34" charset="-122"/>
                 <a:cs typeface="微软雅黑" pitchFamily="34" charset="-120"/>
               </a:rPr>
-              <a:t>帮扶管理信息系统 v1.12.8</a:t>
+              <a:t>帮扶管理信息系统 v1.12.9</a:t>
             </a:r>
             <a:endParaRPr lang="en-US" sz="1050" dirty="0"/>
           </a:p>
@@ -28019,6 +28719,10 @@
           </a:solidFill>
           <a:ln/>
         </p:spPr>
+        <p:txBody>
+          <a:bodyPr/>
+          <a:p/>
+        </p:txBody>
       </p:sp>
       <p:sp>
         <p:nvSpPr>
@@ -28117,6 +28821,10 @@
           </a:solidFill>
           <a:ln/>
         </p:spPr>
+        <p:txBody>
+          <a:bodyPr/>
+          <a:p/>
+        </p:txBody>
       </p:sp>
       <p:sp>
         <p:nvSpPr>
@@ -28215,6 +28923,10 @@
           </a:solidFill>
           <a:ln/>
         </p:spPr>
+        <p:txBody>
+          <a:bodyPr/>
+          <a:p/>
+        </p:txBody>
       </p:sp>
       <p:sp>
         <p:nvSpPr>
@@ -28345,6 +29057,10 @@
           </a:solidFill>
           <a:ln/>
         </p:spPr>
+        <p:txBody>
+          <a:bodyPr/>
+          <a:p/>
+        </p:txBody>
       </p:sp>
       <p:sp>
         <p:nvSpPr>
@@ -28496,7 +29212,7 @@
                 <a:ea typeface="微软雅黑" pitchFamily="34" charset="-122"/>
                 <a:cs typeface="微软雅黑" pitchFamily="34" charset="-120"/>
               </a:rPr>
-              <a:t>帮扶管理信息系统 v1.12.8</a:t>
+              <a:t>帮扶管理信息系统 v1.12.9</a:t>
             </a:r>
             <a:endParaRPr lang="en-US" sz="1050" dirty="0"/>
           </a:p>
@@ -28530,6 +29246,10 @@
             </a:outerShdw>
           </a:effectLst>
         </p:spPr>
+        <p:txBody>
+          <a:bodyPr/>
+          <a:p/>
+        </p:txBody>
       </p:sp>
       <p:sp>
         <p:nvSpPr>
@@ -28637,6 +29357,10 @@
             </a:outerShdw>
           </a:effectLst>
         </p:spPr>
+        <p:txBody>
+          <a:bodyPr/>
+          <a:p/>
+        </p:txBody>
       </p:sp>
       <p:sp>
         <p:nvSpPr>
@@ -28744,6 +29468,10 @@
             </a:outerShdw>
           </a:effectLst>
         </p:spPr>
+        <p:txBody>
+          <a:bodyPr/>
+          <a:p/>
+        </p:txBody>
       </p:sp>
       <p:sp>
         <p:nvSpPr>
@@ -28851,6 +29579,10 @@
             </a:outerShdw>
           </a:effectLst>
         </p:spPr>
+        <p:txBody>
+          <a:bodyPr/>
+          <a:p/>
+        </p:txBody>
       </p:sp>
       <p:sp>
         <p:nvSpPr>
@@ -28958,6 +29690,10 @@
             </a:outerShdw>
           </a:effectLst>
         </p:spPr>
+        <p:txBody>
+          <a:bodyPr/>
+          <a:p/>
+        </p:txBody>
       </p:sp>
       <p:sp>
         <p:nvSpPr>
@@ -29065,6 +29801,10 @@
             </a:outerShdw>
           </a:effectLst>
         </p:spPr>
+        <p:txBody>
+          <a:bodyPr/>
+          <a:p/>
+        </p:txBody>
       </p:sp>
       <p:sp>
         <p:nvSpPr>
@@ -29195,6 +29935,10 @@
           </a:solidFill>
           <a:ln/>
         </p:spPr>
+        <p:txBody>
+          <a:bodyPr/>
+          <a:p/>
+        </p:txBody>
       </p:sp>
       <p:sp>
         <p:nvSpPr>
@@ -29215,6 +29959,10 @@
           </a:solidFill>
           <a:ln/>
         </p:spPr>
+        <p:txBody>
+          <a:bodyPr/>
+          <a:p/>
+        </p:txBody>
       </p:sp>
       <p:sp>
         <p:nvSpPr>
@@ -29327,7 +30075,7 @@
                 <a:ea typeface="微软雅黑" pitchFamily="34" charset="-122"/>
                 <a:cs typeface="微软雅黑" pitchFamily="34" charset="-120"/>
               </a:rPr>
-              <a:t>帮扶管理信息系统 v1.12.8  ·  仓库：github.com/lzh745200/MRRS  ·  完整文档见 docs/ 目录</a:t>
+              <a:t>帮扶管理信息系统 v1.12.9  ·  仓库：github.com/lzh745200/MRRS  ·  完整文档见 docs/ 目录</a:t>
             </a:r>
             <a:endParaRPr lang="en-US" sz="1350" dirty="0"/>
           </a:p>
@@ -29366,7 +30114,7 @@
                 <a:ea typeface="微软雅黑" pitchFamily="34" charset="-122"/>
                 <a:cs typeface="微软雅黑" pitchFamily="34" charset="-120"/>
               </a:rPr>
-              <a:t>11,244 后端用例（覆盖率 100%）+ 6,051 前端用例 全绿守护 · Windows x64 / 麒麟 ARM64 双平台离线交付</a:t>
+              <a:t>11,548 后端用例（覆盖率 100%）+ 6,124 前端用例 全绿守护 · Windows x64 / 麒麟 ARM64 双平台离线交付</a:t>
             </a:r>
             <a:endParaRPr lang="en-US" sz="1350" dirty="0"/>
           </a:p>
@@ -29423,6 +30171,10 @@
           </a:solidFill>
           <a:ln/>
         </p:spPr>
+        <p:txBody>
+          <a:bodyPr/>
+          <a:p/>
+        </p:txBody>
       </p:sp>
       <p:sp>
         <p:nvSpPr>
@@ -29574,7 +30326,7 @@
                 <a:ea typeface="微软雅黑" pitchFamily="34" charset="-122"/>
                 <a:cs typeface="微软雅黑" pitchFamily="34" charset="-120"/>
               </a:rPr>
-              <a:t>帮扶管理信息系统 v1.12.8</a:t>
+              <a:t>帮扶管理信息系统 v1.12.9</a:t>
             </a:r>
             <a:endParaRPr lang="en-US" sz="1050" dirty="0"/>
           </a:p>
@@ -29608,6 +30360,10 @@
             </a:outerShdw>
           </a:effectLst>
         </p:spPr>
+        <p:txBody>
+          <a:bodyPr/>
+          <a:p/>
+        </p:txBody>
       </p:sp>
       <p:sp>
         <p:nvSpPr>
@@ -29628,6 +30384,10 @@
           </a:solidFill>
           <a:ln/>
         </p:spPr>
+        <p:txBody>
+          <a:bodyPr/>
+          <a:p/>
+        </p:txBody>
       </p:sp>
       <p:sp>
         <p:nvSpPr>
@@ -29735,6 +30495,10 @@
             </a:outerShdw>
           </a:effectLst>
         </p:spPr>
+        <p:txBody>
+          <a:bodyPr/>
+          <a:p/>
+        </p:txBody>
       </p:sp>
       <p:sp>
         <p:nvSpPr>
@@ -29755,6 +30519,10 @@
           </a:solidFill>
           <a:ln/>
         </p:spPr>
+        <p:txBody>
+          <a:bodyPr/>
+          <a:p/>
+        </p:txBody>
       </p:sp>
       <p:sp>
         <p:nvSpPr>
@@ -29862,6 +30630,10 @@
             </a:outerShdw>
           </a:effectLst>
         </p:spPr>
+        <p:txBody>
+          <a:bodyPr/>
+          <a:p/>
+        </p:txBody>
       </p:sp>
       <p:sp>
         <p:nvSpPr>
@@ -29882,6 +30654,10 @@
           </a:solidFill>
           <a:ln/>
         </p:spPr>
+        <p:txBody>
+          <a:bodyPr/>
+          <a:p/>
+        </p:txBody>
       </p:sp>
       <p:sp>
         <p:nvSpPr>
@@ -29989,6 +30765,10 @@
             </a:outerShdw>
           </a:effectLst>
         </p:spPr>
+        <p:txBody>
+          <a:bodyPr/>
+          <a:p/>
+        </p:txBody>
       </p:sp>
       <p:sp>
         <p:nvSpPr>
@@ -30009,6 +30789,10 @@
           </a:solidFill>
           <a:ln/>
         </p:spPr>
+        <p:txBody>
+          <a:bodyPr/>
+          <a:p/>
+        </p:txBody>
       </p:sp>
       <p:sp>
         <p:nvSpPr>
@@ -30139,6 +30923,10 @@
           </a:solidFill>
           <a:ln/>
         </p:spPr>
+        <p:txBody>
+          <a:bodyPr/>
+          <a:p/>
+        </p:txBody>
       </p:sp>
       <p:sp>
         <p:nvSpPr>
@@ -30290,7 +31078,7 @@
                 <a:ea typeface="微软雅黑" pitchFamily="34" charset="-122"/>
                 <a:cs typeface="微软雅黑" pitchFamily="34" charset="-120"/>
               </a:rPr>
-              <a:t>帮扶管理信息系统 v1.12.8</a:t>
+              <a:t>帮扶管理信息系统 v1.12.9</a:t>
             </a:r>
             <a:endParaRPr lang="en-US" sz="1050" dirty="0"/>
           </a:p>
@@ -30329,7 +31117,7 @@
                 <a:ea typeface="微软雅黑" pitchFamily="34" charset="-122"/>
                 <a:cs typeface="微软雅黑" pitchFamily="34" charset="-120"/>
               </a:rPr>
-              <a:t>10,142</a:t>
+              <a:t>11,548</a:t>
             </a:r>
             <a:endParaRPr lang="en-US" sz="4000" dirty="0"/>
           </a:p>
@@ -30407,7 +31195,7 @@
                 <a:ea typeface="微软雅黑" pitchFamily="34" charset="-122"/>
                 <a:cs typeface="微软雅黑" pitchFamily="34" charset="-120"/>
               </a:rPr>
-              <a:t>5,691</a:t>
+              <a:t>6,124</a:t>
             </a:r>
             <a:endParaRPr lang="en-US" sz="4000" dirty="0"/>
           </a:p>
@@ -30630,6 +31418,10 @@
             <a:prstDash val="solid"/>
           </a:ln>
         </p:spPr>
+        <p:txBody>
+          <a:bodyPr/>
+          <a:p/>
+        </p:txBody>
       </p:sp>
       <p:sp>
         <p:nvSpPr>
@@ -30976,7 +31768,7 @@
                 <a:ea typeface="微软雅黑" pitchFamily="34" charset="-122"/>
                 <a:cs typeface="微软雅黑" pitchFamily="34" charset="-120"/>
               </a:rPr>
-              <a:t>数据来源：仓库实测（2026-09-14，v1.12.8）—— 后端 11244 用例全绿 / 覆盖率 100% · 前端 6051 用例全绿 · flake8 0 · bandit 0 中高危 · vue-tsc 0 · eslint 0 警告</a:t>
+              <a:t>数据来源：仓库实测（2026-09-30，v1.12.9）—— 后端 11,548 用例全绿 / 覆盖率 100% · 前端 6,124 用例全绿 · flake8 0 · bandit 0 中高危 · vue-tsc 0 · eslint 0 警告</a:t>
             </a:r>
             <a:endParaRPr lang="en-US" sz="1200" dirty="0"/>
           </a:p>
@@ -31327,6 +32119,10 @@
           </a:solidFill>
           <a:ln/>
         </p:spPr>
+        <p:txBody>
+          <a:bodyPr/>
+          <a:p/>
+        </p:txBody>
       </p:sp>
       <p:sp>
         <p:nvSpPr>
@@ -31478,7 +32274,7 @@
                 <a:ea typeface="微软雅黑" pitchFamily="34" charset="-122"/>
                 <a:cs typeface="微软雅黑" pitchFamily="34" charset="-120"/>
               </a:rPr>
-              <a:t>帮扶管理信息系统 v1.12.8</a:t>
+              <a:t>帮扶管理信息系统 v1.12.9</a:t>
             </a:r>
             <a:endParaRPr lang="en-US" sz="1050" dirty="0"/>
           </a:p>
@@ -31512,6 +32308,10 @@
             </a:outerShdw>
           </a:effectLst>
         </p:spPr>
+        <p:txBody>
+          <a:bodyPr/>
+          <a:p/>
+        </p:txBody>
       </p:sp>
       <p:sp>
         <p:nvSpPr>
@@ -31725,6 +32525,10 @@
             </a:outerShdw>
           </a:effectLst>
         </p:spPr>
+        <p:txBody>
+          <a:bodyPr/>
+          <a:p/>
+        </p:txBody>
       </p:sp>
       <p:sp>
         <p:nvSpPr>
@@ -31938,6 +32742,10 @@
             </a:outerShdw>
           </a:effectLst>
         </p:spPr>
+        <p:txBody>
+          <a:bodyPr/>
+          <a:p/>
+        </p:txBody>
       </p:sp>
       <p:sp>
         <p:nvSpPr>
@@ -32151,6 +32959,10 @@
             </a:outerShdw>
           </a:effectLst>
         </p:spPr>
+        <p:txBody>
+          <a:bodyPr/>
+          <a:p/>
+        </p:txBody>
       </p:sp>
       <p:sp>
         <p:nvSpPr>
@@ -32330,7 +33142,7 @@
                 <a:ea typeface="微软雅黑" pitchFamily="34" charset="-122"/>
                 <a:cs typeface="微软雅黑" pitchFamily="34" charset="-120"/>
               </a:rPr>
-              <a:t>43 个 Alembic 迁移版本</a:t>
+              <a:t>44 个 Alembic 迁移版本</a:t>
             </a:r>
             <a:endParaRPr lang="en-US" sz="1200" dirty="0"/>
           </a:p>
@@ -32387,6 +33199,10 @@
           </a:solidFill>
           <a:ln/>
         </p:spPr>
+        <p:txBody>
+          <a:bodyPr/>
+          <a:p/>
+        </p:txBody>
       </p:sp>
       <p:sp>
         <p:nvSpPr>
@@ -32538,7 +33354,7 @@
                 <a:ea typeface="微软雅黑" pitchFamily="34" charset="-122"/>
                 <a:cs typeface="微软雅黑" pitchFamily="34" charset="-120"/>
               </a:rPr>
-              <a:t>帮扶管理信息系统 v1.12.8</a:t>
+              <a:t>帮扶管理信息系统 v1.12.9</a:t>
             </a:r>
             <a:endParaRPr lang="en-US" sz="1050" dirty="0"/>
           </a:p>
@@ -32565,6 +33381,10 @@
           </a:solidFill>
           <a:ln/>
         </p:spPr>
+        <p:txBody>
+          <a:bodyPr/>
+          <a:p/>
+        </p:txBody>
       </p:sp>
       <p:sp>
         <p:nvSpPr>
@@ -32667,6 +33487,10 @@
             <a:tailEnd type="triangle"/>
           </a:ln>
         </p:spPr>
+        <p:txBody>
+          <a:bodyPr/>
+          <a:p/>
+        </p:txBody>
       </p:sp>
       <p:sp>
         <p:nvSpPr>
@@ -32689,6 +33513,10 @@
           </a:solidFill>
           <a:ln/>
         </p:spPr>
+        <p:txBody>
+          <a:bodyPr/>
+          <a:p/>
+        </p:txBody>
       </p:sp>
       <p:sp>
         <p:nvSpPr>
@@ -32791,6 +33619,10 @@
             <a:tailEnd type="triangle"/>
           </a:ln>
         </p:spPr>
+        <p:txBody>
+          <a:bodyPr/>
+          <a:p/>
+        </p:txBody>
       </p:sp>
       <p:sp>
         <p:nvSpPr>
@@ -32813,6 +33645,10 @@
           </a:solidFill>
           <a:ln/>
         </p:spPr>
+        <p:txBody>
+          <a:bodyPr/>
+          <a:p/>
+        </p:txBody>
       </p:sp>
       <p:sp>
         <p:nvSpPr>
@@ -32915,6 +33751,10 @@
             <a:tailEnd type="triangle"/>
           </a:ln>
         </p:spPr>
+        <p:txBody>
+          <a:bodyPr/>
+          <a:p/>
+        </p:txBody>
       </p:sp>
       <p:sp>
         <p:nvSpPr>
@@ -32937,6 +33777,10 @@
           </a:solidFill>
           <a:ln/>
         </p:spPr>
+        <p:txBody>
+          <a:bodyPr/>
+          <a:p/>
+        </p:txBody>
       </p:sp>
       <p:sp>
         <p:nvSpPr>

--- a/docs/帮扶管理信息系统介绍.pptx
+++ b/docs/帮扶管理信息系统介绍.pptx
@@ -249,10 +249,10 @@
                 <c:formatCode>General</c:formatCode>
                 <c:ptCount val="2"/>
                 <c:pt idx="0">
-                  <c:v>10142</c:v>
+                  <c:v>11868</c:v>
                 </c:pt>
                 <c:pt idx="1">
-                  <c:v>5691</c:v>
+                  <c:v>6287</c:v>
                 </c:pt>
               </c:numCache>
             </c:numRef>
@@ -4701,10 +4701,6 @@
           </a:solidFill>
           <a:ln/>
         </p:spPr>
-        <p:txBody>
-          <a:bodyPr/>
-          <a:p/>
-        </p:txBody>
       </p:sp>
       <p:sp>
         <p:nvSpPr>
@@ -4725,10 +4721,6 @@
           </a:solidFill>
           <a:ln/>
         </p:spPr>
-        <p:txBody>
-          <a:bodyPr/>
-          <a:p/>
-        </p:txBody>
       </p:sp>
       <p:sp>
         <p:nvSpPr>
@@ -4749,10 +4741,6 @@
           </a:solidFill>
           <a:ln/>
         </p:spPr>
-        <p:txBody>
-          <a:bodyPr/>
-          <a:p/>
-        </p:txBody>
       </p:sp>
       <p:sp>
         <p:nvSpPr>
@@ -4966,7 +4954,7 @@
                 <a:ea typeface="微软雅黑" pitchFamily="34" charset="-122"/>
                 <a:cs typeface="微软雅黑" pitchFamily="34" charset="-120"/>
               </a:rPr>
-              <a:t>V1.12.9  |  2026-09-30  |  FastAPI + Vue 3 + Electron + SQLite</a:t>
+              <a:t>V1.12.9  |  2026-09-14  |  FastAPI + Vue 3 + Electron + SQLite</a:t>
             </a:r>
             <a:endParaRPr lang="en-US" sz="1250" dirty="0"/>
           </a:p>
@@ -5023,10 +5011,6 @@
           </a:solidFill>
           <a:ln/>
         </p:spPr>
-        <p:txBody>
-          <a:bodyPr/>
-          <a:p/>
-        </p:txBody>
       </p:sp>
       <p:sp>
         <p:nvSpPr>
@@ -5212,10 +5196,6 @@
             </a:outerShdw>
           </a:effectLst>
         </p:spPr>
-        <p:txBody>
-          <a:bodyPr/>
-          <a:p/>
-        </p:txBody>
       </p:sp>
       <p:sp>
         <p:nvSpPr>
@@ -5356,7 +5336,7 @@
                 <a:ea typeface="微软雅黑" pitchFamily="34" charset="-122"/>
                 <a:cs typeface="微软雅黑" pitchFamily="34" charset="-120"/>
               </a:rPr>
-              <a:t>302 个测试文件 · 6,124 个用例</a:t>
+              <a:t>302 个测试文件 · 6,287 个用例</a:t>
             </a:r>
             <a:endParaRPr lang="en-US" sz="1350" dirty="0"/>
           </a:p>
@@ -5411,10 +5391,6 @@
             </a:outerShdw>
           </a:effectLst>
         </p:spPr>
-        <p:txBody>
-          <a:bodyPr/>
-          <a:p/>
-        </p:txBody>
       </p:sp>
       <p:sp>
         <p:nvSpPr>
@@ -5633,10 +5609,6 @@
           </a:solidFill>
           <a:ln/>
         </p:spPr>
-        <p:txBody>
-          <a:bodyPr/>
-          <a:p/>
-        </p:txBody>
       </p:sp>
       <p:sp>
         <p:nvSpPr>
@@ -5813,10 +5785,6 @@
           </a:solidFill>
           <a:ln/>
         </p:spPr>
-        <p:txBody>
-          <a:bodyPr/>
-          <a:p/>
-        </p:txBody>
       </p:sp>
       <p:sp>
         <p:nvSpPr>
@@ -5915,10 +5883,6 @@
           </a:solidFill>
           <a:ln/>
         </p:spPr>
-        <p:txBody>
-          <a:bodyPr/>
-          <a:p/>
-        </p:txBody>
       </p:sp>
       <p:sp>
         <p:nvSpPr>
@@ -6017,10 +5981,6 @@
           </a:solidFill>
           <a:ln/>
         </p:spPr>
-        <p:txBody>
-          <a:bodyPr/>
-          <a:p/>
-        </p:txBody>
       </p:sp>
       <p:sp>
         <p:nvSpPr>
@@ -6119,10 +6079,6 @@
           </a:solidFill>
           <a:ln/>
         </p:spPr>
-        <p:txBody>
-          <a:bodyPr/>
-          <a:p/>
-        </p:txBody>
       </p:sp>
       <p:sp>
         <p:nvSpPr>
@@ -6221,10 +6177,6 @@
           </a:solidFill>
           <a:ln/>
         </p:spPr>
-        <p:txBody>
-          <a:bodyPr/>
-          <a:p/>
-        </p:txBody>
       </p:sp>
       <p:sp>
         <p:nvSpPr>
@@ -6332,10 +6284,6 @@
             </a:outerShdw>
           </a:effectLst>
         </p:spPr>
-        <p:txBody>
-          <a:bodyPr/>
-          <a:p/>
-        </p:txBody>
       </p:sp>
       <p:sp>
         <p:nvSpPr>
@@ -6533,10 +6481,6 @@
           </a:solidFill>
           <a:ln/>
         </p:spPr>
-        <p:txBody>
-          <a:bodyPr/>
-          <a:p/>
-        </p:txBody>
       </p:sp>
       <p:sp>
         <p:nvSpPr>
@@ -6722,10 +6666,6 @@
             </a:outerShdw>
           </a:effectLst>
         </p:spPr>
-        <p:txBody>
-          <a:bodyPr/>
-          <a:p/>
-        </p:txBody>
       </p:sp>
       <p:sp>
         <p:nvSpPr>
@@ -6866,7 +6806,7 @@
                 <a:ea typeface="微软雅黑" pitchFamily="34" charset="-122"/>
                 <a:cs typeface="微软雅黑" pitchFamily="34" charset="-120"/>
               </a:rPr>
-              <a:t>44 个 Alembic 迁移：含 PII 存量回填（幂等可重跑）与外键守护</a:t>
+              <a:t>37 个 Alembic 迁移：含 PII 存量回填（幂等可重跑）与外键守护</a:t>
             </a:r>
             <a:endParaRPr lang="en-US" sz="1350" dirty="0"/>
           </a:p>
@@ -6921,10 +6861,6 @@
             </a:outerShdw>
           </a:effectLst>
         </p:spPr>
-        <p:txBody>
-          <a:bodyPr/>
-          <a:p/>
-        </p:txBody>
       </p:sp>
       <p:sp>
         <p:nvSpPr>
@@ -7143,10 +7079,6 @@
           </a:solidFill>
           <a:ln/>
         </p:spPr>
-        <p:txBody>
-          <a:bodyPr/>
-          <a:p/>
-        </p:txBody>
       </p:sp>
       <p:sp>
         <p:nvSpPr>
@@ -7332,10 +7264,6 @@
             </a:outerShdw>
           </a:effectLst>
         </p:spPr>
-        <p:txBody>
-          <a:bodyPr/>
-          <a:p/>
-        </p:txBody>
       </p:sp>
       <p:sp>
         <p:nvSpPr>
@@ -7489,10 +7417,6 @@
             </a:outerShdw>
           </a:effectLst>
         </p:spPr>
-        <p:txBody>
-          <a:bodyPr/>
-          <a:p/>
-        </p:txBody>
       </p:sp>
       <p:sp>
         <p:nvSpPr>
@@ -7639,10 +7563,6 @@
           </a:solidFill>
           <a:ln/>
         </p:spPr>
-        <p:txBody>
-          <a:bodyPr/>
-          <a:p/>
-        </p:txBody>
       </p:sp>
       <p:sp>
         <p:nvSpPr>
@@ -7706,10 +7626,6 @@
             <a:tailEnd type="triangle"/>
           </a:ln>
         </p:spPr>
-        <p:txBody>
-          <a:bodyPr/>
-          <a:p/>
-        </p:txBody>
       </p:sp>
       <p:sp>
         <p:nvSpPr>
@@ -7732,10 +7648,6 @@
           </a:solidFill>
           <a:ln/>
         </p:spPr>
-        <p:txBody>
-          <a:bodyPr/>
-          <a:p/>
-        </p:txBody>
       </p:sp>
       <p:sp>
         <p:nvSpPr>
@@ -7799,10 +7711,6 @@
             <a:tailEnd type="triangle"/>
           </a:ln>
         </p:spPr>
-        <p:txBody>
-          <a:bodyPr/>
-          <a:p/>
-        </p:txBody>
       </p:sp>
       <p:sp>
         <p:nvSpPr>
@@ -7825,10 +7733,6 @@
           </a:solidFill>
           <a:ln/>
         </p:spPr>
-        <p:txBody>
-          <a:bodyPr/>
-          <a:p/>
-        </p:txBody>
       </p:sp>
       <p:sp>
         <p:nvSpPr>
@@ -7892,10 +7796,6 @@
             <a:tailEnd type="triangle"/>
           </a:ln>
         </p:spPr>
-        <p:txBody>
-          <a:bodyPr/>
-          <a:p/>
-        </p:txBody>
       </p:sp>
       <p:sp>
         <p:nvSpPr>
@@ -7918,10 +7818,6 @@
           </a:solidFill>
           <a:ln/>
         </p:spPr>
-        <p:txBody>
-          <a:bodyPr/>
-          <a:p/>
-        </p:txBody>
       </p:sp>
       <p:sp>
         <p:nvSpPr>
@@ -7985,10 +7881,6 @@
             <a:tailEnd type="triangle"/>
           </a:ln>
         </p:spPr>
-        <p:txBody>
-          <a:bodyPr/>
-          <a:p/>
-        </p:txBody>
       </p:sp>
       <p:sp>
         <p:nvSpPr>
@@ -8011,10 +7903,6 @@
           </a:solidFill>
           <a:ln/>
         </p:spPr>
-        <p:txBody>
-          <a:bodyPr/>
-          <a:p/>
-        </p:txBody>
       </p:sp>
       <p:sp>
         <p:nvSpPr>
@@ -8078,10 +7966,6 @@
             <a:tailEnd type="triangle"/>
           </a:ln>
         </p:spPr>
-        <p:txBody>
-          <a:bodyPr/>
-          <a:p/>
-        </p:txBody>
       </p:sp>
       <p:sp>
         <p:nvSpPr>
@@ -8104,10 +7988,6 @@
           </a:solidFill>
           <a:ln/>
         </p:spPr>
-        <p:txBody>
-          <a:bodyPr/>
-          <a:p/>
-        </p:txBody>
       </p:sp>
       <p:sp>
         <p:nvSpPr>
@@ -8532,10 +8412,6 @@
           </a:solidFill>
           <a:ln/>
         </p:spPr>
-        <p:txBody>
-          <a:bodyPr/>
-          <a:p/>
-        </p:txBody>
       </p:sp>
       <p:sp>
         <p:nvSpPr>
@@ -8721,10 +8597,6 @@
             </a:outerShdw>
           </a:effectLst>
         </p:spPr>
-        <p:txBody>
-          <a:bodyPr/>
-          <a:p/>
-        </p:txBody>
       </p:sp>
       <p:sp>
         <p:nvSpPr>
@@ -8871,10 +8743,6 @@
             </a:outerShdw>
           </a:effectLst>
         </p:spPr>
-        <p:txBody>
-          <a:bodyPr/>
-          <a:p/>
-        </p:txBody>
       </p:sp>
       <p:sp>
         <p:nvSpPr>
@@ -9021,10 +8889,6 @@
             </a:outerShdw>
           </a:effectLst>
         </p:spPr>
-        <p:txBody>
-          <a:bodyPr/>
-          <a:p/>
-        </p:txBody>
       </p:sp>
       <p:sp>
         <p:nvSpPr>
@@ -9171,10 +9035,6 @@
             </a:outerShdw>
           </a:effectLst>
         </p:spPr>
-        <p:txBody>
-          <a:bodyPr/>
-          <a:p/>
-        </p:txBody>
       </p:sp>
       <p:sp>
         <p:nvSpPr>
@@ -9321,10 +9181,6 @@
             </a:outerShdw>
           </a:effectLst>
         </p:spPr>
-        <p:txBody>
-          <a:bodyPr/>
-          <a:p/>
-        </p:txBody>
       </p:sp>
       <p:sp>
         <p:nvSpPr>
@@ -9471,10 +9327,6 @@
             </a:outerShdw>
           </a:effectLst>
         </p:spPr>
-        <p:txBody>
-          <a:bodyPr/>
-          <a:p/>
-        </p:txBody>
       </p:sp>
       <p:sp>
         <p:nvSpPr>
@@ -9683,10 +9535,6 @@
           </a:solidFill>
           <a:ln/>
         </p:spPr>
-        <p:txBody>
-          <a:bodyPr/>
-          <a:p/>
-        </p:txBody>
       </p:sp>
       <p:sp>
         <p:nvSpPr>
@@ -9872,10 +9720,6 @@
             </a:outerShdw>
           </a:effectLst>
         </p:spPr>
-        <p:txBody>
-          <a:bodyPr/>
-          <a:p/>
-        </p:txBody>
       </p:sp>
       <p:sp>
         <p:nvSpPr>
@@ -10071,10 +9915,6 @@
             </a:outerShdw>
           </a:effectLst>
         </p:spPr>
-        <p:txBody>
-          <a:bodyPr/>
-          <a:p/>
-        </p:txBody>
       </p:sp>
       <p:sp>
         <p:nvSpPr>
@@ -10293,10 +10133,6 @@
           </a:solidFill>
           <a:ln/>
         </p:spPr>
-        <p:txBody>
-          <a:bodyPr/>
-          <a:p/>
-        </p:txBody>
       </p:sp>
       <p:sp>
         <p:nvSpPr>
@@ -10475,10 +10311,6 @@
           </a:solidFill>
           <a:ln/>
         </p:spPr>
-        <p:txBody>
-          <a:bodyPr/>
-          <a:p/>
-        </p:txBody>
       </p:sp>
       <p:sp>
         <p:nvSpPr>
@@ -10540,10 +10372,6 @@
           </a:solidFill>
           <a:ln/>
         </p:spPr>
-        <p:txBody>
-          <a:bodyPr/>
-          <a:p/>
-        </p:txBody>
       </p:sp>
       <p:sp>
         <p:nvSpPr>
@@ -10605,10 +10433,6 @@
           </a:solidFill>
           <a:ln/>
         </p:spPr>
-        <p:txBody>
-          <a:bodyPr/>
-          <a:p/>
-        </p:txBody>
       </p:sp>
       <p:sp>
         <p:nvSpPr>
@@ -10670,10 +10494,6 @@
           </a:solidFill>
           <a:ln/>
         </p:spPr>
-        <p:txBody>
-          <a:bodyPr/>
-          <a:p/>
-        </p:txBody>
       </p:sp>
       <p:sp>
         <p:nvSpPr>
@@ -10735,10 +10555,6 @@
           </a:solidFill>
           <a:ln/>
         </p:spPr>
-        <p:txBody>
-          <a:bodyPr/>
-          <a:p/>
-        </p:txBody>
       </p:sp>
       <p:sp>
         <p:nvSpPr>
@@ -10800,10 +10616,6 @@
           </a:solidFill>
           <a:ln/>
         </p:spPr>
-        <p:txBody>
-          <a:bodyPr/>
-          <a:p/>
-        </p:txBody>
       </p:sp>
       <p:sp>
         <p:nvSpPr>
@@ -10865,10 +10677,6 @@
           </a:solidFill>
           <a:ln/>
         </p:spPr>
-        <p:txBody>
-          <a:bodyPr/>
-          <a:p/>
-        </p:txBody>
       </p:sp>
       <p:sp>
         <p:nvSpPr>
@@ -10930,10 +10738,6 @@
           </a:solidFill>
           <a:ln/>
         </p:spPr>
-        <p:txBody>
-          <a:bodyPr/>
-          <a:p/>
-        </p:txBody>
       </p:sp>
       <p:sp>
         <p:nvSpPr>
@@ -11131,10 +10935,6 @@
           </a:solidFill>
           <a:ln/>
         </p:spPr>
-        <p:txBody>
-          <a:bodyPr/>
-          <a:p/>
-        </p:txBody>
       </p:sp>
       <p:sp>
         <p:nvSpPr>
@@ -11311,10 +11111,6 @@
           </a:solidFill>
           <a:ln/>
         </p:spPr>
-        <p:txBody>
-          <a:bodyPr/>
-          <a:p/>
-        </p:txBody>
       </p:sp>
       <p:sp>
         <p:nvSpPr>
@@ -11374,10 +11170,6 @@
           </a:solidFill>
           <a:ln/>
         </p:spPr>
-        <p:txBody>
-          <a:bodyPr/>
-          <a:p/>
-        </p:txBody>
       </p:sp>
       <p:sp>
         <p:nvSpPr>
@@ -11437,10 +11229,6 @@
           </a:solidFill>
           <a:ln/>
         </p:spPr>
-        <p:txBody>
-          <a:bodyPr/>
-          <a:p/>
-        </p:txBody>
       </p:sp>
       <p:sp>
         <p:nvSpPr>
@@ -11500,10 +11288,6 @@
           </a:solidFill>
           <a:ln/>
         </p:spPr>
-        <p:txBody>
-          <a:bodyPr/>
-          <a:p/>
-        </p:txBody>
       </p:sp>
       <p:sp>
         <p:nvSpPr>
@@ -11563,10 +11347,6 @@
           </a:solidFill>
           <a:ln/>
         </p:spPr>
-        <p:txBody>
-          <a:bodyPr/>
-          <a:p/>
-        </p:txBody>
       </p:sp>
       <p:sp>
         <p:nvSpPr>
@@ -11626,10 +11406,6 @@
           </a:solidFill>
           <a:ln/>
         </p:spPr>
-        <p:txBody>
-          <a:bodyPr/>
-          <a:p/>
-        </p:txBody>
       </p:sp>
       <p:sp>
         <p:nvSpPr>
@@ -11848,10 +11624,6 @@
           </a:solidFill>
           <a:ln/>
         </p:spPr>
-        <p:txBody>
-          <a:bodyPr/>
-          <a:p/>
-        </p:txBody>
       </p:sp>
       <p:sp>
         <p:nvSpPr>
@@ -12028,10 +11800,6 @@
           </a:solidFill>
           <a:ln/>
         </p:spPr>
-        <p:txBody>
-          <a:bodyPr/>
-          <a:p/>
-        </p:txBody>
       </p:sp>
       <p:sp>
         <p:nvSpPr>
@@ -12134,10 +11902,6 @@
             <a:tailEnd type="triangle"/>
           </a:ln>
         </p:spPr>
-        <p:txBody>
-          <a:bodyPr/>
-          <a:p/>
-        </p:txBody>
       </p:sp>
       <p:sp>
         <p:nvSpPr>
@@ -12158,10 +11922,6 @@
           </a:solidFill>
           <a:ln/>
         </p:spPr>
-        <p:txBody>
-          <a:bodyPr/>
-          <a:p/>
-        </p:txBody>
       </p:sp>
       <p:sp>
         <p:nvSpPr>
@@ -12264,10 +12024,6 @@
             <a:tailEnd type="triangle"/>
           </a:ln>
         </p:spPr>
-        <p:txBody>
-          <a:bodyPr/>
-          <a:p/>
-        </p:txBody>
       </p:sp>
       <p:sp>
         <p:nvSpPr>
@@ -12288,10 +12044,6 @@
           </a:solidFill>
           <a:ln/>
         </p:spPr>
-        <p:txBody>
-          <a:bodyPr/>
-          <a:p/>
-        </p:txBody>
       </p:sp>
       <p:sp>
         <p:nvSpPr>
@@ -12394,10 +12146,6 @@
             <a:tailEnd type="triangle"/>
           </a:ln>
         </p:spPr>
-        <p:txBody>
-          <a:bodyPr/>
-          <a:p/>
-        </p:txBody>
       </p:sp>
       <p:sp>
         <p:nvSpPr>
@@ -12418,10 +12166,6 @@
           </a:solidFill>
           <a:ln/>
         </p:spPr>
-        <p:txBody>
-          <a:bodyPr/>
-          <a:p/>
-        </p:txBody>
       </p:sp>
       <p:sp>
         <p:nvSpPr>
@@ -12524,10 +12268,6 @@
             <a:tailEnd type="triangle"/>
           </a:ln>
         </p:spPr>
-        <p:txBody>
-          <a:bodyPr/>
-          <a:p/>
-        </p:txBody>
       </p:sp>
       <p:sp>
         <p:nvSpPr>
@@ -12548,10 +12288,6 @@
           </a:solidFill>
           <a:ln/>
         </p:spPr>
-        <p:txBody>
-          <a:bodyPr/>
-          <a:p/>
-        </p:txBody>
       </p:sp>
       <p:sp>
         <p:nvSpPr>
@@ -12654,10 +12390,6 @@
             <a:tailEnd type="triangle"/>
           </a:ln>
         </p:spPr>
-        <p:txBody>
-          <a:bodyPr/>
-          <a:p/>
-        </p:txBody>
       </p:sp>
       <p:sp>
         <p:nvSpPr>
@@ -12678,10 +12410,6 @@
           </a:solidFill>
           <a:ln/>
         </p:spPr>
-        <p:txBody>
-          <a:bodyPr/>
-          <a:p/>
-        </p:txBody>
       </p:sp>
       <p:sp>
         <p:nvSpPr>
@@ -12784,10 +12512,6 @@
             <a:tailEnd type="triangle"/>
           </a:ln>
         </p:spPr>
-        <p:txBody>
-          <a:bodyPr/>
-          <a:p/>
-        </p:txBody>
       </p:sp>
       <p:sp>
         <p:nvSpPr>
@@ -12808,10 +12532,6 @@
           </a:solidFill>
           <a:ln/>
         </p:spPr>
-        <p:txBody>
-          <a:bodyPr/>
-          <a:p/>
-        </p:txBody>
       </p:sp>
       <p:sp>
         <p:nvSpPr>
@@ -12914,10 +12634,6 @@
             <a:tailEnd type="triangle"/>
           </a:ln>
         </p:spPr>
-        <p:txBody>
-          <a:bodyPr/>
-          <a:p/>
-        </p:txBody>
       </p:sp>
       <p:sp>
         <p:nvSpPr>
@@ -12938,10 +12654,6 @@
           </a:solidFill>
           <a:ln/>
         </p:spPr>
-        <p:txBody>
-          <a:bodyPr/>
-          <a:p/>
-        </p:txBody>
       </p:sp>
       <p:sp>
         <p:nvSpPr>
@@ -13049,10 +12761,6 @@
             </a:outerShdw>
           </a:effectLst>
         </p:spPr>
-        <p:txBody>
-          <a:bodyPr/>
-          <a:p/>
-        </p:txBody>
       </p:sp>
       <p:sp>
         <p:nvSpPr>
@@ -13206,10 +12914,6 @@
             </a:outerShdw>
           </a:effectLst>
         </p:spPr>
-        <p:txBody>
-          <a:bodyPr/>
-          <a:p/>
-        </p:txBody>
       </p:sp>
       <p:sp>
         <p:nvSpPr>
@@ -13466,10 +13170,6 @@
           </a:solidFill>
           <a:ln/>
         </p:spPr>
-        <p:txBody>
-          <a:bodyPr/>
-          <a:p/>
-        </p:txBody>
       </p:sp>
       <p:sp>
         <p:nvSpPr>
@@ -13609,10 +13309,6 @@
           </a:solidFill>
           <a:ln/>
         </p:spPr>
-        <p:txBody>
-          <a:bodyPr/>
-          <a:p/>
-        </p:txBody>
       </p:sp>
       <p:sp>
         <p:nvSpPr>
@@ -13752,10 +13448,6 @@
           </a:solidFill>
           <a:ln/>
         </p:spPr>
-        <p:txBody>
-          <a:bodyPr/>
-          <a:p/>
-        </p:txBody>
       </p:sp>
       <p:sp>
         <p:nvSpPr>
@@ -13895,10 +13587,6 @@
           </a:solidFill>
           <a:ln/>
         </p:spPr>
-        <p:txBody>
-          <a:bodyPr/>
-          <a:p/>
-        </p:txBody>
       </p:sp>
       <p:sp>
         <p:nvSpPr>
@@ -14038,10 +13726,6 @@
           </a:solidFill>
           <a:ln/>
         </p:spPr>
-        <p:txBody>
-          <a:bodyPr/>
-          <a:p/>
-        </p:txBody>
       </p:sp>
       <p:sp>
         <p:nvSpPr>
@@ -14154,7 +13838,7 @@
                 <a:ea typeface="微软雅黑" pitchFamily="34" charset="-122"/>
                 <a:cs typeface="微软雅黑" pitchFamily="34" charset="-120"/>
               </a:rPr>
-              <a:t>17,672 项自动化测试 · CI/CD · 依赖自检</a:t>
+              <a:t>17,295 项自动化测试 · CI/CD · 依赖自检</a:t>
             </a:r>
             <a:endParaRPr lang="en-US" sz="1200" dirty="0"/>
           </a:p>
@@ -14181,10 +13865,6 @@
           </a:solidFill>
           <a:ln/>
         </p:spPr>
-        <p:txBody>
-          <a:bodyPr/>
-          <a:p/>
-        </p:txBody>
       </p:sp>
       <p:sp>
         <p:nvSpPr>
@@ -14354,10 +14034,6 @@
           </a:solidFill>
           <a:ln/>
         </p:spPr>
-        <p:txBody>
-          <a:bodyPr/>
-          <a:p/>
-        </p:txBody>
       </p:sp>
       <p:sp>
         <p:nvSpPr>
@@ -14543,10 +14219,6 @@
             </a:outerShdw>
           </a:effectLst>
         </p:spPr>
-        <p:txBody>
-          <a:bodyPr/>
-          <a:p/>
-        </p:txBody>
       </p:sp>
       <p:sp>
         <p:nvSpPr>
@@ -14742,10 +14414,6 @@
             </a:outerShdw>
           </a:effectLst>
         </p:spPr>
-        <p:txBody>
-          <a:bodyPr/>
-          <a:p/>
-        </p:txBody>
       </p:sp>
       <p:sp>
         <p:nvSpPr>
@@ -14964,10 +14632,6 @@
           </a:solidFill>
           <a:ln/>
         </p:spPr>
-        <p:txBody>
-          <a:bodyPr/>
-          <a:p/>
-        </p:txBody>
       </p:sp>
       <p:sp>
         <p:nvSpPr>
@@ -15144,10 +14808,6 @@
           </a:solidFill>
           <a:ln/>
         </p:spPr>
-        <p:txBody>
-          <a:bodyPr/>
-          <a:p/>
-        </p:txBody>
       </p:sp>
       <p:sp>
         <p:nvSpPr>
@@ -15207,10 +14867,6 @@
           </a:solidFill>
           <a:ln/>
         </p:spPr>
-        <p:txBody>
-          <a:bodyPr/>
-          <a:p/>
-        </p:txBody>
       </p:sp>
       <p:sp>
         <p:nvSpPr>
@@ -15270,10 +14926,6 @@
           </a:solidFill>
           <a:ln/>
         </p:spPr>
-        <p:txBody>
-          <a:bodyPr/>
-          <a:p/>
-        </p:txBody>
       </p:sp>
       <p:sp>
         <p:nvSpPr>
@@ -15333,10 +14985,6 @@
           </a:solidFill>
           <a:ln/>
         </p:spPr>
-        <p:txBody>
-          <a:bodyPr/>
-          <a:p/>
-        </p:txBody>
       </p:sp>
       <p:sp>
         <p:nvSpPr>
@@ -15396,10 +15044,6 @@
           </a:solidFill>
           <a:ln/>
         </p:spPr>
-        <p:txBody>
-          <a:bodyPr/>
-          <a:p/>
-        </p:txBody>
       </p:sp>
       <p:sp>
         <p:nvSpPr>
@@ -15618,10 +15262,6 @@
           </a:solidFill>
           <a:ln/>
         </p:spPr>
-        <p:txBody>
-          <a:bodyPr/>
-          <a:p/>
-        </p:txBody>
       </p:sp>
       <p:sp>
         <p:nvSpPr>
@@ -15807,10 +15447,6 @@
             </a:outerShdw>
           </a:effectLst>
         </p:spPr>
-        <p:txBody>
-          <a:bodyPr/>
-          <a:p/>
-        </p:txBody>
       </p:sp>
       <p:sp>
         <p:nvSpPr>
@@ -15985,10 +15621,6 @@
             </a:outerShdw>
           </a:effectLst>
         </p:spPr>
-        <p:txBody>
-          <a:bodyPr/>
-          <a:p/>
-        </p:txBody>
       </p:sp>
       <p:sp>
         <p:nvSpPr>
@@ -16163,10 +15795,6 @@
             </a:outerShdw>
           </a:effectLst>
         </p:spPr>
-        <p:txBody>
-          <a:bodyPr/>
-          <a:p/>
-        </p:txBody>
       </p:sp>
       <p:sp>
         <p:nvSpPr>
@@ -16297,10 +15925,6 @@
           </a:solidFill>
           <a:ln/>
         </p:spPr>
-        <p:txBody>
-          <a:bodyPr/>
-          <a:p/>
-        </p:txBody>
       </p:sp>
       <p:sp>
         <p:nvSpPr>
@@ -16486,10 +16110,6 @@
             </a:outerShdw>
           </a:effectLst>
         </p:spPr>
-        <p:txBody>
-          <a:bodyPr/>
-          <a:p/>
-        </p:txBody>
       </p:sp>
       <p:sp>
         <p:nvSpPr>
@@ -16597,10 +16217,6 @@
             </a:outerShdw>
           </a:effectLst>
         </p:spPr>
-        <p:txBody>
-          <a:bodyPr/>
-          <a:p/>
-        </p:txBody>
       </p:sp>
       <p:sp>
         <p:nvSpPr>
@@ -16708,10 +16324,6 @@
             </a:outerShdw>
           </a:effectLst>
         </p:spPr>
-        <p:txBody>
-          <a:bodyPr/>
-          <a:p/>
-        </p:txBody>
       </p:sp>
       <p:sp>
         <p:nvSpPr>
@@ -16819,10 +16431,6 @@
             </a:outerShdw>
           </a:effectLst>
         </p:spPr>
-        <p:txBody>
-          <a:bodyPr/>
-          <a:p/>
-        </p:txBody>
       </p:sp>
       <p:sp>
         <p:nvSpPr>
@@ -16930,10 +16538,6 @@
             </a:outerShdw>
           </a:effectLst>
         </p:spPr>
-        <p:txBody>
-          <a:bodyPr/>
-          <a:p/>
-        </p:txBody>
       </p:sp>
       <p:sp>
         <p:nvSpPr>
@@ -17041,10 +16645,6 @@
             </a:outerShdw>
           </a:effectLst>
         </p:spPr>
-        <p:txBody>
-          <a:bodyPr/>
-          <a:p/>
-        </p:txBody>
       </p:sp>
       <p:sp>
         <p:nvSpPr>
@@ -17175,10 +16775,6 @@
           </a:solidFill>
           <a:ln/>
         </p:spPr>
-        <p:txBody>
-          <a:bodyPr/>
-          <a:p/>
-        </p:txBody>
       </p:sp>
       <p:sp>
         <p:nvSpPr>
@@ -17364,10 +16960,6 @@
             </a:outerShdw>
           </a:effectLst>
         </p:spPr>
-        <p:txBody>
-          <a:bodyPr/>
-          <a:p/>
-        </p:txBody>
       </p:sp>
       <p:sp>
         <p:nvSpPr>
@@ -17475,10 +17067,6 @@
             </a:outerShdw>
           </a:effectLst>
         </p:spPr>
-        <p:txBody>
-          <a:bodyPr/>
-          <a:p/>
-        </p:txBody>
       </p:sp>
       <p:sp>
         <p:nvSpPr>
@@ -17586,10 +17174,6 @@
             </a:outerShdw>
           </a:effectLst>
         </p:spPr>
-        <p:txBody>
-          <a:bodyPr/>
-          <a:p/>
-        </p:txBody>
       </p:sp>
       <p:sp>
         <p:nvSpPr>
@@ -17697,10 +17281,6 @@
             </a:outerShdw>
           </a:effectLst>
         </p:spPr>
-        <p:txBody>
-          <a:bodyPr/>
-          <a:p/>
-        </p:txBody>
       </p:sp>
       <p:sp>
         <p:nvSpPr>
@@ -17808,10 +17388,6 @@
             </a:outerShdw>
           </a:effectLst>
         </p:spPr>
-        <p:txBody>
-          <a:bodyPr/>
-          <a:p/>
-        </p:txBody>
       </p:sp>
       <p:sp>
         <p:nvSpPr>
@@ -17919,10 +17495,6 @@
             </a:outerShdw>
           </a:effectLst>
         </p:spPr>
-        <p:txBody>
-          <a:bodyPr/>
-          <a:p/>
-        </p:txBody>
       </p:sp>
       <p:sp>
         <p:nvSpPr>
@@ -18347,10 +17919,6 @@
           </a:solidFill>
           <a:ln/>
         </p:spPr>
-        <p:txBody>
-          <a:bodyPr/>
-          <a:p/>
-        </p:txBody>
       </p:sp>
       <p:sp>
         <p:nvSpPr>
@@ -18536,10 +18104,6 @@
             </a:outerShdw>
           </a:effectLst>
         </p:spPr>
-        <p:txBody>
-          <a:bodyPr/>
-          <a:p/>
-        </p:txBody>
       </p:sp>
       <p:sp>
         <p:nvSpPr>
@@ -18562,10 +18126,6 @@
           </a:solidFill>
           <a:ln/>
         </p:spPr>
-        <p:txBody>
-          <a:bodyPr/>
-          <a:p/>
-        </p:txBody>
       </p:sp>
       <p:sp>
         <p:nvSpPr>
@@ -18712,10 +18272,6 @@
             </a:outerShdw>
           </a:effectLst>
         </p:spPr>
-        <p:txBody>
-          <a:bodyPr/>
-          <a:p/>
-        </p:txBody>
       </p:sp>
       <p:sp>
         <p:nvSpPr>
@@ -18738,10 +18294,6 @@
           </a:solidFill>
           <a:ln/>
         </p:spPr>
-        <p:txBody>
-          <a:bodyPr/>
-          <a:p/>
-        </p:txBody>
       </p:sp>
       <p:sp>
         <p:nvSpPr>
@@ -18888,10 +18440,6 @@
             </a:outerShdw>
           </a:effectLst>
         </p:spPr>
-        <p:txBody>
-          <a:bodyPr/>
-          <a:p/>
-        </p:txBody>
       </p:sp>
       <p:sp>
         <p:nvSpPr>
@@ -18914,10 +18462,6 @@
           </a:solidFill>
           <a:ln/>
         </p:spPr>
-        <p:txBody>
-          <a:bodyPr/>
-          <a:p/>
-        </p:txBody>
       </p:sp>
       <p:sp>
         <p:nvSpPr>
@@ -19064,10 +18608,6 @@
             </a:outerShdw>
           </a:effectLst>
         </p:spPr>
-        <p:txBody>
-          <a:bodyPr/>
-          <a:p/>
-        </p:txBody>
       </p:sp>
       <p:sp>
         <p:nvSpPr>
@@ -19090,10 +18630,6 @@
           </a:solidFill>
           <a:ln/>
         </p:spPr>
-        <p:txBody>
-          <a:bodyPr/>
-          <a:p/>
-        </p:txBody>
       </p:sp>
       <p:sp>
         <p:nvSpPr>
@@ -19348,10 +18884,6 @@
           </a:solidFill>
           <a:ln/>
         </p:spPr>
-        <p:txBody>
-          <a:bodyPr/>
-          <a:p/>
-        </p:txBody>
       </p:sp>
       <p:sp>
         <p:nvSpPr>
@@ -19537,10 +19069,6 @@
             </a:outerShdw>
           </a:effectLst>
         </p:spPr>
-        <p:txBody>
-          <a:bodyPr/>
-          <a:p/>
-        </p:txBody>
       </p:sp>
       <p:sp>
         <p:nvSpPr>
@@ -19687,10 +19215,6 @@
             </a:outerShdw>
           </a:effectLst>
         </p:spPr>
-        <p:txBody>
-          <a:bodyPr/>
-          <a:p/>
-        </p:txBody>
       </p:sp>
       <p:sp>
         <p:nvSpPr>
@@ -19837,10 +19361,6 @@
             </a:outerShdw>
           </a:effectLst>
         </p:spPr>
-        <p:txBody>
-          <a:bodyPr/>
-          <a:p/>
-        </p:txBody>
       </p:sp>
       <p:sp>
         <p:nvSpPr>
@@ -19987,10 +19507,6 @@
             </a:outerShdw>
           </a:effectLst>
         </p:spPr>
-        <p:txBody>
-          <a:bodyPr/>
-          <a:p/>
-        </p:txBody>
       </p:sp>
       <p:sp>
         <p:nvSpPr>
@@ -20167,10 +19683,6 @@
           </a:solidFill>
           <a:ln/>
         </p:spPr>
-        <p:txBody>
-          <a:bodyPr/>
-          <a:p/>
-        </p:txBody>
       </p:sp>
       <p:sp>
         <p:nvSpPr>
@@ -20356,10 +19868,6 @@
             </a:outerShdw>
           </a:effectLst>
         </p:spPr>
-        <p:txBody>
-          <a:bodyPr/>
-          <a:p/>
-        </p:txBody>
       </p:sp>
       <p:sp>
         <p:nvSpPr>
@@ -20421,10 +19929,6 @@
           </a:solidFill>
           <a:ln/>
         </p:spPr>
-        <p:txBody>
-          <a:bodyPr/>
-          <a:p/>
-        </p:txBody>
       </p:sp>
       <p:sp>
         <p:nvSpPr>
@@ -20488,10 +19992,6 @@
             <a:tailEnd type="triangle"/>
           </a:ln>
         </p:spPr>
-        <p:txBody>
-          <a:bodyPr/>
-          <a:p/>
-        </p:txBody>
       </p:sp>
       <p:sp>
         <p:nvSpPr>
@@ -20514,10 +20014,6 @@
           </a:solidFill>
           <a:ln/>
         </p:spPr>
-        <p:txBody>
-          <a:bodyPr/>
-          <a:p/>
-        </p:txBody>
       </p:sp>
       <p:sp>
         <p:nvSpPr>
@@ -20581,10 +20077,6 @@
             <a:tailEnd type="triangle"/>
           </a:ln>
         </p:spPr>
-        <p:txBody>
-          <a:bodyPr/>
-          <a:p/>
-        </p:txBody>
       </p:sp>
       <p:sp>
         <p:nvSpPr>
@@ -20607,10 +20099,6 @@
           </a:solidFill>
           <a:ln/>
         </p:spPr>
-        <p:txBody>
-          <a:bodyPr/>
-          <a:p/>
-        </p:txBody>
       </p:sp>
       <p:sp>
         <p:nvSpPr>
@@ -20743,10 +20231,6 @@
             </a:outerShdw>
           </a:effectLst>
         </p:spPr>
-        <p:txBody>
-          <a:bodyPr/>
-          <a:p/>
-        </p:txBody>
       </p:sp>
       <p:sp>
         <p:nvSpPr>
@@ -20921,10 +20405,6 @@
             </a:outerShdw>
           </a:effectLst>
         </p:spPr>
-        <p:txBody>
-          <a:bodyPr/>
-          <a:p/>
-        </p:txBody>
       </p:sp>
       <p:sp>
         <p:nvSpPr>
@@ -21055,10 +20535,6 @@
           </a:solidFill>
           <a:ln/>
         </p:spPr>
-        <p:txBody>
-          <a:bodyPr/>
-          <a:p/>
-        </p:txBody>
       </p:sp>
       <p:sp>
         <p:nvSpPr>
@@ -21235,10 +20711,6 @@
           </a:solidFill>
           <a:ln/>
         </p:spPr>
-        <p:txBody>
-          <a:bodyPr/>
-          <a:p/>
-        </p:txBody>
       </p:sp>
       <p:sp>
         <p:nvSpPr>
@@ -21337,10 +20809,6 @@
           </a:solidFill>
           <a:ln/>
         </p:spPr>
-        <p:txBody>
-          <a:bodyPr/>
-          <a:p/>
-        </p:txBody>
       </p:sp>
       <p:sp>
         <p:nvSpPr>
@@ -21439,10 +20907,6 @@
           </a:solidFill>
           <a:ln/>
         </p:spPr>
-        <p:txBody>
-          <a:bodyPr/>
-          <a:p/>
-        </p:txBody>
       </p:sp>
       <p:sp>
         <p:nvSpPr>
@@ -21541,10 +21005,6 @@
           </a:solidFill>
           <a:ln/>
         </p:spPr>
-        <p:txBody>
-          <a:bodyPr/>
-          <a:p/>
-        </p:txBody>
       </p:sp>
       <p:sp>
         <p:nvSpPr>
@@ -21643,10 +21103,6 @@
           </a:solidFill>
           <a:ln/>
         </p:spPr>
-        <p:txBody>
-          <a:bodyPr/>
-          <a:p/>
-        </p:txBody>
       </p:sp>
       <p:sp>
         <p:nvSpPr>
@@ -21745,10 +21201,6 @@
           </a:solidFill>
           <a:ln/>
         </p:spPr>
-        <p:txBody>
-          <a:bodyPr/>
-          <a:p/>
-        </p:txBody>
       </p:sp>
       <p:sp>
         <p:nvSpPr>
@@ -22173,10 +21625,6 @@
           </a:solidFill>
           <a:ln/>
         </p:spPr>
-        <p:txBody>
-          <a:bodyPr/>
-          <a:p/>
-        </p:txBody>
       </p:sp>
       <p:sp>
         <p:nvSpPr>
@@ -22353,10 +21801,6 @@
           </a:solidFill>
           <a:ln/>
         </p:spPr>
-        <p:txBody>
-          <a:bodyPr/>
-          <a:p/>
-        </p:txBody>
       </p:sp>
       <p:sp>
         <p:nvSpPr>
@@ -22416,10 +21860,6 @@
           </a:solidFill>
           <a:ln/>
         </p:spPr>
-        <p:txBody>
-          <a:bodyPr/>
-          <a:p/>
-        </p:txBody>
       </p:sp>
       <p:sp>
         <p:nvSpPr>
@@ -22479,10 +21919,6 @@
           </a:solidFill>
           <a:ln/>
         </p:spPr>
-        <p:txBody>
-          <a:bodyPr/>
-          <a:p/>
-        </p:txBody>
       </p:sp>
       <p:sp>
         <p:nvSpPr>
@@ -22542,10 +21978,6 @@
           </a:solidFill>
           <a:ln/>
         </p:spPr>
-        <p:txBody>
-          <a:bodyPr/>
-          <a:p/>
-        </p:txBody>
       </p:sp>
       <p:sp>
         <p:nvSpPr>
@@ -22605,10 +22037,6 @@
           </a:solidFill>
           <a:ln/>
         </p:spPr>
-        <p:txBody>
-          <a:bodyPr/>
-          <a:p/>
-        </p:txBody>
       </p:sp>
       <p:sp>
         <p:nvSpPr>
@@ -23142,10 +22570,6 @@
           </a:solidFill>
           <a:ln/>
         </p:spPr>
-        <p:txBody>
-          <a:bodyPr/>
-          <a:p/>
-        </p:txBody>
       </p:sp>
       <p:sp>
         <p:nvSpPr>
@@ -23328,7 +22752,7 @@
         <p:spPr>
           <a:xfrm>
             <a:off x="640080" y="5715000"/>
-            <a:ext cx="5486400" cy="320040"/>
+            <a:ext cx="6035040" cy="320040"/>
           </a:xfrm>
           <a:prstGeom prst="rect">
             <a:avLst/>
@@ -23352,7 +22776,7 @@
                 <a:ea typeface="微软雅黑" pitchFamily="34" charset="-122"/>
                 <a:cs typeface="微软雅黑" pitchFamily="34" charset="-120"/>
               </a:rPr>
-              <a:t>数据来源：v1.11.2 全量本地实测（2026-08-30）</a:t>
+              <a:t>数据来源：v1.12.9 全量本地实测（2026-09-14）· 后端与前端覆盖率均 100%</a:t>
             </a:r>
             <a:endParaRPr lang="en-US" sz="1100" dirty="0"/>
           </a:p>
@@ -23386,10 +22810,6 @@
             </a:outerShdw>
           </a:effectLst>
         </p:spPr>
-        <p:txBody>
-          <a:bodyPr/>
-          <a:p/>
-        </p:txBody>
       </p:sp>
       <p:sp>
         <p:nvSpPr>
@@ -23467,7 +22887,7 @@
                 <a:ea typeface="微软雅黑" pitchFamily="34" charset="-122"/>
                 <a:cs typeface="微软雅黑" pitchFamily="34" charset="-120"/>
               </a:rPr>
-              <a:t>后端覆盖率门禁 98%（CI 硬阈值）</a:t>
+              <a:t>前后端覆盖率门禁均 100%（CI 硬阈值，12 个源码分组全约束）</a:t>
             </a:r>
             <a:endParaRPr lang="en-US" sz="1250" dirty="0"/>
           </a:p>
@@ -23489,6 +22909,27 @@
                 <a:cs typeface="微软雅黑" pitchFamily="34" charset="-120"/>
               </a:rPr>
               <a:t>新增接口/页面必须配套测试（协作约定强制）</a:t>
+            </a:r>
+            <a:endParaRPr lang="en-US" sz="1250" dirty="0"/>
+          </a:p>
+          <a:p>
+            <a:pPr algn="l" marL="152400" indent="-152400">
+              <a:spcAft>
+                <a:spcPts val="900"/>
+              </a:spcAft>
+              <a:buSzPct val="100000"/>
+              <a:buChar char="▪"/>
+            </a:pPr>
+            <a:r>
+              <a:rPr lang="en-US" sz="1250" dirty="0">
+                <a:solidFill>
+                  <a:srgbClr val="1A2E24"/>
+                </a:solidFill>
+                <a:latin typeface="微软雅黑" pitchFamily="34" charset="0"/>
+                <a:ea typeface="微软雅黑" pitchFamily="34" charset="-122"/>
+                <a:cs typeface="微软雅黑" pitchFamily="34" charset="-120"/>
+              </a:rPr>
+              <a:t>弱断言治理：安全守卫补真实断言（开放重定向 / javascript: 协议防线）</a:t>
             </a:r>
             <a:endParaRPr lang="en-US" sz="1250" dirty="0"/>
           </a:p>
@@ -23608,10 +23049,6 @@
           </a:solidFill>
           <a:ln/>
         </p:spPr>
-        <p:txBody>
-          <a:bodyPr/>
-          <a:p/>
-        </p:txBody>
       </p:sp>
       <p:sp>
         <p:nvSpPr>
@@ -23790,10 +23227,6 @@
           </a:solidFill>
           <a:ln/>
         </p:spPr>
-        <p:txBody>
-          <a:bodyPr/>
-          <a:p/>
-        </p:txBody>
       </p:sp>
       <p:sp>
         <p:nvSpPr>
@@ -23894,10 +23327,6 @@
           </a:solidFill>
           <a:ln/>
         </p:spPr>
-        <p:txBody>
-          <a:bodyPr/>
-          <a:p/>
-        </p:txBody>
       </p:sp>
       <p:sp>
         <p:nvSpPr>
@@ -23998,10 +23427,6 @@
           </a:solidFill>
           <a:ln/>
         </p:spPr>
-        <p:txBody>
-          <a:bodyPr/>
-          <a:p/>
-        </p:txBody>
       </p:sp>
       <p:sp>
         <p:nvSpPr>
@@ -24102,10 +23527,6 @@
           </a:solidFill>
           <a:ln/>
         </p:spPr>
-        <p:txBody>
-          <a:bodyPr/>
-          <a:p/>
-        </p:txBody>
       </p:sp>
       <p:sp>
         <p:nvSpPr>
@@ -24275,10 +23696,6 @@
           </a:solidFill>
           <a:ln/>
         </p:spPr>
-        <p:txBody>
-          <a:bodyPr/>
-          <a:p/>
-        </p:txBody>
       </p:sp>
       <p:sp>
         <p:nvSpPr>
@@ -24464,10 +23881,6 @@
             </a:outerShdw>
           </a:effectLst>
         </p:spPr>
-        <p:txBody>
-          <a:bodyPr/>
-          <a:p/>
-        </p:txBody>
       </p:sp>
       <p:sp>
         <p:nvSpPr>
@@ -24663,10 +24076,6 @@
             </a:outerShdw>
           </a:effectLst>
         </p:spPr>
-        <p:txBody>
-          <a:bodyPr/>
-          <a:p/>
-        </p:txBody>
       </p:sp>
       <p:sp>
         <p:nvSpPr>
@@ -24885,10 +24294,6 @@
           </a:solidFill>
           <a:ln/>
         </p:spPr>
-        <p:txBody>
-          <a:bodyPr/>
-          <a:p/>
-        </p:txBody>
       </p:sp>
       <p:sp>
         <p:nvSpPr>
@@ -25074,10 +24479,6 @@
             </a:outerShdw>
           </a:effectLst>
         </p:spPr>
-        <p:txBody>
-          <a:bodyPr/>
-          <a:p/>
-        </p:txBody>
       </p:sp>
       <p:sp>
         <p:nvSpPr>
@@ -25273,10 +24674,6 @@
             </a:outerShdw>
           </a:effectLst>
         </p:spPr>
-        <p:txBody>
-          <a:bodyPr/>
-          <a:p/>
-        </p:txBody>
       </p:sp>
       <p:sp>
         <p:nvSpPr>
@@ -25810,10 +25207,6 @@
           </a:solidFill>
           <a:ln/>
         </p:spPr>
-        <p:txBody>
-          <a:bodyPr/>
-          <a:p/>
-        </p:txBody>
       </p:sp>
       <p:sp>
         <p:nvSpPr>
@@ -25999,10 +25392,6 @@
             </a:outerShdw>
           </a:effectLst>
         </p:spPr>
-        <p:txBody>
-          <a:bodyPr/>
-          <a:p/>
-        </p:txBody>
       </p:sp>
       <p:sp>
         <p:nvSpPr>
@@ -26064,10 +25453,6 @@
           </a:solidFill>
           <a:ln/>
         </p:spPr>
-        <p:txBody>
-          <a:bodyPr/>
-          <a:p/>
-        </p:txBody>
       </p:sp>
       <p:sp>
         <p:nvSpPr>
@@ -26270,10 +25655,6 @@
             </a:outerShdw>
           </a:effectLst>
         </p:spPr>
-        <p:txBody>
-          <a:bodyPr/>
-          <a:p/>
-        </p:txBody>
       </p:sp>
       <p:sp>
         <p:nvSpPr>
@@ -26335,10 +25716,6 @@
           </a:solidFill>
           <a:ln/>
         </p:spPr>
-        <p:txBody>
-          <a:bodyPr/>
-          <a:p/>
-        </p:txBody>
       </p:sp>
       <p:sp>
         <p:nvSpPr>
@@ -26541,10 +25918,6 @@
             </a:outerShdw>
           </a:effectLst>
         </p:spPr>
-        <p:txBody>
-          <a:bodyPr/>
-          <a:p/>
-        </p:txBody>
       </p:sp>
       <p:sp>
         <p:nvSpPr>
@@ -26606,10 +25979,6 @@
           </a:solidFill>
           <a:ln/>
         </p:spPr>
-        <p:txBody>
-          <a:bodyPr/>
-          <a:p/>
-        </p:txBody>
       </p:sp>
       <p:sp>
         <p:nvSpPr>
@@ -26874,10 +26243,6 @@
           </a:solidFill>
           <a:ln/>
         </p:spPr>
-        <p:txBody>
-          <a:bodyPr/>
-          <a:p/>
-        </p:txBody>
       </p:sp>
       <p:sp>
         <p:nvSpPr>
@@ -27063,10 +26428,6 @@
             </a:outerShdw>
           </a:effectLst>
         </p:spPr>
-        <p:txBody>
-          <a:bodyPr/>
-          <a:p/>
-        </p:txBody>
       </p:sp>
       <p:sp>
         <p:nvSpPr>
@@ -27262,10 +26623,6 @@
             </a:outerShdw>
           </a:effectLst>
         </p:spPr>
-        <p:txBody>
-          <a:bodyPr/>
-          <a:p/>
-        </p:txBody>
       </p:sp>
       <p:sp>
         <p:nvSpPr>
@@ -27484,10 +26841,6 @@
           </a:solidFill>
           <a:ln/>
         </p:spPr>
-        <p:txBody>
-          <a:bodyPr/>
-          <a:p/>
-        </p:txBody>
       </p:sp>
       <p:sp>
         <p:nvSpPr>
@@ -27667,10 +27020,6 @@
             <a:prstDash val="solid"/>
           </a:ln>
         </p:spPr>
-        <p:txBody>
-          <a:bodyPr/>
-          <a:p/>
-        </p:txBody>
       </p:sp>
       <p:sp>
         <p:nvSpPr>
@@ -27691,10 +27040,6 @@
           </a:solidFill>
           <a:ln/>
         </p:spPr>
-        <p:txBody>
-          <a:bodyPr/>
-          <a:p/>
-        </p:txBody>
       </p:sp>
       <p:sp>
         <p:nvSpPr>
@@ -27729,7 +27074,7 @@
                 <a:ea typeface="微软雅黑" pitchFamily="34" charset="-122"/>
                 <a:cs typeface="微软雅黑" pitchFamily="34" charset="-120"/>
               </a:rPr>
-              <a:t>v1.11.2</a:t>
+              <a:t>v1.12.2</a:t>
             </a:r>
             <a:endParaRPr lang="en-US" sz="1500" dirty="0"/>
           </a:p>
@@ -27768,7 +27113,7 @@
                 <a:ea typeface="微软雅黑" pitchFamily="34" charset="-122"/>
                 <a:cs typeface="微软雅黑" pitchFamily="34" charset="-120"/>
               </a:rPr>
-              <a:t>08-30</a:t>
+              <a:t>09-12</a:t>
             </a:r>
             <a:endParaRPr lang="en-US" sz="1100" dirty="0"/>
           </a:p>
@@ -27807,7 +27152,7 @@
                 <a:ea typeface="微软雅黑" pitchFamily="34" charset="-122"/>
                 <a:cs typeface="微软雅黑" pitchFamily="34" charset="-120"/>
               </a:rPr>
-              <a:t>403 六类根因修复 + 弹窗裁切修复 + 5 个 500 端点</a:t>
+              <a:t>架构评估 P0/P1 加固：导出任务重启恢复、导出/备份原子写、备份可恢复性校验</a:t>
             </a:r>
             <a:endParaRPr lang="en-US" sz="1150" dirty="0"/>
           </a:p>
@@ -27832,10 +27177,6 @@
           </a:solidFill>
           <a:ln/>
         </p:spPr>
-        <p:txBody>
-          <a:bodyPr/>
-          <a:p/>
-        </p:txBody>
       </p:sp>
       <p:sp>
         <p:nvSpPr>
@@ -27870,7 +27211,7 @@
                 <a:ea typeface="微软雅黑" pitchFamily="34" charset="-122"/>
                 <a:cs typeface="微软雅黑" pitchFamily="34" charset="-120"/>
               </a:rPr>
-              <a:t>v1.12.2</a:t>
+              <a:t>v1.12.5</a:t>
             </a:r>
             <a:endParaRPr lang="en-US" sz="1500" dirty="0"/>
           </a:p>
@@ -27948,7 +27289,7 @@
                 <a:ea typeface="微软雅黑" pitchFamily="34" charset="-122"/>
                 <a:cs typeface="微软雅黑" pitchFamily="34" charset="-120"/>
               </a:rPr>
-              <a:t>架构评估 P0/P1 加固：导出任务重启恢复、导出/备份原子写、备份可恢复性校验</a:t>
+              <a:t>深度审计 13 项修复：目录穿越 / 存储型 XSS / 并发 / 备份 fail-loud</a:t>
             </a:r>
             <a:endParaRPr lang="en-US" sz="1150" dirty="0"/>
           </a:p>
@@ -27973,10 +27314,6 @@
           </a:solidFill>
           <a:ln/>
         </p:spPr>
-        <p:txBody>
-          <a:bodyPr/>
-          <a:p/>
-        </p:txBody>
       </p:sp>
       <p:sp>
         <p:nvSpPr>
@@ -28011,7 +27348,7 @@
                 <a:ea typeface="微软雅黑" pitchFamily="34" charset="-122"/>
                 <a:cs typeface="微软雅黑" pitchFamily="34" charset="-120"/>
               </a:rPr>
-              <a:t>v1.12.5</a:t>
+              <a:t>v1.12.7</a:t>
             </a:r>
             <a:endParaRPr lang="en-US" sz="1500" dirty="0"/>
           </a:p>
@@ -28050,7 +27387,7 @@
                 <a:ea typeface="微软雅黑" pitchFamily="34" charset="-122"/>
                 <a:cs typeface="微软雅黑" pitchFamily="34" charset="-120"/>
               </a:rPr>
-              <a:t>09-12</a:t>
+              <a:t>09-13</a:t>
             </a:r>
             <a:endParaRPr lang="en-US" sz="1100" dirty="0"/>
           </a:p>
@@ -28089,7 +27426,7 @@
                 <a:ea typeface="微软雅黑" pitchFamily="34" charset="-122"/>
                 <a:cs typeface="微软雅黑" pitchFamily="34" charset="-120"/>
               </a:rPr>
-              <a:t>深度审计 13 项修复：目录穿越 / 存储型 XSS / 并发 / 备份 fail-loud</a:t>
+              <a:t>遗留风险二批：上传体积三层上限、导出回收、导入拒绝记录、Windows CI 可见性</a:t>
             </a:r>
             <a:endParaRPr lang="en-US" sz="1150" dirty="0"/>
           </a:p>
@@ -28114,10 +27451,6 @@
           </a:solidFill>
           <a:ln/>
         </p:spPr>
-        <p:txBody>
-          <a:bodyPr/>
-          <a:p/>
-        </p:txBody>
       </p:sp>
       <p:sp>
         <p:nvSpPr>
@@ -28152,7 +27485,7 @@
                 <a:ea typeface="微软雅黑" pitchFamily="34" charset="-122"/>
                 <a:cs typeface="微软雅黑" pitchFamily="34" charset="-120"/>
               </a:rPr>
-              <a:t>v1.12.7</a:t>
+              <a:t>v1.12.8</a:t>
             </a:r>
             <a:endParaRPr lang="en-US" sz="1500" dirty="0"/>
           </a:p>
@@ -28191,7 +27524,7 @@
                 <a:ea typeface="微软雅黑" pitchFamily="34" charset="-122"/>
                 <a:cs typeface="微软雅黑" pitchFamily="34" charset="-120"/>
               </a:rPr>
-              <a:t>09-13</a:t>
+              <a:t>09-14</a:t>
             </a:r>
             <a:endParaRPr lang="en-US" sz="1100" dirty="0"/>
           </a:p>
@@ -28230,7 +27563,7 @@
                 <a:ea typeface="微软雅黑" pitchFamily="34" charset="-122"/>
                 <a:cs typeface="微软雅黑" pitchFamily="34" charset="-120"/>
               </a:rPr>
-              <a:t>遗留风险二批：上传体积三层上限、导出回收、导入拒绝记录、Windows CI 可见性</a:t>
+              <a:t>R7 恢复维护闸门 / R12 低危批量 7 项 / R2 残余清零 / P-1~P-3 门禁 / R14 组织树修复</a:t>
             </a:r>
             <a:endParaRPr lang="en-US" sz="1150" dirty="0"/>
           </a:p>
@@ -28255,10 +27588,6 @@
           </a:solidFill>
           <a:ln/>
         </p:spPr>
-        <p:txBody>
-          <a:bodyPr/>
-          <a:p/>
-        </p:txBody>
       </p:sp>
       <p:sp>
         <p:nvSpPr>
@@ -28371,7 +27700,7 @@
                 <a:ea typeface="微软雅黑" pitchFamily="34" charset="-122"/>
                 <a:cs typeface="微软雅黑" pitchFamily="34" charset="-120"/>
               </a:rPr>
-              <a:t>R7 恢复维护闸门 / R12 低危批量 7 项 / R2 残余清零 / P-1~P-3 门禁 / R14 组织树修复</a:t>
+              <a:t>深审缺陷批量修复（越权/数据完整性/静默失效）+ 响应信封与凭据语义修复 + 前后端覆盖率双双补齐至 100%（前端 10 个文件：安全守卫零覆盖、弱断言、死代码）</a:t>
             </a:r>
             <a:endParaRPr lang="en-US" sz="1150" dirty="0"/>
           </a:p>
@@ -28405,10 +27734,6 @@
             </a:outerShdw>
           </a:effectLst>
         </p:spPr>
-        <p:txBody>
-          <a:bodyPr/>
-          <a:p/>
-        </p:txBody>
       </p:sp>
       <p:sp>
         <p:nvSpPr>
@@ -28443,7 +27768,7 @@
                 <a:ea typeface="微软雅黑" pitchFamily="34" charset="-122"/>
                 <a:cs typeface="微软雅黑" pitchFamily="34" charset="-120"/>
               </a:rPr>
-              <a:t>净效果：11,548 后端用例（覆盖率 100%）+ 6,124 前端用例全绿；Windows x64 与麒麟 ARM64 两个离线安装包由 GitHub Actions 全自动构建并发布 Release</a:t>
+              <a:t>净效果：11,868 后端用例（覆盖率 100%）+ 6,287 前端用例全绿；Windows x64 与麒麟 ARM64 两个离线安装包由 GitHub Actions 全自动构建并发布 Release</a:t>
             </a:r>
             <a:endParaRPr lang="en-US" sz="1350" dirty="0"/>
           </a:p>
@@ -28500,10 +27825,6 @@
           </a:solidFill>
           <a:ln/>
         </p:spPr>
-        <p:txBody>
-          <a:bodyPr/>
-          <a:p/>
-        </p:txBody>
       </p:sp>
       <p:sp>
         <p:nvSpPr>
@@ -28719,10 +28040,6 @@
           </a:solidFill>
           <a:ln/>
         </p:spPr>
-        <p:txBody>
-          <a:bodyPr/>
-          <a:p/>
-        </p:txBody>
       </p:sp>
       <p:sp>
         <p:nvSpPr>
@@ -28821,10 +28138,6 @@
           </a:solidFill>
           <a:ln/>
         </p:spPr>
-        <p:txBody>
-          <a:bodyPr/>
-          <a:p/>
-        </p:txBody>
       </p:sp>
       <p:sp>
         <p:nvSpPr>
@@ -28923,10 +28236,6 @@
           </a:solidFill>
           <a:ln/>
         </p:spPr>
-        <p:txBody>
-          <a:bodyPr/>
-          <a:p/>
-        </p:txBody>
       </p:sp>
       <p:sp>
         <p:nvSpPr>
@@ -29057,10 +28366,6 @@
           </a:solidFill>
           <a:ln/>
         </p:spPr>
-        <p:txBody>
-          <a:bodyPr/>
-          <a:p/>
-        </p:txBody>
       </p:sp>
       <p:sp>
         <p:nvSpPr>
@@ -29246,10 +28551,6 @@
             </a:outerShdw>
           </a:effectLst>
         </p:spPr>
-        <p:txBody>
-          <a:bodyPr/>
-          <a:p/>
-        </p:txBody>
       </p:sp>
       <p:sp>
         <p:nvSpPr>
@@ -29357,10 +28658,6 @@
             </a:outerShdw>
           </a:effectLst>
         </p:spPr>
-        <p:txBody>
-          <a:bodyPr/>
-          <a:p/>
-        </p:txBody>
       </p:sp>
       <p:sp>
         <p:nvSpPr>
@@ -29468,10 +28765,6 @@
             </a:outerShdw>
           </a:effectLst>
         </p:spPr>
-        <p:txBody>
-          <a:bodyPr/>
-          <a:p/>
-        </p:txBody>
       </p:sp>
       <p:sp>
         <p:nvSpPr>
@@ -29579,10 +28872,6 @@
             </a:outerShdw>
           </a:effectLst>
         </p:spPr>
-        <p:txBody>
-          <a:bodyPr/>
-          <a:p/>
-        </p:txBody>
       </p:sp>
       <p:sp>
         <p:nvSpPr>
@@ -29690,10 +28979,6 @@
             </a:outerShdw>
           </a:effectLst>
         </p:spPr>
-        <p:txBody>
-          <a:bodyPr/>
-          <a:p/>
-        </p:txBody>
       </p:sp>
       <p:sp>
         <p:nvSpPr>
@@ -29801,10 +29086,6 @@
             </a:outerShdw>
           </a:effectLst>
         </p:spPr>
-        <p:txBody>
-          <a:bodyPr/>
-          <a:p/>
-        </p:txBody>
       </p:sp>
       <p:sp>
         <p:nvSpPr>
@@ -29935,10 +29216,6 @@
           </a:solidFill>
           <a:ln/>
         </p:spPr>
-        <p:txBody>
-          <a:bodyPr/>
-          <a:p/>
-        </p:txBody>
       </p:sp>
       <p:sp>
         <p:nvSpPr>
@@ -29959,10 +29236,6 @@
           </a:solidFill>
           <a:ln/>
         </p:spPr>
-        <p:txBody>
-          <a:bodyPr/>
-          <a:p/>
-        </p:txBody>
       </p:sp>
       <p:sp>
         <p:nvSpPr>
@@ -30075,7 +29348,7 @@
                 <a:ea typeface="微软雅黑" pitchFamily="34" charset="-122"/>
                 <a:cs typeface="微软雅黑" pitchFamily="34" charset="-120"/>
               </a:rPr>
-              <a:t>帮扶管理信息系统 v1.12.9  ·  仓库：github.com/lzh745200/MRRS  ·  完整文档见 docs/ 目录</a:t>
+              <a:t>帮扶管理信息系统 v1.12.8  ·  仓库：github.com/lzh745200/MRRS  ·  完整文档见 docs/ 目录</a:t>
             </a:r>
             <a:endParaRPr lang="en-US" sz="1350" dirty="0"/>
           </a:p>
@@ -30114,7 +29387,7 @@
                 <a:ea typeface="微软雅黑" pitchFamily="34" charset="-122"/>
                 <a:cs typeface="微软雅黑" pitchFamily="34" charset="-120"/>
               </a:rPr>
-              <a:t>11,548 后端用例（覆盖率 100%）+ 6,124 前端用例 全绿守护 · Windows x64 / 麒麟 ARM64 双平台离线交付</a:t>
+              <a:t>11,868 后端用例（覆盖率 100%）+ 6,287 前端用例 全绿守护 · Windows x64 / 麒麟 ARM64 双平台离线交付</a:t>
             </a:r>
             <a:endParaRPr lang="en-US" sz="1350" dirty="0"/>
           </a:p>
@@ -30171,10 +29444,6 @@
           </a:solidFill>
           <a:ln/>
         </p:spPr>
-        <p:txBody>
-          <a:bodyPr/>
-          <a:p/>
-        </p:txBody>
       </p:sp>
       <p:sp>
         <p:nvSpPr>
@@ -30360,10 +29629,6 @@
             </a:outerShdw>
           </a:effectLst>
         </p:spPr>
-        <p:txBody>
-          <a:bodyPr/>
-          <a:p/>
-        </p:txBody>
       </p:sp>
       <p:sp>
         <p:nvSpPr>
@@ -30384,10 +29649,6 @@
           </a:solidFill>
           <a:ln/>
         </p:spPr>
-        <p:txBody>
-          <a:bodyPr/>
-          <a:p/>
-        </p:txBody>
       </p:sp>
       <p:sp>
         <p:nvSpPr>
@@ -30495,10 +29756,6 @@
             </a:outerShdw>
           </a:effectLst>
         </p:spPr>
-        <p:txBody>
-          <a:bodyPr/>
-          <a:p/>
-        </p:txBody>
       </p:sp>
       <p:sp>
         <p:nvSpPr>
@@ -30519,10 +29776,6 @@
           </a:solidFill>
           <a:ln/>
         </p:spPr>
-        <p:txBody>
-          <a:bodyPr/>
-          <a:p/>
-        </p:txBody>
       </p:sp>
       <p:sp>
         <p:nvSpPr>
@@ -30630,10 +29883,6 @@
             </a:outerShdw>
           </a:effectLst>
         </p:spPr>
-        <p:txBody>
-          <a:bodyPr/>
-          <a:p/>
-        </p:txBody>
       </p:sp>
       <p:sp>
         <p:nvSpPr>
@@ -30654,10 +29903,6 @@
           </a:solidFill>
           <a:ln/>
         </p:spPr>
-        <p:txBody>
-          <a:bodyPr/>
-          <a:p/>
-        </p:txBody>
       </p:sp>
       <p:sp>
         <p:nvSpPr>
@@ -30765,10 +30010,6 @@
             </a:outerShdw>
           </a:effectLst>
         </p:spPr>
-        <p:txBody>
-          <a:bodyPr/>
-          <a:p/>
-        </p:txBody>
       </p:sp>
       <p:sp>
         <p:nvSpPr>
@@ -30789,10 +30030,6 @@
           </a:solidFill>
           <a:ln/>
         </p:spPr>
-        <p:txBody>
-          <a:bodyPr/>
-          <a:p/>
-        </p:txBody>
       </p:sp>
       <p:sp>
         <p:nvSpPr>
@@ -30923,10 +30160,6 @@
           </a:solidFill>
           <a:ln/>
         </p:spPr>
-        <p:txBody>
-          <a:bodyPr/>
-          <a:p/>
-        </p:txBody>
       </p:sp>
       <p:sp>
         <p:nvSpPr>
@@ -31117,7 +30350,7 @@
                 <a:ea typeface="微软雅黑" pitchFamily="34" charset="-122"/>
                 <a:cs typeface="微软雅黑" pitchFamily="34" charset="-120"/>
               </a:rPr>
-              <a:t>11,548</a:t>
+              <a:t>11,868</a:t>
             </a:r>
             <a:endParaRPr lang="en-US" sz="4000" dirty="0"/>
           </a:p>
@@ -31195,7 +30428,7 @@
                 <a:ea typeface="微软雅黑" pitchFamily="34" charset="-122"/>
                 <a:cs typeface="微软雅黑" pitchFamily="34" charset="-120"/>
               </a:rPr>
-              <a:t>6,124</a:t>
+              <a:t>6,287</a:t>
             </a:r>
             <a:endParaRPr lang="en-US" sz="4000" dirty="0"/>
           </a:p>
@@ -31273,7 +30506,7 @@
                 <a:ea typeface="微软雅黑" pitchFamily="34" charset="-122"/>
                 <a:cs typeface="微软雅黑" pitchFamily="34" charset="-120"/>
               </a:rPr>
-              <a:t>71</a:t>
+              <a:t>54</a:t>
             </a:r>
             <a:endParaRPr lang="en-US" sz="4000" dirty="0"/>
           </a:p>
@@ -31418,10 +30651,6 @@
             <a:prstDash val="solid"/>
           </a:ln>
         </p:spPr>
-        <p:txBody>
-          <a:bodyPr/>
-          <a:p/>
-        </p:txBody>
       </p:sp>
       <p:sp>
         <p:nvSpPr>
@@ -31534,7 +30763,7 @@
                 <a:ea typeface="微软雅黑" pitchFamily="34" charset="-122"/>
                 <a:cs typeface="微软雅黑" pitchFamily="34" charset="-120"/>
               </a:rPr>
-              <a:t>88</a:t>
+              <a:t>90</a:t>
             </a:r>
             <a:endParaRPr lang="en-US" sz="4000" dirty="0"/>
           </a:p>
@@ -31573,7 +30802,7 @@
                 <a:ea typeface="微软雅黑" pitchFamily="34" charset="-122"/>
                 <a:cs typeface="微软雅黑" pitchFamily="34" charset="-120"/>
               </a:rPr>
-              <a:t>后端服务（80 + 8 子包）</a:t>
+              <a:t>后端服务（83 + 7 子包）</a:t>
             </a:r>
             <a:endParaRPr lang="en-US" sz="1300" dirty="0"/>
           </a:p>
@@ -31612,7 +30841,7 @@
                 <a:ea typeface="微软雅黑" pitchFamily="34" charset="-122"/>
                 <a:cs typeface="微软雅黑" pitchFamily="34" charset="-120"/>
               </a:rPr>
-              <a:t>43</a:t>
+              <a:t>45</a:t>
             </a:r>
             <a:endParaRPr lang="en-US" sz="4000" dirty="0"/>
           </a:p>
@@ -31768,7 +30997,7 @@
                 <a:ea typeface="微软雅黑" pitchFamily="34" charset="-122"/>
                 <a:cs typeface="微软雅黑" pitchFamily="34" charset="-120"/>
               </a:rPr>
-              <a:t>数据来源：仓库实测（2026-09-30，v1.12.9）—— 后端 11,548 用例全绿 / 覆盖率 100% · 前端 6,124 用例全绿 · flake8 0 · bandit 0 中高危 · vue-tsc 0 · eslint 0 警告</a:t>
+              <a:t>数据来源：仓库实测（2026-09-14，v1.12.9）—— 后端 11,868 用例全绿 / 覆盖率 100% · 前端 6,287 用例全绿 · flake8 0 · bandit 0 中高危 · vue-tsc 0 · eslint 0 警告</a:t>
             </a:r>
             <a:endParaRPr lang="en-US" sz="1200" dirty="0"/>
           </a:p>
@@ -32119,10 +31348,6 @@
           </a:solidFill>
           <a:ln/>
         </p:spPr>
-        <p:txBody>
-          <a:bodyPr/>
-          <a:p/>
-        </p:txBody>
       </p:sp>
       <p:sp>
         <p:nvSpPr>
@@ -32308,10 +31533,6 @@
             </a:outerShdw>
           </a:effectLst>
         </p:spPr>
-        <p:txBody>
-          <a:bodyPr/>
-          <a:p/>
-        </p:txBody>
       </p:sp>
       <p:sp>
         <p:nvSpPr>
@@ -32525,10 +31746,6 @@
             </a:outerShdw>
           </a:effectLst>
         </p:spPr>
-        <p:txBody>
-          <a:bodyPr/>
-          <a:p/>
-        </p:txBody>
       </p:sp>
       <p:sp>
         <p:nvSpPr>
@@ -32742,10 +31959,6 @@
             </a:outerShdw>
           </a:effectLst>
         </p:spPr>
-        <p:txBody>
-          <a:bodyPr/>
-          <a:p/>
-        </p:txBody>
       </p:sp>
       <p:sp>
         <p:nvSpPr>
@@ -32959,10 +32172,6 @@
             </a:outerShdw>
           </a:effectLst>
         </p:spPr>
-        <p:txBody>
-          <a:bodyPr/>
-          <a:p/>
-        </p:txBody>
       </p:sp>
       <p:sp>
         <p:nvSpPr>
@@ -33142,7 +32351,7 @@
                 <a:ea typeface="微软雅黑" pitchFamily="34" charset="-122"/>
                 <a:cs typeface="微软雅黑" pitchFamily="34" charset="-120"/>
               </a:rPr>
-              <a:t>44 个 Alembic 迁移版本</a:t>
+              <a:t>45 个 Alembic 迁移版本</a:t>
             </a:r>
             <a:endParaRPr lang="en-US" sz="1200" dirty="0"/>
           </a:p>
@@ -33199,10 +32408,6 @@
           </a:solidFill>
           <a:ln/>
         </p:spPr>
-        <p:txBody>
-          <a:bodyPr/>
-          <a:p/>
-        </p:txBody>
       </p:sp>
       <p:sp>
         <p:nvSpPr>
@@ -33381,10 +32586,6 @@
           </a:solidFill>
           <a:ln/>
         </p:spPr>
-        <p:txBody>
-          <a:bodyPr/>
-          <a:p/>
-        </p:txBody>
       </p:sp>
       <p:sp>
         <p:nvSpPr>
@@ -33487,10 +32688,6 @@
             <a:tailEnd type="triangle"/>
           </a:ln>
         </p:spPr>
-        <p:txBody>
-          <a:bodyPr/>
-          <a:p/>
-        </p:txBody>
       </p:sp>
       <p:sp>
         <p:nvSpPr>
@@ -33513,10 +32710,6 @@
           </a:solidFill>
           <a:ln/>
         </p:spPr>
-        <p:txBody>
-          <a:bodyPr/>
-          <a:p/>
-        </p:txBody>
       </p:sp>
       <p:sp>
         <p:nvSpPr>
@@ -33619,10 +32812,6 @@
             <a:tailEnd type="triangle"/>
           </a:ln>
         </p:spPr>
-        <p:txBody>
-          <a:bodyPr/>
-          <a:p/>
-        </p:txBody>
       </p:sp>
       <p:sp>
         <p:nvSpPr>
@@ -33645,10 +32834,6 @@
           </a:solidFill>
           <a:ln/>
         </p:spPr>
-        <p:txBody>
-          <a:bodyPr/>
-          <a:p/>
-        </p:txBody>
       </p:sp>
       <p:sp>
         <p:nvSpPr>
@@ -33751,10 +32936,6 @@
             <a:tailEnd type="triangle"/>
           </a:ln>
         </p:spPr>
-        <p:txBody>
-          <a:bodyPr/>
-          <a:p/>
-        </p:txBody>
       </p:sp>
       <p:sp>
         <p:nvSpPr>
@@ -33777,10 +32958,6 @@
           </a:solidFill>
           <a:ln/>
         </p:spPr>
-        <p:txBody>
-          <a:bodyPr/>
-          <a:p/>
-        </p:txBody>
       </p:sp>
       <p:sp>
         <p:nvSpPr>

--- a/docs/帮扶管理信息系统介绍.pptx
+++ b/docs/帮扶管理信息系统介绍.pptx
@@ -249,7 +249,7 @@
                 <c:formatCode>General</c:formatCode>
                 <c:ptCount val="2"/>
                 <c:pt idx="0">
-                  <c:v>11868</c:v>
+                  <c:v>11870</c:v>
                 </c:pt>
                 <c:pt idx="1">
                   <c:v>6287</c:v>
@@ -4954,7 +4954,7 @@
                 <a:ea typeface="微软雅黑" pitchFamily="34" charset="-122"/>
                 <a:cs typeface="微软雅黑" pitchFamily="34" charset="-120"/>
               </a:rPr>
-              <a:t>V1.12.9  |  2026-09-14  |  FastAPI + Vue 3 + Electron + SQLite</a:t>
+              <a:t>V1.12.10  |  2026-10-02  |  FastAPI + Vue 3 + Electron + SQLite</a:t>
             </a:r>
             <a:endParaRPr lang="en-US" sz="1250" dirty="0"/>
           </a:p>
@@ -5162,7 +5162,7 @@
                 <a:ea typeface="微软雅黑" pitchFamily="34" charset="-122"/>
                 <a:cs typeface="微软雅黑" pitchFamily="34" charset="-120"/>
               </a:rPr>
-              <a:t>帮扶管理信息系统 v1.12.9</a:t>
+              <a:t>帮扶管理信息系统 v1.12.10</a:t>
             </a:r>
             <a:endParaRPr lang="en-US" sz="1050" dirty="0"/>
           </a:p>
@@ -5760,7 +5760,7 @@
                 <a:ea typeface="微软雅黑" pitchFamily="34" charset="-122"/>
                 <a:cs typeface="微软雅黑" pitchFamily="34" charset="-120"/>
               </a:rPr>
-              <a:t>帮扶管理信息系统 v1.12.9</a:t>
+              <a:t>帮扶管理信息系统 v1.12.10</a:t>
             </a:r>
             <a:endParaRPr lang="en-US" sz="1050" dirty="0"/>
           </a:p>
@@ -6632,7 +6632,7 @@
                 <a:ea typeface="微软雅黑" pitchFamily="34" charset="-122"/>
                 <a:cs typeface="微软雅黑" pitchFamily="34" charset="-120"/>
               </a:rPr>
-              <a:t>帮扶管理信息系统 v1.12.9</a:t>
+              <a:t>帮扶管理信息系统 v1.12.10</a:t>
             </a:r>
             <a:endParaRPr lang="en-US" sz="1050" dirty="0"/>
           </a:p>
@@ -7230,7 +7230,7 @@
                 <a:ea typeface="微软雅黑" pitchFamily="34" charset="-122"/>
                 <a:cs typeface="微软雅黑" pitchFamily="34" charset="-120"/>
               </a:rPr>
-              <a:t>帮扶管理信息系统 v1.12.9</a:t>
+              <a:t>帮扶管理信息系统 v1.12.10</a:t>
             </a:r>
             <a:endParaRPr lang="en-US" sz="1050" dirty="0"/>
           </a:p>
@@ -8563,7 +8563,7 @@
                 <a:ea typeface="微软雅黑" pitchFamily="34" charset="-122"/>
                 <a:cs typeface="微软雅黑" pitchFamily="34" charset="-120"/>
               </a:rPr>
-              <a:t>帮扶管理信息系统 v1.12.9</a:t>
+              <a:t>帮扶管理信息系统 v1.12.10</a:t>
             </a:r>
             <a:endParaRPr lang="en-US" sz="1050" dirty="0"/>
           </a:p>
@@ -9686,7 +9686,7 @@
                 <a:ea typeface="微软雅黑" pitchFamily="34" charset="-122"/>
                 <a:cs typeface="微软雅黑" pitchFamily="34" charset="-120"/>
               </a:rPr>
-              <a:t>帮扶管理信息系统 v1.12.9</a:t>
+              <a:t>帮扶管理信息系统 v1.12.10</a:t>
             </a:r>
             <a:endParaRPr lang="en-US" sz="1050" dirty="0"/>
           </a:p>
@@ -10284,7 +10284,7 @@
                 <a:ea typeface="微软雅黑" pitchFamily="34" charset="-122"/>
                 <a:cs typeface="微软雅黑" pitchFamily="34" charset="-120"/>
               </a:rPr>
-              <a:t>帮扶管理信息系统 v1.12.9</a:t>
+              <a:t>帮扶管理信息系统 v1.12.10</a:t>
             </a:r>
             <a:endParaRPr lang="en-US" sz="1050" dirty="0"/>
           </a:p>
@@ -11086,7 +11086,7 @@
                 <a:ea typeface="微软雅黑" pitchFamily="34" charset="-122"/>
                 <a:cs typeface="微软雅黑" pitchFamily="34" charset="-120"/>
               </a:rPr>
-              <a:t>帮扶管理信息系统 v1.12.9</a:t>
+              <a:t>帮扶管理信息系统 v1.12.10</a:t>
             </a:r>
             <a:endParaRPr lang="en-US" sz="1050" dirty="0"/>
           </a:p>
@@ -11775,7 +11775,7 @@
                 <a:ea typeface="微软雅黑" pitchFamily="34" charset="-122"/>
                 <a:cs typeface="微软雅黑" pitchFamily="34" charset="-120"/>
               </a:rPr>
-              <a:t>帮扶管理信息系统 v1.12.9</a:t>
+              <a:t>帮扶管理信息系统 v1.12.10</a:t>
             </a:r>
             <a:endParaRPr lang="en-US" sz="1050" dirty="0"/>
           </a:p>
@@ -14185,7 +14185,7 @@
                 <a:ea typeface="微软雅黑" pitchFamily="34" charset="-122"/>
                 <a:cs typeface="微软雅黑" pitchFamily="34" charset="-120"/>
               </a:rPr>
-              <a:t>帮扶管理信息系统 v1.12.9</a:t>
+              <a:t>帮扶管理信息系统 v1.12.10</a:t>
             </a:r>
             <a:endParaRPr lang="en-US" sz="1050" dirty="0"/>
           </a:p>
@@ -14783,7 +14783,7 @@
                 <a:ea typeface="微软雅黑" pitchFamily="34" charset="-122"/>
                 <a:cs typeface="微软雅黑" pitchFamily="34" charset="-120"/>
               </a:rPr>
-              <a:t>帮扶管理信息系统 v1.12.9</a:t>
+              <a:t>帮扶管理信息系统 v1.12.10</a:t>
             </a:r>
             <a:endParaRPr lang="en-US" sz="1050" dirty="0"/>
           </a:p>
@@ -15413,7 +15413,7 @@
                 <a:ea typeface="微软雅黑" pitchFamily="34" charset="-122"/>
                 <a:cs typeface="微软雅黑" pitchFamily="34" charset="-120"/>
               </a:rPr>
-              <a:t>帮扶管理信息系统 v1.12.9</a:t>
+              <a:t>帮扶管理信息系统 v1.12.10</a:t>
             </a:r>
             <a:endParaRPr lang="en-US" sz="1050" dirty="0"/>
           </a:p>
@@ -16076,7 +16076,7 @@
                 <a:ea typeface="微软雅黑" pitchFamily="34" charset="-122"/>
                 <a:cs typeface="微软雅黑" pitchFamily="34" charset="-120"/>
               </a:rPr>
-              <a:t>帮扶管理信息系统 v1.12.9</a:t>
+              <a:t>帮扶管理信息系统 v1.12.10</a:t>
             </a:r>
             <a:endParaRPr lang="en-US" sz="1050" dirty="0"/>
           </a:p>
@@ -16926,7 +16926,7 @@
                 <a:ea typeface="微软雅黑" pitchFamily="34" charset="-122"/>
                 <a:cs typeface="微软雅黑" pitchFamily="34" charset="-120"/>
               </a:rPr>
-              <a:t>帮扶管理信息系统 v1.12.9</a:t>
+              <a:t>帮扶管理信息系统 v1.12.10</a:t>
             </a:r>
             <a:endParaRPr lang="en-US" sz="1050" dirty="0"/>
           </a:p>
@@ -18070,7 +18070,7 @@
                 <a:ea typeface="微软雅黑" pitchFamily="34" charset="-122"/>
                 <a:cs typeface="微软雅黑" pitchFamily="34" charset="-120"/>
               </a:rPr>
-              <a:t>帮扶管理信息系统 v1.12.9</a:t>
+              <a:t>帮扶管理信息系统 v1.12.10</a:t>
             </a:r>
             <a:endParaRPr lang="en-US" sz="1050" dirty="0"/>
           </a:p>
@@ -19035,7 +19035,7 @@
                 <a:ea typeface="微软雅黑" pitchFamily="34" charset="-122"/>
                 <a:cs typeface="微软雅黑" pitchFamily="34" charset="-120"/>
               </a:rPr>
-              <a:t>帮扶管理信息系统 v1.12.9</a:t>
+              <a:t>帮扶管理信息系统 v1.12.10</a:t>
             </a:r>
             <a:endParaRPr lang="en-US" sz="1050" dirty="0"/>
           </a:p>
@@ -19834,7 +19834,7 @@
                 <a:ea typeface="微软雅黑" pitchFamily="34" charset="-122"/>
                 <a:cs typeface="微软雅黑" pitchFamily="34" charset="-120"/>
               </a:rPr>
-              <a:t>帮扶管理信息系统 v1.12.9</a:t>
+              <a:t>帮扶管理信息系统 v1.12.10</a:t>
             </a:r>
             <a:endParaRPr lang="en-US" sz="1050" dirty="0"/>
           </a:p>
@@ -20686,7 +20686,7 @@
                 <a:ea typeface="微软雅黑" pitchFamily="34" charset="-122"/>
                 <a:cs typeface="微软雅黑" pitchFamily="34" charset="-120"/>
               </a:rPr>
-              <a:t>帮扶管理信息系统 v1.12.9</a:t>
+              <a:t>帮扶管理信息系统 v1.12.10</a:t>
             </a:r>
             <a:endParaRPr lang="en-US" sz="1050" dirty="0"/>
           </a:p>
@@ -21776,7 +21776,7 @@
                 <a:ea typeface="微软雅黑" pitchFamily="34" charset="-122"/>
                 <a:cs typeface="微软雅黑" pitchFamily="34" charset="-120"/>
               </a:rPr>
-              <a:t>帮扶管理信息系统 v1.12.9</a:t>
+              <a:t>帮扶管理信息系统 v1.12.10</a:t>
             </a:r>
             <a:endParaRPr lang="en-US" sz="1050" dirty="0"/>
           </a:p>
@@ -22721,7 +22721,7 @@
                 <a:ea typeface="微软雅黑" pitchFamily="34" charset="-122"/>
                 <a:cs typeface="微软雅黑" pitchFamily="34" charset="-120"/>
               </a:rPr>
-              <a:t>帮扶管理信息系统 v1.12.9</a:t>
+              <a:t>帮扶管理信息系统 v1.12.10</a:t>
             </a:r>
             <a:endParaRPr lang="en-US" sz="1050" dirty="0"/>
           </a:p>
@@ -22776,7 +22776,7 @@
                 <a:ea typeface="微软雅黑" pitchFamily="34" charset="-122"/>
                 <a:cs typeface="微软雅黑" pitchFamily="34" charset="-120"/>
               </a:rPr>
-              <a:t>数据来源：v1.12.9 全量本地实测（2026-09-14）· 后端与前端覆盖率均 100%</a:t>
+              <a:t>数据来源：v1.12.10 全量本地实测（2026-10-02）· 后端与前端覆盖率均 100%</a:t>
             </a:r>
             <a:endParaRPr lang="en-US" sz="1100" dirty="0"/>
           </a:p>
@@ -23200,7 +23200,7 @@
                 <a:ea typeface="微软雅黑" pitchFamily="34" charset="-122"/>
                 <a:cs typeface="微软雅黑" pitchFamily="34" charset="-120"/>
               </a:rPr>
-              <a:t>帮扶管理信息系统 v1.12.9</a:t>
+              <a:t>帮扶管理信息系统 v1.12.10</a:t>
             </a:r>
             <a:endParaRPr lang="en-US" sz="1050" dirty="0"/>
           </a:p>
@@ -23847,7 +23847,7 @@
                 <a:ea typeface="微软雅黑" pitchFamily="34" charset="-122"/>
                 <a:cs typeface="微软雅黑" pitchFamily="34" charset="-120"/>
               </a:rPr>
-              <a:t>帮扶管理信息系统 v1.12.9</a:t>
+              <a:t>帮扶管理信息系统 v1.12.10</a:t>
             </a:r>
             <a:endParaRPr lang="en-US" sz="1050" dirty="0"/>
           </a:p>
@@ -24445,7 +24445,7 @@
                 <a:ea typeface="微软雅黑" pitchFamily="34" charset="-122"/>
                 <a:cs typeface="微软雅黑" pitchFamily="34" charset="-120"/>
               </a:rPr>
-              <a:t>帮扶管理信息系统 v1.12.9</a:t>
+              <a:t>帮扶管理信息系统 v1.12.10</a:t>
             </a:r>
             <a:endParaRPr lang="en-US" sz="1050" dirty="0"/>
           </a:p>
@@ -25358,7 +25358,7 @@
                 <a:ea typeface="微软雅黑" pitchFamily="34" charset="-122"/>
                 <a:cs typeface="微软雅黑" pitchFamily="34" charset="-120"/>
               </a:rPr>
-              <a:t>帮扶管理信息系统 v1.12.9</a:t>
+              <a:t>帮扶管理信息系统 v1.12.10</a:t>
             </a:r>
             <a:endParaRPr lang="en-US" sz="1050" dirty="0"/>
           </a:p>
@@ -26394,7 +26394,7 @@
                 <a:ea typeface="微软雅黑" pitchFamily="34" charset="-122"/>
                 <a:cs typeface="微软雅黑" pitchFamily="34" charset="-120"/>
               </a:rPr>
-              <a:t>帮扶管理信息系统 v1.12.9</a:t>
+              <a:t>帮扶管理信息系统 v1.12.10</a:t>
             </a:r>
             <a:endParaRPr lang="en-US" sz="1050" dirty="0"/>
           </a:p>
@@ -26992,7 +26992,7 @@
                 <a:ea typeface="微软雅黑" pitchFamily="34" charset="-122"/>
                 <a:cs typeface="微软雅黑" pitchFamily="34" charset="-120"/>
               </a:rPr>
-              <a:t>帮扶管理信息系统 v1.12.9</a:t>
+              <a:t>帮扶管理信息系统 v1.12.10</a:t>
             </a:r>
             <a:endParaRPr lang="en-US" sz="1050" dirty="0"/>
           </a:p>
@@ -27074,7 +27074,7 @@
                 <a:ea typeface="微软雅黑" pitchFamily="34" charset="-122"/>
                 <a:cs typeface="微软雅黑" pitchFamily="34" charset="-120"/>
               </a:rPr>
-              <a:t>v1.12.2</a:t>
+              <a:t>v1.12.5</a:t>
             </a:r>
             <a:endParaRPr lang="en-US" sz="1500" dirty="0"/>
           </a:p>
@@ -27152,7 +27152,7 @@
                 <a:ea typeface="微软雅黑" pitchFamily="34" charset="-122"/>
                 <a:cs typeface="微软雅黑" pitchFamily="34" charset="-120"/>
               </a:rPr>
-              <a:t>架构评估 P0/P1 加固：导出任务重启恢复、导出/备份原子写、备份可恢复性校验</a:t>
+              <a:t>深度审计 13 项修复：目录穿越 / 存储型 XSS / 并发 / 备份 fail-loud</a:t>
             </a:r>
             <a:endParaRPr lang="en-US" sz="1150" dirty="0"/>
           </a:p>
@@ -27211,7 +27211,7 @@
                 <a:ea typeface="微软雅黑" pitchFamily="34" charset="-122"/>
                 <a:cs typeface="微软雅黑" pitchFamily="34" charset="-120"/>
               </a:rPr>
-              <a:t>v1.12.5</a:t>
+              <a:t>v1.12.7</a:t>
             </a:r>
             <a:endParaRPr lang="en-US" sz="1500" dirty="0"/>
           </a:p>
@@ -27250,7 +27250,7 @@
                 <a:ea typeface="微软雅黑" pitchFamily="34" charset="-122"/>
                 <a:cs typeface="微软雅黑" pitchFamily="34" charset="-120"/>
               </a:rPr>
-              <a:t>09-12</a:t>
+              <a:t>09-13</a:t>
             </a:r>
             <a:endParaRPr lang="en-US" sz="1100" dirty="0"/>
           </a:p>
@@ -27289,7 +27289,7 @@
                 <a:ea typeface="微软雅黑" pitchFamily="34" charset="-122"/>
                 <a:cs typeface="微软雅黑" pitchFamily="34" charset="-120"/>
               </a:rPr>
-              <a:t>深度审计 13 项修复：目录穿越 / 存储型 XSS / 并发 / 备份 fail-loud</a:t>
+              <a:t>遗留风险二批：上传体积三层上限、导出回收、导入拒绝记录、Windows CI 可见性</a:t>
             </a:r>
             <a:endParaRPr lang="en-US" sz="1150" dirty="0"/>
           </a:p>
@@ -27348,7 +27348,7 @@
                 <a:ea typeface="微软雅黑" pitchFamily="34" charset="-122"/>
                 <a:cs typeface="微软雅黑" pitchFamily="34" charset="-120"/>
               </a:rPr>
-              <a:t>v1.12.7</a:t>
+              <a:t>v1.12.8</a:t>
             </a:r>
             <a:endParaRPr lang="en-US" sz="1500" dirty="0"/>
           </a:p>
@@ -27387,7 +27387,7 @@
                 <a:ea typeface="微软雅黑" pitchFamily="34" charset="-122"/>
                 <a:cs typeface="微软雅黑" pitchFamily="34" charset="-120"/>
               </a:rPr>
-              <a:t>09-13</a:t>
+              <a:t>09-14</a:t>
             </a:r>
             <a:endParaRPr lang="en-US" sz="1100" dirty="0"/>
           </a:p>
@@ -27426,7 +27426,7 @@
                 <a:ea typeface="微软雅黑" pitchFamily="34" charset="-122"/>
                 <a:cs typeface="微软雅黑" pitchFamily="34" charset="-120"/>
               </a:rPr>
-              <a:t>遗留风险二批：上传体积三层上限、导出回收、导入拒绝记录、Windows CI 可见性</a:t>
+              <a:t>R7 恢复维护闸门 / R12 低危批量 7 项 / R2 残余清零 / P-1~P-3 门禁 / R14 组织树修复</a:t>
             </a:r>
             <a:endParaRPr lang="en-US" sz="1150" dirty="0"/>
           </a:p>
@@ -27485,7 +27485,7 @@
                 <a:ea typeface="微软雅黑" pitchFamily="34" charset="-122"/>
                 <a:cs typeface="微软雅黑" pitchFamily="34" charset="-120"/>
               </a:rPr>
-              <a:t>v1.12.8</a:t>
+              <a:t>v1.12.9</a:t>
             </a:r>
             <a:endParaRPr lang="en-US" sz="1500" dirty="0"/>
           </a:p>
@@ -27563,7 +27563,7 @@
                 <a:ea typeface="微软雅黑" pitchFamily="34" charset="-122"/>
                 <a:cs typeface="微软雅黑" pitchFamily="34" charset="-120"/>
               </a:rPr>
-              <a:t>R7 恢复维护闸门 / R12 低危批量 7 项 / R2 残余清零 / P-1~P-3 门禁 / R14 组织树修复</a:t>
+              <a:t>深审缺陷批量修复（越权/数据完整性/静默失效）+ 响应信封与凭据语义修复 + 前后端覆盖率双双补齐至 100%（前端 10 个文件：安全守卫零覆盖、弱断言、死代码）</a:t>
             </a:r>
             <a:endParaRPr lang="en-US" sz="1150" dirty="0"/>
           </a:p>
@@ -27622,7 +27622,7 @@
                 <a:ea typeface="微软雅黑" pitchFamily="34" charset="-122"/>
                 <a:cs typeface="微软雅黑" pitchFamily="34" charset="-120"/>
               </a:rPr>
-              <a:t>v1.12.9</a:t>
+              <a:t>v1.12.10</a:t>
             </a:r>
             <a:endParaRPr lang="en-US" sz="1500" dirty="0"/>
           </a:p>
@@ -27661,7 +27661,7 @@
                 <a:ea typeface="微软雅黑" pitchFamily="34" charset="-122"/>
                 <a:cs typeface="微软雅黑" pitchFamily="34" charset="-120"/>
               </a:rPr>
-              <a:t>09-14</a:t>
+              <a:t>10-02</a:t>
             </a:r>
             <a:endParaRPr lang="en-US" sz="1100" dirty="0"/>
           </a:p>
@@ -27700,7 +27700,7 @@
                 <a:ea typeface="微软雅黑" pitchFamily="34" charset="-122"/>
                 <a:cs typeface="微软雅黑" pitchFamily="34" charset="-120"/>
               </a:rPr>
-              <a:t>深审缺陷批量修复（越权/数据完整性/静默失效）+ 响应信封与凭据语义修复 + 前后端覆盖率双双补齐至 100%（前端 10 个文件：安全守卫零覆盖、弱断言、死代码）</a:t>
+              <a:t>跨平台 CI 双红根因修复：归档恢复穿越判定去平台化（Windows 风格路径曾绕过校验）、审批时间轴断言去时区依赖（UTC runner 与本地结论相反）+ 测试会话数据根隔离契约（Linux 上 override 曾被短路忽略）</a:t>
             </a:r>
             <a:endParaRPr lang="en-US" sz="1150" dirty="0"/>
           </a:p>
@@ -27768,7 +27768,7 @@
                 <a:ea typeface="微软雅黑" pitchFamily="34" charset="-122"/>
                 <a:cs typeface="微软雅黑" pitchFamily="34" charset="-120"/>
               </a:rPr>
-              <a:t>净效果：11,868 后端用例（覆盖率 100%）+ 6,287 前端用例全绿；Windows x64 与麒麟 ARM64 两个离线安装包由 GitHub Actions 全自动构建并发布 Release</a:t>
+              <a:t>净效果：11,870 后端用例（覆盖率 100%）+ 6,287 前端用例全绿；Windows x64 与麒麟 ARM64 两个离线安装包由 GitHub Actions 全自动构建并发布 Release</a:t>
             </a:r>
             <a:endParaRPr lang="en-US" sz="1350" dirty="0"/>
           </a:p>
@@ -27976,7 +27976,7 @@
                 <a:ea typeface="微软雅黑" pitchFamily="34" charset="-122"/>
                 <a:cs typeface="微软雅黑" pitchFamily="34" charset="-120"/>
               </a:rPr>
-              <a:t>帮扶管理信息系统 v1.12.9</a:t>
+              <a:t>帮扶管理信息系统 v1.12.10</a:t>
             </a:r>
             <a:endParaRPr lang="en-US" sz="1050" dirty="0"/>
           </a:p>
@@ -28517,7 +28517,7 @@
                 <a:ea typeface="微软雅黑" pitchFamily="34" charset="-122"/>
                 <a:cs typeface="微软雅黑" pitchFamily="34" charset="-120"/>
               </a:rPr>
-              <a:t>帮扶管理信息系统 v1.12.9</a:t>
+              <a:t>帮扶管理信息系统 v1.12.10</a:t>
             </a:r>
             <a:endParaRPr lang="en-US" sz="1050" dirty="0"/>
           </a:p>
@@ -29387,7 +29387,7 @@
                 <a:ea typeface="微软雅黑" pitchFamily="34" charset="-122"/>
                 <a:cs typeface="微软雅黑" pitchFamily="34" charset="-120"/>
               </a:rPr>
-              <a:t>11,868 后端用例（覆盖率 100%）+ 6,287 前端用例 全绿守护 · Windows x64 / 麒麟 ARM64 双平台离线交付</a:t>
+              <a:t>11,870 后端用例（覆盖率 100%）+ 6,287 前端用例 全绿守护 · Windows x64 / 麒麟 ARM64 双平台离线交付</a:t>
             </a:r>
             <a:endParaRPr lang="en-US" sz="1350" dirty="0"/>
           </a:p>
@@ -29595,7 +29595,7 @@
                 <a:ea typeface="微软雅黑" pitchFamily="34" charset="-122"/>
                 <a:cs typeface="微软雅黑" pitchFamily="34" charset="-120"/>
               </a:rPr>
-              <a:t>帮扶管理信息系统 v1.12.9</a:t>
+              <a:t>帮扶管理信息系统 v1.12.10</a:t>
             </a:r>
             <a:endParaRPr lang="en-US" sz="1050" dirty="0"/>
           </a:p>
@@ -30311,7 +30311,7 @@
                 <a:ea typeface="微软雅黑" pitchFamily="34" charset="-122"/>
                 <a:cs typeface="微软雅黑" pitchFamily="34" charset="-120"/>
               </a:rPr>
-              <a:t>帮扶管理信息系统 v1.12.9</a:t>
+              <a:t>帮扶管理信息系统 v1.12.10</a:t>
             </a:r>
             <a:endParaRPr lang="en-US" sz="1050" dirty="0"/>
           </a:p>
@@ -30350,7 +30350,7 @@
                 <a:ea typeface="微软雅黑" pitchFamily="34" charset="-122"/>
                 <a:cs typeface="微软雅黑" pitchFamily="34" charset="-120"/>
               </a:rPr>
-              <a:t>11,868</a:t>
+              <a:t>11,870</a:t>
             </a:r>
             <a:endParaRPr lang="en-US" sz="4000" dirty="0"/>
           </a:p>
@@ -30997,7 +30997,7 @@
                 <a:ea typeface="微软雅黑" pitchFamily="34" charset="-122"/>
                 <a:cs typeface="微软雅黑" pitchFamily="34" charset="-120"/>
               </a:rPr>
-              <a:t>数据来源：仓库实测（2026-09-14，v1.12.9）—— 后端 11,868 用例全绿 / 覆盖率 100% · 前端 6,287 用例全绿 · flake8 0 · bandit 0 中高危 · vue-tsc 0 · eslint 0 警告</a:t>
+              <a:t>数据来源：仓库实测（2026-10-02，v1.12.10）—— 后端 11,870 用例全绿 / 覆盖率 100% · 前端 6,287 用例全绿 · flake8 0 · bandit 0 中高危 · vue-tsc 0 · eslint 0 警告</a:t>
             </a:r>
             <a:endParaRPr lang="en-US" sz="1200" dirty="0"/>
           </a:p>
@@ -31499,7 +31499,7 @@
                 <a:ea typeface="微软雅黑" pitchFamily="34" charset="-122"/>
                 <a:cs typeface="微软雅黑" pitchFamily="34" charset="-120"/>
               </a:rPr>
-              <a:t>帮扶管理信息系统 v1.12.9</a:t>
+              <a:t>帮扶管理信息系统 v1.12.10</a:t>
             </a:r>
             <a:endParaRPr lang="en-US" sz="1050" dirty="0"/>
           </a:p>
@@ -32559,7 +32559,7 @@
                 <a:ea typeface="微软雅黑" pitchFamily="34" charset="-122"/>
                 <a:cs typeface="微软雅黑" pitchFamily="34" charset="-120"/>
               </a:rPr>
-              <a:t>帮扶管理信息系统 v1.12.9</a:t>
+              <a:t>帮扶管理信息系统 v1.12.10</a:t>
             </a:r>
             <a:endParaRPr lang="en-US" sz="1050" dirty="0"/>
           </a:p>

--- a/docs/帮扶管理信息系统介绍.pptx
+++ b/docs/帮扶管理信息系统介绍.pptx
@@ -249,7 +249,7 @@
                 <c:formatCode>General</c:formatCode>
                 <c:ptCount val="2"/>
                 <c:pt idx="0">
-                  <c:v>11870</c:v>
+                  <c:v>11915</c:v>
                 </c:pt>
                 <c:pt idx="1">
                   <c:v>6287</c:v>
@@ -27768,7 +27768,7 @@
                 <a:ea typeface="微软雅黑" pitchFamily="34" charset="-122"/>
                 <a:cs typeface="微软雅黑" pitchFamily="34" charset="-120"/>
               </a:rPr>
-              <a:t>净效果：11,870 后端用例（覆盖率 100%）+ 6,287 前端用例全绿；Windows x64 与麒麟 ARM64 两个离线安装包由 GitHub Actions 全自动构建并发布 Release</a:t>
+              <a:t>净效果：11,915 后端用例（覆盖率 100%）+ 6,287 前端用例全绿；Windows x64 与麒麟 ARM64 两个离线安装包由 GitHub Actions 全自动构建并发布 Release</a:t>
             </a:r>
             <a:endParaRPr lang="en-US" sz="1350" dirty="0"/>
           </a:p>
@@ -29387,7 +29387,7 @@
                 <a:ea typeface="微软雅黑" pitchFamily="34" charset="-122"/>
                 <a:cs typeface="微软雅黑" pitchFamily="34" charset="-120"/>
               </a:rPr>
-              <a:t>11,870 后端用例（覆盖率 100%）+ 6,287 前端用例 全绿守护 · Windows x64 / 麒麟 ARM64 双平台离线交付</a:t>
+              <a:t>11,915 后端用例（覆盖率 100%）+ 6,287 前端用例 全绿守护 · Windows x64 / 麒麟 ARM64 双平台离线交付</a:t>
             </a:r>
             <a:endParaRPr lang="en-US" sz="1350" dirty="0"/>
           </a:p>
@@ -30350,7 +30350,7 @@
                 <a:ea typeface="微软雅黑" pitchFamily="34" charset="-122"/>
                 <a:cs typeface="微软雅黑" pitchFamily="34" charset="-120"/>
               </a:rPr>
-              <a:t>11,870</a:t>
+              <a:t>11,915</a:t>
             </a:r>
             <a:endParaRPr lang="en-US" sz="4000" dirty="0"/>
           </a:p>
@@ -30997,7 +30997,7 @@
                 <a:ea typeface="微软雅黑" pitchFamily="34" charset="-122"/>
                 <a:cs typeface="微软雅黑" pitchFamily="34" charset="-120"/>
               </a:rPr>
-              <a:t>数据来源：仓库实测（2026-10-02，v1.12.10）—— 后端 11,870 用例全绿 / 覆盖率 100% · 前端 6,287 用例全绿 · flake8 0 · bandit 0 中高危 · vue-tsc 0 · eslint 0 警告</a:t>
+              <a:t>数据来源：仓库实测（2026-10-02，v1.12.11）—— 后端 11,915 用例全绿 / 覆盖率 100% · 前端 6,287 用例全绿 · flake8 0 · bandit 0 中高危 · vue-tsc 0 · eslint 0 警告</a:t>
             </a:r>
             <a:endParaRPr lang="en-US" sz="1200" dirty="0"/>
           </a:p>

--- a/docs/帮扶管理信息系统介绍.pptx
+++ b/docs/帮扶管理信息系统介绍.pptx
@@ -249,7 +249,7 @@
                 <c:formatCode>General</c:formatCode>
                 <c:ptCount val="2"/>
                 <c:pt idx="0">
-                  <c:v>11915</c:v>
+                  <c:v>11916</c:v>
                 </c:pt>
                 <c:pt idx="1">
                   <c:v>6287</c:v>
@@ -4760,7 +4760,9 @@
           <a:ln/>
         </p:spPr>
         <p:txBody>
-          <a:bodyPr wrap="square" lIns="0" tIns="0" rIns="0" bIns="0" rtlCol="0" anchor="ctr"/>
+          <a:bodyPr wrap="square" lIns="0" tIns="0" rIns="0" bIns="0" rtlCol="0" anchor="ctr">
+            <a:normAutofit/>
+          </a:bodyPr>
           <a:lstStyle/>
           <a:p>
             <a:pPr indent="0" marL="0">
@@ -4790,16 +4792,18 @@
         <p:spPr>
           <a:xfrm>
             <a:off x="877824" y="2331720"/>
-            <a:ext cx="10515600" cy="1234440"/>
-          </a:xfrm>
-          <a:prstGeom prst="rect">
-            <a:avLst/>
-          </a:prstGeom>
-          <a:noFill/>
-          <a:ln/>
-        </p:spPr>
-        <p:txBody>
-          <a:bodyPr wrap="square" lIns="0" tIns="0" rIns="0" bIns="0" rtlCol="0" anchor="ctr"/>
+            <a:ext cx="10515600" cy="1264370"/>
+          </a:xfrm>
+          <a:prstGeom prst="rect">
+            <a:avLst/>
+          </a:prstGeom>
+          <a:noFill/>
+          <a:ln/>
+        </p:spPr>
+        <p:txBody>
+          <a:bodyPr wrap="square" lIns="0" tIns="0" rIns="0" bIns="0" rtlCol="0" anchor="ctr">
+            <a:normAutofit/>
+          </a:bodyPr>
           <a:lstStyle/>
           <a:p>
             <a:pPr indent="0" marL="0">
@@ -4838,7 +4842,9 @@
           <a:ln/>
         </p:spPr>
         <p:txBody>
-          <a:bodyPr wrap="square" lIns="0" tIns="0" rIns="0" bIns="0" rtlCol="0" anchor="ctr"/>
+          <a:bodyPr wrap="square" lIns="0" tIns="0" rIns="0" bIns="0" rtlCol="0" anchor="ctr">
+            <a:normAutofit/>
+          </a:bodyPr>
           <a:lstStyle/>
           <a:p>
             <a:pPr indent="0" marL="0">
@@ -4877,7 +4883,9 @@
           <a:ln/>
         </p:spPr>
         <p:txBody>
-          <a:bodyPr wrap="square" lIns="0" tIns="0" rIns="0" bIns="0" rtlCol="0" anchor="ctr"/>
+          <a:bodyPr wrap="square" lIns="0" tIns="0" rIns="0" bIns="0" rtlCol="0" anchor="ctr">
+            <a:normAutofit/>
+          </a:bodyPr>
           <a:lstStyle/>
           <a:p>
             <a:pPr indent="0" marL="0">
@@ -4939,7 +4947,9 @@
           <a:ln/>
         </p:spPr>
         <p:txBody>
-          <a:bodyPr wrap="square" lIns="0" tIns="0" rIns="0" bIns="0" rtlCol="0" anchor="ctr"/>
+          <a:bodyPr wrap="square" lIns="0" tIns="0" rIns="0" bIns="0" rtlCol="0" anchor="ctr">
+            <a:normAutofit/>
+          </a:bodyPr>
           <a:lstStyle/>
           <a:p>
             <a:pPr indent="0" marL="0">
@@ -4954,7 +4964,7 @@
                 <a:ea typeface="微软雅黑" pitchFamily="34" charset="-122"/>
                 <a:cs typeface="微软雅黑" pitchFamily="34" charset="-120"/>
               </a:rPr>
-              <a:t>V1.12.10  |  2026-10-02  |  FastAPI + Vue 3 + Electron + SQLite</a:t>
+              <a:t>V1.12.11  |  2026-10-02  |  FastAPI + Vue 3 + Electron + SQLite</a:t>
             </a:r>
             <a:endParaRPr lang="en-US" sz="1250" dirty="0"/>
           </a:p>
@@ -5030,7 +5040,9 @@
           <a:ln/>
         </p:spPr>
         <p:txBody>
-          <a:bodyPr wrap="square" lIns="0" tIns="0" rIns="0" bIns="0" rtlCol="0" anchor="ctr"/>
+          <a:bodyPr wrap="square" lIns="0" tIns="0" rIns="0" bIns="0" rtlCol="0" anchor="ctr">
+            <a:normAutofit/>
+          </a:bodyPr>
           <a:lstStyle/>
           <a:p>
             <a:pPr indent="0" marL="0">
@@ -5069,7 +5081,9 @@
           <a:ln/>
         </p:spPr>
         <p:txBody>
-          <a:bodyPr wrap="square" lIns="0" tIns="0" rIns="0" bIns="0" rtlCol="0" anchor="ctr"/>
+          <a:bodyPr wrap="square" lIns="0" tIns="0" rIns="0" bIns="0" rtlCol="0" anchor="ctr">
+            <a:normAutofit/>
+          </a:bodyPr>
           <a:lstStyle/>
           <a:p>
             <a:pPr indent="0" marL="0">
@@ -5108,7 +5122,9 @@
           <a:ln/>
         </p:spPr>
         <p:txBody>
-          <a:bodyPr wrap="square" lIns="0" tIns="0" rIns="0" bIns="0" rtlCol="0" anchor="ctr"/>
+          <a:bodyPr wrap="square" lIns="0" tIns="0" rIns="0" bIns="0" rtlCol="0" anchor="ctr">
+            <a:normAutofit/>
+          </a:bodyPr>
           <a:lstStyle/>
           <a:p>
             <a:pPr algn="r" indent="0" marL="0">
@@ -5147,7 +5163,9 @@
           <a:ln/>
         </p:spPr>
         <p:txBody>
-          <a:bodyPr wrap="square" lIns="0" tIns="0" rIns="0" bIns="0" rtlCol="0" anchor="ctr"/>
+          <a:bodyPr wrap="square" lIns="0" tIns="0" rIns="0" bIns="0" rtlCol="0" anchor="ctr">
+            <a:normAutofit/>
+          </a:bodyPr>
           <a:lstStyle/>
           <a:p>
             <a:pPr indent="0" marL="0">
@@ -5162,7 +5180,7 @@
                 <a:ea typeface="微软雅黑" pitchFamily="34" charset="-122"/>
                 <a:cs typeface="微软雅黑" pitchFamily="34" charset="-120"/>
               </a:rPr>
-              <a:t>帮扶管理信息系统 v1.12.10</a:t>
+              <a:t>帮扶管理信息系统 v1.12.11</a:t>
             </a:r>
             <a:endParaRPr lang="en-US" sz="1050" dirty="0"/>
           </a:p>
@@ -5215,7 +5233,9 @@
           <a:ln/>
         </p:spPr>
         <p:txBody>
-          <a:bodyPr wrap="square" lIns="0" tIns="0" rIns="0" bIns="0" rtlCol="0" anchor="ctr"/>
+          <a:bodyPr wrap="square" lIns="0" tIns="0" rIns="0" bIns="0" rtlCol="0" anchor="ctr">
+            <a:normAutofit/>
+          </a:bodyPr>
           <a:lstStyle/>
           <a:p>
             <a:pPr indent="0" marL="0">
@@ -5254,7 +5274,9 @@
           <a:ln/>
         </p:spPr>
         <p:txBody>
-          <a:bodyPr wrap="square" lIns="0" tIns="0" rIns="0" bIns="0" rtlCol="0" anchor="t"/>
+          <a:bodyPr wrap="square" lIns="0" tIns="0" rIns="0" bIns="0" rtlCol="0" anchor="t">
+            <a:normAutofit/>
+          </a:bodyPr>
           <a:lstStyle/>
           <a:p>
             <a:pPr algn="l" marL="152400" indent="-152400">
@@ -5410,7 +5432,9 @@
           <a:ln/>
         </p:spPr>
         <p:txBody>
-          <a:bodyPr wrap="square" lIns="0" tIns="0" rIns="0" bIns="0" rtlCol="0" anchor="ctr"/>
+          <a:bodyPr wrap="square" lIns="0" tIns="0" rIns="0" bIns="0" rtlCol="0" anchor="ctr">
+            <a:normAutofit/>
+          </a:bodyPr>
           <a:lstStyle/>
           <a:p>
             <a:pPr indent="0" marL="0">
@@ -5449,7 +5473,9 @@
           <a:ln/>
         </p:spPr>
         <p:txBody>
-          <a:bodyPr wrap="square" lIns="0" tIns="0" rIns="0" bIns="0" rtlCol="0" anchor="t"/>
+          <a:bodyPr wrap="square" lIns="0" tIns="0" rIns="0" bIns="0" rtlCol="0" anchor="t">
+            <a:normAutofit/>
+          </a:bodyPr>
           <a:lstStyle/>
           <a:p>
             <a:pPr algn="l" marL="152400" indent="-152400">
@@ -5628,7 +5654,9 @@
           <a:ln/>
         </p:spPr>
         <p:txBody>
-          <a:bodyPr wrap="square" lIns="0" tIns="0" rIns="0" bIns="0" rtlCol="0" anchor="ctr"/>
+          <a:bodyPr wrap="square" lIns="0" tIns="0" rIns="0" bIns="0" rtlCol="0" anchor="ctr">
+            <a:normAutofit/>
+          </a:bodyPr>
           <a:lstStyle/>
           <a:p>
             <a:pPr indent="0" marL="0">
@@ -5667,7 +5695,9 @@
           <a:ln/>
         </p:spPr>
         <p:txBody>
-          <a:bodyPr wrap="square" lIns="0" tIns="0" rIns="0" bIns="0" rtlCol="0" anchor="ctr"/>
+          <a:bodyPr wrap="square" lIns="0" tIns="0" rIns="0" bIns="0" rtlCol="0" anchor="ctr">
+            <a:normAutofit/>
+          </a:bodyPr>
           <a:lstStyle/>
           <a:p>
             <a:pPr indent="0" marL="0">
@@ -5706,7 +5736,9 @@
           <a:ln/>
         </p:spPr>
         <p:txBody>
-          <a:bodyPr wrap="square" lIns="0" tIns="0" rIns="0" bIns="0" rtlCol="0" anchor="ctr"/>
+          <a:bodyPr wrap="square" lIns="0" tIns="0" rIns="0" bIns="0" rtlCol="0" anchor="ctr">
+            <a:normAutofit/>
+          </a:bodyPr>
           <a:lstStyle/>
           <a:p>
             <a:pPr algn="r" indent="0" marL="0">
@@ -5745,7 +5777,9 @@
           <a:ln/>
         </p:spPr>
         <p:txBody>
-          <a:bodyPr wrap="square" lIns="0" tIns="0" rIns="0" bIns="0" rtlCol="0" anchor="ctr"/>
+          <a:bodyPr wrap="square" lIns="0" tIns="0" rIns="0" bIns="0" rtlCol="0" anchor="ctr">
+            <a:normAutofit/>
+          </a:bodyPr>
           <a:lstStyle/>
           <a:p>
             <a:pPr indent="0" marL="0">
@@ -5760,7 +5794,7 @@
                 <a:ea typeface="微软雅黑" pitchFamily="34" charset="-122"/>
                 <a:cs typeface="微软雅黑" pitchFamily="34" charset="-120"/>
               </a:rPr>
-              <a:t>帮扶管理信息系统 v1.12.10</a:t>
+              <a:t>帮扶管理信息系统 v1.12.11</a:t>
             </a:r>
             <a:endParaRPr lang="en-US" sz="1050" dirty="0"/>
           </a:p>
@@ -5804,7 +5838,9 @@
           <a:ln/>
         </p:spPr>
         <p:txBody>
-          <a:bodyPr wrap="square" lIns="0" tIns="0" rIns="0" bIns="0" rtlCol="0" anchor="ctr"/>
+          <a:bodyPr wrap="square" lIns="0" tIns="0" rIns="0" bIns="0" rtlCol="0" anchor="ctr">
+            <a:normAutofit/>
+          </a:bodyPr>
           <a:lstStyle/>
           <a:p>
             <a:pPr indent="0" marL="0">
@@ -5843,7 +5879,9 @@
           <a:ln/>
         </p:spPr>
         <p:txBody>
-          <a:bodyPr wrap="square" lIns="0" tIns="0" rIns="0" bIns="0" rtlCol="0" anchor="ctr"/>
+          <a:bodyPr wrap="square" lIns="0" tIns="0" rIns="0" bIns="0" rtlCol="0" anchor="ctr">
+            <a:normAutofit/>
+          </a:bodyPr>
           <a:lstStyle/>
           <a:p>
             <a:pPr indent="0" marL="0">
@@ -5902,7 +5940,9 @@
           <a:ln/>
         </p:spPr>
         <p:txBody>
-          <a:bodyPr wrap="square" lIns="0" tIns="0" rIns="0" bIns="0" rtlCol="0" anchor="ctr"/>
+          <a:bodyPr wrap="square" lIns="0" tIns="0" rIns="0" bIns="0" rtlCol="0" anchor="ctr">
+            <a:normAutofit/>
+          </a:bodyPr>
           <a:lstStyle/>
           <a:p>
             <a:pPr indent="0" marL="0">
@@ -5941,7 +5981,9 @@
           <a:ln/>
         </p:spPr>
         <p:txBody>
-          <a:bodyPr wrap="square" lIns="0" tIns="0" rIns="0" bIns="0" rtlCol="0" anchor="ctr"/>
+          <a:bodyPr wrap="square" lIns="0" tIns="0" rIns="0" bIns="0" rtlCol="0" anchor="ctr">
+            <a:normAutofit/>
+          </a:bodyPr>
           <a:lstStyle/>
           <a:p>
             <a:pPr indent="0" marL="0">
@@ -6000,7 +6042,9 @@
           <a:ln/>
         </p:spPr>
         <p:txBody>
-          <a:bodyPr wrap="square" lIns="0" tIns="0" rIns="0" bIns="0" rtlCol="0" anchor="ctr"/>
+          <a:bodyPr wrap="square" lIns="0" tIns="0" rIns="0" bIns="0" rtlCol="0" anchor="ctr">
+            <a:normAutofit/>
+          </a:bodyPr>
           <a:lstStyle/>
           <a:p>
             <a:pPr indent="0" marL="0">
@@ -6039,7 +6083,9 @@
           <a:ln/>
         </p:spPr>
         <p:txBody>
-          <a:bodyPr wrap="square" lIns="0" tIns="0" rIns="0" bIns="0" rtlCol="0" anchor="ctr"/>
+          <a:bodyPr wrap="square" lIns="0" tIns="0" rIns="0" bIns="0" rtlCol="0" anchor="ctr">
+            <a:normAutofit/>
+          </a:bodyPr>
           <a:lstStyle/>
           <a:p>
             <a:pPr indent="0" marL="0">
@@ -6098,7 +6144,9 @@
           <a:ln/>
         </p:spPr>
         <p:txBody>
-          <a:bodyPr wrap="square" lIns="0" tIns="0" rIns="0" bIns="0" rtlCol="0" anchor="ctr"/>
+          <a:bodyPr wrap="square" lIns="0" tIns="0" rIns="0" bIns="0" rtlCol="0" anchor="ctr">
+            <a:normAutofit/>
+          </a:bodyPr>
           <a:lstStyle/>
           <a:p>
             <a:pPr indent="0" marL="0">
@@ -6137,7 +6185,9 @@
           <a:ln/>
         </p:spPr>
         <p:txBody>
-          <a:bodyPr wrap="square" lIns="0" tIns="0" rIns="0" bIns="0" rtlCol="0" anchor="ctr"/>
+          <a:bodyPr wrap="square" lIns="0" tIns="0" rIns="0" bIns="0" rtlCol="0" anchor="ctr">
+            <a:normAutofit/>
+          </a:bodyPr>
           <a:lstStyle/>
           <a:p>
             <a:pPr indent="0" marL="0">
@@ -6152,7 +6202,7 @@
                 <a:ea typeface="微软雅黑" pitchFamily="34" charset="-122"/>
                 <a:cs typeface="微软雅黑" pitchFamily="34" charset="-120"/>
               </a:rPr>
-              <a:t>80 个服务：资金 / 项目 / 数据包 / 审批…</a:t>
+              <a:t>100 个服务：资金 / 项目 / 数据包 / 审批…</a:t>
             </a:r>
             <a:endParaRPr lang="en-US" sz="1150" dirty="0"/>
           </a:p>
@@ -6196,7 +6246,9 @@
           <a:ln/>
         </p:spPr>
         <p:txBody>
-          <a:bodyPr wrap="square" lIns="0" tIns="0" rIns="0" bIns="0" rtlCol="0" anchor="ctr"/>
+          <a:bodyPr wrap="square" lIns="0" tIns="0" rIns="0" bIns="0" rtlCol="0" anchor="ctr">
+            <a:normAutofit/>
+          </a:bodyPr>
           <a:lstStyle/>
           <a:p>
             <a:pPr indent="0" marL="0">
@@ -6235,7 +6287,9 @@
           <a:ln/>
         </p:spPr>
         <p:txBody>
-          <a:bodyPr wrap="square" lIns="0" tIns="0" rIns="0" bIns="0" rtlCol="0" anchor="ctr"/>
+          <a:bodyPr wrap="square" lIns="0" tIns="0" rIns="0" bIns="0" rtlCol="0" anchor="ctr">
+            <a:normAutofit/>
+          </a:bodyPr>
           <a:lstStyle/>
           <a:p>
             <a:pPr indent="0" marL="0">
@@ -6265,11 +6319,11 @@
         <p:spPr>
           <a:xfrm>
             <a:off x="457200" y="3977640"/>
-            <a:ext cx="11274552" cy="2011680"/>
+            <a:ext cx="11274552" cy="2252045"/>
           </a:xfrm>
           <a:prstGeom prst="roundRect">
             <a:avLst>
-              <a:gd name="adj" fmla="val 3182"/>
+              <a:gd name="adj" fmla="val 2842"/>
             </a:avLst>
           </a:prstGeom>
           <a:solidFill>
@@ -6293,17 +6347,19 @@
         </p:nvSpPr>
         <p:spPr>
           <a:xfrm>
-            <a:off x="749808" y="4206240"/>
-            <a:ext cx="2743200" cy="365760"/>
-          </a:xfrm>
-          <a:prstGeom prst="rect">
-            <a:avLst/>
-          </a:prstGeom>
-          <a:noFill/>
-          <a:ln/>
-        </p:spPr>
-        <p:txBody>
-          <a:bodyPr wrap="square" lIns="0" tIns="0" rIns="0" bIns="0" rtlCol="0" anchor="ctr"/>
+            <a:off x="749808" y="4160520"/>
+            <a:ext cx="10689336" cy="335756"/>
+          </a:xfrm>
+          <a:prstGeom prst="rect">
+            <a:avLst/>
+          </a:prstGeom>
+          <a:noFill/>
+          <a:ln/>
+        </p:spPr>
+        <p:txBody>
+          <a:bodyPr wrap="square" lIns="0" tIns="0" rIns="0" bIns="0" rtlCol="0" anchor="ctr">
+            <a:normAutofit/>
+          </a:bodyPr>
           <a:lstStyle/>
           <a:p>
             <a:pPr indent="0" marL="0">
@@ -6332,17 +6388,19 @@
         </p:nvSpPr>
         <p:spPr>
           <a:xfrm>
-            <a:off x="749808" y="4617720"/>
-            <a:ext cx="10607040" cy="1280160"/>
-          </a:xfrm>
-          <a:prstGeom prst="rect">
-            <a:avLst/>
-          </a:prstGeom>
-          <a:noFill/>
-          <a:ln/>
-        </p:spPr>
-        <p:txBody>
-          <a:bodyPr wrap="square" lIns="0" tIns="0" rIns="0" bIns="0" rtlCol="0" anchor="t"/>
+            <a:off x="749808" y="4578572"/>
+            <a:ext cx="10689336" cy="1504809"/>
+          </a:xfrm>
+          <a:prstGeom prst="rect">
+            <a:avLst/>
+          </a:prstGeom>
+          <a:noFill/>
+          <a:ln/>
+        </p:spPr>
+        <p:txBody>
+          <a:bodyPr wrap="square" lIns="0" tIns="0" rIns="0" bIns="0" rtlCol="0" anchor="t">
+            <a:normAutofit/>
+          </a:bodyPr>
           <a:lstStyle/>
           <a:p>
             <a:pPr algn="l" marL="152400" indent="-152400">
@@ -6500,7 +6558,9 @@
           <a:ln/>
         </p:spPr>
         <p:txBody>
-          <a:bodyPr wrap="square" lIns="0" tIns="0" rIns="0" bIns="0" rtlCol="0" anchor="ctr"/>
+          <a:bodyPr wrap="square" lIns="0" tIns="0" rIns="0" bIns="0" rtlCol="0" anchor="ctr">
+            <a:normAutofit/>
+          </a:bodyPr>
           <a:lstStyle/>
           <a:p>
             <a:pPr indent="0" marL="0">
@@ -6539,7 +6599,9 @@
           <a:ln/>
         </p:spPr>
         <p:txBody>
-          <a:bodyPr wrap="square" lIns="0" tIns="0" rIns="0" bIns="0" rtlCol="0" anchor="ctr"/>
+          <a:bodyPr wrap="square" lIns="0" tIns="0" rIns="0" bIns="0" rtlCol="0" anchor="ctr">
+            <a:normAutofit/>
+          </a:bodyPr>
           <a:lstStyle/>
           <a:p>
             <a:pPr indent="0" marL="0">
@@ -6578,7 +6640,9 @@
           <a:ln/>
         </p:spPr>
         <p:txBody>
-          <a:bodyPr wrap="square" lIns="0" tIns="0" rIns="0" bIns="0" rtlCol="0" anchor="ctr"/>
+          <a:bodyPr wrap="square" lIns="0" tIns="0" rIns="0" bIns="0" rtlCol="0" anchor="ctr">
+            <a:normAutofit/>
+          </a:bodyPr>
           <a:lstStyle/>
           <a:p>
             <a:pPr algn="r" indent="0" marL="0">
@@ -6617,7 +6681,9 @@
           <a:ln/>
         </p:spPr>
         <p:txBody>
-          <a:bodyPr wrap="square" lIns="0" tIns="0" rIns="0" bIns="0" rtlCol="0" anchor="ctr"/>
+          <a:bodyPr wrap="square" lIns="0" tIns="0" rIns="0" bIns="0" rtlCol="0" anchor="ctr">
+            <a:normAutofit/>
+          </a:bodyPr>
           <a:lstStyle/>
           <a:p>
             <a:pPr indent="0" marL="0">
@@ -6632,7 +6698,7 @@
                 <a:ea typeface="微软雅黑" pitchFamily="34" charset="-122"/>
                 <a:cs typeface="微软雅黑" pitchFamily="34" charset="-120"/>
               </a:rPr>
-              <a:t>帮扶管理信息系统 v1.12.10</a:t>
+              <a:t>帮扶管理信息系统 v1.12.11</a:t>
             </a:r>
             <a:endParaRPr lang="en-US" sz="1050" dirty="0"/>
           </a:p>
@@ -6685,7 +6751,9 @@
           <a:ln/>
         </p:spPr>
         <p:txBody>
-          <a:bodyPr wrap="square" lIns="0" tIns="0" rIns="0" bIns="0" rtlCol="0" anchor="ctr"/>
+          <a:bodyPr wrap="square" lIns="0" tIns="0" rIns="0" bIns="0" rtlCol="0" anchor="ctr">
+            <a:normAutofit/>
+          </a:bodyPr>
           <a:lstStyle/>
           <a:p>
             <a:pPr indent="0" marL="0">
@@ -6724,7 +6792,9 @@
           <a:ln/>
         </p:spPr>
         <p:txBody>
-          <a:bodyPr wrap="square" lIns="0" tIns="0" rIns="0" bIns="0" rtlCol="0" anchor="t"/>
+          <a:bodyPr wrap="square" lIns="0" tIns="0" rIns="0" bIns="0" rtlCol="0" anchor="t">
+            <a:normAutofit/>
+          </a:bodyPr>
           <a:lstStyle/>
           <a:p>
             <a:pPr algn="l" marL="152400" indent="-152400">
@@ -6743,7 +6813,7 @@
                 <a:ea typeface="微软雅黑" pitchFamily="34" charset="-122"/>
                 <a:cs typeface="微软雅黑" pitchFamily="34" charset="-120"/>
               </a:rPr>
-              <a:t>57 个模型文件 / 120+ 模型类：村、项目、资金、学校、政策、组织、审计…</a:t>
+              <a:t>59 个模型文件 / 120+ 模型类：村、项目、资金、学校、政策、组织、审计…</a:t>
             </a:r>
             <a:endParaRPr lang="en-US" sz="1350" dirty="0"/>
           </a:p>
@@ -6806,7 +6876,7 @@
                 <a:ea typeface="微软雅黑" pitchFamily="34" charset="-122"/>
                 <a:cs typeface="微软雅黑" pitchFamily="34" charset="-120"/>
               </a:rPr>
-              <a:t>37 个 Alembic 迁移：含 PII 存量回填（幂等可重跑）与外键守护</a:t>
+              <a:t>45 个 Alembic 迁移：含 PII 存量回填（幂等可重跑）与外键守护</a:t>
             </a:r>
             <a:endParaRPr lang="en-US" sz="1350" dirty="0"/>
           </a:p>
@@ -6880,7 +6950,9 @@
           <a:ln/>
         </p:spPr>
         <p:txBody>
-          <a:bodyPr wrap="square" lIns="0" tIns="0" rIns="0" bIns="0" rtlCol="0" anchor="ctr"/>
+          <a:bodyPr wrap="square" lIns="0" tIns="0" rIns="0" bIns="0" rtlCol="0" anchor="ctr">
+            <a:normAutofit/>
+          </a:bodyPr>
           <a:lstStyle/>
           <a:p>
             <a:pPr indent="0" marL="0">
@@ -6919,7 +6991,9 @@
           <a:ln/>
         </p:spPr>
         <p:txBody>
-          <a:bodyPr wrap="square" lIns="0" tIns="0" rIns="0" bIns="0" rtlCol="0" anchor="t"/>
+          <a:bodyPr wrap="square" lIns="0" tIns="0" rIns="0" bIns="0" rtlCol="0" anchor="t">
+            <a:normAutofit/>
+          </a:bodyPr>
           <a:lstStyle/>
           <a:p>
             <a:pPr algn="l" marL="152400" indent="-152400">
@@ -7098,7 +7172,9 @@
           <a:ln/>
         </p:spPr>
         <p:txBody>
-          <a:bodyPr wrap="square" lIns="0" tIns="0" rIns="0" bIns="0" rtlCol="0" anchor="ctr"/>
+          <a:bodyPr wrap="square" lIns="0" tIns="0" rIns="0" bIns="0" rtlCol="0" anchor="ctr">
+            <a:normAutofit/>
+          </a:bodyPr>
           <a:lstStyle/>
           <a:p>
             <a:pPr indent="0" marL="0">
@@ -7137,7 +7213,9 @@
           <a:ln/>
         </p:spPr>
         <p:txBody>
-          <a:bodyPr wrap="square" lIns="0" tIns="0" rIns="0" bIns="0" rtlCol="0" anchor="ctr"/>
+          <a:bodyPr wrap="square" lIns="0" tIns="0" rIns="0" bIns="0" rtlCol="0" anchor="ctr">
+            <a:normAutofit/>
+          </a:bodyPr>
           <a:lstStyle/>
           <a:p>
             <a:pPr indent="0" marL="0">
@@ -7176,7 +7254,9 @@
           <a:ln/>
         </p:spPr>
         <p:txBody>
-          <a:bodyPr wrap="square" lIns="0" tIns="0" rIns="0" bIns="0" rtlCol="0" anchor="ctr"/>
+          <a:bodyPr wrap="square" lIns="0" tIns="0" rIns="0" bIns="0" rtlCol="0" anchor="ctr">
+            <a:normAutofit/>
+          </a:bodyPr>
           <a:lstStyle/>
           <a:p>
             <a:pPr algn="r" indent="0" marL="0">
@@ -7215,7 +7295,9 @@
           <a:ln/>
         </p:spPr>
         <p:txBody>
-          <a:bodyPr wrap="square" lIns="0" tIns="0" rIns="0" bIns="0" rtlCol="0" anchor="ctr"/>
+          <a:bodyPr wrap="square" lIns="0" tIns="0" rIns="0" bIns="0" rtlCol="0" anchor="ctr">
+            <a:normAutofit/>
+          </a:bodyPr>
           <a:lstStyle/>
           <a:p>
             <a:pPr indent="0" marL="0">
@@ -7230,7 +7312,7 @@
                 <a:ea typeface="微软雅黑" pitchFamily="34" charset="-122"/>
                 <a:cs typeface="微软雅黑" pitchFamily="34" charset="-120"/>
               </a:rPr>
-              <a:t>帮扶管理信息系统 v1.12.10</a:t>
+              <a:t>帮扶管理信息系统 v1.12.11</a:t>
             </a:r>
             <a:endParaRPr lang="en-US" sz="1050" dirty="0"/>
           </a:p>
@@ -7283,7 +7365,9 @@
           <a:ln/>
         </p:spPr>
         <p:txBody>
-          <a:bodyPr wrap="square" lIns="0" tIns="0" rIns="0" bIns="0" rtlCol="0" anchor="ctr"/>
+          <a:bodyPr wrap="square" lIns="0" tIns="0" rIns="0" bIns="0" rtlCol="0" anchor="ctr">
+            <a:normAutofit/>
+          </a:bodyPr>
           <a:lstStyle/>
           <a:p>
             <a:pPr indent="0" marL="0">
@@ -7322,7 +7406,9 @@
           <a:ln/>
         </p:spPr>
         <p:txBody>
-          <a:bodyPr wrap="square" lIns="0" tIns="0" rIns="0" bIns="0" rtlCol="0" anchor="t"/>
+          <a:bodyPr wrap="square" lIns="0" tIns="0" rIns="0" bIns="0" rtlCol="0" anchor="t">
+            <a:normAutofit/>
+          </a:bodyPr>
           <a:lstStyle/>
           <a:p>
             <a:pPr algn="l" marL="152400" indent="-152400">
@@ -7436,7 +7522,9 @@
           <a:ln/>
         </p:spPr>
         <p:txBody>
-          <a:bodyPr wrap="square" lIns="0" tIns="0" rIns="0" bIns="0" rtlCol="0" anchor="ctr"/>
+          <a:bodyPr wrap="square" lIns="0" tIns="0" rIns="0" bIns="0" rtlCol="0" anchor="ctr">
+            <a:normAutofit/>
+          </a:bodyPr>
           <a:lstStyle/>
           <a:p>
             <a:pPr indent="0" marL="0">
@@ -7475,7 +7563,9 @@
           <a:ln/>
         </p:spPr>
         <p:txBody>
-          <a:bodyPr wrap="square" lIns="0" tIns="0" rIns="0" bIns="0" rtlCol="0" anchor="t"/>
+          <a:bodyPr wrap="square" lIns="0" tIns="0" rIns="0" bIns="0" rtlCol="0" anchor="t">
+            <a:normAutofit/>
+          </a:bodyPr>
           <a:lstStyle/>
           <a:p>
             <a:pPr algn="l" marL="152400" indent="-152400">
@@ -7582,7 +7672,9 @@
           <a:ln/>
         </p:spPr>
         <p:txBody>
-          <a:bodyPr wrap="square" lIns="0" tIns="0" rIns="0" bIns="0" rtlCol="0" anchor="ctr"/>
+          <a:bodyPr wrap="square" lIns="0" tIns="0" rIns="0" bIns="0" rtlCol="0" anchor="ctr">
+            <a:normAutofit/>
+          </a:bodyPr>
           <a:lstStyle/>
           <a:p>
             <a:pPr algn="ctr" indent="0" marL="0">
@@ -7667,7 +7759,9 @@
           <a:ln/>
         </p:spPr>
         <p:txBody>
-          <a:bodyPr wrap="square" lIns="0" tIns="0" rIns="0" bIns="0" rtlCol="0" anchor="ctr"/>
+          <a:bodyPr wrap="square" lIns="0" tIns="0" rIns="0" bIns="0" rtlCol="0" anchor="ctr">
+            <a:normAutofit/>
+          </a:bodyPr>
           <a:lstStyle/>
           <a:p>
             <a:pPr algn="ctr" indent="0" marL="0">
@@ -7752,7 +7846,9 @@
           <a:ln/>
         </p:spPr>
         <p:txBody>
-          <a:bodyPr wrap="square" lIns="0" tIns="0" rIns="0" bIns="0" rtlCol="0" anchor="ctr"/>
+          <a:bodyPr wrap="square" lIns="0" tIns="0" rIns="0" bIns="0" rtlCol="0" anchor="ctr">
+            <a:normAutofit/>
+          </a:bodyPr>
           <a:lstStyle/>
           <a:p>
             <a:pPr algn="ctr" indent="0" marL="0">
@@ -7837,7 +7933,9 @@
           <a:ln/>
         </p:spPr>
         <p:txBody>
-          <a:bodyPr wrap="square" lIns="0" tIns="0" rIns="0" bIns="0" rtlCol="0" anchor="ctr"/>
+          <a:bodyPr wrap="square" lIns="0" tIns="0" rIns="0" bIns="0" rtlCol="0" anchor="ctr">
+            <a:normAutofit/>
+          </a:bodyPr>
           <a:lstStyle/>
           <a:p>
             <a:pPr algn="ctr" indent="0" marL="0">
@@ -7922,7 +8020,9 @@
           <a:ln/>
         </p:spPr>
         <p:txBody>
-          <a:bodyPr wrap="square" lIns="0" tIns="0" rIns="0" bIns="0" rtlCol="0" anchor="ctr"/>
+          <a:bodyPr wrap="square" lIns="0" tIns="0" rIns="0" bIns="0" rtlCol="0" anchor="ctr">
+            <a:normAutofit/>
+          </a:bodyPr>
           <a:lstStyle/>
           <a:p>
             <a:pPr algn="ctr" indent="0" marL="0">
@@ -8007,7 +8107,9 @@
           <a:ln/>
         </p:spPr>
         <p:txBody>
-          <a:bodyPr wrap="square" lIns="0" tIns="0" rIns="0" bIns="0" rtlCol="0" anchor="ctr"/>
+          <a:bodyPr wrap="square" lIns="0" tIns="0" rIns="0" bIns="0" rtlCol="0" anchor="ctr">
+            <a:normAutofit/>
+          </a:bodyPr>
           <a:lstStyle/>
           <a:p>
             <a:pPr algn="ctr" indent="0" marL="0">
@@ -8046,7 +8148,9 @@
           <a:ln/>
         </p:spPr>
         <p:txBody>
-          <a:bodyPr wrap="square" lIns="0" tIns="0" rIns="0" bIns="0" rtlCol="0" anchor="ctr"/>
+          <a:bodyPr wrap="square" lIns="0" tIns="0" rIns="0" bIns="0" rtlCol="0" anchor="ctr">
+            <a:normAutofit/>
+          </a:bodyPr>
           <a:lstStyle/>
           <a:p>
             <a:pPr indent="0" marL="0">
@@ -8108,16 +8212,18 @@
         <p:spPr>
           <a:xfrm>
             <a:off x="502920" y="822960"/>
-            <a:ext cx="4206240" cy="3108960"/>
-          </a:xfrm>
-          <a:prstGeom prst="rect">
-            <a:avLst/>
-          </a:prstGeom>
-          <a:noFill/>
-          <a:ln/>
-        </p:spPr>
-        <p:txBody>
-          <a:bodyPr wrap="square" lIns="0" tIns="0" rIns="0" bIns="0" rtlCol="0" anchor="ctr"/>
+            <a:ext cx="4206240" cy="4315121"/>
+          </a:xfrm>
+          <a:prstGeom prst="rect">
+            <a:avLst/>
+          </a:prstGeom>
+          <a:noFill/>
+          <a:ln/>
+        </p:spPr>
+        <p:txBody>
+          <a:bodyPr wrap="square" lIns="0" tIns="0" rIns="0" bIns="0" rtlCol="0" anchor="ctr">
+            <a:normAutofit/>
+          </a:bodyPr>
           <a:lstStyle/>
           <a:p>
             <a:pPr indent="0" marL="0">
@@ -8147,16 +8253,18 @@
         <p:spPr>
           <a:xfrm>
             <a:off x="914400" y="3977640"/>
-            <a:ext cx="10332720" cy="868680"/>
-          </a:xfrm>
-          <a:prstGeom prst="rect">
-            <a:avLst/>
-          </a:prstGeom>
-          <a:noFill/>
-          <a:ln/>
-        </p:spPr>
-        <p:txBody>
-          <a:bodyPr wrap="square" lIns="0" tIns="0" rIns="0" bIns="0" rtlCol="0" anchor="ctr"/>
+            <a:ext cx="10332720" cy="877655"/>
+          </a:xfrm>
+          <a:prstGeom prst="rect">
+            <a:avLst/>
+          </a:prstGeom>
+          <a:noFill/>
+          <a:ln/>
+        </p:spPr>
+        <p:txBody>
+          <a:bodyPr wrap="square" lIns="0" tIns="0" rIns="0" bIns="0" rtlCol="0" anchor="ctr">
+            <a:normAutofit/>
+          </a:bodyPr>
           <a:lstStyle/>
           <a:p>
             <a:pPr indent="0" marL="0">
@@ -8195,7 +8303,9 @@
           <a:ln/>
         </p:spPr>
         <p:txBody>
-          <a:bodyPr wrap="square" lIns="0" tIns="0" rIns="0" bIns="0" rtlCol="0" anchor="ctr"/>
+          <a:bodyPr wrap="square" lIns="0" tIns="0" rIns="0" bIns="0" rtlCol="0" anchor="ctr">
+            <a:normAutofit/>
+          </a:bodyPr>
           <a:lstStyle/>
           <a:p>
             <a:pPr indent="0" marL="0">
@@ -8234,10 +8344,12 @@
           <a:ln/>
         </p:spPr>
         <p:txBody>
-          <a:bodyPr wrap="square" lIns="0" tIns="0" rIns="0" bIns="0" rtlCol="0" anchor="t"/>
-          <a:lstStyle/>
-          <a:p>
-            <a:pPr marL="152400" indent="-152400">
+          <a:bodyPr wrap="square" lIns="0" tIns="0" rIns="0" bIns="0" rtlCol="0" anchor="t">
+            <a:normAutofit/>
+          </a:bodyPr>
+          <a:lstStyle/>
+          <a:p>
+            <a:pPr algn="l" marL="152400" indent="-152400">
               <a:spcAft>
                 <a:spcPts val="1000"/>
               </a:spcAft>
@@ -8258,7 +8370,7 @@
             <a:endParaRPr lang="en-US" sz="1400" dirty="0"/>
           </a:p>
           <a:p>
-            <a:pPr marL="152400" indent="-152400">
+            <a:pPr algn="l" marL="152400" indent="-152400">
               <a:spcAft>
                 <a:spcPts val="1000"/>
               </a:spcAft>
@@ -8279,7 +8391,7 @@
             <a:endParaRPr lang="en-US" sz="1400" dirty="0"/>
           </a:p>
           <a:p>
-            <a:pPr marL="152400" indent="-152400">
+            <a:pPr algn="l" marL="152400" indent="-152400">
               <a:spcAft>
                 <a:spcPts val="1000"/>
               </a:spcAft>
@@ -8300,7 +8412,7 @@
             <a:endParaRPr lang="en-US" sz="1400" dirty="0"/>
           </a:p>
           <a:p>
-            <a:pPr marL="152400" indent="-152400">
+            <a:pPr algn="l" marL="152400" indent="-152400">
               <a:spcAft>
                 <a:spcPts val="1000"/>
               </a:spcAft>
@@ -8340,7 +8452,9 @@
           <a:ln/>
         </p:spPr>
         <p:txBody>
-          <a:bodyPr wrap="square" lIns="0" tIns="0" rIns="0" bIns="0" rtlCol="0" anchor="ctr"/>
+          <a:bodyPr wrap="square" lIns="0" tIns="0" rIns="0" bIns="0" rtlCol="0" anchor="ctr">
+            <a:normAutofit/>
+          </a:bodyPr>
           <a:lstStyle/>
           <a:p>
             <a:pPr algn="r" indent="0" marL="0">
@@ -8431,7 +8545,9 @@
           <a:ln/>
         </p:spPr>
         <p:txBody>
-          <a:bodyPr wrap="square" lIns="0" tIns="0" rIns="0" bIns="0" rtlCol="0" anchor="ctr"/>
+          <a:bodyPr wrap="square" lIns="0" tIns="0" rIns="0" bIns="0" rtlCol="0" anchor="ctr">
+            <a:normAutofit/>
+          </a:bodyPr>
           <a:lstStyle/>
           <a:p>
             <a:pPr indent="0" marL="0">
@@ -8470,7 +8586,9 @@
           <a:ln/>
         </p:spPr>
         <p:txBody>
-          <a:bodyPr wrap="square" lIns="0" tIns="0" rIns="0" bIns="0" rtlCol="0" anchor="ctr"/>
+          <a:bodyPr wrap="square" lIns="0" tIns="0" rIns="0" bIns="0" rtlCol="0" anchor="ctr">
+            <a:normAutofit/>
+          </a:bodyPr>
           <a:lstStyle/>
           <a:p>
             <a:pPr indent="0" marL="0">
@@ -8509,7 +8627,9 @@
           <a:ln/>
         </p:spPr>
         <p:txBody>
-          <a:bodyPr wrap="square" lIns="0" tIns="0" rIns="0" bIns="0" rtlCol="0" anchor="ctr"/>
+          <a:bodyPr wrap="square" lIns="0" tIns="0" rIns="0" bIns="0" rtlCol="0" anchor="ctr">
+            <a:normAutofit/>
+          </a:bodyPr>
           <a:lstStyle/>
           <a:p>
             <a:pPr algn="r" indent="0" marL="0">
@@ -8548,7 +8668,9 @@
           <a:ln/>
         </p:spPr>
         <p:txBody>
-          <a:bodyPr wrap="square" lIns="0" tIns="0" rIns="0" bIns="0" rtlCol="0" anchor="ctr"/>
+          <a:bodyPr wrap="square" lIns="0" tIns="0" rIns="0" bIns="0" rtlCol="0" anchor="ctr">
+            <a:normAutofit/>
+          </a:bodyPr>
           <a:lstStyle/>
           <a:p>
             <a:pPr indent="0" marL="0">
@@ -8563,7 +8685,7 @@
                 <a:ea typeface="微软雅黑" pitchFamily="34" charset="-122"/>
                 <a:cs typeface="微软雅黑" pitchFamily="34" charset="-120"/>
               </a:rPr>
-              <a:t>帮扶管理信息系统 v1.12.10</a:t>
+              <a:t>帮扶管理信息系统 v1.12.11</a:t>
             </a:r>
             <a:endParaRPr lang="en-US" sz="1050" dirty="0"/>
           </a:p>
@@ -8616,7 +8738,9 @@
           <a:ln/>
         </p:spPr>
         <p:txBody>
-          <a:bodyPr wrap="square" lIns="0" tIns="0" rIns="0" bIns="0" rtlCol="0" anchor="ctr"/>
+          <a:bodyPr wrap="square" lIns="0" tIns="0" rIns="0" bIns="0" rtlCol="0" anchor="ctr">
+            <a:normAutofit/>
+          </a:bodyPr>
           <a:lstStyle/>
           <a:p>
             <a:pPr indent="0" marL="0">
@@ -8655,7 +8779,9 @@
           <a:ln/>
         </p:spPr>
         <p:txBody>
-          <a:bodyPr wrap="square" lIns="0" tIns="0" rIns="0" bIns="0" rtlCol="0" anchor="ctr"/>
+          <a:bodyPr wrap="square" lIns="0" tIns="0" rIns="0" bIns="0" rtlCol="0" anchor="ctr">
+            <a:normAutofit/>
+          </a:bodyPr>
           <a:lstStyle/>
           <a:p>
             <a:pPr indent="0" marL="0">
@@ -8694,7 +8820,9 @@
           <a:ln/>
         </p:spPr>
         <p:txBody>
-          <a:bodyPr wrap="square" lIns="0" tIns="0" rIns="0" bIns="0" rtlCol="0" anchor="ctr"/>
+          <a:bodyPr wrap="square" lIns="0" tIns="0" rIns="0" bIns="0" rtlCol="0" anchor="ctr">
+            <a:normAutofit/>
+          </a:bodyPr>
           <a:lstStyle/>
           <a:p>
             <a:pPr indent="0" marL="0">
@@ -8762,7 +8890,9 @@
           <a:ln/>
         </p:spPr>
         <p:txBody>
-          <a:bodyPr wrap="square" lIns="0" tIns="0" rIns="0" bIns="0" rtlCol="0" anchor="ctr"/>
+          <a:bodyPr wrap="square" lIns="0" tIns="0" rIns="0" bIns="0" rtlCol="0" anchor="ctr">
+            <a:normAutofit/>
+          </a:bodyPr>
           <a:lstStyle/>
           <a:p>
             <a:pPr indent="0" marL="0">
@@ -8801,7 +8931,9 @@
           <a:ln/>
         </p:spPr>
         <p:txBody>
-          <a:bodyPr wrap="square" lIns="0" tIns="0" rIns="0" bIns="0" rtlCol="0" anchor="ctr"/>
+          <a:bodyPr wrap="square" lIns="0" tIns="0" rIns="0" bIns="0" rtlCol="0" anchor="ctr">
+            <a:normAutofit/>
+          </a:bodyPr>
           <a:lstStyle/>
           <a:p>
             <a:pPr indent="0" marL="0">
@@ -8840,7 +8972,9 @@
           <a:ln/>
         </p:spPr>
         <p:txBody>
-          <a:bodyPr wrap="square" lIns="0" tIns="0" rIns="0" bIns="0" rtlCol="0" anchor="ctr"/>
+          <a:bodyPr wrap="square" lIns="0" tIns="0" rIns="0" bIns="0" rtlCol="0" anchor="ctr">
+            <a:normAutofit/>
+          </a:bodyPr>
           <a:lstStyle/>
           <a:p>
             <a:pPr indent="0" marL="0">
@@ -8908,7 +9042,9 @@
           <a:ln/>
         </p:spPr>
         <p:txBody>
-          <a:bodyPr wrap="square" lIns="0" tIns="0" rIns="0" bIns="0" rtlCol="0" anchor="ctr"/>
+          <a:bodyPr wrap="square" lIns="0" tIns="0" rIns="0" bIns="0" rtlCol="0" anchor="ctr">
+            <a:normAutofit/>
+          </a:bodyPr>
           <a:lstStyle/>
           <a:p>
             <a:pPr indent="0" marL="0">
@@ -8947,7 +9083,9 @@
           <a:ln/>
         </p:spPr>
         <p:txBody>
-          <a:bodyPr wrap="square" lIns="0" tIns="0" rIns="0" bIns="0" rtlCol="0" anchor="ctr"/>
+          <a:bodyPr wrap="square" lIns="0" tIns="0" rIns="0" bIns="0" rtlCol="0" anchor="ctr">
+            <a:normAutofit/>
+          </a:bodyPr>
           <a:lstStyle/>
           <a:p>
             <a:pPr indent="0" marL="0">
@@ -8986,7 +9124,9 @@
           <a:ln/>
         </p:spPr>
         <p:txBody>
-          <a:bodyPr wrap="square" lIns="0" tIns="0" rIns="0" bIns="0" rtlCol="0" anchor="ctr"/>
+          <a:bodyPr wrap="square" lIns="0" tIns="0" rIns="0" bIns="0" rtlCol="0" anchor="ctr">
+            <a:normAutofit/>
+          </a:bodyPr>
           <a:lstStyle/>
           <a:p>
             <a:pPr indent="0" marL="0">
@@ -9054,7 +9194,9 @@
           <a:ln/>
         </p:spPr>
         <p:txBody>
-          <a:bodyPr wrap="square" lIns="0" tIns="0" rIns="0" bIns="0" rtlCol="0" anchor="ctr"/>
+          <a:bodyPr wrap="square" lIns="0" tIns="0" rIns="0" bIns="0" rtlCol="0" anchor="ctr">
+            <a:normAutofit/>
+          </a:bodyPr>
           <a:lstStyle/>
           <a:p>
             <a:pPr indent="0" marL="0">
@@ -9093,7 +9235,9 @@
           <a:ln/>
         </p:spPr>
         <p:txBody>
-          <a:bodyPr wrap="square" lIns="0" tIns="0" rIns="0" bIns="0" rtlCol="0" anchor="ctr"/>
+          <a:bodyPr wrap="square" lIns="0" tIns="0" rIns="0" bIns="0" rtlCol="0" anchor="ctr">
+            <a:normAutofit/>
+          </a:bodyPr>
           <a:lstStyle/>
           <a:p>
             <a:pPr indent="0" marL="0">
@@ -9132,7 +9276,9 @@
           <a:ln/>
         </p:spPr>
         <p:txBody>
-          <a:bodyPr wrap="square" lIns="0" tIns="0" rIns="0" bIns="0" rtlCol="0" anchor="ctr"/>
+          <a:bodyPr wrap="square" lIns="0" tIns="0" rIns="0" bIns="0" rtlCol="0" anchor="ctr">
+            <a:normAutofit/>
+          </a:bodyPr>
           <a:lstStyle/>
           <a:p>
             <a:pPr indent="0" marL="0">
@@ -9200,7 +9346,9 @@
           <a:ln/>
         </p:spPr>
         <p:txBody>
-          <a:bodyPr wrap="square" lIns="0" tIns="0" rIns="0" bIns="0" rtlCol="0" anchor="ctr"/>
+          <a:bodyPr wrap="square" lIns="0" tIns="0" rIns="0" bIns="0" rtlCol="0" anchor="ctr">
+            <a:normAutofit/>
+          </a:bodyPr>
           <a:lstStyle/>
           <a:p>
             <a:pPr indent="0" marL="0">
@@ -9239,7 +9387,9 @@
           <a:ln/>
         </p:spPr>
         <p:txBody>
-          <a:bodyPr wrap="square" lIns="0" tIns="0" rIns="0" bIns="0" rtlCol="0" anchor="ctr"/>
+          <a:bodyPr wrap="square" lIns="0" tIns="0" rIns="0" bIns="0" rtlCol="0" anchor="ctr">
+            <a:normAutofit/>
+          </a:bodyPr>
           <a:lstStyle/>
           <a:p>
             <a:pPr indent="0" marL="0">
@@ -9278,7 +9428,9 @@
           <a:ln/>
         </p:spPr>
         <p:txBody>
-          <a:bodyPr wrap="square" lIns="0" tIns="0" rIns="0" bIns="0" rtlCol="0" anchor="ctr"/>
+          <a:bodyPr wrap="square" lIns="0" tIns="0" rIns="0" bIns="0" rtlCol="0" anchor="ctr">
+            <a:normAutofit/>
+          </a:bodyPr>
           <a:lstStyle/>
           <a:p>
             <a:pPr indent="0" marL="0">
@@ -9346,7 +9498,9 @@
           <a:ln/>
         </p:spPr>
         <p:txBody>
-          <a:bodyPr wrap="square" lIns="0" tIns="0" rIns="0" bIns="0" rtlCol="0" anchor="ctr"/>
+          <a:bodyPr wrap="square" lIns="0" tIns="0" rIns="0" bIns="0" rtlCol="0" anchor="ctr">
+            <a:normAutofit/>
+          </a:bodyPr>
           <a:lstStyle/>
           <a:p>
             <a:pPr indent="0" marL="0">
@@ -9385,7 +9539,9 @@
           <a:ln/>
         </p:spPr>
         <p:txBody>
-          <a:bodyPr wrap="square" lIns="0" tIns="0" rIns="0" bIns="0" rtlCol="0" anchor="ctr"/>
+          <a:bodyPr wrap="square" lIns="0" tIns="0" rIns="0" bIns="0" rtlCol="0" anchor="ctr">
+            <a:normAutofit/>
+          </a:bodyPr>
           <a:lstStyle/>
           <a:p>
             <a:pPr indent="0" marL="0">
@@ -9424,7 +9580,9 @@
           <a:ln/>
         </p:spPr>
         <p:txBody>
-          <a:bodyPr wrap="square" lIns="0" tIns="0" rIns="0" bIns="0" rtlCol="0" anchor="ctr"/>
+          <a:bodyPr wrap="square" lIns="0" tIns="0" rIns="0" bIns="0" rtlCol="0" anchor="ctr">
+            <a:normAutofit/>
+          </a:bodyPr>
           <a:lstStyle/>
           <a:p>
             <a:pPr indent="0" marL="0">
@@ -9463,7 +9621,9 @@
           <a:ln/>
         </p:spPr>
         <p:txBody>
-          <a:bodyPr wrap="square" lIns="0" tIns="0" rIns="0" bIns="0" rtlCol="0" anchor="ctr"/>
+          <a:bodyPr wrap="square" lIns="0" tIns="0" rIns="0" bIns="0" rtlCol="0" anchor="ctr">
+            <a:normAutofit/>
+          </a:bodyPr>
           <a:lstStyle/>
           <a:p>
             <a:pPr indent="0" marL="0">
@@ -9554,7 +9714,9 @@
           <a:ln/>
         </p:spPr>
         <p:txBody>
-          <a:bodyPr wrap="square" lIns="0" tIns="0" rIns="0" bIns="0" rtlCol="0" anchor="ctr"/>
+          <a:bodyPr wrap="square" lIns="0" tIns="0" rIns="0" bIns="0" rtlCol="0" anchor="ctr">
+            <a:normAutofit/>
+          </a:bodyPr>
           <a:lstStyle/>
           <a:p>
             <a:pPr indent="0" marL="0">
@@ -9593,7 +9755,9 @@
           <a:ln/>
         </p:spPr>
         <p:txBody>
-          <a:bodyPr wrap="square" lIns="0" tIns="0" rIns="0" bIns="0" rtlCol="0" anchor="ctr"/>
+          <a:bodyPr wrap="square" lIns="0" tIns="0" rIns="0" bIns="0" rtlCol="0" anchor="ctr">
+            <a:normAutofit/>
+          </a:bodyPr>
           <a:lstStyle/>
           <a:p>
             <a:pPr indent="0" marL="0">
@@ -9632,7 +9796,9 @@
           <a:ln/>
         </p:spPr>
         <p:txBody>
-          <a:bodyPr wrap="square" lIns="0" tIns="0" rIns="0" bIns="0" rtlCol="0" anchor="ctr"/>
+          <a:bodyPr wrap="square" lIns="0" tIns="0" rIns="0" bIns="0" rtlCol="0" anchor="ctr">
+            <a:normAutofit/>
+          </a:bodyPr>
           <a:lstStyle/>
           <a:p>
             <a:pPr algn="r" indent="0" marL="0">
@@ -9671,7 +9837,9 @@
           <a:ln/>
         </p:spPr>
         <p:txBody>
-          <a:bodyPr wrap="square" lIns="0" tIns="0" rIns="0" bIns="0" rtlCol="0" anchor="ctr"/>
+          <a:bodyPr wrap="square" lIns="0" tIns="0" rIns="0" bIns="0" rtlCol="0" anchor="ctr">
+            <a:normAutofit/>
+          </a:bodyPr>
           <a:lstStyle/>
           <a:p>
             <a:pPr indent="0" marL="0">
@@ -9686,7 +9854,7 @@
                 <a:ea typeface="微软雅黑" pitchFamily="34" charset="-122"/>
                 <a:cs typeface="微软雅黑" pitchFamily="34" charset="-120"/>
               </a:rPr>
-              <a:t>帮扶管理信息系统 v1.12.10</a:t>
+              <a:t>帮扶管理信息系统 v1.12.11</a:t>
             </a:r>
             <a:endParaRPr lang="en-US" sz="1050" dirty="0"/>
           </a:p>
@@ -9739,7 +9907,9 @@
           <a:ln/>
         </p:spPr>
         <p:txBody>
-          <a:bodyPr wrap="square" lIns="0" tIns="0" rIns="0" bIns="0" rtlCol="0" anchor="ctr"/>
+          <a:bodyPr wrap="square" lIns="0" tIns="0" rIns="0" bIns="0" rtlCol="0" anchor="ctr">
+            <a:normAutofit/>
+          </a:bodyPr>
           <a:lstStyle/>
           <a:p>
             <a:pPr indent="0" marL="0">
@@ -9778,7 +9948,9 @@
           <a:ln/>
         </p:spPr>
         <p:txBody>
-          <a:bodyPr wrap="square" lIns="0" tIns="0" rIns="0" bIns="0" rtlCol="0" anchor="t"/>
+          <a:bodyPr wrap="square" lIns="0" tIns="0" rIns="0" bIns="0" rtlCol="0" anchor="t">
+            <a:normAutofit/>
+          </a:bodyPr>
           <a:lstStyle/>
           <a:p>
             <a:pPr algn="l" marL="152400" indent="-152400">
@@ -9934,7 +10106,9 @@
           <a:ln/>
         </p:spPr>
         <p:txBody>
-          <a:bodyPr wrap="square" lIns="0" tIns="0" rIns="0" bIns="0" rtlCol="0" anchor="ctr"/>
+          <a:bodyPr wrap="square" lIns="0" tIns="0" rIns="0" bIns="0" rtlCol="0" anchor="ctr">
+            <a:normAutofit/>
+          </a:bodyPr>
           <a:lstStyle/>
           <a:p>
             <a:pPr indent="0" marL="0">
@@ -9973,7 +10147,9 @@
           <a:ln/>
         </p:spPr>
         <p:txBody>
-          <a:bodyPr wrap="square" lIns="0" tIns="0" rIns="0" bIns="0" rtlCol="0" anchor="t"/>
+          <a:bodyPr wrap="square" lIns="0" tIns="0" rIns="0" bIns="0" rtlCol="0" anchor="t">
+            <a:normAutofit/>
+          </a:bodyPr>
           <a:lstStyle/>
           <a:p>
             <a:pPr algn="l" marL="152400" indent="-152400">
@@ -10152,7 +10328,9 @@
           <a:ln/>
         </p:spPr>
         <p:txBody>
-          <a:bodyPr wrap="square" lIns="0" tIns="0" rIns="0" bIns="0" rtlCol="0" anchor="ctr"/>
+          <a:bodyPr wrap="square" lIns="0" tIns="0" rIns="0" bIns="0" rtlCol="0" anchor="ctr">
+            <a:normAutofit/>
+          </a:bodyPr>
           <a:lstStyle/>
           <a:p>
             <a:pPr indent="0" marL="0">
@@ -10191,7 +10369,9 @@
           <a:ln/>
         </p:spPr>
         <p:txBody>
-          <a:bodyPr wrap="square" lIns="0" tIns="0" rIns="0" bIns="0" rtlCol="0" anchor="ctr"/>
+          <a:bodyPr wrap="square" lIns="0" tIns="0" rIns="0" bIns="0" rtlCol="0" anchor="ctr">
+            <a:normAutofit/>
+          </a:bodyPr>
           <a:lstStyle/>
           <a:p>
             <a:pPr indent="0" marL="0">
@@ -10230,7 +10410,9 @@
           <a:ln/>
         </p:spPr>
         <p:txBody>
-          <a:bodyPr wrap="square" lIns="0" tIns="0" rIns="0" bIns="0" rtlCol="0" anchor="ctr"/>
+          <a:bodyPr wrap="square" lIns="0" tIns="0" rIns="0" bIns="0" rtlCol="0" anchor="ctr">
+            <a:normAutofit/>
+          </a:bodyPr>
           <a:lstStyle/>
           <a:p>
             <a:pPr algn="r" indent="0" marL="0">
@@ -10269,7 +10451,9 @@
           <a:ln/>
         </p:spPr>
         <p:txBody>
-          <a:bodyPr wrap="square" lIns="0" tIns="0" rIns="0" bIns="0" rtlCol="0" anchor="ctr"/>
+          <a:bodyPr wrap="square" lIns="0" tIns="0" rIns="0" bIns="0" rtlCol="0" anchor="ctr">
+            <a:normAutofit/>
+          </a:bodyPr>
           <a:lstStyle/>
           <a:p>
             <a:pPr indent="0" marL="0">
@@ -10284,7 +10468,7 @@
                 <a:ea typeface="微软雅黑" pitchFamily="34" charset="-122"/>
                 <a:cs typeface="微软雅黑" pitchFamily="34" charset="-120"/>
               </a:rPr>
-              <a:t>帮扶管理信息系统 v1.12.10</a:t>
+              <a:t>帮扶管理信息系统 v1.12.11</a:t>
             </a:r>
             <a:endParaRPr lang="en-US" sz="1050" dirty="0"/>
           </a:p>
@@ -10330,7 +10514,9 @@
           <a:ln/>
         </p:spPr>
         <p:txBody>
-          <a:bodyPr wrap="square" lIns="0" tIns="0" rIns="0" bIns="0" rtlCol="0" anchor="ctr"/>
+          <a:bodyPr wrap="square" lIns="0" tIns="0" rIns="0" bIns="0" rtlCol="0" anchor="ctr">
+            <a:normAutofit/>
+          </a:bodyPr>
           <a:lstStyle/>
           <a:p>
             <a:pPr algn="ctr" indent="0" marL="0">
@@ -10391,7 +10577,9 @@
           <a:ln/>
         </p:spPr>
         <p:txBody>
-          <a:bodyPr wrap="square" lIns="0" tIns="0" rIns="0" bIns="0" rtlCol="0" anchor="ctr"/>
+          <a:bodyPr wrap="square" lIns="0" tIns="0" rIns="0" bIns="0" rtlCol="0" anchor="ctr">
+            <a:normAutofit/>
+          </a:bodyPr>
           <a:lstStyle/>
           <a:p>
             <a:pPr algn="ctr" indent="0" marL="0">
@@ -10452,7 +10640,9 @@
           <a:ln/>
         </p:spPr>
         <p:txBody>
-          <a:bodyPr wrap="square" lIns="0" tIns="0" rIns="0" bIns="0" rtlCol="0" anchor="ctr"/>
+          <a:bodyPr wrap="square" lIns="0" tIns="0" rIns="0" bIns="0" rtlCol="0" anchor="ctr">
+            <a:normAutofit/>
+          </a:bodyPr>
           <a:lstStyle/>
           <a:p>
             <a:pPr algn="ctr" indent="0" marL="0">
@@ -10513,7 +10703,9 @@
           <a:ln/>
         </p:spPr>
         <p:txBody>
-          <a:bodyPr wrap="square" lIns="0" tIns="0" rIns="0" bIns="0" rtlCol="0" anchor="ctr"/>
+          <a:bodyPr wrap="square" lIns="0" tIns="0" rIns="0" bIns="0" rtlCol="0" anchor="ctr">
+            <a:normAutofit/>
+          </a:bodyPr>
           <a:lstStyle/>
           <a:p>
             <a:pPr algn="ctr" indent="0" marL="0">
@@ -10574,7 +10766,9 @@
           <a:ln/>
         </p:spPr>
         <p:txBody>
-          <a:bodyPr wrap="square" lIns="0" tIns="0" rIns="0" bIns="0" rtlCol="0" anchor="ctr"/>
+          <a:bodyPr wrap="square" lIns="0" tIns="0" rIns="0" bIns="0" rtlCol="0" anchor="ctr">
+            <a:normAutofit/>
+          </a:bodyPr>
           <a:lstStyle/>
           <a:p>
             <a:pPr algn="ctr" indent="0" marL="0">
@@ -10635,7 +10829,9 @@
           <a:ln/>
         </p:spPr>
         <p:txBody>
-          <a:bodyPr wrap="square" lIns="0" tIns="0" rIns="0" bIns="0" rtlCol="0" anchor="ctr"/>
+          <a:bodyPr wrap="square" lIns="0" tIns="0" rIns="0" bIns="0" rtlCol="0" anchor="ctr">
+            <a:normAutofit/>
+          </a:bodyPr>
           <a:lstStyle/>
           <a:p>
             <a:pPr algn="ctr" indent="0" marL="0">
@@ -10696,7 +10892,9 @@
           <a:ln/>
         </p:spPr>
         <p:txBody>
-          <a:bodyPr wrap="square" lIns="0" tIns="0" rIns="0" bIns="0" rtlCol="0" anchor="ctr"/>
+          <a:bodyPr wrap="square" lIns="0" tIns="0" rIns="0" bIns="0" rtlCol="0" anchor="ctr">
+            <a:normAutofit/>
+          </a:bodyPr>
           <a:lstStyle/>
           <a:p>
             <a:pPr algn="ctr" indent="0" marL="0">
@@ -10757,7 +10955,9 @@
           <a:ln/>
         </p:spPr>
         <p:txBody>
-          <a:bodyPr wrap="square" lIns="0" tIns="0" rIns="0" bIns="0" rtlCol="0" anchor="ctr"/>
+          <a:bodyPr wrap="square" lIns="0" tIns="0" rIns="0" bIns="0" rtlCol="0" anchor="ctr">
+            <a:normAutofit/>
+          </a:bodyPr>
           <a:lstStyle/>
           <a:p>
             <a:pPr algn="ctr" indent="0" marL="0">
@@ -10796,7 +10996,9 @@
           <a:ln/>
         </p:spPr>
         <p:txBody>
-          <a:bodyPr wrap="square" lIns="0" tIns="0" rIns="0" bIns="0" rtlCol="0" anchor="t"/>
+          <a:bodyPr wrap="square" lIns="0" tIns="0" rIns="0" bIns="0" rtlCol="0" anchor="t">
+            <a:normAutofit/>
+          </a:bodyPr>
           <a:lstStyle/>
           <a:p>
             <a:pPr algn="l" marL="152400" indent="-152400">
@@ -10878,7 +11080,7 @@
                 <a:ea typeface="微软雅黑" pitchFamily="34" charset="-122"/>
                 <a:cs typeface="微软雅黑" pitchFamily="34" charset="-120"/>
               </a:rPr>
-              <a:t>导出：整村档案导出（脱敏可选），支撑向上汇报</a:t>
+              <a:t>年度板块数据支持 Excel 模板按板块导入（工作表名需与板块对应）；整村档案可导出（脱敏可选），支撑向上汇报</a:t>
             </a:r>
             <a:endParaRPr lang="en-US" sz="1350" dirty="0"/>
           </a:p>
@@ -10954,7 +11156,9 @@
           <a:ln/>
         </p:spPr>
         <p:txBody>
-          <a:bodyPr wrap="square" lIns="0" tIns="0" rIns="0" bIns="0" rtlCol="0" anchor="ctr"/>
+          <a:bodyPr wrap="square" lIns="0" tIns="0" rIns="0" bIns="0" rtlCol="0" anchor="ctr">
+            <a:normAutofit/>
+          </a:bodyPr>
           <a:lstStyle/>
           <a:p>
             <a:pPr indent="0" marL="0">
@@ -10993,7 +11197,9 @@
           <a:ln/>
         </p:spPr>
         <p:txBody>
-          <a:bodyPr wrap="square" lIns="0" tIns="0" rIns="0" bIns="0" rtlCol="0" anchor="ctr"/>
+          <a:bodyPr wrap="square" lIns="0" tIns="0" rIns="0" bIns="0" rtlCol="0" anchor="ctr">
+            <a:normAutofit/>
+          </a:bodyPr>
           <a:lstStyle/>
           <a:p>
             <a:pPr indent="0" marL="0">
@@ -11032,7 +11238,9 @@
           <a:ln/>
         </p:spPr>
         <p:txBody>
-          <a:bodyPr wrap="square" lIns="0" tIns="0" rIns="0" bIns="0" rtlCol="0" anchor="ctr"/>
+          <a:bodyPr wrap="square" lIns="0" tIns="0" rIns="0" bIns="0" rtlCol="0" anchor="ctr">
+            <a:normAutofit/>
+          </a:bodyPr>
           <a:lstStyle/>
           <a:p>
             <a:pPr algn="r" indent="0" marL="0">
@@ -11071,7 +11279,9 @@
           <a:ln/>
         </p:spPr>
         <p:txBody>
-          <a:bodyPr wrap="square" lIns="0" tIns="0" rIns="0" bIns="0" rtlCol="0" anchor="ctr"/>
+          <a:bodyPr wrap="square" lIns="0" tIns="0" rIns="0" bIns="0" rtlCol="0" anchor="ctr">
+            <a:normAutofit/>
+          </a:bodyPr>
           <a:lstStyle/>
           <a:p>
             <a:pPr indent="0" marL="0">
@@ -11086,7 +11296,7 @@
                 <a:ea typeface="微软雅黑" pitchFamily="34" charset="-122"/>
                 <a:cs typeface="微软雅黑" pitchFamily="34" charset="-120"/>
               </a:rPr>
-              <a:t>帮扶管理信息系统 v1.12.10</a:t>
+              <a:t>帮扶管理信息系统 v1.12.11</a:t>
             </a:r>
             <a:endParaRPr lang="en-US" sz="1050" dirty="0"/>
           </a:p>
@@ -11130,7 +11340,9 @@
           <a:ln/>
         </p:spPr>
         <p:txBody>
-          <a:bodyPr wrap="square" lIns="0" tIns="0" rIns="0" bIns="0" rtlCol="0" anchor="ctr"/>
+          <a:bodyPr wrap="square" lIns="0" tIns="0" rIns="0" bIns="0" rtlCol="0" anchor="ctr">
+            <a:normAutofit/>
+          </a:bodyPr>
           <a:lstStyle/>
           <a:p>
             <a:pPr algn="ctr" indent="0" marL="0">
@@ -11189,7 +11401,9 @@
           <a:ln/>
         </p:spPr>
         <p:txBody>
-          <a:bodyPr wrap="square" lIns="0" tIns="0" rIns="0" bIns="0" rtlCol="0" anchor="ctr"/>
+          <a:bodyPr wrap="square" lIns="0" tIns="0" rIns="0" bIns="0" rtlCol="0" anchor="ctr">
+            <a:normAutofit/>
+          </a:bodyPr>
           <a:lstStyle/>
           <a:p>
             <a:pPr algn="ctr" indent="0" marL="0">
@@ -11248,7 +11462,9 @@
           <a:ln/>
         </p:spPr>
         <p:txBody>
-          <a:bodyPr wrap="square" lIns="0" tIns="0" rIns="0" bIns="0" rtlCol="0" anchor="ctr"/>
+          <a:bodyPr wrap="square" lIns="0" tIns="0" rIns="0" bIns="0" rtlCol="0" anchor="ctr">
+            <a:normAutofit/>
+          </a:bodyPr>
           <a:lstStyle/>
           <a:p>
             <a:pPr algn="ctr" indent="0" marL="0">
@@ -11307,7 +11523,9 @@
           <a:ln/>
         </p:spPr>
         <p:txBody>
-          <a:bodyPr wrap="square" lIns="0" tIns="0" rIns="0" bIns="0" rtlCol="0" anchor="ctr"/>
+          <a:bodyPr wrap="square" lIns="0" tIns="0" rIns="0" bIns="0" rtlCol="0" anchor="ctr">
+            <a:normAutofit/>
+          </a:bodyPr>
           <a:lstStyle/>
           <a:p>
             <a:pPr algn="ctr" indent="0" marL="0">
@@ -11366,7 +11584,9 @@
           <a:ln/>
         </p:spPr>
         <p:txBody>
-          <a:bodyPr wrap="square" lIns="0" tIns="0" rIns="0" bIns="0" rtlCol="0" anchor="ctr"/>
+          <a:bodyPr wrap="square" lIns="0" tIns="0" rIns="0" bIns="0" rtlCol="0" anchor="ctr">
+            <a:normAutofit/>
+          </a:bodyPr>
           <a:lstStyle/>
           <a:p>
             <a:pPr algn="ctr" indent="0" marL="0">
@@ -11425,7 +11645,9 @@
           <a:ln/>
         </p:spPr>
         <p:txBody>
-          <a:bodyPr wrap="square" lIns="0" tIns="0" rIns="0" bIns="0" rtlCol="0" anchor="ctr"/>
+          <a:bodyPr wrap="square" lIns="0" tIns="0" rIns="0" bIns="0" rtlCol="0" anchor="ctr">
+            <a:normAutofit/>
+          </a:bodyPr>
           <a:lstStyle/>
           <a:p>
             <a:pPr algn="ctr" indent="0" marL="0">
@@ -11464,7 +11686,9 @@
           <a:ln/>
         </p:spPr>
         <p:txBody>
-          <a:bodyPr wrap="square" lIns="0" tIns="0" rIns="0" bIns="0" rtlCol="0" anchor="t"/>
+          <a:bodyPr wrap="square" lIns="0" tIns="0" rIns="0" bIns="0" rtlCol="0" anchor="t">
+            <a:normAutofit/>
+          </a:bodyPr>
           <a:lstStyle/>
           <a:p>
             <a:pPr algn="l" marL="152400" indent="-152400">
@@ -11643,7 +11867,9 @@
           <a:ln/>
         </p:spPr>
         <p:txBody>
-          <a:bodyPr wrap="square" lIns="0" tIns="0" rIns="0" bIns="0" rtlCol="0" anchor="ctr"/>
+          <a:bodyPr wrap="square" lIns="0" tIns="0" rIns="0" bIns="0" rtlCol="0" anchor="ctr">
+            <a:normAutofit/>
+          </a:bodyPr>
           <a:lstStyle/>
           <a:p>
             <a:pPr indent="0" marL="0">
@@ -11682,7 +11908,9 @@
           <a:ln/>
         </p:spPr>
         <p:txBody>
-          <a:bodyPr wrap="square" lIns="0" tIns="0" rIns="0" bIns="0" rtlCol="0" anchor="ctr"/>
+          <a:bodyPr wrap="square" lIns="0" tIns="0" rIns="0" bIns="0" rtlCol="0" anchor="ctr">
+            <a:normAutofit/>
+          </a:bodyPr>
           <a:lstStyle/>
           <a:p>
             <a:pPr indent="0" marL="0">
@@ -11721,7 +11949,9 @@
           <a:ln/>
         </p:spPr>
         <p:txBody>
-          <a:bodyPr wrap="square" lIns="0" tIns="0" rIns="0" bIns="0" rtlCol="0" anchor="ctr"/>
+          <a:bodyPr wrap="square" lIns="0" tIns="0" rIns="0" bIns="0" rtlCol="0" anchor="ctr">
+            <a:normAutofit/>
+          </a:bodyPr>
           <a:lstStyle/>
           <a:p>
             <a:pPr algn="r" indent="0" marL="0">
@@ -11760,7 +11990,9 @@
           <a:ln/>
         </p:spPr>
         <p:txBody>
-          <a:bodyPr wrap="square" lIns="0" tIns="0" rIns="0" bIns="0" rtlCol="0" anchor="ctr"/>
+          <a:bodyPr wrap="square" lIns="0" tIns="0" rIns="0" bIns="0" rtlCol="0" anchor="ctr">
+            <a:normAutofit/>
+          </a:bodyPr>
           <a:lstStyle/>
           <a:p>
             <a:pPr indent="0" marL="0">
@@ -11775,7 +12007,7 @@
                 <a:ea typeface="微软雅黑" pitchFamily="34" charset="-122"/>
                 <a:cs typeface="微软雅黑" pitchFamily="34" charset="-120"/>
               </a:rPr>
-              <a:t>帮扶管理信息系统 v1.12.10</a:t>
+              <a:t>帮扶管理信息系统 v1.12.11</a:t>
             </a:r>
             <a:endParaRPr lang="en-US" sz="1050" dirty="0"/>
           </a:p>
@@ -11819,7 +12051,9 @@
           <a:ln/>
         </p:spPr>
         <p:txBody>
-          <a:bodyPr wrap="square" lIns="0" tIns="0" rIns="0" bIns="0" rtlCol="0" anchor="ctr"/>
+          <a:bodyPr wrap="square" lIns="0" tIns="0" rIns="0" bIns="0" rtlCol="0" anchor="ctr">
+            <a:normAutofit/>
+          </a:bodyPr>
           <a:lstStyle/>
           <a:p>
             <a:pPr algn="ctr" indent="0" marL="0">
@@ -11858,7 +12092,9 @@
           <a:ln/>
         </p:spPr>
         <p:txBody>
-          <a:bodyPr wrap="square" lIns="0" tIns="0" rIns="0" bIns="0" rtlCol="0" anchor="ctr"/>
+          <a:bodyPr wrap="square" lIns="0" tIns="0" rIns="0" bIns="0" rtlCol="0" anchor="ctr">
+            <a:normAutofit/>
+          </a:bodyPr>
           <a:lstStyle/>
           <a:p>
             <a:pPr algn="ctr" indent="0" marL="0">
@@ -11941,7 +12177,9 @@
           <a:ln/>
         </p:spPr>
         <p:txBody>
-          <a:bodyPr wrap="square" lIns="0" tIns="0" rIns="0" bIns="0" rtlCol="0" anchor="ctr"/>
+          <a:bodyPr wrap="square" lIns="0" tIns="0" rIns="0" bIns="0" rtlCol="0" anchor="ctr">
+            <a:normAutofit/>
+          </a:bodyPr>
           <a:lstStyle/>
           <a:p>
             <a:pPr algn="ctr" indent="0" marL="0">
@@ -11980,7 +12218,9 @@
           <a:ln/>
         </p:spPr>
         <p:txBody>
-          <a:bodyPr wrap="square" lIns="0" tIns="0" rIns="0" bIns="0" rtlCol="0" anchor="ctr"/>
+          <a:bodyPr wrap="square" lIns="0" tIns="0" rIns="0" bIns="0" rtlCol="0" anchor="ctr">
+            <a:normAutofit/>
+          </a:bodyPr>
           <a:lstStyle/>
           <a:p>
             <a:pPr algn="ctr" indent="0" marL="0">
@@ -12063,7 +12303,9 @@
           <a:ln/>
         </p:spPr>
         <p:txBody>
-          <a:bodyPr wrap="square" lIns="0" tIns="0" rIns="0" bIns="0" rtlCol="0" anchor="ctr"/>
+          <a:bodyPr wrap="square" lIns="0" tIns="0" rIns="0" bIns="0" rtlCol="0" anchor="ctr">
+            <a:normAutofit/>
+          </a:bodyPr>
           <a:lstStyle/>
           <a:p>
             <a:pPr algn="ctr" indent="0" marL="0">
@@ -12102,7 +12344,9 @@
           <a:ln/>
         </p:spPr>
         <p:txBody>
-          <a:bodyPr wrap="square" lIns="0" tIns="0" rIns="0" bIns="0" rtlCol="0" anchor="ctr"/>
+          <a:bodyPr wrap="square" lIns="0" tIns="0" rIns="0" bIns="0" rtlCol="0" anchor="ctr">
+            <a:normAutofit/>
+          </a:bodyPr>
           <a:lstStyle/>
           <a:p>
             <a:pPr algn="ctr" indent="0" marL="0">
@@ -12185,7 +12429,9 @@
           <a:ln/>
         </p:spPr>
         <p:txBody>
-          <a:bodyPr wrap="square" lIns="0" tIns="0" rIns="0" bIns="0" rtlCol="0" anchor="ctr"/>
+          <a:bodyPr wrap="square" lIns="0" tIns="0" rIns="0" bIns="0" rtlCol="0" anchor="ctr">
+            <a:normAutofit/>
+          </a:bodyPr>
           <a:lstStyle/>
           <a:p>
             <a:pPr algn="ctr" indent="0" marL="0">
@@ -12224,7 +12470,9 @@
           <a:ln/>
         </p:spPr>
         <p:txBody>
-          <a:bodyPr wrap="square" lIns="0" tIns="0" rIns="0" bIns="0" rtlCol="0" anchor="ctr"/>
+          <a:bodyPr wrap="square" lIns="0" tIns="0" rIns="0" bIns="0" rtlCol="0" anchor="ctr">
+            <a:normAutofit/>
+          </a:bodyPr>
           <a:lstStyle/>
           <a:p>
             <a:pPr algn="ctr" indent="0" marL="0">
@@ -12307,7 +12555,9 @@
           <a:ln/>
         </p:spPr>
         <p:txBody>
-          <a:bodyPr wrap="square" lIns="0" tIns="0" rIns="0" bIns="0" rtlCol="0" anchor="ctr"/>
+          <a:bodyPr wrap="square" lIns="0" tIns="0" rIns="0" bIns="0" rtlCol="0" anchor="ctr">
+            <a:normAutofit/>
+          </a:bodyPr>
           <a:lstStyle/>
           <a:p>
             <a:pPr algn="ctr" indent="0" marL="0">
@@ -12346,7 +12596,9 @@
           <a:ln/>
         </p:spPr>
         <p:txBody>
-          <a:bodyPr wrap="square" lIns="0" tIns="0" rIns="0" bIns="0" rtlCol="0" anchor="ctr"/>
+          <a:bodyPr wrap="square" lIns="0" tIns="0" rIns="0" bIns="0" rtlCol="0" anchor="ctr">
+            <a:normAutofit/>
+          </a:bodyPr>
           <a:lstStyle/>
           <a:p>
             <a:pPr algn="ctr" indent="0" marL="0">
@@ -12429,7 +12681,9 @@
           <a:ln/>
         </p:spPr>
         <p:txBody>
-          <a:bodyPr wrap="square" lIns="0" tIns="0" rIns="0" bIns="0" rtlCol="0" anchor="ctr"/>
+          <a:bodyPr wrap="square" lIns="0" tIns="0" rIns="0" bIns="0" rtlCol="0" anchor="ctr">
+            <a:normAutofit/>
+          </a:bodyPr>
           <a:lstStyle/>
           <a:p>
             <a:pPr algn="ctr" indent="0" marL="0">
@@ -12468,7 +12722,9 @@
           <a:ln/>
         </p:spPr>
         <p:txBody>
-          <a:bodyPr wrap="square" lIns="0" tIns="0" rIns="0" bIns="0" rtlCol="0" anchor="ctr"/>
+          <a:bodyPr wrap="square" lIns="0" tIns="0" rIns="0" bIns="0" rtlCol="0" anchor="ctr">
+            <a:normAutofit/>
+          </a:bodyPr>
           <a:lstStyle/>
           <a:p>
             <a:pPr algn="ctr" indent="0" marL="0">
@@ -12551,7 +12807,9 @@
           <a:ln/>
         </p:spPr>
         <p:txBody>
-          <a:bodyPr wrap="square" lIns="0" tIns="0" rIns="0" bIns="0" rtlCol="0" anchor="ctr"/>
+          <a:bodyPr wrap="square" lIns="0" tIns="0" rIns="0" bIns="0" rtlCol="0" anchor="ctr">
+            <a:normAutofit/>
+          </a:bodyPr>
           <a:lstStyle/>
           <a:p>
             <a:pPr algn="ctr" indent="0" marL="0">
@@ -12590,7 +12848,9 @@
           <a:ln/>
         </p:spPr>
         <p:txBody>
-          <a:bodyPr wrap="square" lIns="0" tIns="0" rIns="0" bIns="0" rtlCol="0" anchor="ctr"/>
+          <a:bodyPr wrap="square" lIns="0" tIns="0" rIns="0" bIns="0" rtlCol="0" anchor="ctr">
+            <a:normAutofit/>
+          </a:bodyPr>
           <a:lstStyle/>
           <a:p>
             <a:pPr algn="ctr" indent="0" marL="0">
@@ -12673,7 +12933,9 @@
           <a:ln/>
         </p:spPr>
         <p:txBody>
-          <a:bodyPr wrap="square" lIns="0" tIns="0" rIns="0" bIns="0" rtlCol="0" anchor="ctr"/>
+          <a:bodyPr wrap="square" lIns="0" tIns="0" rIns="0" bIns="0" rtlCol="0" anchor="ctr">
+            <a:normAutofit/>
+          </a:bodyPr>
           <a:lstStyle/>
           <a:p>
             <a:pPr algn="ctr" indent="0" marL="0">
@@ -12712,7 +12974,9 @@
           <a:ln/>
         </p:spPr>
         <p:txBody>
-          <a:bodyPr wrap="square" lIns="0" tIns="0" rIns="0" bIns="0" rtlCol="0" anchor="ctr"/>
+          <a:bodyPr wrap="square" lIns="0" tIns="0" rIns="0" bIns="0" rtlCol="0" anchor="ctr">
+            <a:normAutofit/>
+          </a:bodyPr>
           <a:lstStyle/>
           <a:p>
             <a:pPr algn="ctr" indent="0" marL="0">
@@ -12780,7 +13044,9 @@
           <a:ln/>
         </p:spPr>
         <p:txBody>
-          <a:bodyPr wrap="square" lIns="0" tIns="0" rIns="0" bIns="0" rtlCol="0" anchor="ctr"/>
+          <a:bodyPr wrap="square" lIns="0" tIns="0" rIns="0" bIns="0" rtlCol="0" anchor="ctr">
+            <a:normAutofit/>
+          </a:bodyPr>
           <a:lstStyle/>
           <a:p>
             <a:pPr indent="0" marL="0">
@@ -12819,7 +13085,9 @@
           <a:ln/>
         </p:spPr>
         <p:txBody>
-          <a:bodyPr wrap="square" lIns="0" tIns="0" rIns="0" bIns="0" rtlCol="0" anchor="t"/>
+          <a:bodyPr wrap="square" lIns="0" tIns="0" rIns="0" bIns="0" rtlCol="0" anchor="t">
+            <a:normAutofit/>
+          </a:bodyPr>
           <a:lstStyle/>
           <a:p>
             <a:pPr algn="l" marL="152400" indent="-152400">
@@ -12933,7 +13201,9 @@
           <a:ln/>
         </p:spPr>
         <p:txBody>
-          <a:bodyPr wrap="square" lIns="0" tIns="0" rIns="0" bIns="0" rtlCol="0" anchor="ctr"/>
+          <a:bodyPr wrap="square" lIns="0" tIns="0" rIns="0" bIns="0" rtlCol="0" anchor="ctr">
+            <a:normAutofit/>
+          </a:bodyPr>
           <a:lstStyle/>
           <a:p>
             <a:pPr indent="0" marL="0">
@@ -12972,7 +13242,9 @@
           <a:ln/>
         </p:spPr>
         <p:txBody>
-          <a:bodyPr wrap="square" lIns="0" tIns="0" rIns="0" bIns="0" rtlCol="0" anchor="t"/>
+          <a:bodyPr wrap="square" lIns="0" tIns="0" rIns="0" bIns="0" rtlCol="0" anchor="t">
+            <a:normAutofit/>
+          </a:bodyPr>
           <a:lstStyle/>
           <a:p>
             <a:pPr algn="l" marL="152400" indent="-152400">
@@ -13080,16 +13352,18 @@
         <p:spPr>
           <a:xfrm>
             <a:off x="914400" y="777240"/>
-            <a:ext cx="4572000" cy="822960"/>
-          </a:xfrm>
-          <a:prstGeom prst="rect">
-            <a:avLst/>
-          </a:prstGeom>
-          <a:noFill/>
-          <a:ln/>
-        </p:spPr>
-        <p:txBody>
-          <a:bodyPr wrap="square" lIns="0" tIns="0" rIns="0" bIns="0" rtlCol="0" anchor="ctr"/>
+            <a:ext cx="4572000" cy="834686"/>
+          </a:xfrm>
+          <a:prstGeom prst="rect">
+            <a:avLst/>
+          </a:prstGeom>
+          <a:noFill/>
+          <a:ln/>
+        </p:spPr>
+        <p:txBody>
+          <a:bodyPr wrap="square" lIns="0" tIns="0" rIns="0" bIns="0" rtlCol="0" anchor="ctr">
+            <a:normAutofit/>
+          </a:bodyPr>
           <a:lstStyle/>
           <a:p>
             <a:pPr indent="0" marL="0">
@@ -13128,7 +13402,9 @@
           <a:ln/>
         </p:spPr>
         <p:txBody>
-          <a:bodyPr wrap="square" lIns="0" tIns="0" rIns="0" bIns="0" rtlCol="0" anchor="ctr"/>
+          <a:bodyPr wrap="square" lIns="0" tIns="0" rIns="0" bIns="0" rtlCol="0" anchor="ctr">
+            <a:normAutofit/>
+          </a:bodyPr>
           <a:lstStyle/>
           <a:p>
             <a:pPr indent="0" marL="0">
@@ -13189,7 +13465,9 @@
           <a:ln/>
         </p:spPr>
         <p:txBody>
-          <a:bodyPr wrap="square" lIns="0" tIns="0" rIns="0" bIns="0" rtlCol="0" anchor="ctr"/>
+          <a:bodyPr wrap="square" lIns="0" tIns="0" rIns="0" bIns="0" rtlCol="0" anchor="ctr">
+            <a:normAutofit/>
+          </a:bodyPr>
           <a:lstStyle/>
           <a:p>
             <a:pPr indent="0" marL="0">
@@ -13228,7 +13506,9 @@
           <a:ln/>
         </p:spPr>
         <p:txBody>
-          <a:bodyPr wrap="square" lIns="0" tIns="0" rIns="0" bIns="0" rtlCol="0" anchor="ctr"/>
+          <a:bodyPr wrap="square" lIns="0" tIns="0" rIns="0" bIns="0" rtlCol="0" anchor="ctr">
+            <a:normAutofit/>
+          </a:bodyPr>
           <a:lstStyle/>
           <a:p>
             <a:pPr indent="0" marL="0">
@@ -13267,7 +13547,9 @@
           <a:ln/>
         </p:spPr>
         <p:txBody>
-          <a:bodyPr wrap="square" lIns="0" tIns="0" rIns="0" bIns="0" rtlCol="0" anchor="ctr"/>
+          <a:bodyPr wrap="square" lIns="0" tIns="0" rIns="0" bIns="0" rtlCol="0" anchor="ctr">
+            <a:normAutofit/>
+          </a:bodyPr>
           <a:lstStyle/>
           <a:p>
             <a:pPr indent="0" marL="0">
@@ -13328,7 +13610,9 @@
           <a:ln/>
         </p:spPr>
         <p:txBody>
-          <a:bodyPr wrap="square" lIns="0" tIns="0" rIns="0" bIns="0" rtlCol="0" anchor="ctr"/>
+          <a:bodyPr wrap="square" lIns="0" tIns="0" rIns="0" bIns="0" rtlCol="0" anchor="ctr">
+            <a:normAutofit/>
+          </a:bodyPr>
           <a:lstStyle/>
           <a:p>
             <a:pPr indent="0" marL="0">
@@ -13367,7 +13651,9 @@
           <a:ln/>
         </p:spPr>
         <p:txBody>
-          <a:bodyPr wrap="square" lIns="0" tIns="0" rIns="0" bIns="0" rtlCol="0" anchor="ctr"/>
+          <a:bodyPr wrap="square" lIns="0" tIns="0" rIns="0" bIns="0" rtlCol="0" anchor="ctr">
+            <a:normAutofit/>
+          </a:bodyPr>
           <a:lstStyle/>
           <a:p>
             <a:pPr indent="0" marL="0">
@@ -13406,7 +13692,9 @@
           <a:ln/>
         </p:spPr>
         <p:txBody>
-          <a:bodyPr wrap="square" lIns="0" tIns="0" rIns="0" bIns="0" rtlCol="0" anchor="ctr"/>
+          <a:bodyPr wrap="square" lIns="0" tIns="0" rIns="0" bIns="0" rtlCol="0" anchor="ctr">
+            <a:normAutofit/>
+          </a:bodyPr>
           <a:lstStyle/>
           <a:p>
             <a:pPr indent="0" marL="0">
@@ -13467,7 +13755,9 @@
           <a:ln/>
         </p:spPr>
         <p:txBody>
-          <a:bodyPr wrap="square" lIns="0" tIns="0" rIns="0" bIns="0" rtlCol="0" anchor="ctr"/>
+          <a:bodyPr wrap="square" lIns="0" tIns="0" rIns="0" bIns="0" rtlCol="0" anchor="ctr">
+            <a:normAutofit/>
+          </a:bodyPr>
           <a:lstStyle/>
           <a:p>
             <a:pPr indent="0" marL="0">
@@ -13506,7 +13796,9 @@
           <a:ln/>
         </p:spPr>
         <p:txBody>
-          <a:bodyPr wrap="square" lIns="0" tIns="0" rIns="0" bIns="0" rtlCol="0" anchor="ctr"/>
+          <a:bodyPr wrap="square" lIns="0" tIns="0" rIns="0" bIns="0" rtlCol="0" anchor="ctr">
+            <a:normAutofit/>
+          </a:bodyPr>
           <a:lstStyle/>
           <a:p>
             <a:pPr indent="0" marL="0">
@@ -13545,7 +13837,9 @@
           <a:ln/>
         </p:spPr>
         <p:txBody>
-          <a:bodyPr wrap="square" lIns="0" tIns="0" rIns="0" bIns="0" rtlCol="0" anchor="ctr"/>
+          <a:bodyPr wrap="square" lIns="0" tIns="0" rIns="0" bIns="0" rtlCol="0" anchor="ctr">
+            <a:normAutofit/>
+          </a:bodyPr>
           <a:lstStyle/>
           <a:p>
             <a:pPr indent="0" marL="0">
@@ -13606,7 +13900,9 @@
           <a:ln/>
         </p:spPr>
         <p:txBody>
-          <a:bodyPr wrap="square" lIns="0" tIns="0" rIns="0" bIns="0" rtlCol="0" anchor="ctr"/>
+          <a:bodyPr wrap="square" lIns="0" tIns="0" rIns="0" bIns="0" rtlCol="0" anchor="ctr">
+            <a:normAutofit/>
+          </a:bodyPr>
           <a:lstStyle/>
           <a:p>
             <a:pPr indent="0" marL="0">
@@ -13645,7 +13941,9 @@
           <a:ln/>
         </p:spPr>
         <p:txBody>
-          <a:bodyPr wrap="square" lIns="0" tIns="0" rIns="0" bIns="0" rtlCol="0" anchor="ctr"/>
+          <a:bodyPr wrap="square" lIns="0" tIns="0" rIns="0" bIns="0" rtlCol="0" anchor="ctr">
+            <a:normAutofit/>
+          </a:bodyPr>
           <a:lstStyle/>
           <a:p>
             <a:pPr indent="0" marL="0">
@@ -13684,7 +13982,9 @@
           <a:ln/>
         </p:spPr>
         <p:txBody>
-          <a:bodyPr wrap="square" lIns="0" tIns="0" rIns="0" bIns="0" rtlCol="0" anchor="ctr"/>
+          <a:bodyPr wrap="square" lIns="0" tIns="0" rIns="0" bIns="0" rtlCol="0" anchor="ctr">
+            <a:normAutofit/>
+          </a:bodyPr>
           <a:lstStyle/>
           <a:p>
             <a:pPr indent="0" marL="0">
@@ -13745,7 +14045,9 @@
           <a:ln/>
         </p:spPr>
         <p:txBody>
-          <a:bodyPr wrap="square" lIns="0" tIns="0" rIns="0" bIns="0" rtlCol="0" anchor="ctr"/>
+          <a:bodyPr wrap="square" lIns="0" tIns="0" rIns="0" bIns="0" rtlCol="0" anchor="ctr">
+            <a:normAutofit/>
+          </a:bodyPr>
           <a:lstStyle/>
           <a:p>
             <a:pPr indent="0" marL="0">
@@ -13784,7 +14086,9 @@
           <a:ln/>
         </p:spPr>
         <p:txBody>
-          <a:bodyPr wrap="square" lIns="0" tIns="0" rIns="0" bIns="0" rtlCol="0" anchor="ctr"/>
+          <a:bodyPr wrap="square" lIns="0" tIns="0" rIns="0" bIns="0" rtlCol="0" anchor="ctr">
+            <a:normAutofit/>
+          </a:bodyPr>
           <a:lstStyle/>
           <a:p>
             <a:pPr indent="0" marL="0">
@@ -13823,7 +14127,9 @@
           <a:ln/>
         </p:spPr>
         <p:txBody>
-          <a:bodyPr wrap="square" lIns="0" tIns="0" rIns="0" bIns="0" rtlCol="0" anchor="ctr"/>
+          <a:bodyPr wrap="square" lIns="0" tIns="0" rIns="0" bIns="0" rtlCol="0" anchor="ctr">
+            <a:normAutofit/>
+          </a:bodyPr>
           <a:lstStyle/>
           <a:p>
             <a:pPr indent="0" marL="0">
@@ -13838,7 +14144,7 @@
                 <a:ea typeface="微软雅黑" pitchFamily="34" charset="-122"/>
                 <a:cs typeface="微软雅黑" pitchFamily="34" charset="-120"/>
               </a:rPr>
-              <a:t>17,295 项自动化测试 · CI/CD · 依赖自检</a:t>
+              <a:t>18,203 项自动化测试 · CI/CD · 依赖自检</a:t>
             </a:r>
             <a:endParaRPr lang="en-US" sz="1200" dirty="0"/>
           </a:p>
@@ -13884,7 +14190,9 @@
           <a:ln/>
         </p:spPr>
         <p:txBody>
-          <a:bodyPr wrap="square" lIns="0" tIns="0" rIns="0" bIns="0" rtlCol="0" anchor="ctr"/>
+          <a:bodyPr wrap="square" lIns="0" tIns="0" rIns="0" bIns="0" rtlCol="0" anchor="ctr">
+            <a:normAutofit/>
+          </a:bodyPr>
           <a:lstStyle/>
           <a:p>
             <a:pPr indent="0" marL="0">
@@ -13923,7 +14231,9 @@
           <a:ln/>
         </p:spPr>
         <p:txBody>
-          <a:bodyPr wrap="square" lIns="0" tIns="0" rIns="0" bIns="0" rtlCol="0" anchor="ctr"/>
+          <a:bodyPr wrap="square" lIns="0" tIns="0" rIns="0" bIns="0" rtlCol="0" anchor="ctr">
+            <a:normAutofit/>
+          </a:bodyPr>
           <a:lstStyle/>
           <a:p>
             <a:pPr indent="0" marL="0">
@@ -13962,7 +14272,9 @@
           <a:ln/>
         </p:spPr>
         <p:txBody>
-          <a:bodyPr wrap="square" lIns="0" tIns="0" rIns="0" bIns="0" rtlCol="0" anchor="ctr"/>
+          <a:bodyPr wrap="square" lIns="0" tIns="0" rIns="0" bIns="0" rtlCol="0" anchor="ctr">
+            <a:normAutofit/>
+          </a:bodyPr>
           <a:lstStyle/>
           <a:p>
             <a:pPr indent="0" marL="0">
@@ -14053,7 +14365,9 @@
           <a:ln/>
         </p:spPr>
         <p:txBody>
-          <a:bodyPr wrap="square" lIns="0" tIns="0" rIns="0" bIns="0" rtlCol="0" anchor="ctr"/>
+          <a:bodyPr wrap="square" lIns="0" tIns="0" rIns="0" bIns="0" rtlCol="0" anchor="ctr">
+            <a:normAutofit/>
+          </a:bodyPr>
           <a:lstStyle/>
           <a:p>
             <a:pPr indent="0" marL="0">
@@ -14092,7 +14406,9 @@
           <a:ln/>
         </p:spPr>
         <p:txBody>
-          <a:bodyPr wrap="square" lIns="0" tIns="0" rIns="0" bIns="0" rtlCol="0" anchor="ctr"/>
+          <a:bodyPr wrap="square" lIns="0" tIns="0" rIns="0" bIns="0" rtlCol="0" anchor="ctr">
+            <a:normAutofit/>
+          </a:bodyPr>
           <a:lstStyle/>
           <a:p>
             <a:pPr indent="0" marL="0">
@@ -14131,7 +14447,9 @@
           <a:ln/>
         </p:spPr>
         <p:txBody>
-          <a:bodyPr wrap="square" lIns="0" tIns="0" rIns="0" bIns="0" rtlCol="0" anchor="ctr"/>
+          <a:bodyPr wrap="square" lIns="0" tIns="0" rIns="0" bIns="0" rtlCol="0" anchor="ctr">
+            <a:normAutofit/>
+          </a:bodyPr>
           <a:lstStyle/>
           <a:p>
             <a:pPr algn="r" indent="0" marL="0">
@@ -14170,7 +14488,9 @@
           <a:ln/>
         </p:spPr>
         <p:txBody>
-          <a:bodyPr wrap="square" lIns="0" tIns="0" rIns="0" bIns="0" rtlCol="0" anchor="ctr"/>
+          <a:bodyPr wrap="square" lIns="0" tIns="0" rIns="0" bIns="0" rtlCol="0" anchor="ctr">
+            <a:normAutofit/>
+          </a:bodyPr>
           <a:lstStyle/>
           <a:p>
             <a:pPr indent="0" marL="0">
@@ -14185,7 +14505,7 @@
                 <a:ea typeface="微软雅黑" pitchFamily="34" charset="-122"/>
                 <a:cs typeface="微软雅黑" pitchFamily="34" charset="-120"/>
               </a:rPr>
-              <a:t>帮扶管理信息系统 v1.12.10</a:t>
+              <a:t>帮扶管理信息系统 v1.12.11</a:t>
             </a:r>
             <a:endParaRPr lang="en-US" sz="1050" dirty="0"/>
           </a:p>
@@ -14238,7 +14558,9 @@
           <a:ln/>
         </p:spPr>
         <p:txBody>
-          <a:bodyPr wrap="square" lIns="0" tIns="0" rIns="0" bIns="0" rtlCol="0" anchor="ctr"/>
+          <a:bodyPr wrap="square" lIns="0" tIns="0" rIns="0" bIns="0" rtlCol="0" anchor="ctr">
+            <a:normAutofit/>
+          </a:bodyPr>
           <a:lstStyle/>
           <a:p>
             <a:pPr indent="0" marL="0">
@@ -14277,7 +14599,9 @@
           <a:ln/>
         </p:spPr>
         <p:txBody>
-          <a:bodyPr wrap="square" lIns="0" tIns="0" rIns="0" bIns="0" rtlCol="0" anchor="t"/>
+          <a:bodyPr wrap="square" lIns="0" tIns="0" rIns="0" bIns="0" rtlCol="0" anchor="t">
+            <a:normAutofit/>
+          </a:bodyPr>
           <a:lstStyle/>
           <a:p>
             <a:pPr algn="l" marL="152400" indent="-152400">
@@ -14433,7 +14757,9 @@
           <a:ln/>
         </p:spPr>
         <p:txBody>
-          <a:bodyPr wrap="square" lIns="0" tIns="0" rIns="0" bIns="0" rtlCol="0" anchor="ctr"/>
+          <a:bodyPr wrap="square" lIns="0" tIns="0" rIns="0" bIns="0" rtlCol="0" anchor="ctr">
+            <a:normAutofit/>
+          </a:bodyPr>
           <a:lstStyle/>
           <a:p>
             <a:pPr indent="0" marL="0">
@@ -14472,7 +14798,9 @@
           <a:ln/>
         </p:spPr>
         <p:txBody>
-          <a:bodyPr wrap="square" lIns="0" tIns="0" rIns="0" bIns="0" rtlCol="0" anchor="t"/>
+          <a:bodyPr wrap="square" lIns="0" tIns="0" rIns="0" bIns="0" rtlCol="0" anchor="t">
+            <a:normAutofit/>
+          </a:bodyPr>
           <a:lstStyle/>
           <a:p>
             <a:pPr algn="l" marL="152400" indent="-152400">
@@ -14651,7 +14979,9 @@
           <a:ln/>
         </p:spPr>
         <p:txBody>
-          <a:bodyPr wrap="square" lIns="0" tIns="0" rIns="0" bIns="0" rtlCol="0" anchor="ctr"/>
+          <a:bodyPr wrap="square" lIns="0" tIns="0" rIns="0" bIns="0" rtlCol="0" anchor="ctr">
+            <a:normAutofit/>
+          </a:bodyPr>
           <a:lstStyle/>
           <a:p>
             <a:pPr indent="0" marL="0">
@@ -14690,7 +15020,9 @@
           <a:ln/>
         </p:spPr>
         <p:txBody>
-          <a:bodyPr wrap="square" lIns="0" tIns="0" rIns="0" bIns="0" rtlCol="0" anchor="ctr"/>
+          <a:bodyPr wrap="square" lIns="0" tIns="0" rIns="0" bIns="0" rtlCol="0" anchor="ctr">
+            <a:normAutofit/>
+          </a:bodyPr>
           <a:lstStyle/>
           <a:p>
             <a:pPr indent="0" marL="0">
@@ -14729,7 +15061,9 @@
           <a:ln/>
         </p:spPr>
         <p:txBody>
-          <a:bodyPr wrap="square" lIns="0" tIns="0" rIns="0" bIns="0" rtlCol="0" anchor="ctr"/>
+          <a:bodyPr wrap="square" lIns="0" tIns="0" rIns="0" bIns="0" rtlCol="0" anchor="ctr">
+            <a:normAutofit/>
+          </a:bodyPr>
           <a:lstStyle/>
           <a:p>
             <a:pPr algn="r" indent="0" marL="0">
@@ -14768,7 +15102,9 @@
           <a:ln/>
         </p:spPr>
         <p:txBody>
-          <a:bodyPr wrap="square" lIns="0" tIns="0" rIns="0" bIns="0" rtlCol="0" anchor="ctr"/>
+          <a:bodyPr wrap="square" lIns="0" tIns="0" rIns="0" bIns="0" rtlCol="0" anchor="ctr">
+            <a:normAutofit/>
+          </a:bodyPr>
           <a:lstStyle/>
           <a:p>
             <a:pPr indent="0" marL="0">
@@ -14783,7 +15119,7 @@
                 <a:ea typeface="微软雅黑" pitchFamily="34" charset="-122"/>
                 <a:cs typeface="微软雅黑" pitchFamily="34" charset="-120"/>
               </a:rPr>
-              <a:t>帮扶管理信息系统 v1.12.10</a:t>
+              <a:t>帮扶管理信息系统 v1.12.11</a:t>
             </a:r>
             <a:endParaRPr lang="en-US" sz="1050" dirty="0"/>
           </a:p>
@@ -14827,7 +15163,9 @@
           <a:ln/>
         </p:spPr>
         <p:txBody>
-          <a:bodyPr wrap="square" lIns="0" tIns="0" rIns="0" bIns="0" rtlCol="0" anchor="ctr"/>
+          <a:bodyPr wrap="square" lIns="0" tIns="0" rIns="0" bIns="0" rtlCol="0" anchor="ctr">
+            <a:normAutofit/>
+          </a:bodyPr>
           <a:lstStyle/>
           <a:p>
             <a:pPr indent="0" marL="0">
@@ -14886,7 +15224,9 @@
           <a:ln/>
         </p:spPr>
         <p:txBody>
-          <a:bodyPr wrap="square" lIns="0" tIns="0" rIns="0" bIns="0" rtlCol="0" anchor="ctr"/>
+          <a:bodyPr wrap="square" lIns="0" tIns="0" rIns="0" bIns="0" rtlCol="0" anchor="ctr">
+            <a:normAutofit/>
+          </a:bodyPr>
           <a:lstStyle/>
           <a:p>
             <a:pPr indent="0" marL="0">
@@ -14945,7 +15285,9 @@
           <a:ln/>
         </p:spPr>
         <p:txBody>
-          <a:bodyPr wrap="square" lIns="0" tIns="0" rIns="0" bIns="0" rtlCol="0" anchor="ctr"/>
+          <a:bodyPr wrap="square" lIns="0" tIns="0" rIns="0" bIns="0" rtlCol="0" anchor="ctr">
+            <a:normAutofit/>
+          </a:bodyPr>
           <a:lstStyle/>
           <a:p>
             <a:pPr indent="0" marL="0">
@@ -15004,7 +15346,9 @@
           <a:ln/>
         </p:spPr>
         <p:txBody>
-          <a:bodyPr wrap="square" lIns="0" tIns="0" rIns="0" bIns="0" rtlCol="0" anchor="ctr"/>
+          <a:bodyPr wrap="square" lIns="0" tIns="0" rIns="0" bIns="0" rtlCol="0" anchor="ctr">
+            <a:normAutofit/>
+          </a:bodyPr>
           <a:lstStyle/>
           <a:p>
             <a:pPr indent="0" marL="0">
@@ -15063,7 +15407,9 @@
           <a:ln/>
         </p:spPr>
         <p:txBody>
-          <a:bodyPr wrap="square" lIns="0" tIns="0" rIns="0" bIns="0" rtlCol="0" anchor="ctr"/>
+          <a:bodyPr wrap="square" lIns="0" tIns="0" rIns="0" bIns="0" rtlCol="0" anchor="ctr">
+            <a:normAutofit/>
+          </a:bodyPr>
           <a:lstStyle/>
           <a:p>
             <a:pPr indent="0" marL="0">
@@ -15102,7 +15448,9 @@
           <a:ln/>
         </p:spPr>
         <p:txBody>
-          <a:bodyPr wrap="square" lIns="0" tIns="0" rIns="0" bIns="0" rtlCol="0" anchor="t"/>
+          <a:bodyPr wrap="square" lIns="0" tIns="0" rIns="0" bIns="0" rtlCol="0" anchor="t">
+            <a:normAutofit/>
+          </a:bodyPr>
           <a:lstStyle/>
           <a:p>
             <a:pPr algn="l" marL="152400" indent="-152400">
@@ -15122,6 +15470,27 @@
                 <a:cs typeface="微软雅黑" pitchFamily="34" charset="-120"/>
               </a:rPr>
               <a:t>申请人视角：我的申请全状态跟踪；审批人视角：待办池 + 全部任务（/approval/tasks/all）</a:t>
+            </a:r>
+            <a:endParaRPr lang="en-US" sz="1400" dirty="0"/>
+          </a:p>
+          <a:p>
+            <a:pPr algn="l" marL="152400" indent="-152400">
+              <a:spcAft>
+                <a:spcPts val="1100"/>
+              </a:spcAft>
+              <a:buSzPct val="100000"/>
+              <a:buChar char="▪"/>
+            </a:pPr>
+            <a:r>
+              <a:rPr lang="en-US" sz="1400" dirty="0">
+                <a:solidFill>
+                  <a:srgbClr val="1A2E24"/>
+                </a:solidFill>
+                <a:latin typeface="微软雅黑" pitchFamily="34" charset="0"/>
+                <a:ea typeface="微软雅黑" pitchFamily="34" charset="-122"/>
+                <a:cs typeface="微软雅黑" pitchFamily="34" charset="-120"/>
+              </a:rPr>
+              <a:t>「待我审批 / 我发起的 / 已完成」状态页签切换，支持批量通过 / 驳回（原因必填）</a:t>
             </a:r>
             <a:endParaRPr lang="en-US" sz="1400" dirty="0"/>
           </a:p>
@@ -15281,7 +15650,9 @@
           <a:ln/>
         </p:spPr>
         <p:txBody>
-          <a:bodyPr wrap="square" lIns="0" tIns="0" rIns="0" bIns="0" rtlCol="0" anchor="ctr"/>
+          <a:bodyPr wrap="square" lIns="0" tIns="0" rIns="0" bIns="0" rtlCol="0" anchor="ctr">
+            <a:normAutofit/>
+          </a:bodyPr>
           <a:lstStyle/>
           <a:p>
             <a:pPr indent="0" marL="0">
@@ -15320,7 +15691,9 @@
           <a:ln/>
         </p:spPr>
         <p:txBody>
-          <a:bodyPr wrap="square" lIns="0" tIns="0" rIns="0" bIns="0" rtlCol="0" anchor="ctr"/>
+          <a:bodyPr wrap="square" lIns="0" tIns="0" rIns="0" bIns="0" rtlCol="0" anchor="ctr">
+            <a:normAutofit/>
+          </a:bodyPr>
           <a:lstStyle/>
           <a:p>
             <a:pPr indent="0" marL="0">
@@ -15359,7 +15732,9 @@
           <a:ln/>
         </p:spPr>
         <p:txBody>
-          <a:bodyPr wrap="square" lIns="0" tIns="0" rIns="0" bIns="0" rtlCol="0" anchor="ctr"/>
+          <a:bodyPr wrap="square" lIns="0" tIns="0" rIns="0" bIns="0" rtlCol="0" anchor="ctr">
+            <a:normAutofit/>
+          </a:bodyPr>
           <a:lstStyle/>
           <a:p>
             <a:pPr algn="r" indent="0" marL="0">
@@ -15398,7 +15773,9 @@
           <a:ln/>
         </p:spPr>
         <p:txBody>
-          <a:bodyPr wrap="square" lIns="0" tIns="0" rIns="0" bIns="0" rtlCol="0" anchor="ctr"/>
+          <a:bodyPr wrap="square" lIns="0" tIns="0" rIns="0" bIns="0" rtlCol="0" anchor="ctr">
+            <a:normAutofit/>
+          </a:bodyPr>
           <a:lstStyle/>
           <a:p>
             <a:pPr indent="0" marL="0">
@@ -15413,7 +15790,7 @@
                 <a:ea typeface="微软雅黑" pitchFamily="34" charset="-122"/>
                 <a:cs typeface="微软雅黑" pitchFamily="34" charset="-120"/>
               </a:rPr>
-              <a:t>帮扶管理信息系统 v1.12.10</a:t>
+              <a:t>帮扶管理信息系统 v1.12.11</a:t>
             </a:r>
             <a:endParaRPr lang="en-US" sz="1050" dirty="0"/>
           </a:p>
@@ -15466,7 +15843,9 @@
           <a:ln/>
         </p:spPr>
         <p:txBody>
-          <a:bodyPr wrap="square" lIns="0" tIns="0" rIns="0" bIns="0" rtlCol="0" anchor="ctr"/>
+          <a:bodyPr wrap="square" lIns="0" tIns="0" rIns="0" bIns="0" rtlCol="0" anchor="ctr">
+            <a:normAutofit/>
+          </a:bodyPr>
           <a:lstStyle/>
           <a:p>
             <a:pPr indent="0" marL="0">
@@ -15505,7 +15884,9 @@
           <a:ln/>
         </p:spPr>
         <p:txBody>
-          <a:bodyPr wrap="square" lIns="0" tIns="0" rIns="0" bIns="0" rtlCol="0" anchor="t"/>
+          <a:bodyPr wrap="square" lIns="0" tIns="0" rIns="0" bIns="0" rtlCol="0" anchor="t">
+            <a:normAutofit/>
+          </a:bodyPr>
           <a:lstStyle/>
           <a:p>
             <a:pPr algn="l" marL="152400" indent="-152400">
@@ -15640,7 +16021,9 @@
           <a:ln/>
         </p:spPr>
         <p:txBody>
-          <a:bodyPr wrap="square" lIns="0" tIns="0" rIns="0" bIns="0" rtlCol="0" anchor="ctr"/>
+          <a:bodyPr wrap="square" lIns="0" tIns="0" rIns="0" bIns="0" rtlCol="0" anchor="ctr">
+            <a:normAutofit/>
+          </a:bodyPr>
           <a:lstStyle/>
           <a:p>
             <a:pPr indent="0" marL="0">
@@ -15679,7 +16062,9 @@
           <a:ln/>
         </p:spPr>
         <p:txBody>
-          <a:bodyPr wrap="square" lIns="0" tIns="0" rIns="0" bIns="0" rtlCol="0" anchor="t"/>
+          <a:bodyPr wrap="square" lIns="0" tIns="0" rIns="0" bIns="0" rtlCol="0" anchor="t">
+            <a:normAutofit/>
+          </a:bodyPr>
           <a:lstStyle/>
           <a:p>
             <a:pPr algn="l" marL="152400" indent="-152400">
@@ -15814,7 +16199,9 @@
           <a:ln/>
         </p:spPr>
         <p:txBody>
-          <a:bodyPr wrap="square" lIns="0" tIns="0" rIns="0" bIns="0" rtlCol="0" anchor="ctr"/>
+          <a:bodyPr wrap="square" lIns="0" tIns="0" rIns="0" bIns="0" rtlCol="0" anchor="ctr">
+            <a:normAutofit/>
+          </a:bodyPr>
           <a:lstStyle/>
           <a:p>
             <a:pPr indent="0" marL="0">
@@ -15853,7 +16240,9 @@
           <a:ln/>
         </p:spPr>
         <p:txBody>
-          <a:bodyPr wrap="square" lIns="0" tIns="0" rIns="0" bIns="0" rtlCol="0" anchor="ctr"/>
+          <a:bodyPr wrap="square" lIns="0" tIns="0" rIns="0" bIns="0" rtlCol="0" anchor="ctr">
+            <a:normAutofit/>
+          </a:bodyPr>
           <a:lstStyle/>
           <a:p>
             <a:pPr indent="0" marL="0">
@@ -15944,7 +16333,9 @@
           <a:ln/>
         </p:spPr>
         <p:txBody>
-          <a:bodyPr wrap="square" lIns="0" tIns="0" rIns="0" bIns="0" rtlCol="0" anchor="ctr"/>
+          <a:bodyPr wrap="square" lIns="0" tIns="0" rIns="0" bIns="0" rtlCol="0" anchor="ctr">
+            <a:normAutofit/>
+          </a:bodyPr>
           <a:lstStyle/>
           <a:p>
             <a:pPr indent="0" marL="0">
@@ -15983,7 +16374,9 @@
           <a:ln/>
         </p:spPr>
         <p:txBody>
-          <a:bodyPr wrap="square" lIns="0" tIns="0" rIns="0" bIns="0" rtlCol="0" anchor="ctr"/>
+          <a:bodyPr wrap="square" lIns="0" tIns="0" rIns="0" bIns="0" rtlCol="0" anchor="ctr">
+            <a:normAutofit/>
+          </a:bodyPr>
           <a:lstStyle/>
           <a:p>
             <a:pPr indent="0" marL="0">
@@ -16022,7 +16415,9 @@
           <a:ln/>
         </p:spPr>
         <p:txBody>
-          <a:bodyPr wrap="square" lIns="0" tIns="0" rIns="0" bIns="0" rtlCol="0" anchor="ctr"/>
+          <a:bodyPr wrap="square" lIns="0" tIns="0" rIns="0" bIns="0" rtlCol="0" anchor="ctr">
+            <a:normAutofit/>
+          </a:bodyPr>
           <a:lstStyle/>
           <a:p>
             <a:pPr algn="r" indent="0" marL="0">
@@ -16061,7 +16456,9 @@
           <a:ln/>
         </p:spPr>
         <p:txBody>
-          <a:bodyPr wrap="square" lIns="0" tIns="0" rIns="0" bIns="0" rtlCol="0" anchor="ctr"/>
+          <a:bodyPr wrap="square" lIns="0" tIns="0" rIns="0" bIns="0" rtlCol="0" anchor="ctr">
+            <a:normAutofit/>
+          </a:bodyPr>
           <a:lstStyle/>
           <a:p>
             <a:pPr indent="0" marL="0">
@@ -16076,7 +16473,7 @@
                 <a:ea typeface="微软雅黑" pitchFamily="34" charset="-122"/>
                 <a:cs typeface="微软雅黑" pitchFamily="34" charset="-120"/>
               </a:rPr>
-              <a:t>帮扶管理信息系统 v1.12.10</a:t>
+              <a:t>帮扶管理信息系统 v1.12.11</a:t>
             </a:r>
             <a:endParaRPr lang="en-US" sz="1050" dirty="0"/>
           </a:p>
@@ -16129,7 +16526,9 @@
           <a:ln/>
         </p:spPr>
         <p:txBody>
-          <a:bodyPr wrap="square" lIns="0" tIns="0" rIns="0" bIns="0" rtlCol="0" anchor="ctr"/>
+          <a:bodyPr wrap="square" lIns="0" tIns="0" rIns="0" bIns="0" rtlCol="0" anchor="ctr">
+            <a:normAutofit/>
+          </a:bodyPr>
           <a:lstStyle/>
           <a:p>
             <a:pPr indent="0" marL="0">
@@ -16168,7 +16567,9 @@
           <a:ln/>
         </p:spPr>
         <p:txBody>
-          <a:bodyPr wrap="square" lIns="0" tIns="0" rIns="0" bIns="0" rtlCol="0" anchor="ctr"/>
+          <a:bodyPr wrap="square" lIns="0" tIns="0" rIns="0" bIns="0" rtlCol="0" anchor="ctr">
+            <a:normAutofit/>
+          </a:bodyPr>
           <a:lstStyle/>
           <a:p>
             <a:pPr indent="0" marL="0">
@@ -16236,7 +16637,9 @@
           <a:ln/>
         </p:spPr>
         <p:txBody>
-          <a:bodyPr wrap="square" lIns="0" tIns="0" rIns="0" bIns="0" rtlCol="0" anchor="ctr"/>
+          <a:bodyPr wrap="square" lIns="0" tIns="0" rIns="0" bIns="0" rtlCol="0" anchor="ctr">
+            <a:normAutofit/>
+          </a:bodyPr>
           <a:lstStyle/>
           <a:p>
             <a:pPr indent="0" marL="0">
@@ -16275,7 +16678,9 @@
           <a:ln/>
         </p:spPr>
         <p:txBody>
-          <a:bodyPr wrap="square" lIns="0" tIns="0" rIns="0" bIns="0" rtlCol="0" anchor="ctr"/>
+          <a:bodyPr wrap="square" lIns="0" tIns="0" rIns="0" bIns="0" rtlCol="0" anchor="ctr">
+            <a:normAutofit/>
+          </a:bodyPr>
           <a:lstStyle/>
           <a:p>
             <a:pPr indent="0" marL="0">
@@ -16343,7 +16748,9 @@
           <a:ln/>
         </p:spPr>
         <p:txBody>
-          <a:bodyPr wrap="square" lIns="0" tIns="0" rIns="0" bIns="0" rtlCol="0" anchor="ctr"/>
+          <a:bodyPr wrap="square" lIns="0" tIns="0" rIns="0" bIns="0" rtlCol="0" anchor="ctr">
+            <a:normAutofit/>
+          </a:bodyPr>
           <a:lstStyle/>
           <a:p>
             <a:pPr indent="0" marL="0">
@@ -16382,7 +16789,9 @@
           <a:ln/>
         </p:spPr>
         <p:txBody>
-          <a:bodyPr wrap="square" lIns="0" tIns="0" rIns="0" bIns="0" rtlCol="0" anchor="ctr"/>
+          <a:bodyPr wrap="square" lIns="0" tIns="0" rIns="0" bIns="0" rtlCol="0" anchor="ctr">
+            <a:normAutofit/>
+          </a:bodyPr>
           <a:lstStyle/>
           <a:p>
             <a:pPr indent="0" marL="0">
@@ -16450,7 +16859,9 @@
           <a:ln/>
         </p:spPr>
         <p:txBody>
-          <a:bodyPr wrap="square" lIns="0" tIns="0" rIns="0" bIns="0" rtlCol="0" anchor="ctr"/>
+          <a:bodyPr wrap="square" lIns="0" tIns="0" rIns="0" bIns="0" rtlCol="0" anchor="ctr">
+            <a:normAutofit/>
+          </a:bodyPr>
           <a:lstStyle/>
           <a:p>
             <a:pPr indent="0" marL="0">
@@ -16489,7 +16900,9 @@
           <a:ln/>
         </p:spPr>
         <p:txBody>
-          <a:bodyPr wrap="square" lIns="0" tIns="0" rIns="0" bIns="0" rtlCol="0" anchor="ctr"/>
+          <a:bodyPr wrap="square" lIns="0" tIns="0" rIns="0" bIns="0" rtlCol="0" anchor="ctr">
+            <a:normAutofit/>
+          </a:bodyPr>
           <a:lstStyle/>
           <a:p>
             <a:pPr indent="0" marL="0">
@@ -16557,7 +16970,9 @@
           <a:ln/>
         </p:spPr>
         <p:txBody>
-          <a:bodyPr wrap="square" lIns="0" tIns="0" rIns="0" bIns="0" rtlCol="0" anchor="ctr"/>
+          <a:bodyPr wrap="square" lIns="0" tIns="0" rIns="0" bIns="0" rtlCol="0" anchor="ctr">
+            <a:normAutofit/>
+          </a:bodyPr>
           <a:lstStyle/>
           <a:p>
             <a:pPr indent="0" marL="0">
@@ -16596,7 +17011,9 @@
           <a:ln/>
         </p:spPr>
         <p:txBody>
-          <a:bodyPr wrap="square" lIns="0" tIns="0" rIns="0" bIns="0" rtlCol="0" anchor="ctr"/>
+          <a:bodyPr wrap="square" lIns="0" tIns="0" rIns="0" bIns="0" rtlCol="0" anchor="ctr">
+            <a:normAutofit/>
+          </a:bodyPr>
           <a:lstStyle/>
           <a:p>
             <a:pPr indent="0" marL="0">
@@ -16664,7 +17081,9 @@
           <a:ln/>
         </p:spPr>
         <p:txBody>
-          <a:bodyPr wrap="square" lIns="0" tIns="0" rIns="0" bIns="0" rtlCol="0" anchor="ctr"/>
+          <a:bodyPr wrap="square" lIns="0" tIns="0" rIns="0" bIns="0" rtlCol="0" anchor="ctr">
+            <a:normAutofit/>
+          </a:bodyPr>
           <a:lstStyle/>
           <a:p>
             <a:pPr indent="0" marL="0">
@@ -16703,7 +17122,9 @@
           <a:ln/>
         </p:spPr>
         <p:txBody>
-          <a:bodyPr wrap="square" lIns="0" tIns="0" rIns="0" bIns="0" rtlCol="0" anchor="ctr"/>
+          <a:bodyPr wrap="square" lIns="0" tIns="0" rIns="0" bIns="0" rtlCol="0" anchor="ctr">
+            <a:normAutofit/>
+          </a:bodyPr>
           <a:lstStyle/>
           <a:p>
             <a:pPr indent="0" marL="0">
@@ -16794,7 +17215,9 @@
           <a:ln/>
         </p:spPr>
         <p:txBody>
-          <a:bodyPr wrap="square" lIns="0" tIns="0" rIns="0" bIns="0" rtlCol="0" anchor="ctr"/>
+          <a:bodyPr wrap="square" lIns="0" tIns="0" rIns="0" bIns="0" rtlCol="0" anchor="ctr">
+            <a:normAutofit/>
+          </a:bodyPr>
           <a:lstStyle/>
           <a:p>
             <a:pPr indent="0" marL="0">
@@ -16833,7 +17256,9 @@
           <a:ln/>
         </p:spPr>
         <p:txBody>
-          <a:bodyPr wrap="square" lIns="0" tIns="0" rIns="0" bIns="0" rtlCol="0" anchor="ctr"/>
+          <a:bodyPr wrap="square" lIns="0" tIns="0" rIns="0" bIns="0" rtlCol="0" anchor="ctr">
+            <a:normAutofit/>
+          </a:bodyPr>
           <a:lstStyle/>
           <a:p>
             <a:pPr indent="0" marL="0">
@@ -16872,7 +17297,9 @@
           <a:ln/>
         </p:spPr>
         <p:txBody>
-          <a:bodyPr wrap="square" lIns="0" tIns="0" rIns="0" bIns="0" rtlCol="0" anchor="ctr"/>
+          <a:bodyPr wrap="square" lIns="0" tIns="0" rIns="0" bIns="0" rtlCol="0" anchor="ctr">
+            <a:normAutofit/>
+          </a:bodyPr>
           <a:lstStyle/>
           <a:p>
             <a:pPr algn="r" indent="0" marL="0">
@@ -16911,7 +17338,9 @@
           <a:ln/>
         </p:spPr>
         <p:txBody>
-          <a:bodyPr wrap="square" lIns="0" tIns="0" rIns="0" bIns="0" rtlCol="0" anchor="ctr"/>
+          <a:bodyPr wrap="square" lIns="0" tIns="0" rIns="0" bIns="0" rtlCol="0" anchor="ctr">
+            <a:normAutofit/>
+          </a:bodyPr>
           <a:lstStyle/>
           <a:p>
             <a:pPr indent="0" marL="0">
@@ -16926,7 +17355,7 @@
                 <a:ea typeface="微软雅黑" pitchFamily="34" charset="-122"/>
                 <a:cs typeface="微软雅黑" pitchFamily="34" charset="-120"/>
               </a:rPr>
-              <a:t>帮扶管理信息系统 v1.12.10</a:t>
+              <a:t>帮扶管理信息系统 v1.12.11</a:t>
             </a:r>
             <a:endParaRPr lang="en-US" sz="1050" dirty="0"/>
           </a:p>
@@ -16979,7 +17408,9 @@
           <a:ln/>
         </p:spPr>
         <p:txBody>
-          <a:bodyPr wrap="square" lIns="0" tIns="0" rIns="0" bIns="0" rtlCol="0" anchor="ctr"/>
+          <a:bodyPr wrap="square" lIns="0" tIns="0" rIns="0" bIns="0" rtlCol="0" anchor="ctr">
+            <a:normAutofit/>
+          </a:bodyPr>
           <a:lstStyle/>
           <a:p>
             <a:pPr indent="0" marL="0">
@@ -17018,7 +17449,9 @@
           <a:ln/>
         </p:spPr>
         <p:txBody>
-          <a:bodyPr wrap="square" lIns="0" tIns="0" rIns="0" bIns="0" rtlCol="0" anchor="ctr"/>
+          <a:bodyPr wrap="square" lIns="0" tIns="0" rIns="0" bIns="0" rtlCol="0" anchor="ctr">
+            <a:normAutofit/>
+          </a:bodyPr>
           <a:lstStyle/>
           <a:p>
             <a:pPr indent="0" marL="0">
@@ -17033,7 +17466,7 @@
                 <a:ea typeface="微软雅黑" pitchFamily="34" charset="-122"/>
                 <a:cs typeface="微软雅黑" pitchFamily="34" charset="-120"/>
               </a:rPr>
-              <a:t>用户增删改、组织树管理、组织删除级联守卫</a:t>
+              <a:t>用户增删改、组织树管理（启动钩子自动自愈）、组织删除级联守卫</a:t>
             </a:r>
             <a:endParaRPr lang="en-US" sz="1200" dirty="0"/>
           </a:p>
@@ -17086,7 +17519,9 @@
           <a:ln/>
         </p:spPr>
         <p:txBody>
-          <a:bodyPr wrap="square" lIns="0" tIns="0" rIns="0" bIns="0" rtlCol="0" anchor="ctr"/>
+          <a:bodyPr wrap="square" lIns="0" tIns="0" rIns="0" bIns="0" rtlCol="0" anchor="ctr">
+            <a:normAutofit/>
+          </a:bodyPr>
           <a:lstStyle/>
           <a:p>
             <a:pPr indent="0" marL="0">
@@ -17125,7 +17560,9 @@
           <a:ln/>
         </p:spPr>
         <p:txBody>
-          <a:bodyPr wrap="square" lIns="0" tIns="0" rIns="0" bIns="0" rtlCol="0" anchor="ctr"/>
+          <a:bodyPr wrap="square" lIns="0" tIns="0" rIns="0" bIns="0" rtlCol="0" anchor="ctr">
+            <a:normAutofit/>
+          </a:bodyPr>
           <a:lstStyle/>
           <a:p>
             <a:pPr indent="0" marL="0">
@@ -17193,7 +17630,9 @@
           <a:ln/>
         </p:spPr>
         <p:txBody>
-          <a:bodyPr wrap="square" lIns="0" tIns="0" rIns="0" bIns="0" rtlCol="0" anchor="ctr"/>
+          <a:bodyPr wrap="square" lIns="0" tIns="0" rIns="0" bIns="0" rtlCol="0" anchor="ctr">
+            <a:normAutofit/>
+          </a:bodyPr>
           <a:lstStyle/>
           <a:p>
             <a:pPr indent="0" marL="0">
@@ -17232,7 +17671,9 @@
           <a:ln/>
         </p:spPr>
         <p:txBody>
-          <a:bodyPr wrap="square" lIns="0" tIns="0" rIns="0" bIns="0" rtlCol="0" anchor="ctr"/>
+          <a:bodyPr wrap="square" lIns="0" tIns="0" rIns="0" bIns="0" rtlCol="0" anchor="ctr">
+            <a:normAutofit/>
+          </a:bodyPr>
           <a:lstStyle/>
           <a:p>
             <a:pPr indent="0" marL="0">
@@ -17300,7 +17741,9 @@
           <a:ln/>
         </p:spPr>
         <p:txBody>
-          <a:bodyPr wrap="square" lIns="0" tIns="0" rIns="0" bIns="0" rtlCol="0" anchor="ctr"/>
+          <a:bodyPr wrap="square" lIns="0" tIns="0" rIns="0" bIns="0" rtlCol="0" anchor="ctr">
+            <a:normAutofit/>
+          </a:bodyPr>
           <a:lstStyle/>
           <a:p>
             <a:pPr indent="0" marL="0">
@@ -17339,7 +17782,9 @@
           <a:ln/>
         </p:spPr>
         <p:txBody>
-          <a:bodyPr wrap="square" lIns="0" tIns="0" rIns="0" bIns="0" rtlCol="0" anchor="ctr"/>
+          <a:bodyPr wrap="square" lIns="0" tIns="0" rIns="0" bIns="0" rtlCol="0" anchor="ctr">
+            <a:normAutofit/>
+          </a:bodyPr>
           <a:lstStyle/>
           <a:p>
             <a:pPr indent="0" marL="0">
@@ -17407,7 +17852,9 @@
           <a:ln/>
         </p:spPr>
         <p:txBody>
-          <a:bodyPr wrap="square" lIns="0" tIns="0" rIns="0" bIns="0" rtlCol="0" anchor="ctr"/>
+          <a:bodyPr wrap="square" lIns="0" tIns="0" rIns="0" bIns="0" rtlCol="0" anchor="ctr">
+            <a:normAutofit/>
+          </a:bodyPr>
           <a:lstStyle/>
           <a:p>
             <a:pPr indent="0" marL="0">
@@ -17446,7 +17893,9 @@
           <a:ln/>
         </p:spPr>
         <p:txBody>
-          <a:bodyPr wrap="square" lIns="0" tIns="0" rIns="0" bIns="0" rtlCol="0" anchor="ctr"/>
+          <a:bodyPr wrap="square" lIns="0" tIns="0" rIns="0" bIns="0" rtlCol="0" anchor="ctr">
+            <a:normAutofit/>
+          </a:bodyPr>
           <a:lstStyle/>
           <a:p>
             <a:pPr indent="0" marL="0">
@@ -17514,7 +17963,9 @@
           <a:ln/>
         </p:spPr>
         <p:txBody>
-          <a:bodyPr wrap="square" lIns="0" tIns="0" rIns="0" bIns="0" rtlCol="0" anchor="ctr"/>
+          <a:bodyPr wrap="square" lIns="0" tIns="0" rIns="0" bIns="0" rtlCol="0" anchor="ctr">
+            <a:normAutofit/>
+          </a:bodyPr>
           <a:lstStyle/>
           <a:p>
             <a:pPr indent="0" marL="0">
@@ -17553,7 +18004,9 @@
           <a:ln/>
         </p:spPr>
         <p:txBody>
-          <a:bodyPr wrap="square" lIns="0" tIns="0" rIns="0" bIns="0" rtlCol="0" anchor="ctr"/>
+          <a:bodyPr wrap="square" lIns="0" tIns="0" rIns="0" bIns="0" rtlCol="0" anchor="ctr">
+            <a:normAutofit/>
+          </a:bodyPr>
           <a:lstStyle/>
           <a:p>
             <a:pPr indent="0" marL="0">
@@ -17615,16 +18068,18 @@
         <p:spPr>
           <a:xfrm>
             <a:off x="502920" y="822960"/>
-            <a:ext cx="4206240" cy="3108960"/>
-          </a:xfrm>
-          <a:prstGeom prst="rect">
-            <a:avLst/>
-          </a:prstGeom>
-          <a:noFill/>
-          <a:ln/>
-        </p:spPr>
-        <p:txBody>
-          <a:bodyPr wrap="square" lIns="0" tIns="0" rIns="0" bIns="0" rtlCol="0" anchor="ctr"/>
+            <a:ext cx="4206240" cy="4315121"/>
+          </a:xfrm>
+          <a:prstGeom prst="rect">
+            <a:avLst/>
+          </a:prstGeom>
+          <a:noFill/>
+          <a:ln/>
+        </p:spPr>
+        <p:txBody>
+          <a:bodyPr wrap="square" lIns="0" tIns="0" rIns="0" bIns="0" rtlCol="0" anchor="ctr">
+            <a:normAutofit/>
+          </a:bodyPr>
           <a:lstStyle/>
           <a:p>
             <a:pPr indent="0" marL="0">
@@ -17654,16 +18109,18 @@
         <p:spPr>
           <a:xfrm>
             <a:off x="914400" y="3977640"/>
-            <a:ext cx="10332720" cy="868680"/>
-          </a:xfrm>
-          <a:prstGeom prst="rect">
-            <a:avLst/>
-          </a:prstGeom>
-          <a:noFill/>
-          <a:ln/>
-        </p:spPr>
-        <p:txBody>
-          <a:bodyPr wrap="square" lIns="0" tIns="0" rIns="0" bIns="0" rtlCol="0" anchor="ctr"/>
+            <a:ext cx="10332720" cy="877655"/>
+          </a:xfrm>
+          <a:prstGeom prst="rect">
+            <a:avLst/>
+          </a:prstGeom>
+          <a:noFill/>
+          <a:ln/>
+        </p:spPr>
+        <p:txBody>
+          <a:bodyPr wrap="square" lIns="0" tIns="0" rIns="0" bIns="0" rtlCol="0" anchor="ctr">
+            <a:normAutofit/>
+          </a:bodyPr>
           <a:lstStyle/>
           <a:p>
             <a:pPr indent="0" marL="0">
@@ -17702,7 +18159,9 @@
           <a:ln/>
         </p:spPr>
         <p:txBody>
-          <a:bodyPr wrap="square" lIns="0" tIns="0" rIns="0" bIns="0" rtlCol="0" anchor="ctr"/>
+          <a:bodyPr wrap="square" lIns="0" tIns="0" rIns="0" bIns="0" rtlCol="0" anchor="ctr">
+            <a:normAutofit/>
+          </a:bodyPr>
           <a:lstStyle/>
           <a:p>
             <a:pPr indent="0" marL="0">
@@ -17741,10 +18200,12 @@
           <a:ln/>
         </p:spPr>
         <p:txBody>
-          <a:bodyPr wrap="square" lIns="0" tIns="0" rIns="0" bIns="0" rtlCol="0" anchor="t"/>
-          <a:lstStyle/>
-          <a:p>
-            <a:pPr marL="152400" indent="-152400">
+          <a:bodyPr wrap="square" lIns="0" tIns="0" rIns="0" bIns="0" rtlCol="0" anchor="t">
+            <a:normAutofit/>
+          </a:bodyPr>
+          <a:lstStyle/>
+          <a:p>
+            <a:pPr algn="l" marL="152400" indent="-152400">
               <a:spcAft>
                 <a:spcPts val="1000"/>
               </a:spcAft>
@@ -17765,7 +18226,7 @@
             <a:endParaRPr lang="en-US" sz="1400" dirty="0"/>
           </a:p>
           <a:p>
-            <a:pPr marL="152400" indent="-152400">
+            <a:pPr algn="l" marL="152400" indent="-152400">
               <a:spcAft>
                 <a:spcPts val="1000"/>
               </a:spcAft>
@@ -17786,7 +18247,7 @@
             <a:endParaRPr lang="en-US" sz="1400" dirty="0"/>
           </a:p>
           <a:p>
-            <a:pPr marL="152400" indent="-152400">
+            <a:pPr algn="l" marL="152400" indent="-152400">
               <a:spcAft>
                 <a:spcPts val="1000"/>
               </a:spcAft>
@@ -17807,7 +18268,7 @@
             <a:endParaRPr lang="en-US" sz="1400" dirty="0"/>
           </a:p>
           <a:p>
-            <a:pPr marL="152400" indent="-152400">
+            <a:pPr algn="l" marL="152400" indent="-152400">
               <a:spcAft>
                 <a:spcPts val="1000"/>
               </a:spcAft>
@@ -17847,7 +18308,9 @@
           <a:ln/>
         </p:spPr>
         <p:txBody>
-          <a:bodyPr wrap="square" lIns="0" tIns="0" rIns="0" bIns="0" rtlCol="0" anchor="ctr"/>
+          <a:bodyPr wrap="square" lIns="0" tIns="0" rIns="0" bIns="0" rtlCol="0" anchor="ctr">
+            <a:normAutofit/>
+          </a:bodyPr>
           <a:lstStyle/>
           <a:p>
             <a:pPr algn="r" indent="0" marL="0">
@@ -17938,7 +18401,9 @@
           <a:ln/>
         </p:spPr>
         <p:txBody>
-          <a:bodyPr wrap="square" lIns="0" tIns="0" rIns="0" bIns="0" rtlCol="0" anchor="ctr"/>
+          <a:bodyPr wrap="square" lIns="0" tIns="0" rIns="0" bIns="0" rtlCol="0" anchor="ctr">
+            <a:normAutofit/>
+          </a:bodyPr>
           <a:lstStyle/>
           <a:p>
             <a:pPr indent="0" marL="0">
@@ -17977,7 +18442,9 @@
           <a:ln/>
         </p:spPr>
         <p:txBody>
-          <a:bodyPr wrap="square" lIns="0" tIns="0" rIns="0" bIns="0" rtlCol="0" anchor="ctr"/>
+          <a:bodyPr wrap="square" lIns="0" tIns="0" rIns="0" bIns="0" rtlCol="0" anchor="ctr">
+            <a:normAutofit/>
+          </a:bodyPr>
           <a:lstStyle/>
           <a:p>
             <a:pPr indent="0" marL="0">
@@ -18016,7 +18483,9 @@
           <a:ln/>
         </p:spPr>
         <p:txBody>
-          <a:bodyPr wrap="square" lIns="0" tIns="0" rIns="0" bIns="0" rtlCol="0" anchor="ctr"/>
+          <a:bodyPr wrap="square" lIns="0" tIns="0" rIns="0" bIns="0" rtlCol="0" anchor="ctr">
+            <a:normAutofit/>
+          </a:bodyPr>
           <a:lstStyle/>
           <a:p>
             <a:pPr algn="r" indent="0" marL="0">
@@ -18055,7 +18524,9 @@
           <a:ln/>
         </p:spPr>
         <p:txBody>
-          <a:bodyPr wrap="square" lIns="0" tIns="0" rIns="0" bIns="0" rtlCol="0" anchor="ctr"/>
+          <a:bodyPr wrap="square" lIns="0" tIns="0" rIns="0" bIns="0" rtlCol="0" anchor="ctr">
+            <a:normAutofit/>
+          </a:bodyPr>
           <a:lstStyle/>
           <a:p>
             <a:pPr indent="0" marL="0">
@@ -18070,7 +18541,7 @@
                 <a:ea typeface="微软雅黑" pitchFamily="34" charset="-122"/>
                 <a:cs typeface="微软雅黑" pitchFamily="34" charset="-120"/>
               </a:rPr>
-              <a:t>帮扶管理信息系统 v1.12.10</a:t>
+              <a:t>帮扶管理信息系统 v1.12.11</a:t>
             </a:r>
             <a:endParaRPr lang="en-US" sz="1050" dirty="0"/>
           </a:p>
@@ -18145,7 +18616,9 @@
           <a:ln/>
         </p:spPr>
         <p:txBody>
-          <a:bodyPr wrap="square" lIns="0" tIns="0" rIns="0" bIns="0" rtlCol="0" anchor="ctr"/>
+          <a:bodyPr wrap="square" lIns="0" tIns="0" rIns="0" bIns="0" rtlCol="0" anchor="ctr">
+            <a:normAutofit/>
+          </a:bodyPr>
           <a:lstStyle/>
           <a:p>
             <a:pPr algn="ctr" indent="0" marL="0">
@@ -18184,7 +18657,9 @@
           <a:ln/>
         </p:spPr>
         <p:txBody>
-          <a:bodyPr wrap="square" lIns="0" tIns="0" rIns="0" bIns="0" rtlCol="0" anchor="ctr"/>
+          <a:bodyPr wrap="square" lIns="0" tIns="0" rIns="0" bIns="0" rtlCol="0" anchor="ctr">
+            <a:normAutofit/>
+          </a:bodyPr>
           <a:lstStyle/>
           <a:p>
             <a:pPr indent="0" marL="0">
@@ -18223,7 +18698,9 @@
           <a:ln/>
         </p:spPr>
         <p:txBody>
-          <a:bodyPr wrap="square" lIns="0" tIns="0" rIns="0" bIns="0" rtlCol="0" anchor="ctr"/>
+          <a:bodyPr wrap="square" lIns="0" tIns="0" rIns="0" bIns="0" rtlCol="0" anchor="ctr">
+            <a:normAutofit/>
+          </a:bodyPr>
           <a:lstStyle/>
           <a:p>
             <a:pPr indent="0" marL="0">
@@ -18313,7 +18790,9 @@
           <a:ln/>
         </p:spPr>
         <p:txBody>
-          <a:bodyPr wrap="square" lIns="0" tIns="0" rIns="0" bIns="0" rtlCol="0" anchor="ctr"/>
+          <a:bodyPr wrap="square" lIns="0" tIns="0" rIns="0" bIns="0" rtlCol="0" anchor="ctr">
+            <a:normAutofit/>
+          </a:bodyPr>
           <a:lstStyle/>
           <a:p>
             <a:pPr algn="ctr" indent="0" marL="0">
@@ -18352,7 +18831,9 @@
           <a:ln/>
         </p:spPr>
         <p:txBody>
-          <a:bodyPr wrap="square" lIns="0" tIns="0" rIns="0" bIns="0" rtlCol="0" anchor="ctr"/>
+          <a:bodyPr wrap="square" lIns="0" tIns="0" rIns="0" bIns="0" rtlCol="0" anchor="ctr">
+            <a:normAutofit/>
+          </a:bodyPr>
           <a:lstStyle/>
           <a:p>
             <a:pPr indent="0" marL="0">
@@ -18391,7 +18872,9 @@
           <a:ln/>
         </p:spPr>
         <p:txBody>
-          <a:bodyPr wrap="square" lIns="0" tIns="0" rIns="0" bIns="0" rtlCol="0" anchor="ctr"/>
+          <a:bodyPr wrap="square" lIns="0" tIns="0" rIns="0" bIns="0" rtlCol="0" anchor="ctr">
+            <a:normAutofit/>
+          </a:bodyPr>
           <a:lstStyle/>
           <a:p>
             <a:pPr indent="0" marL="0">
@@ -18481,7 +18964,9 @@
           <a:ln/>
         </p:spPr>
         <p:txBody>
-          <a:bodyPr wrap="square" lIns="0" tIns="0" rIns="0" bIns="0" rtlCol="0" anchor="ctr"/>
+          <a:bodyPr wrap="square" lIns="0" tIns="0" rIns="0" bIns="0" rtlCol="0" anchor="ctr">
+            <a:normAutofit/>
+          </a:bodyPr>
           <a:lstStyle/>
           <a:p>
             <a:pPr algn="ctr" indent="0" marL="0">
@@ -18520,7 +19005,9 @@
           <a:ln/>
         </p:spPr>
         <p:txBody>
-          <a:bodyPr wrap="square" lIns="0" tIns="0" rIns="0" bIns="0" rtlCol="0" anchor="ctr"/>
+          <a:bodyPr wrap="square" lIns="0" tIns="0" rIns="0" bIns="0" rtlCol="0" anchor="ctr">
+            <a:normAutofit/>
+          </a:bodyPr>
           <a:lstStyle/>
           <a:p>
             <a:pPr indent="0" marL="0">
@@ -18559,7 +19046,9 @@
           <a:ln/>
         </p:spPr>
         <p:txBody>
-          <a:bodyPr wrap="square" lIns="0" tIns="0" rIns="0" bIns="0" rtlCol="0" anchor="ctr"/>
+          <a:bodyPr wrap="square" lIns="0" tIns="0" rIns="0" bIns="0" rtlCol="0" anchor="ctr">
+            <a:normAutofit/>
+          </a:bodyPr>
           <a:lstStyle/>
           <a:p>
             <a:pPr indent="0" marL="0">
@@ -18649,7 +19138,9 @@
           <a:ln/>
         </p:spPr>
         <p:txBody>
-          <a:bodyPr wrap="square" lIns="0" tIns="0" rIns="0" bIns="0" rtlCol="0" anchor="ctr"/>
+          <a:bodyPr wrap="square" lIns="0" tIns="0" rIns="0" bIns="0" rtlCol="0" anchor="ctr">
+            <a:normAutofit/>
+          </a:bodyPr>
           <a:lstStyle/>
           <a:p>
             <a:pPr algn="ctr" indent="0" marL="0">
@@ -18688,7 +19179,9 @@
           <a:ln/>
         </p:spPr>
         <p:txBody>
-          <a:bodyPr wrap="square" lIns="0" tIns="0" rIns="0" bIns="0" rtlCol="0" anchor="ctr"/>
+          <a:bodyPr wrap="square" lIns="0" tIns="0" rIns="0" bIns="0" rtlCol="0" anchor="ctr">
+            <a:normAutofit/>
+          </a:bodyPr>
           <a:lstStyle/>
           <a:p>
             <a:pPr indent="0" marL="0">
@@ -18727,7 +19220,9 @@
           <a:ln/>
         </p:spPr>
         <p:txBody>
-          <a:bodyPr wrap="square" lIns="0" tIns="0" rIns="0" bIns="0" rtlCol="0" anchor="ctr"/>
+          <a:bodyPr wrap="square" lIns="0" tIns="0" rIns="0" bIns="0" rtlCol="0" anchor="ctr">
+            <a:normAutofit/>
+          </a:bodyPr>
           <a:lstStyle/>
           <a:p>
             <a:pPr indent="0" marL="0">
@@ -18766,7 +19261,9 @@
           <a:ln/>
         </p:spPr>
         <p:txBody>
-          <a:bodyPr wrap="square" lIns="0" tIns="0" rIns="0" bIns="0" rtlCol="0" anchor="t"/>
+          <a:bodyPr wrap="square" lIns="0" tIns="0" rIns="0" bIns="0" rtlCol="0" anchor="t">
+            <a:normAutofit/>
+          </a:bodyPr>
           <a:lstStyle/>
           <a:p>
             <a:pPr algn="l" marL="152400" indent="-152400">
@@ -18903,7 +19400,9 @@
           <a:ln/>
         </p:spPr>
         <p:txBody>
-          <a:bodyPr wrap="square" lIns="0" tIns="0" rIns="0" bIns="0" rtlCol="0" anchor="ctr"/>
+          <a:bodyPr wrap="square" lIns="0" tIns="0" rIns="0" bIns="0" rtlCol="0" anchor="ctr">
+            <a:normAutofit/>
+          </a:bodyPr>
           <a:lstStyle/>
           <a:p>
             <a:pPr indent="0" marL="0">
@@ -18942,7 +19441,9 @@
           <a:ln/>
         </p:spPr>
         <p:txBody>
-          <a:bodyPr wrap="square" lIns="0" tIns="0" rIns="0" bIns="0" rtlCol="0" anchor="ctr"/>
+          <a:bodyPr wrap="square" lIns="0" tIns="0" rIns="0" bIns="0" rtlCol="0" anchor="ctr">
+            <a:normAutofit/>
+          </a:bodyPr>
           <a:lstStyle/>
           <a:p>
             <a:pPr indent="0" marL="0">
@@ -18981,7 +19482,9 @@
           <a:ln/>
         </p:spPr>
         <p:txBody>
-          <a:bodyPr wrap="square" lIns="0" tIns="0" rIns="0" bIns="0" rtlCol="0" anchor="ctr"/>
+          <a:bodyPr wrap="square" lIns="0" tIns="0" rIns="0" bIns="0" rtlCol="0" anchor="ctr">
+            <a:normAutofit/>
+          </a:bodyPr>
           <a:lstStyle/>
           <a:p>
             <a:pPr algn="r" indent="0" marL="0">
@@ -19020,7 +19523,9 @@
           <a:ln/>
         </p:spPr>
         <p:txBody>
-          <a:bodyPr wrap="square" lIns="0" tIns="0" rIns="0" bIns="0" rtlCol="0" anchor="ctr"/>
+          <a:bodyPr wrap="square" lIns="0" tIns="0" rIns="0" bIns="0" rtlCol="0" anchor="ctr">
+            <a:normAutofit/>
+          </a:bodyPr>
           <a:lstStyle/>
           <a:p>
             <a:pPr indent="0" marL="0">
@@ -19035,7 +19540,7 @@
                 <a:ea typeface="微软雅黑" pitchFamily="34" charset="-122"/>
                 <a:cs typeface="微软雅黑" pitchFamily="34" charset="-120"/>
               </a:rPr>
-              <a:t>帮扶管理信息系统 v1.12.10</a:t>
+              <a:t>帮扶管理信息系统 v1.12.11</a:t>
             </a:r>
             <a:endParaRPr lang="en-US" sz="1050" dirty="0"/>
           </a:p>
@@ -19088,7 +19593,9 @@
           <a:ln/>
         </p:spPr>
         <p:txBody>
-          <a:bodyPr wrap="square" lIns="0" tIns="0" rIns="0" bIns="0" rtlCol="0" anchor="ctr"/>
+          <a:bodyPr wrap="square" lIns="0" tIns="0" rIns="0" bIns="0" rtlCol="0" anchor="ctr">
+            <a:normAutofit/>
+          </a:bodyPr>
           <a:lstStyle/>
           <a:p>
             <a:pPr indent="0" marL="0">
@@ -19127,7 +19634,9 @@
           <a:ln/>
         </p:spPr>
         <p:txBody>
-          <a:bodyPr wrap="square" lIns="0" tIns="0" rIns="0" bIns="0" rtlCol="0" anchor="ctr"/>
+          <a:bodyPr wrap="square" lIns="0" tIns="0" rIns="0" bIns="0" rtlCol="0" anchor="ctr">
+            <a:normAutofit/>
+          </a:bodyPr>
           <a:lstStyle/>
           <a:p>
             <a:pPr indent="0" marL="0">
@@ -19166,7 +19675,9 @@
           <a:ln/>
         </p:spPr>
         <p:txBody>
-          <a:bodyPr wrap="square" lIns="0" tIns="0" rIns="0" bIns="0" rtlCol="0" anchor="ctr"/>
+          <a:bodyPr wrap="square" lIns="0" tIns="0" rIns="0" bIns="0" rtlCol="0" anchor="ctr">
+            <a:normAutofit/>
+          </a:bodyPr>
           <a:lstStyle/>
           <a:p>
             <a:pPr indent="0" marL="0">
@@ -19234,7 +19745,9 @@
           <a:ln/>
         </p:spPr>
         <p:txBody>
-          <a:bodyPr wrap="square" lIns="0" tIns="0" rIns="0" bIns="0" rtlCol="0" anchor="ctr"/>
+          <a:bodyPr wrap="square" lIns="0" tIns="0" rIns="0" bIns="0" rtlCol="0" anchor="ctr">
+            <a:normAutofit/>
+          </a:bodyPr>
           <a:lstStyle/>
           <a:p>
             <a:pPr indent="0" marL="0">
@@ -19273,7 +19786,9 @@
           <a:ln/>
         </p:spPr>
         <p:txBody>
-          <a:bodyPr wrap="square" lIns="0" tIns="0" rIns="0" bIns="0" rtlCol="0" anchor="ctr"/>
+          <a:bodyPr wrap="square" lIns="0" tIns="0" rIns="0" bIns="0" rtlCol="0" anchor="ctr">
+            <a:normAutofit/>
+          </a:bodyPr>
           <a:lstStyle/>
           <a:p>
             <a:pPr indent="0" marL="0">
@@ -19312,7 +19827,9 @@
           <a:ln/>
         </p:spPr>
         <p:txBody>
-          <a:bodyPr wrap="square" lIns="0" tIns="0" rIns="0" bIns="0" rtlCol="0" anchor="ctr"/>
+          <a:bodyPr wrap="square" lIns="0" tIns="0" rIns="0" bIns="0" rtlCol="0" anchor="ctr">
+            <a:normAutofit/>
+          </a:bodyPr>
           <a:lstStyle/>
           <a:p>
             <a:pPr indent="0" marL="0">
@@ -19380,7 +19897,9 @@
           <a:ln/>
         </p:spPr>
         <p:txBody>
-          <a:bodyPr wrap="square" lIns="0" tIns="0" rIns="0" bIns="0" rtlCol="0" anchor="ctr"/>
+          <a:bodyPr wrap="square" lIns="0" tIns="0" rIns="0" bIns="0" rtlCol="0" anchor="ctr">
+            <a:normAutofit/>
+          </a:bodyPr>
           <a:lstStyle/>
           <a:p>
             <a:pPr indent="0" marL="0">
@@ -19419,7 +19938,9 @@
           <a:ln/>
         </p:spPr>
         <p:txBody>
-          <a:bodyPr wrap="square" lIns="0" tIns="0" rIns="0" bIns="0" rtlCol="0" anchor="ctr"/>
+          <a:bodyPr wrap="square" lIns="0" tIns="0" rIns="0" bIns="0" rtlCol="0" anchor="ctr">
+            <a:normAutofit/>
+          </a:bodyPr>
           <a:lstStyle/>
           <a:p>
             <a:pPr indent="0" marL="0">
@@ -19458,7 +19979,9 @@
           <a:ln/>
         </p:spPr>
         <p:txBody>
-          <a:bodyPr wrap="square" lIns="0" tIns="0" rIns="0" bIns="0" rtlCol="0" anchor="ctr"/>
+          <a:bodyPr wrap="square" lIns="0" tIns="0" rIns="0" bIns="0" rtlCol="0" anchor="ctr">
+            <a:normAutofit/>
+          </a:bodyPr>
           <a:lstStyle/>
           <a:p>
             <a:pPr indent="0" marL="0">
@@ -19526,7 +20049,9 @@
           <a:ln/>
         </p:spPr>
         <p:txBody>
-          <a:bodyPr wrap="square" lIns="0" tIns="0" rIns="0" bIns="0" rtlCol="0" anchor="ctr"/>
+          <a:bodyPr wrap="square" lIns="0" tIns="0" rIns="0" bIns="0" rtlCol="0" anchor="ctr">
+            <a:normAutofit/>
+          </a:bodyPr>
           <a:lstStyle/>
           <a:p>
             <a:pPr indent="0" marL="0">
@@ -19565,7 +20090,9 @@
           <a:ln/>
         </p:spPr>
         <p:txBody>
-          <a:bodyPr wrap="square" lIns="0" tIns="0" rIns="0" bIns="0" rtlCol="0" anchor="t"/>
+          <a:bodyPr wrap="square" lIns="0" tIns="0" rIns="0" bIns="0" rtlCol="0" anchor="t">
+            <a:normAutofit/>
+          </a:bodyPr>
           <a:lstStyle/>
           <a:p>
             <a:pPr algn="l" marL="152400" indent="-152400">
@@ -19702,7 +20229,9 @@
           <a:ln/>
         </p:spPr>
         <p:txBody>
-          <a:bodyPr wrap="square" lIns="0" tIns="0" rIns="0" bIns="0" rtlCol="0" anchor="ctr"/>
+          <a:bodyPr wrap="square" lIns="0" tIns="0" rIns="0" bIns="0" rtlCol="0" anchor="ctr">
+            <a:normAutofit/>
+          </a:bodyPr>
           <a:lstStyle/>
           <a:p>
             <a:pPr indent="0" marL="0">
@@ -19741,7 +20270,9 @@
           <a:ln/>
         </p:spPr>
         <p:txBody>
-          <a:bodyPr wrap="square" lIns="0" tIns="0" rIns="0" bIns="0" rtlCol="0" anchor="ctr"/>
+          <a:bodyPr wrap="square" lIns="0" tIns="0" rIns="0" bIns="0" rtlCol="0" anchor="ctr">
+            <a:normAutofit/>
+          </a:bodyPr>
           <a:lstStyle/>
           <a:p>
             <a:pPr indent="0" marL="0">
@@ -19780,7 +20311,9 @@
           <a:ln/>
         </p:spPr>
         <p:txBody>
-          <a:bodyPr wrap="square" lIns="0" tIns="0" rIns="0" bIns="0" rtlCol="0" anchor="ctr"/>
+          <a:bodyPr wrap="square" lIns="0" tIns="0" rIns="0" bIns="0" rtlCol="0" anchor="ctr">
+            <a:normAutofit/>
+          </a:bodyPr>
           <a:lstStyle/>
           <a:p>
             <a:pPr algn="r" indent="0" marL="0">
@@ -19819,7 +20352,9 @@
           <a:ln/>
         </p:spPr>
         <p:txBody>
-          <a:bodyPr wrap="square" lIns="0" tIns="0" rIns="0" bIns="0" rtlCol="0" anchor="ctr"/>
+          <a:bodyPr wrap="square" lIns="0" tIns="0" rIns="0" bIns="0" rtlCol="0" anchor="ctr">
+            <a:normAutofit/>
+          </a:bodyPr>
           <a:lstStyle/>
           <a:p>
             <a:pPr indent="0" marL="0">
@@ -19834,7 +20369,7 @@
                 <a:ea typeface="微软雅黑" pitchFamily="34" charset="-122"/>
                 <a:cs typeface="微软雅黑" pitchFamily="34" charset="-120"/>
               </a:rPr>
-              <a:t>帮扶管理信息系统 v1.12.10</a:t>
+              <a:t>帮扶管理信息系统 v1.12.11</a:t>
             </a:r>
             <a:endParaRPr lang="en-US" sz="1050" dirty="0"/>
           </a:p>
@@ -19887,7 +20422,9 @@
           <a:ln/>
         </p:spPr>
         <p:txBody>
-          <a:bodyPr wrap="square" lIns="0" tIns="0" rIns="0" bIns="0" rtlCol="0" anchor="ctr"/>
+          <a:bodyPr wrap="square" lIns="0" tIns="0" rIns="0" bIns="0" rtlCol="0" anchor="ctr">
+            <a:normAutofit/>
+          </a:bodyPr>
           <a:lstStyle/>
           <a:p>
             <a:pPr indent="0" marL="0">
@@ -19916,12 +20453,12 @@
         </p:nvSpPr>
         <p:spPr>
           <a:xfrm>
-            <a:off x="868680" y="2331720"/>
-            <a:ext cx="1737360" cy="502920"/>
+            <a:off x="868680" y="2286000"/>
+            <a:ext cx="1965960" cy="603504"/>
           </a:xfrm>
           <a:prstGeom prst="roundRect">
             <a:avLst>
-              <a:gd name="adj" fmla="val 9091"/>
+              <a:gd name="adj" fmla="val 7576"/>
             </a:avLst>
           </a:prstGeom>
           <a:solidFill>
@@ -19938,24 +20475,26 @@
         </p:nvSpPr>
         <p:spPr>
           <a:xfrm>
-            <a:off x="868680" y="2331720"/>
-            <a:ext cx="1737360" cy="502920"/>
-          </a:xfrm>
-          <a:prstGeom prst="rect">
-            <a:avLst/>
-          </a:prstGeom>
-          <a:noFill/>
-          <a:ln/>
-        </p:spPr>
-        <p:txBody>
-          <a:bodyPr wrap="square" lIns="0" tIns="0" rIns="0" bIns="0" rtlCol="0" anchor="ctr"/>
+            <a:off x="868680" y="2286000"/>
+            <a:ext cx="1965960" cy="603504"/>
+          </a:xfrm>
+          <a:prstGeom prst="rect">
+            <a:avLst/>
+          </a:prstGeom>
+          <a:noFill/>
+          <a:ln/>
+        </p:spPr>
+        <p:txBody>
+          <a:bodyPr wrap="square" lIns="0" tIns="0" rIns="0" bIns="0" rtlCol="0" anchor="ctr">
+            <a:normAutofit/>
+          </a:bodyPr>
           <a:lstStyle/>
           <a:p>
             <a:pPr algn="ctr" indent="0" marL="0">
               <a:buNone/>
             </a:pPr>
             <a:r>
-              <a:rPr lang="en-US" sz="1150" b="1" dirty="0">
+              <a:rPr lang="en-US" sz="1100" b="1" dirty="0">
                 <a:solidFill>
                   <a:srgbClr val="1A2E24"/>
                 </a:solidFill>
@@ -19965,7 +20504,7 @@
               </a:rPr>
               <a:t>ORM 写入 · 明文</a:t>
             </a:r>
-            <a:endParaRPr lang="en-US" sz="1150" dirty="0"/>
+            <a:endParaRPr lang="en-US" sz="1100" dirty="0"/>
           </a:p>
         </p:txBody>
       </p:sp>
@@ -19977,8 +20516,8 @@
         </p:nvSpPr>
         <p:spPr>
           <a:xfrm>
-            <a:off x="2651760" y="2578608"/>
-            <a:ext cx="274320" cy="0"/>
+            <a:off x="2871216" y="2587752"/>
+            <a:ext cx="219456" cy="0"/>
           </a:xfrm>
           <a:prstGeom prst="line">
             <a:avLst/>
@@ -20001,12 +20540,12 @@
         </p:nvSpPr>
         <p:spPr>
           <a:xfrm>
-            <a:off x="868680" y="2990088"/>
-            <a:ext cx="1737360" cy="502920"/>
+            <a:off x="868680" y="2999232"/>
+            <a:ext cx="1965960" cy="603504"/>
           </a:xfrm>
           <a:prstGeom prst="roundRect">
             <a:avLst>
-              <a:gd name="adj" fmla="val 9091"/>
+              <a:gd name="adj" fmla="val 7576"/>
             </a:avLst>
           </a:prstGeom>
           <a:solidFill>
@@ -20023,24 +20562,26 @@
         </p:nvSpPr>
         <p:spPr>
           <a:xfrm>
-            <a:off x="868680" y="2990088"/>
-            <a:ext cx="1737360" cy="502920"/>
-          </a:xfrm>
-          <a:prstGeom prst="rect">
-            <a:avLst/>
-          </a:prstGeom>
-          <a:noFill/>
-          <a:ln/>
-        </p:spPr>
-        <p:txBody>
-          <a:bodyPr wrap="square" lIns="0" tIns="0" rIns="0" bIns="0" rtlCol="0" anchor="ctr"/>
+            <a:off x="868680" y="2999232"/>
+            <a:ext cx="1965960" cy="603504"/>
+          </a:xfrm>
+          <a:prstGeom prst="rect">
+            <a:avLst/>
+          </a:prstGeom>
+          <a:noFill/>
+          <a:ln/>
+        </p:spPr>
+        <p:txBody>
+          <a:bodyPr wrap="square" lIns="0" tIns="0" rIns="0" bIns="0" rtlCol="0" anchor="ctr">
+            <a:normAutofit/>
+          </a:bodyPr>
           <a:lstStyle/>
           <a:p>
             <a:pPr algn="ctr" indent="0" marL="0">
               <a:buNone/>
             </a:pPr>
             <a:r>
-              <a:rPr lang="en-US" sz="1150" b="1" dirty="0">
+              <a:rPr lang="en-US" sz="1100" b="1" dirty="0">
                 <a:solidFill>
                   <a:srgbClr val="1A2E24"/>
                 </a:solidFill>
@@ -20050,7 +20591,7 @@
               </a:rPr>
               <a:t>EncryptedText · AES-SIV 加密</a:t>
             </a:r>
-            <a:endParaRPr lang="en-US" sz="1150" dirty="0"/>
+            <a:endParaRPr lang="en-US" sz="1100" dirty="0"/>
           </a:p>
         </p:txBody>
       </p:sp>
@@ -20062,8 +20603,8 @@
         </p:nvSpPr>
         <p:spPr>
           <a:xfrm>
-            <a:off x="2651760" y="3236976"/>
-            <a:ext cx="274320" cy="0"/>
+            <a:off x="2871216" y="3300984"/>
+            <a:ext cx="219456" cy="0"/>
           </a:xfrm>
           <a:prstGeom prst="line">
             <a:avLst/>
@@ -20086,12 +20627,12 @@
         </p:nvSpPr>
         <p:spPr>
           <a:xfrm>
-            <a:off x="868680" y="3648456"/>
-            <a:ext cx="1737360" cy="502920"/>
+            <a:off x="868680" y="3712464"/>
+            <a:ext cx="1965960" cy="603504"/>
           </a:xfrm>
           <a:prstGeom prst="roundRect">
             <a:avLst>
-              <a:gd name="adj" fmla="val 9091"/>
+              <a:gd name="adj" fmla="val 7576"/>
             </a:avLst>
           </a:prstGeom>
           <a:solidFill>
@@ -20108,24 +20649,26 @@
         </p:nvSpPr>
         <p:spPr>
           <a:xfrm>
-            <a:off x="868680" y="3648456"/>
-            <a:ext cx="1737360" cy="502920"/>
-          </a:xfrm>
-          <a:prstGeom prst="rect">
-            <a:avLst/>
-          </a:prstGeom>
-          <a:noFill/>
-          <a:ln/>
-        </p:spPr>
-        <p:txBody>
-          <a:bodyPr wrap="square" lIns="0" tIns="0" rIns="0" bIns="0" rtlCol="0" anchor="ctr"/>
+            <a:off x="868680" y="3712464"/>
+            <a:ext cx="1965960" cy="603504"/>
+          </a:xfrm>
+          <a:prstGeom prst="rect">
+            <a:avLst/>
+          </a:prstGeom>
+          <a:noFill/>
+          <a:ln/>
+        </p:spPr>
+        <p:txBody>
+          <a:bodyPr wrap="square" lIns="0" tIns="0" rIns="0" bIns="0" rtlCol="0" anchor="ctr">
+            <a:normAutofit/>
+          </a:bodyPr>
           <a:lstStyle/>
           <a:p>
             <a:pPr algn="ctr" indent="0" marL="0">
               <a:buNone/>
             </a:pPr>
             <a:r>
-              <a:rPr lang="en-US" sz="1150" b="1" dirty="0">
+              <a:rPr lang="en-US" sz="1100" b="1" dirty="0">
                 <a:solidFill>
                   <a:srgbClr val="FFFFFF"/>
                 </a:solidFill>
@@ -20135,7 +20678,7 @@
               </a:rPr>
               <a:t>SQLite · enc.v1: 密文</a:t>
             </a:r>
-            <a:endParaRPr lang="en-US" sz="1150" dirty="0"/>
+            <a:endParaRPr lang="en-US" sz="1100" dirty="0"/>
           </a:p>
         </p:txBody>
       </p:sp>
@@ -20147,17 +20690,19 @@
         </p:nvSpPr>
         <p:spPr>
           <a:xfrm>
-            <a:off x="3246120" y="2331720"/>
-            <a:ext cx="3063240" cy="1920240"/>
-          </a:xfrm>
-          <a:prstGeom prst="rect">
-            <a:avLst/>
-          </a:prstGeom>
-          <a:noFill/>
-          <a:ln/>
-        </p:spPr>
-        <p:txBody>
-          <a:bodyPr wrap="square" lIns="0" tIns="0" rIns="0" bIns="0" rtlCol="0" anchor="ctr"/>
+            <a:off x="3154680" y="2331720"/>
+            <a:ext cx="2697480" cy="1920240"/>
+          </a:xfrm>
+          <a:prstGeom prst="rect">
+            <a:avLst/>
+          </a:prstGeom>
+          <a:noFill/>
+          <a:ln/>
+        </p:spPr>
+        <p:txBody>
+          <a:bodyPr wrap="square" lIns="0" tIns="0" rIns="0" bIns="0" rtlCol="0" anchor="ctr">
+            <a:normAutofit/>
+          </a:bodyPr>
           <a:lstStyle/>
           <a:p>
             <a:pPr marL="152400" indent="-152400">
@@ -20250,7 +20795,9 @@
           <a:ln/>
         </p:spPr>
         <p:txBody>
-          <a:bodyPr wrap="square" lIns="0" tIns="0" rIns="0" bIns="0" rtlCol="0" anchor="ctr"/>
+          <a:bodyPr wrap="square" lIns="0" tIns="0" rIns="0" bIns="0" rtlCol="0" anchor="ctr">
+            <a:normAutofit/>
+          </a:bodyPr>
           <a:lstStyle/>
           <a:p>
             <a:pPr indent="0" marL="0">
@@ -20289,7 +20836,9 @@
           <a:ln/>
         </p:spPr>
         <p:txBody>
-          <a:bodyPr wrap="square" lIns="0" tIns="0" rIns="0" bIns="0" rtlCol="0" anchor="t"/>
+          <a:bodyPr wrap="square" lIns="0" tIns="0" rIns="0" bIns="0" rtlCol="0" anchor="t">
+            <a:normAutofit/>
+          </a:bodyPr>
           <a:lstStyle/>
           <a:p>
             <a:pPr algn="l" marL="152400" indent="-152400">
@@ -20424,7 +20973,9 @@
           <a:ln/>
         </p:spPr>
         <p:txBody>
-          <a:bodyPr wrap="square" lIns="0" tIns="0" rIns="0" bIns="0" rtlCol="0" anchor="ctr"/>
+          <a:bodyPr wrap="square" lIns="0" tIns="0" rIns="0" bIns="0" rtlCol="0" anchor="ctr">
+            <a:normAutofit/>
+          </a:bodyPr>
           <a:lstStyle/>
           <a:p>
             <a:pPr indent="0" marL="0">
@@ -20463,7 +21014,9 @@
           <a:ln/>
         </p:spPr>
         <p:txBody>
-          <a:bodyPr wrap="square" lIns="0" tIns="0" rIns="0" bIns="0" rtlCol="0" anchor="ctr"/>
+          <a:bodyPr wrap="square" lIns="0" tIns="0" rIns="0" bIns="0" rtlCol="0" anchor="ctr">
+            <a:normAutofit/>
+          </a:bodyPr>
           <a:lstStyle/>
           <a:p>
             <a:pPr indent="0" marL="0">
@@ -20554,7 +21107,9 @@
           <a:ln/>
         </p:spPr>
         <p:txBody>
-          <a:bodyPr wrap="square" lIns="0" tIns="0" rIns="0" bIns="0" rtlCol="0" anchor="ctr"/>
+          <a:bodyPr wrap="square" lIns="0" tIns="0" rIns="0" bIns="0" rtlCol="0" anchor="ctr">
+            <a:normAutofit/>
+          </a:bodyPr>
           <a:lstStyle/>
           <a:p>
             <a:pPr indent="0" marL="0">
@@ -20593,7 +21148,9 @@
           <a:ln/>
         </p:spPr>
         <p:txBody>
-          <a:bodyPr wrap="square" lIns="0" tIns="0" rIns="0" bIns="0" rtlCol="0" anchor="ctr"/>
+          <a:bodyPr wrap="square" lIns="0" tIns="0" rIns="0" bIns="0" rtlCol="0" anchor="ctr">
+            <a:normAutofit/>
+          </a:bodyPr>
           <a:lstStyle/>
           <a:p>
             <a:pPr indent="0" marL="0">
@@ -20632,7 +21189,9 @@
           <a:ln/>
         </p:spPr>
         <p:txBody>
-          <a:bodyPr wrap="square" lIns="0" tIns="0" rIns="0" bIns="0" rtlCol="0" anchor="ctr"/>
+          <a:bodyPr wrap="square" lIns="0" tIns="0" rIns="0" bIns="0" rtlCol="0" anchor="ctr">
+            <a:normAutofit/>
+          </a:bodyPr>
           <a:lstStyle/>
           <a:p>
             <a:pPr algn="r" indent="0" marL="0">
@@ -20671,7 +21230,9 @@
           <a:ln/>
         </p:spPr>
         <p:txBody>
-          <a:bodyPr wrap="square" lIns="0" tIns="0" rIns="0" bIns="0" rtlCol="0" anchor="ctr"/>
+          <a:bodyPr wrap="square" lIns="0" tIns="0" rIns="0" bIns="0" rtlCol="0" anchor="ctr">
+            <a:normAutofit/>
+          </a:bodyPr>
           <a:lstStyle/>
           <a:p>
             <a:pPr indent="0" marL="0">
@@ -20686,7 +21247,7 @@
                 <a:ea typeface="微软雅黑" pitchFamily="34" charset="-122"/>
                 <a:cs typeface="微软雅黑" pitchFamily="34" charset="-120"/>
               </a:rPr>
-              <a:t>帮扶管理信息系统 v1.12.10</a:t>
+              <a:t>帮扶管理信息系统 v1.12.11</a:t>
             </a:r>
             <a:endParaRPr lang="en-US" sz="1050" dirty="0"/>
           </a:p>
@@ -20730,7 +21291,9 @@
           <a:ln/>
         </p:spPr>
         <p:txBody>
-          <a:bodyPr wrap="square" lIns="0" tIns="0" rIns="0" bIns="0" rtlCol="0" anchor="ctr"/>
+          <a:bodyPr wrap="square" lIns="0" tIns="0" rIns="0" bIns="0" rtlCol="0" anchor="ctr">
+            <a:normAutofit/>
+          </a:bodyPr>
           <a:lstStyle/>
           <a:p>
             <a:pPr indent="0" marL="0">
@@ -20769,7 +21332,9 @@
           <a:ln/>
         </p:spPr>
         <p:txBody>
-          <a:bodyPr wrap="square" lIns="0" tIns="0" rIns="0" bIns="0" rtlCol="0" anchor="ctr"/>
+          <a:bodyPr wrap="square" lIns="0" tIns="0" rIns="0" bIns="0" rtlCol="0" anchor="ctr">
+            <a:normAutofit/>
+          </a:bodyPr>
           <a:lstStyle/>
           <a:p>
             <a:pPr indent="0" marL="0">
@@ -20828,7 +21393,9 @@
           <a:ln/>
         </p:spPr>
         <p:txBody>
-          <a:bodyPr wrap="square" lIns="0" tIns="0" rIns="0" bIns="0" rtlCol="0" anchor="ctr"/>
+          <a:bodyPr wrap="square" lIns="0" tIns="0" rIns="0" bIns="0" rtlCol="0" anchor="ctr">
+            <a:normAutofit/>
+          </a:bodyPr>
           <a:lstStyle/>
           <a:p>
             <a:pPr indent="0" marL="0">
@@ -20867,7 +21434,9 @@
           <a:ln/>
         </p:spPr>
         <p:txBody>
-          <a:bodyPr wrap="square" lIns="0" tIns="0" rIns="0" bIns="0" rtlCol="0" anchor="ctr"/>
+          <a:bodyPr wrap="square" lIns="0" tIns="0" rIns="0" bIns="0" rtlCol="0" anchor="ctr">
+            <a:normAutofit/>
+          </a:bodyPr>
           <a:lstStyle/>
           <a:p>
             <a:pPr indent="0" marL="0">
@@ -20926,7 +21495,9 @@
           <a:ln/>
         </p:spPr>
         <p:txBody>
-          <a:bodyPr wrap="square" lIns="0" tIns="0" rIns="0" bIns="0" rtlCol="0" anchor="ctr"/>
+          <a:bodyPr wrap="square" lIns="0" tIns="0" rIns="0" bIns="0" rtlCol="0" anchor="ctr">
+            <a:normAutofit/>
+          </a:bodyPr>
           <a:lstStyle/>
           <a:p>
             <a:pPr indent="0" marL="0">
@@ -20965,7 +21536,9 @@
           <a:ln/>
         </p:spPr>
         <p:txBody>
-          <a:bodyPr wrap="square" lIns="0" tIns="0" rIns="0" bIns="0" rtlCol="0" anchor="ctr"/>
+          <a:bodyPr wrap="square" lIns="0" tIns="0" rIns="0" bIns="0" rtlCol="0" anchor="ctr">
+            <a:normAutofit/>
+          </a:bodyPr>
           <a:lstStyle/>
           <a:p>
             <a:pPr indent="0" marL="0">
@@ -21024,7 +21597,9 @@
           <a:ln/>
         </p:spPr>
         <p:txBody>
-          <a:bodyPr wrap="square" lIns="0" tIns="0" rIns="0" bIns="0" rtlCol="0" anchor="ctr"/>
+          <a:bodyPr wrap="square" lIns="0" tIns="0" rIns="0" bIns="0" rtlCol="0" anchor="ctr">
+            <a:normAutofit/>
+          </a:bodyPr>
           <a:lstStyle/>
           <a:p>
             <a:pPr indent="0" marL="0">
@@ -21063,7 +21638,9 @@
           <a:ln/>
         </p:spPr>
         <p:txBody>
-          <a:bodyPr wrap="square" lIns="0" tIns="0" rIns="0" bIns="0" rtlCol="0" anchor="ctr"/>
+          <a:bodyPr wrap="square" lIns="0" tIns="0" rIns="0" bIns="0" rtlCol="0" anchor="ctr">
+            <a:normAutofit/>
+          </a:bodyPr>
           <a:lstStyle/>
           <a:p>
             <a:pPr indent="0" marL="0">
@@ -21122,7 +21699,9 @@
           <a:ln/>
         </p:spPr>
         <p:txBody>
-          <a:bodyPr wrap="square" lIns="0" tIns="0" rIns="0" bIns="0" rtlCol="0" anchor="ctr"/>
+          <a:bodyPr wrap="square" lIns="0" tIns="0" rIns="0" bIns="0" rtlCol="0" anchor="ctr">
+            <a:normAutofit/>
+          </a:bodyPr>
           <a:lstStyle/>
           <a:p>
             <a:pPr indent="0" marL="0">
@@ -21161,7 +21740,9 @@
           <a:ln/>
         </p:spPr>
         <p:txBody>
-          <a:bodyPr wrap="square" lIns="0" tIns="0" rIns="0" bIns="0" rtlCol="0" anchor="ctr"/>
+          <a:bodyPr wrap="square" lIns="0" tIns="0" rIns="0" bIns="0" rtlCol="0" anchor="ctr">
+            <a:normAutofit/>
+          </a:bodyPr>
           <a:lstStyle/>
           <a:p>
             <a:pPr indent="0" marL="0">
@@ -21220,7 +21801,9 @@
           <a:ln/>
         </p:spPr>
         <p:txBody>
-          <a:bodyPr wrap="square" lIns="0" tIns="0" rIns="0" bIns="0" rtlCol="0" anchor="ctr"/>
+          <a:bodyPr wrap="square" lIns="0" tIns="0" rIns="0" bIns="0" rtlCol="0" anchor="ctr">
+            <a:normAutofit/>
+          </a:bodyPr>
           <a:lstStyle/>
           <a:p>
             <a:pPr indent="0" marL="0">
@@ -21259,7 +21842,9 @@
           <a:ln/>
         </p:spPr>
         <p:txBody>
-          <a:bodyPr wrap="square" lIns="0" tIns="0" rIns="0" bIns="0" rtlCol="0" anchor="ctr"/>
+          <a:bodyPr wrap="square" lIns="0" tIns="0" rIns="0" bIns="0" rtlCol="0" anchor="ctr">
+            <a:normAutofit/>
+          </a:bodyPr>
           <a:lstStyle/>
           <a:p>
             <a:pPr indent="0" marL="0">
@@ -21321,16 +21906,18 @@
         <p:spPr>
           <a:xfrm>
             <a:off x="502920" y="822960"/>
-            <a:ext cx="4206240" cy="3108960"/>
-          </a:xfrm>
-          <a:prstGeom prst="rect">
-            <a:avLst/>
-          </a:prstGeom>
-          <a:noFill/>
-          <a:ln/>
-        </p:spPr>
-        <p:txBody>
-          <a:bodyPr wrap="square" lIns="0" tIns="0" rIns="0" bIns="0" rtlCol="0" anchor="ctr"/>
+            <a:ext cx="4206240" cy="4315121"/>
+          </a:xfrm>
+          <a:prstGeom prst="rect">
+            <a:avLst/>
+          </a:prstGeom>
+          <a:noFill/>
+          <a:ln/>
+        </p:spPr>
+        <p:txBody>
+          <a:bodyPr wrap="square" lIns="0" tIns="0" rIns="0" bIns="0" rtlCol="0" anchor="ctr">
+            <a:normAutofit/>
+          </a:bodyPr>
           <a:lstStyle/>
           <a:p>
             <a:pPr indent="0" marL="0">
@@ -21360,16 +21947,18 @@
         <p:spPr>
           <a:xfrm>
             <a:off x="914400" y="3977640"/>
-            <a:ext cx="10332720" cy="868680"/>
-          </a:xfrm>
-          <a:prstGeom prst="rect">
-            <a:avLst/>
-          </a:prstGeom>
-          <a:noFill/>
-          <a:ln/>
-        </p:spPr>
-        <p:txBody>
-          <a:bodyPr wrap="square" lIns="0" tIns="0" rIns="0" bIns="0" rtlCol="0" anchor="ctr"/>
+            <a:ext cx="10332720" cy="877655"/>
+          </a:xfrm>
+          <a:prstGeom prst="rect">
+            <a:avLst/>
+          </a:prstGeom>
+          <a:noFill/>
+          <a:ln/>
+        </p:spPr>
+        <p:txBody>
+          <a:bodyPr wrap="square" lIns="0" tIns="0" rIns="0" bIns="0" rtlCol="0" anchor="ctr">
+            <a:normAutofit/>
+          </a:bodyPr>
           <a:lstStyle/>
           <a:p>
             <a:pPr indent="0" marL="0">
@@ -21408,7 +21997,9 @@
           <a:ln/>
         </p:spPr>
         <p:txBody>
-          <a:bodyPr wrap="square" lIns="0" tIns="0" rIns="0" bIns="0" rtlCol="0" anchor="ctr"/>
+          <a:bodyPr wrap="square" lIns="0" tIns="0" rIns="0" bIns="0" rtlCol="0" anchor="ctr">
+            <a:normAutofit/>
+          </a:bodyPr>
           <a:lstStyle/>
           <a:p>
             <a:pPr indent="0" marL="0">
@@ -21447,10 +22038,12 @@
           <a:ln/>
         </p:spPr>
         <p:txBody>
-          <a:bodyPr wrap="square" lIns="0" tIns="0" rIns="0" bIns="0" rtlCol="0" anchor="t"/>
-          <a:lstStyle/>
-          <a:p>
-            <a:pPr marL="152400" indent="-152400">
+          <a:bodyPr wrap="square" lIns="0" tIns="0" rIns="0" bIns="0" rtlCol="0" anchor="t">
+            <a:normAutofit/>
+          </a:bodyPr>
+          <a:lstStyle/>
+          <a:p>
+            <a:pPr algn="l" marL="152400" indent="-152400">
               <a:spcAft>
                 <a:spcPts val="1000"/>
               </a:spcAft>
@@ -21471,7 +22064,7 @@
             <a:endParaRPr lang="en-US" sz="1400" dirty="0"/>
           </a:p>
           <a:p>
-            <a:pPr marL="152400" indent="-152400">
+            <a:pPr algn="l" marL="152400" indent="-152400">
               <a:spcAft>
                 <a:spcPts val="1000"/>
               </a:spcAft>
@@ -21492,7 +22085,7 @@
             <a:endParaRPr lang="en-US" sz="1400" dirty="0"/>
           </a:p>
           <a:p>
-            <a:pPr marL="152400" indent="-152400">
+            <a:pPr algn="l" marL="152400" indent="-152400">
               <a:spcAft>
                 <a:spcPts val="1000"/>
               </a:spcAft>
@@ -21513,7 +22106,7 @@
             <a:endParaRPr lang="en-US" sz="1400" dirty="0"/>
           </a:p>
           <a:p>
-            <a:pPr marL="152400" indent="-152400">
+            <a:pPr algn="l" marL="152400" indent="-152400">
               <a:spcAft>
                 <a:spcPts val="1000"/>
               </a:spcAft>
@@ -21553,7 +22146,9 @@
           <a:ln/>
         </p:spPr>
         <p:txBody>
-          <a:bodyPr wrap="square" lIns="0" tIns="0" rIns="0" bIns="0" rtlCol="0" anchor="ctr"/>
+          <a:bodyPr wrap="square" lIns="0" tIns="0" rIns="0" bIns="0" rtlCol="0" anchor="ctr">
+            <a:normAutofit/>
+          </a:bodyPr>
           <a:lstStyle/>
           <a:p>
             <a:pPr algn="r" indent="0" marL="0">
@@ -21644,7 +22239,9 @@
           <a:ln/>
         </p:spPr>
         <p:txBody>
-          <a:bodyPr wrap="square" lIns="0" tIns="0" rIns="0" bIns="0" rtlCol="0" anchor="ctr"/>
+          <a:bodyPr wrap="square" lIns="0" tIns="0" rIns="0" bIns="0" rtlCol="0" anchor="ctr">
+            <a:normAutofit/>
+          </a:bodyPr>
           <a:lstStyle/>
           <a:p>
             <a:pPr indent="0" marL="0">
@@ -21683,7 +22280,9 @@
           <a:ln/>
         </p:spPr>
         <p:txBody>
-          <a:bodyPr wrap="square" lIns="0" tIns="0" rIns="0" bIns="0" rtlCol="0" anchor="ctr"/>
+          <a:bodyPr wrap="square" lIns="0" tIns="0" rIns="0" bIns="0" rtlCol="0" anchor="ctr">
+            <a:normAutofit/>
+          </a:bodyPr>
           <a:lstStyle/>
           <a:p>
             <a:pPr indent="0" marL="0">
@@ -21722,7 +22321,9 @@
           <a:ln/>
         </p:spPr>
         <p:txBody>
-          <a:bodyPr wrap="square" lIns="0" tIns="0" rIns="0" bIns="0" rtlCol="0" anchor="ctr"/>
+          <a:bodyPr wrap="square" lIns="0" tIns="0" rIns="0" bIns="0" rtlCol="0" anchor="ctr">
+            <a:normAutofit/>
+          </a:bodyPr>
           <a:lstStyle/>
           <a:p>
             <a:pPr algn="r" indent="0" marL="0">
@@ -21761,7 +22362,9 @@
           <a:ln/>
         </p:spPr>
         <p:txBody>
-          <a:bodyPr wrap="square" lIns="0" tIns="0" rIns="0" bIns="0" rtlCol="0" anchor="ctr"/>
+          <a:bodyPr wrap="square" lIns="0" tIns="0" rIns="0" bIns="0" rtlCol="0" anchor="ctr">
+            <a:normAutofit/>
+          </a:bodyPr>
           <a:lstStyle/>
           <a:p>
             <a:pPr indent="0" marL="0">
@@ -21776,7 +22379,7 @@
                 <a:ea typeface="微软雅黑" pitchFamily="34" charset="-122"/>
                 <a:cs typeface="微软雅黑" pitchFamily="34" charset="-120"/>
               </a:rPr>
-              <a:t>帮扶管理信息系统 v1.12.10</a:t>
+              <a:t>帮扶管理信息系统 v1.12.11</a:t>
             </a:r>
             <a:endParaRPr lang="en-US" sz="1050" dirty="0"/>
           </a:p>
@@ -21820,7 +22423,9 @@
           <a:ln/>
         </p:spPr>
         <p:txBody>
-          <a:bodyPr wrap="square" lIns="0" tIns="0" rIns="0" bIns="0" rtlCol="0" anchor="ctr"/>
+          <a:bodyPr wrap="square" lIns="0" tIns="0" rIns="0" bIns="0" rtlCol="0" anchor="ctr">
+            <a:normAutofit/>
+          </a:bodyPr>
           <a:lstStyle/>
           <a:p>
             <a:pPr indent="0" marL="0">
@@ -21879,7 +22484,9 @@
           <a:ln/>
         </p:spPr>
         <p:txBody>
-          <a:bodyPr wrap="square" lIns="0" tIns="0" rIns="0" bIns="0" rtlCol="0" anchor="ctr"/>
+          <a:bodyPr wrap="square" lIns="0" tIns="0" rIns="0" bIns="0" rtlCol="0" anchor="ctr">
+            <a:normAutofit/>
+          </a:bodyPr>
           <a:lstStyle/>
           <a:p>
             <a:pPr indent="0" marL="0">
@@ -21938,7 +22545,9 @@
           <a:ln/>
         </p:spPr>
         <p:txBody>
-          <a:bodyPr wrap="square" lIns="0" tIns="0" rIns="0" bIns="0" rtlCol="0" anchor="ctr"/>
+          <a:bodyPr wrap="square" lIns="0" tIns="0" rIns="0" bIns="0" rtlCol="0" anchor="ctr">
+            <a:normAutofit/>
+          </a:bodyPr>
           <a:lstStyle/>
           <a:p>
             <a:pPr indent="0" marL="0">
@@ -21997,7 +22606,9 @@
           <a:ln/>
         </p:spPr>
         <p:txBody>
-          <a:bodyPr wrap="square" lIns="0" tIns="0" rIns="0" bIns="0" rtlCol="0" anchor="ctr"/>
+          <a:bodyPr wrap="square" lIns="0" tIns="0" rIns="0" bIns="0" rtlCol="0" anchor="ctr">
+            <a:normAutofit/>
+          </a:bodyPr>
           <a:lstStyle/>
           <a:p>
             <a:pPr indent="0" marL="0">
@@ -22056,7 +22667,9 @@
           <a:ln/>
         </p:spPr>
         <p:txBody>
-          <a:bodyPr wrap="square" lIns="0" tIns="0" rIns="0" bIns="0" rtlCol="0" anchor="ctr"/>
+          <a:bodyPr wrap="square" lIns="0" tIns="0" rIns="0" bIns="0" rtlCol="0" anchor="ctr">
+            <a:normAutofit/>
+          </a:bodyPr>
           <a:lstStyle/>
           <a:p>
             <a:pPr indent="0" marL="0">
@@ -22095,7 +22708,9 @@
           <a:ln/>
         </p:spPr>
         <p:txBody>
-          <a:bodyPr wrap="square" lIns="0" tIns="0" rIns="0" bIns="0" rtlCol="0" anchor="t"/>
+          <a:bodyPr wrap="square" lIns="0" tIns="0" rIns="0" bIns="0" rtlCol="0" anchor="t">
+            <a:normAutofit/>
+          </a:bodyPr>
           <a:lstStyle/>
           <a:p>
             <a:pPr algn="l" marL="152400" indent="-152400">
@@ -22245,16 +22860,18 @@
         <p:spPr>
           <a:xfrm>
             <a:off x="502920" y="822960"/>
-            <a:ext cx="4206240" cy="3108960"/>
-          </a:xfrm>
-          <a:prstGeom prst="rect">
-            <a:avLst/>
-          </a:prstGeom>
-          <a:noFill/>
-          <a:ln/>
-        </p:spPr>
-        <p:txBody>
-          <a:bodyPr wrap="square" lIns="0" tIns="0" rIns="0" bIns="0" rtlCol="0" anchor="ctr"/>
+            <a:ext cx="4206240" cy="4315121"/>
+          </a:xfrm>
+          <a:prstGeom prst="rect">
+            <a:avLst/>
+          </a:prstGeom>
+          <a:noFill/>
+          <a:ln/>
+        </p:spPr>
+        <p:txBody>
+          <a:bodyPr wrap="square" lIns="0" tIns="0" rIns="0" bIns="0" rtlCol="0" anchor="ctr">
+            <a:normAutofit/>
+          </a:bodyPr>
           <a:lstStyle/>
           <a:p>
             <a:pPr indent="0" marL="0">
@@ -22284,16 +22901,18 @@
         <p:spPr>
           <a:xfrm>
             <a:off x="914400" y="3977640"/>
-            <a:ext cx="10332720" cy="868680"/>
-          </a:xfrm>
-          <a:prstGeom prst="rect">
-            <a:avLst/>
-          </a:prstGeom>
-          <a:noFill/>
-          <a:ln/>
-        </p:spPr>
-        <p:txBody>
-          <a:bodyPr wrap="square" lIns="0" tIns="0" rIns="0" bIns="0" rtlCol="0" anchor="ctr"/>
+            <a:ext cx="10332720" cy="877655"/>
+          </a:xfrm>
+          <a:prstGeom prst="rect">
+            <a:avLst/>
+          </a:prstGeom>
+          <a:noFill/>
+          <a:ln/>
+        </p:spPr>
+        <p:txBody>
+          <a:bodyPr wrap="square" lIns="0" tIns="0" rIns="0" bIns="0" rtlCol="0" anchor="ctr">
+            <a:normAutofit/>
+          </a:bodyPr>
           <a:lstStyle/>
           <a:p>
             <a:pPr indent="0" marL="0">
@@ -22332,7 +22951,9 @@
           <a:ln/>
         </p:spPr>
         <p:txBody>
-          <a:bodyPr wrap="square" lIns="0" tIns="0" rIns="0" bIns="0" rtlCol="0" anchor="ctr"/>
+          <a:bodyPr wrap="square" lIns="0" tIns="0" rIns="0" bIns="0" rtlCol="0" anchor="ctr">
+            <a:normAutofit/>
+          </a:bodyPr>
           <a:lstStyle/>
           <a:p>
             <a:pPr indent="0" marL="0">
@@ -22371,10 +22992,12 @@
           <a:ln/>
         </p:spPr>
         <p:txBody>
-          <a:bodyPr wrap="square" lIns="0" tIns="0" rIns="0" bIns="0" rtlCol="0" anchor="t"/>
-          <a:lstStyle/>
-          <a:p>
-            <a:pPr marL="152400" indent="-152400">
+          <a:bodyPr wrap="square" lIns="0" tIns="0" rIns="0" bIns="0" rtlCol="0" anchor="t">
+            <a:normAutofit/>
+          </a:bodyPr>
+          <a:lstStyle/>
+          <a:p>
+            <a:pPr algn="l" marL="152400" indent="-152400">
               <a:spcAft>
                 <a:spcPts val="1000"/>
               </a:spcAft>
@@ -22390,12 +23013,12 @@
                 <a:ea typeface="微软雅黑" pitchFamily="34" charset="-122"/>
                 <a:cs typeface="微软雅黑" pitchFamily="34" charset="-120"/>
               </a:rPr>
-              <a:t>15,833 项自动化测试</a:t>
+              <a:t>18,203 项自动化测试（后端 11,916 + 前端 6,287）</a:t>
             </a:r>
             <a:endParaRPr lang="en-US" sz="1400" dirty="0"/>
           </a:p>
           <a:p>
-            <a:pPr marL="152400" indent="-152400">
+            <a:pPr algn="l" marL="152400" indent="-152400">
               <a:spcAft>
                 <a:spcPts val="1000"/>
               </a:spcAft>
@@ -22416,7 +23039,7 @@
             <a:endParaRPr lang="en-US" sz="1400" dirty="0"/>
           </a:p>
           <a:p>
-            <a:pPr marL="152400" indent="-152400">
+            <a:pPr algn="l" marL="152400" indent="-152400">
               <a:spcAft>
                 <a:spcPts val="1000"/>
               </a:spcAft>
@@ -22432,12 +23055,12 @@
                 <a:ea typeface="微软雅黑" pitchFamily="34" charset="-122"/>
                 <a:cs typeface="微软雅黑" pitchFamily="34" charset="-120"/>
               </a:rPr>
-              <a:t>CI/CD 流水线</a:t>
+              <a:t>CI/CD 流水线（PR Checks 7 作业）</a:t>
             </a:r>
             <a:endParaRPr lang="en-US" sz="1400" dirty="0"/>
           </a:p>
           <a:p>
-            <a:pPr marL="152400" indent="-152400">
+            <a:pPr algn="l" marL="152400" indent="-152400">
               <a:spcAft>
                 <a:spcPts val="1000"/>
               </a:spcAft>
@@ -22458,7 +23081,7 @@
             <a:endParaRPr lang="en-US" sz="1400" dirty="0"/>
           </a:p>
           <a:p>
-            <a:pPr marL="152400" indent="-152400">
+            <a:pPr algn="l" marL="152400" indent="-152400">
               <a:spcAft>
                 <a:spcPts val="1000"/>
               </a:spcAft>
@@ -22478,6 +23101,27 @@
             </a:r>
             <a:endParaRPr lang="en-US" sz="1400" dirty="0"/>
           </a:p>
+          <a:p>
+            <a:pPr algn="l" marL="152400" indent="-152400">
+              <a:spcAft>
+                <a:spcPts val="1000"/>
+              </a:spcAft>
+              <a:buSzPct val="100000"/>
+              <a:buChar char="▪"/>
+            </a:pPr>
+            <a:r>
+              <a:rPr lang="en-US" sz="1400" dirty="0">
+                <a:solidFill>
+                  <a:srgbClr val="D7E2DB"/>
+                </a:solidFill>
+                <a:latin typeface="微软雅黑" pitchFamily="34" charset="0"/>
+                <a:ea typeface="微软雅黑" pitchFamily="34" charset="-122"/>
+                <a:cs typeface="微软雅黑" pitchFamily="34" charset="-120"/>
+              </a:rPr>
+              <a:t>6 项预防棘轮门禁 + 11 个真实 HTTP 探针</a:t>
+            </a:r>
+            <a:endParaRPr lang="en-US" sz="1400" dirty="0"/>
+          </a:p>
         </p:txBody>
       </p:sp>
       <p:sp>
@@ -22498,7 +23142,9 @@
           <a:ln/>
         </p:spPr>
         <p:txBody>
-          <a:bodyPr wrap="square" lIns="0" tIns="0" rIns="0" bIns="0" rtlCol="0" anchor="ctr"/>
+          <a:bodyPr wrap="square" lIns="0" tIns="0" rIns="0" bIns="0" rtlCol="0" anchor="ctr">
+            <a:normAutofit/>
+          </a:bodyPr>
           <a:lstStyle/>
           <a:p>
             <a:pPr algn="r" indent="0" marL="0">
@@ -22589,7 +23235,9 @@
           <a:ln/>
         </p:spPr>
         <p:txBody>
-          <a:bodyPr wrap="square" lIns="0" tIns="0" rIns="0" bIns="0" rtlCol="0" anchor="ctr"/>
+          <a:bodyPr wrap="square" lIns="0" tIns="0" rIns="0" bIns="0" rtlCol="0" anchor="ctr">
+            <a:normAutofit/>
+          </a:bodyPr>
           <a:lstStyle/>
           <a:p>
             <a:pPr indent="0" marL="0">
@@ -22628,7 +23276,9 @@
           <a:ln/>
         </p:spPr>
         <p:txBody>
-          <a:bodyPr wrap="square" lIns="0" tIns="0" rIns="0" bIns="0" rtlCol="0" anchor="ctr"/>
+          <a:bodyPr wrap="square" lIns="0" tIns="0" rIns="0" bIns="0" rtlCol="0" anchor="ctr">
+            <a:normAutofit/>
+          </a:bodyPr>
           <a:lstStyle/>
           <a:p>
             <a:pPr indent="0" marL="0">
@@ -22667,7 +23317,9 @@
           <a:ln/>
         </p:spPr>
         <p:txBody>
-          <a:bodyPr wrap="square" lIns="0" tIns="0" rIns="0" bIns="0" rtlCol="0" anchor="ctr"/>
+          <a:bodyPr wrap="square" lIns="0" tIns="0" rIns="0" bIns="0" rtlCol="0" anchor="ctr">
+            <a:normAutofit/>
+          </a:bodyPr>
           <a:lstStyle/>
           <a:p>
             <a:pPr algn="r" indent="0" marL="0">
@@ -22706,7 +23358,9 @@
           <a:ln/>
         </p:spPr>
         <p:txBody>
-          <a:bodyPr wrap="square" lIns="0" tIns="0" rIns="0" bIns="0" rtlCol="0" anchor="ctr"/>
+          <a:bodyPr wrap="square" lIns="0" tIns="0" rIns="0" bIns="0" rtlCol="0" anchor="ctr">
+            <a:normAutofit/>
+          </a:bodyPr>
           <a:lstStyle/>
           <a:p>
             <a:pPr indent="0" marL="0">
@@ -22721,7 +23375,7 @@
                 <a:ea typeface="微软雅黑" pitchFamily="34" charset="-122"/>
                 <a:cs typeface="微软雅黑" pitchFamily="34" charset="-120"/>
               </a:rPr>
-              <a:t>帮扶管理信息系统 v1.12.10</a:t>
+              <a:t>帮扶管理信息系统 v1.12.11</a:t>
             </a:r>
             <a:endParaRPr lang="en-US" sz="1050" dirty="0"/>
           </a:p>
@@ -22761,7 +23415,9 @@
           <a:ln/>
         </p:spPr>
         <p:txBody>
-          <a:bodyPr wrap="square" lIns="0" tIns="0" rIns="0" bIns="0" rtlCol="0" anchor="ctr"/>
+          <a:bodyPr wrap="square" lIns="0" tIns="0" rIns="0" bIns="0" rtlCol="0" anchor="ctr">
+            <a:normAutofit/>
+          </a:bodyPr>
           <a:lstStyle/>
           <a:p>
             <a:pPr indent="0" marL="0">
@@ -22776,7 +23432,7 @@
                 <a:ea typeface="微软雅黑" pitchFamily="34" charset="-122"/>
                 <a:cs typeface="微软雅黑" pitchFamily="34" charset="-120"/>
               </a:rPr>
-              <a:t>数据来源：v1.12.10 全量本地实测（2026-10-02）· 后端与前端覆盖率均 100%</a:t>
+              <a:t>数据来源：v1.12.11 仓库实测 · 后端 11,916 / 前端 6,287 用例 · 覆盖率 100%</a:t>
             </a:r>
             <a:endParaRPr lang="en-US" sz="1100" dirty="0"/>
           </a:p>
@@ -22791,11 +23447,11 @@
         <p:spPr>
           <a:xfrm>
             <a:off x="6949440" y="1783080"/>
-            <a:ext cx="4800600" cy="3840480"/>
+            <a:ext cx="4800600" cy="4480560"/>
           </a:xfrm>
           <a:prstGeom prst="roundRect">
             <a:avLst>
-              <a:gd name="adj" fmla="val 1667"/>
+              <a:gd name="adj" fmla="val 1429"/>
             </a:avLst>
           </a:prstGeom>
           <a:solidFill>
@@ -22819,17 +23475,19 @@
         </p:nvSpPr>
         <p:spPr>
           <a:xfrm>
-            <a:off x="7242048" y="2011680"/>
-            <a:ext cx="2743200" cy="365760"/>
-          </a:xfrm>
-          <a:prstGeom prst="rect">
-            <a:avLst/>
-          </a:prstGeom>
-          <a:noFill/>
-          <a:ln/>
-        </p:spPr>
-        <p:txBody>
-          <a:bodyPr wrap="square" lIns="0" tIns="0" rIns="0" bIns="0" rtlCol="0" anchor="ctr"/>
+            <a:off x="7242048" y="1965960"/>
+            <a:ext cx="4215384" cy="335756"/>
+          </a:xfrm>
+          <a:prstGeom prst="rect">
+            <a:avLst/>
+          </a:prstGeom>
+          <a:noFill/>
+          <a:ln/>
+        </p:spPr>
+        <p:txBody>
+          <a:bodyPr wrap="square" lIns="0" tIns="0" rIns="0" bIns="0" rtlCol="0" anchor="ctr">
+            <a:normAutofit/>
+          </a:bodyPr>
           <a:lstStyle/>
           <a:p>
             <a:pPr indent="0" marL="0">
@@ -22858,17 +23516,19 @@
         </p:nvSpPr>
         <p:spPr>
           <a:xfrm>
-            <a:off x="7242048" y="2450592"/>
-            <a:ext cx="4297680" cy="3017520"/>
-          </a:xfrm>
-          <a:prstGeom prst="rect">
-            <a:avLst/>
-          </a:prstGeom>
-          <a:noFill/>
-          <a:ln/>
-        </p:spPr>
-        <p:txBody>
-          <a:bodyPr wrap="square" lIns="0" tIns="0" rIns="0" bIns="0" rtlCol="0" anchor="t"/>
+            <a:off x="7242048" y="2384012"/>
+            <a:ext cx="4215384" cy="3733324"/>
+          </a:xfrm>
+          <a:prstGeom prst="rect">
+            <a:avLst/>
+          </a:prstGeom>
+          <a:noFill/>
+          <a:ln/>
+        </p:spPr>
+        <p:txBody>
+          <a:bodyPr wrap="square" lIns="0" tIns="0" rIns="0" bIns="0" rtlCol="0" anchor="t">
+            <a:normAutofit/>
+          </a:bodyPr>
           <a:lstStyle/>
           <a:p>
             <a:pPr algn="l" marL="152400" indent="-152400">
@@ -22879,7 +23539,7 @@
               <a:buChar char="▪"/>
             </a:pPr>
             <a:r>
-              <a:rPr lang="en-US" sz="1250" dirty="0">
+              <a:rPr lang="en-US" sz="1100" dirty="0">
                 <a:solidFill>
                   <a:srgbClr val="1A2E24"/>
                 </a:solidFill>
@@ -22889,7 +23549,7 @@
               </a:rPr>
               <a:t>前后端覆盖率门禁均 100%（CI 硬阈值，12 个源码分组全约束）</a:t>
             </a:r>
-            <a:endParaRPr lang="en-US" sz="1250" dirty="0"/>
+            <a:endParaRPr lang="en-US" sz="1100" dirty="0"/>
           </a:p>
           <a:p>
             <a:pPr algn="l" marL="152400" indent="-152400">
@@ -22900,7 +23560,7 @@
               <a:buChar char="▪"/>
             </a:pPr>
             <a:r>
-              <a:rPr lang="en-US" sz="1250" dirty="0">
+              <a:rPr lang="en-US" sz="1100" dirty="0">
                 <a:solidFill>
                   <a:srgbClr val="1A2E24"/>
                 </a:solidFill>
@@ -22910,7 +23570,7 @@
               </a:rPr>
               <a:t>新增接口/页面必须配套测试（协作约定强制）</a:t>
             </a:r>
-            <a:endParaRPr lang="en-US" sz="1250" dirty="0"/>
+            <a:endParaRPr lang="en-US" sz="1100" dirty="0"/>
           </a:p>
           <a:p>
             <a:pPr algn="l" marL="152400" indent="-152400">
@@ -22921,7 +23581,7 @@
               <a:buChar char="▪"/>
             </a:pPr>
             <a:r>
-              <a:rPr lang="en-US" sz="1250" dirty="0">
+              <a:rPr lang="en-US" sz="1100" dirty="0">
                 <a:solidFill>
                   <a:srgbClr val="1A2E24"/>
                 </a:solidFill>
@@ -22931,7 +23591,7 @@
               </a:rPr>
               <a:t>弱断言治理：安全守卫补真实断言（开放重定向 / javascript: 协议防线）</a:t>
             </a:r>
-            <a:endParaRPr lang="en-US" sz="1250" dirty="0"/>
+            <a:endParaRPr lang="en-US" sz="1100" dirty="0"/>
           </a:p>
           <a:p>
             <a:pPr algn="l" marL="152400" indent="-152400">
@@ -22942,7 +23602,7 @@
               <a:buChar char="▪"/>
             </a:pPr>
             <a:r>
-              <a:rPr lang="en-US" sz="1250" dirty="0">
+              <a:rPr lang="en-US" sz="1100" dirty="0">
                 <a:solidFill>
                   <a:srgbClr val="1A2E24"/>
                 </a:solidFill>
@@ -22952,7 +23612,7 @@
               </a:rPr>
               <a:t>安全回归：限流签名 / loopback 门禁 / 错误不泄露 / PII 加密 / 组织守卫 均有专项锁定</a:t>
             </a:r>
-            <a:endParaRPr lang="en-US" sz="1250" dirty="0"/>
+            <a:endParaRPr lang="en-US" sz="1100" dirty="0"/>
           </a:p>
           <a:p>
             <a:pPr algn="l" marL="152400" indent="-152400">
@@ -22963,7 +23623,7 @@
               <a:buChar char="▪"/>
             </a:pPr>
             <a:r>
-              <a:rPr lang="en-US" sz="1250" dirty="0">
+              <a:rPr lang="en-US" sz="1100" dirty="0">
                 <a:solidFill>
                   <a:srgbClr val="1A2E24"/>
                 </a:solidFill>
@@ -22971,9 +23631,9 @@
                 <a:ea typeface="微软雅黑" pitchFamily="34" charset="-122"/>
                 <a:cs typeface="微软雅黑" pitchFamily="34" charset="-120"/>
               </a:rPr>
-              <a:t>0 个 skip 滥用：仅 13 个平台专属跳过（Win/Linux 差异）</a:t>
-            </a:r>
-            <a:endParaRPr lang="en-US" sz="1250" dirty="0"/>
+              <a:t>6 项预防棘轮门禁接入 CI（os._exit / 上传限长 / 无界读 / 子进程编码 / 目录替换 / 周期任务注册），NEW=0</a:t>
+            </a:r>
+            <a:endParaRPr lang="en-US" sz="1100" dirty="0"/>
           </a:p>
           <a:p>
             <a:pPr algn="l" marL="152400" indent="-152400">
@@ -22984,7 +23644,7 @@
               <a:buChar char="▪"/>
             </a:pPr>
             <a:r>
-              <a:rPr lang="en-US" sz="1250" dirty="0">
+              <a:rPr lang="en-US" sz="1100" dirty="0">
                 <a:solidFill>
                   <a:srgbClr val="1A2E24"/>
                 </a:solidFill>
@@ -22992,9 +23652,30 @@
                 <a:ea typeface="微软雅黑" pitchFamily="34" charset="-122"/>
                 <a:cs typeface="微软雅黑" pitchFamily="34" charset="-120"/>
               </a:rPr>
-              <a:t>已知 flaky 用例公开记录，不允许静默重试掩盖</a:t>
-            </a:r>
-            <a:endParaRPr lang="en-US" sz="1250" dirty="0"/>
+              <a:t>11 个真实 HTTP 探针脚本（backend/tests/probe/）：与运行时刻 / 时区无关</a:t>
+            </a:r>
+            <a:endParaRPr lang="en-US" sz="1100" dirty="0"/>
+          </a:p>
+          <a:p>
+            <a:pPr algn="l" marL="152400" indent="-152400">
+              <a:spcAft>
+                <a:spcPts val="900"/>
+              </a:spcAft>
+              <a:buSzPct val="100000"/>
+              <a:buChar char="▪"/>
+            </a:pPr>
+            <a:r>
+              <a:rPr lang="en-US" sz="1100" dirty="0">
+                <a:solidFill>
+                  <a:srgbClr val="1A2E24"/>
+                </a:solidFill>
+                <a:latin typeface="微软雅黑" pitchFamily="34" charset="0"/>
+                <a:ea typeface="微软雅黑" pitchFamily="34" charset="-122"/>
+                <a:cs typeface="微软雅黑" pitchFamily="34" charset="-120"/>
+              </a:rPr>
+              <a:t>0 个 skip 滥用：仅 13 个平台专属跳过（Win/Linux 差异）；flaky 用例公开记录</a:t>
+            </a:r>
+            <a:endParaRPr lang="en-US" sz="1100" dirty="0"/>
           </a:p>
         </p:txBody>
       </p:sp>
@@ -23068,7 +23749,9 @@
           <a:ln/>
         </p:spPr>
         <p:txBody>
-          <a:bodyPr wrap="square" lIns="0" tIns="0" rIns="0" bIns="0" rtlCol="0" anchor="ctr"/>
+          <a:bodyPr wrap="square" lIns="0" tIns="0" rIns="0" bIns="0" rtlCol="0" anchor="ctr">
+            <a:normAutofit/>
+          </a:bodyPr>
           <a:lstStyle/>
           <a:p>
             <a:pPr indent="0" marL="0">
@@ -23107,7 +23790,9 @@
           <a:ln/>
         </p:spPr>
         <p:txBody>
-          <a:bodyPr wrap="square" lIns="0" tIns="0" rIns="0" bIns="0" rtlCol="0" anchor="ctr"/>
+          <a:bodyPr wrap="square" lIns="0" tIns="0" rIns="0" bIns="0" rtlCol="0" anchor="ctr">
+            <a:normAutofit/>
+          </a:bodyPr>
           <a:lstStyle/>
           <a:p>
             <a:pPr indent="0" marL="0">
@@ -23146,7 +23831,9 @@
           <a:ln/>
         </p:spPr>
         <p:txBody>
-          <a:bodyPr wrap="square" lIns="0" tIns="0" rIns="0" bIns="0" rtlCol="0" anchor="ctr"/>
+          <a:bodyPr wrap="square" lIns="0" tIns="0" rIns="0" bIns="0" rtlCol="0" anchor="ctr">
+            <a:normAutofit/>
+          </a:bodyPr>
           <a:lstStyle/>
           <a:p>
             <a:pPr algn="r" indent="0" marL="0">
@@ -23185,7 +23872,9 @@
           <a:ln/>
         </p:spPr>
         <p:txBody>
-          <a:bodyPr wrap="square" lIns="0" tIns="0" rIns="0" bIns="0" rtlCol="0" anchor="ctr"/>
+          <a:bodyPr wrap="square" lIns="0" tIns="0" rIns="0" bIns="0" rtlCol="0" anchor="ctr">
+            <a:normAutofit/>
+          </a:bodyPr>
           <a:lstStyle/>
           <a:p>
             <a:pPr indent="0" marL="0">
@@ -23200,7 +23889,7 @@
                 <a:ea typeface="微软雅黑" pitchFamily="34" charset="-122"/>
                 <a:cs typeface="微软雅黑" pitchFamily="34" charset="-120"/>
               </a:rPr>
-              <a:t>帮扶管理信息系统 v1.12.10</a:t>
+              <a:t>帮扶管理信息系统 v1.12.11</a:t>
             </a:r>
             <a:endParaRPr lang="en-US" sz="1050" dirty="0"/>
           </a:p>
@@ -23246,7 +23935,9 @@
           <a:ln/>
         </p:spPr>
         <p:txBody>
-          <a:bodyPr wrap="square" lIns="0" tIns="0" rIns="0" bIns="0" rtlCol="0" anchor="ctr"/>
+          <a:bodyPr wrap="square" lIns="0" tIns="0" rIns="0" bIns="0" rtlCol="0" anchor="ctr">
+            <a:normAutofit/>
+          </a:bodyPr>
           <a:lstStyle/>
           <a:p>
             <a:pPr indent="0" marL="0">
@@ -23285,7 +23976,9 @@
           <a:ln/>
         </p:spPr>
         <p:txBody>
-          <a:bodyPr wrap="square" lIns="0" tIns="0" rIns="0" bIns="0" rtlCol="0" anchor="ctr"/>
+          <a:bodyPr wrap="square" lIns="0" tIns="0" rIns="0" bIns="0" rtlCol="0" anchor="ctr">
+            <a:normAutofit/>
+          </a:bodyPr>
           <a:lstStyle/>
           <a:p>
             <a:pPr indent="0" marL="0">
@@ -23346,7 +24039,9 @@
           <a:ln/>
         </p:spPr>
         <p:txBody>
-          <a:bodyPr wrap="square" lIns="0" tIns="0" rIns="0" bIns="0" rtlCol="0" anchor="ctr"/>
+          <a:bodyPr wrap="square" lIns="0" tIns="0" rIns="0" bIns="0" rtlCol="0" anchor="ctr">
+            <a:normAutofit/>
+          </a:bodyPr>
           <a:lstStyle/>
           <a:p>
             <a:pPr indent="0" marL="0">
@@ -23385,7 +24080,9 @@
           <a:ln/>
         </p:spPr>
         <p:txBody>
-          <a:bodyPr wrap="square" lIns="0" tIns="0" rIns="0" bIns="0" rtlCol="0" anchor="ctr"/>
+          <a:bodyPr wrap="square" lIns="0" tIns="0" rIns="0" bIns="0" rtlCol="0" anchor="ctr">
+            <a:normAutofit/>
+          </a:bodyPr>
           <a:lstStyle/>
           <a:p>
             <a:pPr indent="0" marL="0">
@@ -23446,7 +24143,9 @@
           <a:ln/>
         </p:spPr>
         <p:txBody>
-          <a:bodyPr wrap="square" lIns="0" tIns="0" rIns="0" bIns="0" rtlCol="0" anchor="ctr"/>
+          <a:bodyPr wrap="square" lIns="0" tIns="0" rIns="0" bIns="0" rtlCol="0" anchor="ctr">
+            <a:normAutofit/>
+          </a:bodyPr>
           <a:lstStyle/>
           <a:p>
             <a:pPr indent="0" marL="0">
@@ -23485,7 +24184,9 @@
           <a:ln/>
         </p:spPr>
         <p:txBody>
-          <a:bodyPr wrap="square" lIns="0" tIns="0" rIns="0" bIns="0" rtlCol="0" anchor="ctr"/>
+          <a:bodyPr wrap="square" lIns="0" tIns="0" rIns="0" bIns="0" rtlCol="0" anchor="ctr">
+            <a:normAutofit/>
+          </a:bodyPr>
           <a:lstStyle/>
           <a:p>
             <a:pPr indent="0" marL="0">
@@ -23546,7 +24247,9 @@
           <a:ln/>
         </p:spPr>
         <p:txBody>
-          <a:bodyPr wrap="square" lIns="0" tIns="0" rIns="0" bIns="0" rtlCol="0" anchor="ctr"/>
+          <a:bodyPr wrap="square" lIns="0" tIns="0" rIns="0" bIns="0" rtlCol="0" anchor="ctr">
+            <a:normAutofit/>
+          </a:bodyPr>
           <a:lstStyle/>
           <a:p>
             <a:pPr indent="0" marL="0">
@@ -23585,7 +24288,9 @@
           <a:ln/>
         </p:spPr>
         <p:txBody>
-          <a:bodyPr wrap="square" lIns="0" tIns="0" rIns="0" bIns="0" rtlCol="0" anchor="ctr"/>
+          <a:bodyPr wrap="square" lIns="0" tIns="0" rIns="0" bIns="0" rtlCol="0" anchor="ctr">
+            <a:normAutofit/>
+          </a:bodyPr>
           <a:lstStyle/>
           <a:p>
             <a:pPr indent="0" marL="0">
@@ -23624,7 +24329,9 @@
           <a:ln/>
         </p:spPr>
         <p:txBody>
-          <a:bodyPr wrap="square" lIns="0" tIns="0" rIns="0" bIns="0" rtlCol="0" anchor="ctr"/>
+          <a:bodyPr wrap="square" lIns="0" tIns="0" rIns="0" bIns="0" rtlCol="0" anchor="ctr">
+            <a:normAutofit/>
+          </a:bodyPr>
           <a:lstStyle/>
           <a:p>
             <a:pPr indent="0" marL="0">
@@ -23715,7 +24422,9 @@
           <a:ln/>
         </p:spPr>
         <p:txBody>
-          <a:bodyPr wrap="square" lIns="0" tIns="0" rIns="0" bIns="0" rtlCol="0" anchor="ctr"/>
+          <a:bodyPr wrap="square" lIns="0" tIns="0" rIns="0" bIns="0" rtlCol="0" anchor="ctr">
+            <a:normAutofit/>
+          </a:bodyPr>
           <a:lstStyle/>
           <a:p>
             <a:pPr indent="0" marL="0">
@@ -23754,7 +24463,9 @@
           <a:ln/>
         </p:spPr>
         <p:txBody>
-          <a:bodyPr wrap="square" lIns="0" tIns="0" rIns="0" bIns="0" rtlCol="0" anchor="ctr"/>
+          <a:bodyPr wrap="square" lIns="0" tIns="0" rIns="0" bIns="0" rtlCol="0" anchor="ctr">
+            <a:normAutofit/>
+          </a:bodyPr>
           <a:lstStyle/>
           <a:p>
             <a:pPr indent="0" marL="0">
@@ -23793,7 +24504,9 @@
           <a:ln/>
         </p:spPr>
         <p:txBody>
-          <a:bodyPr wrap="square" lIns="0" tIns="0" rIns="0" bIns="0" rtlCol="0" anchor="ctr"/>
+          <a:bodyPr wrap="square" lIns="0" tIns="0" rIns="0" bIns="0" rtlCol="0" anchor="ctr">
+            <a:normAutofit/>
+          </a:bodyPr>
           <a:lstStyle/>
           <a:p>
             <a:pPr algn="r" indent="0" marL="0">
@@ -23832,7 +24545,9 @@
           <a:ln/>
         </p:spPr>
         <p:txBody>
-          <a:bodyPr wrap="square" lIns="0" tIns="0" rIns="0" bIns="0" rtlCol="0" anchor="ctr"/>
+          <a:bodyPr wrap="square" lIns="0" tIns="0" rIns="0" bIns="0" rtlCol="0" anchor="ctr">
+            <a:normAutofit/>
+          </a:bodyPr>
           <a:lstStyle/>
           <a:p>
             <a:pPr indent="0" marL="0">
@@ -23847,7 +24562,7 @@
                 <a:ea typeface="微软雅黑" pitchFamily="34" charset="-122"/>
                 <a:cs typeface="微软雅黑" pitchFamily="34" charset="-120"/>
               </a:rPr>
-              <a:t>帮扶管理信息系统 v1.12.10</a:t>
+              <a:t>帮扶管理信息系统 v1.12.11</a:t>
             </a:r>
             <a:endParaRPr lang="en-US" sz="1050" dirty="0"/>
           </a:p>
@@ -23900,7 +24615,9 @@
           <a:ln/>
         </p:spPr>
         <p:txBody>
-          <a:bodyPr wrap="square" lIns="0" tIns="0" rIns="0" bIns="0" rtlCol="0" anchor="ctr"/>
+          <a:bodyPr wrap="square" lIns="0" tIns="0" rIns="0" bIns="0" rtlCol="0" anchor="ctr">
+            <a:normAutofit/>
+          </a:bodyPr>
           <a:lstStyle/>
           <a:p>
             <a:pPr indent="0" marL="0">
@@ -23939,7 +24656,9 @@
           <a:ln/>
         </p:spPr>
         <p:txBody>
-          <a:bodyPr wrap="square" lIns="0" tIns="0" rIns="0" bIns="0" rtlCol="0" anchor="t"/>
+          <a:bodyPr wrap="square" lIns="0" tIns="0" rIns="0" bIns="0" rtlCol="0" anchor="t">
+            <a:normAutofit/>
+          </a:bodyPr>
           <a:lstStyle/>
           <a:p>
             <a:pPr algn="l" marL="152400" indent="-152400">
@@ -24095,7 +24814,9 @@
           <a:ln/>
         </p:spPr>
         <p:txBody>
-          <a:bodyPr wrap="square" lIns="0" tIns="0" rIns="0" bIns="0" rtlCol="0" anchor="ctr"/>
+          <a:bodyPr wrap="square" lIns="0" tIns="0" rIns="0" bIns="0" rtlCol="0" anchor="ctr">
+            <a:normAutofit/>
+          </a:bodyPr>
           <a:lstStyle/>
           <a:p>
             <a:pPr indent="0" marL="0">
@@ -24134,7 +24855,9 @@
           <a:ln/>
         </p:spPr>
         <p:txBody>
-          <a:bodyPr wrap="square" lIns="0" tIns="0" rIns="0" bIns="0" rtlCol="0" anchor="t"/>
+          <a:bodyPr wrap="square" lIns="0" tIns="0" rIns="0" bIns="0" rtlCol="0" anchor="t">
+            <a:normAutofit/>
+          </a:bodyPr>
           <a:lstStyle/>
           <a:p>
             <a:pPr algn="l" marL="152400" indent="-152400">
@@ -24313,7 +25036,9 @@
           <a:ln/>
         </p:spPr>
         <p:txBody>
-          <a:bodyPr wrap="square" lIns="0" tIns="0" rIns="0" bIns="0" rtlCol="0" anchor="ctr"/>
+          <a:bodyPr wrap="square" lIns="0" tIns="0" rIns="0" bIns="0" rtlCol="0" anchor="ctr">
+            <a:normAutofit/>
+          </a:bodyPr>
           <a:lstStyle/>
           <a:p>
             <a:pPr indent="0" marL="0">
@@ -24352,7 +25077,9 @@
           <a:ln/>
         </p:spPr>
         <p:txBody>
-          <a:bodyPr wrap="square" lIns="0" tIns="0" rIns="0" bIns="0" rtlCol="0" anchor="ctr"/>
+          <a:bodyPr wrap="square" lIns="0" tIns="0" rIns="0" bIns="0" rtlCol="0" anchor="ctr">
+            <a:normAutofit/>
+          </a:bodyPr>
           <a:lstStyle/>
           <a:p>
             <a:pPr indent="0" marL="0">
@@ -24391,7 +25118,9 @@
           <a:ln/>
         </p:spPr>
         <p:txBody>
-          <a:bodyPr wrap="square" lIns="0" tIns="0" rIns="0" bIns="0" rtlCol="0" anchor="ctr"/>
+          <a:bodyPr wrap="square" lIns="0" tIns="0" rIns="0" bIns="0" rtlCol="0" anchor="ctr">
+            <a:normAutofit/>
+          </a:bodyPr>
           <a:lstStyle/>
           <a:p>
             <a:pPr algn="r" indent="0" marL="0">
@@ -24430,7 +25159,9 @@
           <a:ln/>
         </p:spPr>
         <p:txBody>
-          <a:bodyPr wrap="square" lIns="0" tIns="0" rIns="0" bIns="0" rtlCol="0" anchor="ctr"/>
+          <a:bodyPr wrap="square" lIns="0" tIns="0" rIns="0" bIns="0" rtlCol="0" anchor="ctr">
+            <a:normAutofit/>
+          </a:bodyPr>
           <a:lstStyle/>
           <a:p>
             <a:pPr indent="0" marL="0">
@@ -24445,7 +25176,7 @@
                 <a:ea typeface="微软雅黑" pitchFamily="34" charset="-122"/>
                 <a:cs typeface="微软雅黑" pitchFamily="34" charset="-120"/>
               </a:rPr>
-              <a:t>帮扶管理信息系统 v1.12.10</a:t>
+              <a:t>帮扶管理信息系统 v1.12.11</a:t>
             </a:r>
             <a:endParaRPr lang="en-US" sz="1050" dirty="0"/>
           </a:p>
@@ -24498,7 +25229,9 @@
           <a:ln/>
         </p:spPr>
         <p:txBody>
-          <a:bodyPr wrap="square" lIns="0" tIns="0" rIns="0" bIns="0" rtlCol="0" anchor="ctr"/>
+          <a:bodyPr wrap="square" lIns="0" tIns="0" rIns="0" bIns="0" rtlCol="0" anchor="ctr">
+            <a:normAutofit/>
+          </a:bodyPr>
           <a:lstStyle/>
           <a:p>
             <a:pPr indent="0" marL="0">
@@ -24537,7 +25270,9 @@
           <a:ln/>
         </p:spPr>
         <p:txBody>
-          <a:bodyPr wrap="square" lIns="0" tIns="0" rIns="0" bIns="0" rtlCol="0" anchor="t"/>
+          <a:bodyPr wrap="square" lIns="0" tIns="0" rIns="0" bIns="0" rtlCol="0" anchor="t">
+            <a:normAutofit/>
+          </a:bodyPr>
           <a:lstStyle/>
           <a:p>
             <a:pPr algn="l" marL="152400" indent="-152400">
@@ -24693,7 +25428,9 @@
           <a:ln/>
         </p:spPr>
         <p:txBody>
-          <a:bodyPr wrap="square" lIns="0" tIns="0" rIns="0" bIns="0" rtlCol="0" anchor="ctr"/>
+          <a:bodyPr wrap="square" lIns="0" tIns="0" rIns="0" bIns="0" rtlCol="0" anchor="ctr">
+            <a:normAutofit/>
+          </a:bodyPr>
           <a:lstStyle/>
           <a:p>
             <a:pPr indent="0" marL="0">
@@ -24732,7 +25469,9 @@
           <a:ln/>
         </p:spPr>
         <p:txBody>
-          <a:bodyPr wrap="square" lIns="0" tIns="0" rIns="0" bIns="0" rtlCol="0" anchor="t"/>
+          <a:bodyPr wrap="square" lIns="0" tIns="0" rIns="0" bIns="0" rtlCol="0" anchor="t">
+            <a:normAutofit/>
+          </a:bodyPr>
           <a:lstStyle/>
           <a:p>
             <a:pPr algn="l" marL="152400" indent="-152400">
@@ -24903,16 +25642,18 @@
         <p:spPr>
           <a:xfrm>
             <a:off x="502920" y="822960"/>
-            <a:ext cx="4206240" cy="3108960"/>
-          </a:xfrm>
-          <a:prstGeom prst="rect">
-            <a:avLst/>
-          </a:prstGeom>
-          <a:noFill/>
-          <a:ln/>
-        </p:spPr>
-        <p:txBody>
-          <a:bodyPr wrap="square" lIns="0" tIns="0" rIns="0" bIns="0" rtlCol="0" anchor="ctr"/>
+            <a:ext cx="4206240" cy="4315121"/>
+          </a:xfrm>
+          <a:prstGeom prst="rect">
+            <a:avLst/>
+          </a:prstGeom>
+          <a:noFill/>
+          <a:ln/>
+        </p:spPr>
+        <p:txBody>
+          <a:bodyPr wrap="square" lIns="0" tIns="0" rIns="0" bIns="0" rtlCol="0" anchor="ctr">
+            <a:normAutofit/>
+          </a:bodyPr>
           <a:lstStyle/>
           <a:p>
             <a:pPr indent="0" marL="0">
@@ -24942,16 +25683,18 @@
         <p:spPr>
           <a:xfrm>
             <a:off x="914400" y="3977640"/>
-            <a:ext cx="10332720" cy="868680"/>
-          </a:xfrm>
-          <a:prstGeom prst="rect">
-            <a:avLst/>
-          </a:prstGeom>
-          <a:noFill/>
-          <a:ln/>
-        </p:spPr>
-        <p:txBody>
-          <a:bodyPr wrap="square" lIns="0" tIns="0" rIns="0" bIns="0" rtlCol="0" anchor="ctr"/>
+            <a:ext cx="10332720" cy="877655"/>
+          </a:xfrm>
+          <a:prstGeom prst="rect">
+            <a:avLst/>
+          </a:prstGeom>
+          <a:noFill/>
+          <a:ln/>
+        </p:spPr>
+        <p:txBody>
+          <a:bodyPr wrap="square" lIns="0" tIns="0" rIns="0" bIns="0" rtlCol="0" anchor="ctr">
+            <a:normAutofit/>
+          </a:bodyPr>
           <a:lstStyle/>
           <a:p>
             <a:pPr indent="0" marL="0">
@@ -24990,7 +25733,9 @@
           <a:ln/>
         </p:spPr>
         <p:txBody>
-          <a:bodyPr wrap="square" lIns="0" tIns="0" rIns="0" bIns="0" rtlCol="0" anchor="ctr"/>
+          <a:bodyPr wrap="square" lIns="0" tIns="0" rIns="0" bIns="0" rtlCol="0" anchor="ctr">
+            <a:normAutofit/>
+          </a:bodyPr>
           <a:lstStyle/>
           <a:p>
             <a:pPr indent="0" marL="0">
@@ -25029,10 +25774,12 @@
           <a:ln/>
         </p:spPr>
         <p:txBody>
-          <a:bodyPr wrap="square" lIns="0" tIns="0" rIns="0" bIns="0" rtlCol="0" anchor="t"/>
-          <a:lstStyle/>
-          <a:p>
-            <a:pPr marL="152400" indent="-152400">
+          <a:bodyPr wrap="square" lIns="0" tIns="0" rIns="0" bIns="0" rtlCol="0" anchor="t">
+            <a:normAutofit/>
+          </a:bodyPr>
+          <a:lstStyle/>
+          <a:p>
+            <a:pPr algn="l" marL="152400" indent="-152400">
               <a:spcAft>
                 <a:spcPts val="1000"/>
               </a:spcAft>
@@ -25053,7 +25800,7 @@
             <a:endParaRPr lang="en-US" sz="1400" dirty="0"/>
           </a:p>
           <a:p>
-            <a:pPr marL="152400" indent="-152400">
+            <a:pPr algn="l" marL="152400" indent="-152400">
               <a:spcAft>
                 <a:spcPts val="1000"/>
               </a:spcAft>
@@ -25074,7 +25821,7 @@
             <a:endParaRPr lang="en-US" sz="1400" dirty="0"/>
           </a:p>
           <a:p>
-            <a:pPr marL="152400" indent="-152400">
+            <a:pPr algn="l" marL="152400" indent="-152400">
               <a:spcAft>
                 <a:spcPts val="1000"/>
               </a:spcAft>
@@ -25095,7 +25842,7 @@
             <a:endParaRPr lang="en-US" sz="1400" dirty="0"/>
           </a:p>
           <a:p>
-            <a:pPr marL="152400" indent="-152400">
+            <a:pPr algn="l" marL="152400" indent="-152400">
               <a:spcAft>
                 <a:spcPts val="1000"/>
               </a:spcAft>
@@ -25135,7 +25882,9 @@
           <a:ln/>
         </p:spPr>
         <p:txBody>
-          <a:bodyPr wrap="square" lIns="0" tIns="0" rIns="0" bIns="0" rtlCol="0" anchor="ctr"/>
+          <a:bodyPr wrap="square" lIns="0" tIns="0" rIns="0" bIns="0" rtlCol="0" anchor="ctr">
+            <a:normAutofit/>
+          </a:bodyPr>
           <a:lstStyle/>
           <a:p>
             <a:pPr algn="r" indent="0" marL="0">
@@ -25226,7 +25975,9 @@
           <a:ln/>
         </p:spPr>
         <p:txBody>
-          <a:bodyPr wrap="square" lIns="0" tIns="0" rIns="0" bIns="0" rtlCol="0" anchor="ctr"/>
+          <a:bodyPr wrap="square" lIns="0" tIns="0" rIns="0" bIns="0" rtlCol="0" anchor="ctr">
+            <a:normAutofit/>
+          </a:bodyPr>
           <a:lstStyle/>
           <a:p>
             <a:pPr indent="0" marL="0">
@@ -25265,7 +26016,9 @@
           <a:ln/>
         </p:spPr>
         <p:txBody>
-          <a:bodyPr wrap="square" lIns="0" tIns="0" rIns="0" bIns="0" rtlCol="0" anchor="ctr"/>
+          <a:bodyPr wrap="square" lIns="0" tIns="0" rIns="0" bIns="0" rtlCol="0" anchor="ctr">
+            <a:normAutofit/>
+          </a:bodyPr>
           <a:lstStyle/>
           <a:p>
             <a:pPr indent="0" marL="0">
@@ -25304,7 +26057,9 @@
           <a:ln/>
         </p:spPr>
         <p:txBody>
-          <a:bodyPr wrap="square" lIns="0" tIns="0" rIns="0" bIns="0" rtlCol="0" anchor="ctr"/>
+          <a:bodyPr wrap="square" lIns="0" tIns="0" rIns="0" bIns="0" rtlCol="0" anchor="ctr">
+            <a:normAutofit/>
+          </a:bodyPr>
           <a:lstStyle/>
           <a:p>
             <a:pPr algn="r" indent="0" marL="0">
@@ -25343,7 +26098,9 @@
           <a:ln/>
         </p:spPr>
         <p:txBody>
-          <a:bodyPr wrap="square" lIns="0" tIns="0" rIns="0" bIns="0" rtlCol="0" anchor="ctr"/>
+          <a:bodyPr wrap="square" lIns="0" tIns="0" rIns="0" bIns="0" rtlCol="0" anchor="ctr">
+            <a:normAutofit/>
+          </a:bodyPr>
           <a:lstStyle/>
           <a:p>
             <a:pPr indent="0" marL="0">
@@ -25358,7 +26115,7 @@
                 <a:ea typeface="微软雅黑" pitchFamily="34" charset="-122"/>
                 <a:cs typeface="微软雅黑" pitchFamily="34" charset="-120"/>
               </a:rPr>
-              <a:t>帮扶管理信息系统 v1.12.10</a:t>
+              <a:t>帮扶管理信息系统 v1.12.11</a:t>
             </a:r>
             <a:endParaRPr lang="en-US" sz="1050" dirty="0"/>
           </a:p>
@@ -25411,7 +26168,9 @@
           <a:ln/>
         </p:spPr>
         <p:txBody>
-          <a:bodyPr wrap="square" lIns="0" tIns="0" rIns="0" bIns="0" rtlCol="0" anchor="ctr"/>
+          <a:bodyPr wrap="square" lIns="0" tIns="0" rIns="0" bIns="0" rtlCol="0" anchor="ctr">
+            <a:normAutofit/>
+          </a:bodyPr>
           <a:lstStyle/>
           <a:p>
             <a:pPr indent="0" marL="0">
@@ -25472,7 +26231,9 @@
           <a:ln/>
         </p:spPr>
         <p:txBody>
-          <a:bodyPr wrap="square" lIns="0" tIns="0" rIns="0" bIns="0" rtlCol="0" anchor="ctr"/>
+          <a:bodyPr wrap="square" lIns="0" tIns="0" rIns="0" bIns="0" rtlCol="0" anchor="ctr">
+            <a:normAutofit/>
+          </a:bodyPr>
           <a:lstStyle/>
           <a:p>
             <a:pPr algn="ctr" indent="0" marL="0">
@@ -25511,7 +26272,9 @@
           <a:ln/>
         </p:spPr>
         <p:txBody>
-          <a:bodyPr wrap="square" lIns="0" tIns="0" rIns="0" bIns="0" rtlCol="0" anchor="t"/>
+          <a:bodyPr wrap="square" lIns="0" tIns="0" rIns="0" bIns="0" rtlCol="0" anchor="t">
+            <a:normAutofit/>
+          </a:bodyPr>
           <a:lstStyle/>
           <a:p>
             <a:pPr algn="l" marL="152400" indent="-152400">
@@ -25617,7 +26380,9 @@
           <a:ln/>
         </p:spPr>
         <p:txBody>
-          <a:bodyPr wrap="square" lIns="0" tIns="0" rIns="0" bIns="0" rtlCol="0" anchor="ctr"/>
+          <a:bodyPr wrap="square" lIns="0" tIns="0" rIns="0" bIns="0" rtlCol="0" anchor="ctr">
+            <a:normAutofit/>
+          </a:bodyPr>
           <a:lstStyle/>
           <a:p>
             <a:pPr indent="0" marL="0">
@@ -25674,7 +26439,9 @@
           <a:ln/>
         </p:spPr>
         <p:txBody>
-          <a:bodyPr wrap="square" lIns="0" tIns="0" rIns="0" bIns="0" rtlCol="0" anchor="ctr"/>
+          <a:bodyPr wrap="square" lIns="0" tIns="0" rIns="0" bIns="0" rtlCol="0" anchor="ctr">
+            <a:normAutofit/>
+          </a:bodyPr>
           <a:lstStyle/>
           <a:p>
             <a:pPr indent="0" marL="0">
@@ -25735,7 +26502,9 @@
           <a:ln/>
         </p:spPr>
         <p:txBody>
-          <a:bodyPr wrap="square" lIns="0" tIns="0" rIns="0" bIns="0" rtlCol="0" anchor="ctr"/>
+          <a:bodyPr wrap="square" lIns="0" tIns="0" rIns="0" bIns="0" rtlCol="0" anchor="ctr">
+            <a:normAutofit/>
+          </a:bodyPr>
           <a:lstStyle/>
           <a:p>
             <a:pPr algn="ctr" indent="0" marL="0">
@@ -25774,7 +26543,9 @@
           <a:ln/>
         </p:spPr>
         <p:txBody>
-          <a:bodyPr wrap="square" lIns="0" tIns="0" rIns="0" bIns="0" rtlCol="0" anchor="t"/>
+          <a:bodyPr wrap="square" lIns="0" tIns="0" rIns="0" bIns="0" rtlCol="0" anchor="t">
+            <a:normAutofit/>
+          </a:bodyPr>
           <a:lstStyle/>
           <a:p>
             <a:pPr algn="l" marL="152400" indent="-152400">
@@ -25880,7 +26651,9 @@
           <a:ln/>
         </p:spPr>
         <p:txBody>
-          <a:bodyPr wrap="square" lIns="0" tIns="0" rIns="0" bIns="0" rtlCol="0" anchor="ctr"/>
+          <a:bodyPr wrap="square" lIns="0" tIns="0" rIns="0" bIns="0" rtlCol="0" anchor="ctr">
+            <a:normAutofit/>
+          </a:bodyPr>
           <a:lstStyle/>
           <a:p>
             <a:pPr indent="0" marL="0">
@@ -25937,7 +26710,9 @@
           <a:ln/>
         </p:spPr>
         <p:txBody>
-          <a:bodyPr wrap="square" lIns="0" tIns="0" rIns="0" bIns="0" rtlCol="0" anchor="ctr"/>
+          <a:bodyPr wrap="square" lIns="0" tIns="0" rIns="0" bIns="0" rtlCol="0" anchor="ctr">
+            <a:normAutofit/>
+          </a:bodyPr>
           <a:lstStyle/>
           <a:p>
             <a:pPr indent="0" marL="0">
@@ -25998,7 +26773,9 @@
           <a:ln/>
         </p:spPr>
         <p:txBody>
-          <a:bodyPr wrap="square" lIns="0" tIns="0" rIns="0" bIns="0" rtlCol="0" anchor="ctr"/>
+          <a:bodyPr wrap="square" lIns="0" tIns="0" rIns="0" bIns="0" rtlCol="0" anchor="ctr">
+            <a:normAutofit/>
+          </a:bodyPr>
           <a:lstStyle/>
           <a:p>
             <a:pPr algn="ctr" indent="0" marL="0">
@@ -26037,7 +26814,9 @@
           <a:ln/>
         </p:spPr>
         <p:txBody>
-          <a:bodyPr wrap="square" lIns="0" tIns="0" rIns="0" bIns="0" rtlCol="0" anchor="t"/>
+          <a:bodyPr wrap="square" lIns="0" tIns="0" rIns="0" bIns="0" rtlCol="0" anchor="t">
+            <a:normAutofit/>
+          </a:bodyPr>
           <a:lstStyle/>
           <a:p>
             <a:pPr algn="l" marL="152400" indent="-152400">
@@ -26143,7 +26922,9 @@
           <a:ln/>
         </p:spPr>
         <p:txBody>
-          <a:bodyPr wrap="square" lIns="0" tIns="0" rIns="0" bIns="0" rtlCol="0" anchor="ctr"/>
+          <a:bodyPr wrap="square" lIns="0" tIns="0" rIns="0" bIns="0" rtlCol="0" anchor="ctr">
+            <a:normAutofit/>
+          </a:bodyPr>
           <a:lstStyle/>
           <a:p>
             <a:pPr indent="0" marL="0">
@@ -26171,7 +26952,9 @@
           <a:ln/>
         </p:spPr>
         <p:txBody>
-          <a:bodyPr wrap="square" lIns="0" tIns="0" rIns="0" bIns="0" rtlCol="0" anchor="ctr"/>
+          <a:bodyPr wrap="square" lIns="0" tIns="0" rIns="0" bIns="0" rtlCol="0" anchor="ctr">
+            <a:normAutofit/>
+          </a:bodyPr>
           <a:lstStyle/>
           <a:p>
             <a:pPr indent="0" marL="0">
@@ -26262,7 +27045,9 @@
           <a:ln/>
         </p:spPr>
         <p:txBody>
-          <a:bodyPr wrap="square" lIns="0" tIns="0" rIns="0" bIns="0" rtlCol="0" anchor="ctr"/>
+          <a:bodyPr wrap="square" lIns="0" tIns="0" rIns="0" bIns="0" rtlCol="0" anchor="ctr">
+            <a:normAutofit/>
+          </a:bodyPr>
           <a:lstStyle/>
           <a:p>
             <a:pPr indent="0" marL="0">
@@ -26301,7 +27086,9 @@
           <a:ln/>
         </p:spPr>
         <p:txBody>
-          <a:bodyPr wrap="square" lIns="0" tIns="0" rIns="0" bIns="0" rtlCol="0" anchor="ctr"/>
+          <a:bodyPr wrap="square" lIns="0" tIns="0" rIns="0" bIns="0" rtlCol="0" anchor="ctr">
+            <a:normAutofit/>
+          </a:bodyPr>
           <a:lstStyle/>
           <a:p>
             <a:pPr indent="0" marL="0">
@@ -26340,7 +27127,9 @@
           <a:ln/>
         </p:spPr>
         <p:txBody>
-          <a:bodyPr wrap="square" lIns="0" tIns="0" rIns="0" bIns="0" rtlCol="0" anchor="ctr"/>
+          <a:bodyPr wrap="square" lIns="0" tIns="0" rIns="0" bIns="0" rtlCol="0" anchor="ctr">
+            <a:normAutofit/>
+          </a:bodyPr>
           <a:lstStyle/>
           <a:p>
             <a:pPr algn="r" indent="0" marL="0">
@@ -26379,7 +27168,9 @@
           <a:ln/>
         </p:spPr>
         <p:txBody>
-          <a:bodyPr wrap="square" lIns="0" tIns="0" rIns="0" bIns="0" rtlCol="0" anchor="ctr"/>
+          <a:bodyPr wrap="square" lIns="0" tIns="0" rIns="0" bIns="0" rtlCol="0" anchor="ctr">
+            <a:normAutofit/>
+          </a:bodyPr>
           <a:lstStyle/>
           <a:p>
             <a:pPr indent="0" marL="0">
@@ -26394,7 +27185,7 @@
                 <a:ea typeface="微软雅黑" pitchFamily="34" charset="-122"/>
                 <a:cs typeface="微软雅黑" pitchFamily="34" charset="-120"/>
               </a:rPr>
-              <a:t>帮扶管理信息系统 v1.12.10</a:t>
+              <a:t>帮扶管理信息系统 v1.12.11</a:t>
             </a:r>
             <a:endParaRPr lang="en-US" sz="1050" dirty="0"/>
           </a:p>
@@ -26437,17 +27228,19 @@
         </p:nvSpPr>
         <p:spPr>
           <a:xfrm>
-            <a:off x="749808" y="1874520"/>
-            <a:ext cx="3657600" cy="365760"/>
-          </a:xfrm>
-          <a:prstGeom prst="rect">
-            <a:avLst/>
-          </a:prstGeom>
-          <a:noFill/>
-          <a:ln/>
-        </p:spPr>
-        <p:txBody>
-          <a:bodyPr wrap="square" lIns="0" tIns="0" rIns="0" bIns="0" rtlCol="0" anchor="ctr"/>
+            <a:off x="749808" y="1828800"/>
+            <a:ext cx="4901184" cy="355092"/>
+          </a:xfrm>
+          <a:prstGeom prst="rect">
+            <a:avLst/>
+          </a:prstGeom>
+          <a:noFill/>
+          <a:ln/>
+        </p:spPr>
+        <p:txBody>
+          <a:bodyPr wrap="square" lIns="0" tIns="0" rIns="0" bIns="0" rtlCol="0" anchor="ctr">
+            <a:normAutofit/>
+          </a:bodyPr>
           <a:lstStyle/>
           <a:p>
             <a:pPr indent="0" marL="0">
@@ -26476,17 +27269,19 @@
         </p:nvSpPr>
         <p:spPr>
           <a:xfrm>
-            <a:off x="749808" y="2331720"/>
-            <a:ext cx="4937760" cy="3566160"/>
-          </a:xfrm>
-          <a:prstGeom prst="rect">
-            <a:avLst/>
-          </a:prstGeom>
-          <a:noFill/>
-          <a:ln/>
-        </p:spPr>
-        <p:txBody>
-          <a:bodyPr wrap="square" lIns="0" tIns="0" rIns="0" bIns="0" rtlCol="0" anchor="t"/>
+            <a:off x="749808" y="2266188"/>
+            <a:ext cx="4901184" cy="3713988"/>
+          </a:xfrm>
+          <a:prstGeom prst="rect">
+            <a:avLst/>
+          </a:prstGeom>
+          <a:noFill/>
+          <a:ln/>
+        </p:spPr>
+        <p:txBody>
+          <a:bodyPr wrap="square" lIns="0" tIns="0" rIns="0" bIns="0" rtlCol="0" anchor="t">
+            <a:normAutofit/>
+          </a:bodyPr>
           <a:lstStyle/>
           <a:p>
             <a:pPr algn="l" marL="152400" indent="-152400">
@@ -26505,7 +27300,7 @@
                 <a:ea typeface="微软雅黑" pitchFamily="34" charset="-122"/>
                 <a:cs typeface="微软雅黑" pitchFamily="34" charset="-120"/>
               </a:rPr>
-              <a:t>备份包必含数据库本体，缺失即抛错（fail-loud）</a:t>
+              <a:t>备份包必含数据库本体，缺失即抛错（fail-loud）；列表标注 is_encrypted / database_included</a:t>
             </a:r>
             <a:endParaRPr lang="en-US" sz="1300" dirty="0"/>
           </a:p>
@@ -26526,7 +27321,7 @@
                 <a:ea typeface="微软雅黑" pitchFamily="34" charset="-122"/>
                 <a:cs typeface="微软雅黑" pitchFamily="34" charset="-120"/>
               </a:rPr>
-              <a:t>列表标注 is_encrypted / database_included</a:t>
+              <a:t>上传恢复：8MB 分块流式落盘防 OOM、10GB 防御上限；上传前内存预校验（加密标记 / 损坏 ZIP / 缺库文件）→ 拒绝零残留</a:t>
             </a:r>
             <a:endParaRPr lang="en-US" sz="1300" dirty="0"/>
           </a:p>
@@ -26547,7 +27342,7 @@
                 <a:ea typeface="微软雅黑" pitchFamily="34" charset="-122"/>
                 <a:cs typeface="微软雅黑" pitchFamily="34" charset="-120"/>
               </a:rPr>
-              <a:t>上传恢复：8MB 分块流式落盘防 OOM，10GB 防御上限</a:t>
+              <a:t>恢复流程 WAL 安全：先释放连接池再覆盖数据库文件</a:t>
             </a:r>
             <a:endParaRPr lang="en-US" sz="1300" dirty="0"/>
           </a:p>
@@ -26589,7 +27384,7 @@
                 <a:ea typeface="微软雅黑" pitchFamily="34" charset="-122"/>
                 <a:cs typeface="微软雅黑" pitchFamily="34" charset="-120"/>
               </a:rPr>
-              <a:t>路径单一来源：以会话引擎/DATABASE_URL 为准（历史错源事故根治）</a:t>
+              <a:t>路径单一来源：以会话引擎 / DATABASE_URL 为准（历史错源事故根治）</a:t>
             </a:r>
             <a:endParaRPr lang="en-US" sz="1300" dirty="0"/>
           </a:p>
@@ -26632,17 +27427,19 @@
         </p:nvSpPr>
         <p:spPr>
           <a:xfrm>
-            <a:off x="6556248" y="1874520"/>
-            <a:ext cx="4114800" cy="365760"/>
-          </a:xfrm>
-          <a:prstGeom prst="rect">
-            <a:avLst/>
-          </a:prstGeom>
-          <a:noFill/>
-          <a:ln/>
-        </p:spPr>
-        <p:txBody>
-          <a:bodyPr wrap="square" lIns="0" tIns="0" rIns="0" bIns="0" rtlCol="0" anchor="ctr"/>
+            <a:off x="6556248" y="1828800"/>
+            <a:ext cx="4901184" cy="355092"/>
+          </a:xfrm>
+          <a:prstGeom prst="rect">
+            <a:avLst/>
+          </a:prstGeom>
+          <a:noFill/>
+          <a:ln/>
+        </p:spPr>
+        <p:txBody>
+          <a:bodyPr wrap="square" lIns="0" tIns="0" rIns="0" bIns="0" rtlCol="0" anchor="ctr">
+            <a:normAutofit/>
+          </a:bodyPr>
           <a:lstStyle/>
           <a:p>
             <a:pPr indent="0" marL="0">
@@ -26671,17 +27468,19 @@
         </p:nvSpPr>
         <p:spPr>
           <a:xfrm>
-            <a:off x="6556248" y="2331720"/>
-            <a:ext cx="4937760" cy="3566160"/>
-          </a:xfrm>
-          <a:prstGeom prst="rect">
-            <a:avLst/>
-          </a:prstGeom>
-          <a:noFill/>
-          <a:ln/>
-        </p:spPr>
-        <p:txBody>
-          <a:bodyPr wrap="square" lIns="0" tIns="0" rIns="0" bIns="0" rtlCol="0" anchor="t"/>
+            <a:off x="6556248" y="2266188"/>
+            <a:ext cx="4901184" cy="3713988"/>
+          </a:xfrm>
+          <a:prstGeom prst="rect">
+            <a:avLst/>
+          </a:prstGeom>
+          <a:noFill/>
+          <a:ln/>
+        </p:spPr>
+        <p:txBody>
+          <a:bodyPr wrap="square" lIns="0" tIns="0" rIns="0" bIns="0" rtlCol="0" anchor="t">
+            <a:normAutofit/>
+          </a:bodyPr>
           <a:lstStyle/>
           <a:p>
             <a:pPr algn="l" marL="152400" indent="-152400">
@@ -26785,6 +27584,27 @@
                 <a:cs typeface="微软雅黑" pitchFamily="34" charset="-120"/>
               </a:rPr>
               <a:t>机器码三级回退：Windows 重装也能通过通行码恢复授权</a:t>
+            </a:r>
+            <a:endParaRPr lang="en-US" sz="1300" dirty="0"/>
+          </a:p>
+          <a:p>
+            <a:pPr algn="l" marL="152400" indent="-152400">
+              <a:spcAft>
+                <a:spcPts val="1000"/>
+              </a:spcAft>
+              <a:buSzPct val="100000"/>
+              <a:buChar char="▪"/>
+            </a:pPr>
+            <a:r>
+              <a:rPr lang="en-US" sz="1300" dirty="0">
+                <a:solidFill>
+                  <a:srgbClr val="1A2E24"/>
+                </a:solidFill>
+                <a:latin typeface="微软雅黑" pitchFamily="34" charset="0"/>
+                <a:ea typeface="微软雅黑" pitchFamily="34" charset="-122"/>
+                <a:cs typeface="微软雅黑" pitchFamily="34" charset="-120"/>
+              </a:rPr>
+              <a:t>升级期间写请求闸门（maintenance gate）挡住并发写入</a:t>
             </a:r>
             <a:endParaRPr lang="en-US" sz="1300" dirty="0"/>
           </a:p>
@@ -26860,7 +27680,9 @@
           <a:ln/>
         </p:spPr>
         <p:txBody>
-          <a:bodyPr wrap="square" lIns="0" tIns="0" rIns="0" bIns="0" rtlCol="0" anchor="ctr"/>
+          <a:bodyPr wrap="square" lIns="0" tIns="0" rIns="0" bIns="0" rtlCol="0" anchor="ctr">
+            <a:normAutofit/>
+          </a:bodyPr>
           <a:lstStyle/>
           <a:p>
             <a:pPr indent="0" marL="0">
@@ -26899,7 +27721,9 @@
           <a:ln/>
         </p:spPr>
         <p:txBody>
-          <a:bodyPr wrap="square" lIns="0" tIns="0" rIns="0" bIns="0" rtlCol="0" anchor="ctr"/>
+          <a:bodyPr wrap="square" lIns="0" tIns="0" rIns="0" bIns="0" rtlCol="0" anchor="ctr">
+            <a:normAutofit/>
+          </a:bodyPr>
           <a:lstStyle/>
           <a:p>
             <a:pPr indent="0" marL="0">
@@ -26938,7 +27762,9 @@
           <a:ln/>
         </p:spPr>
         <p:txBody>
-          <a:bodyPr wrap="square" lIns="0" tIns="0" rIns="0" bIns="0" rtlCol="0" anchor="ctr"/>
+          <a:bodyPr wrap="square" lIns="0" tIns="0" rIns="0" bIns="0" rtlCol="0" anchor="ctr">
+            <a:normAutofit/>
+          </a:bodyPr>
           <a:lstStyle/>
           <a:p>
             <a:pPr algn="r" indent="0" marL="0">
@@ -26977,7 +27803,9 @@
           <a:ln/>
         </p:spPr>
         <p:txBody>
-          <a:bodyPr wrap="square" lIns="0" tIns="0" rIns="0" bIns="0" rtlCol="0" anchor="ctr"/>
+          <a:bodyPr wrap="square" lIns="0" tIns="0" rIns="0" bIns="0" rtlCol="0" anchor="ctr">
+            <a:normAutofit/>
+          </a:bodyPr>
           <a:lstStyle/>
           <a:p>
             <a:pPr indent="0" marL="0">
@@ -26992,7 +27820,7 @@
                 <a:ea typeface="微软雅黑" pitchFamily="34" charset="-122"/>
                 <a:cs typeface="微软雅黑" pitchFamily="34" charset="-120"/>
               </a:rPr>
-              <a:t>帮扶管理信息系统 v1.12.10</a:t>
+              <a:t>帮扶管理信息系统 v1.12.11</a:t>
             </a:r>
             <a:endParaRPr lang="en-US" sz="1050" dirty="0"/>
           </a:p>
@@ -27059,7 +27887,9 @@
           <a:ln/>
         </p:spPr>
         <p:txBody>
-          <a:bodyPr wrap="square" lIns="0" tIns="0" rIns="0" bIns="0" rtlCol="0" anchor="ctr"/>
+          <a:bodyPr wrap="square" lIns="0" tIns="0" rIns="0" bIns="0" rtlCol="0" anchor="ctr">
+            <a:normAutofit/>
+          </a:bodyPr>
           <a:lstStyle/>
           <a:p>
             <a:pPr algn="ctr" indent="0" marL="0">
@@ -27098,7 +27928,9 @@
           <a:ln/>
         </p:spPr>
         <p:txBody>
-          <a:bodyPr wrap="square" lIns="0" tIns="0" rIns="0" bIns="0" rtlCol="0" anchor="ctr"/>
+          <a:bodyPr wrap="square" lIns="0" tIns="0" rIns="0" bIns="0" rtlCol="0" anchor="ctr">
+            <a:normAutofit/>
+          </a:bodyPr>
           <a:lstStyle/>
           <a:p>
             <a:pPr algn="ctr" indent="0" marL="0">
@@ -27127,17 +27959,19 @@
         </p:nvSpPr>
         <p:spPr>
           <a:xfrm>
-            <a:off x="320040" y="3566160"/>
-            <a:ext cx="1965960" cy="1737360"/>
-          </a:xfrm>
-          <a:prstGeom prst="rect">
-            <a:avLst/>
-          </a:prstGeom>
-          <a:noFill/>
-          <a:ln/>
-        </p:spPr>
-        <p:txBody>
-          <a:bodyPr wrap="square" lIns="0" tIns="0" rIns="0" bIns="0" rtlCol="0" anchor="ctr"/>
+            <a:off x="320040" y="3520440"/>
+            <a:ext cx="1965960" cy="1810512"/>
+          </a:xfrm>
+          <a:prstGeom prst="rect">
+            <a:avLst/>
+          </a:prstGeom>
+          <a:noFill/>
+          <a:ln/>
+        </p:spPr>
+        <p:txBody>
+          <a:bodyPr wrap="square" lIns="0" tIns="0" rIns="0" bIns="0" rtlCol="0" anchor="ctr">
+            <a:normAutofit/>
+          </a:bodyPr>
           <a:lstStyle/>
           <a:p>
             <a:pPr algn="l" indent="0" marL="0">
@@ -27196,7 +28030,9 @@
           <a:ln/>
         </p:spPr>
         <p:txBody>
-          <a:bodyPr wrap="square" lIns="0" tIns="0" rIns="0" bIns="0" rtlCol="0" anchor="ctr"/>
+          <a:bodyPr wrap="square" lIns="0" tIns="0" rIns="0" bIns="0" rtlCol="0" anchor="ctr">
+            <a:normAutofit/>
+          </a:bodyPr>
           <a:lstStyle/>
           <a:p>
             <a:pPr algn="ctr" indent="0" marL="0">
@@ -27235,7 +28071,9 @@
           <a:ln/>
         </p:spPr>
         <p:txBody>
-          <a:bodyPr wrap="square" lIns="0" tIns="0" rIns="0" bIns="0" rtlCol="0" anchor="ctr"/>
+          <a:bodyPr wrap="square" lIns="0" tIns="0" rIns="0" bIns="0" rtlCol="0" anchor="ctr">
+            <a:normAutofit/>
+          </a:bodyPr>
           <a:lstStyle/>
           <a:p>
             <a:pPr algn="ctr" indent="0" marL="0">
@@ -27264,17 +28102,19 @@
         </p:nvSpPr>
         <p:spPr>
           <a:xfrm>
-            <a:off x="2560320" y="3566160"/>
-            <a:ext cx="1965960" cy="1737360"/>
-          </a:xfrm>
-          <a:prstGeom prst="rect">
-            <a:avLst/>
-          </a:prstGeom>
-          <a:noFill/>
-          <a:ln/>
-        </p:spPr>
-        <p:txBody>
-          <a:bodyPr wrap="square" lIns="0" tIns="0" rIns="0" bIns="0" rtlCol="0" anchor="ctr"/>
+            <a:off x="2560320" y="3520440"/>
+            <a:ext cx="1965960" cy="1810512"/>
+          </a:xfrm>
+          <a:prstGeom prst="rect">
+            <a:avLst/>
+          </a:prstGeom>
+          <a:noFill/>
+          <a:ln/>
+        </p:spPr>
+        <p:txBody>
+          <a:bodyPr wrap="square" lIns="0" tIns="0" rIns="0" bIns="0" rtlCol="0" anchor="ctr">
+            <a:normAutofit/>
+          </a:bodyPr>
           <a:lstStyle/>
           <a:p>
             <a:pPr algn="l" indent="0" marL="0">
@@ -27333,7 +28173,9 @@
           <a:ln/>
         </p:spPr>
         <p:txBody>
-          <a:bodyPr wrap="square" lIns="0" tIns="0" rIns="0" bIns="0" rtlCol="0" anchor="ctr"/>
+          <a:bodyPr wrap="square" lIns="0" tIns="0" rIns="0" bIns="0" rtlCol="0" anchor="ctr">
+            <a:normAutofit/>
+          </a:bodyPr>
           <a:lstStyle/>
           <a:p>
             <a:pPr algn="ctr" indent="0" marL="0">
@@ -27372,7 +28214,9 @@
           <a:ln/>
         </p:spPr>
         <p:txBody>
-          <a:bodyPr wrap="square" lIns="0" tIns="0" rIns="0" bIns="0" rtlCol="0" anchor="ctr"/>
+          <a:bodyPr wrap="square" lIns="0" tIns="0" rIns="0" bIns="0" rtlCol="0" anchor="ctr">
+            <a:normAutofit/>
+          </a:bodyPr>
           <a:lstStyle/>
           <a:p>
             <a:pPr algn="ctr" indent="0" marL="0">
@@ -27401,17 +28245,19 @@
         </p:nvSpPr>
         <p:spPr>
           <a:xfrm>
-            <a:off x="4800600" y="3566160"/>
-            <a:ext cx="1965960" cy="1737360"/>
-          </a:xfrm>
-          <a:prstGeom prst="rect">
-            <a:avLst/>
-          </a:prstGeom>
-          <a:noFill/>
-          <a:ln/>
-        </p:spPr>
-        <p:txBody>
-          <a:bodyPr wrap="square" lIns="0" tIns="0" rIns="0" bIns="0" rtlCol="0" anchor="ctr"/>
+            <a:off x="4800600" y="3520440"/>
+            <a:ext cx="1965960" cy="1810512"/>
+          </a:xfrm>
+          <a:prstGeom prst="rect">
+            <a:avLst/>
+          </a:prstGeom>
+          <a:noFill/>
+          <a:ln/>
+        </p:spPr>
+        <p:txBody>
+          <a:bodyPr wrap="square" lIns="0" tIns="0" rIns="0" bIns="0" rtlCol="0" anchor="ctr">
+            <a:normAutofit/>
+          </a:bodyPr>
           <a:lstStyle/>
           <a:p>
             <a:pPr algn="l" indent="0" marL="0">
@@ -27470,7 +28316,9 @@
           <a:ln/>
         </p:spPr>
         <p:txBody>
-          <a:bodyPr wrap="square" lIns="0" tIns="0" rIns="0" bIns="0" rtlCol="0" anchor="ctr"/>
+          <a:bodyPr wrap="square" lIns="0" tIns="0" rIns="0" bIns="0" rtlCol="0" anchor="ctr">
+            <a:normAutofit/>
+          </a:bodyPr>
           <a:lstStyle/>
           <a:p>
             <a:pPr algn="ctr" indent="0" marL="0">
@@ -27509,7 +28357,9 @@
           <a:ln/>
         </p:spPr>
         <p:txBody>
-          <a:bodyPr wrap="square" lIns="0" tIns="0" rIns="0" bIns="0" rtlCol="0" anchor="ctr"/>
+          <a:bodyPr wrap="square" lIns="0" tIns="0" rIns="0" bIns="0" rtlCol="0" anchor="ctr">
+            <a:normAutofit/>
+          </a:bodyPr>
           <a:lstStyle/>
           <a:p>
             <a:pPr algn="ctr" indent="0" marL="0">
@@ -27538,17 +28388,19 @@
         </p:nvSpPr>
         <p:spPr>
           <a:xfrm>
-            <a:off x="7040880" y="3566160"/>
-            <a:ext cx="1965960" cy="1737360"/>
-          </a:xfrm>
-          <a:prstGeom prst="rect">
-            <a:avLst/>
-          </a:prstGeom>
-          <a:noFill/>
-          <a:ln/>
-        </p:spPr>
-        <p:txBody>
-          <a:bodyPr wrap="square" lIns="0" tIns="0" rIns="0" bIns="0" rtlCol="0" anchor="ctr"/>
+            <a:off x="7040880" y="3520440"/>
+            <a:ext cx="1965960" cy="1810512"/>
+          </a:xfrm>
+          <a:prstGeom prst="rect">
+            <a:avLst/>
+          </a:prstGeom>
+          <a:noFill/>
+          <a:ln/>
+        </p:spPr>
+        <p:txBody>
+          <a:bodyPr wrap="square" lIns="0" tIns="0" rIns="0" bIns="0" rtlCol="0" anchor="ctr">
+            <a:normAutofit/>
+          </a:bodyPr>
           <a:lstStyle/>
           <a:p>
             <a:pPr algn="l" indent="0" marL="0">
@@ -27607,7 +28459,9 @@
           <a:ln/>
         </p:spPr>
         <p:txBody>
-          <a:bodyPr wrap="square" lIns="0" tIns="0" rIns="0" bIns="0" rtlCol="0" anchor="ctr"/>
+          <a:bodyPr wrap="square" lIns="0" tIns="0" rIns="0" bIns="0" rtlCol="0" anchor="ctr">
+            <a:normAutofit/>
+          </a:bodyPr>
           <a:lstStyle/>
           <a:p>
             <a:pPr algn="ctr" indent="0" marL="0">
@@ -27646,7 +28500,9 @@
           <a:ln/>
         </p:spPr>
         <p:txBody>
-          <a:bodyPr wrap="square" lIns="0" tIns="0" rIns="0" bIns="0" rtlCol="0" anchor="ctr"/>
+          <a:bodyPr wrap="square" lIns="0" tIns="0" rIns="0" bIns="0" rtlCol="0" anchor="ctr">
+            <a:normAutofit/>
+          </a:bodyPr>
           <a:lstStyle/>
           <a:p>
             <a:pPr algn="ctr" indent="0" marL="0">
@@ -27675,24 +28531,26 @@
         </p:nvSpPr>
         <p:spPr>
           <a:xfrm>
-            <a:off x="9281160" y="3566160"/>
-            <a:ext cx="1965960" cy="1737360"/>
-          </a:xfrm>
-          <a:prstGeom prst="rect">
-            <a:avLst/>
-          </a:prstGeom>
-          <a:noFill/>
-          <a:ln/>
-        </p:spPr>
-        <p:txBody>
-          <a:bodyPr wrap="square" lIns="0" tIns="0" rIns="0" bIns="0" rtlCol="0" anchor="ctr"/>
+            <a:off x="9281160" y="3520440"/>
+            <a:ext cx="1965960" cy="1810512"/>
+          </a:xfrm>
+          <a:prstGeom prst="rect">
+            <a:avLst/>
+          </a:prstGeom>
+          <a:noFill/>
+          <a:ln/>
+        </p:spPr>
+        <p:txBody>
+          <a:bodyPr wrap="square" lIns="0" tIns="0" rIns="0" bIns="0" rtlCol="0" anchor="ctr">
+            <a:normAutofit/>
+          </a:bodyPr>
           <a:lstStyle/>
           <a:p>
             <a:pPr algn="l" indent="0" marL="0">
               <a:buNone/>
             </a:pPr>
             <a:r>
-              <a:rPr lang="en-US" sz="1150" dirty="0">
+              <a:rPr lang="en-US" sz="1100" dirty="0">
                 <a:solidFill>
                   <a:srgbClr val="5F6F66"/>
                 </a:solidFill>
@@ -27702,7 +28560,7 @@
               </a:rPr>
               <a:t>跨平台 CI 双红根因修复：归档恢复穿越判定去平台化（Windows 风格路径曾绕过校验）、审批时间轴断言去时区依赖（UTC runner 与本地结论相反）+ 测试会话数据根隔离契约（Linux 上 override 曾被短路忽略）</a:t>
             </a:r>
-            <a:endParaRPr lang="en-US" sz="1150" dirty="0"/>
+            <a:endParaRPr lang="en-US" sz="1100" dirty="0"/>
           </a:p>
         </p:txBody>
       </p:sp>
@@ -27714,12 +28572,12 @@
         </p:nvSpPr>
         <p:spPr>
           <a:xfrm>
-            <a:off x="457200" y="5440680"/>
-            <a:ext cx="11274552" cy="914400"/>
+            <a:off x="457200" y="5394960"/>
+            <a:ext cx="11274552" cy="868680"/>
           </a:xfrm>
           <a:prstGeom prst="roundRect">
             <a:avLst>
-              <a:gd name="adj" fmla="val 7000"/>
+              <a:gd name="adj" fmla="val 7368"/>
             </a:avLst>
           </a:prstGeom>
           <a:solidFill>
@@ -27743,17 +28601,19 @@
         </p:nvSpPr>
         <p:spPr>
           <a:xfrm>
-            <a:off x="749808" y="5440680"/>
-            <a:ext cx="10607040" cy="914400"/>
-          </a:xfrm>
-          <a:prstGeom prst="rect">
-            <a:avLst/>
-          </a:prstGeom>
-          <a:noFill/>
-          <a:ln/>
-        </p:spPr>
-        <p:txBody>
-          <a:bodyPr wrap="square" lIns="0" tIns="0" rIns="0" bIns="0" rtlCol="0" anchor="ctr"/>
+            <a:off x="749808" y="5394960"/>
+            <a:ext cx="10607040" cy="868680"/>
+          </a:xfrm>
+          <a:prstGeom prst="rect">
+            <a:avLst/>
+          </a:prstGeom>
+          <a:noFill/>
+          <a:ln/>
+        </p:spPr>
+        <p:txBody>
+          <a:bodyPr wrap="square" lIns="0" tIns="0" rIns="0" bIns="0" rtlCol="0" anchor="ctr">
+            <a:normAutofit/>
+          </a:bodyPr>
           <a:lstStyle/>
           <a:p>
             <a:pPr indent="0" marL="0">
@@ -27768,7 +28628,7 @@
                 <a:ea typeface="微软雅黑" pitchFamily="34" charset="-122"/>
                 <a:cs typeface="微软雅黑" pitchFamily="34" charset="-120"/>
               </a:rPr>
-              <a:t>净效果：11,915 后端用例（覆盖率 100%）+ 6,287 前端用例全绿；Windows x64 与麒麟 ARM64 两个离线安装包由 GitHub Actions 全自动构建并发布 Release</a:t>
+              <a:t>净效果：11,916 后端用例（覆盖率 100%）+ 6,287 前端用例全绿；Windows x64 与麒麟 ARM64 两个离线安装包由 GitHub Actions 全自动构建并发布 Release</a:t>
             </a:r>
             <a:endParaRPr lang="en-US" sz="1350" dirty="0"/>
           </a:p>
@@ -27844,7 +28704,9 @@
           <a:ln/>
         </p:spPr>
         <p:txBody>
-          <a:bodyPr wrap="square" lIns="0" tIns="0" rIns="0" bIns="0" rtlCol="0" anchor="ctr"/>
+          <a:bodyPr wrap="square" lIns="0" tIns="0" rIns="0" bIns="0" rtlCol="0" anchor="ctr">
+            <a:normAutofit/>
+          </a:bodyPr>
           <a:lstStyle/>
           <a:p>
             <a:pPr indent="0" marL="0">
@@ -27883,7 +28745,9 @@
           <a:ln/>
         </p:spPr>
         <p:txBody>
-          <a:bodyPr wrap="square" lIns="0" tIns="0" rIns="0" bIns="0" rtlCol="0" anchor="ctr"/>
+          <a:bodyPr wrap="square" lIns="0" tIns="0" rIns="0" bIns="0" rtlCol="0" anchor="ctr">
+            <a:normAutofit/>
+          </a:bodyPr>
           <a:lstStyle/>
           <a:p>
             <a:pPr indent="0" marL="0">
@@ -27922,7 +28786,9 @@
           <a:ln/>
         </p:spPr>
         <p:txBody>
-          <a:bodyPr wrap="square" lIns="0" tIns="0" rIns="0" bIns="0" rtlCol="0" anchor="ctr"/>
+          <a:bodyPr wrap="square" lIns="0" tIns="0" rIns="0" bIns="0" rtlCol="0" anchor="ctr">
+            <a:normAutofit/>
+          </a:bodyPr>
           <a:lstStyle/>
           <a:p>
             <a:pPr algn="r" indent="0" marL="0">
@@ -27961,7 +28827,9 @@
           <a:ln/>
         </p:spPr>
         <p:txBody>
-          <a:bodyPr wrap="square" lIns="0" tIns="0" rIns="0" bIns="0" rtlCol="0" anchor="ctr"/>
+          <a:bodyPr wrap="square" lIns="0" tIns="0" rIns="0" bIns="0" rtlCol="0" anchor="ctr">
+            <a:normAutofit/>
+          </a:bodyPr>
           <a:lstStyle/>
           <a:p>
             <a:pPr indent="0" marL="0">
@@ -27976,7 +28844,7 @@
                 <a:ea typeface="微软雅黑" pitchFamily="34" charset="-122"/>
                 <a:cs typeface="微软雅黑" pitchFamily="34" charset="-120"/>
               </a:rPr>
-              <a:t>帮扶管理信息系统 v1.12.10</a:t>
+              <a:t>帮扶管理信息系统 v1.12.11</a:t>
             </a:r>
             <a:endParaRPr lang="en-US" sz="1050" dirty="0"/>
           </a:p>
@@ -28000,7 +28868,9 @@
           <a:ln/>
         </p:spPr>
         <p:txBody>
-          <a:bodyPr wrap="square" lIns="0" tIns="0" rIns="0" bIns="0" rtlCol="0" anchor="ctr"/>
+          <a:bodyPr wrap="square" lIns="0" tIns="0" rIns="0" bIns="0" rtlCol="0" anchor="ctr">
+            <a:normAutofit/>
+          </a:bodyPr>
           <a:lstStyle/>
           <a:p>
             <a:pPr indent="0" marL="0">
@@ -28059,7 +28929,9 @@
           <a:ln/>
         </p:spPr>
         <p:txBody>
-          <a:bodyPr wrap="square" lIns="0" tIns="0" rIns="0" bIns="0" rtlCol="0" anchor="ctr"/>
+          <a:bodyPr wrap="square" lIns="0" tIns="0" rIns="0" bIns="0" rtlCol="0" anchor="ctr">
+            <a:normAutofit/>
+          </a:bodyPr>
           <a:lstStyle/>
           <a:p>
             <a:pPr indent="0" marL="0">
@@ -28098,7 +28970,9 @@
           <a:ln/>
         </p:spPr>
         <p:txBody>
-          <a:bodyPr wrap="square" lIns="0" tIns="0" rIns="0" bIns="0" rtlCol="0" anchor="ctr"/>
+          <a:bodyPr wrap="square" lIns="0" tIns="0" rIns="0" bIns="0" rtlCol="0" anchor="ctr">
+            <a:normAutofit/>
+          </a:bodyPr>
           <a:lstStyle/>
           <a:p>
             <a:pPr indent="0" marL="0">
@@ -28157,7 +29031,9 @@
           <a:ln/>
         </p:spPr>
         <p:txBody>
-          <a:bodyPr wrap="square" lIns="0" tIns="0" rIns="0" bIns="0" rtlCol="0" anchor="ctr"/>
+          <a:bodyPr wrap="square" lIns="0" tIns="0" rIns="0" bIns="0" rtlCol="0" anchor="ctr">
+            <a:normAutofit/>
+          </a:bodyPr>
           <a:lstStyle/>
           <a:p>
             <a:pPr indent="0" marL="0">
@@ -28196,7 +29072,9 @@
           <a:ln/>
         </p:spPr>
         <p:txBody>
-          <a:bodyPr wrap="square" lIns="0" tIns="0" rIns="0" bIns="0" rtlCol="0" anchor="ctr"/>
+          <a:bodyPr wrap="square" lIns="0" tIns="0" rIns="0" bIns="0" rtlCol="0" anchor="ctr">
+            <a:normAutofit/>
+          </a:bodyPr>
           <a:lstStyle/>
           <a:p>
             <a:pPr indent="0" marL="0">
@@ -28255,7 +29133,9 @@
           <a:ln/>
         </p:spPr>
         <p:txBody>
-          <a:bodyPr wrap="square" lIns="0" tIns="0" rIns="0" bIns="0" rtlCol="0" anchor="ctr"/>
+          <a:bodyPr wrap="square" lIns="0" tIns="0" rIns="0" bIns="0" rtlCol="0" anchor="ctr">
+            <a:normAutofit/>
+          </a:bodyPr>
           <a:lstStyle/>
           <a:p>
             <a:pPr indent="0" marL="0">
@@ -28294,7 +29174,9 @@
           <a:ln/>
         </p:spPr>
         <p:txBody>
-          <a:bodyPr wrap="square" lIns="0" tIns="0" rIns="0" bIns="0" rtlCol="0" anchor="ctr"/>
+          <a:bodyPr wrap="square" lIns="0" tIns="0" rIns="0" bIns="0" rtlCol="0" anchor="ctr">
+            <a:normAutofit/>
+          </a:bodyPr>
           <a:lstStyle/>
           <a:p>
             <a:pPr indent="0" marL="0">
@@ -28385,7 +29267,9 @@
           <a:ln/>
         </p:spPr>
         <p:txBody>
-          <a:bodyPr wrap="square" lIns="0" tIns="0" rIns="0" bIns="0" rtlCol="0" anchor="ctr"/>
+          <a:bodyPr wrap="square" lIns="0" tIns="0" rIns="0" bIns="0" rtlCol="0" anchor="ctr">
+            <a:normAutofit/>
+          </a:bodyPr>
           <a:lstStyle/>
           <a:p>
             <a:pPr indent="0" marL="0">
@@ -28424,7 +29308,9 @@
           <a:ln/>
         </p:spPr>
         <p:txBody>
-          <a:bodyPr wrap="square" lIns="0" tIns="0" rIns="0" bIns="0" rtlCol="0" anchor="ctr"/>
+          <a:bodyPr wrap="square" lIns="0" tIns="0" rIns="0" bIns="0" rtlCol="0" anchor="ctr">
+            <a:normAutofit/>
+          </a:bodyPr>
           <a:lstStyle/>
           <a:p>
             <a:pPr indent="0" marL="0">
@@ -28463,7 +29349,9 @@
           <a:ln/>
         </p:spPr>
         <p:txBody>
-          <a:bodyPr wrap="square" lIns="0" tIns="0" rIns="0" bIns="0" rtlCol="0" anchor="ctr"/>
+          <a:bodyPr wrap="square" lIns="0" tIns="0" rIns="0" bIns="0" rtlCol="0" anchor="ctr">
+            <a:normAutofit/>
+          </a:bodyPr>
           <a:lstStyle/>
           <a:p>
             <a:pPr algn="r" indent="0" marL="0">
@@ -28502,7 +29390,9 @@
           <a:ln/>
         </p:spPr>
         <p:txBody>
-          <a:bodyPr wrap="square" lIns="0" tIns="0" rIns="0" bIns="0" rtlCol="0" anchor="ctr"/>
+          <a:bodyPr wrap="square" lIns="0" tIns="0" rIns="0" bIns="0" rtlCol="0" anchor="ctr">
+            <a:normAutofit/>
+          </a:bodyPr>
           <a:lstStyle/>
           <a:p>
             <a:pPr indent="0" marL="0">
@@ -28517,7 +29407,7 @@
                 <a:ea typeface="微软雅黑" pitchFamily="34" charset="-122"/>
                 <a:cs typeface="微软雅黑" pitchFamily="34" charset="-120"/>
               </a:rPr>
-              <a:t>帮扶管理信息系统 v1.12.10</a:t>
+              <a:t>帮扶管理信息系统 v1.12.11</a:t>
             </a:r>
             <a:endParaRPr lang="en-US" sz="1050" dirty="0"/>
           </a:p>
@@ -28570,7 +29460,9 @@
           <a:ln/>
         </p:spPr>
         <p:txBody>
-          <a:bodyPr wrap="square" lIns="0" tIns="0" rIns="0" bIns="0" rtlCol="0" anchor="ctr"/>
+          <a:bodyPr wrap="square" lIns="0" tIns="0" rIns="0" bIns="0" rtlCol="0" anchor="ctr">
+            <a:normAutofit/>
+          </a:bodyPr>
           <a:lstStyle/>
           <a:p>
             <a:pPr indent="0" marL="0">
@@ -28609,7 +29501,9 @@
           <a:ln/>
         </p:spPr>
         <p:txBody>
-          <a:bodyPr wrap="square" lIns="0" tIns="0" rIns="0" bIns="0" rtlCol="0" anchor="ctr"/>
+          <a:bodyPr wrap="square" lIns="0" tIns="0" rIns="0" bIns="0" rtlCol="0" anchor="ctr">
+            <a:normAutofit/>
+          </a:bodyPr>
           <a:lstStyle/>
           <a:p>
             <a:pPr indent="0" marL="0">
@@ -28677,7 +29571,9 @@
           <a:ln/>
         </p:spPr>
         <p:txBody>
-          <a:bodyPr wrap="square" lIns="0" tIns="0" rIns="0" bIns="0" rtlCol="0" anchor="ctr"/>
+          <a:bodyPr wrap="square" lIns="0" tIns="0" rIns="0" bIns="0" rtlCol="0" anchor="ctr">
+            <a:normAutofit/>
+          </a:bodyPr>
           <a:lstStyle/>
           <a:p>
             <a:pPr indent="0" marL="0">
@@ -28716,7 +29612,9 @@
           <a:ln/>
         </p:spPr>
         <p:txBody>
-          <a:bodyPr wrap="square" lIns="0" tIns="0" rIns="0" bIns="0" rtlCol="0" anchor="ctr"/>
+          <a:bodyPr wrap="square" lIns="0" tIns="0" rIns="0" bIns="0" rtlCol="0" anchor="ctr">
+            <a:normAutofit/>
+          </a:bodyPr>
           <a:lstStyle/>
           <a:p>
             <a:pPr indent="0" marL="0">
@@ -28784,7 +29682,9 @@
           <a:ln/>
         </p:spPr>
         <p:txBody>
-          <a:bodyPr wrap="square" lIns="0" tIns="0" rIns="0" bIns="0" rtlCol="0" anchor="ctr"/>
+          <a:bodyPr wrap="square" lIns="0" tIns="0" rIns="0" bIns="0" rtlCol="0" anchor="ctr">
+            <a:normAutofit/>
+          </a:bodyPr>
           <a:lstStyle/>
           <a:p>
             <a:pPr indent="0" marL="0">
@@ -28823,7 +29723,9 @@
           <a:ln/>
         </p:spPr>
         <p:txBody>
-          <a:bodyPr wrap="square" lIns="0" tIns="0" rIns="0" bIns="0" rtlCol="0" anchor="ctr"/>
+          <a:bodyPr wrap="square" lIns="0" tIns="0" rIns="0" bIns="0" rtlCol="0" anchor="ctr">
+            <a:normAutofit/>
+          </a:bodyPr>
           <a:lstStyle/>
           <a:p>
             <a:pPr indent="0" marL="0">
@@ -28891,7 +29793,9 @@
           <a:ln/>
         </p:spPr>
         <p:txBody>
-          <a:bodyPr wrap="square" lIns="0" tIns="0" rIns="0" bIns="0" rtlCol="0" anchor="ctr"/>
+          <a:bodyPr wrap="square" lIns="0" tIns="0" rIns="0" bIns="0" rtlCol="0" anchor="ctr">
+            <a:normAutofit/>
+          </a:bodyPr>
           <a:lstStyle/>
           <a:p>
             <a:pPr indent="0" marL="0">
@@ -28930,7 +29834,9 @@
           <a:ln/>
         </p:spPr>
         <p:txBody>
-          <a:bodyPr wrap="square" lIns="0" tIns="0" rIns="0" bIns="0" rtlCol="0" anchor="ctr"/>
+          <a:bodyPr wrap="square" lIns="0" tIns="0" rIns="0" bIns="0" rtlCol="0" anchor="ctr">
+            <a:normAutofit/>
+          </a:bodyPr>
           <a:lstStyle/>
           <a:p>
             <a:pPr indent="0" marL="0">
@@ -28998,7 +29904,9 @@
           <a:ln/>
         </p:spPr>
         <p:txBody>
-          <a:bodyPr wrap="square" lIns="0" tIns="0" rIns="0" bIns="0" rtlCol="0" anchor="ctr"/>
+          <a:bodyPr wrap="square" lIns="0" tIns="0" rIns="0" bIns="0" rtlCol="0" anchor="ctr">
+            <a:normAutofit/>
+          </a:bodyPr>
           <a:lstStyle/>
           <a:p>
             <a:pPr indent="0" marL="0">
@@ -29037,7 +29945,9 @@
           <a:ln/>
         </p:spPr>
         <p:txBody>
-          <a:bodyPr wrap="square" lIns="0" tIns="0" rIns="0" bIns="0" rtlCol="0" anchor="ctr"/>
+          <a:bodyPr wrap="square" lIns="0" tIns="0" rIns="0" bIns="0" rtlCol="0" anchor="ctr">
+            <a:normAutofit/>
+          </a:bodyPr>
           <a:lstStyle/>
           <a:p>
             <a:pPr indent="0" marL="0">
@@ -29105,7 +30015,9 @@
           <a:ln/>
         </p:spPr>
         <p:txBody>
-          <a:bodyPr wrap="square" lIns="0" tIns="0" rIns="0" bIns="0" rtlCol="0" anchor="ctr"/>
+          <a:bodyPr wrap="square" lIns="0" tIns="0" rIns="0" bIns="0" rtlCol="0" anchor="ctr">
+            <a:normAutofit/>
+          </a:bodyPr>
           <a:lstStyle/>
           <a:p>
             <a:pPr indent="0" marL="0">
@@ -29144,7 +30056,9 @@
           <a:ln/>
         </p:spPr>
         <p:txBody>
-          <a:bodyPr wrap="square" lIns="0" tIns="0" rIns="0" bIns="0" rtlCol="0" anchor="ctr"/>
+          <a:bodyPr wrap="square" lIns="0" tIns="0" rIns="0" bIns="0" rtlCol="0" anchor="ctr">
+            <a:normAutofit/>
+          </a:bodyPr>
           <a:lstStyle/>
           <a:p>
             <a:pPr indent="0" marL="0">
@@ -29255,7 +30169,9 @@
           <a:ln/>
         </p:spPr>
         <p:txBody>
-          <a:bodyPr wrap="square" lIns="0" tIns="0" rIns="0" bIns="0" rtlCol="0" anchor="ctr"/>
+          <a:bodyPr wrap="square" lIns="0" tIns="0" rIns="0" bIns="0" rtlCol="0" anchor="ctr">
+            <a:normAutofit/>
+          </a:bodyPr>
           <a:lstStyle/>
           <a:p>
             <a:pPr indent="0" marL="0">
@@ -29285,16 +30201,18 @@
         <p:spPr>
           <a:xfrm>
             <a:off x="877824" y="2743200"/>
-            <a:ext cx="10058400" cy="1097280"/>
-          </a:xfrm>
-          <a:prstGeom prst="rect">
-            <a:avLst/>
-          </a:prstGeom>
-          <a:noFill/>
-          <a:ln/>
-        </p:spPr>
-        <p:txBody>
-          <a:bodyPr wrap="square" lIns="0" tIns="0" rIns="0" bIns="0" rtlCol="0" anchor="ctr"/>
+            <a:ext cx="10058400" cy="1325880"/>
+          </a:xfrm>
+          <a:prstGeom prst="rect">
+            <a:avLst/>
+          </a:prstGeom>
+          <a:noFill/>
+          <a:ln/>
+        </p:spPr>
+        <p:txBody>
+          <a:bodyPr wrap="square" lIns="0" tIns="0" rIns="0" bIns="0" rtlCol="0" anchor="ctr">
+            <a:normAutofit/>
+          </a:bodyPr>
           <a:lstStyle/>
           <a:p>
             <a:pPr indent="0" marL="0">
@@ -29333,7 +30251,9 @@
           <a:ln/>
         </p:spPr>
         <p:txBody>
-          <a:bodyPr wrap="square" lIns="0" tIns="0" rIns="0" bIns="0" rtlCol="0" anchor="ctr"/>
+          <a:bodyPr wrap="square" lIns="0" tIns="0" rIns="0" bIns="0" rtlCol="0" anchor="ctr">
+            <a:normAutofit/>
+          </a:bodyPr>
           <a:lstStyle/>
           <a:p>
             <a:pPr indent="0" marL="0">
@@ -29348,7 +30268,7 @@
                 <a:ea typeface="微软雅黑" pitchFamily="34" charset="-122"/>
                 <a:cs typeface="微软雅黑" pitchFamily="34" charset="-120"/>
               </a:rPr>
-              <a:t>帮扶管理信息系统 v1.12.8  ·  仓库：github.com/lzh745200/MRRS  ·  完整文档见 docs/ 目录</a:t>
+              <a:t>帮扶管理信息系统 v1.12.11  ·  仓库：github.com/lzh745200/MRRS  ·  完整文档见 docs/ 目录</a:t>
             </a:r>
             <a:endParaRPr lang="en-US" sz="1350" dirty="0"/>
           </a:p>
@@ -29372,7 +30292,9 @@
           <a:ln/>
         </p:spPr>
         <p:txBody>
-          <a:bodyPr wrap="square" lIns="0" tIns="0" rIns="0" bIns="0" rtlCol="0" anchor="ctr"/>
+          <a:bodyPr wrap="square" lIns="0" tIns="0" rIns="0" bIns="0" rtlCol="0" anchor="ctr">
+            <a:normAutofit/>
+          </a:bodyPr>
           <a:lstStyle/>
           <a:p>
             <a:pPr indent="0" marL="0">
@@ -29387,7 +30309,7 @@
                 <a:ea typeface="微软雅黑" pitchFamily="34" charset="-122"/>
                 <a:cs typeface="微软雅黑" pitchFamily="34" charset="-120"/>
               </a:rPr>
-              <a:t>11,915 后端用例（覆盖率 100%）+ 6,287 前端用例 全绿守护 · Windows x64 / 麒麟 ARM64 双平台离线交付</a:t>
+              <a:t>11,916 后端用例（覆盖率 100%）+ 6,287 前端用例 全绿守护 · Windows x64 / 麒麟 ARM64 双平台离线交付</a:t>
             </a:r>
             <a:endParaRPr lang="en-US" sz="1350" dirty="0"/>
           </a:p>
@@ -29463,7 +30385,9 @@
           <a:ln/>
         </p:spPr>
         <p:txBody>
-          <a:bodyPr wrap="square" lIns="0" tIns="0" rIns="0" bIns="0" rtlCol="0" anchor="ctr"/>
+          <a:bodyPr wrap="square" lIns="0" tIns="0" rIns="0" bIns="0" rtlCol="0" anchor="ctr">
+            <a:normAutofit/>
+          </a:bodyPr>
           <a:lstStyle/>
           <a:p>
             <a:pPr indent="0" marL="0">
@@ -29502,7 +30426,9 @@
           <a:ln/>
         </p:spPr>
         <p:txBody>
-          <a:bodyPr wrap="square" lIns="0" tIns="0" rIns="0" bIns="0" rtlCol="0" anchor="ctr"/>
+          <a:bodyPr wrap="square" lIns="0" tIns="0" rIns="0" bIns="0" rtlCol="0" anchor="ctr">
+            <a:normAutofit/>
+          </a:bodyPr>
           <a:lstStyle/>
           <a:p>
             <a:pPr indent="0" marL="0">
@@ -29541,7 +30467,9 @@
           <a:ln/>
         </p:spPr>
         <p:txBody>
-          <a:bodyPr wrap="square" lIns="0" tIns="0" rIns="0" bIns="0" rtlCol="0" anchor="ctr"/>
+          <a:bodyPr wrap="square" lIns="0" tIns="0" rIns="0" bIns="0" rtlCol="0" anchor="ctr">
+            <a:normAutofit/>
+          </a:bodyPr>
           <a:lstStyle/>
           <a:p>
             <a:pPr algn="r" indent="0" marL="0">
@@ -29580,7 +30508,9 @@
           <a:ln/>
         </p:spPr>
         <p:txBody>
-          <a:bodyPr wrap="square" lIns="0" tIns="0" rIns="0" bIns="0" rtlCol="0" anchor="ctr"/>
+          <a:bodyPr wrap="square" lIns="0" tIns="0" rIns="0" bIns="0" rtlCol="0" anchor="ctr">
+            <a:normAutofit/>
+          </a:bodyPr>
           <a:lstStyle/>
           <a:p>
             <a:pPr indent="0" marL="0">
@@ -29595,7 +30525,7 @@
                 <a:ea typeface="微软雅黑" pitchFamily="34" charset="-122"/>
                 <a:cs typeface="微软雅黑" pitchFamily="34" charset="-120"/>
               </a:rPr>
-              <a:t>帮扶管理信息系统 v1.12.10</a:t>
+              <a:t>帮扶管理信息系统 v1.12.11</a:t>
             </a:r>
             <a:endParaRPr lang="en-US" sz="1050" dirty="0"/>
           </a:p>
@@ -29659,16 +30589,18 @@
         <p:spPr>
           <a:xfrm>
             <a:off x="1024128" y="1874520"/>
-            <a:ext cx="4206240" cy="411480"/>
-          </a:xfrm>
-          <a:prstGeom prst="rect">
-            <a:avLst/>
-          </a:prstGeom>
-          <a:noFill/>
-          <a:ln/>
-        </p:spPr>
-        <p:txBody>
-          <a:bodyPr wrap="square" lIns="0" tIns="0" rIns="0" bIns="0" rtlCol="0" anchor="ctr"/>
+            <a:ext cx="4206240" cy="426487"/>
+          </a:xfrm>
+          <a:prstGeom prst="rect">
+            <a:avLst/>
+          </a:prstGeom>
+          <a:noFill/>
+          <a:ln/>
+        </p:spPr>
+        <p:txBody>
+          <a:bodyPr wrap="square" lIns="0" tIns="0" rIns="0" bIns="0" rtlCol="0" anchor="ctr">
+            <a:normAutofit/>
+          </a:bodyPr>
           <a:lstStyle/>
           <a:p>
             <a:pPr indent="0" marL="0">
@@ -29707,7 +30639,9 @@
           <a:ln/>
         </p:spPr>
         <p:txBody>
-          <a:bodyPr wrap="square" lIns="0" tIns="0" rIns="0" bIns="0" rtlCol="0" anchor="ctr"/>
+          <a:bodyPr wrap="square" lIns="0" tIns="0" rIns="0" bIns="0" rtlCol="0" anchor="ctr">
+            <a:normAutofit/>
+          </a:bodyPr>
           <a:lstStyle/>
           <a:p>
             <a:pPr indent="0" marL="0">
@@ -29786,16 +30720,18 @@
         <p:spPr>
           <a:xfrm>
             <a:off x="6830568" y="1874520"/>
-            <a:ext cx="4206240" cy="411480"/>
-          </a:xfrm>
-          <a:prstGeom prst="rect">
-            <a:avLst/>
-          </a:prstGeom>
-          <a:noFill/>
-          <a:ln/>
-        </p:spPr>
-        <p:txBody>
-          <a:bodyPr wrap="square" lIns="0" tIns="0" rIns="0" bIns="0" rtlCol="0" anchor="ctr"/>
+            <a:ext cx="4206240" cy="426487"/>
+          </a:xfrm>
+          <a:prstGeom prst="rect">
+            <a:avLst/>
+          </a:prstGeom>
+          <a:noFill/>
+          <a:ln/>
+        </p:spPr>
+        <p:txBody>
+          <a:bodyPr wrap="square" lIns="0" tIns="0" rIns="0" bIns="0" rtlCol="0" anchor="ctr">
+            <a:normAutofit/>
+          </a:bodyPr>
           <a:lstStyle/>
           <a:p>
             <a:pPr indent="0" marL="0">
@@ -29834,7 +30770,9 @@
           <a:ln/>
         </p:spPr>
         <p:txBody>
-          <a:bodyPr wrap="square" lIns="0" tIns="0" rIns="0" bIns="0" rtlCol="0" anchor="ctr"/>
+          <a:bodyPr wrap="square" lIns="0" tIns="0" rIns="0" bIns="0" rtlCol="0" anchor="ctr">
+            <a:normAutofit/>
+          </a:bodyPr>
           <a:lstStyle/>
           <a:p>
             <a:pPr indent="0" marL="0">
@@ -29913,16 +30851,18 @@
         <p:spPr>
           <a:xfrm>
             <a:off x="1024128" y="4160520"/>
-            <a:ext cx="4206240" cy="411480"/>
-          </a:xfrm>
-          <a:prstGeom prst="rect">
-            <a:avLst/>
-          </a:prstGeom>
-          <a:noFill/>
-          <a:ln/>
-        </p:spPr>
-        <p:txBody>
-          <a:bodyPr wrap="square" lIns="0" tIns="0" rIns="0" bIns="0" rtlCol="0" anchor="ctr"/>
+            <a:ext cx="4206240" cy="426487"/>
+          </a:xfrm>
+          <a:prstGeom prst="rect">
+            <a:avLst/>
+          </a:prstGeom>
+          <a:noFill/>
+          <a:ln/>
+        </p:spPr>
+        <p:txBody>
+          <a:bodyPr wrap="square" lIns="0" tIns="0" rIns="0" bIns="0" rtlCol="0" anchor="ctr">
+            <a:normAutofit/>
+          </a:bodyPr>
           <a:lstStyle/>
           <a:p>
             <a:pPr indent="0" marL="0">
@@ -29961,7 +30901,9 @@
           <a:ln/>
         </p:spPr>
         <p:txBody>
-          <a:bodyPr wrap="square" lIns="0" tIns="0" rIns="0" bIns="0" rtlCol="0" anchor="ctr"/>
+          <a:bodyPr wrap="square" lIns="0" tIns="0" rIns="0" bIns="0" rtlCol="0" anchor="ctr">
+            <a:normAutofit/>
+          </a:bodyPr>
           <a:lstStyle/>
           <a:p>
             <a:pPr indent="0" marL="0">
@@ -30040,16 +30982,18 @@
         <p:spPr>
           <a:xfrm>
             <a:off x="6830568" y="4160520"/>
-            <a:ext cx="4206240" cy="411480"/>
-          </a:xfrm>
-          <a:prstGeom prst="rect">
-            <a:avLst/>
-          </a:prstGeom>
-          <a:noFill/>
-          <a:ln/>
-        </p:spPr>
-        <p:txBody>
-          <a:bodyPr wrap="square" lIns="0" tIns="0" rIns="0" bIns="0" rtlCol="0" anchor="ctr"/>
+            <a:ext cx="4206240" cy="426487"/>
+          </a:xfrm>
+          <a:prstGeom prst="rect">
+            <a:avLst/>
+          </a:prstGeom>
+          <a:noFill/>
+          <a:ln/>
+        </p:spPr>
+        <p:txBody>
+          <a:bodyPr wrap="square" lIns="0" tIns="0" rIns="0" bIns="0" rtlCol="0" anchor="ctr">
+            <a:normAutofit/>
+          </a:bodyPr>
           <a:lstStyle/>
           <a:p>
             <a:pPr indent="0" marL="0">
@@ -30088,7 +31032,9 @@
           <a:ln/>
         </p:spPr>
         <p:txBody>
-          <a:bodyPr wrap="square" lIns="0" tIns="0" rIns="0" bIns="0" rtlCol="0" anchor="ctr"/>
+          <a:bodyPr wrap="square" lIns="0" tIns="0" rIns="0" bIns="0" rtlCol="0" anchor="ctr">
+            <a:normAutofit/>
+          </a:bodyPr>
           <a:lstStyle/>
           <a:p>
             <a:pPr indent="0" marL="0">
@@ -30179,7 +31125,9 @@
           <a:ln/>
         </p:spPr>
         <p:txBody>
-          <a:bodyPr wrap="square" lIns="0" tIns="0" rIns="0" bIns="0" rtlCol="0" anchor="ctr"/>
+          <a:bodyPr wrap="square" lIns="0" tIns="0" rIns="0" bIns="0" rtlCol="0" anchor="ctr">
+            <a:normAutofit/>
+          </a:bodyPr>
           <a:lstStyle/>
           <a:p>
             <a:pPr indent="0" marL="0">
@@ -30218,7 +31166,9 @@
           <a:ln/>
         </p:spPr>
         <p:txBody>
-          <a:bodyPr wrap="square" lIns="0" tIns="0" rIns="0" bIns="0" rtlCol="0" anchor="ctr"/>
+          <a:bodyPr wrap="square" lIns="0" tIns="0" rIns="0" bIns="0" rtlCol="0" anchor="ctr">
+            <a:normAutofit/>
+          </a:bodyPr>
           <a:lstStyle/>
           <a:p>
             <a:pPr indent="0" marL="0">
@@ -30257,7 +31207,9 @@
           <a:ln/>
         </p:spPr>
         <p:txBody>
-          <a:bodyPr wrap="square" lIns="0" tIns="0" rIns="0" bIns="0" rtlCol="0" anchor="ctr"/>
+          <a:bodyPr wrap="square" lIns="0" tIns="0" rIns="0" bIns="0" rtlCol="0" anchor="ctr">
+            <a:normAutofit/>
+          </a:bodyPr>
           <a:lstStyle/>
           <a:p>
             <a:pPr algn="r" indent="0" marL="0">
@@ -30296,7 +31248,9 @@
           <a:ln/>
         </p:spPr>
         <p:txBody>
-          <a:bodyPr wrap="square" lIns="0" tIns="0" rIns="0" bIns="0" rtlCol="0" anchor="ctr"/>
+          <a:bodyPr wrap="square" lIns="0" tIns="0" rIns="0" bIns="0" rtlCol="0" anchor="ctr">
+            <a:normAutofit/>
+          </a:bodyPr>
           <a:lstStyle/>
           <a:p>
             <a:pPr indent="0" marL="0">
@@ -30311,7 +31265,7 @@
                 <a:ea typeface="微软雅黑" pitchFamily="34" charset="-122"/>
                 <a:cs typeface="微软雅黑" pitchFamily="34" charset="-120"/>
               </a:rPr>
-              <a:t>帮扶管理信息系统 v1.12.10</a:t>
+              <a:t>帮扶管理信息系统 v1.12.11</a:t>
             </a:r>
             <a:endParaRPr lang="en-US" sz="1050" dirty="0"/>
           </a:p>
@@ -30326,16 +31280,18 @@
         <p:spPr>
           <a:xfrm>
             <a:off x="502920" y="1920240"/>
-            <a:ext cx="2743200" cy="777240"/>
-          </a:xfrm>
-          <a:prstGeom prst="rect">
-            <a:avLst/>
-          </a:prstGeom>
-          <a:noFill/>
-          <a:ln/>
-        </p:spPr>
-        <p:txBody>
-          <a:bodyPr wrap="square" lIns="0" tIns="0" rIns="0" bIns="0" rtlCol="0" anchor="ctr"/>
+            <a:ext cx="2743200" cy="877655"/>
+          </a:xfrm>
+          <a:prstGeom prst="rect">
+            <a:avLst/>
+          </a:prstGeom>
+          <a:noFill/>
+          <a:ln/>
+        </p:spPr>
+        <p:txBody>
+          <a:bodyPr wrap="square" lIns="0" tIns="0" rIns="0" bIns="0" rtlCol="0" anchor="ctr">
+            <a:normAutofit/>
+          </a:bodyPr>
           <a:lstStyle/>
           <a:p>
             <a:pPr algn="ctr" indent="0" marL="0">
@@ -30350,7 +31306,7 @@
                 <a:ea typeface="微软雅黑" pitchFamily="34" charset="-122"/>
                 <a:cs typeface="微软雅黑" pitchFamily="34" charset="-120"/>
               </a:rPr>
-              <a:t>11,915</a:t>
+              <a:t>11,916</a:t>
             </a:r>
             <a:endParaRPr lang="en-US" sz="4000" dirty="0"/>
           </a:p>
@@ -30364,17 +31320,19 @@
         </p:nvSpPr>
         <p:spPr>
           <a:xfrm>
-            <a:off x="502920" y="2724912"/>
-            <a:ext cx="2743200" cy="502920"/>
-          </a:xfrm>
-          <a:prstGeom prst="rect">
-            <a:avLst/>
-          </a:prstGeom>
-          <a:noFill/>
-          <a:ln/>
-        </p:spPr>
-        <p:txBody>
-          <a:bodyPr wrap="square" lIns="0" tIns="0" rIns="0" bIns="0" rtlCol="0" anchor="ctr"/>
+            <a:off x="502920" y="2825327"/>
+            <a:ext cx="2743200" cy="457200"/>
+          </a:xfrm>
+          <a:prstGeom prst="rect">
+            <a:avLst/>
+          </a:prstGeom>
+          <a:noFill/>
+          <a:ln/>
+        </p:spPr>
+        <p:txBody>
+          <a:bodyPr wrap="square" lIns="0" tIns="0" rIns="0" bIns="0" rtlCol="0" anchor="ctr">
+            <a:normAutofit/>
+          </a:bodyPr>
           <a:lstStyle/>
           <a:p>
             <a:pPr algn="ctr" indent="0" marL="0">
@@ -30404,16 +31362,18 @@
         <p:spPr>
           <a:xfrm>
             <a:off x="3566160" y="1920240"/>
-            <a:ext cx="2743200" cy="777240"/>
-          </a:xfrm>
-          <a:prstGeom prst="rect">
-            <a:avLst/>
-          </a:prstGeom>
-          <a:noFill/>
-          <a:ln/>
-        </p:spPr>
-        <p:txBody>
-          <a:bodyPr wrap="square" lIns="0" tIns="0" rIns="0" bIns="0" rtlCol="0" anchor="ctr"/>
+            <a:ext cx="2743200" cy="877655"/>
+          </a:xfrm>
+          <a:prstGeom prst="rect">
+            <a:avLst/>
+          </a:prstGeom>
+          <a:noFill/>
+          <a:ln/>
+        </p:spPr>
+        <p:txBody>
+          <a:bodyPr wrap="square" lIns="0" tIns="0" rIns="0" bIns="0" rtlCol="0" anchor="ctr">
+            <a:normAutofit/>
+          </a:bodyPr>
           <a:lstStyle/>
           <a:p>
             <a:pPr algn="ctr" indent="0" marL="0">
@@ -30442,17 +31402,19 @@
         </p:nvSpPr>
         <p:spPr>
           <a:xfrm>
-            <a:off x="3566160" y="2724912"/>
-            <a:ext cx="2743200" cy="502920"/>
-          </a:xfrm>
-          <a:prstGeom prst="rect">
-            <a:avLst/>
-          </a:prstGeom>
-          <a:noFill/>
-          <a:ln/>
-        </p:spPr>
-        <p:txBody>
-          <a:bodyPr wrap="square" lIns="0" tIns="0" rIns="0" bIns="0" rtlCol="0" anchor="ctr"/>
+            <a:off x="3566160" y="2825327"/>
+            <a:ext cx="2743200" cy="457200"/>
+          </a:xfrm>
+          <a:prstGeom prst="rect">
+            <a:avLst/>
+          </a:prstGeom>
+          <a:noFill/>
+          <a:ln/>
+        </p:spPr>
+        <p:txBody>
+          <a:bodyPr wrap="square" lIns="0" tIns="0" rIns="0" bIns="0" rtlCol="0" anchor="ctr">
+            <a:normAutofit/>
+          </a:bodyPr>
           <a:lstStyle/>
           <a:p>
             <a:pPr algn="ctr" indent="0" marL="0">
@@ -30482,16 +31444,18 @@
         <p:spPr>
           <a:xfrm>
             <a:off x="6629400" y="1920240"/>
-            <a:ext cx="2743200" cy="777240"/>
-          </a:xfrm>
-          <a:prstGeom prst="rect">
-            <a:avLst/>
-          </a:prstGeom>
-          <a:noFill/>
-          <a:ln/>
-        </p:spPr>
-        <p:txBody>
-          <a:bodyPr wrap="square" lIns="0" tIns="0" rIns="0" bIns="0" rtlCol="0" anchor="ctr"/>
+            <a:ext cx="2743200" cy="877655"/>
+          </a:xfrm>
+          <a:prstGeom prst="rect">
+            <a:avLst/>
+          </a:prstGeom>
+          <a:noFill/>
+          <a:ln/>
+        </p:spPr>
+        <p:txBody>
+          <a:bodyPr wrap="square" lIns="0" tIns="0" rIns="0" bIns="0" rtlCol="0" anchor="ctr">
+            <a:normAutofit/>
+          </a:bodyPr>
           <a:lstStyle/>
           <a:p>
             <a:pPr algn="ctr" indent="0" marL="0">
@@ -30520,17 +31484,19 @@
         </p:nvSpPr>
         <p:spPr>
           <a:xfrm>
-            <a:off x="6629400" y="2724912"/>
-            <a:ext cx="2743200" cy="502920"/>
-          </a:xfrm>
-          <a:prstGeom prst="rect">
-            <a:avLst/>
-          </a:prstGeom>
-          <a:noFill/>
-          <a:ln/>
-        </p:spPr>
-        <p:txBody>
-          <a:bodyPr wrap="square" lIns="0" tIns="0" rIns="0" bIns="0" rtlCol="0" anchor="ctr"/>
+            <a:off x="6629400" y="2825327"/>
+            <a:ext cx="2743200" cy="457200"/>
+          </a:xfrm>
+          <a:prstGeom prst="rect">
+            <a:avLst/>
+          </a:prstGeom>
+          <a:noFill/>
+          <a:ln/>
+        </p:spPr>
+        <p:txBody>
+          <a:bodyPr wrap="square" lIns="0" tIns="0" rIns="0" bIns="0" rtlCol="0" anchor="ctr">
+            <a:normAutofit/>
+          </a:bodyPr>
           <a:lstStyle/>
           <a:p>
             <a:pPr algn="ctr" indent="0" marL="0">
@@ -30560,16 +31526,18 @@
         <p:spPr>
           <a:xfrm>
             <a:off x="9692640" y="1920240"/>
-            <a:ext cx="2194560" cy="777240"/>
-          </a:xfrm>
-          <a:prstGeom prst="rect">
-            <a:avLst/>
-          </a:prstGeom>
-          <a:noFill/>
-          <a:ln/>
-        </p:spPr>
-        <p:txBody>
-          <a:bodyPr wrap="square" lIns="0" tIns="0" rIns="0" bIns="0" rtlCol="0" anchor="ctr"/>
+            <a:ext cx="2194560" cy="877655"/>
+          </a:xfrm>
+          <a:prstGeom prst="rect">
+            <a:avLst/>
+          </a:prstGeom>
+          <a:noFill/>
+          <a:ln/>
+        </p:spPr>
+        <p:txBody>
+          <a:bodyPr wrap="square" lIns="0" tIns="0" rIns="0" bIns="0" rtlCol="0" anchor="ctr">
+            <a:normAutofit/>
+          </a:bodyPr>
           <a:lstStyle/>
           <a:p>
             <a:pPr algn="ctr" indent="0" marL="0">
@@ -30598,17 +31566,19 @@
         </p:nvSpPr>
         <p:spPr>
           <a:xfrm>
-            <a:off x="9692640" y="2724912"/>
-            <a:ext cx="2194560" cy="502920"/>
-          </a:xfrm>
-          <a:prstGeom prst="rect">
-            <a:avLst/>
-          </a:prstGeom>
-          <a:noFill/>
-          <a:ln/>
-        </p:spPr>
-        <p:txBody>
-          <a:bodyPr wrap="square" lIns="0" tIns="0" rIns="0" bIns="0" rtlCol="0" anchor="ctr"/>
+            <a:off x="9692640" y="2825327"/>
+            <a:ext cx="2194560" cy="457200"/>
+          </a:xfrm>
+          <a:prstGeom prst="rect">
+            <a:avLst/>
+          </a:prstGeom>
+          <a:noFill/>
+          <a:ln/>
+        </p:spPr>
+        <p:txBody>
+          <a:bodyPr wrap="square" lIns="0" tIns="0" rIns="0" bIns="0" rtlCol="0" anchor="ctr">
+            <a:normAutofit/>
+          </a:bodyPr>
           <a:lstStyle/>
           <a:p>
             <a:pPr algn="ctr" indent="0" marL="0">
@@ -30661,16 +31631,18 @@
         <p:spPr>
           <a:xfrm>
             <a:off x="502920" y="3977640"/>
-            <a:ext cx="2743200" cy="777240"/>
-          </a:xfrm>
-          <a:prstGeom prst="rect">
-            <a:avLst/>
-          </a:prstGeom>
-          <a:noFill/>
-          <a:ln/>
-        </p:spPr>
-        <p:txBody>
-          <a:bodyPr wrap="square" lIns="0" tIns="0" rIns="0" bIns="0" rtlCol="0" anchor="ctr"/>
+            <a:ext cx="2743200" cy="877655"/>
+          </a:xfrm>
+          <a:prstGeom prst="rect">
+            <a:avLst/>
+          </a:prstGeom>
+          <a:noFill/>
+          <a:ln/>
+        </p:spPr>
+        <p:txBody>
+          <a:bodyPr wrap="square" lIns="0" tIns="0" rIns="0" bIns="0" rtlCol="0" anchor="ctr">
+            <a:normAutofit/>
+          </a:bodyPr>
           <a:lstStyle/>
           <a:p>
             <a:pPr algn="ctr" indent="0" marL="0">
@@ -30685,7 +31657,7 @@
                 <a:ea typeface="微软雅黑" pitchFamily="34" charset="-122"/>
                 <a:cs typeface="微软雅黑" pitchFamily="34" charset="-120"/>
               </a:rPr>
-              <a:t>49</a:t>
+              <a:t>93</a:t>
             </a:r>
             <a:endParaRPr lang="en-US" sz="4000" dirty="0"/>
           </a:p>
@@ -30699,17 +31671,19 @@
         </p:nvSpPr>
         <p:spPr>
           <a:xfrm>
-            <a:off x="502920" y="4782312"/>
-            <a:ext cx="2743200" cy="502920"/>
-          </a:xfrm>
-          <a:prstGeom prst="rect">
-            <a:avLst/>
-          </a:prstGeom>
-          <a:noFill/>
-          <a:ln/>
-        </p:spPr>
-        <p:txBody>
-          <a:bodyPr wrap="square" lIns="0" tIns="0" rIns="0" bIns="0" rtlCol="0" anchor="ctr"/>
+            <a:off x="502920" y="4882727"/>
+            <a:ext cx="2743200" cy="457200"/>
+          </a:xfrm>
+          <a:prstGeom prst="rect">
+            <a:avLst/>
+          </a:prstGeom>
+          <a:noFill/>
+          <a:ln/>
+        </p:spPr>
+        <p:txBody>
+          <a:bodyPr wrap="square" lIns="0" tIns="0" rIns="0" bIns="0" rtlCol="0" anchor="ctr">
+            <a:normAutofit/>
+          </a:bodyPr>
           <a:lstStyle/>
           <a:p>
             <a:pPr algn="ctr" indent="0" marL="0">
@@ -30724,7 +31698,7 @@
                 <a:ea typeface="微软雅黑" pitchFamily="34" charset="-122"/>
                 <a:cs typeface="微软雅黑" pitchFamily="34" charset="-120"/>
               </a:rPr>
-              <a:t>后端 API 路由模块</a:t>
+              <a:t>后端 API 模块（api/v1 含子包）</a:t>
             </a:r>
             <a:endParaRPr lang="en-US" sz="1300" dirty="0"/>
           </a:p>
@@ -30739,16 +31713,18 @@
         <p:spPr>
           <a:xfrm>
             <a:off x="3566160" y="3977640"/>
-            <a:ext cx="2743200" cy="777240"/>
-          </a:xfrm>
-          <a:prstGeom prst="rect">
-            <a:avLst/>
-          </a:prstGeom>
-          <a:noFill/>
-          <a:ln/>
-        </p:spPr>
-        <p:txBody>
-          <a:bodyPr wrap="square" lIns="0" tIns="0" rIns="0" bIns="0" rtlCol="0" anchor="ctr"/>
+            <a:ext cx="2743200" cy="877655"/>
+          </a:xfrm>
+          <a:prstGeom prst="rect">
+            <a:avLst/>
+          </a:prstGeom>
+          <a:noFill/>
+          <a:ln/>
+        </p:spPr>
+        <p:txBody>
+          <a:bodyPr wrap="square" lIns="0" tIns="0" rIns="0" bIns="0" rtlCol="0" anchor="ctr">
+            <a:normAutofit/>
+          </a:bodyPr>
           <a:lstStyle/>
           <a:p>
             <a:pPr algn="ctr" indent="0" marL="0">
@@ -30763,7 +31739,7 @@
                 <a:ea typeface="微软雅黑" pitchFamily="34" charset="-122"/>
                 <a:cs typeface="微软雅黑" pitchFamily="34" charset="-120"/>
               </a:rPr>
-              <a:t>90</a:t>
+              <a:t>100</a:t>
             </a:r>
             <a:endParaRPr lang="en-US" sz="4000" dirty="0"/>
           </a:p>
@@ -30777,17 +31753,19 @@
         </p:nvSpPr>
         <p:spPr>
           <a:xfrm>
-            <a:off x="3566160" y="4782312"/>
-            <a:ext cx="2743200" cy="502920"/>
-          </a:xfrm>
-          <a:prstGeom prst="rect">
-            <a:avLst/>
-          </a:prstGeom>
-          <a:noFill/>
-          <a:ln/>
-        </p:spPr>
-        <p:txBody>
-          <a:bodyPr wrap="square" lIns="0" tIns="0" rIns="0" bIns="0" rtlCol="0" anchor="ctr"/>
+            <a:off x="3566160" y="4882727"/>
+            <a:ext cx="2743200" cy="457200"/>
+          </a:xfrm>
+          <a:prstGeom prst="rect">
+            <a:avLst/>
+          </a:prstGeom>
+          <a:noFill/>
+          <a:ln/>
+        </p:spPr>
+        <p:txBody>
+          <a:bodyPr wrap="square" lIns="0" tIns="0" rIns="0" bIns="0" rtlCol="0" anchor="ctr">
+            <a:normAutofit/>
+          </a:bodyPr>
           <a:lstStyle/>
           <a:p>
             <a:pPr algn="ctr" indent="0" marL="0">
@@ -30802,7 +31780,7 @@
                 <a:ea typeface="微软雅黑" pitchFamily="34" charset="-122"/>
                 <a:cs typeface="微软雅黑" pitchFamily="34" charset="-120"/>
               </a:rPr>
-              <a:t>后端服务（83 + 7 子包）</a:t>
+              <a:t>后端服务（100 + 13 子包）</a:t>
             </a:r>
             <a:endParaRPr lang="en-US" sz="1300" dirty="0"/>
           </a:p>
@@ -30817,16 +31795,18 @@
         <p:spPr>
           <a:xfrm>
             <a:off x="6629400" y="3977640"/>
-            <a:ext cx="2743200" cy="777240"/>
-          </a:xfrm>
-          <a:prstGeom prst="rect">
-            <a:avLst/>
-          </a:prstGeom>
-          <a:noFill/>
-          <a:ln/>
-        </p:spPr>
-        <p:txBody>
-          <a:bodyPr wrap="square" lIns="0" tIns="0" rIns="0" bIns="0" rtlCol="0" anchor="ctr"/>
+            <a:ext cx="2743200" cy="877655"/>
+          </a:xfrm>
+          <a:prstGeom prst="rect">
+            <a:avLst/>
+          </a:prstGeom>
+          <a:noFill/>
+          <a:ln/>
+        </p:spPr>
+        <p:txBody>
+          <a:bodyPr wrap="square" lIns="0" tIns="0" rIns="0" bIns="0" rtlCol="0" anchor="ctr">
+            <a:normAutofit/>
+          </a:bodyPr>
           <a:lstStyle/>
           <a:p>
             <a:pPr algn="ctr" indent="0" marL="0">
@@ -30855,17 +31835,19 @@
         </p:nvSpPr>
         <p:spPr>
           <a:xfrm>
-            <a:off x="6629400" y="4782312"/>
-            <a:ext cx="2743200" cy="502920"/>
-          </a:xfrm>
-          <a:prstGeom prst="rect">
-            <a:avLst/>
-          </a:prstGeom>
-          <a:noFill/>
-          <a:ln/>
-        </p:spPr>
-        <p:txBody>
-          <a:bodyPr wrap="square" lIns="0" tIns="0" rIns="0" bIns="0" rtlCol="0" anchor="ctr"/>
+            <a:off x="6629400" y="4882727"/>
+            <a:ext cx="2743200" cy="457200"/>
+          </a:xfrm>
+          <a:prstGeom prst="rect">
+            <a:avLst/>
+          </a:prstGeom>
+          <a:noFill/>
+          <a:ln/>
+        </p:spPr>
+        <p:txBody>
+          <a:bodyPr wrap="square" lIns="0" tIns="0" rIns="0" bIns="0" rtlCol="0" anchor="ctr">
+            <a:normAutofit/>
+          </a:bodyPr>
           <a:lstStyle/>
           <a:p>
             <a:pPr algn="ctr" indent="0" marL="0">
@@ -30895,16 +31877,18 @@
         <p:spPr>
           <a:xfrm>
             <a:off x="9692640" y="3977640"/>
-            <a:ext cx="2194560" cy="777240"/>
-          </a:xfrm>
-          <a:prstGeom prst="rect">
-            <a:avLst/>
-          </a:prstGeom>
-          <a:noFill/>
-          <a:ln/>
-        </p:spPr>
-        <p:txBody>
-          <a:bodyPr wrap="square" lIns="0" tIns="0" rIns="0" bIns="0" rtlCol="0" anchor="ctr"/>
+            <a:ext cx="2194560" cy="877655"/>
+          </a:xfrm>
+          <a:prstGeom prst="rect">
+            <a:avLst/>
+          </a:prstGeom>
+          <a:noFill/>
+          <a:ln/>
+        </p:spPr>
+        <p:txBody>
+          <a:bodyPr wrap="square" lIns="0" tIns="0" rIns="0" bIns="0" rtlCol="0" anchor="ctr">
+            <a:normAutofit/>
+          </a:bodyPr>
           <a:lstStyle/>
           <a:p>
             <a:pPr algn="ctr" indent="0" marL="0">
@@ -30933,17 +31917,19 @@
         </p:nvSpPr>
         <p:spPr>
           <a:xfrm>
-            <a:off x="9692640" y="4782312"/>
-            <a:ext cx="2194560" cy="502920"/>
-          </a:xfrm>
-          <a:prstGeom prst="rect">
-            <a:avLst/>
-          </a:prstGeom>
-          <a:noFill/>
-          <a:ln/>
-        </p:spPr>
-        <p:txBody>
-          <a:bodyPr wrap="square" lIns="0" tIns="0" rIns="0" bIns="0" rtlCol="0" anchor="ctr"/>
+            <a:off x="9692640" y="4882727"/>
+            <a:ext cx="2194560" cy="457200"/>
+          </a:xfrm>
+          <a:prstGeom prst="rect">
+            <a:avLst/>
+          </a:prstGeom>
+          <a:noFill/>
+          <a:ln/>
+        </p:spPr>
+        <p:txBody>
+          <a:bodyPr wrap="square" lIns="0" tIns="0" rIns="0" bIns="0" rtlCol="0" anchor="ctr">
+            <a:normAutofit/>
+          </a:bodyPr>
           <a:lstStyle/>
           <a:p>
             <a:pPr algn="ctr" indent="0" marL="0">
@@ -30982,7 +31968,9 @@
           <a:ln/>
         </p:spPr>
         <p:txBody>
-          <a:bodyPr wrap="square" lIns="0" tIns="0" rIns="0" bIns="0" rtlCol="0" anchor="ctr"/>
+          <a:bodyPr wrap="square" lIns="0" tIns="0" rIns="0" bIns="0" rtlCol="0" anchor="ctr">
+            <a:normAutofit/>
+          </a:bodyPr>
           <a:lstStyle/>
           <a:p>
             <a:pPr indent="0" marL="0">
@@ -30997,7 +31985,7 @@
                 <a:ea typeface="微软雅黑" pitchFamily="34" charset="-122"/>
                 <a:cs typeface="微软雅黑" pitchFamily="34" charset="-120"/>
               </a:rPr>
-              <a:t>数据来源：仓库实测（2026-10-02，v1.12.11）—— 后端 11,915 用例全绿 / 覆盖率 100% · 前端 6,287 用例全绿 · flake8 0 · bandit 0 中高危 · vue-tsc 0 · eslint 0 警告</a:t>
+              <a:t>数据来源：仓库实测（v1.12.11）—— 后端 11,916 用例全绿 / 覆盖率 100% · 前端 6,287 用例全绿 · flake8 0 · bandit 0 中高危 · vue-tsc 0 · eslint 0 警告</a:t>
             </a:r>
             <a:endParaRPr lang="en-US" sz="1200" dirty="0"/>
           </a:p>
@@ -31044,16 +32032,18 @@
         <p:spPr>
           <a:xfrm>
             <a:off x="502920" y="822960"/>
-            <a:ext cx="4206240" cy="3108960"/>
-          </a:xfrm>
-          <a:prstGeom prst="rect">
-            <a:avLst/>
-          </a:prstGeom>
-          <a:noFill/>
-          <a:ln/>
-        </p:spPr>
-        <p:txBody>
-          <a:bodyPr wrap="square" lIns="0" tIns="0" rIns="0" bIns="0" rtlCol="0" anchor="ctr"/>
+            <a:ext cx="4206240" cy="4315121"/>
+          </a:xfrm>
+          <a:prstGeom prst="rect">
+            <a:avLst/>
+          </a:prstGeom>
+          <a:noFill/>
+          <a:ln/>
+        </p:spPr>
+        <p:txBody>
+          <a:bodyPr wrap="square" lIns="0" tIns="0" rIns="0" bIns="0" rtlCol="0" anchor="ctr">
+            <a:normAutofit/>
+          </a:bodyPr>
           <a:lstStyle/>
           <a:p>
             <a:pPr indent="0" marL="0">
@@ -31083,16 +32073,18 @@
         <p:spPr>
           <a:xfrm>
             <a:off x="914400" y="3977640"/>
-            <a:ext cx="10332720" cy="868680"/>
-          </a:xfrm>
-          <a:prstGeom prst="rect">
-            <a:avLst/>
-          </a:prstGeom>
-          <a:noFill/>
-          <a:ln/>
-        </p:spPr>
-        <p:txBody>
-          <a:bodyPr wrap="square" lIns="0" tIns="0" rIns="0" bIns="0" rtlCol="0" anchor="ctr"/>
+            <a:ext cx="10332720" cy="877655"/>
+          </a:xfrm>
+          <a:prstGeom prst="rect">
+            <a:avLst/>
+          </a:prstGeom>
+          <a:noFill/>
+          <a:ln/>
+        </p:spPr>
+        <p:txBody>
+          <a:bodyPr wrap="square" lIns="0" tIns="0" rIns="0" bIns="0" rtlCol="0" anchor="ctr">
+            <a:normAutofit/>
+          </a:bodyPr>
           <a:lstStyle/>
           <a:p>
             <a:pPr indent="0" marL="0">
@@ -31131,7 +32123,9 @@
           <a:ln/>
         </p:spPr>
         <p:txBody>
-          <a:bodyPr wrap="square" lIns="0" tIns="0" rIns="0" bIns="0" rtlCol="0" anchor="ctr"/>
+          <a:bodyPr wrap="square" lIns="0" tIns="0" rIns="0" bIns="0" rtlCol="0" anchor="ctr">
+            <a:normAutofit/>
+          </a:bodyPr>
           <a:lstStyle/>
           <a:p>
             <a:pPr indent="0" marL="0">
@@ -31170,10 +32164,12 @@
           <a:ln/>
         </p:spPr>
         <p:txBody>
-          <a:bodyPr wrap="square" lIns="0" tIns="0" rIns="0" bIns="0" rtlCol="0" anchor="t"/>
-          <a:lstStyle/>
-          <a:p>
-            <a:pPr marL="152400" indent="-152400">
+          <a:bodyPr wrap="square" lIns="0" tIns="0" rIns="0" bIns="0" rtlCol="0" anchor="t">
+            <a:normAutofit/>
+          </a:bodyPr>
+          <a:lstStyle/>
+          <a:p>
+            <a:pPr algn="l" marL="152400" indent="-152400">
               <a:spcAft>
                 <a:spcPts val="1000"/>
               </a:spcAft>
@@ -31194,7 +32190,7 @@
             <a:endParaRPr lang="en-US" sz="1400" dirty="0"/>
           </a:p>
           <a:p>
-            <a:pPr marL="152400" indent="-152400">
+            <a:pPr algn="l" marL="152400" indent="-152400">
               <a:spcAft>
                 <a:spcPts val="1000"/>
               </a:spcAft>
@@ -31215,7 +32211,7 @@
             <a:endParaRPr lang="en-US" sz="1400" dirty="0"/>
           </a:p>
           <a:p>
-            <a:pPr marL="152400" indent="-152400">
+            <a:pPr algn="l" marL="152400" indent="-152400">
               <a:spcAft>
                 <a:spcPts val="1000"/>
               </a:spcAft>
@@ -31236,7 +32232,7 @@
             <a:endParaRPr lang="en-US" sz="1400" dirty="0"/>
           </a:p>
           <a:p>
-            <a:pPr marL="152400" indent="-152400">
+            <a:pPr algn="l" marL="152400" indent="-152400">
               <a:spcAft>
                 <a:spcPts val="1000"/>
               </a:spcAft>
@@ -31276,7 +32272,9 @@
           <a:ln/>
         </p:spPr>
         <p:txBody>
-          <a:bodyPr wrap="square" lIns="0" tIns="0" rIns="0" bIns="0" rtlCol="0" anchor="ctr"/>
+          <a:bodyPr wrap="square" lIns="0" tIns="0" rIns="0" bIns="0" rtlCol="0" anchor="ctr">
+            <a:normAutofit/>
+          </a:bodyPr>
           <a:lstStyle/>
           <a:p>
             <a:pPr algn="r" indent="0" marL="0">
@@ -31367,7 +32365,9 @@
           <a:ln/>
         </p:spPr>
         <p:txBody>
-          <a:bodyPr wrap="square" lIns="0" tIns="0" rIns="0" bIns="0" rtlCol="0" anchor="ctr"/>
+          <a:bodyPr wrap="square" lIns="0" tIns="0" rIns="0" bIns="0" rtlCol="0" anchor="ctr">
+            <a:normAutofit/>
+          </a:bodyPr>
           <a:lstStyle/>
           <a:p>
             <a:pPr indent="0" marL="0">
@@ -31406,7 +32406,9 @@
           <a:ln/>
         </p:spPr>
         <p:txBody>
-          <a:bodyPr wrap="square" lIns="0" tIns="0" rIns="0" bIns="0" rtlCol="0" anchor="ctr"/>
+          <a:bodyPr wrap="square" lIns="0" tIns="0" rIns="0" bIns="0" rtlCol="0" anchor="ctr">
+            <a:normAutofit/>
+          </a:bodyPr>
           <a:lstStyle/>
           <a:p>
             <a:pPr indent="0" marL="0">
@@ -31445,7 +32447,9 @@
           <a:ln/>
         </p:spPr>
         <p:txBody>
-          <a:bodyPr wrap="square" lIns="0" tIns="0" rIns="0" bIns="0" rtlCol="0" anchor="ctr"/>
+          <a:bodyPr wrap="square" lIns="0" tIns="0" rIns="0" bIns="0" rtlCol="0" anchor="ctr">
+            <a:normAutofit/>
+          </a:bodyPr>
           <a:lstStyle/>
           <a:p>
             <a:pPr algn="r" indent="0" marL="0">
@@ -31484,7 +32488,9 @@
           <a:ln/>
         </p:spPr>
         <p:txBody>
-          <a:bodyPr wrap="square" lIns="0" tIns="0" rIns="0" bIns="0" rtlCol="0" anchor="ctr"/>
+          <a:bodyPr wrap="square" lIns="0" tIns="0" rIns="0" bIns="0" rtlCol="0" anchor="ctr">
+            <a:normAutofit/>
+          </a:bodyPr>
           <a:lstStyle/>
           <a:p>
             <a:pPr indent="0" marL="0">
@@ -31499,7 +32505,7 @@
                 <a:ea typeface="微软雅黑" pitchFamily="34" charset="-122"/>
                 <a:cs typeface="微软雅黑" pitchFamily="34" charset="-120"/>
               </a:rPr>
-              <a:t>帮扶管理信息系统 v1.12.10</a:t>
+              <a:t>帮扶管理信息系统 v1.12.11</a:t>
             </a:r>
             <a:endParaRPr lang="en-US" sz="1050" dirty="0"/>
           </a:p>
@@ -31552,7 +32558,9 @@
           <a:ln/>
         </p:spPr>
         <p:txBody>
-          <a:bodyPr wrap="square" lIns="0" tIns="0" rIns="0" bIns="0" rtlCol="0" anchor="ctr"/>
+          <a:bodyPr wrap="square" lIns="0" tIns="0" rIns="0" bIns="0" rtlCol="0" anchor="ctr">
+            <a:normAutofit/>
+          </a:bodyPr>
           <a:lstStyle/>
           <a:p>
             <a:pPr indent="0" marL="0">
@@ -31591,7 +32599,9 @@
           <a:ln/>
         </p:spPr>
         <p:txBody>
-          <a:bodyPr wrap="square" lIns="0" tIns="0" rIns="0" bIns="0" rtlCol="0" anchor="ctr"/>
+          <a:bodyPr wrap="square" lIns="0" tIns="0" rIns="0" bIns="0" rtlCol="0" anchor="ctr">
+            <a:normAutofit/>
+          </a:bodyPr>
           <a:lstStyle/>
           <a:p>
             <a:pPr indent="0" marL="0">
@@ -31630,7 +32640,9 @@
           <a:ln/>
         </p:spPr>
         <p:txBody>
-          <a:bodyPr wrap="square" lIns="0" tIns="0" rIns="0" bIns="0" rtlCol="0" anchor="t"/>
+          <a:bodyPr wrap="square" lIns="0" tIns="0" rIns="0" bIns="0" rtlCol="0" anchor="t">
+            <a:normAutofit/>
+          </a:bodyPr>
           <a:lstStyle/>
           <a:p>
             <a:pPr algn="l" marL="152400" indent="-152400">
@@ -31765,7 +32777,9 @@
           <a:ln/>
         </p:spPr>
         <p:txBody>
-          <a:bodyPr wrap="square" lIns="0" tIns="0" rIns="0" bIns="0" rtlCol="0" anchor="ctr"/>
+          <a:bodyPr wrap="square" lIns="0" tIns="0" rIns="0" bIns="0" rtlCol="0" anchor="ctr">
+            <a:normAutofit/>
+          </a:bodyPr>
           <a:lstStyle/>
           <a:p>
             <a:pPr indent="0" marL="0">
@@ -31804,7 +32818,9 @@
           <a:ln/>
         </p:spPr>
         <p:txBody>
-          <a:bodyPr wrap="square" lIns="0" tIns="0" rIns="0" bIns="0" rtlCol="0" anchor="ctr"/>
+          <a:bodyPr wrap="square" lIns="0" tIns="0" rIns="0" bIns="0" rtlCol="0" anchor="ctr">
+            <a:normAutofit/>
+          </a:bodyPr>
           <a:lstStyle/>
           <a:p>
             <a:pPr indent="0" marL="0">
@@ -31843,7 +32859,9 @@
           <a:ln/>
         </p:spPr>
         <p:txBody>
-          <a:bodyPr wrap="square" lIns="0" tIns="0" rIns="0" bIns="0" rtlCol="0" anchor="t"/>
+          <a:bodyPr wrap="square" lIns="0" tIns="0" rIns="0" bIns="0" rtlCol="0" anchor="t">
+            <a:normAutofit/>
+          </a:bodyPr>
           <a:lstStyle/>
           <a:p>
             <a:pPr algn="l" marL="152400" indent="-152400">
@@ -31978,7 +32996,9 @@
           <a:ln/>
         </p:spPr>
         <p:txBody>
-          <a:bodyPr wrap="square" lIns="0" tIns="0" rIns="0" bIns="0" rtlCol="0" anchor="ctr"/>
+          <a:bodyPr wrap="square" lIns="0" tIns="0" rIns="0" bIns="0" rtlCol="0" anchor="ctr">
+            <a:normAutofit/>
+          </a:bodyPr>
           <a:lstStyle/>
           <a:p>
             <a:pPr indent="0" marL="0">
@@ -32017,7 +33037,9 @@
           <a:ln/>
         </p:spPr>
         <p:txBody>
-          <a:bodyPr wrap="square" lIns="0" tIns="0" rIns="0" bIns="0" rtlCol="0" anchor="ctr"/>
+          <a:bodyPr wrap="square" lIns="0" tIns="0" rIns="0" bIns="0" rtlCol="0" anchor="ctr">
+            <a:normAutofit/>
+          </a:bodyPr>
           <a:lstStyle/>
           <a:p>
             <a:pPr indent="0" marL="0">
@@ -32056,7 +33078,9 @@
           <a:ln/>
         </p:spPr>
         <p:txBody>
-          <a:bodyPr wrap="square" lIns="0" tIns="0" rIns="0" bIns="0" rtlCol="0" anchor="t"/>
+          <a:bodyPr wrap="square" lIns="0" tIns="0" rIns="0" bIns="0" rtlCol="0" anchor="t">
+            <a:normAutofit/>
+          </a:bodyPr>
           <a:lstStyle/>
           <a:p>
             <a:pPr algn="l" marL="152400" indent="-152400">
@@ -32191,7 +33215,9 @@
           <a:ln/>
         </p:spPr>
         <p:txBody>
-          <a:bodyPr wrap="square" lIns="0" tIns="0" rIns="0" bIns="0" rtlCol="0" anchor="ctr"/>
+          <a:bodyPr wrap="square" lIns="0" tIns="0" rIns="0" bIns="0" rtlCol="0" anchor="ctr">
+            <a:normAutofit/>
+          </a:bodyPr>
           <a:lstStyle/>
           <a:p>
             <a:pPr indent="0" marL="0">
@@ -32230,7 +33256,9 @@
           <a:ln/>
         </p:spPr>
         <p:txBody>
-          <a:bodyPr wrap="square" lIns="0" tIns="0" rIns="0" bIns="0" rtlCol="0" anchor="ctr"/>
+          <a:bodyPr wrap="square" lIns="0" tIns="0" rIns="0" bIns="0" rtlCol="0" anchor="ctr">
+            <a:normAutofit/>
+          </a:bodyPr>
           <a:lstStyle/>
           <a:p>
             <a:pPr indent="0" marL="0">
@@ -32269,7 +33297,9 @@
           <a:ln/>
         </p:spPr>
         <p:txBody>
-          <a:bodyPr wrap="square" lIns="0" tIns="0" rIns="0" bIns="0" rtlCol="0" anchor="t"/>
+          <a:bodyPr wrap="square" lIns="0" tIns="0" rIns="0" bIns="0" rtlCol="0" anchor="t">
+            <a:normAutofit/>
+          </a:bodyPr>
           <a:lstStyle/>
           <a:p>
             <a:pPr algn="l" marL="152400" indent="-152400">
@@ -32427,7 +33457,9 @@
           <a:ln/>
         </p:spPr>
         <p:txBody>
-          <a:bodyPr wrap="square" lIns="0" tIns="0" rIns="0" bIns="0" rtlCol="0" anchor="ctr"/>
+          <a:bodyPr wrap="square" lIns="0" tIns="0" rIns="0" bIns="0" rtlCol="0" anchor="ctr">
+            <a:normAutofit/>
+          </a:bodyPr>
           <a:lstStyle/>
           <a:p>
             <a:pPr indent="0" marL="0">
@@ -32466,7 +33498,9 @@
           <a:ln/>
         </p:spPr>
         <p:txBody>
-          <a:bodyPr wrap="square" lIns="0" tIns="0" rIns="0" bIns="0" rtlCol="0" anchor="ctr"/>
+          <a:bodyPr wrap="square" lIns="0" tIns="0" rIns="0" bIns="0" rtlCol="0" anchor="ctr">
+            <a:normAutofit/>
+          </a:bodyPr>
           <a:lstStyle/>
           <a:p>
             <a:pPr indent="0" marL="0">
@@ -32505,7 +33539,9 @@
           <a:ln/>
         </p:spPr>
         <p:txBody>
-          <a:bodyPr wrap="square" lIns="0" tIns="0" rIns="0" bIns="0" rtlCol="0" anchor="ctr"/>
+          <a:bodyPr wrap="square" lIns="0" tIns="0" rIns="0" bIns="0" rtlCol="0" anchor="ctr">
+            <a:normAutofit/>
+          </a:bodyPr>
           <a:lstStyle/>
           <a:p>
             <a:pPr algn="r" indent="0" marL="0">
@@ -32544,7 +33580,9 @@
           <a:ln/>
         </p:spPr>
         <p:txBody>
-          <a:bodyPr wrap="square" lIns="0" tIns="0" rIns="0" bIns="0" rtlCol="0" anchor="ctr"/>
+          <a:bodyPr wrap="square" lIns="0" tIns="0" rIns="0" bIns="0" rtlCol="0" anchor="ctr">
+            <a:normAutofit/>
+          </a:bodyPr>
           <a:lstStyle/>
           <a:p>
             <a:pPr indent="0" marL="0">
@@ -32559,7 +33597,7 @@
                 <a:ea typeface="微软雅黑" pitchFamily="34" charset="-122"/>
                 <a:cs typeface="微软雅黑" pitchFamily="34" charset="-120"/>
               </a:rPr>
-              <a:t>帮扶管理信息系统 v1.12.10</a:t>
+              <a:t>帮扶管理信息系统 v1.12.11</a:t>
             </a:r>
             <a:endParaRPr lang="en-US" sz="1050" dirty="0"/>
           </a:p>
@@ -32605,7 +33643,9 @@
           <a:ln/>
         </p:spPr>
         <p:txBody>
-          <a:bodyPr wrap="square" lIns="0" tIns="0" rIns="0" bIns="0" rtlCol="0" anchor="ctr"/>
+          <a:bodyPr wrap="square" lIns="0" tIns="0" rIns="0" bIns="0" rtlCol="0" anchor="ctr">
+            <a:normAutofit/>
+          </a:bodyPr>
           <a:lstStyle/>
           <a:p>
             <a:pPr indent="0" marL="0">
@@ -32644,7 +33684,9 @@
           <a:ln/>
         </p:spPr>
         <p:txBody>
-          <a:bodyPr wrap="square" lIns="0" tIns="0" rIns="0" bIns="0" rtlCol="0" anchor="ctr"/>
+          <a:bodyPr wrap="square" lIns="0" tIns="0" rIns="0" bIns="0" rtlCol="0" anchor="ctr">
+            <a:normAutofit/>
+          </a:bodyPr>
           <a:lstStyle/>
           <a:p>
             <a:pPr indent="0" marL="0">
@@ -32729,7 +33771,9 @@
           <a:ln/>
         </p:spPr>
         <p:txBody>
-          <a:bodyPr wrap="square" lIns="0" tIns="0" rIns="0" bIns="0" rtlCol="0" anchor="ctr"/>
+          <a:bodyPr wrap="square" lIns="0" tIns="0" rIns="0" bIns="0" rtlCol="0" anchor="ctr">
+            <a:normAutofit/>
+          </a:bodyPr>
           <a:lstStyle/>
           <a:p>
             <a:pPr indent="0" marL="0">
@@ -32768,7 +33812,9 @@
           <a:ln/>
         </p:spPr>
         <p:txBody>
-          <a:bodyPr wrap="square" lIns="0" tIns="0" rIns="0" bIns="0" rtlCol="0" anchor="ctr"/>
+          <a:bodyPr wrap="square" lIns="0" tIns="0" rIns="0" bIns="0" rtlCol="0" anchor="ctr">
+            <a:normAutofit/>
+          </a:bodyPr>
           <a:lstStyle/>
           <a:p>
             <a:pPr indent="0" marL="0">
@@ -32853,7 +33899,9 @@
           <a:ln/>
         </p:spPr>
         <p:txBody>
-          <a:bodyPr wrap="square" lIns="0" tIns="0" rIns="0" bIns="0" rtlCol="0" anchor="ctr"/>
+          <a:bodyPr wrap="square" lIns="0" tIns="0" rIns="0" bIns="0" rtlCol="0" anchor="ctr">
+            <a:normAutofit/>
+          </a:bodyPr>
           <a:lstStyle/>
           <a:p>
             <a:pPr indent="0" marL="0">
@@ -32892,7 +33940,9 @@
           <a:ln/>
         </p:spPr>
         <p:txBody>
-          <a:bodyPr wrap="square" lIns="0" tIns="0" rIns="0" bIns="0" rtlCol="0" anchor="ctr"/>
+          <a:bodyPr wrap="square" lIns="0" tIns="0" rIns="0" bIns="0" rtlCol="0" anchor="ctr">
+            <a:normAutofit/>
+          </a:bodyPr>
           <a:lstStyle/>
           <a:p>
             <a:pPr indent="0" marL="0">
@@ -32907,7 +33957,7 @@
                 <a:ea typeface="微软雅黑" pitchFamily="34" charset="-122"/>
                 <a:cs typeface="微软雅黑" pitchFamily="34" charset="-120"/>
               </a:rPr>
-              <a:t>49 路由 · 数据范围过滤 · 限流 · 审计中间件 · 统一信封</a:t>
+              <a:t>93 API 模块 · 数据范围过滤 · 限流 · 审计中间件 · 统一信封</a:t>
             </a:r>
             <a:endParaRPr lang="en-US" sz="1250" dirty="0"/>
           </a:p>
@@ -32977,7 +34027,9 @@
           <a:ln/>
         </p:spPr>
         <p:txBody>
-          <a:bodyPr wrap="square" lIns="0" tIns="0" rIns="0" bIns="0" rtlCol="0" anchor="ctr"/>
+          <a:bodyPr wrap="square" lIns="0" tIns="0" rIns="0" bIns="0" rtlCol="0" anchor="ctr">
+            <a:normAutofit/>
+          </a:bodyPr>
           <a:lstStyle/>
           <a:p>
             <a:pPr indent="0" marL="0">
@@ -33016,7 +34068,9 @@
           <a:ln/>
         </p:spPr>
         <p:txBody>
-          <a:bodyPr wrap="square" lIns="0" tIns="0" rIns="0" bIns="0" rtlCol="0" anchor="ctr"/>
+          <a:bodyPr wrap="square" lIns="0" tIns="0" rIns="0" bIns="0" rtlCol="0" anchor="ctr">
+            <a:normAutofit/>
+          </a:bodyPr>
           <a:lstStyle/>
           <a:p>
             <a:pPr indent="0" marL="0">
@@ -33031,7 +34085,7 @@
                 <a:ea typeface="微软雅黑" pitchFamily="34" charset="-122"/>
                 <a:cs typeface="微软雅黑" pitchFamily="34" charset="-120"/>
               </a:rPr>
-              <a:t>WAL · 37 迁移 · EncryptedText 加密列 · 备份/恢复</a:t>
+              <a:t>WAL · 45 迁移 · EncryptedText 加密列 · 备份/恢复</a:t>
             </a:r>
             <a:endParaRPr lang="en-US" sz="1250" dirty="0"/>
           </a:p>
@@ -33055,7 +34109,9 @@
           <a:ln/>
         </p:spPr>
         <p:txBody>
-          <a:bodyPr wrap="square" lIns="0" tIns="0" rIns="0" bIns="0" rtlCol="0" anchor="ctr"/>
+          <a:bodyPr wrap="square" lIns="0" tIns="0" rIns="0" bIns="0" rtlCol="0" anchor="ctr">
+            <a:normAutofit/>
+          </a:bodyPr>
           <a:lstStyle/>
           <a:p>
             <a:pPr indent="0" marL="0">

--- a/docs/帮扶管理信息系统介绍.pptx
+++ b/docs/帮扶管理信息系统介绍.pptx
@@ -249,10 +249,10 @@
                 <c:formatCode>General</c:formatCode>
                 <c:ptCount val="2"/>
                 <c:pt idx="0">
-                  <c:v>11916</c:v>
+                  <c:v>11944</c:v>
                 </c:pt>
                 <c:pt idx="1">
-                  <c:v>6287</c:v>
+                  <c:v>6304</c:v>
                 </c:pt>
               </c:numCache>
             </c:numRef>
@@ -4964,7 +4964,7 @@
                 <a:ea typeface="微软雅黑" pitchFamily="34" charset="-122"/>
                 <a:cs typeface="微软雅黑" pitchFamily="34" charset="-120"/>
               </a:rPr>
-              <a:t>V1.12.11  |  2026-10-02  |  FastAPI + Vue 3 + Electron + SQLite</a:t>
+              <a:t>V1.12.12  |  2026-10-03  |  FastAPI + Vue 3 + Electron + SQLite</a:t>
             </a:r>
             <a:endParaRPr lang="en-US" sz="1250" dirty="0"/>
           </a:p>
@@ -5180,7 +5180,7 @@
                 <a:ea typeface="微软雅黑" pitchFamily="34" charset="-122"/>
                 <a:cs typeface="微软雅黑" pitchFamily="34" charset="-120"/>
               </a:rPr>
-              <a:t>帮扶管理信息系统 v1.12.11</a:t>
+              <a:t>帮扶管理信息系统 v1.12.12</a:t>
             </a:r>
             <a:endParaRPr lang="en-US" sz="1050" dirty="0"/>
           </a:p>
@@ -5358,7 +5358,7 @@
                 <a:ea typeface="微软雅黑" pitchFamily="34" charset="-122"/>
                 <a:cs typeface="微软雅黑" pitchFamily="34" charset="-120"/>
               </a:rPr>
-              <a:t>302 个测试文件 · 6,287 个用例</a:t>
+              <a:t>302 个测试文件 · 6,304 个用例</a:t>
             </a:r>
             <a:endParaRPr lang="en-US" sz="1350" dirty="0"/>
           </a:p>
@@ -5794,7 +5794,7 @@
                 <a:ea typeface="微软雅黑" pitchFamily="34" charset="-122"/>
                 <a:cs typeface="微软雅黑" pitchFamily="34" charset="-120"/>
               </a:rPr>
-              <a:t>帮扶管理信息系统 v1.12.11</a:t>
+              <a:t>帮扶管理信息系统 v1.12.12</a:t>
             </a:r>
             <a:endParaRPr lang="en-US" sz="1050" dirty="0"/>
           </a:p>
@@ -6698,7 +6698,7 @@
                 <a:ea typeface="微软雅黑" pitchFamily="34" charset="-122"/>
                 <a:cs typeface="微软雅黑" pitchFamily="34" charset="-120"/>
               </a:rPr>
-              <a:t>帮扶管理信息系统 v1.12.11</a:t>
+              <a:t>帮扶管理信息系统 v1.12.12</a:t>
             </a:r>
             <a:endParaRPr lang="en-US" sz="1050" dirty="0"/>
           </a:p>
@@ -7312,7 +7312,7 @@
                 <a:ea typeface="微软雅黑" pitchFamily="34" charset="-122"/>
                 <a:cs typeface="微软雅黑" pitchFamily="34" charset="-120"/>
               </a:rPr>
-              <a:t>帮扶管理信息系统 v1.12.11</a:t>
+              <a:t>帮扶管理信息系统 v1.12.12</a:t>
             </a:r>
             <a:endParaRPr lang="en-US" sz="1050" dirty="0"/>
           </a:p>
@@ -8685,7 +8685,7 @@
                 <a:ea typeface="微软雅黑" pitchFamily="34" charset="-122"/>
                 <a:cs typeface="微软雅黑" pitchFamily="34" charset="-120"/>
               </a:rPr>
-              <a:t>帮扶管理信息系统 v1.12.11</a:t>
+              <a:t>帮扶管理信息系统 v1.12.12</a:t>
             </a:r>
             <a:endParaRPr lang="en-US" sz="1050" dirty="0"/>
           </a:p>
@@ -9854,7 +9854,7 @@
                 <a:ea typeface="微软雅黑" pitchFamily="34" charset="-122"/>
                 <a:cs typeface="微软雅黑" pitchFamily="34" charset="-120"/>
               </a:rPr>
-              <a:t>帮扶管理信息系统 v1.12.11</a:t>
+              <a:t>帮扶管理信息系统 v1.12.12</a:t>
             </a:r>
             <a:endParaRPr lang="en-US" sz="1050" dirty="0"/>
           </a:p>
@@ -10468,7 +10468,7 @@
                 <a:ea typeface="微软雅黑" pitchFamily="34" charset="-122"/>
                 <a:cs typeface="微软雅黑" pitchFamily="34" charset="-120"/>
               </a:rPr>
-              <a:t>帮扶管理信息系统 v1.12.11</a:t>
+              <a:t>帮扶管理信息系统 v1.12.12</a:t>
             </a:r>
             <a:endParaRPr lang="en-US" sz="1050" dirty="0"/>
           </a:p>
@@ -11296,7 +11296,7 @@
                 <a:ea typeface="微软雅黑" pitchFamily="34" charset="-122"/>
                 <a:cs typeface="微软雅黑" pitchFamily="34" charset="-120"/>
               </a:rPr>
-              <a:t>帮扶管理信息系统 v1.12.11</a:t>
+              <a:t>帮扶管理信息系统 v1.12.12</a:t>
             </a:r>
             <a:endParaRPr lang="en-US" sz="1050" dirty="0"/>
           </a:p>
@@ -12007,7 +12007,7 @@
                 <a:ea typeface="微软雅黑" pitchFamily="34" charset="-122"/>
                 <a:cs typeface="微软雅黑" pitchFamily="34" charset="-120"/>
               </a:rPr>
-              <a:t>帮扶管理信息系统 v1.12.11</a:t>
+              <a:t>帮扶管理信息系统 v1.12.12</a:t>
             </a:r>
             <a:endParaRPr lang="en-US" sz="1050" dirty="0"/>
           </a:p>
@@ -14144,7 +14144,7 @@
                 <a:ea typeface="微软雅黑" pitchFamily="34" charset="-122"/>
                 <a:cs typeface="微软雅黑" pitchFamily="34" charset="-120"/>
               </a:rPr>
-              <a:t>18,203 项自动化测试 · CI/CD · 依赖自检</a:t>
+              <a:t>18,248 项自动化测试 · CI/CD · 依赖自检</a:t>
             </a:r>
             <a:endParaRPr lang="en-US" sz="1200" dirty="0"/>
           </a:p>
@@ -14505,7 +14505,7 @@
                 <a:ea typeface="微软雅黑" pitchFamily="34" charset="-122"/>
                 <a:cs typeface="微软雅黑" pitchFamily="34" charset="-120"/>
               </a:rPr>
-              <a:t>帮扶管理信息系统 v1.12.11</a:t>
+              <a:t>帮扶管理信息系统 v1.12.12</a:t>
             </a:r>
             <a:endParaRPr lang="en-US" sz="1050" dirty="0"/>
           </a:p>
@@ -15119,7 +15119,7 @@
                 <a:ea typeface="微软雅黑" pitchFamily="34" charset="-122"/>
                 <a:cs typeface="微软雅黑" pitchFamily="34" charset="-120"/>
               </a:rPr>
-              <a:t>帮扶管理信息系统 v1.12.11</a:t>
+              <a:t>帮扶管理信息系统 v1.12.12</a:t>
             </a:r>
             <a:endParaRPr lang="en-US" sz="1050" dirty="0"/>
           </a:p>
@@ -15790,7 +15790,7 @@
                 <a:ea typeface="微软雅黑" pitchFamily="34" charset="-122"/>
                 <a:cs typeface="微软雅黑" pitchFamily="34" charset="-120"/>
               </a:rPr>
-              <a:t>帮扶管理信息系统 v1.12.11</a:t>
+              <a:t>帮扶管理信息系统 v1.12.12</a:t>
             </a:r>
             <a:endParaRPr lang="en-US" sz="1050" dirty="0"/>
           </a:p>
@@ -16473,7 +16473,7 @@
                 <a:ea typeface="微软雅黑" pitchFamily="34" charset="-122"/>
                 <a:cs typeface="微软雅黑" pitchFamily="34" charset="-120"/>
               </a:rPr>
-              <a:t>帮扶管理信息系统 v1.12.11</a:t>
+              <a:t>帮扶管理信息系统 v1.12.12</a:t>
             </a:r>
             <a:endParaRPr lang="en-US" sz="1050" dirty="0"/>
           </a:p>
@@ -17355,7 +17355,7 @@
                 <a:ea typeface="微软雅黑" pitchFamily="34" charset="-122"/>
                 <a:cs typeface="微软雅黑" pitchFamily="34" charset="-120"/>
               </a:rPr>
-              <a:t>帮扶管理信息系统 v1.12.11</a:t>
+              <a:t>帮扶管理信息系统 v1.12.12</a:t>
             </a:r>
             <a:endParaRPr lang="en-US" sz="1050" dirty="0"/>
           </a:p>
@@ -18541,7 +18541,7 @@
                 <a:ea typeface="微软雅黑" pitchFamily="34" charset="-122"/>
                 <a:cs typeface="微软雅黑" pitchFamily="34" charset="-120"/>
               </a:rPr>
-              <a:t>帮扶管理信息系统 v1.12.11</a:t>
+              <a:t>帮扶管理信息系统 v1.12.12</a:t>
             </a:r>
             <a:endParaRPr lang="en-US" sz="1050" dirty="0"/>
           </a:p>
@@ -19540,7 +19540,7 @@
                 <a:ea typeface="微软雅黑" pitchFamily="34" charset="-122"/>
                 <a:cs typeface="微软雅黑" pitchFamily="34" charset="-120"/>
               </a:rPr>
-              <a:t>帮扶管理信息系统 v1.12.11</a:t>
+              <a:t>帮扶管理信息系统 v1.12.12</a:t>
             </a:r>
             <a:endParaRPr lang="en-US" sz="1050" dirty="0"/>
           </a:p>
@@ -20369,7 +20369,7 @@
                 <a:ea typeface="微软雅黑" pitchFamily="34" charset="-122"/>
                 <a:cs typeface="微软雅黑" pitchFamily="34" charset="-120"/>
               </a:rPr>
-              <a:t>帮扶管理信息系统 v1.12.11</a:t>
+              <a:t>帮扶管理信息系统 v1.12.12</a:t>
             </a:r>
             <a:endParaRPr lang="en-US" sz="1050" dirty="0"/>
           </a:p>
@@ -21247,7 +21247,7 @@
                 <a:ea typeface="微软雅黑" pitchFamily="34" charset="-122"/>
                 <a:cs typeface="微软雅黑" pitchFamily="34" charset="-120"/>
               </a:rPr>
-              <a:t>帮扶管理信息系统 v1.12.11</a:t>
+              <a:t>帮扶管理信息系统 v1.12.12</a:t>
             </a:r>
             <a:endParaRPr lang="en-US" sz="1050" dirty="0"/>
           </a:p>
@@ -22379,7 +22379,7 @@
                 <a:ea typeface="微软雅黑" pitchFamily="34" charset="-122"/>
                 <a:cs typeface="微软雅黑" pitchFamily="34" charset="-120"/>
               </a:rPr>
-              <a:t>帮扶管理信息系统 v1.12.11</a:t>
+              <a:t>帮扶管理信息系统 v1.12.12</a:t>
             </a:r>
             <a:endParaRPr lang="en-US" sz="1050" dirty="0"/>
           </a:p>
@@ -23013,7 +23013,7 @@
                 <a:ea typeface="微软雅黑" pitchFamily="34" charset="-122"/>
                 <a:cs typeface="微软雅黑" pitchFamily="34" charset="-120"/>
               </a:rPr>
-              <a:t>18,203 项自动化测试（后端 11,916 + 前端 6,287）</a:t>
+              <a:t>18,248 项自动化测试（后端 11,944 + 前端 6,304）</a:t>
             </a:r>
             <a:endParaRPr lang="en-US" sz="1400" dirty="0"/>
           </a:p>
@@ -23375,7 +23375,7 @@
                 <a:ea typeface="微软雅黑" pitchFamily="34" charset="-122"/>
                 <a:cs typeface="微软雅黑" pitchFamily="34" charset="-120"/>
               </a:rPr>
-              <a:t>帮扶管理信息系统 v1.12.11</a:t>
+              <a:t>帮扶管理信息系统 v1.12.12</a:t>
             </a:r>
             <a:endParaRPr lang="en-US" sz="1050" dirty="0"/>
           </a:p>
@@ -23432,7 +23432,7 @@
                 <a:ea typeface="微软雅黑" pitchFamily="34" charset="-122"/>
                 <a:cs typeface="微软雅黑" pitchFamily="34" charset="-120"/>
               </a:rPr>
-              <a:t>数据来源：v1.12.11 仓库实测 · 后端 11,916 / 前端 6,287 用例 · 覆盖率 100%</a:t>
+              <a:t>数据来源：v1.12.12 仓库实测 · 后端 11,944 / 前端 6,304 用例 · 覆盖率 100%</a:t>
             </a:r>
             <a:endParaRPr lang="en-US" sz="1100" dirty="0"/>
           </a:p>
@@ -23889,7 +23889,7 @@
                 <a:ea typeface="微软雅黑" pitchFamily="34" charset="-122"/>
                 <a:cs typeface="微软雅黑" pitchFamily="34" charset="-120"/>
               </a:rPr>
-              <a:t>帮扶管理信息系统 v1.12.11</a:t>
+              <a:t>帮扶管理信息系统 v1.12.12</a:t>
             </a:r>
             <a:endParaRPr lang="en-US" sz="1050" dirty="0"/>
           </a:p>
@@ -24562,7 +24562,7 @@
                 <a:ea typeface="微软雅黑" pitchFamily="34" charset="-122"/>
                 <a:cs typeface="微软雅黑" pitchFamily="34" charset="-120"/>
               </a:rPr>
-              <a:t>帮扶管理信息系统 v1.12.11</a:t>
+              <a:t>帮扶管理信息系统 v1.12.12</a:t>
             </a:r>
             <a:endParaRPr lang="en-US" sz="1050" dirty="0"/>
           </a:p>
@@ -25176,7 +25176,7 @@
                 <a:ea typeface="微软雅黑" pitchFamily="34" charset="-122"/>
                 <a:cs typeface="微软雅黑" pitchFamily="34" charset="-120"/>
               </a:rPr>
-              <a:t>帮扶管理信息系统 v1.12.11</a:t>
+              <a:t>帮扶管理信息系统 v1.12.12</a:t>
             </a:r>
             <a:endParaRPr lang="en-US" sz="1050" dirty="0"/>
           </a:p>
@@ -26115,7 +26115,7 @@
                 <a:ea typeface="微软雅黑" pitchFamily="34" charset="-122"/>
                 <a:cs typeface="微软雅黑" pitchFamily="34" charset="-120"/>
               </a:rPr>
-              <a:t>帮扶管理信息系统 v1.12.11</a:t>
+              <a:t>帮扶管理信息系统 v1.12.12</a:t>
             </a:r>
             <a:endParaRPr lang="en-US" sz="1050" dirty="0"/>
           </a:p>
@@ -27185,7 +27185,7 @@
                 <a:ea typeface="微软雅黑" pitchFamily="34" charset="-122"/>
                 <a:cs typeface="微软雅黑" pitchFamily="34" charset="-120"/>
               </a:rPr>
-              <a:t>帮扶管理信息系统 v1.12.11</a:t>
+              <a:t>帮扶管理信息系统 v1.12.12</a:t>
             </a:r>
             <a:endParaRPr lang="en-US" sz="1050" dirty="0"/>
           </a:p>
@@ -27820,7 +27820,7 @@
                 <a:ea typeface="微软雅黑" pitchFamily="34" charset="-122"/>
                 <a:cs typeface="微软雅黑" pitchFamily="34" charset="-120"/>
               </a:rPr>
-              <a:t>帮扶管理信息系统 v1.12.11</a:t>
+              <a:t>帮扶管理信息系统 v1.12.12</a:t>
             </a:r>
             <a:endParaRPr lang="en-US" sz="1050" dirty="0"/>
           </a:p>
@@ -28628,7 +28628,7 @@
                 <a:ea typeface="微软雅黑" pitchFamily="34" charset="-122"/>
                 <a:cs typeface="微软雅黑" pitchFamily="34" charset="-120"/>
               </a:rPr>
-              <a:t>净效果：11,916 后端用例（覆盖率 100%）+ 6,287 前端用例全绿；Windows x64 与麒麟 ARM64 两个离线安装包由 GitHub Actions 全自动构建并发布 Release</a:t>
+              <a:t>净效果：11,944 后端用例（覆盖率 100%）+ 6,304 前端用例全绿；Windows x64 与麒麟 ARM64 两个离线安装包由 GitHub Actions 全自动构建并发布 Release</a:t>
             </a:r>
             <a:endParaRPr lang="en-US" sz="1350" dirty="0"/>
           </a:p>
@@ -28844,7 +28844,7 @@
                 <a:ea typeface="微软雅黑" pitchFamily="34" charset="-122"/>
                 <a:cs typeface="微软雅黑" pitchFamily="34" charset="-120"/>
               </a:rPr>
-              <a:t>帮扶管理信息系统 v1.12.11</a:t>
+              <a:t>帮扶管理信息系统 v1.12.12</a:t>
             </a:r>
             <a:endParaRPr lang="en-US" sz="1050" dirty="0"/>
           </a:p>
@@ -29407,7 +29407,7 @@
                 <a:ea typeface="微软雅黑" pitchFamily="34" charset="-122"/>
                 <a:cs typeface="微软雅黑" pitchFamily="34" charset="-120"/>
               </a:rPr>
-              <a:t>帮扶管理信息系统 v1.12.11</a:t>
+              <a:t>帮扶管理信息系统 v1.12.12</a:t>
             </a:r>
             <a:endParaRPr lang="en-US" sz="1050" dirty="0"/>
           </a:p>
@@ -30268,7 +30268,7 @@
                 <a:ea typeface="微软雅黑" pitchFamily="34" charset="-122"/>
                 <a:cs typeface="微软雅黑" pitchFamily="34" charset="-120"/>
               </a:rPr>
-              <a:t>帮扶管理信息系统 v1.12.11  ·  仓库：github.com/lzh745200/MRRS  ·  完整文档见 docs/ 目录</a:t>
+              <a:t>帮扶管理信息系统 v1.12.12  ·  仓库：github.com/lzh745200/MRRS  ·  完整文档见 docs/ 目录</a:t>
             </a:r>
             <a:endParaRPr lang="en-US" sz="1350" dirty="0"/>
           </a:p>
@@ -30309,7 +30309,7 @@
                 <a:ea typeface="微软雅黑" pitchFamily="34" charset="-122"/>
                 <a:cs typeface="微软雅黑" pitchFamily="34" charset="-120"/>
               </a:rPr>
-              <a:t>11,916 后端用例（覆盖率 100%）+ 6,287 前端用例 全绿守护 · Windows x64 / 麒麟 ARM64 双平台离线交付</a:t>
+              <a:t>11,944 后端用例（覆盖率 100%）+ 6,304 前端用例 全绿守护 · Windows x64 / 麒麟 ARM64 双平台离线交付</a:t>
             </a:r>
             <a:endParaRPr lang="en-US" sz="1350" dirty="0"/>
           </a:p>
@@ -30525,7 +30525,7 @@
                 <a:ea typeface="微软雅黑" pitchFamily="34" charset="-122"/>
                 <a:cs typeface="微软雅黑" pitchFamily="34" charset="-120"/>
               </a:rPr>
-              <a:t>帮扶管理信息系统 v1.12.11</a:t>
+              <a:t>帮扶管理信息系统 v1.12.12</a:t>
             </a:r>
             <a:endParaRPr lang="en-US" sz="1050" dirty="0"/>
           </a:p>
@@ -31265,7 +31265,7 @@
                 <a:ea typeface="微软雅黑" pitchFamily="34" charset="-122"/>
                 <a:cs typeface="微软雅黑" pitchFamily="34" charset="-120"/>
               </a:rPr>
-              <a:t>帮扶管理信息系统 v1.12.11</a:t>
+              <a:t>帮扶管理信息系统 v1.12.12</a:t>
             </a:r>
             <a:endParaRPr lang="en-US" sz="1050" dirty="0"/>
           </a:p>
@@ -31306,7 +31306,7 @@
                 <a:ea typeface="微软雅黑" pitchFamily="34" charset="-122"/>
                 <a:cs typeface="微软雅黑" pitchFamily="34" charset="-120"/>
               </a:rPr>
-              <a:t>11,916</a:t>
+              <a:t>11,944</a:t>
             </a:r>
             <a:endParaRPr lang="en-US" sz="4000" dirty="0"/>
           </a:p>
@@ -31388,7 +31388,7 @@
                 <a:ea typeface="微软雅黑" pitchFamily="34" charset="-122"/>
                 <a:cs typeface="微软雅黑" pitchFamily="34" charset="-120"/>
               </a:rPr>
-              <a:t>6,287</a:t>
+              <a:t>6,304</a:t>
             </a:r>
             <a:endParaRPr lang="en-US" sz="4000" dirty="0"/>
           </a:p>
@@ -31985,7 +31985,7 @@
                 <a:ea typeface="微软雅黑" pitchFamily="34" charset="-122"/>
                 <a:cs typeface="微软雅黑" pitchFamily="34" charset="-120"/>
               </a:rPr>
-              <a:t>数据来源：仓库实测（v1.12.11）—— 后端 11,916 用例全绿 / 覆盖率 100% · 前端 6,287 用例全绿 · flake8 0 · bandit 0 中高危 · vue-tsc 0 · eslint 0 警告</a:t>
+              <a:t>数据来源：仓库实测（v1.12.12）—— 后端 11,944 用例全绿 / 覆盖率 100% · 前端 6,304 用例全绿 · flake8 0 · bandit 0 中高危 · vue-tsc 0 · eslint 0 警告</a:t>
             </a:r>
             <a:endParaRPr lang="en-US" sz="1200" dirty="0"/>
           </a:p>
@@ -32505,7 +32505,7 @@
                 <a:ea typeface="微软雅黑" pitchFamily="34" charset="-122"/>
                 <a:cs typeface="微软雅黑" pitchFamily="34" charset="-120"/>
               </a:rPr>
-              <a:t>帮扶管理信息系统 v1.12.11</a:t>
+              <a:t>帮扶管理信息系统 v1.12.12</a:t>
             </a:r>
             <a:endParaRPr lang="en-US" sz="1050" dirty="0"/>
           </a:p>
@@ -33597,7 +33597,7 @@
                 <a:ea typeface="微软雅黑" pitchFamily="34" charset="-122"/>
                 <a:cs typeface="微软雅黑" pitchFamily="34" charset="-120"/>
               </a:rPr>
-              <a:t>帮扶管理信息系统 v1.12.11</a:t>
+              <a:t>帮扶管理信息系统 v1.12.12</a:t>
             </a:r>
             <a:endParaRPr lang="en-US" sz="1050" dirty="0"/>
           </a:p>

--- a/docs/帮扶管理信息系统介绍.pptx
+++ b/docs/帮扶管理信息系统介绍.pptx
@@ -249,7 +249,7 @@
                 <c:formatCode>General</c:formatCode>
                 <c:ptCount val="2"/>
                 <c:pt idx="0">
-                  <c:v>11944</c:v>
+                  <c:v>11948</c:v>
                 </c:pt>
                 <c:pt idx="1">
                   <c:v>6304</c:v>
@@ -4964,7 +4964,7 @@
                 <a:ea typeface="微软雅黑" pitchFamily="34" charset="-122"/>
                 <a:cs typeface="微软雅黑" pitchFamily="34" charset="-120"/>
               </a:rPr>
-              <a:t>V1.12.12  |  2026-10-03  |  FastAPI + Vue 3 + Electron + SQLite</a:t>
+              <a:t>V1.12.13  |  2026-10-05  |  FastAPI + Vue 3 + Electron + SQLite</a:t>
             </a:r>
             <a:endParaRPr lang="en-US" sz="1250" dirty="0"/>
           </a:p>
@@ -5180,7 +5180,7 @@
                 <a:ea typeface="微软雅黑" pitchFamily="34" charset="-122"/>
                 <a:cs typeface="微软雅黑" pitchFamily="34" charset="-120"/>
               </a:rPr>
-              <a:t>帮扶管理信息系统 v1.12.12</a:t>
+              <a:t>帮扶管理信息系统 v1.12.13</a:t>
             </a:r>
             <a:endParaRPr lang="en-US" sz="1050" dirty="0"/>
           </a:p>
@@ -5794,7 +5794,7 @@
                 <a:ea typeface="微软雅黑" pitchFamily="34" charset="-122"/>
                 <a:cs typeface="微软雅黑" pitchFamily="34" charset="-120"/>
               </a:rPr>
-              <a:t>帮扶管理信息系统 v1.12.12</a:t>
+              <a:t>帮扶管理信息系统 v1.12.13</a:t>
             </a:r>
             <a:endParaRPr lang="en-US" sz="1050" dirty="0"/>
           </a:p>
@@ -6698,7 +6698,7 @@
                 <a:ea typeface="微软雅黑" pitchFamily="34" charset="-122"/>
                 <a:cs typeface="微软雅黑" pitchFamily="34" charset="-120"/>
               </a:rPr>
-              <a:t>帮扶管理信息系统 v1.12.12</a:t>
+              <a:t>帮扶管理信息系统 v1.12.13</a:t>
             </a:r>
             <a:endParaRPr lang="en-US" sz="1050" dirty="0"/>
           </a:p>
@@ -7312,7 +7312,7 @@
                 <a:ea typeface="微软雅黑" pitchFamily="34" charset="-122"/>
                 <a:cs typeface="微软雅黑" pitchFamily="34" charset="-120"/>
               </a:rPr>
-              <a:t>帮扶管理信息系统 v1.12.12</a:t>
+              <a:t>帮扶管理信息系统 v1.12.13</a:t>
             </a:r>
             <a:endParaRPr lang="en-US" sz="1050" dirty="0"/>
           </a:p>
@@ -8685,7 +8685,7 @@
                 <a:ea typeface="微软雅黑" pitchFamily="34" charset="-122"/>
                 <a:cs typeface="微软雅黑" pitchFamily="34" charset="-120"/>
               </a:rPr>
-              <a:t>帮扶管理信息系统 v1.12.12</a:t>
+              <a:t>帮扶管理信息系统 v1.12.13</a:t>
             </a:r>
             <a:endParaRPr lang="en-US" sz="1050" dirty="0"/>
           </a:p>
@@ -9854,7 +9854,7 @@
                 <a:ea typeface="微软雅黑" pitchFamily="34" charset="-122"/>
                 <a:cs typeface="微软雅黑" pitchFamily="34" charset="-120"/>
               </a:rPr>
-              <a:t>帮扶管理信息系统 v1.12.12</a:t>
+              <a:t>帮扶管理信息系统 v1.12.13</a:t>
             </a:r>
             <a:endParaRPr lang="en-US" sz="1050" dirty="0"/>
           </a:p>
@@ -10468,7 +10468,7 @@
                 <a:ea typeface="微软雅黑" pitchFamily="34" charset="-122"/>
                 <a:cs typeface="微软雅黑" pitchFamily="34" charset="-120"/>
               </a:rPr>
-              <a:t>帮扶管理信息系统 v1.12.12</a:t>
+              <a:t>帮扶管理信息系统 v1.12.13</a:t>
             </a:r>
             <a:endParaRPr lang="en-US" sz="1050" dirty="0"/>
           </a:p>
@@ -11296,7 +11296,7 @@
                 <a:ea typeface="微软雅黑" pitchFamily="34" charset="-122"/>
                 <a:cs typeface="微软雅黑" pitchFamily="34" charset="-120"/>
               </a:rPr>
-              <a:t>帮扶管理信息系统 v1.12.12</a:t>
+              <a:t>帮扶管理信息系统 v1.12.13</a:t>
             </a:r>
             <a:endParaRPr lang="en-US" sz="1050" dirty="0"/>
           </a:p>
@@ -12007,7 +12007,7 @@
                 <a:ea typeface="微软雅黑" pitchFamily="34" charset="-122"/>
                 <a:cs typeface="微软雅黑" pitchFamily="34" charset="-120"/>
               </a:rPr>
-              <a:t>帮扶管理信息系统 v1.12.12</a:t>
+              <a:t>帮扶管理信息系统 v1.12.13</a:t>
             </a:r>
             <a:endParaRPr lang="en-US" sz="1050" dirty="0"/>
           </a:p>
@@ -14144,7 +14144,7 @@
                 <a:ea typeface="微软雅黑" pitchFamily="34" charset="-122"/>
                 <a:cs typeface="微软雅黑" pitchFamily="34" charset="-120"/>
               </a:rPr>
-              <a:t>18,248 项自动化测试 · CI/CD · 依赖自检</a:t>
+              <a:t>18,252 项自动化测试 · CI/CD · 依赖自检</a:t>
             </a:r>
             <a:endParaRPr lang="en-US" sz="1200" dirty="0"/>
           </a:p>
@@ -14505,7 +14505,7 @@
                 <a:ea typeface="微软雅黑" pitchFamily="34" charset="-122"/>
                 <a:cs typeface="微软雅黑" pitchFamily="34" charset="-120"/>
               </a:rPr>
-              <a:t>帮扶管理信息系统 v1.12.12</a:t>
+              <a:t>帮扶管理信息系统 v1.12.13</a:t>
             </a:r>
             <a:endParaRPr lang="en-US" sz="1050" dirty="0"/>
           </a:p>
@@ -15119,7 +15119,7 @@
                 <a:ea typeface="微软雅黑" pitchFamily="34" charset="-122"/>
                 <a:cs typeface="微软雅黑" pitchFamily="34" charset="-120"/>
               </a:rPr>
-              <a:t>帮扶管理信息系统 v1.12.12</a:t>
+              <a:t>帮扶管理信息系统 v1.12.13</a:t>
             </a:r>
             <a:endParaRPr lang="en-US" sz="1050" dirty="0"/>
           </a:p>
@@ -15790,7 +15790,7 @@
                 <a:ea typeface="微软雅黑" pitchFamily="34" charset="-122"/>
                 <a:cs typeface="微软雅黑" pitchFamily="34" charset="-120"/>
               </a:rPr>
-              <a:t>帮扶管理信息系统 v1.12.12</a:t>
+              <a:t>帮扶管理信息系统 v1.12.13</a:t>
             </a:r>
             <a:endParaRPr lang="en-US" sz="1050" dirty="0"/>
           </a:p>
@@ -16473,7 +16473,7 @@
                 <a:ea typeface="微软雅黑" pitchFamily="34" charset="-122"/>
                 <a:cs typeface="微软雅黑" pitchFamily="34" charset="-120"/>
               </a:rPr>
-              <a:t>帮扶管理信息系统 v1.12.12</a:t>
+              <a:t>帮扶管理信息系统 v1.12.13</a:t>
             </a:r>
             <a:endParaRPr lang="en-US" sz="1050" dirty="0"/>
           </a:p>
@@ -17355,7 +17355,7 @@
                 <a:ea typeface="微软雅黑" pitchFamily="34" charset="-122"/>
                 <a:cs typeface="微软雅黑" pitchFamily="34" charset="-120"/>
               </a:rPr>
-              <a:t>帮扶管理信息系统 v1.12.12</a:t>
+              <a:t>帮扶管理信息系统 v1.12.13</a:t>
             </a:r>
             <a:endParaRPr lang="en-US" sz="1050" dirty="0"/>
           </a:p>
@@ -18541,7 +18541,7 @@
                 <a:ea typeface="微软雅黑" pitchFamily="34" charset="-122"/>
                 <a:cs typeface="微软雅黑" pitchFamily="34" charset="-120"/>
               </a:rPr>
-              <a:t>帮扶管理信息系统 v1.12.12</a:t>
+              <a:t>帮扶管理信息系统 v1.12.13</a:t>
             </a:r>
             <a:endParaRPr lang="en-US" sz="1050" dirty="0"/>
           </a:p>
@@ -19540,7 +19540,7 @@
                 <a:ea typeface="微软雅黑" pitchFamily="34" charset="-122"/>
                 <a:cs typeface="微软雅黑" pitchFamily="34" charset="-120"/>
               </a:rPr>
-              <a:t>帮扶管理信息系统 v1.12.12</a:t>
+              <a:t>帮扶管理信息系统 v1.12.13</a:t>
             </a:r>
             <a:endParaRPr lang="en-US" sz="1050" dirty="0"/>
           </a:p>
@@ -20369,7 +20369,7 @@
                 <a:ea typeface="微软雅黑" pitchFamily="34" charset="-122"/>
                 <a:cs typeface="微软雅黑" pitchFamily="34" charset="-120"/>
               </a:rPr>
-              <a:t>帮扶管理信息系统 v1.12.12</a:t>
+              <a:t>帮扶管理信息系统 v1.12.13</a:t>
             </a:r>
             <a:endParaRPr lang="en-US" sz="1050" dirty="0"/>
           </a:p>
@@ -21247,7 +21247,7 @@
                 <a:ea typeface="微软雅黑" pitchFamily="34" charset="-122"/>
                 <a:cs typeface="微软雅黑" pitchFamily="34" charset="-120"/>
               </a:rPr>
-              <a:t>帮扶管理信息系统 v1.12.12</a:t>
+              <a:t>帮扶管理信息系统 v1.12.13</a:t>
             </a:r>
             <a:endParaRPr lang="en-US" sz="1050" dirty="0"/>
           </a:p>
@@ -22379,7 +22379,7 @@
                 <a:ea typeface="微软雅黑" pitchFamily="34" charset="-122"/>
                 <a:cs typeface="微软雅黑" pitchFamily="34" charset="-120"/>
               </a:rPr>
-              <a:t>帮扶管理信息系统 v1.12.12</a:t>
+              <a:t>帮扶管理信息系统 v1.12.13</a:t>
             </a:r>
             <a:endParaRPr lang="en-US" sz="1050" dirty="0"/>
           </a:p>
@@ -23013,7 +23013,7 @@
                 <a:ea typeface="微软雅黑" pitchFamily="34" charset="-122"/>
                 <a:cs typeface="微软雅黑" pitchFamily="34" charset="-120"/>
               </a:rPr>
-              <a:t>18,248 项自动化测试（后端 11,944 + 前端 6,304）</a:t>
+              <a:t>18,252 项自动化测试（后端 11,948 + 前端 6,304）</a:t>
             </a:r>
             <a:endParaRPr lang="en-US" sz="1400" dirty="0"/>
           </a:p>
@@ -23375,7 +23375,7 @@
                 <a:ea typeface="微软雅黑" pitchFamily="34" charset="-122"/>
                 <a:cs typeface="微软雅黑" pitchFamily="34" charset="-120"/>
               </a:rPr>
-              <a:t>帮扶管理信息系统 v1.12.12</a:t>
+              <a:t>帮扶管理信息系统 v1.12.13</a:t>
             </a:r>
             <a:endParaRPr lang="en-US" sz="1050" dirty="0"/>
           </a:p>
@@ -23432,7 +23432,7 @@
                 <a:ea typeface="微软雅黑" pitchFamily="34" charset="-122"/>
                 <a:cs typeface="微软雅黑" pitchFamily="34" charset="-120"/>
               </a:rPr>
-              <a:t>数据来源：v1.12.12 仓库实测 · 后端 11,944 / 前端 6,304 用例 · 覆盖率 100%</a:t>
+              <a:t>数据来源：v1.12.13 仓库实测 · 后端 11,948 / 前端 6,304 用例 · 覆盖率 100%</a:t>
             </a:r>
             <a:endParaRPr lang="en-US" sz="1100" dirty="0"/>
           </a:p>
@@ -23889,7 +23889,7 @@
                 <a:ea typeface="微软雅黑" pitchFamily="34" charset="-122"/>
                 <a:cs typeface="微软雅黑" pitchFamily="34" charset="-120"/>
               </a:rPr>
-              <a:t>帮扶管理信息系统 v1.12.12</a:t>
+              <a:t>帮扶管理信息系统 v1.12.13</a:t>
             </a:r>
             <a:endParaRPr lang="en-US" sz="1050" dirty="0"/>
           </a:p>
@@ -24562,7 +24562,7 @@
                 <a:ea typeface="微软雅黑" pitchFamily="34" charset="-122"/>
                 <a:cs typeface="微软雅黑" pitchFamily="34" charset="-120"/>
               </a:rPr>
-              <a:t>帮扶管理信息系统 v1.12.12</a:t>
+              <a:t>帮扶管理信息系统 v1.12.13</a:t>
             </a:r>
             <a:endParaRPr lang="en-US" sz="1050" dirty="0"/>
           </a:p>
@@ -25176,7 +25176,7 @@
                 <a:ea typeface="微软雅黑" pitchFamily="34" charset="-122"/>
                 <a:cs typeface="微软雅黑" pitchFamily="34" charset="-120"/>
               </a:rPr>
-              <a:t>帮扶管理信息系统 v1.12.12</a:t>
+              <a:t>帮扶管理信息系统 v1.12.13</a:t>
             </a:r>
             <a:endParaRPr lang="en-US" sz="1050" dirty="0"/>
           </a:p>
@@ -26115,7 +26115,7 @@
                 <a:ea typeface="微软雅黑" pitchFamily="34" charset="-122"/>
                 <a:cs typeface="微软雅黑" pitchFamily="34" charset="-120"/>
               </a:rPr>
-              <a:t>帮扶管理信息系统 v1.12.12</a:t>
+              <a:t>帮扶管理信息系统 v1.12.13</a:t>
             </a:r>
             <a:endParaRPr lang="en-US" sz="1050" dirty="0"/>
           </a:p>
@@ -27185,7 +27185,7 @@
                 <a:ea typeface="微软雅黑" pitchFamily="34" charset="-122"/>
                 <a:cs typeface="微软雅黑" pitchFamily="34" charset="-120"/>
               </a:rPr>
-              <a:t>帮扶管理信息系统 v1.12.12</a:t>
+              <a:t>帮扶管理信息系统 v1.12.13</a:t>
             </a:r>
             <a:endParaRPr lang="en-US" sz="1050" dirty="0"/>
           </a:p>
@@ -27820,7 +27820,7 @@
                 <a:ea typeface="微软雅黑" pitchFamily="34" charset="-122"/>
                 <a:cs typeface="微软雅黑" pitchFamily="34" charset="-120"/>
               </a:rPr>
-              <a:t>帮扶管理信息系统 v1.12.12</a:t>
+              <a:t>帮扶管理信息系统 v1.12.13</a:t>
             </a:r>
             <a:endParaRPr lang="en-US" sz="1050" dirty="0"/>
           </a:p>
@@ -28628,7 +28628,7 @@
                 <a:ea typeface="微软雅黑" pitchFamily="34" charset="-122"/>
                 <a:cs typeface="微软雅黑" pitchFamily="34" charset="-120"/>
               </a:rPr>
-              <a:t>净效果：11,944 后端用例（覆盖率 100%）+ 6,304 前端用例全绿；Windows x64 与麒麟 ARM64 两个离线安装包由 GitHub Actions 全自动构建并发布 Release</a:t>
+              <a:t>净效果：11,948 后端用例（覆盖率 100%）+ 6,304 前端用例全绿；Windows x64 与麒麟 ARM64 两个离线安装包由 GitHub Actions 全自动构建并发布 Release</a:t>
             </a:r>
             <a:endParaRPr lang="en-US" sz="1350" dirty="0"/>
           </a:p>
@@ -28844,7 +28844,7 @@
                 <a:ea typeface="微软雅黑" pitchFamily="34" charset="-122"/>
                 <a:cs typeface="微软雅黑" pitchFamily="34" charset="-120"/>
               </a:rPr>
-              <a:t>帮扶管理信息系统 v1.12.12</a:t>
+              <a:t>帮扶管理信息系统 v1.12.13</a:t>
             </a:r>
             <a:endParaRPr lang="en-US" sz="1050" dirty="0"/>
           </a:p>
@@ -29407,7 +29407,7 @@
                 <a:ea typeface="微软雅黑" pitchFamily="34" charset="-122"/>
                 <a:cs typeface="微软雅黑" pitchFamily="34" charset="-120"/>
               </a:rPr>
-              <a:t>帮扶管理信息系统 v1.12.12</a:t>
+              <a:t>帮扶管理信息系统 v1.12.13</a:t>
             </a:r>
             <a:endParaRPr lang="en-US" sz="1050" dirty="0"/>
           </a:p>
@@ -30268,7 +30268,7 @@
                 <a:ea typeface="微软雅黑" pitchFamily="34" charset="-122"/>
                 <a:cs typeface="微软雅黑" pitchFamily="34" charset="-120"/>
               </a:rPr>
-              <a:t>帮扶管理信息系统 v1.12.12  ·  仓库：github.com/lzh745200/MRRS  ·  完整文档见 docs/ 目录</a:t>
+              <a:t>帮扶管理信息系统 v1.12.13  ·  仓库：github.com/lzh745200/MRRS  ·  完整文档见 docs/ 目录</a:t>
             </a:r>
             <a:endParaRPr lang="en-US" sz="1350" dirty="0"/>
           </a:p>
@@ -30309,7 +30309,7 @@
                 <a:ea typeface="微软雅黑" pitchFamily="34" charset="-122"/>
                 <a:cs typeface="微软雅黑" pitchFamily="34" charset="-120"/>
               </a:rPr>
-              <a:t>11,944 后端用例（覆盖率 100%）+ 6,304 前端用例 全绿守护 · Windows x64 / 麒麟 ARM64 双平台离线交付</a:t>
+              <a:t>11,948 后端用例（覆盖率 100%）+ 6,304 前端用例 全绿守护 · Windows x64 / 麒麟 ARM64 双平台离线交付</a:t>
             </a:r>
             <a:endParaRPr lang="en-US" sz="1350" dirty="0"/>
           </a:p>
@@ -30525,7 +30525,7 @@
                 <a:ea typeface="微软雅黑" pitchFamily="34" charset="-122"/>
                 <a:cs typeface="微软雅黑" pitchFamily="34" charset="-120"/>
               </a:rPr>
-              <a:t>帮扶管理信息系统 v1.12.12</a:t>
+              <a:t>帮扶管理信息系统 v1.12.13</a:t>
             </a:r>
             <a:endParaRPr lang="en-US" sz="1050" dirty="0"/>
           </a:p>
@@ -31265,7 +31265,7 @@
                 <a:ea typeface="微软雅黑" pitchFamily="34" charset="-122"/>
                 <a:cs typeface="微软雅黑" pitchFamily="34" charset="-120"/>
               </a:rPr>
-              <a:t>帮扶管理信息系统 v1.12.12</a:t>
+              <a:t>帮扶管理信息系统 v1.12.13</a:t>
             </a:r>
             <a:endParaRPr lang="en-US" sz="1050" dirty="0"/>
           </a:p>
@@ -31306,7 +31306,7 @@
                 <a:ea typeface="微软雅黑" pitchFamily="34" charset="-122"/>
                 <a:cs typeface="微软雅黑" pitchFamily="34" charset="-120"/>
               </a:rPr>
-              <a:t>11,944</a:t>
+              <a:t>11,948</a:t>
             </a:r>
             <a:endParaRPr lang="en-US" sz="4000" dirty="0"/>
           </a:p>
@@ -31985,7 +31985,7 @@
                 <a:ea typeface="微软雅黑" pitchFamily="34" charset="-122"/>
                 <a:cs typeface="微软雅黑" pitchFamily="34" charset="-120"/>
               </a:rPr>
-              <a:t>数据来源：仓库实测（v1.12.12）—— 后端 11,944 用例全绿 / 覆盖率 100% · 前端 6,304 用例全绿 · flake8 0 · bandit 0 中高危 · vue-tsc 0 · eslint 0 警告</a:t>
+              <a:t>数据来源：仓库实测（v1.12.13）—— 后端 11,948 用例全绿 / 覆盖率 100% · 前端 6,304 用例全绿 · flake8 0 · bandit 0 中高危 · vue-tsc 0 · eslint 0 警告</a:t>
             </a:r>
             <a:endParaRPr lang="en-US" sz="1200" dirty="0"/>
           </a:p>
@@ -32505,7 +32505,7 @@
                 <a:ea typeface="微软雅黑" pitchFamily="34" charset="-122"/>
                 <a:cs typeface="微软雅黑" pitchFamily="34" charset="-120"/>
               </a:rPr>
-              <a:t>帮扶管理信息系统 v1.12.12</a:t>
+              <a:t>帮扶管理信息系统 v1.12.13</a:t>
             </a:r>
             <a:endParaRPr lang="en-US" sz="1050" dirty="0"/>
           </a:p>
@@ -33597,7 +33597,7 @@
                 <a:ea typeface="微软雅黑" pitchFamily="34" charset="-122"/>
                 <a:cs typeface="微软雅黑" pitchFamily="34" charset="-120"/>
               </a:rPr>
-              <a:t>帮扶管理信息系统 v1.12.12</a:t>
+              <a:t>帮扶管理信息系统 v1.12.13</a:t>
             </a:r>
             <a:endParaRPr lang="en-US" sz="1050" dirty="0"/>
           </a:p>

--- a/docs/帮扶管理信息系统介绍.pptx
+++ b/docs/帮扶管理信息系统介绍.pptx
@@ -249,10 +249,10 @@
                 <c:formatCode>General</c:formatCode>
                 <c:ptCount val="2"/>
                 <c:pt idx="0">
-                  <c:v>11948</c:v>
+                  <c:v>12005</c:v>
                 </c:pt>
                 <c:pt idx="1">
-                  <c:v>6304</c:v>
+                  <c:v>6315</c:v>
                 </c:pt>
               </c:numCache>
             </c:numRef>
@@ -4964,7 +4964,7 @@
                 <a:ea typeface="微软雅黑" pitchFamily="34" charset="-122"/>
                 <a:cs typeface="微软雅黑" pitchFamily="34" charset="-120"/>
               </a:rPr>
-              <a:t>V1.12.13  |  2026-10-05  |  FastAPI + Vue 3 + Electron + SQLite</a:t>
+              <a:t>V1.12.14  |  2026-10-06  |  FastAPI + Vue 3 + Electron + SQLite</a:t>
             </a:r>
             <a:endParaRPr lang="en-US" sz="1250" dirty="0"/>
           </a:p>
@@ -5180,7 +5180,7 @@
                 <a:ea typeface="微软雅黑" pitchFamily="34" charset="-122"/>
                 <a:cs typeface="微软雅黑" pitchFamily="34" charset="-120"/>
               </a:rPr>
-              <a:t>帮扶管理信息系统 v1.12.13</a:t>
+              <a:t>帮扶管理信息系统 v1.12.14</a:t>
             </a:r>
             <a:endParaRPr lang="en-US" sz="1050" dirty="0"/>
           </a:p>
@@ -5358,7 +5358,7 @@
                 <a:ea typeface="微软雅黑" pitchFamily="34" charset="-122"/>
                 <a:cs typeface="微软雅黑" pitchFamily="34" charset="-120"/>
               </a:rPr>
-              <a:t>302 个测试文件 · 6,304 个用例</a:t>
+              <a:t>302 个测试文件 · 6,315 个用例</a:t>
             </a:r>
             <a:endParaRPr lang="en-US" sz="1350" dirty="0"/>
           </a:p>
@@ -5794,7 +5794,7 @@
                 <a:ea typeface="微软雅黑" pitchFamily="34" charset="-122"/>
                 <a:cs typeface="微软雅黑" pitchFamily="34" charset="-120"/>
               </a:rPr>
-              <a:t>帮扶管理信息系统 v1.12.13</a:t>
+              <a:t>帮扶管理信息系统 v1.12.14</a:t>
             </a:r>
             <a:endParaRPr lang="en-US" sz="1050" dirty="0"/>
           </a:p>
@@ -6698,7 +6698,7 @@
                 <a:ea typeface="微软雅黑" pitchFamily="34" charset="-122"/>
                 <a:cs typeface="微软雅黑" pitchFamily="34" charset="-120"/>
               </a:rPr>
-              <a:t>帮扶管理信息系统 v1.12.13</a:t>
+              <a:t>帮扶管理信息系统 v1.12.14</a:t>
             </a:r>
             <a:endParaRPr lang="en-US" sz="1050" dirty="0"/>
           </a:p>
@@ -7312,7 +7312,7 @@
                 <a:ea typeface="微软雅黑" pitchFamily="34" charset="-122"/>
                 <a:cs typeface="微软雅黑" pitchFamily="34" charset="-120"/>
               </a:rPr>
-              <a:t>帮扶管理信息系统 v1.12.13</a:t>
+              <a:t>帮扶管理信息系统 v1.12.14</a:t>
             </a:r>
             <a:endParaRPr lang="en-US" sz="1050" dirty="0"/>
           </a:p>
@@ -8685,7 +8685,7 @@
                 <a:ea typeface="微软雅黑" pitchFamily="34" charset="-122"/>
                 <a:cs typeface="微软雅黑" pitchFamily="34" charset="-120"/>
               </a:rPr>
-              <a:t>帮扶管理信息系统 v1.12.13</a:t>
+              <a:t>帮扶管理信息系统 v1.12.14</a:t>
             </a:r>
             <a:endParaRPr lang="en-US" sz="1050" dirty="0"/>
           </a:p>
@@ -9854,7 +9854,7 @@
                 <a:ea typeface="微软雅黑" pitchFamily="34" charset="-122"/>
                 <a:cs typeface="微软雅黑" pitchFamily="34" charset="-120"/>
               </a:rPr>
-              <a:t>帮扶管理信息系统 v1.12.13</a:t>
+              <a:t>帮扶管理信息系统 v1.12.14</a:t>
             </a:r>
             <a:endParaRPr lang="en-US" sz="1050" dirty="0"/>
           </a:p>
@@ -10468,7 +10468,7 @@
                 <a:ea typeface="微软雅黑" pitchFamily="34" charset="-122"/>
                 <a:cs typeface="微软雅黑" pitchFamily="34" charset="-120"/>
               </a:rPr>
-              <a:t>帮扶管理信息系统 v1.12.13</a:t>
+              <a:t>帮扶管理信息系统 v1.12.14</a:t>
             </a:r>
             <a:endParaRPr lang="en-US" sz="1050" dirty="0"/>
           </a:p>
@@ -11296,7 +11296,7 @@
                 <a:ea typeface="微软雅黑" pitchFamily="34" charset="-122"/>
                 <a:cs typeface="微软雅黑" pitchFamily="34" charset="-120"/>
               </a:rPr>
-              <a:t>帮扶管理信息系统 v1.12.13</a:t>
+              <a:t>帮扶管理信息系统 v1.12.14</a:t>
             </a:r>
             <a:endParaRPr lang="en-US" sz="1050" dirty="0"/>
           </a:p>
@@ -12007,7 +12007,7 @@
                 <a:ea typeface="微软雅黑" pitchFamily="34" charset="-122"/>
                 <a:cs typeface="微软雅黑" pitchFamily="34" charset="-120"/>
               </a:rPr>
-              <a:t>帮扶管理信息系统 v1.12.13</a:t>
+              <a:t>帮扶管理信息系统 v1.12.14</a:t>
             </a:r>
             <a:endParaRPr lang="en-US" sz="1050" dirty="0"/>
           </a:p>
@@ -14144,7 +14144,7 @@
                 <a:ea typeface="微软雅黑" pitchFamily="34" charset="-122"/>
                 <a:cs typeface="微软雅黑" pitchFamily="34" charset="-120"/>
               </a:rPr>
-              <a:t>18,252 项自动化测试 · CI/CD · 依赖自检</a:t>
+              <a:t>18,320 项自动化测试 · CI/CD · 依赖自检</a:t>
             </a:r>
             <a:endParaRPr lang="en-US" sz="1200" dirty="0"/>
           </a:p>
@@ -14505,7 +14505,7 @@
                 <a:ea typeface="微软雅黑" pitchFamily="34" charset="-122"/>
                 <a:cs typeface="微软雅黑" pitchFamily="34" charset="-120"/>
               </a:rPr>
-              <a:t>帮扶管理信息系统 v1.12.13</a:t>
+              <a:t>帮扶管理信息系统 v1.12.14</a:t>
             </a:r>
             <a:endParaRPr lang="en-US" sz="1050" dirty="0"/>
           </a:p>
@@ -15119,7 +15119,7 @@
                 <a:ea typeface="微软雅黑" pitchFamily="34" charset="-122"/>
                 <a:cs typeface="微软雅黑" pitchFamily="34" charset="-120"/>
               </a:rPr>
-              <a:t>帮扶管理信息系统 v1.12.13</a:t>
+              <a:t>帮扶管理信息系统 v1.12.14</a:t>
             </a:r>
             <a:endParaRPr lang="en-US" sz="1050" dirty="0"/>
           </a:p>
@@ -15790,7 +15790,7 @@
                 <a:ea typeface="微软雅黑" pitchFamily="34" charset="-122"/>
                 <a:cs typeface="微软雅黑" pitchFamily="34" charset="-120"/>
               </a:rPr>
-              <a:t>帮扶管理信息系统 v1.12.13</a:t>
+              <a:t>帮扶管理信息系统 v1.12.14</a:t>
             </a:r>
             <a:endParaRPr lang="en-US" sz="1050" dirty="0"/>
           </a:p>
@@ -16473,7 +16473,7 @@
                 <a:ea typeface="微软雅黑" pitchFamily="34" charset="-122"/>
                 <a:cs typeface="微软雅黑" pitchFamily="34" charset="-120"/>
               </a:rPr>
-              <a:t>帮扶管理信息系统 v1.12.13</a:t>
+              <a:t>帮扶管理信息系统 v1.12.14</a:t>
             </a:r>
             <a:endParaRPr lang="en-US" sz="1050" dirty="0"/>
           </a:p>
@@ -17355,7 +17355,7 @@
                 <a:ea typeface="微软雅黑" pitchFamily="34" charset="-122"/>
                 <a:cs typeface="微软雅黑" pitchFamily="34" charset="-120"/>
               </a:rPr>
-              <a:t>帮扶管理信息系统 v1.12.13</a:t>
+              <a:t>帮扶管理信息系统 v1.12.14</a:t>
             </a:r>
             <a:endParaRPr lang="en-US" sz="1050" dirty="0"/>
           </a:p>
@@ -18541,7 +18541,7 @@
                 <a:ea typeface="微软雅黑" pitchFamily="34" charset="-122"/>
                 <a:cs typeface="微软雅黑" pitchFamily="34" charset="-120"/>
               </a:rPr>
-              <a:t>帮扶管理信息系统 v1.12.13</a:t>
+              <a:t>帮扶管理信息系统 v1.12.14</a:t>
             </a:r>
             <a:endParaRPr lang="en-US" sz="1050" dirty="0"/>
           </a:p>
@@ -19540,7 +19540,7 @@
                 <a:ea typeface="微软雅黑" pitchFamily="34" charset="-122"/>
                 <a:cs typeface="微软雅黑" pitchFamily="34" charset="-120"/>
               </a:rPr>
-              <a:t>帮扶管理信息系统 v1.12.13</a:t>
+              <a:t>帮扶管理信息系统 v1.12.14</a:t>
             </a:r>
             <a:endParaRPr lang="en-US" sz="1050" dirty="0"/>
           </a:p>
@@ -20369,7 +20369,7 @@
                 <a:ea typeface="微软雅黑" pitchFamily="34" charset="-122"/>
                 <a:cs typeface="微软雅黑" pitchFamily="34" charset="-120"/>
               </a:rPr>
-              <a:t>帮扶管理信息系统 v1.12.13</a:t>
+              <a:t>帮扶管理信息系统 v1.12.14</a:t>
             </a:r>
             <a:endParaRPr lang="en-US" sz="1050" dirty="0"/>
           </a:p>
@@ -21247,7 +21247,7 @@
                 <a:ea typeface="微软雅黑" pitchFamily="34" charset="-122"/>
                 <a:cs typeface="微软雅黑" pitchFamily="34" charset="-120"/>
               </a:rPr>
-              <a:t>帮扶管理信息系统 v1.12.13</a:t>
+              <a:t>帮扶管理信息系统 v1.12.14</a:t>
             </a:r>
             <a:endParaRPr lang="en-US" sz="1050" dirty="0"/>
           </a:p>
@@ -22379,7 +22379,7 @@
                 <a:ea typeface="微软雅黑" pitchFamily="34" charset="-122"/>
                 <a:cs typeface="微软雅黑" pitchFamily="34" charset="-120"/>
               </a:rPr>
-              <a:t>帮扶管理信息系统 v1.12.13</a:t>
+              <a:t>帮扶管理信息系统 v1.12.14</a:t>
             </a:r>
             <a:endParaRPr lang="en-US" sz="1050" dirty="0"/>
           </a:p>
@@ -23013,7 +23013,7 @@
                 <a:ea typeface="微软雅黑" pitchFamily="34" charset="-122"/>
                 <a:cs typeface="微软雅黑" pitchFamily="34" charset="-120"/>
               </a:rPr>
-              <a:t>18,252 项自动化测试（后端 11,948 + 前端 6,304）</a:t>
+              <a:t>18,320 项自动化测试（后端 12,005 + 前端 6,315）</a:t>
             </a:r>
             <a:endParaRPr lang="en-US" sz="1400" dirty="0"/>
           </a:p>
@@ -23375,7 +23375,7 @@
                 <a:ea typeface="微软雅黑" pitchFamily="34" charset="-122"/>
                 <a:cs typeface="微软雅黑" pitchFamily="34" charset="-120"/>
               </a:rPr>
-              <a:t>帮扶管理信息系统 v1.12.13</a:t>
+              <a:t>帮扶管理信息系统 v1.12.14</a:t>
             </a:r>
             <a:endParaRPr lang="en-US" sz="1050" dirty="0"/>
           </a:p>
@@ -23432,7 +23432,7 @@
                 <a:ea typeface="微软雅黑" pitchFamily="34" charset="-122"/>
                 <a:cs typeface="微软雅黑" pitchFamily="34" charset="-120"/>
               </a:rPr>
-              <a:t>数据来源：v1.12.13 仓库实测 · 后端 11,948 / 前端 6,304 用例 · 覆盖率 100%</a:t>
+              <a:t>数据来源：v1.12.14 仓库实测 · 后端 12,005 / 前端 6,315 用例 · 覆盖率 100%</a:t>
             </a:r>
             <a:endParaRPr lang="en-US" sz="1100" dirty="0"/>
           </a:p>
@@ -23889,7 +23889,7 @@
                 <a:ea typeface="微软雅黑" pitchFamily="34" charset="-122"/>
                 <a:cs typeface="微软雅黑" pitchFamily="34" charset="-120"/>
               </a:rPr>
-              <a:t>帮扶管理信息系统 v1.12.13</a:t>
+              <a:t>帮扶管理信息系统 v1.12.14</a:t>
             </a:r>
             <a:endParaRPr lang="en-US" sz="1050" dirty="0"/>
           </a:p>
@@ -24562,7 +24562,7 @@
                 <a:ea typeface="微软雅黑" pitchFamily="34" charset="-122"/>
                 <a:cs typeface="微软雅黑" pitchFamily="34" charset="-120"/>
               </a:rPr>
-              <a:t>帮扶管理信息系统 v1.12.13</a:t>
+              <a:t>帮扶管理信息系统 v1.12.14</a:t>
             </a:r>
             <a:endParaRPr lang="en-US" sz="1050" dirty="0"/>
           </a:p>
@@ -25176,7 +25176,7 @@
                 <a:ea typeface="微软雅黑" pitchFamily="34" charset="-122"/>
                 <a:cs typeface="微软雅黑" pitchFamily="34" charset="-120"/>
               </a:rPr>
-              <a:t>帮扶管理信息系统 v1.12.13</a:t>
+              <a:t>帮扶管理信息系统 v1.12.14</a:t>
             </a:r>
             <a:endParaRPr lang="en-US" sz="1050" dirty="0"/>
           </a:p>
@@ -26115,7 +26115,7 @@
                 <a:ea typeface="微软雅黑" pitchFamily="34" charset="-122"/>
                 <a:cs typeface="微软雅黑" pitchFamily="34" charset="-120"/>
               </a:rPr>
-              <a:t>帮扶管理信息系统 v1.12.13</a:t>
+              <a:t>帮扶管理信息系统 v1.12.14</a:t>
             </a:r>
             <a:endParaRPr lang="en-US" sz="1050" dirty="0"/>
           </a:p>
@@ -27185,7 +27185,7 @@
                 <a:ea typeface="微软雅黑" pitchFamily="34" charset="-122"/>
                 <a:cs typeface="微软雅黑" pitchFamily="34" charset="-120"/>
               </a:rPr>
-              <a:t>帮扶管理信息系统 v1.12.13</a:t>
+              <a:t>帮扶管理信息系统 v1.12.14</a:t>
             </a:r>
             <a:endParaRPr lang="en-US" sz="1050" dirty="0"/>
           </a:p>
@@ -27820,7 +27820,7 @@
                 <a:ea typeface="微软雅黑" pitchFamily="34" charset="-122"/>
                 <a:cs typeface="微软雅黑" pitchFamily="34" charset="-120"/>
               </a:rPr>
-              <a:t>帮扶管理信息系统 v1.12.13</a:t>
+              <a:t>帮扶管理信息系统 v1.12.14</a:t>
             </a:r>
             <a:endParaRPr lang="en-US" sz="1050" dirty="0"/>
           </a:p>
@@ -28628,7 +28628,7 @@
                 <a:ea typeface="微软雅黑" pitchFamily="34" charset="-122"/>
                 <a:cs typeface="微软雅黑" pitchFamily="34" charset="-120"/>
               </a:rPr>
-              <a:t>净效果：11,948 后端用例（覆盖率 100%）+ 6,304 前端用例全绿；Windows x64 与麒麟 ARM64 两个离线安装包由 GitHub Actions 全自动构建并发布 Release</a:t>
+              <a:t>净效果：12,005 后端用例（覆盖率 100%）+ 6,315 前端用例全绿；Windows x64 与麒麟 ARM64 两个离线安装包由 GitHub Actions 全自动构建并发布 Release</a:t>
             </a:r>
             <a:endParaRPr lang="en-US" sz="1350" dirty="0"/>
           </a:p>
@@ -28844,7 +28844,7 @@
                 <a:ea typeface="微软雅黑" pitchFamily="34" charset="-122"/>
                 <a:cs typeface="微软雅黑" pitchFamily="34" charset="-120"/>
               </a:rPr>
-              <a:t>帮扶管理信息系统 v1.12.13</a:t>
+              <a:t>帮扶管理信息系统 v1.12.14</a:t>
             </a:r>
             <a:endParaRPr lang="en-US" sz="1050" dirty="0"/>
           </a:p>
@@ -29407,7 +29407,7 @@
                 <a:ea typeface="微软雅黑" pitchFamily="34" charset="-122"/>
                 <a:cs typeface="微软雅黑" pitchFamily="34" charset="-120"/>
               </a:rPr>
-              <a:t>帮扶管理信息系统 v1.12.13</a:t>
+              <a:t>帮扶管理信息系统 v1.12.14</a:t>
             </a:r>
             <a:endParaRPr lang="en-US" sz="1050" dirty="0"/>
           </a:p>
@@ -30268,7 +30268,7 @@
                 <a:ea typeface="微软雅黑" pitchFamily="34" charset="-122"/>
                 <a:cs typeface="微软雅黑" pitchFamily="34" charset="-120"/>
               </a:rPr>
-              <a:t>帮扶管理信息系统 v1.12.13  ·  仓库：github.com/lzh745200/MRRS  ·  完整文档见 docs/ 目录</a:t>
+              <a:t>帮扶管理信息系统 v1.12.14  ·  仓库：github.com/lzh745200/MRRS  ·  完整文档见 docs/ 目录</a:t>
             </a:r>
             <a:endParaRPr lang="en-US" sz="1350" dirty="0"/>
           </a:p>
@@ -30309,7 +30309,7 @@
                 <a:ea typeface="微软雅黑" pitchFamily="34" charset="-122"/>
                 <a:cs typeface="微软雅黑" pitchFamily="34" charset="-120"/>
               </a:rPr>
-              <a:t>11,948 后端用例（覆盖率 100%）+ 6,304 前端用例 全绿守护 · Windows x64 / 麒麟 ARM64 双平台离线交付</a:t>
+              <a:t>12,005 后端用例（覆盖率 100%）+ 6,315 前端用例 全绿守护 · Windows x64 / 麒麟 ARM64 双平台离线交付</a:t>
             </a:r>
             <a:endParaRPr lang="en-US" sz="1350" dirty="0"/>
           </a:p>
@@ -30525,7 +30525,7 @@
                 <a:ea typeface="微软雅黑" pitchFamily="34" charset="-122"/>
                 <a:cs typeface="微软雅黑" pitchFamily="34" charset="-120"/>
               </a:rPr>
-              <a:t>帮扶管理信息系统 v1.12.13</a:t>
+              <a:t>帮扶管理信息系统 v1.12.14</a:t>
             </a:r>
             <a:endParaRPr lang="en-US" sz="1050" dirty="0"/>
           </a:p>
@@ -31265,7 +31265,7 @@
                 <a:ea typeface="微软雅黑" pitchFamily="34" charset="-122"/>
                 <a:cs typeface="微软雅黑" pitchFamily="34" charset="-120"/>
               </a:rPr>
-              <a:t>帮扶管理信息系统 v1.12.13</a:t>
+              <a:t>帮扶管理信息系统 v1.12.14</a:t>
             </a:r>
             <a:endParaRPr lang="en-US" sz="1050" dirty="0"/>
           </a:p>
@@ -31306,7 +31306,7 @@
                 <a:ea typeface="微软雅黑" pitchFamily="34" charset="-122"/>
                 <a:cs typeface="微软雅黑" pitchFamily="34" charset="-120"/>
               </a:rPr>
-              <a:t>11,948</a:t>
+              <a:t>12,005</a:t>
             </a:r>
             <a:endParaRPr lang="en-US" sz="4000" dirty="0"/>
           </a:p>
@@ -31388,7 +31388,7 @@
                 <a:ea typeface="微软雅黑" pitchFamily="34" charset="-122"/>
                 <a:cs typeface="微软雅黑" pitchFamily="34" charset="-120"/>
               </a:rPr>
-              <a:t>6,304</a:t>
+              <a:t>6,315</a:t>
             </a:r>
             <a:endParaRPr lang="en-US" sz="4000" dirty="0"/>
           </a:p>
@@ -31985,7 +31985,7 @@
                 <a:ea typeface="微软雅黑" pitchFamily="34" charset="-122"/>
                 <a:cs typeface="微软雅黑" pitchFamily="34" charset="-120"/>
               </a:rPr>
-              <a:t>数据来源：仓库实测（v1.12.13）—— 后端 11,948 用例全绿 / 覆盖率 100% · 前端 6,304 用例全绿 · flake8 0 · bandit 0 中高危 · vue-tsc 0 · eslint 0 警告</a:t>
+              <a:t>数据来源：仓库实测（v1.12.14）—— 后端 12,005 用例全绿 / 覆盖率 100% · 前端 6,315 用例全绿 · flake8 0 · bandit 0 中高危 · vue-tsc 0 · eslint 0 警告</a:t>
             </a:r>
             <a:endParaRPr lang="en-US" sz="1200" dirty="0"/>
           </a:p>
@@ -32505,7 +32505,7 @@
                 <a:ea typeface="微软雅黑" pitchFamily="34" charset="-122"/>
                 <a:cs typeface="微软雅黑" pitchFamily="34" charset="-120"/>
               </a:rPr>
-              <a:t>帮扶管理信息系统 v1.12.13</a:t>
+              <a:t>帮扶管理信息系统 v1.12.14</a:t>
             </a:r>
             <a:endParaRPr lang="en-US" sz="1050" dirty="0"/>
           </a:p>
@@ -33597,7 +33597,7 @@
                 <a:ea typeface="微软雅黑" pitchFamily="34" charset="-122"/>
                 <a:cs typeface="微软雅黑" pitchFamily="34" charset="-120"/>
               </a:rPr>
-              <a:t>帮扶管理信息系统 v1.12.13</a:t>
+              <a:t>帮扶管理信息系统 v1.12.14</a:t>
             </a:r>
             <a:endParaRPr lang="en-US" sz="1050" dirty="0"/>
           </a:p>

--- a/docs/帮扶管理信息系统介绍.pptx
+++ b/docs/帮扶管理信息系统介绍.pptx
@@ -252,7 +252,7 @@
                   <c:v>12005</c:v>
                 </c:pt>
                 <c:pt idx="1">
-                  <c:v>6315</c:v>
+                  <c:v>6330</c:v>
                 </c:pt>
               </c:numCache>
             </c:numRef>
@@ -5358,7 +5358,7 @@
                 <a:ea typeface="微软雅黑" pitchFamily="34" charset="-122"/>
                 <a:cs typeface="微软雅黑" pitchFamily="34" charset="-120"/>
               </a:rPr>
-              <a:t>302 个测试文件 · 6,315 个用例</a:t>
+              <a:t>302 个测试文件 · 6,330 个用例</a:t>
             </a:r>
             <a:endParaRPr lang="en-US" sz="1350" dirty="0"/>
           </a:p>
@@ -14144,7 +14144,7 @@
                 <a:ea typeface="微软雅黑" pitchFamily="34" charset="-122"/>
                 <a:cs typeface="微软雅黑" pitchFamily="34" charset="-120"/>
               </a:rPr>
-              <a:t>18,320 项自动化测试 · CI/CD · 依赖自检</a:t>
+              <a:t>18,335 项自动化测试 · CI/CD · 依赖自检</a:t>
             </a:r>
             <a:endParaRPr lang="en-US" sz="1200" dirty="0"/>
           </a:p>
@@ -23013,7 +23013,7 @@
                 <a:ea typeface="微软雅黑" pitchFamily="34" charset="-122"/>
                 <a:cs typeface="微软雅黑" pitchFamily="34" charset="-120"/>
               </a:rPr>
-              <a:t>18,320 项自动化测试（后端 12,005 + 前端 6,315）</a:t>
+              <a:t>18,335 项自动化测试（后端 12,005 + 前端 6,330）</a:t>
             </a:r>
             <a:endParaRPr lang="en-US" sz="1400" dirty="0"/>
           </a:p>
@@ -23432,7 +23432,7 @@
                 <a:ea typeface="微软雅黑" pitchFamily="34" charset="-122"/>
                 <a:cs typeface="微软雅黑" pitchFamily="34" charset="-120"/>
               </a:rPr>
-              <a:t>数据来源：v1.12.14 仓库实测 · 后端 12,005 / 前端 6,315 用例 · 覆盖率 100%</a:t>
+              <a:t>数据来源：v1.12.14 仓库实测 · 后端 12,005 / 前端 6,330 用例 · 覆盖率 100%</a:t>
             </a:r>
             <a:endParaRPr lang="en-US" sz="1100" dirty="0"/>
           </a:p>
@@ -28628,7 +28628,7 @@
                 <a:ea typeface="微软雅黑" pitchFamily="34" charset="-122"/>
                 <a:cs typeface="微软雅黑" pitchFamily="34" charset="-120"/>
               </a:rPr>
-              <a:t>净效果：12,005 后端用例（覆盖率 100%）+ 6,315 前端用例全绿；Windows x64 与麒麟 ARM64 两个离线安装包由 GitHub Actions 全自动构建并发布 Release</a:t>
+              <a:t>净效果：12,005 后端用例（覆盖率 100%）+ 6,330 前端用例全绿；Windows x64 与麒麟 ARM64 两个离线安装包由 GitHub Actions 全自动构建并发布 Release</a:t>
             </a:r>
             <a:endParaRPr lang="en-US" sz="1350" dirty="0"/>
           </a:p>
@@ -30309,7 +30309,7 @@
                 <a:ea typeface="微软雅黑" pitchFamily="34" charset="-122"/>
                 <a:cs typeface="微软雅黑" pitchFamily="34" charset="-120"/>
               </a:rPr>
-              <a:t>12,005 后端用例（覆盖率 100%）+ 6,315 前端用例 全绿守护 · Windows x64 / 麒麟 ARM64 双平台离线交付</a:t>
+              <a:t>12,005 后端用例（覆盖率 100%）+ 6,330 前端用例 全绿守护 · Windows x64 / 麒麟 ARM64 双平台离线交付</a:t>
             </a:r>
             <a:endParaRPr lang="en-US" sz="1350" dirty="0"/>
           </a:p>
@@ -31388,7 +31388,7 @@
                 <a:ea typeface="微软雅黑" pitchFamily="34" charset="-122"/>
                 <a:cs typeface="微软雅黑" pitchFamily="34" charset="-120"/>
               </a:rPr>
-              <a:t>6,315</a:t>
+              <a:t>6,330</a:t>
             </a:r>
             <a:endParaRPr lang="en-US" sz="4000" dirty="0"/>
           </a:p>
@@ -31985,7 +31985,7 @@
                 <a:ea typeface="微软雅黑" pitchFamily="34" charset="-122"/>
                 <a:cs typeface="微软雅黑" pitchFamily="34" charset="-120"/>
               </a:rPr>
-              <a:t>数据来源：仓库实测（v1.12.14）—— 后端 12,005 用例全绿 / 覆盖率 100% · 前端 6,315 用例全绿 · flake8 0 · bandit 0 中高危 · vue-tsc 0 · eslint 0 警告</a:t>
+              <a:t>数据来源：仓库实测（v1.12.14）—— 后端 12,005 用例全绿 / 覆盖率 100% · 前端 6,330 用例全绿 · flake8 0 · bandit 0 中高危 · vue-tsc 0 · eslint 0 警告</a:t>
             </a:r>
             <a:endParaRPr lang="en-US" sz="1200" dirty="0"/>
           </a:p>

--- a/docs/帮扶管理信息系统介绍.pptx
+++ b/docs/帮扶管理信息系统介绍.pptx
@@ -249,10 +249,10 @@
                 <c:formatCode>General</c:formatCode>
                 <c:ptCount val="2"/>
                 <c:pt idx="0">
-                  <c:v>12005</c:v>
+                  <c:v>12381</c:v>
                 </c:pt>
                 <c:pt idx="1">
-                  <c:v>6330</c:v>
+                  <c:v>6323</c:v>
                 </c:pt>
               </c:numCache>
             </c:numRef>
@@ -5358,7 +5358,7 @@
                 <a:ea typeface="微软雅黑" pitchFamily="34" charset="-122"/>
                 <a:cs typeface="微软雅黑" pitchFamily="34" charset="-120"/>
               </a:rPr>
-              <a:t>302 个测试文件 · 6,330 个用例</a:t>
+              <a:t>299 个测试文件 · 6,323 个用例</a:t>
             </a:r>
             <a:endParaRPr lang="en-US" sz="1350" dirty="0"/>
           </a:p>
@@ -5379,7 +5379,7 @@
                 <a:ea typeface="微软雅黑" pitchFamily="34" charset="-122"/>
                 <a:cs typeface="微软雅黑" pitchFamily="34" charset="-120"/>
               </a:rPr>
-              <a:t>覆盖率门禁 + lint --max-warnings=0 + vue-tsc 三重 CI 门禁</a:t>
+              <a:t>覆盖率门禁（行 + 分支 100%）+ lint --max-warnings=0 + vue-tsc 三重 CI 门禁</a:t>
             </a:r>
             <a:endParaRPr lang="en-US" sz="1350" dirty="0"/>
           </a:p>
@@ -14144,7 +14144,7 @@
                 <a:ea typeface="微软雅黑" pitchFamily="34" charset="-122"/>
                 <a:cs typeface="微软雅黑" pitchFamily="34" charset="-120"/>
               </a:rPr>
-              <a:t>18,335 项自动化测试 · CI/CD · 依赖自检</a:t>
+              <a:t>18,704 项自动化测试 · CI/CD · 依赖自检</a:t>
             </a:r>
             <a:endParaRPr lang="en-US" sz="1200" dirty="0"/>
           </a:p>
@@ -23013,7 +23013,7 @@
                 <a:ea typeface="微软雅黑" pitchFamily="34" charset="-122"/>
                 <a:cs typeface="微软雅黑" pitchFamily="34" charset="-120"/>
               </a:rPr>
-              <a:t>18,335 项自动化测试（后端 12,005 + 前端 6,330）</a:t>
+              <a:t>18,704 项自动化测试（后端 12,381 + 前端 6,323）</a:t>
             </a:r>
             <a:endParaRPr lang="en-US" sz="1400" dirty="0"/>
           </a:p>
@@ -23432,7 +23432,7 @@
                 <a:ea typeface="微软雅黑" pitchFamily="34" charset="-122"/>
                 <a:cs typeface="微软雅黑" pitchFamily="34" charset="-120"/>
               </a:rPr>
-              <a:t>数据来源：v1.12.14 仓库实测 · 后端 12,005 / 前端 6,330 用例 · 覆盖率 100%</a:t>
+              <a:t>数据来源：2026-10-07 仓库实测（v1.12.14）· 后端 12,381 / 前端 6,323 用例 · 行+分支覆盖率 100%（branch=True 严格门禁 + 棘轮）</a:t>
             </a:r>
             <a:endParaRPr lang="en-US" sz="1100" dirty="0"/>
           </a:p>
@@ -28628,7 +28628,7 @@
                 <a:ea typeface="微软雅黑" pitchFamily="34" charset="-122"/>
                 <a:cs typeface="微软雅黑" pitchFamily="34" charset="-120"/>
               </a:rPr>
-              <a:t>净效果：12,005 后端用例（覆盖率 100%）+ 6,330 前端用例全绿；Windows x64 与麒麟 ARM64 两个离线安装包由 GitHub Actions 全自动构建并发布 Release</a:t>
+              <a:t>净效果：12,381 后端用例（行+分支覆盖率 100%）+ 6,323 前端用例全绿；Windows x64 与麒麟 ARM64 两个离线安装包由 GitHub Actions 全自动构建并发布 Release</a:t>
             </a:r>
             <a:endParaRPr lang="en-US" sz="1350" dirty="0"/>
           </a:p>
@@ -30309,7 +30309,7 @@
                 <a:ea typeface="微软雅黑" pitchFamily="34" charset="-122"/>
                 <a:cs typeface="微软雅黑" pitchFamily="34" charset="-120"/>
               </a:rPr>
-              <a:t>12,005 后端用例（覆盖率 100%）+ 6,330 前端用例 全绿守护 · Windows x64 / 麒麟 ARM64 双平台离线交付</a:t>
+              <a:t>12,381 后端用例（行+分支覆盖率 100%）+ 6,323 前端用例 全绿守护 · Windows x64 / 麒麟 ARM64 双平台离线交付</a:t>
             </a:r>
             <a:endParaRPr lang="en-US" sz="1350" dirty="0"/>
           </a:p>
@@ -31306,7 +31306,7 @@
                 <a:ea typeface="微软雅黑" pitchFamily="34" charset="-122"/>
                 <a:cs typeface="微软雅黑" pitchFamily="34" charset="-120"/>
               </a:rPr>
-              <a:t>12,005</a:t>
+              <a:t>12,381</a:t>
             </a:r>
             <a:endParaRPr lang="en-US" sz="4000" dirty="0"/>
           </a:p>
@@ -31388,7 +31388,7 @@
                 <a:ea typeface="微软雅黑" pitchFamily="34" charset="-122"/>
                 <a:cs typeface="微软雅黑" pitchFamily="34" charset="-120"/>
               </a:rPr>
-              <a:t>6,330</a:t>
+              <a:t>6,323</a:t>
             </a:r>
             <a:endParaRPr lang="en-US" sz="4000" dirty="0"/>
           </a:p>
@@ -31985,7 +31985,7 @@
                 <a:ea typeface="微软雅黑" pitchFamily="34" charset="-122"/>
                 <a:cs typeface="微软雅黑" pitchFamily="34" charset="-120"/>
               </a:rPr>
-              <a:t>数据来源：仓库实测（v1.12.14）—— 后端 12,005 用例全绿 / 覆盖率 100% · 前端 6,330 用例全绿 · flake8 0 · bandit 0 中高危 · vue-tsc 0 · eslint 0 警告</a:t>
+              <a:t>数据来源：2026-10-07 仓库实测（v1.12.14）—— 后端 12,381 用例全绿 / 行+分支覆盖率 100%（branch=True 严格门禁）· 前端 6,323 用例全绿 · flake8 0 · bandit 0 中高危 · vue-tsc 0 · eslint 0 警告</a:t>
             </a:r>
             <a:endParaRPr lang="en-US" sz="1200" dirty="0"/>
           </a:p>

--- a/docs/帮扶管理信息系统介绍.pptx
+++ b/docs/帮扶管理信息系统介绍.pptx
@@ -14144,7 +14144,7 @@
                 <a:ea typeface="微软雅黑" pitchFamily="34" charset="-122"/>
                 <a:cs typeface="微软雅黑" pitchFamily="34" charset="-120"/>
               </a:rPr>
-              <a:t>18,704 项自动化测试 · CI/CD · 依赖自检</a:t>
+              <a:t>18,717 项自动化测试 · CI/CD · 依赖自检</a:t>
             </a:r>
             <a:endParaRPr lang="en-US" sz="1200" dirty="0"/>
           </a:p>
@@ -31306,7 +31306,7 @@
                 <a:ea typeface="微软雅黑" pitchFamily="34" charset="-122"/>
                 <a:cs typeface="微软雅黑" pitchFamily="34" charset="-120"/>
               </a:rPr>
-              <a:t>12,381</a:t>
+              <a:t>12,395</a:t>
             </a:r>
             <a:endParaRPr lang="en-US" sz="4000" dirty="0"/>
           </a:p>
@@ -31985,7 +31985,7 @@
                 <a:ea typeface="微软雅黑" pitchFamily="34" charset="-122"/>
                 <a:cs typeface="微软雅黑" pitchFamily="34" charset="-120"/>
               </a:rPr>
-              <a:t>数据来源：2026-10-07 仓库实测（v1.12.14）—— 后端 12,381 用例全绿 / 行+分支覆盖率 100%（branch=True 严格门禁）· 前端 6,323 用例全绿 · flake8 0 · bandit 0 中高危 · vue-tsc 0 · eslint 0 警告</a:t>
+              <a:t>数据来源：2026-10-08 仓库实测（v1.12.15）—— 后端 12,395 用例全绿 / 行+分支覆盖率 100%（branch=True 严格门禁）· 前端 6,323 用例全绿 · flake8 0 · bandit 0 中高危 · vue-tsc 0 · eslint 0 警告</a:t>
             </a:r>
             <a:endParaRPr lang="en-US" sz="1200" dirty="0"/>
           </a:p>

--- a/docs/帮扶管理信息系统介绍.pptx
+++ b/docs/帮扶管理信息系统介绍.pptx
@@ -4964,7 +4964,7 @@
                 <a:ea typeface="微软雅黑" pitchFamily="34" charset="-122"/>
                 <a:cs typeface="微软雅黑" pitchFamily="34" charset="-120"/>
               </a:rPr>
-              <a:t>V1.12.14  |  2026-10-06  |  FastAPI + Vue 3 + Electron + SQLite</a:t>
+              <a:t>V1.12.15  |  2026-10-08  |  FastAPI + Vue 3 + Electron + SQLite</a:t>
             </a:r>
             <a:endParaRPr lang="en-US" sz="1250" dirty="0"/>
           </a:p>
@@ -5180,7 +5180,7 @@
                 <a:ea typeface="微软雅黑" pitchFamily="34" charset="-122"/>
                 <a:cs typeface="微软雅黑" pitchFamily="34" charset="-120"/>
               </a:rPr>
-              <a:t>帮扶管理信息系统 v1.12.14</a:t>
+              <a:t>帮扶管理信息系统 v1.12.15</a:t>
             </a:r>
             <a:endParaRPr lang="en-US" sz="1050" dirty="0"/>
           </a:p>
@@ -5794,7 +5794,7 @@
                 <a:ea typeface="微软雅黑" pitchFamily="34" charset="-122"/>
                 <a:cs typeface="微软雅黑" pitchFamily="34" charset="-120"/>
               </a:rPr>
-              <a:t>帮扶管理信息系统 v1.12.14</a:t>
+              <a:t>帮扶管理信息系统 v1.12.15</a:t>
             </a:r>
             <a:endParaRPr lang="en-US" sz="1050" dirty="0"/>
           </a:p>
@@ -6698,7 +6698,7 @@
                 <a:ea typeface="微软雅黑" pitchFamily="34" charset="-122"/>
                 <a:cs typeface="微软雅黑" pitchFamily="34" charset="-120"/>
               </a:rPr>
-              <a:t>帮扶管理信息系统 v1.12.14</a:t>
+              <a:t>帮扶管理信息系统 v1.12.15</a:t>
             </a:r>
             <a:endParaRPr lang="en-US" sz="1050" dirty="0"/>
           </a:p>
@@ -7312,7 +7312,7 @@
                 <a:ea typeface="微软雅黑" pitchFamily="34" charset="-122"/>
                 <a:cs typeface="微软雅黑" pitchFamily="34" charset="-120"/>
               </a:rPr>
-              <a:t>帮扶管理信息系统 v1.12.14</a:t>
+              <a:t>帮扶管理信息系统 v1.12.15</a:t>
             </a:r>
             <a:endParaRPr lang="en-US" sz="1050" dirty="0"/>
           </a:p>
@@ -8685,7 +8685,7 @@
                 <a:ea typeface="微软雅黑" pitchFamily="34" charset="-122"/>
                 <a:cs typeface="微软雅黑" pitchFamily="34" charset="-120"/>
               </a:rPr>
-              <a:t>帮扶管理信息系统 v1.12.14</a:t>
+              <a:t>帮扶管理信息系统 v1.12.15</a:t>
             </a:r>
             <a:endParaRPr lang="en-US" sz="1050" dirty="0"/>
           </a:p>
@@ -9854,7 +9854,7 @@
                 <a:ea typeface="微软雅黑" pitchFamily="34" charset="-122"/>
                 <a:cs typeface="微软雅黑" pitchFamily="34" charset="-120"/>
               </a:rPr>
-              <a:t>帮扶管理信息系统 v1.12.14</a:t>
+              <a:t>帮扶管理信息系统 v1.12.15</a:t>
             </a:r>
             <a:endParaRPr lang="en-US" sz="1050" dirty="0"/>
           </a:p>
@@ -10468,7 +10468,7 @@
                 <a:ea typeface="微软雅黑" pitchFamily="34" charset="-122"/>
                 <a:cs typeface="微软雅黑" pitchFamily="34" charset="-120"/>
               </a:rPr>
-              <a:t>帮扶管理信息系统 v1.12.14</a:t>
+              <a:t>帮扶管理信息系统 v1.12.15</a:t>
             </a:r>
             <a:endParaRPr lang="en-US" sz="1050" dirty="0"/>
           </a:p>
@@ -11296,7 +11296,7 @@
                 <a:ea typeface="微软雅黑" pitchFamily="34" charset="-122"/>
                 <a:cs typeface="微软雅黑" pitchFamily="34" charset="-120"/>
               </a:rPr>
-              <a:t>帮扶管理信息系统 v1.12.14</a:t>
+              <a:t>帮扶管理信息系统 v1.12.15</a:t>
             </a:r>
             <a:endParaRPr lang="en-US" sz="1050" dirty="0"/>
           </a:p>
@@ -12007,7 +12007,7 @@
                 <a:ea typeface="微软雅黑" pitchFamily="34" charset="-122"/>
                 <a:cs typeface="微软雅黑" pitchFamily="34" charset="-120"/>
               </a:rPr>
-              <a:t>帮扶管理信息系统 v1.12.14</a:t>
+              <a:t>帮扶管理信息系统 v1.12.15</a:t>
             </a:r>
             <a:endParaRPr lang="en-US" sz="1050" dirty="0"/>
           </a:p>
@@ -14144,7 +14144,7 @@
                 <a:ea typeface="微软雅黑" pitchFamily="34" charset="-122"/>
                 <a:cs typeface="微软雅黑" pitchFamily="34" charset="-120"/>
               </a:rPr>
-              <a:t>18,717 项自动化测试 · CI/CD · 依赖自检</a:t>
+              <a:t>18,745 项自动化测试 · CI/CD · 依赖自检</a:t>
             </a:r>
             <a:endParaRPr lang="en-US" sz="1200" dirty="0"/>
           </a:p>
@@ -14505,7 +14505,7 @@
                 <a:ea typeface="微软雅黑" pitchFamily="34" charset="-122"/>
                 <a:cs typeface="微软雅黑" pitchFamily="34" charset="-120"/>
               </a:rPr>
-              <a:t>帮扶管理信息系统 v1.12.14</a:t>
+              <a:t>帮扶管理信息系统 v1.12.15</a:t>
             </a:r>
             <a:endParaRPr lang="en-US" sz="1050" dirty="0"/>
           </a:p>
@@ -15119,7 +15119,7 @@
                 <a:ea typeface="微软雅黑" pitchFamily="34" charset="-122"/>
                 <a:cs typeface="微软雅黑" pitchFamily="34" charset="-120"/>
               </a:rPr>
-              <a:t>帮扶管理信息系统 v1.12.14</a:t>
+              <a:t>帮扶管理信息系统 v1.12.15</a:t>
             </a:r>
             <a:endParaRPr lang="en-US" sz="1050" dirty="0"/>
           </a:p>
@@ -15790,7 +15790,7 @@
                 <a:ea typeface="微软雅黑" pitchFamily="34" charset="-122"/>
                 <a:cs typeface="微软雅黑" pitchFamily="34" charset="-120"/>
               </a:rPr>
-              <a:t>帮扶管理信息系统 v1.12.14</a:t>
+              <a:t>帮扶管理信息系统 v1.12.15</a:t>
             </a:r>
             <a:endParaRPr lang="en-US" sz="1050" dirty="0"/>
           </a:p>
@@ -16473,7 +16473,7 @@
                 <a:ea typeface="微软雅黑" pitchFamily="34" charset="-122"/>
                 <a:cs typeface="微软雅黑" pitchFamily="34" charset="-120"/>
               </a:rPr>
-              <a:t>帮扶管理信息系统 v1.12.14</a:t>
+              <a:t>帮扶管理信息系统 v1.12.15</a:t>
             </a:r>
             <a:endParaRPr lang="en-US" sz="1050" dirty="0"/>
           </a:p>
@@ -17355,7 +17355,7 @@
                 <a:ea typeface="微软雅黑" pitchFamily="34" charset="-122"/>
                 <a:cs typeface="微软雅黑" pitchFamily="34" charset="-120"/>
               </a:rPr>
-              <a:t>帮扶管理信息系统 v1.12.14</a:t>
+              <a:t>帮扶管理信息系统 v1.12.15</a:t>
             </a:r>
             <a:endParaRPr lang="en-US" sz="1050" dirty="0"/>
           </a:p>
@@ -18541,7 +18541,7 @@
                 <a:ea typeface="微软雅黑" pitchFamily="34" charset="-122"/>
                 <a:cs typeface="微软雅黑" pitchFamily="34" charset="-120"/>
               </a:rPr>
-              <a:t>帮扶管理信息系统 v1.12.14</a:t>
+              <a:t>帮扶管理信息系统 v1.12.15</a:t>
             </a:r>
             <a:endParaRPr lang="en-US" sz="1050" dirty="0"/>
           </a:p>
@@ -19540,7 +19540,7 @@
                 <a:ea typeface="微软雅黑" pitchFamily="34" charset="-122"/>
                 <a:cs typeface="微软雅黑" pitchFamily="34" charset="-120"/>
               </a:rPr>
-              <a:t>帮扶管理信息系统 v1.12.14</a:t>
+              <a:t>帮扶管理信息系统 v1.12.15</a:t>
             </a:r>
             <a:endParaRPr lang="en-US" sz="1050" dirty="0"/>
           </a:p>
@@ -20369,7 +20369,7 @@
                 <a:ea typeface="微软雅黑" pitchFamily="34" charset="-122"/>
                 <a:cs typeface="微软雅黑" pitchFamily="34" charset="-120"/>
               </a:rPr>
-              <a:t>帮扶管理信息系统 v1.12.14</a:t>
+              <a:t>帮扶管理信息系统 v1.12.15</a:t>
             </a:r>
             <a:endParaRPr lang="en-US" sz="1050" dirty="0"/>
           </a:p>
@@ -21247,7 +21247,7 @@
                 <a:ea typeface="微软雅黑" pitchFamily="34" charset="-122"/>
                 <a:cs typeface="微软雅黑" pitchFamily="34" charset="-120"/>
               </a:rPr>
-              <a:t>帮扶管理信息系统 v1.12.14</a:t>
+              <a:t>帮扶管理信息系统 v1.12.15</a:t>
             </a:r>
             <a:endParaRPr lang="en-US" sz="1050" dirty="0"/>
           </a:p>
@@ -22379,7 +22379,7 @@
                 <a:ea typeface="微软雅黑" pitchFamily="34" charset="-122"/>
                 <a:cs typeface="微软雅黑" pitchFamily="34" charset="-120"/>
               </a:rPr>
-              <a:t>帮扶管理信息系统 v1.12.14</a:t>
+              <a:t>帮扶管理信息系统 v1.12.15</a:t>
             </a:r>
             <a:endParaRPr lang="en-US" sz="1050" dirty="0"/>
           </a:p>
@@ -23013,7 +23013,7 @@
                 <a:ea typeface="微软雅黑" pitchFamily="34" charset="-122"/>
                 <a:cs typeface="微软雅黑" pitchFamily="34" charset="-120"/>
               </a:rPr>
-              <a:t>18,704 项自动化测试（后端 12,381 + 前端 6,323）</a:t>
+              <a:t>18,745 项自动化测试（后端 12,422 + 前端 6,323）</a:t>
             </a:r>
             <a:endParaRPr lang="en-US" sz="1400" dirty="0"/>
           </a:p>
@@ -23375,7 +23375,7 @@
                 <a:ea typeface="微软雅黑" pitchFamily="34" charset="-122"/>
                 <a:cs typeface="微软雅黑" pitchFamily="34" charset="-120"/>
               </a:rPr>
-              <a:t>帮扶管理信息系统 v1.12.14</a:t>
+              <a:t>帮扶管理信息系统 v1.12.15</a:t>
             </a:r>
             <a:endParaRPr lang="en-US" sz="1050" dirty="0"/>
           </a:p>
@@ -23424,7 +23424,7 @@
               <a:buNone/>
             </a:pPr>
             <a:r>
-              <a:rPr lang="en-US" sz="1100" dirty="0">
+              <a:rPr lang="en-US" sz="1050" dirty="0">
                 <a:solidFill>
                   <a:srgbClr val="5F6F66"/>
                 </a:solidFill>
@@ -23432,9 +23432,9 @@
                 <a:ea typeface="微软雅黑" pitchFamily="34" charset="-122"/>
                 <a:cs typeface="微软雅黑" pitchFamily="34" charset="-120"/>
               </a:rPr>
-              <a:t>数据来源：2026-10-07 仓库实测（v1.12.14）· 后端 12,381 / 前端 6,323 用例 · 行+分支覆盖率 100%（branch=True 严格门禁 + 棘轮）</a:t>
-            </a:r>
-            <a:endParaRPr lang="en-US" sz="1100" dirty="0"/>
+              <a:t>数据来源：2026-10-08 实测（v1.12.15）· 后端 12,422 / 前端 6,323 用例 · 覆盖率 100%（行+分支）</a:t>
+            </a:r>
+            <a:endParaRPr lang="en-US" sz="1050" dirty="0"/>
           </a:p>
         </p:txBody>
       </p:sp>
@@ -23889,7 +23889,7 @@
                 <a:ea typeface="微软雅黑" pitchFamily="34" charset="-122"/>
                 <a:cs typeface="微软雅黑" pitchFamily="34" charset="-120"/>
               </a:rPr>
-              <a:t>帮扶管理信息系统 v1.12.14</a:t>
+              <a:t>帮扶管理信息系统 v1.12.15</a:t>
             </a:r>
             <a:endParaRPr lang="en-US" sz="1050" dirty="0"/>
           </a:p>
@@ -24562,7 +24562,7 @@
                 <a:ea typeface="微软雅黑" pitchFamily="34" charset="-122"/>
                 <a:cs typeface="微软雅黑" pitchFamily="34" charset="-120"/>
               </a:rPr>
-              <a:t>帮扶管理信息系统 v1.12.14</a:t>
+              <a:t>帮扶管理信息系统 v1.12.15</a:t>
             </a:r>
             <a:endParaRPr lang="en-US" sz="1050" dirty="0"/>
           </a:p>
@@ -25176,7 +25176,7 @@
                 <a:ea typeface="微软雅黑" pitchFamily="34" charset="-122"/>
                 <a:cs typeface="微软雅黑" pitchFamily="34" charset="-120"/>
               </a:rPr>
-              <a:t>帮扶管理信息系统 v1.12.14</a:t>
+              <a:t>帮扶管理信息系统 v1.12.15</a:t>
             </a:r>
             <a:endParaRPr lang="en-US" sz="1050" dirty="0"/>
           </a:p>
@@ -26115,7 +26115,7 @@
                 <a:ea typeface="微软雅黑" pitchFamily="34" charset="-122"/>
                 <a:cs typeface="微软雅黑" pitchFamily="34" charset="-120"/>
               </a:rPr>
-              <a:t>帮扶管理信息系统 v1.12.14</a:t>
+              <a:t>帮扶管理信息系统 v1.12.15</a:t>
             </a:r>
             <a:endParaRPr lang="en-US" sz="1050" dirty="0"/>
           </a:p>
@@ -27185,7 +27185,7 @@
                 <a:ea typeface="微软雅黑" pitchFamily="34" charset="-122"/>
                 <a:cs typeface="微软雅黑" pitchFamily="34" charset="-120"/>
               </a:rPr>
-              <a:t>帮扶管理信息系统 v1.12.14</a:t>
+              <a:t>帮扶管理信息系统 v1.12.15</a:t>
             </a:r>
             <a:endParaRPr lang="en-US" sz="1050" dirty="0"/>
           </a:p>
@@ -27820,7 +27820,7 @@
                 <a:ea typeface="微软雅黑" pitchFamily="34" charset="-122"/>
                 <a:cs typeface="微软雅黑" pitchFamily="34" charset="-120"/>
               </a:rPr>
-              <a:t>帮扶管理信息系统 v1.12.14</a:t>
+              <a:t>帮扶管理信息系统 v1.12.15</a:t>
             </a:r>
             <a:endParaRPr lang="en-US" sz="1050" dirty="0"/>
           </a:p>
@@ -28628,7 +28628,7 @@
                 <a:ea typeface="微软雅黑" pitchFamily="34" charset="-122"/>
                 <a:cs typeface="微软雅黑" pitchFamily="34" charset="-120"/>
               </a:rPr>
-              <a:t>净效果：12,381 后端用例（行+分支覆盖率 100%）+ 6,323 前端用例全绿；Windows x64 与麒麟 ARM64 两个离线安装包由 GitHub Actions 全自动构建并发布 Release</a:t>
+              <a:t>净效果：12,422 后端用例（行+分支覆盖率 100%）+ 6,323 前端用例全绿；Windows x64 与麒麟 ARM64 两个离线安装包由 GitHub Actions 全自动构建并发布 Release</a:t>
             </a:r>
             <a:endParaRPr lang="en-US" sz="1350" dirty="0"/>
           </a:p>
@@ -28844,7 +28844,7 @@
                 <a:ea typeface="微软雅黑" pitchFamily="34" charset="-122"/>
                 <a:cs typeface="微软雅黑" pitchFamily="34" charset="-120"/>
               </a:rPr>
-              <a:t>帮扶管理信息系统 v1.12.14</a:t>
+              <a:t>帮扶管理信息系统 v1.12.15</a:t>
             </a:r>
             <a:endParaRPr lang="en-US" sz="1050" dirty="0"/>
           </a:p>
@@ -29407,7 +29407,7 @@
                 <a:ea typeface="微软雅黑" pitchFamily="34" charset="-122"/>
                 <a:cs typeface="微软雅黑" pitchFamily="34" charset="-120"/>
               </a:rPr>
-              <a:t>帮扶管理信息系统 v1.12.14</a:t>
+              <a:t>帮扶管理信息系统 v1.12.15</a:t>
             </a:r>
             <a:endParaRPr lang="en-US" sz="1050" dirty="0"/>
           </a:p>
@@ -30268,7 +30268,7 @@
                 <a:ea typeface="微软雅黑" pitchFamily="34" charset="-122"/>
                 <a:cs typeface="微软雅黑" pitchFamily="34" charset="-120"/>
               </a:rPr>
-              <a:t>帮扶管理信息系统 v1.12.14  ·  仓库：github.com/lzh745200/MRRS  ·  完整文档见 docs/ 目录</a:t>
+              <a:t>帮扶管理信息系统 v1.12.15  ·  仓库：github.com/lzh745200/MRRS  ·  完整文档见 docs/ 目录</a:t>
             </a:r>
             <a:endParaRPr lang="en-US" sz="1350" dirty="0"/>
           </a:p>
@@ -30309,7 +30309,7 @@
                 <a:ea typeface="微软雅黑" pitchFamily="34" charset="-122"/>
                 <a:cs typeface="微软雅黑" pitchFamily="34" charset="-120"/>
               </a:rPr>
-              <a:t>12,381 后端用例（行+分支覆盖率 100%）+ 6,323 前端用例 全绿守护 · Windows x64 / 麒麟 ARM64 双平台离线交付</a:t>
+              <a:t>12,422 后端用例（行+分支覆盖率 100%）+ 6,323 前端用例 全绿守护 · Windows x64 / 麒麟 ARM64 双平台离线交付</a:t>
             </a:r>
             <a:endParaRPr lang="en-US" sz="1350" dirty="0"/>
           </a:p>
@@ -30525,7 +30525,7 @@
                 <a:ea typeface="微软雅黑" pitchFamily="34" charset="-122"/>
                 <a:cs typeface="微软雅黑" pitchFamily="34" charset="-120"/>
               </a:rPr>
-              <a:t>帮扶管理信息系统 v1.12.14</a:t>
+              <a:t>帮扶管理信息系统 v1.12.15</a:t>
             </a:r>
             <a:endParaRPr lang="en-US" sz="1050" dirty="0"/>
           </a:p>
@@ -31265,7 +31265,7 @@
                 <a:ea typeface="微软雅黑" pitchFamily="34" charset="-122"/>
                 <a:cs typeface="微软雅黑" pitchFamily="34" charset="-120"/>
               </a:rPr>
-              <a:t>帮扶管理信息系统 v1.12.14</a:t>
+              <a:t>帮扶管理信息系统 v1.12.15</a:t>
             </a:r>
             <a:endParaRPr lang="en-US" sz="1050" dirty="0"/>
           </a:p>
@@ -31306,7 +31306,7 @@
                 <a:ea typeface="微软雅黑" pitchFamily="34" charset="-122"/>
                 <a:cs typeface="微软雅黑" pitchFamily="34" charset="-120"/>
               </a:rPr>
-              <a:t>12,395</a:t>
+              <a:t>12,422</a:t>
             </a:r>
             <a:endParaRPr lang="en-US" sz="4000" dirty="0"/>
           </a:p>
@@ -31977,7 +31977,7 @@
               <a:buNone/>
             </a:pPr>
             <a:r>
-              <a:rPr lang="en-US" sz="1200" dirty="0">
+              <a:rPr lang="en-US" sz="1000" dirty="0">
                 <a:solidFill>
                   <a:srgbClr val="5F6F66"/>
                 </a:solidFill>
@@ -31985,9 +31985,9 @@
                 <a:ea typeface="微软雅黑" pitchFamily="34" charset="-122"/>
                 <a:cs typeface="微软雅黑" pitchFamily="34" charset="-120"/>
               </a:rPr>
-              <a:t>数据来源：2026-10-08 仓库实测（v1.12.15）—— 后端 12,395 用例全绿 / 行+分支覆盖率 100%（branch=True 严格门禁）· 前端 6,323 用例全绿 · flake8 0 · bandit 0 中高危 · vue-tsc 0 · eslint 0 警告</a:t>
-            </a:r>
-            <a:endParaRPr lang="en-US" sz="1200" dirty="0"/>
+              <a:t>数据来源：2026-10-08 仓库实测（v1.12.15）—— 后端 12,422 用例全绿 / 行+分支覆盖率 100%（branch=True 严格门禁）· 前端 6,323 用例全绿 · flake8 0 · bandit 0 中高危 · vue-tsc 0 · eslint 0 警告</a:t>
+            </a:r>
+            <a:endParaRPr lang="en-US" sz="1000" dirty="0"/>
           </a:p>
         </p:txBody>
       </p:sp>
@@ -32505,7 +32505,7 @@
                 <a:ea typeface="微软雅黑" pitchFamily="34" charset="-122"/>
                 <a:cs typeface="微软雅黑" pitchFamily="34" charset="-120"/>
               </a:rPr>
-              <a:t>帮扶管理信息系统 v1.12.14</a:t>
+              <a:t>帮扶管理信息系统 v1.12.15</a:t>
             </a:r>
             <a:endParaRPr lang="en-US" sz="1050" dirty="0"/>
           </a:p>
@@ -33597,7 +33597,7 @@
                 <a:ea typeface="微软雅黑" pitchFamily="34" charset="-122"/>
                 <a:cs typeface="微软雅黑" pitchFamily="34" charset="-120"/>
               </a:rPr>
-              <a:t>帮扶管理信息系统 v1.12.14</a:t>
+              <a:t>帮扶管理信息系统 v1.12.15</a:t>
             </a:r>
             <a:endParaRPr lang="en-US" sz="1050" dirty="0"/>
           </a:p>

--- a/docs/帮扶管理信息系统介绍.pptx
+++ b/docs/帮扶管理信息系统介绍.pptx
@@ -4701,6 +4701,10 @@
           </a:solidFill>
           <a:ln/>
         </p:spPr>
+        <p:txBody>
+          <a:bodyPr/>
+          <a:p/>
+        </p:txBody>
       </p:sp>
       <p:sp>
         <p:nvSpPr>
@@ -4721,6 +4725,10 @@
           </a:solidFill>
           <a:ln/>
         </p:spPr>
+        <p:txBody>
+          <a:bodyPr/>
+          <a:p/>
+        </p:txBody>
       </p:sp>
       <p:sp>
         <p:nvSpPr>
@@ -4741,6 +4749,10 @@
           </a:solidFill>
           <a:ln/>
         </p:spPr>
+        <p:txBody>
+          <a:bodyPr/>
+          <a:p/>
+        </p:txBody>
       </p:sp>
       <p:sp>
         <p:nvSpPr>
@@ -4964,7 +4976,7 @@
                 <a:ea typeface="微软雅黑" pitchFamily="34" charset="-122"/>
                 <a:cs typeface="微软雅黑" pitchFamily="34" charset="-120"/>
               </a:rPr>
-              <a:t>V1.12.15  |  2026-10-08  |  FastAPI + Vue 3 + Electron + SQLite</a:t>
+              <a:t>V1.12.17  |  2026-10-17  |  FastAPI + Vue 3 + Electron + SQLite</a:t>
             </a:r>
             <a:endParaRPr lang="en-US" sz="1250" dirty="0"/>
           </a:p>
@@ -5021,6 +5033,10 @@
           </a:solidFill>
           <a:ln/>
         </p:spPr>
+        <p:txBody>
+          <a:bodyPr/>
+          <a:p/>
+        </p:txBody>
       </p:sp>
       <p:sp>
         <p:nvSpPr>
@@ -5180,7 +5196,7 @@
                 <a:ea typeface="微软雅黑" pitchFamily="34" charset="-122"/>
                 <a:cs typeface="微软雅黑" pitchFamily="34" charset="-120"/>
               </a:rPr>
-              <a:t>帮扶管理信息系统 v1.12.15</a:t>
+              <a:t>帮扶管理信息系统 v1.12.17</a:t>
             </a:r>
             <a:endParaRPr lang="en-US" sz="1050" dirty="0"/>
           </a:p>
@@ -5214,6 +5230,10 @@
             </a:outerShdw>
           </a:effectLst>
         </p:spPr>
+        <p:txBody>
+          <a:bodyPr/>
+          <a:p/>
+        </p:txBody>
       </p:sp>
       <p:sp>
         <p:nvSpPr>
@@ -5358,7 +5378,7 @@
                 <a:ea typeface="微软雅黑" pitchFamily="34" charset="-122"/>
                 <a:cs typeface="微软雅黑" pitchFamily="34" charset="-120"/>
               </a:rPr>
-              <a:t>299 个测试文件 · 6,323 个用例</a:t>
+              <a:t>299 个测试文件 · 6363 个用例</a:t>
             </a:r>
             <a:endParaRPr lang="en-US" sz="1350" dirty="0"/>
           </a:p>
@@ -5413,6 +5433,10 @@
             </a:outerShdw>
           </a:effectLst>
         </p:spPr>
+        <p:txBody>
+          <a:bodyPr/>
+          <a:p/>
+        </p:txBody>
       </p:sp>
       <p:sp>
         <p:nvSpPr>
@@ -5635,6 +5659,10 @@
           </a:solidFill>
           <a:ln/>
         </p:spPr>
+        <p:txBody>
+          <a:bodyPr/>
+          <a:p/>
+        </p:txBody>
       </p:sp>
       <p:sp>
         <p:nvSpPr>
@@ -5794,7 +5822,7 @@
                 <a:ea typeface="微软雅黑" pitchFamily="34" charset="-122"/>
                 <a:cs typeface="微软雅黑" pitchFamily="34" charset="-120"/>
               </a:rPr>
-              <a:t>帮扶管理信息系统 v1.12.15</a:t>
+              <a:t>帮扶管理信息系统 v1.12.17</a:t>
             </a:r>
             <a:endParaRPr lang="en-US" sz="1050" dirty="0"/>
           </a:p>
@@ -5819,6 +5847,10 @@
           </a:solidFill>
           <a:ln/>
         </p:spPr>
+        <p:txBody>
+          <a:bodyPr/>
+          <a:p/>
+        </p:txBody>
       </p:sp>
       <p:sp>
         <p:nvSpPr>
@@ -5921,6 +5953,10 @@
           </a:solidFill>
           <a:ln/>
         </p:spPr>
+        <p:txBody>
+          <a:bodyPr/>
+          <a:p/>
+        </p:txBody>
       </p:sp>
       <p:sp>
         <p:nvSpPr>
@@ -6023,6 +6059,10 @@
           </a:solidFill>
           <a:ln/>
         </p:spPr>
+        <p:txBody>
+          <a:bodyPr/>
+          <a:p/>
+        </p:txBody>
       </p:sp>
       <p:sp>
         <p:nvSpPr>
@@ -6125,6 +6165,10 @@
           </a:solidFill>
           <a:ln/>
         </p:spPr>
+        <p:txBody>
+          <a:bodyPr/>
+          <a:p/>
+        </p:txBody>
       </p:sp>
       <p:sp>
         <p:nvSpPr>
@@ -6227,6 +6271,10 @@
           </a:solidFill>
           <a:ln/>
         </p:spPr>
+        <p:txBody>
+          <a:bodyPr/>
+          <a:p/>
+        </p:txBody>
       </p:sp>
       <p:sp>
         <p:nvSpPr>
@@ -6338,6 +6386,10 @@
             </a:outerShdw>
           </a:effectLst>
         </p:spPr>
+        <p:txBody>
+          <a:bodyPr/>
+          <a:p/>
+        </p:txBody>
       </p:sp>
       <p:sp>
         <p:nvSpPr>
@@ -6539,6 +6591,10 @@
           </a:solidFill>
           <a:ln/>
         </p:spPr>
+        <p:txBody>
+          <a:bodyPr/>
+          <a:p/>
+        </p:txBody>
       </p:sp>
       <p:sp>
         <p:nvSpPr>
@@ -6698,7 +6754,7 @@
                 <a:ea typeface="微软雅黑" pitchFamily="34" charset="-122"/>
                 <a:cs typeface="微软雅黑" pitchFamily="34" charset="-120"/>
               </a:rPr>
-              <a:t>帮扶管理信息系统 v1.12.15</a:t>
+              <a:t>帮扶管理信息系统 v1.12.17</a:t>
             </a:r>
             <a:endParaRPr lang="en-US" sz="1050" dirty="0"/>
           </a:p>
@@ -6732,6 +6788,10 @@
             </a:outerShdw>
           </a:effectLst>
         </p:spPr>
+        <p:txBody>
+          <a:bodyPr/>
+          <a:p/>
+        </p:txBody>
       </p:sp>
       <p:sp>
         <p:nvSpPr>
@@ -6931,6 +6991,10 @@
             </a:outerShdw>
           </a:effectLst>
         </p:spPr>
+        <p:txBody>
+          <a:bodyPr/>
+          <a:p/>
+        </p:txBody>
       </p:sp>
       <p:sp>
         <p:nvSpPr>
@@ -7153,6 +7217,10 @@
           </a:solidFill>
           <a:ln/>
         </p:spPr>
+        <p:txBody>
+          <a:bodyPr/>
+          <a:p/>
+        </p:txBody>
       </p:sp>
       <p:sp>
         <p:nvSpPr>
@@ -7312,7 +7380,7 @@
                 <a:ea typeface="微软雅黑" pitchFamily="34" charset="-122"/>
                 <a:cs typeface="微软雅黑" pitchFamily="34" charset="-120"/>
               </a:rPr>
-              <a:t>帮扶管理信息系统 v1.12.15</a:t>
+              <a:t>帮扶管理信息系统 v1.12.17</a:t>
             </a:r>
             <a:endParaRPr lang="en-US" sz="1050" dirty="0"/>
           </a:p>
@@ -7346,6 +7414,10 @@
             </a:outerShdw>
           </a:effectLst>
         </p:spPr>
+        <p:txBody>
+          <a:bodyPr/>
+          <a:p/>
+        </p:txBody>
       </p:sp>
       <p:sp>
         <p:nvSpPr>
@@ -7503,6 +7575,10 @@
             </a:outerShdw>
           </a:effectLst>
         </p:spPr>
+        <p:txBody>
+          <a:bodyPr/>
+          <a:p/>
+        </p:txBody>
       </p:sp>
       <p:sp>
         <p:nvSpPr>
@@ -7653,6 +7729,10 @@
           </a:solidFill>
           <a:ln/>
         </p:spPr>
+        <p:txBody>
+          <a:bodyPr/>
+          <a:p/>
+        </p:txBody>
       </p:sp>
       <p:sp>
         <p:nvSpPr>
@@ -7718,6 +7798,10 @@
             <a:tailEnd type="triangle"/>
           </a:ln>
         </p:spPr>
+        <p:txBody>
+          <a:bodyPr/>
+          <a:p/>
+        </p:txBody>
       </p:sp>
       <p:sp>
         <p:nvSpPr>
@@ -7740,6 +7824,10 @@
           </a:solidFill>
           <a:ln/>
         </p:spPr>
+        <p:txBody>
+          <a:bodyPr/>
+          <a:p/>
+        </p:txBody>
       </p:sp>
       <p:sp>
         <p:nvSpPr>
@@ -7805,6 +7893,10 @@
             <a:tailEnd type="triangle"/>
           </a:ln>
         </p:spPr>
+        <p:txBody>
+          <a:bodyPr/>
+          <a:p/>
+        </p:txBody>
       </p:sp>
       <p:sp>
         <p:nvSpPr>
@@ -7827,6 +7919,10 @@
           </a:solidFill>
           <a:ln/>
         </p:spPr>
+        <p:txBody>
+          <a:bodyPr/>
+          <a:p/>
+        </p:txBody>
       </p:sp>
       <p:sp>
         <p:nvSpPr>
@@ -7892,6 +7988,10 @@
             <a:tailEnd type="triangle"/>
           </a:ln>
         </p:spPr>
+        <p:txBody>
+          <a:bodyPr/>
+          <a:p/>
+        </p:txBody>
       </p:sp>
       <p:sp>
         <p:nvSpPr>
@@ -7914,6 +8014,10 @@
           </a:solidFill>
           <a:ln/>
         </p:spPr>
+        <p:txBody>
+          <a:bodyPr/>
+          <a:p/>
+        </p:txBody>
       </p:sp>
       <p:sp>
         <p:nvSpPr>
@@ -7979,6 +8083,10 @@
             <a:tailEnd type="triangle"/>
           </a:ln>
         </p:spPr>
+        <p:txBody>
+          <a:bodyPr/>
+          <a:p/>
+        </p:txBody>
       </p:sp>
       <p:sp>
         <p:nvSpPr>
@@ -8001,6 +8109,10 @@
           </a:solidFill>
           <a:ln/>
         </p:spPr>
+        <p:txBody>
+          <a:bodyPr/>
+          <a:p/>
+        </p:txBody>
       </p:sp>
       <p:sp>
         <p:nvSpPr>
@@ -8066,6 +8178,10 @@
             <a:tailEnd type="triangle"/>
           </a:ln>
         </p:spPr>
+        <p:txBody>
+          <a:bodyPr/>
+          <a:p/>
+        </p:txBody>
       </p:sp>
       <p:sp>
         <p:nvSpPr>
@@ -8088,6 +8204,10 @@
           </a:solidFill>
           <a:ln/>
         </p:spPr>
+        <p:txBody>
+          <a:bodyPr/>
+          <a:p/>
+        </p:txBody>
       </p:sp>
       <p:sp>
         <p:nvSpPr>
@@ -8526,6 +8646,10 @@
           </a:solidFill>
           <a:ln/>
         </p:spPr>
+        <p:txBody>
+          <a:bodyPr/>
+          <a:p/>
+        </p:txBody>
       </p:sp>
       <p:sp>
         <p:nvSpPr>
@@ -8685,7 +8809,7 @@
                 <a:ea typeface="微软雅黑" pitchFamily="34" charset="-122"/>
                 <a:cs typeface="微软雅黑" pitchFamily="34" charset="-120"/>
               </a:rPr>
-              <a:t>帮扶管理信息系统 v1.12.15</a:t>
+              <a:t>帮扶管理信息系统 v1.12.17</a:t>
             </a:r>
             <a:endParaRPr lang="en-US" sz="1050" dirty="0"/>
           </a:p>
@@ -8719,6 +8843,10 @@
             </a:outerShdw>
           </a:effectLst>
         </p:spPr>
+        <p:txBody>
+          <a:bodyPr/>
+          <a:p/>
+        </p:txBody>
       </p:sp>
       <p:sp>
         <p:nvSpPr>
@@ -8871,6 +8999,10 @@
             </a:outerShdw>
           </a:effectLst>
         </p:spPr>
+        <p:txBody>
+          <a:bodyPr/>
+          <a:p/>
+        </p:txBody>
       </p:sp>
       <p:sp>
         <p:nvSpPr>
@@ -9023,6 +9155,10 @@
             </a:outerShdw>
           </a:effectLst>
         </p:spPr>
+        <p:txBody>
+          <a:bodyPr/>
+          <a:p/>
+        </p:txBody>
       </p:sp>
       <p:sp>
         <p:nvSpPr>
@@ -9175,6 +9311,10 @@
             </a:outerShdw>
           </a:effectLst>
         </p:spPr>
+        <p:txBody>
+          <a:bodyPr/>
+          <a:p/>
+        </p:txBody>
       </p:sp>
       <p:sp>
         <p:nvSpPr>
@@ -9327,6 +9467,10 @@
             </a:outerShdw>
           </a:effectLst>
         </p:spPr>
+        <p:txBody>
+          <a:bodyPr/>
+          <a:p/>
+        </p:txBody>
       </p:sp>
       <p:sp>
         <p:nvSpPr>
@@ -9479,6 +9623,10 @@
             </a:outerShdw>
           </a:effectLst>
         </p:spPr>
+        <p:txBody>
+          <a:bodyPr/>
+          <a:p/>
+        </p:txBody>
       </p:sp>
       <p:sp>
         <p:nvSpPr>
@@ -9695,6 +9843,10 @@
           </a:solidFill>
           <a:ln/>
         </p:spPr>
+        <p:txBody>
+          <a:bodyPr/>
+          <a:p/>
+        </p:txBody>
       </p:sp>
       <p:sp>
         <p:nvSpPr>
@@ -9854,7 +10006,7 @@
                 <a:ea typeface="微软雅黑" pitchFamily="34" charset="-122"/>
                 <a:cs typeface="微软雅黑" pitchFamily="34" charset="-120"/>
               </a:rPr>
-              <a:t>帮扶管理信息系统 v1.12.15</a:t>
+              <a:t>帮扶管理信息系统 v1.12.17</a:t>
             </a:r>
             <a:endParaRPr lang="en-US" sz="1050" dirty="0"/>
           </a:p>
@@ -9888,6 +10040,10 @@
             </a:outerShdw>
           </a:effectLst>
         </p:spPr>
+        <p:txBody>
+          <a:bodyPr/>
+          <a:p/>
+        </p:txBody>
       </p:sp>
       <p:sp>
         <p:nvSpPr>
@@ -10087,6 +10243,10 @@
             </a:outerShdw>
           </a:effectLst>
         </p:spPr>
+        <p:txBody>
+          <a:bodyPr/>
+          <a:p/>
+        </p:txBody>
       </p:sp>
       <p:sp>
         <p:nvSpPr>
@@ -10309,6 +10469,10 @@
           </a:solidFill>
           <a:ln/>
         </p:spPr>
+        <p:txBody>
+          <a:bodyPr/>
+          <a:p/>
+        </p:txBody>
       </p:sp>
       <p:sp>
         <p:nvSpPr>
@@ -10468,7 +10632,7 @@
                 <a:ea typeface="微软雅黑" pitchFamily="34" charset="-122"/>
                 <a:cs typeface="微软雅黑" pitchFamily="34" charset="-120"/>
               </a:rPr>
-              <a:t>帮扶管理信息系统 v1.12.15</a:t>
+              <a:t>帮扶管理信息系统 v1.12.17</a:t>
             </a:r>
             <a:endParaRPr lang="en-US" sz="1050" dirty="0"/>
           </a:p>
@@ -10495,6 +10659,10 @@
           </a:solidFill>
           <a:ln/>
         </p:spPr>
+        <p:txBody>
+          <a:bodyPr/>
+          <a:p/>
+        </p:txBody>
       </p:sp>
       <p:sp>
         <p:nvSpPr>
@@ -10558,6 +10726,10 @@
           </a:solidFill>
           <a:ln/>
         </p:spPr>
+        <p:txBody>
+          <a:bodyPr/>
+          <a:p/>
+        </p:txBody>
       </p:sp>
       <p:sp>
         <p:nvSpPr>
@@ -10621,6 +10793,10 @@
           </a:solidFill>
           <a:ln/>
         </p:spPr>
+        <p:txBody>
+          <a:bodyPr/>
+          <a:p/>
+        </p:txBody>
       </p:sp>
       <p:sp>
         <p:nvSpPr>
@@ -10684,6 +10860,10 @@
           </a:solidFill>
           <a:ln/>
         </p:spPr>
+        <p:txBody>
+          <a:bodyPr/>
+          <a:p/>
+        </p:txBody>
       </p:sp>
       <p:sp>
         <p:nvSpPr>
@@ -10747,6 +10927,10 @@
           </a:solidFill>
           <a:ln/>
         </p:spPr>
+        <p:txBody>
+          <a:bodyPr/>
+          <a:p/>
+        </p:txBody>
       </p:sp>
       <p:sp>
         <p:nvSpPr>
@@ -10810,6 +10994,10 @@
           </a:solidFill>
           <a:ln/>
         </p:spPr>
+        <p:txBody>
+          <a:bodyPr/>
+          <a:p/>
+        </p:txBody>
       </p:sp>
       <p:sp>
         <p:nvSpPr>
@@ -10873,6 +11061,10 @@
           </a:solidFill>
           <a:ln/>
         </p:spPr>
+        <p:txBody>
+          <a:bodyPr/>
+          <a:p/>
+        </p:txBody>
       </p:sp>
       <p:sp>
         <p:nvSpPr>
@@ -10936,6 +11128,10 @@
           </a:solidFill>
           <a:ln/>
         </p:spPr>
+        <p:txBody>
+          <a:bodyPr/>
+          <a:p/>
+        </p:txBody>
       </p:sp>
       <p:sp>
         <p:nvSpPr>
@@ -11137,6 +11333,10 @@
           </a:solidFill>
           <a:ln/>
         </p:spPr>
+        <p:txBody>
+          <a:bodyPr/>
+          <a:p/>
+        </p:txBody>
       </p:sp>
       <p:sp>
         <p:nvSpPr>
@@ -11296,7 +11496,7 @@
                 <a:ea typeface="微软雅黑" pitchFamily="34" charset="-122"/>
                 <a:cs typeface="微软雅黑" pitchFamily="34" charset="-120"/>
               </a:rPr>
-              <a:t>帮扶管理信息系统 v1.12.15</a:t>
+              <a:t>帮扶管理信息系统 v1.12.17</a:t>
             </a:r>
             <a:endParaRPr lang="en-US" sz="1050" dirty="0"/>
           </a:p>
@@ -11321,6 +11521,10 @@
           </a:solidFill>
           <a:ln/>
         </p:spPr>
+        <p:txBody>
+          <a:bodyPr/>
+          <a:p/>
+        </p:txBody>
       </p:sp>
       <p:sp>
         <p:nvSpPr>
@@ -11382,6 +11586,10 @@
           </a:solidFill>
           <a:ln/>
         </p:spPr>
+        <p:txBody>
+          <a:bodyPr/>
+          <a:p/>
+        </p:txBody>
       </p:sp>
       <p:sp>
         <p:nvSpPr>
@@ -11443,6 +11651,10 @@
           </a:solidFill>
           <a:ln/>
         </p:spPr>
+        <p:txBody>
+          <a:bodyPr/>
+          <a:p/>
+        </p:txBody>
       </p:sp>
       <p:sp>
         <p:nvSpPr>
@@ -11504,6 +11716,10 @@
           </a:solidFill>
           <a:ln/>
         </p:spPr>
+        <p:txBody>
+          <a:bodyPr/>
+          <a:p/>
+        </p:txBody>
       </p:sp>
       <p:sp>
         <p:nvSpPr>
@@ -11565,6 +11781,10 @@
           </a:solidFill>
           <a:ln/>
         </p:spPr>
+        <p:txBody>
+          <a:bodyPr/>
+          <a:p/>
+        </p:txBody>
       </p:sp>
       <p:sp>
         <p:nvSpPr>
@@ -11626,6 +11846,10 @@
           </a:solidFill>
           <a:ln/>
         </p:spPr>
+        <p:txBody>
+          <a:bodyPr/>
+          <a:p/>
+        </p:txBody>
       </p:sp>
       <p:sp>
         <p:nvSpPr>
@@ -11848,6 +12072,10 @@
           </a:solidFill>
           <a:ln/>
         </p:spPr>
+        <p:txBody>
+          <a:bodyPr/>
+          <a:p/>
+        </p:txBody>
       </p:sp>
       <p:sp>
         <p:nvSpPr>
@@ -12007,7 +12235,7 @@
                 <a:ea typeface="微软雅黑" pitchFamily="34" charset="-122"/>
                 <a:cs typeface="微软雅黑" pitchFamily="34" charset="-120"/>
               </a:rPr>
-              <a:t>帮扶管理信息系统 v1.12.15</a:t>
+              <a:t>帮扶管理信息系统 v1.12.17</a:t>
             </a:r>
             <a:endParaRPr lang="en-US" sz="1050" dirty="0"/>
           </a:p>
@@ -12032,6 +12260,10 @@
           </a:solidFill>
           <a:ln/>
         </p:spPr>
+        <p:txBody>
+          <a:bodyPr/>
+          <a:p/>
+        </p:txBody>
       </p:sp>
       <p:sp>
         <p:nvSpPr>
@@ -12138,6 +12370,10 @@
             <a:tailEnd type="triangle"/>
           </a:ln>
         </p:spPr>
+        <p:txBody>
+          <a:bodyPr/>
+          <a:p/>
+        </p:txBody>
       </p:sp>
       <p:sp>
         <p:nvSpPr>
@@ -12158,6 +12394,10 @@
           </a:solidFill>
           <a:ln/>
         </p:spPr>
+        <p:txBody>
+          <a:bodyPr/>
+          <a:p/>
+        </p:txBody>
       </p:sp>
       <p:sp>
         <p:nvSpPr>
@@ -12264,6 +12504,10 @@
             <a:tailEnd type="triangle"/>
           </a:ln>
         </p:spPr>
+        <p:txBody>
+          <a:bodyPr/>
+          <a:p/>
+        </p:txBody>
       </p:sp>
       <p:sp>
         <p:nvSpPr>
@@ -12284,6 +12528,10 @@
           </a:solidFill>
           <a:ln/>
         </p:spPr>
+        <p:txBody>
+          <a:bodyPr/>
+          <a:p/>
+        </p:txBody>
       </p:sp>
       <p:sp>
         <p:nvSpPr>
@@ -12390,6 +12638,10 @@
             <a:tailEnd type="triangle"/>
           </a:ln>
         </p:spPr>
+        <p:txBody>
+          <a:bodyPr/>
+          <a:p/>
+        </p:txBody>
       </p:sp>
       <p:sp>
         <p:nvSpPr>
@@ -12410,6 +12662,10 @@
           </a:solidFill>
           <a:ln/>
         </p:spPr>
+        <p:txBody>
+          <a:bodyPr/>
+          <a:p/>
+        </p:txBody>
       </p:sp>
       <p:sp>
         <p:nvSpPr>
@@ -12516,6 +12772,10 @@
             <a:tailEnd type="triangle"/>
           </a:ln>
         </p:spPr>
+        <p:txBody>
+          <a:bodyPr/>
+          <a:p/>
+        </p:txBody>
       </p:sp>
       <p:sp>
         <p:nvSpPr>
@@ -12536,6 +12796,10 @@
           </a:solidFill>
           <a:ln/>
         </p:spPr>
+        <p:txBody>
+          <a:bodyPr/>
+          <a:p/>
+        </p:txBody>
       </p:sp>
       <p:sp>
         <p:nvSpPr>
@@ -12642,6 +12906,10 @@
             <a:tailEnd type="triangle"/>
           </a:ln>
         </p:spPr>
+        <p:txBody>
+          <a:bodyPr/>
+          <a:p/>
+        </p:txBody>
       </p:sp>
       <p:sp>
         <p:nvSpPr>
@@ -12662,6 +12930,10 @@
           </a:solidFill>
           <a:ln/>
         </p:spPr>
+        <p:txBody>
+          <a:bodyPr/>
+          <a:p/>
+        </p:txBody>
       </p:sp>
       <p:sp>
         <p:nvSpPr>
@@ -12768,6 +13040,10 @@
             <a:tailEnd type="triangle"/>
           </a:ln>
         </p:spPr>
+        <p:txBody>
+          <a:bodyPr/>
+          <a:p/>
+        </p:txBody>
       </p:sp>
       <p:sp>
         <p:nvSpPr>
@@ -12788,6 +13064,10 @@
           </a:solidFill>
           <a:ln/>
         </p:spPr>
+        <p:txBody>
+          <a:bodyPr/>
+          <a:p/>
+        </p:txBody>
       </p:sp>
       <p:sp>
         <p:nvSpPr>
@@ -12894,6 +13174,10 @@
             <a:tailEnd type="triangle"/>
           </a:ln>
         </p:spPr>
+        <p:txBody>
+          <a:bodyPr/>
+          <a:p/>
+        </p:txBody>
       </p:sp>
       <p:sp>
         <p:nvSpPr>
@@ -12914,6 +13198,10 @@
           </a:solidFill>
           <a:ln/>
         </p:spPr>
+        <p:txBody>
+          <a:bodyPr/>
+          <a:p/>
+        </p:txBody>
       </p:sp>
       <p:sp>
         <p:nvSpPr>
@@ -13025,6 +13313,10 @@
             </a:outerShdw>
           </a:effectLst>
         </p:spPr>
+        <p:txBody>
+          <a:bodyPr/>
+          <a:p/>
+        </p:txBody>
       </p:sp>
       <p:sp>
         <p:nvSpPr>
@@ -13182,6 +13474,10 @@
             </a:outerShdw>
           </a:effectLst>
         </p:spPr>
+        <p:txBody>
+          <a:bodyPr/>
+          <a:p/>
+        </p:txBody>
       </p:sp>
       <p:sp>
         <p:nvSpPr>
@@ -13446,6 +13742,10 @@
           </a:solidFill>
           <a:ln/>
         </p:spPr>
+        <p:txBody>
+          <a:bodyPr/>
+          <a:p/>
+        </p:txBody>
       </p:sp>
       <p:sp>
         <p:nvSpPr>
@@ -13591,6 +13891,10 @@
           </a:solidFill>
           <a:ln/>
         </p:spPr>
+        <p:txBody>
+          <a:bodyPr/>
+          <a:p/>
+        </p:txBody>
       </p:sp>
       <p:sp>
         <p:nvSpPr>
@@ -13736,6 +14040,10 @@
           </a:solidFill>
           <a:ln/>
         </p:spPr>
+        <p:txBody>
+          <a:bodyPr/>
+          <a:p/>
+        </p:txBody>
       </p:sp>
       <p:sp>
         <p:nvSpPr>
@@ -13881,6 +14189,10 @@
           </a:solidFill>
           <a:ln/>
         </p:spPr>
+        <p:txBody>
+          <a:bodyPr/>
+          <a:p/>
+        </p:txBody>
       </p:sp>
       <p:sp>
         <p:nvSpPr>
@@ -14026,6 +14338,10 @@
           </a:solidFill>
           <a:ln/>
         </p:spPr>
+        <p:txBody>
+          <a:bodyPr/>
+          <a:p/>
+        </p:txBody>
       </p:sp>
       <p:sp>
         <p:nvSpPr>
@@ -14171,6 +14487,10 @@
           </a:solidFill>
           <a:ln/>
         </p:spPr>
+        <p:txBody>
+          <a:bodyPr/>
+          <a:p/>
+        </p:txBody>
       </p:sp>
       <p:sp>
         <p:nvSpPr>
@@ -14346,6 +14666,10 @@
           </a:solidFill>
           <a:ln/>
         </p:spPr>
+        <p:txBody>
+          <a:bodyPr/>
+          <a:p/>
+        </p:txBody>
       </p:sp>
       <p:sp>
         <p:nvSpPr>
@@ -14505,7 +14829,7 @@
                 <a:ea typeface="微软雅黑" pitchFamily="34" charset="-122"/>
                 <a:cs typeface="微软雅黑" pitchFamily="34" charset="-120"/>
               </a:rPr>
-              <a:t>帮扶管理信息系统 v1.12.15</a:t>
+              <a:t>帮扶管理信息系统 v1.12.17</a:t>
             </a:r>
             <a:endParaRPr lang="en-US" sz="1050" dirty="0"/>
           </a:p>
@@ -14539,6 +14863,10 @@
             </a:outerShdw>
           </a:effectLst>
         </p:spPr>
+        <p:txBody>
+          <a:bodyPr/>
+          <a:p/>
+        </p:txBody>
       </p:sp>
       <p:sp>
         <p:nvSpPr>
@@ -14738,6 +15066,10 @@
             </a:outerShdw>
           </a:effectLst>
         </p:spPr>
+        <p:txBody>
+          <a:bodyPr/>
+          <a:p/>
+        </p:txBody>
       </p:sp>
       <p:sp>
         <p:nvSpPr>
@@ -14960,6 +15292,10 @@
           </a:solidFill>
           <a:ln/>
         </p:spPr>
+        <p:txBody>
+          <a:bodyPr/>
+          <a:p/>
+        </p:txBody>
       </p:sp>
       <p:sp>
         <p:nvSpPr>
@@ -15119,7 +15455,7 @@
                 <a:ea typeface="微软雅黑" pitchFamily="34" charset="-122"/>
                 <a:cs typeface="微软雅黑" pitchFamily="34" charset="-120"/>
               </a:rPr>
-              <a:t>帮扶管理信息系统 v1.12.15</a:t>
+              <a:t>帮扶管理信息系统 v1.12.17</a:t>
             </a:r>
             <a:endParaRPr lang="en-US" sz="1050" dirty="0"/>
           </a:p>
@@ -15144,6 +15480,10 @@
           </a:solidFill>
           <a:ln/>
         </p:spPr>
+        <p:txBody>
+          <a:bodyPr/>
+          <a:p/>
+        </p:txBody>
       </p:sp>
       <p:sp>
         <p:nvSpPr>
@@ -15205,6 +15545,10 @@
           </a:solidFill>
           <a:ln/>
         </p:spPr>
+        <p:txBody>
+          <a:bodyPr/>
+          <a:p/>
+        </p:txBody>
       </p:sp>
       <p:sp>
         <p:nvSpPr>
@@ -15266,6 +15610,10 @@
           </a:solidFill>
           <a:ln/>
         </p:spPr>
+        <p:txBody>
+          <a:bodyPr/>
+          <a:p/>
+        </p:txBody>
       </p:sp>
       <p:sp>
         <p:nvSpPr>
@@ -15327,6 +15675,10 @@
           </a:solidFill>
           <a:ln/>
         </p:spPr>
+        <p:txBody>
+          <a:bodyPr/>
+          <a:p/>
+        </p:txBody>
       </p:sp>
       <p:sp>
         <p:nvSpPr>
@@ -15388,6 +15740,10 @@
           </a:solidFill>
           <a:ln/>
         </p:spPr>
+        <p:txBody>
+          <a:bodyPr/>
+          <a:p/>
+        </p:txBody>
       </p:sp>
       <p:sp>
         <p:nvSpPr>
@@ -15631,6 +15987,10 @@
           </a:solidFill>
           <a:ln/>
         </p:spPr>
+        <p:txBody>
+          <a:bodyPr/>
+          <a:p/>
+        </p:txBody>
       </p:sp>
       <p:sp>
         <p:nvSpPr>
@@ -15790,7 +16150,7 @@
                 <a:ea typeface="微软雅黑" pitchFamily="34" charset="-122"/>
                 <a:cs typeface="微软雅黑" pitchFamily="34" charset="-120"/>
               </a:rPr>
-              <a:t>帮扶管理信息系统 v1.12.15</a:t>
+              <a:t>帮扶管理信息系统 v1.12.17</a:t>
             </a:r>
             <a:endParaRPr lang="en-US" sz="1050" dirty="0"/>
           </a:p>
@@ -15824,6 +16184,10 @@
             </a:outerShdw>
           </a:effectLst>
         </p:spPr>
+        <p:txBody>
+          <a:bodyPr/>
+          <a:p/>
+        </p:txBody>
       </p:sp>
       <p:sp>
         <p:nvSpPr>
@@ -16002,6 +16366,10 @@
             </a:outerShdw>
           </a:effectLst>
         </p:spPr>
+        <p:txBody>
+          <a:bodyPr/>
+          <a:p/>
+        </p:txBody>
       </p:sp>
       <p:sp>
         <p:nvSpPr>
@@ -16180,6 +16548,10 @@
             </a:outerShdw>
           </a:effectLst>
         </p:spPr>
+        <p:txBody>
+          <a:bodyPr/>
+          <a:p/>
+        </p:txBody>
       </p:sp>
       <p:sp>
         <p:nvSpPr>
@@ -16314,6 +16686,10 @@
           </a:solidFill>
           <a:ln/>
         </p:spPr>
+        <p:txBody>
+          <a:bodyPr/>
+          <a:p/>
+        </p:txBody>
       </p:sp>
       <p:sp>
         <p:nvSpPr>
@@ -16473,7 +16849,7 @@
                 <a:ea typeface="微软雅黑" pitchFamily="34" charset="-122"/>
                 <a:cs typeface="微软雅黑" pitchFamily="34" charset="-120"/>
               </a:rPr>
-              <a:t>帮扶管理信息系统 v1.12.15</a:t>
+              <a:t>帮扶管理信息系统 v1.12.17</a:t>
             </a:r>
             <a:endParaRPr lang="en-US" sz="1050" dirty="0"/>
           </a:p>
@@ -16507,6 +16883,10 @@
             </a:outerShdw>
           </a:effectLst>
         </p:spPr>
+        <p:txBody>
+          <a:bodyPr/>
+          <a:p/>
+        </p:txBody>
       </p:sp>
       <p:sp>
         <p:nvSpPr>
@@ -16618,6 +16998,10 @@
             </a:outerShdw>
           </a:effectLst>
         </p:spPr>
+        <p:txBody>
+          <a:bodyPr/>
+          <a:p/>
+        </p:txBody>
       </p:sp>
       <p:sp>
         <p:nvSpPr>
@@ -16729,6 +17113,10 @@
             </a:outerShdw>
           </a:effectLst>
         </p:spPr>
+        <p:txBody>
+          <a:bodyPr/>
+          <a:p/>
+        </p:txBody>
       </p:sp>
       <p:sp>
         <p:nvSpPr>
@@ -16840,6 +17228,10 @@
             </a:outerShdw>
           </a:effectLst>
         </p:spPr>
+        <p:txBody>
+          <a:bodyPr/>
+          <a:p/>
+        </p:txBody>
       </p:sp>
       <p:sp>
         <p:nvSpPr>
@@ -16951,6 +17343,10 @@
             </a:outerShdw>
           </a:effectLst>
         </p:spPr>
+        <p:txBody>
+          <a:bodyPr/>
+          <a:p/>
+        </p:txBody>
       </p:sp>
       <p:sp>
         <p:nvSpPr>
@@ -17062,6 +17458,10 @@
             </a:outerShdw>
           </a:effectLst>
         </p:spPr>
+        <p:txBody>
+          <a:bodyPr/>
+          <a:p/>
+        </p:txBody>
       </p:sp>
       <p:sp>
         <p:nvSpPr>
@@ -17196,6 +17596,10 @@
           </a:solidFill>
           <a:ln/>
         </p:spPr>
+        <p:txBody>
+          <a:bodyPr/>
+          <a:p/>
+        </p:txBody>
       </p:sp>
       <p:sp>
         <p:nvSpPr>
@@ -17355,7 +17759,7 @@
                 <a:ea typeface="微软雅黑" pitchFamily="34" charset="-122"/>
                 <a:cs typeface="微软雅黑" pitchFamily="34" charset="-120"/>
               </a:rPr>
-              <a:t>帮扶管理信息系统 v1.12.15</a:t>
+              <a:t>帮扶管理信息系统 v1.12.17</a:t>
             </a:r>
             <a:endParaRPr lang="en-US" sz="1050" dirty="0"/>
           </a:p>
@@ -17389,6 +17793,10 @@
             </a:outerShdw>
           </a:effectLst>
         </p:spPr>
+        <p:txBody>
+          <a:bodyPr/>
+          <a:p/>
+        </p:txBody>
       </p:sp>
       <p:sp>
         <p:nvSpPr>
@@ -17500,6 +17908,10 @@
             </a:outerShdw>
           </a:effectLst>
         </p:spPr>
+        <p:txBody>
+          <a:bodyPr/>
+          <a:p/>
+        </p:txBody>
       </p:sp>
       <p:sp>
         <p:nvSpPr>
@@ -17611,6 +18023,10 @@
             </a:outerShdw>
           </a:effectLst>
         </p:spPr>
+        <p:txBody>
+          <a:bodyPr/>
+          <a:p/>
+        </p:txBody>
       </p:sp>
       <p:sp>
         <p:nvSpPr>
@@ -17722,6 +18138,10 @@
             </a:outerShdw>
           </a:effectLst>
         </p:spPr>
+        <p:txBody>
+          <a:bodyPr/>
+          <a:p/>
+        </p:txBody>
       </p:sp>
       <p:sp>
         <p:nvSpPr>
@@ -17833,6 +18253,10 @@
             </a:outerShdw>
           </a:effectLst>
         </p:spPr>
+        <p:txBody>
+          <a:bodyPr/>
+          <a:p/>
+        </p:txBody>
       </p:sp>
       <p:sp>
         <p:nvSpPr>
@@ -17944,6 +18368,10 @@
             </a:outerShdw>
           </a:effectLst>
         </p:spPr>
+        <p:txBody>
+          <a:bodyPr/>
+          <a:p/>
+        </p:txBody>
       </p:sp>
       <p:sp>
         <p:nvSpPr>
@@ -18382,6 +18810,10 @@
           </a:solidFill>
           <a:ln/>
         </p:spPr>
+        <p:txBody>
+          <a:bodyPr/>
+          <a:p/>
+        </p:txBody>
       </p:sp>
       <p:sp>
         <p:nvSpPr>
@@ -18541,7 +18973,7 @@
                 <a:ea typeface="微软雅黑" pitchFamily="34" charset="-122"/>
                 <a:cs typeface="微软雅黑" pitchFamily="34" charset="-120"/>
               </a:rPr>
-              <a:t>帮扶管理信息系统 v1.12.15</a:t>
+              <a:t>帮扶管理信息系统 v1.12.17</a:t>
             </a:r>
             <a:endParaRPr lang="en-US" sz="1050" dirty="0"/>
           </a:p>
@@ -18575,6 +19007,10 @@
             </a:outerShdw>
           </a:effectLst>
         </p:spPr>
+        <p:txBody>
+          <a:bodyPr/>
+          <a:p/>
+        </p:txBody>
       </p:sp>
       <p:sp>
         <p:nvSpPr>
@@ -18597,6 +19033,10 @@
           </a:solidFill>
           <a:ln/>
         </p:spPr>
+        <p:txBody>
+          <a:bodyPr/>
+          <a:p/>
+        </p:txBody>
       </p:sp>
       <p:sp>
         <p:nvSpPr>
@@ -18749,6 +19189,10 @@
             </a:outerShdw>
           </a:effectLst>
         </p:spPr>
+        <p:txBody>
+          <a:bodyPr/>
+          <a:p/>
+        </p:txBody>
       </p:sp>
       <p:sp>
         <p:nvSpPr>
@@ -18771,6 +19215,10 @@
           </a:solidFill>
           <a:ln/>
         </p:spPr>
+        <p:txBody>
+          <a:bodyPr/>
+          <a:p/>
+        </p:txBody>
       </p:sp>
       <p:sp>
         <p:nvSpPr>
@@ -18923,6 +19371,10 @@
             </a:outerShdw>
           </a:effectLst>
         </p:spPr>
+        <p:txBody>
+          <a:bodyPr/>
+          <a:p/>
+        </p:txBody>
       </p:sp>
       <p:sp>
         <p:nvSpPr>
@@ -18945,6 +19397,10 @@
           </a:solidFill>
           <a:ln/>
         </p:spPr>
+        <p:txBody>
+          <a:bodyPr/>
+          <a:p/>
+        </p:txBody>
       </p:sp>
       <p:sp>
         <p:nvSpPr>
@@ -19097,6 +19553,10 @@
             </a:outerShdw>
           </a:effectLst>
         </p:spPr>
+        <p:txBody>
+          <a:bodyPr/>
+          <a:p/>
+        </p:txBody>
       </p:sp>
       <p:sp>
         <p:nvSpPr>
@@ -19119,6 +19579,10 @@
           </a:solidFill>
           <a:ln/>
         </p:spPr>
+        <p:txBody>
+          <a:bodyPr/>
+          <a:p/>
+        </p:txBody>
       </p:sp>
       <p:sp>
         <p:nvSpPr>
@@ -19381,6 +19845,10 @@
           </a:solidFill>
           <a:ln/>
         </p:spPr>
+        <p:txBody>
+          <a:bodyPr/>
+          <a:p/>
+        </p:txBody>
       </p:sp>
       <p:sp>
         <p:nvSpPr>
@@ -19540,7 +20008,7 @@
                 <a:ea typeface="微软雅黑" pitchFamily="34" charset="-122"/>
                 <a:cs typeface="微软雅黑" pitchFamily="34" charset="-120"/>
               </a:rPr>
-              <a:t>帮扶管理信息系统 v1.12.15</a:t>
+              <a:t>帮扶管理信息系统 v1.12.17</a:t>
             </a:r>
             <a:endParaRPr lang="en-US" sz="1050" dirty="0"/>
           </a:p>
@@ -19574,6 +20042,10 @@
             </a:outerShdw>
           </a:effectLst>
         </p:spPr>
+        <p:txBody>
+          <a:bodyPr/>
+          <a:p/>
+        </p:txBody>
       </p:sp>
       <p:sp>
         <p:nvSpPr>
@@ -19726,6 +20198,10 @@
             </a:outerShdw>
           </a:effectLst>
         </p:spPr>
+        <p:txBody>
+          <a:bodyPr/>
+          <a:p/>
+        </p:txBody>
       </p:sp>
       <p:sp>
         <p:nvSpPr>
@@ -19878,6 +20354,10 @@
             </a:outerShdw>
           </a:effectLst>
         </p:spPr>
+        <p:txBody>
+          <a:bodyPr/>
+          <a:p/>
+        </p:txBody>
       </p:sp>
       <p:sp>
         <p:nvSpPr>
@@ -20030,6 +20510,10 @@
             </a:outerShdw>
           </a:effectLst>
         </p:spPr>
+        <p:txBody>
+          <a:bodyPr/>
+          <a:p/>
+        </p:txBody>
       </p:sp>
       <p:sp>
         <p:nvSpPr>
@@ -20210,6 +20694,10 @@
           </a:solidFill>
           <a:ln/>
         </p:spPr>
+        <p:txBody>
+          <a:bodyPr/>
+          <a:p/>
+        </p:txBody>
       </p:sp>
       <p:sp>
         <p:nvSpPr>
@@ -20369,7 +20857,7 @@
                 <a:ea typeface="微软雅黑" pitchFamily="34" charset="-122"/>
                 <a:cs typeface="微软雅黑" pitchFamily="34" charset="-120"/>
               </a:rPr>
-              <a:t>帮扶管理信息系统 v1.12.15</a:t>
+              <a:t>帮扶管理信息系统 v1.12.17</a:t>
             </a:r>
             <a:endParaRPr lang="en-US" sz="1050" dirty="0"/>
           </a:p>
@@ -20403,6 +20891,10 @@
             </a:outerShdw>
           </a:effectLst>
         </p:spPr>
+        <p:txBody>
+          <a:bodyPr/>
+          <a:p/>
+        </p:txBody>
       </p:sp>
       <p:sp>
         <p:nvSpPr>
@@ -20466,6 +20958,10 @@
           </a:solidFill>
           <a:ln/>
         </p:spPr>
+        <p:txBody>
+          <a:bodyPr/>
+          <a:p/>
+        </p:txBody>
       </p:sp>
       <p:sp>
         <p:nvSpPr>
@@ -20531,6 +21027,10 @@
             <a:tailEnd type="triangle"/>
           </a:ln>
         </p:spPr>
+        <p:txBody>
+          <a:bodyPr/>
+          <a:p/>
+        </p:txBody>
       </p:sp>
       <p:sp>
         <p:nvSpPr>
@@ -20553,6 +21053,10 @@
           </a:solidFill>
           <a:ln/>
         </p:spPr>
+        <p:txBody>
+          <a:bodyPr/>
+          <a:p/>
+        </p:txBody>
       </p:sp>
       <p:sp>
         <p:nvSpPr>
@@ -20618,6 +21122,10 @@
             <a:tailEnd type="triangle"/>
           </a:ln>
         </p:spPr>
+        <p:txBody>
+          <a:bodyPr/>
+          <a:p/>
+        </p:txBody>
       </p:sp>
       <p:sp>
         <p:nvSpPr>
@@ -20640,6 +21148,10 @@
           </a:solidFill>
           <a:ln/>
         </p:spPr>
+        <p:txBody>
+          <a:bodyPr/>
+          <a:p/>
+        </p:txBody>
       </p:sp>
       <p:sp>
         <p:nvSpPr>
@@ -20776,6 +21288,10 @@
             </a:outerShdw>
           </a:effectLst>
         </p:spPr>
+        <p:txBody>
+          <a:bodyPr/>
+          <a:p/>
+        </p:txBody>
       </p:sp>
       <p:sp>
         <p:nvSpPr>
@@ -20954,6 +21470,10 @@
             </a:outerShdw>
           </a:effectLst>
         </p:spPr>
+        <p:txBody>
+          <a:bodyPr/>
+          <a:p/>
+        </p:txBody>
       </p:sp>
       <p:sp>
         <p:nvSpPr>
@@ -21088,6 +21608,10 @@
           </a:solidFill>
           <a:ln/>
         </p:spPr>
+        <p:txBody>
+          <a:bodyPr/>
+          <a:p/>
+        </p:txBody>
       </p:sp>
       <p:sp>
         <p:nvSpPr>
@@ -21247,7 +21771,7 @@
                 <a:ea typeface="微软雅黑" pitchFamily="34" charset="-122"/>
                 <a:cs typeface="微软雅黑" pitchFamily="34" charset="-120"/>
               </a:rPr>
-              <a:t>帮扶管理信息系统 v1.12.15</a:t>
+              <a:t>帮扶管理信息系统 v1.12.17</a:t>
             </a:r>
             <a:endParaRPr lang="en-US" sz="1050" dirty="0"/>
           </a:p>
@@ -21272,6 +21796,10 @@
           </a:solidFill>
           <a:ln/>
         </p:spPr>
+        <p:txBody>
+          <a:bodyPr/>
+          <a:p/>
+        </p:txBody>
       </p:sp>
       <p:sp>
         <p:nvSpPr>
@@ -21374,6 +21902,10 @@
           </a:solidFill>
           <a:ln/>
         </p:spPr>
+        <p:txBody>
+          <a:bodyPr/>
+          <a:p/>
+        </p:txBody>
       </p:sp>
       <p:sp>
         <p:nvSpPr>
@@ -21476,6 +22008,10 @@
           </a:solidFill>
           <a:ln/>
         </p:spPr>
+        <p:txBody>
+          <a:bodyPr/>
+          <a:p/>
+        </p:txBody>
       </p:sp>
       <p:sp>
         <p:nvSpPr>
@@ -21578,6 +22114,10 @@
           </a:solidFill>
           <a:ln/>
         </p:spPr>
+        <p:txBody>
+          <a:bodyPr/>
+          <a:p/>
+        </p:txBody>
       </p:sp>
       <p:sp>
         <p:nvSpPr>
@@ -21680,6 +22220,10 @@
           </a:solidFill>
           <a:ln/>
         </p:spPr>
+        <p:txBody>
+          <a:bodyPr/>
+          <a:p/>
+        </p:txBody>
       </p:sp>
       <p:sp>
         <p:nvSpPr>
@@ -21782,6 +22326,10 @@
           </a:solidFill>
           <a:ln/>
         </p:spPr>
+        <p:txBody>
+          <a:bodyPr/>
+          <a:p/>
+        </p:txBody>
       </p:sp>
       <p:sp>
         <p:nvSpPr>
@@ -22220,6 +22768,10 @@
           </a:solidFill>
           <a:ln/>
         </p:spPr>
+        <p:txBody>
+          <a:bodyPr/>
+          <a:p/>
+        </p:txBody>
       </p:sp>
       <p:sp>
         <p:nvSpPr>
@@ -22379,7 +22931,7 @@
                 <a:ea typeface="微软雅黑" pitchFamily="34" charset="-122"/>
                 <a:cs typeface="微软雅黑" pitchFamily="34" charset="-120"/>
               </a:rPr>
-              <a:t>帮扶管理信息系统 v1.12.15</a:t>
+              <a:t>帮扶管理信息系统 v1.12.17</a:t>
             </a:r>
             <a:endParaRPr lang="en-US" sz="1050" dirty="0"/>
           </a:p>
@@ -22404,6 +22956,10 @@
           </a:solidFill>
           <a:ln/>
         </p:spPr>
+        <p:txBody>
+          <a:bodyPr/>
+          <a:p/>
+        </p:txBody>
       </p:sp>
       <p:sp>
         <p:nvSpPr>
@@ -22465,6 +23021,10 @@
           </a:solidFill>
           <a:ln/>
         </p:spPr>
+        <p:txBody>
+          <a:bodyPr/>
+          <a:p/>
+        </p:txBody>
       </p:sp>
       <p:sp>
         <p:nvSpPr>
@@ -22526,6 +23086,10 @@
           </a:solidFill>
           <a:ln/>
         </p:spPr>
+        <p:txBody>
+          <a:bodyPr/>
+          <a:p/>
+        </p:txBody>
       </p:sp>
       <p:sp>
         <p:nvSpPr>
@@ -22587,6 +23151,10 @@
           </a:solidFill>
           <a:ln/>
         </p:spPr>
+        <p:txBody>
+          <a:bodyPr/>
+          <a:p/>
+        </p:txBody>
       </p:sp>
       <p:sp>
         <p:nvSpPr>
@@ -22648,6 +23216,10 @@
           </a:solidFill>
           <a:ln/>
         </p:spPr>
+        <p:txBody>
+          <a:bodyPr/>
+          <a:p/>
+        </p:txBody>
       </p:sp>
       <p:sp>
         <p:nvSpPr>
@@ -23013,7 +23585,7 @@
                 <a:ea typeface="微软雅黑" pitchFamily="34" charset="-122"/>
                 <a:cs typeface="微软雅黑" pitchFamily="34" charset="-120"/>
               </a:rPr>
-              <a:t>18,745 项自动化测试（后端 12,422 + 前端 6,323）</a:t>
+              <a:t>18,745 项自动化测试（后端 12716 + 前端 6363）</a:t>
             </a:r>
             <a:endParaRPr lang="en-US" sz="1400" dirty="0"/>
           </a:p>
@@ -23216,6 +23788,10 @@
           </a:solidFill>
           <a:ln/>
         </p:spPr>
+        <p:txBody>
+          <a:bodyPr/>
+          <a:p/>
+        </p:txBody>
       </p:sp>
       <p:sp>
         <p:nvSpPr>
@@ -23375,7 +23951,7 @@
                 <a:ea typeface="微软雅黑" pitchFamily="34" charset="-122"/>
                 <a:cs typeface="微软雅黑" pitchFamily="34" charset="-120"/>
               </a:rPr>
-              <a:t>帮扶管理信息系统 v1.12.15</a:t>
+              <a:t>帮扶管理信息系统 v1.12.17</a:t>
             </a:r>
             <a:endParaRPr lang="en-US" sz="1050" dirty="0"/>
           </a:p>
@@ -23432,7 +24008,7 @@
                 <a:ea typeface="微软雅黑" pitchFamily="34" charset="-122"/>
                 <a:cs typeface="微软雅黑" pitchFamily="34" charset="-120"/>
               </a:rPr>
-              <a:t>数据来源：2026-10-08 实测（v1.12.15）· 后端 12,422 / 前端 6,323 用例 · 覆盖率 100%（行+分支）</a:t>
+              <a:t>数据来源：2026-10-17 实测（v1.12.17）· 后端 12716 / 前端 6363 用例 · 覆盖率 100%（行+分支）</a:t>
             </a:r>
             <a:endParaRPr lang="en-US" sz="1050" dirty="0"/>
           </a:p>
@@ -23466,6 +24042,10 @@
             </a:outerShdw>
           </a:effectLst>
         </p:spPr>
+        <p:txBody>
+          <a:bodyPr/>
+          <a:p/>
+        </p:txBody>
       </p:sp>
       <p:sp>
         <p:nvSpPr>
@@ -23730,6 +24310,10 @@
           </a:solidFill>
           <a:ln/>
         </p:spPr>
+        <p:txBody>
+          <a:bodyPr/>
+          <a:p/>
+        </p:txBody>
       </p:sp>
       <p:sp>
         <p:nvSpPr>
@@ -23889,7 +24473,7 @@
                 <a:ea typeface="微软雅黑" pitchFamily="34" charset="-122"/>
                 <a:cs typeface="微软雅黑" pitchFamily="34" charset="-120"/>
               </a:rPr>
-              <a:t>帮扶管理信息系统 v1.12.15</a:t>
+              <a:t>帮扶管理信息系统 v1.12.17</a:t>
             </a:r>
             <a:endParaRPr lang="en-US" sz="1050" dirty="0"/>
           </a:p>
@@ -23916,6 +24500,10 @@
           </a:solidFill>
           <a:ln/>
         </p:spPr>
+        <p:txBody>
+          <a:bodyPr/>
+          <a:p/>
+        </p:txBody>
       </p:sp>
       <p:sp>
         <p:nvSpPr>
@@ -24020,6 +24608,10 @@
           </a:solidFill>
           <a:ln/>
         </p:spPr>
+        <p:txBody>
+          <a:bodyPr/>
+          <a:p/>
+        </p:txBody>
       </p:sp>
       <p:sp>
         <p:nvSpPr>
@@ -24124,6 +24716,10 @@
           </a:solidFill>
           <a:ln/>
         </p:spPr>
+        <p:txBody>
+          <a:bodyPr/>
+          <a:p/>
+        </p:txBody>
       </p:sp>
       <p:sp>
         <p:nvSpPr>
@@ -24228,6 +24824,10 @@
           </a:solidFill>
           <a:ln/>
         </p:spPr>
+        <p:txBody>
+          <a:bodyPr/>
+          <a:p/>
+        </p:txBody>
       </p:sp>
       <p:sp>
         <p:nvSpPr>
@@ -24403,6 +25003,10 @@
           </a:solidFill>
           <a:ln/>
         </p:spPr>
+        <p:txBody>
+          <a:bodyPr/>
+          <a:p/>
+        </p:txBody>
       </p:sp>
       <p:sp>
         <p:nvSpPr>
@@ -24562,7 +25166,7 @@
                 <a:ea typeface="微软雅黑" pitchFamily="34" charset="-122"/>
                 <a:cs typeface="微软雅黑" pitchFamily="34" charset="-120"/>
               </a:rPr>
-              <a:t>帮扶管理信息系统 v1.12.15</a:t>
+              <a:t>帮扶管理信息系统 v1.12.17</a:t>
             </a:r>
             <a:endParaRPr lang="en-US" sz="1050" dirty="0"/>
           </a:p>
@@ -24596,6 +25200,10 @@
             </a:outerShdw>
           </a:effectLst>
         </p:spPr>
+        <p:txBody>
+          <a:bodyPr/>
+          <a:p/>
+        </p:txBody>
       </p:sp>
       <p:sp>
         <p:nvSpPr>
@@ -24795,6 +25403,10 @@
             </a:outerShdw>
           </a:effectLst>
         </p:spPr>
+        <p:txBody>
+          <a:bodyPr/>
+          <a:p/>
+        </p:txBody>
       </p:sp>
       <p:sp>
         <p:nvSpPr>
@@ -25017,6 +25629,10 @@
           </a:solidFill>
           <a:ln/>
         </p:spPr>
+        <p:txBody>
+          <a:bodyPr/>
+          <a:p/>
+        </p:txBody>
       </p:sp>
       <p:sp>
         <p:nvSpPr>
@@ -25176,7 +25792,7 @@
                 <a:ea typeface="微软雅黑" pitchFamily="34" charset="-122"/>
                 <a:cs typeface="微软雅黑" pitchFamily="34" charset="-120"/>
               </a:rPr>
-              <a:t>帮扶管理信息系统 v1.12.15</a:t>
+              <a:t>帮扶管理信息系统 v1.12.17</a:t>
             </a:r>
             <a:endParaRPr lang="en-US" sz="1050" dirty="0"/>
           </a:p>
@@ -25210,6 +25826,10 @@
             </a:outerShdw>
           </a:effectLst>
         </p:spPr>
+        <p:txBody>
+          <a:bodyPr/>
+          <a:p/>
+        </p:txBody>
       </p:sp>
       <p:sp>
         <p:nvSpPr>
@@ -25409,6 +26029,10 @@
             </a:outerShdw>
           </a:effectLst>
         </p:spPr>
+        <p:txBody>
+          <a:bodyPr/>
+          <a:p/>
+        </p:txBody>
       </p:sp>
       <p:sp>
         <p:nvSpPr>
@@ -25956,6 +26580,10 @@
           </a:solidFill>
           <a:ln/>
         </p:spPr>
+        <p:txBody>
+          <a:bodyPr/>
+          <a:p/>
+        </p:txBody>
       </p:sp>
       <p:sp>
         <p:nvSpPr>
@@ -26115,7 +26743,7 @@
                 <a:ea typeface="微软雅黑" pitchFamily="34" charset="-122"/>
                 <a:cs typeface="微软雅黑" pitchFamily="34" charset="-120"/>
               </a:rPr>
-              <a:t>帮扶管理信息系统 v1.12.15</a:t>
+              <a:t>帮扶管理信息系统 v1.12.17</a:t>
             </a:r>
             <a:endParaRPr lang="en-US" sz="1050" dirty="0"/>
           </a:p>
@@ -26149,6 +26777,10 @@
             </a:outerShdw>
           </a:effectLst>
         </p:spPr>
+        <p:txBody>
+          <a:bodyPr/>
+          <a:p/>
+        </p:txBody>
       </p:sp>
       <p:sp>
         <p:nvSpPr>
@@ -26212,6 +26844,10 @@
           </a:solidFill>
           <a:ln/>
         </p:spPr>
+        <p:txBody>
+          <a:bodyPr/>
+          <a:p/>
+        </p:txBody>
       </p:sp>
       <p:sp>
         <p:nvSpPr>
@@ -26420,6 +27056,10 @@
             </a:outerShdw>
           </a:effectLst>
         </p:spPr>
+        <p:txBody>
+          <a:bodyPr/>
+          <a:p/>
+        </p:txBody>
       </p:sp>
       <p:sp>
         <p:nvSpPr>
@@ -26483,6 +27123,10 @@
           </a:solidFill>
           <a:ln/>
         </p:spPr>
+        <p:txBody>
+          <a:bodyPr/>
+          <a:p/>
+        </p:txBody>
       </p:sp>
       <p:sp>
         <p:nvSpPr>
@@ -26691,6 +27335,10 @@
             </a:outerShdw>
           </a:effectLst>
         </p:spPr>
+        <p:txBody>
+          <a:bodyPr/>
+          <a:p/>
+        </p:txBody>
       </p:sp>
       <p:sp>
         <p:nvSpPr>
@@ -26754,6 +27402,10 @@
           </a:solidFill>
           <a:ln/>
         </p:spPr>
+        <p:txBody>
+          <a:bodyPr/>
+          <a:p/>
+        </p:txBody>
       </p:sp>
       <p:sp>
         <p:nvSpPr>
@@ -27026,6 +27678,10 @@
           </a:solidFill>
           <a:ln/>
         </p:spPr>
+        <p:txBody>
+          <a:bodyPr/>
+          <a:p/>
+        </p:txBody>
       </p:sp>
       <p:sp>
         <p:nvSpPr>
@@ -27185,7 +27841,7 @@
                 <a:ea typeface="微软雅黑" pitchFamily="34" charset="-122"/>
                 <a:cs typeface="微软雅黑" pitchFamily="34" charset="-120"/>
               </a:rPr>
-              <a:t>帮扶管理信息系统 v1.12.15</a:t>
+              <a:t>帮扶管理信息系统 v1.12.17</a:t>
             </a:r>
             <a:endParaRPr lang="en-US" sz="1050" dirty="0"/>
           </a:p>
@@ -27219,6 +27875,10 @@
             </a:outerShdw>
           </a:effectLst>
         </p:spPr>
+        <p:txBody>
+          <a:bodyPr/>
+          <a:p/>
+        </p:txBody>
       </p:sp>
       <p:sp>
         <p:nvSpPr>
@@ -27418,6 +28078,10 @@
             </a:outerShdw>
           </a:effectLst>
         </p:spPr>
+        <p:txBody>
+          <a:bodyPr/>
+          <a:p/>
+        </p:txBody>
       </p:sp>
       <p:sp>
         <p:nvSpPr>
@@ -27661,6 +28325,10 @@
           </a:solidFill>
           <a:ln/>
         </p:spPr>
+        <p:txBody>
+          <a:bodyPr/>
+          <a:p/>
+        </p:txBody>
       </p:sp>
       <p:sp>
         <p:nvSpPr>
@@ -27820,7 +28488,7 @@
                 <a:ea typeface="微软雅黑" pitchFamily="34" charset="-122"/>
                 <a:cs typeface="微软雅黑" pitchFamily="34" charset="-120"/>
               </a:rPr>
-              <a:t>帮扶管理信息系统 v1.12.15</a:t>
+              <a:t>帮扶管理信息系统 v1.12.17</a:t>
             </a:r>
             <a:endParaRPr lang="en-US" sz="1050" dirty="0"/>
           </a:p>
@@ -27848,6 +28516,10 @@
             <a:prstDash val="solid"/>
           </a:ln>
         </p:spPr>
+        <p:txBody>
+          <a:bodyPr/>
+          <a:p/>
+        </p:txBody>
       </p:sp>
       <p:sp>
         <p:nvSpPr>
@@ -27868,6 +28540,10 @@
           </a:solidFill>
           <a:ln/>
         </p:spPr>
+        <p:txBody>
+          <a:bodyPr/>
+          <a:p/>
+        </p:txBody>
       </p:sp>
       <p:sp>
         <p:nvSpPr>
@@ -28011,6 +28687,10 @@
           </a:solidFill>
           <a:ln/>
         </p:spPr>
+        <p:txBody>
+          <a:bodyPr/>
+          <a:p/>
+        </p:txBody>
       </p:sp>
       <p:sp>
         <p:nvSpPr>
@@ -28154,6 +28834,10 @@
           </a:solidFill>
           <a:ln/>
         </p:spPr>
+        <p:txBody>
+          <a:bodyPr/>
+          <a:p/>
+        </p:txBody>
       </p:sp>
       <p:sp>
         <p:nvSpPr>
@@ -28297,6 +28981,10 @@
           </a:solidFill>
           <a:ln/>
         </p:spPr>
+        <p:txBody>
+          <a:bodyPr/>
+          <a:p/>
+        </p:txBody>
       </p:sp>
       <p:sp>
         <p:nvSpPr>
@@ -28440,6 +29128,10 @@
           </a:solidFill>
           <a:ln/>
         </p:spPr>
+        <p:txBody>
+          <a:bodyPr/>
+          <a:p/>
+        </p:txBody>
       </p:sp>
       <p:sp>
         <p:nvSpPr>
@@ -28592,6 +29284,10 @@
             </a:outerShdw>
           </a:effectLst>
         </p:spPr>
+        <p:txBody>
+          <a:bodyPr/>
+          <a:p/>
+        </p:txBody>
       </p:sp>
       <p:sp>
         <p:nvSpPr>
@@ -28628,7 +29324,7 @@
                 <a:ea typeface="微软雅黑" pitchFamily="34" charset="-122"/>
                 <a:cs typeface="微软雅黑" pitchFamily="34" charset="-120"/>
               </a:rPr>
-              <a:t>净效果：12,422 后端用例（行+分支覆盖率 100%）+ 6,323 前端用例全绿；Windows x64 与麒麟 ARM64 两个离线安装包由 GitHub Actions 全自动构建并发布 Release</a:t>
+              <a:t>净效果：12716 后端用例（行+分支覆盖率 100%）+ 6363 前端用例全绿；Windows x64 与麒麟 ARM64 两个离线安装包由 GitHub Actions 全自动构建并发布 Release</a:t>
             </a:r>
             <a:endParaRPr lang="en-US" sz="1350" dirty="0"/>
           </a:p>
@@ -28685,6 +29381,10 @@
           </a:solidFill>
           <a:ln/>
         </p:spPr>
+        <p:txBody>
+          <a:bodyPr/>
+          <a:p/>
+        </p:txBody>
       </p:sp>
       <p:sp>
         <p:nvSpPr>
@@ -28844,7 +29544,7 @@
                 <a:ea typeface="微软雅黑" pitchFamily="34" charset="-122"/>
                 <a:cs typeface="微软雅黑" pitchFamily="34" charset="-120"/>
               </a:rPr>
-              <a:t>帮扶管理信息系统 v1.12.15</a:t>
+              <a:t>帮扶管理信息系统 v1.12.17</a:t>
             </a:r>
             <a:endParaRPr lang="en-US" sz="1050" dirty="0"/>
           </a:p>
@@ -28910,6 +29610,10 @@
           </a:solidFill>
           <a:ln/>
         </p:spPr>
+        <p:txBody>
+          <a:bodyPr/>
+          <a:p/>
+        </p:txBody>
       </p:sp>
       <p:sp>
         <p:nvSpPr>
@@ -29012,6 +29716,10 @@
           </a:solidFill>
           <a:ln/>
         </p:spPr>
+        <p:txBody>
+          <a:bodyPr/>
+          <a:p/>
+        </p:txBody>
       </p:sp>
       <p:sp>
         <p:nvSpPr>
@@ -29114,6 +29822,10 @@
           </a:solidFill>
           <a:ln/>
         </p:spPr>
+        <p:txBody>
+          <a:bodyPr/>
+          <a:p/>
+        </p:txBody>
       </p:sp>
       <p:sp>
         <p:nvSpPr>
@@ -29248,6 +29960,10 @@
           </a:solidFill>
           <a:ln/>
         </p:spPr>
+        <p:txBody>
+          <a:bodyPr/>
+          <a:p/>
+        </p:txBody>
       </p:sp>
       <p:sp>
         <p:nvSpPr>
@@ -29407,7 +30123,7 @@
                 <a:ea typeface="微软雅黑" pitchFamily="34" charset="-122"/>
                 <a:cs typeface="微软雅黑" pitchFamily="34" charset="-120"/>
               </a:rPr>
-              <a:t>帮扶管理信息系统 v1.12.15</a:t>
+              <a:t>帮扶管理信息系统 v1.12.17</a:t>
             </a:r>
             <a:endParaRPr lang="en-US" sz="1050" dirty="0"/>
           </a:p>
@@ -29441,6 +30157,10 @@
             </a:outerShdw>
           </a:effectLst>
         </p:spPr>
+        <p:txBody>
+          <a:bodyPr/>
+          <a:p/>
+        </p:txBody>
       </p:sp>
       <p:sp>
         <p:nvSpPr>
@@ -29552,6 +30272,10 @@
             </a:outerShdw>
           </a:effectLst>
         </p:spPr>
+        <p:txBody>
+          <a:bodyPr/>
+          <a:p/>
+        </p:txBody>
       </p:sp>
       <p:sp>
         <p:nvSpPr>
@@ -29663,6 +30387,10 @@
             </a:outerShdw>
           </a:effectLst>
         </p:spPr>
+        <p:txBody>
+          <a:bodyPr/>
+          <a:p/>
+        </p:txBody>
       </p:sp>
       <p:sp>
         <p:nvSpPr>
@@ -29774,6 +30502,10 @@
             </a:outerShdw>
           </a:effectLst>
         </p:spPr>
+        <p:txBody>
+          <a:bodyPr/>
+          <a:p/>
+        </p:txBody>
       </p:sp>
       <p:sp>
         <p:nvSpPr>
@@ -29885,6 +30617,10 @@
             </a:outerShdw>
           </a:effectLst>
         </p:spPr>
+        <p:txBody>
+          <a:bodyPr/>
+          <a:p/>
+        </p:txBody>
       </p:sp>
       <p:sp>
         <p:nvSpPr>
@@ -29996,6 +30732,10 @@
             </a:outerShdw>
           </a:effectLst>
         </p:spPr>
+        <p:txBody>
+          <a:bodyPr/>
+          <a:p/>
+        </p:txBody>
       </p:sp>
       <p:sp>
         <p:nvSpPr>
@@ -30130,6 +30870,10 @@
           </a:solidFill>
           <a:ln/>
         </p:spPr>
+        <p:txBody>
+          <a:bodyPr/>
+          <a:p/>
+        </p:txBody>
       </p:sp>
       <p:sp>
         <p:nvSpPr>
@@ -30150,6 +30894,10 @@
           </a:solidFill>
           <a:ln/>
         </p:spPr>
+        <p:txBody>
+          <a:bodyPr/>
+          <a:p/>
+        </p:txBody>
       </p:sp>
       <p:sp>
         <p:nvSpPr>
@@ -30268,7 +31016,7 @@
                 <a:ea typeface="微软雅黑" pitchFamily="34" charset="-122"/>
                 <a:cs typeface="微软雅黑" pitchFamily="34" charset="-120"/>
               </a:rPr>
-              <a:t>帮扶管理信息系统 v1.12.15  ·  仓库：github.com/lzh745200/MRRS  ·  完整文档见 docs/ 目录</a:t>
+              <a:t>帮扶管理信息系统 v1.12.17  ·  仓库：github.com/lzh745200/MRRS  ·  完整文档见 docs/ 目录</a:t>
             </a:r>
             <a:endParaRPr lang="en-US" sz="1350" dirty="0"/>
           </a:p>
@@ -30309,7 +31057,7 @@
                 <a:ea typeface="微软雅黑" pitchFamily="34" charset="-122"/>
                 <a:cs typeface="微软雅黑" pitchFamily="34" charset="-120"/>
               </a:rPr>
-              <a:t>12,422 后端用例（行+分支覆盖率 100%）+ 6,323 前端用例 全绿守护 · Windows x64 / 麒麟 ARM64 双平台离线交付</a:t>
+              <a:t>12716 后端用例（行+分支覆盖率 100%）+ 6363 前端用例 全绿守护 · Windows x64 / 麒麟 ARM64 双平台离线交付</a:t>
             </a:r>
             <a:endParaRPr lang="en-US" sz="1350" dirty="0"/>
           </a:p>
@@ -30366,6 +31114,10 @@
           </a:solidFill>
           <a:ln/>
         </p:spPr>
+        <p:txBody>
+          <a:bodyPr/>
+          <a:p/>
+        </p:txBody>
       </p:sp>
       <p:sp>
         <p:nvSpPr>
@@ -30525,7 +31277,7 @@
                 <a:ea typeface="微软雅黑" pitchFamily="34" charset="-122"/>
                 <a:cs typeface="微软雅黑" pitchFamily="34" charset="-120"/>
               </a:rPr>
-              <a:t>帮扶管理信息系统 v1.12.15</a:t>
+              <a:t>帮扶管理信息系统 v1.12.17</a:t>
             </a:r>
             <a:endParaRPr lang="en-US" sz="1050" dirty="0"/>
           </a:p>
@@ -30559,6 +31311,10 @@
             </a:outerShdw>
           </a:effectLst>
         </p:spPr>
+        <p:txBody>
+          <a:bodyPr/>
+          <a:p/>
+        </p:txBody>
       </p:sp>
       <p:sp>
         <p:nvSpPr>
@@ -30579,6 +31335,10 @@
           </a:solidFill>
           <a:ln/>
         </p:spPr>
+        <p:txBody>
+          <a:bodyPr/>
+          <a:p/>
+        </p:txBody>
       </p:sp>
       <p:sp>
         <p:nvSpPr>
@@ -30690,6 +31450,10 @@
             </a:outerShdw>
           </a:effectLst>
         </p:spPr>
+        <p:txBody>
+          <a:bodyPr/>
+          <a:p/>
+        </p:txBody>
       </p:sp>
       <p:sp>
         <p:nvSpPr>
@@ -30710,6 +31474,10 @@
           </a:solidFill>
           <a:ln/>
         </p:spPr>
+        <p:txBody>
+          <a:bodyPr/>
+          <a:p/>
+        </p:txBody>
       </p:sp>
       <p:sp>
         <p:nvSpPr>
@@ -30821,6 +31589,10 @@
             </a:outerShdw>
           </a:effectLst>
         </p:spPr>
+        <p:txBody>
+          <a:bodyPr/>
+          <a:p/>
+        </p:txBody>
       </p:sp>
       <p:sp>
         <p:nvSpPr>
@@ -30841,6 +31613,10 @@
           </a:solidFill>
           <a:ln/>
         </p:spPr>
+        <p:txBody>
+          <a:bodyPr/>
+          <a:p/>
+        </p:txBody>
       </p:sp>
       <p:sp>
         <p:nvSpPr>
@@ -30952,6 +31728,10 @@
             </a:outerShdw>
           </a:effectLst>
         </p:spPr>
+        <p:txBody>
+          <a:bodyPr/>
+          <a:p/>
+        </p:txBody>
       </p:sp>
       <p:sp>
         <p:nvSpPr>
@@ -30972,6 +31752,10 @@
           </a:solidFill>
           <a:ln/>
         </p:spPr>
+        <p:txBody>
+          <a:bodyPr/>
+          <a:p/>
+        </p:txBody>
       </p:sp>
       <p:sp>
         <p:nvSpPr>
@@ -31106,6 +31890,10 @@
           </a:solidFill>
           <a:ln/>
         </p:spPr>
+        <p:txBody>
+          <a:bodyPr/>
+          <a:p/>
+        </p:txBody>
       </p:sp>
       <p:sp>
         <p:nvSpPr>
@@ -31265,7 +32053,7 @@
                 <a:ea typeface="微软雅黑" pitchFamily="34" charset="-122"/>
                 <a:cs typeface="微软雅黑" pitchFamily="34" charset="-120"/>
               </a:rPr>
-              <a:t>帮扶管理信息系统 v1.12.15</a:t>
+              <a:t>帮扶管理信息系统 v1.12.17</a:t>
             </a:r>
             <a:endParaRPr lang="en-US" sz="1050" dirty="0"/>
           </a:p>
@@ -31306,7 +32094,7 @@
                 <a:ea typeface="微软雅黑" pitchFamily="34" charset="-122"/>
                 <a:cs typeface="微软雅黑" pitchFamily="34" charset="-120"/>
               </a:rPr>
-              <a:t>12,422</a:t>
+              <a:t>12716</a:t>
             </a:r>
             <a:endParaRPr lang="en-US" sz="4000" dirty="0"/>
           </a:p>
@@ -31388,7 +32176,7 @@
                 <a:ea typeface="微软雅黑" pitchFamily="34" charset="-122"/>
                 <a:cs typeface="微软雅黑" pitchFamily="34" charset="-120"/>
               </a:rPr>
-              <a:t>6,323</a:t>
+              <a:t>6363</a:t>
             </a:r>
             <a:endParaRPr lang="en-US" sz="4000" dirty="0"/>
           </a:p>
@@ -31621,6 +32409,10 @@
             <a:prstDash val="solid"/>
           </a:ln>
         </p:spPr>
+        <p:txBody>
+          <a:bodyPr/>
+          <a:p/>
+        </p:txBody>
       </p:sp>
       <p:sp>
         <p:nvSpPr>
@@ -31985,7 +32777,7 @@
                 <a:ea typeface="微软雅黑" pitchFamily="34" charset="-122"/>
                 <a:cs typeface="微软雅黑" pitchFamily="34" charset="-120"/>
               </a:rPr>
-              <a:t>数据来源：2026-10-08 仓库实测（v1.12.15）—— 后端 12,422 用例全绿 / 行+分支覆盖率 100%（branch=True 严格门禁）· 前端 6,323 用例全绿 · flake8 0 · bandit 0 中高危 · vue-tsc 0 · eslint 0 警告</a:t>
+              <a:t>数据来源：2026-10-17 仓库实测（v1.12.17）—— 后端 12716 用例全绿 / 行+分支覆盖率 100%（branch=True 严格门禁）· 前端 6363 用例全绿 · flake8 0 · bandit 0 中高危 · vue-tsc 0 · eslint 0 警告</a:t>
             </a:r>
             <a:endParaRPr lang="en-US" sz="1000" dirty="0"/>
           </a:p>
@@ -32346,6 +33138,10 @@
           </a:solidFill>
           <a:ln/>
         </p:spPr>
+        <p:txBody>
+          <a:bodyPr/>
+          <a:p/>
+        </p:txBody>
       </p:sp>
       <p:sp>
         <p:nvSpPr>
@@ -32505,7 +33301,7 @@
                 <a:ea typeface="微软雅黑" pitchFamily="34" charset="-122"/>
                 <a:cs typeface="微软雅黑" pitchFamily="34" charset="-120"/>
               </a:rPr>
-              <a:t>帮扶管理信息系统 v1.12.15</a:t>
+              <a:t>帮扶管理信息系统 v1.12.17</a:t>
             </a:r>
             <a:endParaRPr lang="en-US" sz="1050" dirty="0"/>
           </a:p>
@@ -32539,6 +33335,10 @@
             </a:outerShdw>
           </a:effectLst>
         </p:spPr>
+        <p:txBody>
+          <a:bodyPr/>
+          <a:p/>
+        </p:txBody>
       </p:sp>
       <p:sp>
         <p:nvSpPr>
@@ -32758,6 +33558,10 @@
             </a:outerShdw>
           </a:effectLst>
         </p:spPr>
+        <p:txBody>
+          <a:bodyPr/>
+          <a:p/>
+        </p:txBody>
       </p:sp>
       <p:sp>
         <p:nvSpPr>
@@ -32977,6 +33781,10 @@
             </a:outerShdw>
           </a:effectLst>
         </p:spPr>
+        <p:txBody>
+          <a:bodyPr/>
+          <a:p/>
+        </p:txBody>
       </p:sp>
       <p:sp>
         <p:nvSpPr>
@@ -33196,6 +34004,10 @@
             </a:outerShdw>
           </a:effectLst>
         </p:spPr>
+        <p:txBody>
+          <a:bodyPr/>
+          <a:p/>
+        </p:txBody>
       </p:sp>
       <p:sp>
         <p:nvSpPr>
@@ -33438,6 +34250,10 @@
           </a:solidFill>
           <a:ln/>
         </p:spPr>
+        <p:txBody>
+          <a:bodyPr/>
+          <a:p/>
+        </p:txBody>
       </p:sp>
       <p:sp>
         <p:nvSpPr>
@@ -33597,7 +34413,7 @@
                 <a:ea typeface="微软雅黑" pitchFamily="34" charset="-122"/>
                 <a:cs typeface="微软雅黑" pitchFamily="34" charset="-120"/>
               </a:rPr>
-              <a:t>帮扶管理信息系统 v1.12.15</a:t>
+              <a:t>帮扶管理信息系统 v1.12.17</a:t>
             </a:r>
             <a:endParaRPr lang="en-US" sz="1050" dirty="0"/>
           </a:p>
@@ -33624,6 +34440,10 @@
           </a:solidFill>
           <a:ln/>
         </p:spPr>
+        <p:txBody>
+          <a:bodyPr/>
+          <a:p/>
+        </p:txBody>
       </p:sp>
       <p:sp>
         <p:nvSpPr>
@@ -33730,6 +34550,10 @@
             <a:tailEnd type="triangle"/>
           </a:ln>
         </p:spPr>
+        <p:txBody>
+          <a:bodyPr/>
+          <a:p/>
+        </p:txBody>
       </p:sp>
       <p:sp>
         <p:nvSpPr>
@@ -33752,6 +34576,10 @@
           </a:solidFill>
           <a:ln/>
         </p:spPr>
+        <p:txBody>
+          <a:bodyPr/>
+          <a:p/>
+        </p:txBody>
       </p:sp>
       <p:sp>
         <p:nvSpPr>
@@ -33858,6 +34686,10 @@
             <a:tailEnd type="triangle"/>
           </a:ln>
         </p:spPr>
+        <p:txBody>
+          <a:bodyPr/>
+          <a:p/>
+        </p:txBody>
       </p:sp>
       <p:sp>
         <p:nvSpPr>
@@ -33880,6 +34712,10 @@
           </a:solidFill>
           <a:ln/>
         </p:spPr>
+        <p:txBody>
+          <a:bodyPr/>
+          <a:p/>
+        </p:txBody>
       </p:sp>
       <p:sp>
         <p:nvSpPr>
@@ -33986,6 +34822,10 @@
             <a:tailEnd type="triangle"/>
           </a:ln>
         </p:spPr>
+        <p:txBody>
+          <a:bodyPr/>
+          <a:p/>
+        </p:txBody>
       </p:sp>
       <p:sp>
         <p:nvSpPr>
@@ -34008,6 +34848,10 @@
           </a:solidFill>
           <a:ln/>
         </p:spPr>
+        <p:txBody>
+          <a:bodyPr/>
+          <a:p/>
+        </p:txBody>
       </p:sp>
       <p:sp>
         <p:nvSpPr>

--- a/docs/帮扶管理信息系统介绍.pptx
+++ b/docs/帮扶管理信息系统介绍.pptx
@@ -4976,7 +4976,7 @@
                 <a:ea typeface="微软雅黑" pitchFamily="34" charset="-122"/>
                 <a:cs typeface="微软雅黑" pitchFamily="34" charset="-120"/>
               </a:rPr>
-              <a:t>V1.12.17  |  2026-10-17  |  FastAPI + Vue 3 + Electron + SQLite</a:t>
+              <a:t>V1.12.18  |  2026-10-17  |  FastAPI + Vue 3 + Electron + SQLite</a:t>
             </a:r>
             <a:endParaRPr lang="en-US" sz="1250" dirty="0"/>
           </a:p>
@@ -5196,7 +5196,7 @@
                 <a:ea typeface="微软雅黑" pitchFamily="34" charset="-122"/>
                 <a:cs typeface="微软雅黑" pitchFamily="34" charset="-120"/>
               </a:rPr>
-              <a:t>帮扶管理信息系统 v1.12.17</a:t>
+              <a:t>帮扶管理信息系统 v1.12.18</a:t>
             </a:r>
             <a:endParaRPr lang="en-US" sz="1050" dirty="0"/>
           </a:p>
@@ -5378,7 +5378,7 @@
                 <a:ea typeface="微软雅黑" pitchFamily="34" charset="-122"/>
                 <a:cs typeface="微软雅黑" pitchFamily="34" charset="-120"/>
               </a:rPr>
-              <a:t>299 个测试文件 · 6363 个用例</a:t>
+              <a:t>301 个测试文件 · 6363 个用例</a:t>
             </a:r>
             <a:endParaRPr lang="en-US" sz="1350" dirty="0"/>
           </a:p>
@@ -5822,7 +5822,7 @@
                 <a:ea typeface="微软雅黑" pitchFamily="34" charset="-122"/>
                 <a:cs typeface="微软雅黑" pitchFamily="34" charset="-120"/>
               </a:rPr>
-              <a:t>帮扶管理信息系统 v1.12.17</a:t>
+              <a:t>帮扶管理信息系统 v1.12.18</a:t>
             </a:r>
             <a:endParaRPr lang="en-US" sz="1050" dirty="0"/>
           </a:p>
@@ -6754,7 +6754,7 @@
                 <a:ea typeface="微软雅黑" pitchFamily="34" charset="-122"/>
                 <a:cs typeface="微软雅黑" pitchFamily="34" charset="-120"/>
               </a:rPr>
-              <a:t>帮扶管理信息系统 v1.12.17</a:t>
+              <a:t>帮扶管理信息系统 v1.12.18</a:t>
             </a:r>
             <a:endParaRPr lang="en-US" sz="1050" dirty="0"/>
           </a:p>
@@ -7380,7 +7380,7 @@
                 <a:ea typeface="微软雅黑" pitchFamily="34" charset="-122"/>
                 <a:cs typeface="微软雅黑" pitchFamily="34" charset="-120"/>
               </a:rPr>
-              <a:t>帮扶管理信息系统 v1.12.17</a:t>
+              <a:t>帮扶管理信息系统 v1.12.18</a:t>
             </a:r>
             <a:endParaRPr lang="en-US" sz="1050" dirty="0"/>
           </a:p>
@@ -8809,7 +8809,7 @@
                 <a:ea typeface="微软雅黑" pitchFamily="34" charset="-122"/>
                 <a:cs typeface="微软雅黑" pitchFamily="34" charset="-120"/>
               </a:rPr>
-              <a:t>帮扶管理信息系统 v1.12.17</a:t>
+              <a:t>帮扶管理信息系统 v1.12.18</a:t>
             </a:r>
             <a:endParaRPr lang="en-US" sz="1050" dirty="0"/>
           </a:p>
@@ -10006,7 +10006,7 @@
                 <a:ea typeface="微软雅黑" pitchFamily="34" charset="-122"/>
                 <a:cs typeface="微软雅黑" pitchFamily="34" charset="-120"/>
               </a:rPr>
-              <a:t>帮扶管理信息系统 v1.12.17</a:t>
+              <a:t>帮扶管理信息系统 v1.12.18</a:t>
             </a:r>
             <a:endParaRPr lang="en-US" sz="1050" dirty="0"/>
           </a:p>
@@ -10632,7 +10632,7 @@
                 <a:ea typeface="微软雅黑" pitchFamily="34" charset="-122"/>
                 <a:cs typeface="微软雅黑" pitchFamily="34" charset="-120"/>
               </a:rPr>
-              <a:t>帮扶管理信息系统 v1.12.17</a:t>
+              <a:t>帮扶管理信息系统 v1.12.18</a:t>
             </a:r>
             <a:endParaRPr lang="en-US" sz="1050" dirty="0"/>
           </a:p>
@@ -11496,7 +11496,7 @@
                 <a:ea typeface="微软雅黑" pitchFamily="34" charset="-122"/>
                 <a:cs typeface="微软雅黑" pitchFamily="34" charset="-120"/>
               </a:rPr>
-              <a:t>帮扶管理信息系统 v1.12.17</a:t>
+              <a:t>帮扶管理信息系统 v1.12.18</a:t>
             </a:r>
             <a:endParaRPr lang="en-US" sz="1050" dirty="0"/>
           </a:p>
@@ -12235,7 +12235,7 @@
                 <a:ea typeface="微软雅黑" pitchFamily="34" charset="-122"/>
                 <a:cs typeface="微软雅黑" pitchFamily="34" charset="-120"/>
               </a:rPr>
-              <a:t>帮扶管理信息系统 v1.12.17</a:t>
+              <a:t>帮扶管理信息系统 v1.12.18</a:t>
             </a:r>
             <a:endParaRPr lang="en-US" sz="1050" dirty="0"/>
           </a:p>
@@ -14829,7 +14829,7 @@
                 <a:ea typeface="微软雅黑" pitchFamily="34" charset="-122"/>
                 <a:cs typeface="微软雅黑" pitchFamily="34" charset="-120"/>
               </a:rPr>
-              <a:t>帮扶管理信息系统 v1.12.17</a:t>
+              <a:t>帮扶管理信息系统 v1.12.18</a:t>
             </a:r>
             <a:endParaRPr lang="en-US" sz="1050" dirty="0"/>
           </a:p>
@@ -15455,7 +15455,7 @@
                 <a:ea typeface="微软雅黑" pitchFamily="34" charset="-122"/>
                 <a:cs typeface="微软雅黑" pitchFamily="34" charset="-120"/>
               </a:rPr>
-              <a:t>帮扶管理信息系统 v1.12.17</a:t>
+              <a:t>帮扶管理信息系统 v1.12.18</a:t>
             </a:r>
             <a:endParaRPr lang="en-US" sz="1050" dirty="0"/>
           </a:p>
@@ -16150,7 +16150,7 @@
                 <a:ea typeface="微软雅黑" pitchFamily="34" charset="-122"/>
                 <a:cs typeface="微软雅黑" pitchFamily="34" charset="-120"/>
               </a:rPr>
-              <a:t>帮扶管理信息系统 v1.12.17</a:t>
+              <a:t>帮扶管理信息系统 v1.12.18</a:t>
             </a:r>
             <a:endParaRPr lang="en-US" sz="1050" dirty="0"/>
           </a:p>
@@ -16849,7 +16849,7 @@
                 <a:ea typeface="微软雅黑" pitchFamily="34" charset="-122"/>
                 <a:cs typeface="微软雅黑" pitchFamily="34" charset="-120"/>
               </a:rPr>
-              <a:t>帮扶管理信息系统 v1.12.17</a:t>
+              <a:t>帮扶管理信息系统 v1.12.18</a:t>
             </a:r>
             <a:endParaRPr lang="en-US" sz="1050" dirty="0"/>
           </a:p>
@@ -17759,7 +17759,7 @@
                 <a:ea typeface="微软雅黑" pitchFamily="34" charset="-122"/>
                 <a:cs typeface="微软雅黑" pitchFamily="34" charset="-120"/>
               </a:rPr>
-              <a:t>帮扶管理信息系统 v1.12.17</a:t>
+              <a:t>帮扶管理信息系统 v1.12.18</a:t>
             </a:r>
             <a:endParaRPr lang="en-US" sz="1050" dirty="0"/>
           </a:p>
@@ -18973,7 +18973,7 @@
                 <a:ea typeface="微软雅黑" pitchFamily="34" charset="-122"/>
                 <a:cs typeface="微软雅黑" pitchFamily="34" charset="-120"/>
               </a:rPr>
-              <a:t>帮扶管理信息系统 v1.12.17</a:t>
+              <a:t>帮扶管理信息系统 v1.12.18</a:t>
             </a:r>
             <a:endParaRPr lang="en-US" sz="1050" dirty="0"/>
           </a:p>
@@ -20008,7 +20008,7 @@
                 <a:ea typeface="微软雅黑" pitchFamily="34" charset="-122"/>
                 <a:cs typeface="微软雅黑" pitchFamily="34" charset="-120"/>
               </a:rPr>
-              <a:t>帮扶管理信息系统 v1.12.17</a:t>
+              <a:t>帮扶管理信息系统 v1.12.18</a:t>
             </a:r>
             <a:endParaRPr lang="en-US" sz="1050" dirty="0"/>
           </a:p>
@@ -20857,7 +20857,7 @@
                 <a:ea typeface="微软雅黑" pitchFamily="34" charset="-122"/>
                 <a:cs typeface="微软雅黑" pitchFamily="34" charset="-120"/>
               </a:rPr>
-              <a:t>帮扶管理信息系统 v1.12.17</a:t>
+              <a:t>帮扶管理信息系统 v1.12.18</a:t>
             </a:r>
             <a:endParaRPr lang="en-US" sz="1050" dirty="0"/>
           </a:p>
@@ -21771,7 +21771,7 @@
                 <a:ea typeface="微软雅黑" pitchFamily="34" charset="-122"/>
                 <a:cs typeface="微软雅黑" pitchFamily="34" charset="-120"/>
               </a:rPr>
-              <a:t>帮扶管理信息系统 v1.12.17</a:t>
+              <a:t>帮扶管理信息系统 v1.12.18</a:t>
             </a:r>
             <a:endParaRPr lang="en-US" sz="1050" dirty="0"/>
           </a:p>
@@ -22931,7 +22931,7 @@
                 <a:ea typeface="微软雅黑" pitchFamily="34" charset="-122"/>
                 <a:cs typeface="微软雅黑" pitchFamily="34" charset="-120"/>
               </a:rPr>
-              <a:t>帮扶管理信息系统 v1.12.17</a:t>
+              <a:t>帮扶管理信息系统 v1.12.18</a:t>
             </a:r>
             <a:endParaRPr lang="en-US" sz="1050" dirty="0"/>
           </a:p>
@@ -23585,7 +23585,7 @@
                 <a:ea typeface="微软雅黑" pitchFamily="34" charset="-122"/>
                 <a:cs typeface="微软雅黑" pitchFamily="34" charset="-120"/>
               </a:rPr>
-              <a:t>18,745 项自动化测试（后端 12716 + 前端 6363）</a:t>
+              <a:t>18,745 项自动化测试（后端 12795 + 前端 6363）</a:t>
             </a:r>
             <a:endParaRPr lang="en-US" sz="1400" dirty="0"/>
           </a:p>
@@ -23951,7 +23951,7 @@
                 <a:ea typeface="微软雅黑" pitchFamily="34" charset="-122"/>
                 <a:cs typeface="微软雅黑" pitchFamily="34" charset="-120"/>
               </a:rPr>
-              <a:t>帮扶管理信息系统 v1.12.17</a:t>
+              <a:t>帮扶管理信息系统 v1.12.18</a:t>
             </a:r>
             <a:endParaRPr lang="en-US" sz="1050" dirty="0"/>
           </a:p>
@@ -24008,7 +24008,7 @@
                 <a:ea typeface="微软雅黑" pitchFamily="34" charset="-122"/>
                 <a:cs typeface="微软雅黑" pitchFamily="34" charset="-120"/>
               </a:rPr>
-              <a:t>数据来源：2026-10-17 实测（v1.12.17）· 后端 12716 / 前端 6363 用例 · 覆盖率 100%（行+分支）</a:t>
+              <a:t>数据来源：2026-10-17 实测（v1.12.18）· 后端 12795 / 前端 6363 用例 · 覆盖率 100%（行+分支）</a:t>
             </a:r>
             <a:endParaRPr lang="en-US" sz="1050" dirty="0"/>
           </a:p>
@@ -24473,7 +24473,7 @@
                 <a:ea typeface="微软雅黑" pitchFamily="34" charset="-122"/>
                 <a:cs typeface="微软雅黑" pitchFamily="34" charset="-120"/>
               </a:rPr>
-              <a:t>帮扶管理信息系统 v1.12.17</a:t>
+              <a:t>帮扶管理信息系统 v1.12.18</a:t>
             </a:r>
             <a:endParaRPr lang="en-US" sz="1050" dirty="0"/>
           </a:p>
@@ -25166,7 +25166,7 @@
                 <a:ea typeface="微软雅黑" pitchFamily="34" charset="-122"/>
                 <a:cs typeface="微软雅黑" pitchFamily="34" charset="-120"/>
               </a:rPr>
-              <a:t>帮扶管理信息系统 v1.12.17</a:t>
+              <a:t>帮扶管理信息系统 v1.12.18</a:t>
             </a:r>
             <a:endParaRPr lang="en-US" sz="1050" dirty="0"/>
           </a:p>
@@ -25792,7 +25792,7 @@
                 <a:ea typeface="微软雅黑" pitchFamily="34" charset="-122"/>
                 <a:cs typeface="微软雅黑" pitchFamily="34" charset="-120"/>
               </a:rPr>
-              <a:t>帮扶管理信息系统 v1.12.17</a:t>
+              <a:t>帮扶管理信息系统 v1.12.18</a:t>
             </a:r>
             <a:endParaRPr lang="en-US" sz="1050" dirty="0"/>
           </a:p>
@@ -26743,7 +26743,7 @@
                 <a:ea typeface="微软雅黑" pitchFamily="34" charset="-122"/>
                 <a:cs typeface="微软雅黑" pitchFamily="34" charset="-120"/>
               </a:rPr>
-              <a:t>帮扶管理信息系统 v1.12.17</a:t>
+              <a:t>帮扶管理信息系统 v1.12.18</a:t>
             </a:r>
             <a:endParaRPr lang="en-US" sz="1050" dirty="0"/>
           </a:p>
@@ -27841,7 +27841,7 @@
                 <a:ea typeface="微软雅黑" pitchFamily="34" charset="-122"/>
                 <a:cs typeface="微软雅黑" pitchFamily="34" charset="-120"/>
               </a:rPr>
-              <a:t>帮扶管理信息系统 v1.12.17</a:t>
+              <a:t>帮扶管理信息系统 v1.12.18</a:t>
             </a:r>
             <a:endParaRPr lang="en-US" sz="1050" dirty="0"/>
           </a:p>
@@ -28488,7 +28488,7 @@
                 <a:ea typeface="微软雅黑" pitchFamily="34" charset="-122"/>
                 <a:cs typeface="微软雅黑" pitchFamily="34" charset="-120"/>
               </a:rPr>
-              <a:t>帮扶管理信息系统 v1.12.17</a:t>
+              <a:t>帮扶管理信息系统 v1.12.18</a:t>
             </a:r>
             <a:endParaRPr lang="en-US" sz="1050" dirty="0"/>
           </a:p>
@@ -29324,7 +29324,7 @@
                 <a:ea typeface="微软雅黑" pitchFamily="34" charset="-122"/>
                 <a:cs typeface="微软雅黑" pitchFamily="34" charset="-120"/>
               </a:rPr>
-              <a:t>净效果：12716 后端用例（行+分支覆盖率 100%）+ 6363 前端用例全绿；Windows x64 与麒麟 ARM64 两个离线安装包由 GitHub Actions 全自动构建并发布 Release</a:t>
+              <a:t>净效果：12795 后端用例（行+分支覆盖率 100%）+ 6363 前端用例全绿；Windows x64 与麒麟 ARM64 两个离线安装包由 GitHub Actions 全自动构建并发布 Release</a:t>
             </a:r>
             <a:endParaRPr lang="en-US" sz="1350" dirty="0"/>
           </a:p>
@@ -29544,7 +29544,7 @@
                 <a:ea typeface="微软雅黑" pitchFamily="34" charset="-122"/>
                 <a:cs typeface="微软雅黑" pitchFamily="34" charset="-120"/>
               </a:rPr>
-              <a:t>帮扶管理信息系统 v1.12.17</a:t>
+              <a:t>帮扶管理信息系统 v1.12.18</a:t>
             </a:r>
             <a:endParaRPr lang="en-US" sz="1050" dirty="0"/>
           </a:p>
@@ -30123,7 +30123,7 @@
                 <a:ea typeface="微软雅黑" pitchFamily="34" charset="-122"/>
                 <a:cs typeface="微软雅黑" pitchFamily="34" charset="-120"/>
               </a:rPr>
-              <a:t>帮扶管理信息系统 v1.12.17</a:t>
+              <a:t>帮扶管理信息系统 v1.12.18</a:t>
             </a:r>
             <a:endParaRPr lang="en-US" sz="1050" dirty="0"/>
           </a:p>
@@ -31016,7 +31016,7 @@
                 <a:ea typeface="微软雅黑" pitchFamily="34" charset="-122"/>
                 <a:cs typeface="微软雅黑" pitchFamily="34" charset="-120"/>
               </a:rPr>
-              <a:t>帮扶管理信息系统 v1.12.17  ·  仓库：github.com/lzh745200/MRRS  ·  完整文档见 docs/ 目录</a:t>
+              <a:t>帮扶管理信息系统 v1.12.18  ·  仓库：github.com/lzh745200/MRRS  ·  完整文档见 docs/ 目录</a:t>
             </a:r>
             <a:endParaRPr lang="en-US" sz="1350" dirty="0"/>
           </a:p>
@@ -31057,7 +31057,7 @@
                 <a:ea typeface="微软雅黑" pitchFamily="34" charset="-122"/>
                 <a:cs typeface="微软雅黑" pitchFamily="34" charset="-120"/>
               </a:rPr>
-              <a:t>12716 后端用例（行+分支覆盖率 100%）+ 6363 前端用例 全绿守护 · Windows x64 / 麒麟 ARM64 双平台离线交付</a:t>
+              <a:t>12795 后端用例（行+分支覆盖率 100%）+ 6363 前端用例 全绿守护 · Windows x64 / 麒麟 ARM64 双平台离线交付</a:t>
             </a:r>
             <a:endParaRPr lang="en-US" sz="1350" dirty="0"/>
           </a:p>
@@ -31277,7 +31277,7 @@
                 <a:ea typeface="微软雅黑" pitchFamily="34" charset="-122"/>
                 <a:cs typeface="微软雅黑" pitchFamily="34" charset="-120"/>
               </a:rPr>
-              <a:t>帮扶管理信息系统 v1.12.17</a:t>
+              <a:t>帮扶管理信息系统 v1.12.18</a:t>
             </a:r>
             <a:endParaRPr lang="en-US" sz="1050" dirty="0"/>
           </a:p>
@@ -32053,7 +32053,7 @@
                 <a:ea typeface="微软雅黑" pitchFamily="34" charset="-122"/>
                 <a:cs typeface="微软雅黑" pitchFamily="34" charset="-120"/>
               </a:rPr>
-              <a:t>帮扶管理信息系统 v1.12.17</a:t>
+              <a:t>帮扶管理信息系统 v1.12.18</a:t>
             </a:r>
             <a:endParaRPr lang="en-US" sz="1050" dirty="0"/>
           </a:p>
@@ -32094,7 +32094,7 @@
                 <a:ea typeface="微软雅黑" pitchFamily="34" charset="-122"/>
                 <a:cs typeface="微软雅黑" pitchFamily="34" charset="-120"/>
               </a:rPr>
-              <a:t>12716</a:t>
+              <a:t>12795</a:t>
             </a:r>
             <a:endParaRPr lang="en-US" sz="4000" dirty="0"/>
           </a:p>
@@ -32777,7 +32777,7 @@
                 <a:ea typeface="微软雅黑" pitchFamily="34" charset="-122"/>
                 <a:cs typeface="微软雅黑" pitchFamily="34" charset="-120"/>
               </a:rPr>
-              <a:t>数据来源：2026-10-17 仓库实测（v1.12.17）—— 后端 12716 用例全绿 / 行+分支覆盖率 100%（branch=True 严格门禁）· 前端 6363 用例全绿 · flake8 0 · bandit 0 中高危 · vue-tsc 0 · eslint 0 警告</a:t>
+              <a:t>数据来源：2026-10-17 仓库实测（v1.12.18）—— 后端 12795 用例全绿 / 行+分支覆盖率 100%（branch=True 严格门禁）· 前端 6363 用例全绿 · flake8 0 · bandit 0 中高危 · vue-tsc 0 · eslint 0 警告</a:t>
             </a:r>
             <a:endParaRPr lang="en-US" sz="1000" dirty="0"/>
           </a:p>
@@ -33301,7 +33301,7 @@
                 <a:ea typeface="微软雅黑" pitchFamily="34" charset="-122"/>
                 <a:cs typeface="微软雅黑" pitchFamily="34" charset="-120"/>
               </a:rPr>
-              <a:t>帮扶管理信息系统 v1.12.17</a:t>
+              <a:t>帮扶管理信息系统 v1.12.18</a:t>
             </a:r>
             <a:endParaRPr lang="en-US" sz="1050" dirty="0"/>
           </a:p>
@@ -34413,7 +34413,7 @@
                 <a:ea typeface="微软雅黑" pitchFamily="34" charset="-122"/>
                 <a:cs typeface="微软雅黑" pitchFamily="34" charset="-120"/>
               </a:rPr>
-              <a:t>帮扶管理信息系统 v1.12.17</a:t>
+              <a:t>帮扶管理信息系统 v1.12.18</a:t>
             </a:r>
             <a:endParaRPr lang="en-US" sz="1050" dirty="0"/>
           </a:p>

--- a/docs/帮扶管理信息系统介绍.pptx
+++ b/docs/帮扶管理信息系统介绍.pptx
@@ -4976,7 +4976,7 @@
                 <a:ea typeface="微软雅黑" pitchFamily="34" charset="-122"/>
                 <a:cs typeface="微软雅黑" pitchFamily="34" charset="-120"/>
               </a:rPr>
-              <a:t>V1.12.18  |  2026-10-17  |  FastAPI + Vue 3 + Electron + SQLite</a:t>
+              <a:t>V1.12.19  |  2026-10-17  |  FastAPI + Vue 3 + Electron + SQLite</a:t>
             </a:r>
             <a:endParaRPr lang="en-US" sz="1250" dirty="0"/>
           </a:p>
@@ -5196,7 +5196,7 @@
                 <a:ea typeface="微软雅黑" pitchFamily="34" charset="-122"/>
                 <a:cs typeface="微软雅黑" pitchFamily="34" charset="-120"/>
               </a:rPr>
-              <a:t>帮扶管理信息系统 v1.12.18</a:t>
+              <a:t>帮扶管理信息系统 v1.12.19</a:t>
             </a:r>
             <a:endParaRPr lang="en-US" sz="1050" dirty="0"/>
           </a:p>
@@ -5315,7 +5315,7 @@
                 <a:ea typeface="微软雅黑" pitchFamily="34" charset="-122"/>
                 <a:cs typeface="微软雅黑" pitchFamily="34" charset="-120"/>
               </a:rPr>
-              <a:t>131 个业务视图（34 个功能目录）</a:t>
+              <a:t>132 个业务视图（34 个功能目录）</a:t>
             </a:r>
             <a:endParaRPr lang="en-US" sz="1350" dirty="0"/>
           </a:p>
@@ -5378,7 +5378,7 @@
                 <a:ea typeface="微软雅黑" pitchFamily="34" charset="-122"/>
                 <a:cs typeface="微软雅黑" pitchFamily="34" charset="-120"/>
               </a:rPr>
-              <a:t>301 个测试文件 · 6363 个用例</a:t>
+              <a:t>303 个测试文件 · 6409 个用例</a:t>
             </a:r>
             <a:endParaRPr lang="en-US" sz="1350" dirty="0"/>
           </a:p>
@@ -5822,7 +5822,7 @@
                 <a:ea typeface="微软雅黑" pitchFamily="34" charset="-122"/>
                 <a:cs typeface="微软雅黑" pitchFamily="34" charset="-120"/>
               </a:rPr>
-              <a:t>帮扶管理信息系统 v1.12.18</a:t>
+              <a:t>帮扶管理信息系统 v1.12.19</a:t>
             </a:r>
             <a:endParaRPr lang="en-US" sz="1050" dirty="0"/>
           </a:p>
@@ -6754,7 +6754,7 @@
                 <a:ea typeface="微软雅黑" pitchFamily="34" charset="-122"/>
                 <a:cs typeface="微软雅黑" pitchFamily="34" charset="-120"/>
               </a:rPr>
-              <a:t>帮扶管理信息系统 v1.12.18</a:t>
+              <a:t>帮扶管理信息系统 v1.12.19</a:t>
             </a:r>
             <a:endParaRPr lang="en-US" sz="1050" dirty="0"/>
           </a:p>
@@ -7380,7 +7380,7 @@
                 <a:ea typeface="微软雅黑" pitchFamily="34" charset="-122"/>
                 <a:cs typeface="微软雅黑" pitchFamily="34" charset="-120"/>
               </a:rPr>
-              <a:t>帮扶管理信息系统 v1.12.18</a:t>
+              <a:t>帮扶管理信息系统 v1.12.19</a:t>
             </a:r>
             <a:endParaRPr lang="en-US" sz="1050" dirty="0"/>
           </a:p>
@@ -8809,7 +8809,7 @@
                 <a:ea typeface="微软雅黑" pitchFamily="34" charset="-122"/>
                 <a:cs typeface="微软雅黑" pitchFamily="34" charset="-120"/>
               </a:rPr>
-              <a:t>帮扶管理信息系统 v1.12.18</a:t>
+              <a:t>帮扶管理信息系统 v1.12.19</a:t>
             </a:r>
             <a:endParaRPr lang="en-US" sz="1050" dirty="0"/>
           </a:p>
@@ -10006,7 +10006,7 @@
                 <a:ea typeface="微软雅黑" pitchFamily="34" charset="-122"/>
                 <a:cs typeface="微软雅黑" pitchFamily="34" charset="-120"/>
               </a:rPr>
-              <a:t>帮扶管理信息系统 v1.12.18</a:t>
+              <a:t>帮扶管理信息系统 v1.12.19</a:t>
             </a:r>
             <a:endParaRPr lang="en-US" sz="1050" dirty="0"/>
           </a:p>
@@ -10632,7 +10632,7 @@
                 <a:ea typeface="微软雅黑" pitchFamily="34" charset="-122"/>
                 <a:cs typeface="微软雅黑" pitchFamily="34" charset="-120"/>
               </a:rPr>
-              <a:t>帮扶管理信息系统 v1.12.18</a:t>
+              <a:t>帮扶管理信息系统 v1.12.19</a:t>
             </a:r>
             <a:endParaRPr lang="en-US" sz="1050" dirty="0"/>
           </a:p>
@@ -11496,7 +11496,7 @@
                 <a:ea typeface="微软雅黑" pitchFamily="34" charset="-122"/>
                 <a:cs typeface="微软雅黑" pitchFamily="34" charset="-120"/>
               </a:rPr>
-              <a:t>帮扶管理信息系统 v1.12.18</a:t>
+              <a:t>帮扶管理信息系统 v1.12.19</a:t>
             </a:r>
             <a:endParaRPr lang="en-US" sz="1050" dirty="0"/>
           </a:p>
@@ -12235,7 +12235,7 @@
                 <a:ea typeface="微软雅黑" pitchFamily="34" charset="-122"/>
                 <a:cs typeface="微软雅黑" pitchFamily="34" charset="-120"/>
               </a:rPr>
-              <a:t>帮扶管理信息系统 v1.12.18</a:t>
+              <a:t>帮扶管理信息系统 v1.12.19</a:t>
             </a:r>
             <a:endParaRPr lang="en-US" sz="1050" dirty="0"/>
           </a:p>
@@ -14460,7 +14460,7 @@
                 <a:ea typeface="微软雅黑" pitchFamily="34" charset="-122"/>
                 <a:cs typeface="微软雅黑" pitchFamily="34" charset="-120"/>
               </a:rPr>
-              <a:t>18,745 项自动化测试 · CI/CD · 依赖自检</a:t>
+              <a:t>19,476 项自动化测试 · CI/CD · 依赖自检</a:t>
             </a:r>
             <a:endParaRPr lang="en-US" sz="1200" dirty="0"/>
           </a:p>
@@ -14829,7 +14829,7 @@
                 <a:ea typeface="微软雅黑" pitchFamily="34" charset="-122"/>
                 <a:cs typeface="微软雅黑" pitchFamily="34" charset="-120"/>
               </a:rPr>
-              <a:t>帮扶管理信息系统 v1.12.18</a:t>
+              <a:t>帮扶管理信息系统 v1.12.19</a:t>
             </a:r>
             <a:endParaRPr lang="en-US" sz="1050" dirty="0"/>
           </a:p>
@@ -15455,7 +15455,7 @@
                 <a:ea typeface="微软雅黑" pitchFamily="34" charset="-122"/>
                 <a:cs typeface="微软雅黑" pitchFamily="34" charset="-120"/>
               </a:rPr>
-              <a:t>帮扶管理信息系统 v1.12.18</a:t>
+              <a:t>帮扶管理信息系统 v1.12.19</a:t>
             </a:r>
             <a:endParaRPr lang="en-US" sz="1050" dirty="0"/>
           </a:p>
@@ -16150,7 +16150,7 @@
                 <a:ea typeface="微软雅黑" pitchFamily="34" charset="-122"/>
                 <a:cs typeface="微软雅黑" pitchFamily="34" charset="-120"/>
               </a:rPr>
-              <a:t>帮扶管理信息系统 v1.12.18</a:t>
+              <a:t>帮扶管理信息系统 v1.12.19</a:t>
             </a:r>
             <a:endParaRPr lang="en-US" sz="1050" dirty="0"/>
           </a:p>
@@ -16849,7 +16849,7 @@
                 <a:ea typeface="微软雅黑" pitchFamily="34" charset="-122"/>
                 <a:cs typeface="微软雅黑" pitchFamily="34" charset="-120"/>
               </a:rPr>
-              <a:t>帮扶管理信息系统 v1.12.18</a:t>
+              <a:t>帮扶管理信息系统 v1.12.19</a:t>
             </a:r>
             <a:endParaRPr lang="en-US" sz="1050" dirty="0"/>
           </a:p>
@@ -17759,7 +17759,7 @@
                 <a:ea typeface="微软雅黑" pitchFamily="34" charset="-122"/>
                 <a:cs typeface="微软雅黑" pitchFamily="34" charset="-120"/>
               </a:rPr>
-              <a:t>帮扶管理信息系统 v1.12.18</a:t>
+              <a:t>帮扶管理信息系统 v1.12.19</a:t>
             </a:r>
             <a:endParaRPr lang="en-US" sz="1050" dirty="0"/>
           </a:p>
@@ -18973,7 +18973,7 @@
                 <a:ea typeface="微软雅黑" pitchFamily="34" charset="-122"/>
                 <a:cs typeface="微软雅黑" pitchFamily="34" charset="-120"/>
               </a:rPr>
-              <a:t>帮扶管理信息系统 v1.12.18</a:t>
+              <a:t>帮扶管理信息系统 v1.12.19</a:t>
             </a:r>
             <a:endParaRPr lang="en-US" sz="1050" dirty="0"/>
           </a:p>
@@ -20008,7 +20008,7 @@
                 <a:ea typeface="微软雅黑" pitchFamily="34" charset="-122"/>
                 <a:cs typeface="微软雅黑" pitchFamily="34" charset="-120"/>
               </a:rPr>
-              <a:t>帮扶管理信息系统 v1.12.18</a:t>
+              <a:t>帮扶管理信息系统 v1.12.19</a:t>
             </a:r>
             <a:endParaRPr lang="en-US" sz="1050" dirty="0"/>
           </a:p>
@@ -20857,7 +20857,7 @@
                 <a:ea typeface="微软雅黑" pitchFamily="34" charset="-122"/>
                 <a:cs typeface="微软雅黑" pitchFamily="34" charset="-120"/>
               </a:rPr>
-              <a:t>帮扶管理信息系统 v1.12.18</a:t>
+              <a:t>帮扶管理信息系统 v1.12.19</a:t>
             </a:r>
             <a:endParaRPr lang="en-US" sz="1050" dirty="0"/>
           </a:p>
@@ -21771,7 +21771,7 @@
                 <a:ea typeface="微软雅黑" pitchFamily="34" charset="-122"/>
                 <a:cs typeface="微软雅黑" pitchFamily="34" charset="-120"/>
               </a:rPr>
-              <a:t>帮扶管理信息系统 v1.12.18</a:t>
+              <a:t>帮扶管理信息系统 v1.12.19</a:t>
             </a:r>
             <a:endParaRPr lang="en-US" sz="1050" dirty="0"/>
           </a:p>
@@ -22931,7 +22931,7 @@
                 <a:ea typeface="微软雅黑" pitchFamily="34" charset="-122"/>
                 <a:cs typeface="微软雅黑" pitchFamily="34" charset="-120"/>
               </a:rPr>
-              <a:t>帮扶管理信息系统 v1.12.18</a:t>
+              <a:t>帮扶管理信息系统 v1.12.19</a:t>
             </a:r>
             <a:endParaRPr lang="en-US" sz="1050" dirty="0"/>
           </a:p>
@@ -23585,7 +23585,7 @@
                 <a:ea typeface="微软雅黑" pitchFamily="34" charset="-122"/>
                 <a:cs typeface="微软雅黑" pitchFamily="34" charset="-120"/>
               </a:rPr>
-              <a:t>18,745 项自动化测试（后端 12795 + 前端 6363）</a:t>
+              <a:t>19,476 项自动化测试（后端 13067 + 前端 6409）</a:t>
             </a:r>
             <a:endParaRPr lang="en-US" sz="1400" dirty="0"/>
           </a:p>
@@ -23951,7 +23951,7 @@
                 <a:ea typeface="微软雅黑" pitchFamily="34" charset="-122"/>
                 <a:cs typeface="微软雅黑" pitchFamily="34" charset="-120"/>
               </a:rPr>
-              <a:t>帮扶管理信息系统 v1.12.18</a:t>
+              <a:t>帮扶管理信息系统 v1.12.19</a:t>
             </a:r>
             <a:endParaRPr lang="en-US" sz="1050" dirty="0"/>
           </a:p>
@@ -24008,7 +24008,7 @@
                 <a:ea typeface="微软雅黑" pitchFamily="34" charset="-122"/>
                 <a:cs typeface="微软雅黑" pitchFamily="34" charset="-120"/>
               </a:rPr>
-              <a:t>数据来源：2026-10-17 实测（v1.12.18）· 后端 12795 / 前端 6363 用例 · 覆盖率 100%（行+分支）</a:t>
+              <a:t>数据来源：2026-10-17 实测（v1.12.19）· 后端 13067 / 前端 6409 用例 · 覆盖率 100%（行+分支）</a:t>
             </a:r>
             <a:endParaRPr lang="en-US" sz="1050" dirty="0"/>
           </a:p>
@@ -24473,7 +24473,7 @@
                 <a:ea typeface="微软雅黑" pitchFamily="34" charset="-122"/>
                 <a:cs typeface="微软雅黑" pitchFamily="34" charset="-120"/>
               </a:rPr>
-              <a:t>帮扶管理信息系统 v1.12.18</a:t>
+              <a:t>帮扶管理信息系统 v1.12.19</a:t>
             </a:r>
             <a:endParaRPr lang="en-US" sz="1050" dirty="0"/>
           </a:p>
@@ -25166,7 +25166,7 @@
                 <a:ea typeface="微软雅黑" pitchFamily="34" charset="-122"/>
                 <a:cs typeface="微软雅黑" pitchFamily="34" charset="-120"/>
               </a:rPr>
-              <a:t>帮扶管理信息系统 v1.12.18</a:t>
+              <a:t>帮扶管理信息系统 v1.12.19</a:t>
             </a:r>
             <a:endParaRPr lang="en-US" sz="1050" dirty="0"/>
           </a:p>
@@ -25792,7 +25792,7 @@
                 <a:ea typeface="微软雅黑" pitchFamily="34" charset="-122"/>
                 <a:cs typeface="微软雅黑" pitchFamily="34" charset="-120"/>
               </a:rPr>
-              <a:t>帮扶管理信息系统 v1.12.18</a:t>
+              <a:t>帮扶管理信息系统 v1.12.19</a:t>
             </a:r>
             <a:endParaRPr lang="en-US" sz="1050" dirty="0"/>
           </a:p>
@@ -26743,7 +26743,7 @@
                 <a:ea typeface="微软雅黑" pitchFamily="34" charset="-122"/>
                 <a:cs typeface="微软雅黑" pitchFamily="34" charset="-120"/>
               </a:rPr>
-              <a:t>帮扶管理信息系统 v1.12.18</a:t>
+              <a:t>帮扶管理信息系统 v1.12.19</a:t>
             </a:r>
             <a:endParaRPr lang="en-US" sz="1050" dirty="0"/>
           </a:p>
@@ -27841,7 +27841,7 @@
                 <a:ea typeface="微软雅黑" pitchFamily="34" charset="-122"/>
                 <a:cs typeface="微软雅黑" pitchFamily="34" charset="-120"/>
               </a:rPr>
-              <a:t>帮扶管理信息系统 v1.12.18</a:t>
+              <a:t>帮扶管理信息系统 v1.12.19</a:t>
             </a:r>
             <a:endParaRPr lang="en-US" sz="1050" dirty="0"/>
           </a:p>
@@ -28488,7 +28488,7 @@
                 <a:ea typeface="微软雅黑" pitchFamily="34" charset="-122"/>
                 <a:cs typeface="微软雅黑" pitchFamily="34" charset="-120"/>
               </a:rPr>
-              <a:t>帮扶管理信息系统 v1.12.18</a:t>
+              <a:t>帮扶管理信息系统 v1.12.19</a:t>
             </a:r>
             <a:endParaRPr lang="en-US" sz="1050" dirty="0"/>
           </a:p>
@@ -29324,7 +29324,7 @@
                 <a:ea typeface="微软雅黑" pitchFamily="34" charset="-122"/>
                 <a:cs typeface="微软雅黑" pitchFamily="34" charset="-120"/>
               </a:rPr>
-              <a:t>净效果：12795 后端用例（行+分支覆盖率 100%）+ 6363 前端用例全绿；Windows x64 与麒麟 ARM64 两个离线安装包由 GitHub Actions 全自动构建并发布 Release</a:t>
+              <a:t>净效果：13067 后端用例（行+分支覆盖率 100%）+ 6409 前端用例全绿；Windows x64 与麒麟 ARM64 两个离线安装包由 GitHub Actions 全自动构建并发布 Release</a:t>
             </a:r>
             <a:endParaRPr lang="en-US" sz="1350" dirty="0"/>
           </a:p>
@@ -29544,7 +29544,7 @@
                 <a:ea typeface="微软雅黑" pitchFamily="34" charset="-122"/>
                 <a:cs typeface="微软雅黑" pitchFamily="34" charset="-120"/>
               </a:rPr>
-              <a:t>帮扶管理信息系统 v1.12.18</a:t>
+              <a:t>帮扶管理信息系统 v1.12.19</a:t>
             </a:r>
             <a:endParaRPr lang="en-US" sz="1050" dirty="0"/>
           </a:p>
@@ -30123,7 +30123,7 @@
                 <a:ea typeface="微软雅黑" pitchFamily="34" charset="-122"/>
                 <a:cs typeface="微软雅黑" pitchFamily="34" charset="-120"/>
               </a:rPr>
-              <a:t>帮扶管理信息系统 v1.12.18</a:t>
+              <a:t>帮扶管理信息系统 v1.12.19</a:t>
             </a:r>
             <a:endParaRPr lang="en-US" sz="1050" dirty="0"/>
           </a:p>
@@ -31016,7 +31016,7 @@
                 <a:ea typeface="微软雅黑" pitchFamily="34" charset="-122"/>
                 <a:cs typeface="微软雅黑" pitchFamily="34" charset="-120"/>
               </a:rPr>
-              <a:t>帮扶管理信息系统 v1.12.18  ·  仓库：github.com/lzh745200/MRRS  ·  完整文档见 docs/ 目录</a:t>
+              <a:t>帮扶管理信息系统 v1.12.19  ·  仓库：github.com/lzh745200/MRRS  ·  完整文档见 docs/ 目录</a:t>
             </a:r>
             <a:endParaRPr lang="en-US" sz="1350" dirty="0"/>
           </a:p>
@@ -31057,7 +31057,7 @@
                 <a:ea typeface="微软雅黑" pitchFamily="34" charset="-122"/>
                 <a:cs typeface="微软雅黑" pitchFamily="34" charset="-120"/>
               </a:rPr>
-              <a:t>12795 后端用例（行+分支覆盖率 100%）+ 6363 前端用例 全绿守护 · Windows x64 / 麒麟 ARM64 双平台离线交付</a:t>
+              <a:t>13067 后端用例（行+分支覆盖率 100%）+ 6409 前端用例 全绿守护 · Windows x64 / 麒麟 ARM64 双平台离线交付</a:t>
             </a:r>
             <a:endParaRPr lang="en-US" sz="1350" dirty="0"/>
           </a:p>
@@ -31277,7 +31277,7 @@
                 <a:ea typeface="微软雅黑" pitchFamily="34" charset="-122"/>
                 <a:cs typeface="微软雅黑" pitchFamily="34" charset="-120"/>
               </a:rPr>
-              <a:t>帮扶管理信息系统 v1.12.18</a:t>
+              <a:t>帮扶管理信息系统 v1.12.19</a:t>
             </a:r>
             <a:endParaRPr lang="en-US" sz="1050" dirty="0"/>
           </a:p>
@@ -32053,7 +32053,7 @@
                 <a:ea typeface="微软雅黑" pitchFamily="34" charset="-122"/>
                 <a:cs typeface="微软雅黑" pitchFamily="34" charset="-120"/>
               </a:rPr>
-              <a:t>帮扶管理信息系统 v1.12.18</a:t>
+              <a:t>帮扶管理信息系统 v1.12.19</a:t>
             </a:r>
             <a:endParaRPr lang="en-US" sz="1050" dirty="0"/>
           </a:p>
@@ -32094,7 +32094,7 @@
                 <a:ea typeface="微软雅黑" pitchFamily="34" charset="-122"/>
                 <a:cs typeface="微软雅黑" pitchFamily="34" charset="-120"/>
               </a:rPr>
-              <a:t>12795</a:t>
+              <a:t>13067</a:t>
             </a:r>
             <a:endParaRPr lang="en-US" sz="4000" dirty="0"/>
           </a:p>
@@ -32176,7 +32176,7 @@
                 <a:ea typeface="微软雅黑" pitchFamily="34" charset="-122"/>
                 <a:cs typeface="微软雅黑" pitchFamily="34" charset="-120"/>
               </a:rPr>
-              <a:t>6363</a:t>
+              <a:t>6409</a:t>
             </a:r>
             <a:endParaRPr lang="en-US" sz="4000" dirty="0"/>
           </a:p>
@@ -32340,7 +32340,7 @@
                 <a:ea typeface="微软雅黑" pitchFamily="34" charset="-122"/>
                 <a:cs typeface="微软雅黑" pitchFamily="34" charset="-120"/>
               </a:rPr>
-              <a:t>131</a:t>
+              <a:t>132</a:t>
             </a:r>
             <a:endParaRPr lang="en-US" sz="4000" dirty="0"/>
           </a:p>
@@ -32777,7 +32777,7 @@
                 <a:ea typeface="微软雅黑" pitchFamily="34" charset="-122"/>
                 <a:cs typeface="微软雅黑" pitchFamily="34" charset="-120"/>
               </a:rPr>
-              <a:t>数据来源：2026-10-17 仓库实测（v1.12.18）—— 后端 12795 用例全绿 / 行+分支覆盖率 100%（branch=True 严格门禁）· 前端 6363 用例全绿 · flake8 0 · bandit 0 中高危 · vue-tsc 0 · eslint 0 警告</a:t>
+              <a:t>数据来源：2026-10-17 仓库实测（v1.12.19）—— 后端 13067 用例全绿 / 行+分支覆盖率 100%（branch=True 严格门禁）· 前端 6409 用例全绿 · flake8 0 · bandit 0 中高危 · vue-tsc 0 · eslint 0 警告</a:t>
             </a:r>
             <a:endParaRPr lang="en-US" sz="1000" dirty="0"/>
           </a:p>
@@ -33301,7 +33301,7 @@
                 <a:ea typeface="微软雅黑" pitchFamily="34" charset="-122"/>
                 <a:cs typeface="微软雅黑" pitchFamily="34" charset="-120"/>
               </a:rPr>
-              <a:t>帮扶管理信息系统 v1.12.18</a:t>
+              <a:t>帮扶管理信息系统 v1.12.19</a:t>
             </a:r>
             <a:endParaRPr lang="en-US" sz="1050" dirty="0"/>
           </a:p>
@@ -33726,7 +33726,7 @@
                 <a:ea typeface="微软雅黑" pitchFamily="34" charset="-122"/>
                 <a:cs typeface="微软雅黑" pitchFamily="34" charset="-120"/>
               </a:rPr>
-              <a:t>131 个视图 · 25 个共享组件</a:t>
+              <a:t>132 个视图 · 25 个共享组件</a:t>
             </a:r>
             <a:endParaRPr lang="en-US" sz="1200" dirty="0"/>
           </a:p>
@@ -34413,7 +34413,7 @@
                 <a:ea typeface="微软雅黑" pitchFamily="34" charset="-122"/>
                 <a:cs typeface="微软雅黑" pitchFamily="34" charset="-120"/>
               </a:rPr>
-              <a:t>帮扶管理信息系统 v1.12.18</a:t>
+              <a:t>帮扶管理信息系统 v1.12.19</a:t>
             </a:r>
             <a:endParaRPr lang="en-US" sz="1050" dirty="0"/>
           </a:p>
@@ -34657,7 +34657,7 @@
                 <a:ea typeface="微软雅黑" pitchFamily="34" charset="-122"/>
                 <a:cs typeface="微软雅黑" pitchFamily="34" charset="-120"/>
               </a:rPr>
-              <a:t>131 视图 · Pinia · Axios 信封拦截器 · CSRF 续期 · 离线 Mock</a:t>
+              <a:t>132 视图 · Pinia · Axios 信封拦截器 · CSRF 续期 · 离线 Mock</a:t>
             </a:r>
             <a:endParaRPr lang="en-US" sz="1250" dirty="0"/>
           </a:p>

--- a/docs/帮扶管理信息系统介绍.pptx
+++ b/docs/帮扶管理信息系统介绍.pptx
@@ -4976,7 +4976,7 @@
                 <a:ea typeface="微软雅黑" pitchFamily="34" charset="-122"/>
                 <a:cs typeface="微软雅黑" pitchFamily="34" charset="-120"/>
               </a:rPr>
-              <a:t>V1.12.19  |  2026-10-17  |  FastAPI + Vue 3 + Electron + SQLite</a:t>
+              <a:t>V1.12.20  |  2026-10-17  |  FastAPI + Vue 3 + Electron + SQLite</a:t>
             </a:r>
             <a:endParaRPr lang="en-US" sz="1250" dirty="0"/>
           </a:p>
@@ -5196,7 +5196,7 @@
                 <a:ea typeface="微软雅黑" pitchFamily="34" charset="-122"/>
                 <a:cs typeface="微软雅黑" pitchFamily="34" charset="-120"/>
               </a:rPr>
-              <a:t>帮扶管理信息系统 v1.12.19</a:t>
+              <a:t>帮扶管理信息系统 v1.12.20</a:t>
             </a:r>
             <a:endParaRPr lang="en-US" sz="1050" dirty="0"/>
           </a:p>
@@ -5822,7 +5822,7 @@
                 <a:ea typeface="微软雅黑" pitchFamily="34" charset="-122"/>
                 <a:cs typeface="微软雅黑" pitchFamily="34" charset="-120"/>
               </a:rPr>
-              <a:t>帮扶管理信息系统 v1.12.19</a:t>
+              <a:t>帮扶管理信息系统 v1.12.20</a:t>
             </a:r>
             <a:endParaRPr lang="en-US" sz="1050" dirty="0"/>
           </a:p>
@@ -6754,7 +6754,7 @@
                 <a:ea typeface="微软雅黑" pitchFamily="34" charset="-122"/>
                 <a:cs typeface="微软雅黑" pitchFamily="34" charset="-120"/>
               </a:rPr>
-              <a:t>帮扶管理信息系统 v1.12.19</a:t>
+              <a:t>帮扶管理信息系统 v1.12.20</a:t>
             </a:r>
             <a:endParaRPr lang="en-US" sz="1050" dirty="0"/>
           </a:p>
@@ -7380,7 +7380,7 @@
                 <a:ea typeface="微软雅黑" pitchFamily="34" charset="-122"/>
                 <a:cs typeface="微软雅黑" pitchFamily="34" charset="-120"/>
               </a:rPr>
-              <a:t>帮扶管理信息系统 v1.12.19</a:t>
+              <a:t>帮扶管理信息系统 v1.12.20</a:t>
             </a:r>
             <a:endParaRPr lang="en-US" sz="1050" dirty="0"/>
           </a:p>
@@ -8809,7 +8809,7 @@
                 <a:ea typeface="微软雅黑" pitchFamily="34" charset="-122"/>
                 <a:cs typeface="微软雅黑" pitchFamily="34" charset="-120"/>
               </a:rPr>
-              <a:t>帮扶管理信息系统 v1.12.19</a:t>
+              <a:t>帮扶管理信息系统 v1.12.20</a:t>
             </a:r>
             <a:endParaRPr lang="en-US" sz="1050" dirty="0"/>
           </a:p>
@@ -10006,7 +10006,7 @@
                 <a:ea typeface="微软雅黑" pitchFamily="34" charset="-122"/>
                 <a:cs typeface="微软雅黑" pitchFamily="34" charset="-120"/>
               </a:rPr>
-              <a:t>帮扶管理信息系统 v1.12.19</a:t>
+              <a:t>帮扶管理信息系统 v1.12.20</a:t>
             </a:r>
             <a:endParaRPr lang="en-US" sz="1050" dirty="0"/>
           </a:p>
@@ -10632,7 +10632,7 @@
                 <a:ea typeface="微软雅黑" pitchFamily="34" charset="-122"/>
                 <a:cs typeface="微软雅黑" pitchFamily="34" charset="-120"/>
               </a:rPr>
-              <a:t>帮扶管理信息系统 v1.12.19</a:t>
+              <a:t>帮扶管理信息系统 v1.12.20</a:t>
             </a:r>
             <a:endParaRPr lang="en-US" sz="1050" dirty="0"/>
           </a:p>
@@ -11496,7 +11496,7 @@
                 <a:ea typeface="微软雅黑" pitchFamily="34" charset="-122"/>
                 <a:cs typeface="微软雅黑" pitchFamily="34" charset="-120"/>
               </a:rPr>
-              <a:t>帮扶管理信息系统 v1.12.19</a:t>
+              <a:t>帮扶管理信息系统 v1.12.20</a:t>
             </a:r>
             <a:endParaRPr lang="en-US" sz="1050" dirty="0"/>
           </a:p>
@@ -12235,7 +12235,7 @@
                 <a:ea typeface="微软雅黑" pitchFamily="34" charset="-122"/>
                 <a:cs typeface="微软雅黑" pitchFamily="34" charset="-120"/>
               </a:rPr>
-              <a:t>帮扶管理信息系统 v1.12.19</a:t>
+              <a:t>帮扶管理信息系统 v1.12.20</a:t>
             </a:r>
             <a:endParaRPr lang="en-US" sz="1050" dirty="0"/>
           </a:p>
@@ -14829,7 +14829,7 @@
                 <a:ea typeface="微软雅黑" pitchFamily="34" charset="-122"/>
                 <a:cs typeface="微软雅黑" pitchFamily="34" charset="-120"/>
               </a:rPr>
-              <a:t>帮扶管理信息系统 v1.12.19</a:t>
+              <a:t>帮扶管理信息系统 v1.12.20</a:t>
             </a:r>
             <a:endParaRPr lang="en-US" sz="1050" dirty="0"/>
           </a:p>
@@ -15455,7 +15455,7 @@
                 <a:ea typeface="微软雅黑" pitchFamily="34" charset="-122"/>
                 <a:cs typeface="微软雅黑" pitchFamily="34" charset="-120"/>
               </a:rPr>
-              <a:t>帮扶管理信息系统 v1.12.19</a:t>
+              <a:t>帮扶管理信息系统 v1.12.20</a:t>
             </a:r>
             <a:endParaRPr lang="en-US" sz="1050" dirty="0"/>
           </a:p>
@@ -16150,7 +16150,7 @@
                 <a:ea typeface="微软雅黑" pitchFamily="34" charset="-122"/>
                 <a:cs typeface="微软雅黑" pitchFamily="34" charset="-120"/>
               </a:rPr>
-              <a:t>帮扶管理信息系统 v1.12.19</a:t>
+              <a:t>帮扶管理信息系统 v1.12.20</a:t>
             </a:r>
             <a:endParaRPr lang="en-US" sz="1050" dirty="0"/>
           </a:p>
@@ -16849,7 +16849,7 @@
                 <a:ea typeface="微软雅黑" pitchFamily="34" charset="-122"/>
                 <a:cs typeface="微软雅黑" pitchFamily="34" charset="-120"/>
               </a:rPr>
-              <a:t>帮扶管理信息系统 v1.12.19</a:t>
+              <a:t>帮扶管理信息系统 v1.12.20</a:t>
             </a:r>
             <a:endParaRPr lang="en-US" sz="1050" dirty="0"/>
           </a:p>
@@ -17759,7 +17759,7 @@
                 <a:ea typeface="微软雅黑" pitchFamily="34" charset="-122"/>
                 <a:cs typeface="微软雅黑" pitchFamily="34" charset="-120"/>
               </a:rPr>
-              <a:t>帮扶管理信息系统 v1.12.19</a:t>
+              <a:t>帮扶管理信息系统 v1.12.20</a:t>
             </a:r>
             <a:endParaRPr lang="en-US" sz="1050" dirty="0"/>
           </a:p>
@@ -18973,7 +18973,7 @@
                 <a:ea typeface="微软雅黑" pitchFamily="34" charset="-122"/>
                 <a:cs typeface="微软雅黑" pitchFamily="34" charset="-120"/>
               </a:rPr>
-              <a:t>帮扶管理信息系统 v1.12.19</a:t>
+              <a:t>帮扶管理信息系统 v1.12.20</a:t>
             </a:r>
             <a:endParaRPr lang="en-US" sz="1050" dirty="0"/>
           </a:p>
@@ -20008,7 +20008,7 @@
                 <a:ea typeface="微软雅黑" pitchFamily="34" charset="-122"/>
                 <a:cs typeface="微软雅黑" pitchFamily="34" charset="-120"/>
               </a:rPr>
-              <a:t>帮扶管理信息系统 v1.12.19</a:t>
+              <a:t>帮扶管理信息系统 v1.12.20</a:t>
             </a:r>
             <a:endParaRPr lang="en-US" sz="1050" dirty="0"/>
           </a:p>
@@ -20857,7 +20857,7 @@
                 <a:ea typeface="微软雅黑" pitchFamily="34" charset="-122"/>
                 <a:cs typeface="微软雅黑" pitchFamily="34" charset="-120"/>
               </a:rPr>
-              <a:t>帮扶管理信息系统 v1.12.19</a:t>
+              <a:t>帮扶管理信息系统 v1.12.20</a:t>
             </a:r>
             <a:endParaRPr lang="en-US" sz="1050" dirty="0"/>
           </a:p>
@@ -21771,7 +21771,7 @@
                 <a:ea typeface="微软雅黑" pitchFamily="34" charset="-122"/>
                 <a:cs typeface="微软雅黑" pitchFamily="34" charset="-120"/>
               </a:rPr>
-              <a:t>帮扶管理信息系统 v1.12.19</a:t>
+              <a:t>帮扶管理信息系统 v1.12.20</a:t>
             </a:r>
             <a:endParaRPr lang="en-US" sz="1050" dirty="0"/>
           </a:p>
@@ -22931,7 +22931,7 @@
                 <a:ea typeface="微软雅黑" pitchFamily="34" charset="-122"/>
                 <a:cs typeface="微软雅黑" pitchFamily="34" charset="-120"/>
               </a:rPr>
-              <a:t>帮扶管理信息系统 v1.12.19</a:t>
+              <a:t>帮扶管理信息系统 v1.12.20</a:t>
             </a:r>
             <a:endParaRPr lang="en-US" sz="1050" dirty="0"/>
           </a:p>
@@ -23951,7 +23951,7 @@
                 <a:ea typeface="微软雅黑" pitchFamily="34" charset="-122"/>
                 <a:cs typeface="微软雅黑" pitchFamily="34" charset="-120"/>
               </a:rPr>
-              <a:t>帮扶管理信息系统 v1.12.19</a:t>
+              <a:t>帮扶管理信息系统 v1.12.20</a:t>
             </a:r>
             <a:endParaRPr lang="en-US" sz="1050" dirty="0"/>
           </a:p>
@@ -24008,7 +24008,7 @@
                 <a:ea typeface="微软雅黑" pitchFamily="34" charset="-122"/>
                 <a:cs typeface="微软雅黑" pitchFamily="34" charset="-120"/>
               </a:rPr>
-              <a:t>数据来源：2026-10-17 实测（v1.12.19）· 后端 13067 / 前端 6409 用例 · 覆盖率 100%（行+分支）</a:t>
+              <a:t>数据来源：2026-10-17 实测（v1.12.20）· 后端 13067 / 前端 6409 用例 · 覆盖率 100%（行+分支）</a:t>
             </a:r>
             <a:endParaRPr lang="en-US" sz="1050" dirty="0"/>
           </a:p>
@@ -24473,7 +24473,7 @@
                 <a:ea typeface="微软雅黑" pitchFamily="34" charset="-122"/>
                 <a:cs typeface="微软雅黑" pitchFamily="34" charset="-120"/>
               </a:rPr>
-              <a:t>帮扶管理信息系统 v1.12.19</a:t>
+              <a:t>帮扶管理信息系统 v1.12.20</a:t>
             </a:r>
             <a:endParaRPr lang="en-US" sz="1050" dirty="0"/>
           </a:p>
@@ -25166,7 +25166,7 @@
                 <a:ea typeface="微软雅黑" pitchFamily="34" charset="-122"/>
                 <a:cs typeface="微软雅黑" pitchFamily="34" charset="-120"/>
               </a:rPr>
-              <a:t>帮扶管理信息系统 v1.12.19</a:t>
+              <a:t>帮扶管理信息系统 v1.12.20</a:t>
             </a:r>
             <a:endParaRPr lang="en-US" sz="1050" dirty="0"/>
           </a:p>
@@ -25792,7 +25792,7 @@
                 <a:ea typeface="微软雅黑" pitchFamily="34" charset="-122"/>
                 <a:cs typeface="微软雅黑" pitchFamily="34" charset="-120"/>
               </a:rPr>
-              <a:t>帮扶管理信息系统 v1.12.19</a:t>
+              <a:t>帮扶管理信息系统 v1.12.20</a:t>
             </a:r>
             <a:endParaRPr lang="en-US" sz="1050" dirty="0"/>
           </a:p>
@@ -26743,7 +26743,7 @@
                 <a:ea typeface="微软雅黑" pitchFamily="34" charset="-122"/>
                 <a:cs typeface="微软雅黑" pitchFamily="34" charset="-120"/>
               </a:rPr>
-              <a:t>帮扶管理信息系统 v1.12.19</a:t>
+              <a:t>帮扶管理信息系统 v1.12.20</a:t>
             </a:r>
             <a:endParaRPr lang="en-US" sz="1050" dirty="0"/>
           </a:p>
@@ -27841,7 +27841,7 @@
                 <a:ea typeface="微软雅黑" pitchFamily="34" charset="-122"/>
                 <a:cs typeface="微软雅黑" pitchFamily="34" charset="-120"/>
               </a:rPr>
-              <a:t>帮扶管理信息系统 v1.12.19</a:t>
+              <a:t>帮扶管理信息系统 v1.12.20</a:t>
             </a:r>
             <a:endParaRPr lang="en-US" sz="1050" dirty="0"/>
           </a:p>
@@ -28488,7 +28488,7 @@
                 <a:ea typeface="微软雅黑" pitchFamily="34" charset="-122"/>
                 <a:cs typeface="微软雅黑" pitchFamily="34" charset="-120"/>
               </a:rPr>
-              <a:t>帮扶管理信息系统 v1.12.19</a:t>
+              <a:t>帮扶管理信息系统 v1.12.20</a:t>
             </a:r>
             <a:endParaRPr lang="en-US" sz="1050" dirty="0"/>
           </a:p>
@@ -29544,7 +29544,7 @@
                 <a:ea typeface="微软雅黑" pitchFamily="34" charset="-122"/>
                 <a:cs typeface="微软雅黑" pitchFamily="34" charset="-120"/>
               </a:rPr>
-              <a:t>帮扶管理信息系统 v1.12.19</a:t>
+              <a:t>帮扶管理信息系统 v1.12.20</a:t>
             </a:r>
             <a:endParaRPr lang="en-US" sz="1050" dirty="0"/>
           </a:p>
@@ -30123,7 +30123,7 @@
                 <a:ea typeface="微软雅黑" pitchFamily="34" charset="-122"/>
                 <a:cs typeface="微软雅黑" pitchFamily="34" charset="-120"/>
               </a:rPr>
-              <a:t>帮扶管理信息系统 v1.12.19</a:t>
+              <a:t>帮扶管理信息系统 v1.12.20</a:t>
             </a:r>
             <a:endParaRPr lang="en-US" sz="1050" dirty="0"/>
           </a:p>
@@ -31016,7 +31016,7 @@
                 <a:ea typeface="微软雅黑" pitchFamily="34" charset="-122"/>
                 <a:cs typeface="微软雅黑" pitchFamily="34" charset="-120"/>
               </a:rPr>
-              <a:t>帮扶管理信息系统 v1.12.19  ·  仓库：github.com/lzh745200/MRRS  ·  完整文档见 docs/ 目录</a:t>
+              <a:t>帮扶管理信息系统 v1.12.20  ·  仓库：github.com/lzh745200/MRRS  ·  完整文档见 docs/ 目录</a:t>
             </a:r>
             <a:endParaRPr lang="en-US" sz="1350" dirty="0"/>
           </a:p>
@@ -31277,7 +31277,7 @@
                 <a:ea typeface="微软雅黑" pitchFamily="34" charset="-122"/>
                 <a:cs typeface="微软雅黑" pitchFamily="34" charset="-120"/>
               </a:rPr>
-              <a:t>帮扶管理信息系统 v1.12.19</a:t>
+              <a:t>帮扶管理信息系统 v1.12.20</a:t>
             </a:r>
             <a:endParaRPr lang="en-US" sz="1050" dirty="0"/>
           </a:p>
@@ -32053,7 +32053,7 @@
                 <a:ea typeface="微软雅黑" pitchFamily="34" charset="-122"/>
                 <a:cs typeface="微软雅黑" pitchFamily="34" charset="-120"/>
               </a:rPr>
-              <a:t>帮扶管理信息系统 v1.12.19</a:t>
+              <a:t>帮扶管理信息系统 v1.12.20</a:t>
             </a:r>
             <a:endParaRPr lang="en-US" sz="1050" dirty="0"/>
           </a:p>
@@ -32777,7 +32777,7 @@
                 <a:ea typeface="微软雅黑" pitchFamily="34" charset="-122"/>
                 <a:cs typeface="微软雅黑" pitchFamily="34" charset="-120"/>
               </a:rPr>
-              <a:t>数据来源：2026-10-17 仓库实测（v1.12.19）—— 后端 13067 用例全绿 / 行+分支覆盖率 100%（branch=True 严格门禁）· 前端 6409 用例全绿 · flake8 0 · bandit 0 中高危 · vue-tsc 0 · eslint 0 警告</a:t>
+              <a:t>数据来源：2026-10-17 仓库实测（v1.12.20）—— 后端 13067 用例全绿 / 行+分支覆盖率 100%（branch=True 严格门禁）· 前端 6409 用例全绿 · flake8 0 · bandit 0 中高危 · vue-tsc 0 · eslint 0 警告</a:t>
             </a:r>
             <a:endParaRPr lang="en-US" sz="1000" dirty="0"/>
           </a:p>
@@ -33301,7 +33301,7 @@
                 <a:ea typeface="微软雅黑" pitchFamily="34" charset="-122"/>
                 <a:cs typeface="微软雅黑" pitchFamily="34" charset="-120"/>
               </a:rPr>
-              <a:t>帮扶管理信息系统 v1.12.19</a:t>
+              <a:t>帮扶管理信息系统 v1.12.20</a:t>
             </a:r>
             <a:endParaRPr lang="en-US" sz="1050" dirty="0"/>
           </a:p>
@@ -34413,7 +34413,7 @@
                 <a:ea typeface="微软雅黑" pitchFamily="34" charset="-122"/>
                 <a:cs typeface="微软雅黑" pitchFamily="34" charset="-120"/>
               </a:rPr>
-              <a:t>帮扶管理信息系统 v1.12.19</a:t>
+              <a:t>帮扶管理信息系统 v1.12.20</a:t>
             </a:r>
             <a:endParaRPr lang="en-US" sz="1050" dirty="0"/>
           </a:p>

--- a/docs/帮扶管理信息系统介绍.pptx
+++ b/docs/帮扶管理信息系统介绍.pptx
@@ -4976,7 +4976,7 @@
                 <a:ea typeface="微软雅黑" pitchFamily="34" charset="-122"/>
                 <a:cs typeface="微软雅黑" pitchFamily="34" charset="-120"/>
               </a:rPr>
-              <a:t>V1.12.20  |  2026-10-17  |  FastAPI + Vue 3 + Electron + SQLite</a:t>
+              <a:t>V1.12.21  |  2026-10-17  |  FastAPI + Vue 3 + Electron + SQLite</a:t>
             </a:r>
             <a:endParaRPr lang="en-US" sz="1250" dirty="0"/>
           </a:p>
@@ -5196,7 +5196,7 @@
                 <a:ea typeface="微软雅黑" pitchFamily="34" charset="-122"/>
                 <a:cs typeface="微软雅黑" pitchFamily="34" charset="-120"/>
               </a:rPr>
-              <a:t>帮扶管理信息系统 v1.12.20</a:t>
+              <a:t>帮扶管理信息系统 v1.12.21</a:t>
             </a:r>
             <a:endParaRPr lang="en-US" sz="1050" dirty="0"/>
           </a:p>
@@ -5378,7 +5378,7 @@
                 <a:ea typeface="微软雅黑" pitchFamily="34" charset="-122"/>
                 <a:cs typeface="微软雅黑" pitchFamily="34" charset="-120"/>
               </a:rPr>
-              <a:t>303 个测试文件 · 6409 个用例</a:t>
+              <a:t>305 个测试文件 · 6438 个用例</a:t>
             </a:r>
             <a:endParaRPr lang="en-US" sz="1350" dirty="0"/>
           </a:p>
@@ -5822,7 +5822,7 @@
                 <a:ea typeface="微软雅黑" pitchFamily="34" charset="-122"/>
                 <a:cs typeface="微软雅黑" pitchFamily="34" charset="-120"/>
               </a:rPr>
-              <a:t>帮扶管理信息系统 v1.12.20</a:t>
+              <a:t>帮扶管理信息系统 v1.12.21</a:t>
             </a:r>
             <a:endParaRPr lang="en-US" sz="1050" dirty="0"/>
           </a:p>
@@ -6754,7 +6754,7 @@
                 <a:ea typeface="微软雅黑" pitchFamily="34" charset="-122"/>
                 <a:cs typeface="微软雅黑" pitchFamily="34" charset="-120"/>
               </a:rPr>
-              <a:t>帮扶管理信息系统 v1.12.20</a:t>
+              <a:t>帮扶管理信息系统 v1.12.21</a:t>
             </a:r>
             <a:endParaRPr lang="en-US" sz="1050" dirty="0"/>
           </a:p>
@@ -7380,7 +7380,7 @@
                 <a:ea typeface="微软雅黑" pitchFamily="34" charset="-122"/>
                 <a:cs typeface="微软雅黑" pitchFamily="34" charset="-120"/>
               </a:rPr>
-              <a:t>帮扶管理信息系统 v1.12.20</a:t>
+              <a:t>帮扶管理信息系统 v1.12.21</a:t>
             </a:r>
             <a:endParaRPr lang="en-US" sz="1050" dirty="0"/>
           </a:p>
@@ -8809,7 +8809,7 @@
                 <a:ea typeface="微软雅黑" pitchFamily="34" charset="-122"/>
                 <a:cs typeface="微软雅黑" pitchFamily="34" charset="-120"/>
               </a:rPr>
-              <a:t>帮扶管理信息系统 v1.12.20</a:t>
+              <a:t>帮扶管理信息系统 v1.12.21</a:t>
             </a:r>
             <a:endParaRPr lang="en-US" sz="1050" dirty="0"/>
           </a:p>
@@ -10006,7 +10006,7 @@
                 <a:ea typeface="微软雅黑" pitchFamily="34" charset="-122"/>
                 <a:cs typeface="微软雅黑" pitchFamily="34" charset="-120"/>
               </a:rPr>
-              <a:t>帮扶管理信息系统 v1.12.20</a:t>
+              <a:t>帮扶管理信息系统 v1.12.21</a:t>
             </a:r>
             <a:endParaRPr lang="en-US" sz="1050" dirty="0"/>
           </a:p>
@@ -10632,7 +10632,7 @@
                 <a:ea typeface="微软雅黑" pitchFamily="34" charset="-122"/>
                 <a:cs typeface="微软雅黑" pitchFamily="34" charset="-120"/>
               </a:rPr>
-              <a:t>帮扶管理信息系统 v1.12.20</a:t>
+              <a:t>帮扶管理信息系统 v1.12.21</a:t>
             </a:r>
             <a:endParaRPr lang="en-US" sz="1050" dirty="0"/>
           </a:p>
@@ -11496,7 +11496,7 @@
                 <a:ea typeface="微软雅黑" pitchFamily="34" charset="-122"/>
                 <a:cs typeface="微软雅黑" pitchFamily="34" charset="-120"/>
               </a:rPr>
-              <a:t>帮扶管理信息系统 v1.12.20</a:t>
+              <a:t>帮扶管理信息系统 v1.12.21</a:t>
             </a:r>
             <a:endParaRPr lang="en-US" sz="1050" dirty="0"/>
           </a:p>
@@ -12235,7 +12235,7 @@
                 <a:ea typeface="微软雅黑" pitchFamily="34" charset="-122"/>
                 <a:cs typeface="微软雅黑" pitchFamily="34" charset="-120"/>
               </a:rPr>
-              <a:t>帮扶管理信息系统 v1.12.20</a:t>
+              <a:t>帮扶管理信息系统 v1.12.21</a:t>
             </a:r>
             <a:endParaRPr lang="en-US" sz="1050" dirty="0"/>
           </a:p>
@@ -12850,7 +12850,7 @@
         </p:nvSpPr>
         <p:spPr>
           <a:xfrm>
-            <a:off x="6409944" y="2542032"/>
+            <a:off x="6438944" y="2542032"/>
             <a:ext cx="1143000" cy="320040"/>
           </a:xfrm>
           <a:prstGeom prst="rect">
@@ -14460,7 +14460,7 @@
                 <a:ea typeface="微软雅黑" pitchFamily="34" charset="-122"/>
                 <a:cs typeface="微软雅黑" pitchFamily="34" charset="-120"/>
               </a:rPr>
-              <a:t>19,476 项自动化测试 · CI/CD · 依赖自检</a:t>
+              <a:t>19,517 项自动化测试 · CI/CD · 依赖自检</a:t>
             </a:r>
             <a:endParaRPr lang="en-US" sz="1200" dirty="0"/>
           </a:p>
@@ -14829,7 +14829,7 @@
                 <a:ea typeface="微软雅黑" pitchFamily="34" charset="-122"/>
                 <a:cs typeface="微软雅黑" pitchFamily="34" charset="-120"/>
               </a:rPr>
-              <a:t>帮扶管理信息系统 v1.12.20</a:t>
+              <a:t>帮扶管理信息系统 v1.12.21</a:t>
             </a:r>
             <a:endParaRPr lang="en-US" sz="1050" dirty="0"/>
           </a:p>
@@ -15455,7 +15455,7 @@
                 <a:ea typeface="微软雅黑" pitchFamily="34" charset="-122"/>
                 <a:cs typeface="微软雅黑" pitchFamily="34" charset="-120"/>
               </a:rPr>
-              <a:t>帮扶管理信息系统 v1.12.20</a:t>
+              <a:t>帮扶管理信息系统 v1.12.21</a:t>
             </a:r>
             <a:endParaRPr lang="en-US" sz="1050" dirty="0"/>
           </a:p>
@@ -16150,7 +16150,7 @@
                 <a:ea typeface="微软雅黑" pitchFamily="34" charset="-122"/>
                 <a:cs typeface="微软雅黑" pitchFamily="34" charset="-120"/>
               </a:rPr>
-              <a:t>帮扶管理信息系统 v1.12.20</a:t>
+              <a:t>帮扶管理信息系统 v1.12.21</a:t>
             </a:r>
             <a:endParaRPr lang="en-US" sz="1050" dirty="0"/>
           </a:p>
@@ -16849,7 +16849,7 @@
                 <a:ea typeface="微软雅黑" pitchFamily="34" charset="-122"/>
                 <a:cs typeface="微软雅黑" pitchFamily="34" charset="-120"/>
               </a:rPr>
-              <a:t>帮扶管理信息系统 v1.12.20</a:t>
+              <a:t>帮扶管理信息系统 v1.12.21</a:t>
             </a:r>
             <a:endParaRPr lang="en-US" sz="1050" dirty="0"/>
           </a:p>
@@ -17759,7 +17759,7 @@
                 <a:ea typeface="微软雅黑" pitchFamily="34" charset="-122"/>
                 <a:cs typeface="微软雅黑" pitchFamily="34" charset="-120"/>
               </a:rPr>
-              <a:t>帮扶管理信息系统 v1.12.20</a:t>
+              <a:t>帮扶管理信息系统 v1.12.21</a:t>
             </a:r>
             <a:endParaRPr lang="en-US" sz="1050" dirty="0"/>
           </a:p>
@@ -18973,7 +18973,7 @@
                 <a:ea typeface="微软雅黑" pitchFamily="34" charset="-122"/>
                 <a:cs typeface="微软雅黑" pitchFamily="34" charset="-120"/>
               </a:rPr>
-              <a:t>帮扶管理信息系统 v1.12.20</a:t>
+              <a:t>帮扶管理信息系统 v1.12.21</a:t>
             </a:r>
             <a:endParaRPr lang="en-US" sz="1050" dirty="0"/>
           </a:p>
@@ -20008,7 +20008,7 @@
                 <a:ea typeface="微软雅黑" pitchFamily="34" charset="-122"/>
                 <a:cs typeface="微软雅黑" pitchFamily="34" charset="-120"/>
               </a:rPr>
-              <a:t>帮扶管理信息系统 v1.12.20</a:t>
+              <a:t>帮扶管理信息系统 v1.12.21</a:t>
             </a:r>
             <a:endParaRPr lang="en-US" sz="1050" dirty="0"/>
           </a:p>
@@ -20857,7 +20857,7 @@
                 <a:ea typeface="微软雅黑" pitchFamily="34" charset="-122"/>
                 <a:cs typeface="微软雅黑" pitchFamily="34" charset="-120"/>
               </a:rPr>
-              <a:t>帮扶管理信息系统 v1.12.20</a:t>
+              <a:t>帮扶管理信息系统 v1.12.21</a:t>
             </a:r>
             <a:endParaRPr lang="en-US" sz="1050" dirty="0"/>
           </a:p>
@@ -21771,7 +21771,7 @@
                 <a:ea typeface="微软雅黑" pitchFamily="34" charset="-122"/>
                 <a:cs typeface="微软雅黑" pitchFamily="34" charset="-120"/>
               </a:rPr>
-              <a:t>帮扶管理信息系统 v1.12.20</a:t>
+              <a:t>帮扶管理信息系统 v1.12.21</a:t>
             </a:r>
             <a:endParaRPr lang="en-US" sz="1050" dirty="0"/>
           </a:p>
@@ -22931,7 +22931,7 @@
                 <a:ea typeface="微软雅黑" pitchFamily="34" charset="-122"/>
                 <a:cs typeface="微软雅黑" pitchFamily="34" charset="-120"/>
               </a:rPr>
-              <a:t>帮扶管理信息系统 v1.12.20</a:t>
+              <a:t>帮扶管理信息系统 v1.12.21</a:t>
             </a:r>
             <a:endParaRPr lang="en-US" sz="1050" dirty="0"/>
           </a:p>
@@ -23585,7 +23585,7 @@
                 <a:ea typeface="微软雅黑" pitchFamily="34" charset="-122"/>
                 <a:cs typeface="微软雅黑" pitchFamily="34" charset="-120"/>
               </a:rPr>
-              <a:t>19,476 项自动化测试（后端 13067 + 前端 6409）</a:t>
+              <a:t>19,517 项自动化测试（后端 13079 + 前端 6438）</a:t>
             </a:r>
             <a:endParaRPr lang="en-US" sz="1400" dirty="0"/>
           </a:p>
@@ -23951,7 +23951,7 @@
                 <a:ea typeface="微软雅黑" pitchFamily="34" charset="-122"/>
                 <a:cs typeface="微软雅黑" pitchFamily="34" charset="-120"/>
               </a:rPr>
-              <a:t>帮扶管理信息系统 v1.12.20</a:t>
+              <a:t>帮扶管理信息系统 v1.12.21</a:t>
             </a:r>
             <a:endParaRPr lang="en-US" sz="1050" dirty="0"/>
           </a:p>
@@ -24008,7 +24008,7 @@
                 <a:ea typeface="微软雅黑" pitchFamily="34" charset="-122"/>
                 <a:cs typeface="微软雅黑" pitchFamily="34" charset="-120"/>
               </a:rPr>
-              <a:t>数据来源：2026-10-17 实测（v1.12.20）· 后端 13067 / 前端 6409 用例 · 覆盖率 100%（行+分支）</a:t>
+              <a:t>数据来源：2026-10-17 实测（v1.12.21）· 后端 13079 / 前端 6438 用例 · 覆盖率 100%（行+分支）</a:t>
             </a:r>
             <a:endParaRPr lang="en-US" sz="1050" dirty="0"/>
           </a:p>
@@ -24473,7 +24473,7 @@
                 <a:ea typeface="微软雅黑" pitchFamily="34" charset="-122"/>
                 <a:cs typeface="微软雅黑" pitchFamily="34" charset="-120"/>
               </a:rPr>
-              <a:t>帮扶管理信息系统 v1.12.20</a:t>
+              <a:t>帮扶管理信息系统 v1.12.21</a:t>
             </a:r>
             <a:endParaRPr lang="en-US" sz="1050" dirty="0"/>
           </a:p>
@@ -25166,7 +25166,7 @@
                 <a:ea typeface="微软雅黑" pitchFamily="34" charset="-122"/>
                 <a:cs typeface="微软雅黑" pitchFamily="34" charset="-120"/>
               </a:rPr>
-              <a:t>帮扶管理信息系统 v1.12.20</a:t>
+              <a:t>帮扶管理信息系统 v1.12.21</a:t>
             </a:r>
             <a:endParaRPr lang="en-US" sz="1050" dirty="0"/>
           </a:p>
@@ -25792,7 +25792,7 @@
                 <a:ea typeface="微软雅黑" pitchFamily="34" charset="-122"/>
                 <a:cs typeface="微软雅黑" pitchFamily="34" charset="-120"/>
               </a:rPr>
-              <a:t>帮扶管理信息系统 v1.12.20</a:t>
+              <a:t>帮扶管理信息系统 v1.12.21</a:t>
             </a:r>
             <a:endParaRPr lang="en-US" sz="1050" dirty="0"/>
           </a:p>
@@ -26743,7 +26743,7 @@
                 <a:ea typeface="微软雅黑" pitchFamily="34" charset="-122"/>
                 <a:cs typeface="微软雅黑" pitchFamily="34" charset="-120"/>
               </a:rPr>
-              <a:t>帮扶管理信息系统 v1.12.20</a:t>
+              <a:t>帮扶管理信息系统 v1.12.21</a:t>
             </a:r>
             <a:endParaRPr lang="en-US" sz="1050" dirty="0"/>
           </a:p>
@@ -27841,7 +27841,7 @@
                 <a:ea typeface="微软雅黑" pitchFamily="34" charset="-122"/>
                 <a:cs typeface="微软雅黑" pitchFamily="34" charset="-120"/>
               </a:rPr>
-              <a:t>帮扶管理信息系统 v1.12.20</a:t>
+              <a:t>帮扶管理信息系统 v1.12.21</a:t>
             </a:r>
             <a:endParaRPr lang="en-US" sz="1050" dirty="0"/>
           </a:p>
@@ -28488,7 +28488,7 @@
                 <a:ea typeface="微软雅黑" pitchFamily="34" charset="-122"/>
                 <a:cs typeface="微软雅黑" pitchFamily="34" charset="-120"/>
               </a:rPr>
-              <a:t>帮扶管理信息系统 v1.12.20</a:t>
+              <a:t>帮扶管理信息系统 v1.12.21</a:t>
             </a:r>
             <a:endParaRPr lang="en-US" sz="1050" dirty="0"/>
           </a:p>
@@ -29324,7 +29324,7 @@
                 <a:ea typeface="微软雅黑" pitchFamily="34" charset="-122"/>
                 <a:cs typeface="微软雅黑" pitchFamily="34" charset="-120"/>
               </a:rPr>
-              <a:t>净效果：13067 后端用例（行+分支覆盖率 100%）+ 6409 前端用例全绿；Windows x64 与麒麟 ARM64 两个离线安装包由 GitHub Actions 全自动构建并发布 Release</a:t>
+              <a:t>净效果：13079 后端用例（行+分支覆盖率 100%）+ 6438 前端用例全绿；Windows x64 与麒麟 ARM64 两个离线安装包由 GitHub Actions 全自动构建并发布 Release</a:t>
             </a:r>
             <a:endParaRPr lang="en-US" sz="1350" dirty="0"/>
           </a:p>
@@ -29544,7 +29544,7 @@
                 <a:ea typeface="微软雅黑" pitchFamily="34" charset="-122"/>
                 <a:cs typeface="微软雅黑" pitchFamily="34" charset="-120"/>
               </a:rPr>
-              <a:t>帮扶管理信息系统 v1.12.20</a:t>
+              <a:t>帮扶管理信息系统 v1.12.21</a:t>
             </a:r>
             <a:endParaRPr lang="en-US" sz="1050" dirty="0"/>
           </a:p>
@@ -30123,7 +30123,7 @@
                 <a:ea typeface="微软雅黑" pitchFamily="34" charset="-122"/>
                 <a:cs typeface="微软雅黑" pitchFamily="34" charset="-120"/>
               </a:rPr>
-              <a:t>帮扶管理信息系统 v1.12.20</a:t>
+              <a:t>帮扶管理信息系统 v1.12.21</a:t>
             </a:r>
             <a:endParaRPr lang="en-US" sz="1050" dirty="0"/>
           </a:p>
@@ -31016,7 +31016,7 @@
                 <a:ea typeface="微软雅黑" pitchFamily="34" charset="-122"/>
                 <a:cs typeface="微软雅黑" pitchFamily="34" charset="-120"/>
               </a:rPr>
-              <a:t>帮扶管理信息系统 v1.12.20  ·  仓库：github.com/lzh745200/MRRS  ·  完整文档见 docs/ 目录</a:t>
+              <a:t>帮扶管理信息系统 v1.12.21  ·  仓库：github.com/lzh745200/MRRS  ·  完整文档见 docs/ 目录</a:t>
             </a:r>
             <a:endParaRPr lang="en-US" sz="1350" dirty="0"/>
           </a:p>
@@ -31057,7 +31057,7 @@
                 <a:ea typeface="微软雅黑" pitchFamily="34" charset="-122"/>
                 <a:cs typeface="微软雅黑" pitchFamily="34" charset="-120"/>
               </a:rPr>
-              <a:t>13067 后端用例（行+分支覆盖率 100%）+ 6409 前端用例 全绿守护 · Windows x64 / 麒麟 ARM64 双平台离线交付</a:t>
+              <a:t>13079 后端用例（行+分支覆盖率 100%）+ 6438 前端用例 全绿守护 · Windows x64 / 麒麟 ARM64 双平台离线交付</a:t>
             </a:r>
             <a:endParaRPr lang="en-US" sz="1350" dirty="0"/>
           </a:p>
@@ -31277,7 +31277,7 @@
                 <a:ea typeface="微软雅黑" pitchFamily="34" charset="-122"/>
                 <a:cs typeface="微软雅黑" pitchFamily="34" charset="-120"/>
               </a:rPr>
-              <a:t>帮扶管理信息系统 v1.12.20</a:t>
+              <a:t>帮扶管理信息系统 v1.12.21</a:t>
             </a:r>
             <a:endParaRPr lang="en-US" sz="1050" dirty="0"/>
           </a:p>
@@ -32053,7 +32053,7 @@
                 <a:ea typeface="微软雅黑" pitchFamily="34" charset="-122"/>
                 <a:cs typeface="微软雅黑" pitchFamily="34" charset="-120"/>
               </a:rPr>
-              <a:t>帮扶管理信息系统 v1.12.20</a:t>
+              <a:t>帮扶管理信息系统 v1.12.21</a:t>
             </a:r>
             <a:endParaRPr lang="en-US" sz="1050" dirty="0"/>
           </a:p>
@@ -32094,7 +32094,7 @@
                 <a:ea typeface="微软雅黑" pitchFamily="34" charset="-122"/>
                 <a:cs typeface="微软雅黑" pitchFamily="34" charset="-120"/>
               </a:rPr>
-              <a:t>13067</a:t>
+              <a:t>13079</a:t>
             </a:r>
             <a:endParaRPr lang="en-US" sz="4000" dirty="0"/>
           </a:p>
@@ -32176,7 +32176,7 @@
                 <a:ea typeface="微软雅黑" pitchFamily="34" charset="-122"/>
                 <a:cs typeface="微软雅黑" pitchFamily="34" charset="-120"/>
               </a:rPr>
-              <a:t>6409</a:t>
+              <a:t>6438</a:t>
             </a:r>
             <a:endParaRPr lang="en-US" sz="4000" dirty="0"/>
           </a:p>
@@ -32777,7 +32777,7 @@
                 <a:ea typeface="微软雅黑" pitchFamily="34" charset="-122"/>
                 <a:cs typeface="微软雅黑" pitchFamily="34" charset="-120"/>
               </a:rPr>
-              <a:t>数据来源：2026-10-17 仓库实测（v1.12.20）—— 后端 13067 用例全绿 / 行+分支覆盖率 100%（branch=True 严格门禁）· 前端 6409 用例全绿 · flake8 0 · bandit 0 中高危 · vue-tsc 0 · eslint 0 警告</a:t>
+              <a:t>数据来源：2026-10-17 仓库实测（v1.12.21）—— 后端 13079 用例全绿 / 行+分支覆盖率 100%（branch=True 严格门禁）· 前端 6438 用例全绿 · flake8 0 · bandit 0 中高危 · vue-tsc 0 · eslint 0 警告</a:t>
             </a:r>
             <a:endParaRPr lang="en-US" sz="1000" dirty="0"/>
           </a:p>
@@ -33301,7 +33301,7 @@
                 <a:ea typeface="微软雅黑" pitchFamily="34" charset="-122"/>
                 <a:cs typeface="微软雅黑" pitchFamily="34" charset="-120"/>
               </a:rPr>
-              <a:t>帮扶管理信息系统 v1.12.20</a:t>
+              <a:t>帮扶管理信息系统 v1.12.21</a:t>
             </a:r>
             <a:endParaRPr lang="en-US" sz="1050" dirty="0"/>
           </a:p>
@@ -34413,7 +34413,7 @@
                 <a:ea typeface="微软雅黑" pitchFamily="34" charset="-122"/>
                 <a:cs typeface="微软雅黑" pitchFamily="34" charset="-120"/>
               </a:rPr>
-              <a:t>帮扶管理信息系统 v1.12.20</a:t>
+              <a:t>帮扶管理信息系统 v1.12.21</a:t>
             </a:r>
             <a:endParaRPr lang="en-US" sz="1050" dirty="0"/>
           </a:p>

--- a/docs/帮扶管理信息系统介绍.pptx
+++ b/docs/帮扶管理信息系统介绍.pptx
@@ -4976,7 +4976,7 @@
                 <a:ea typeface="微软雅黑" pitchFamily="34" charset="-122"/>
                 <a:cs typeface="微软雅黑" pitchFamily="34" charset="-120"/>
               </a:rPr>
-              <a:t>V1.12.21  |  2026-10-17  |  FastAPI + Vue 3 + Electron + SQLite</a:t>
+              <a:t>V1.12.22  |  2026-10-17  |  FastAPI + Vue 3 + Electron + SQLite</a:t>
             </a:r>
             <a:endParaRPr lang="en-US" sz="1250" dirty="0"/>
           </a:p>
@@ -5196,7 +5196,7 @@
                 <a:ea typeface="微软雅黑" pitchFamily="34" charset="-122"/>
                 <a:cs typeface="微软雅黑" pitchFamily="34" charset="-120"/>
               </a:rPr>
-              <a:t>帮扶管理信息系统 v1.12.21</a:t>
+              <a:t>帮扶管理信息系统 v1.12.22</a:t>
             </a:r>
             <a:endParaRPr lang="en-US" sz="1050" dirty="0"/>
           </a:p>
@@ -5378,7 +5378,7 @@
                 <a:ea typeface="微软雅黑" pitchFamily="34" charset="-122"/>
                 <a:cs typeface="微软雅黑" pitchFamily="34" charset="-120"/>
               </a:rPr>
-              <a:t>305 个测试文件 · 6438 个用例</a:t>
+              <a:t>315 个测试文件 · 6612 个用例</a:t>
             </a:r>
             <a:endParaRPr lang="en-US" sz="1350" dirty="0"/>
           </a:p>
@@ -5822,7 +5822,7 @@
                 <a:ea typeface="微软雅黑" pitchFamily="34" charset="-122"/>
                 <a:cs typeface="微软雅黑" pitchFamily="34" charset="-120"/>
               </a:rPr>
-              <a:t>帮扶管理信息系统 v1.12.21</a:t>
+              <a:t>帮扶管理信息系统 v1.12.22</a:t>
             </a:r>
             <a:endParaRPr lang="en-US" sz="1050" dirty="0"/>
           </a:p>
@@ -6754,7 +6754,7 @@
                 <a:ea typeface="微软雅黑" pitchFamily="34" charset="-122"/>
                 <a:cs typeface="微软雅黑" pitchFamily="34" charset="-120"/>
               </a:rPr>
-              <a:t>帮扶管理信息系统 v1.12.21</a:t>
+              <a:t>帮扶管理信息系统 v1.12.22</a:t>
             </a:r>
             <a:endParaRPr lang="en-US" sz="1050" dirty="0"/>
           </a:p>
@@ -7380,7 +7380,7 @@
                 <a:ea typeface="微软雅黑" pitchFamily="34" charset="-122"/>
                 <a:cs typeface="微软雅黑" pitchFamily="34" charset="-120"/>
               </a:rPr>
-              <a:t>帮扶管理信息系统 v1.12.21</a:t>
+              <a:t>帮扶管理信息系统 v1.12.22</a:t>
             </a:r>
             <a:endParaRPr lang="en-US" sz="1050" dirty="0"/>
           </a:p>
@@ -8809,7 +8809,7 @@
                 <a:ea typeface="微软雅黑" pitchFamily="34" charset="-122"/>
                 <a:cs typeface="微软雅黑" pitchFamily="34" charset="-120"/>
               </a:rPr>
-              <a:t>帮扶管理信息系统 v1.12.21</a:t>
+              <a:t>帮扶管理信息系统 v1.12.22</a:t>
             </a:r>
             <a:endParaRPr lang="en-US" sz="1050" dirty="0"/>
           </a:p>
@@ -10006,7 +10006,7 @@
                 <a:ea typeface="微软雅黑" pitchFamily="34" charset="-122"/>
                 <a:cs typeface="微软雅黑" pitchFamily="34" charset="-120"/>
               </a:rPr>
-              <a:t>帮扶管理信息系统 v1.12.21</a:t>
+              <a:t>帮扶管理信息系统 v1.12.22</a:t>
             </a:r>
             <a:endParaRPr lang="en-US" sz="1050" dirty="0"/>
           </a:p>
@@ -10632,7 +10632,7 @@
                 <a:ea typeface="微软雅黑" pitchFamily="34" charset="-122"/>
                 <a:cs typeface="微软雅黑" pitchFamily="34" charset="-120"/>
               </a:rPr>
-              <a:t>帮扶管理信息系统 v1.12.21</a:t>
+              <a:t>帮扶管理信息系统 v1.12.22</a:t>
             </a:r>
             <a:endParaRPr lang="en-US" sz="1050" dirty="0"/>
           </a:p>
@@ -11496,7 +11496,7 @@
                 <a:ea typeface="微软雅黑" pitchFamily="34" charset="-122"/>
                 <a:cs typeface="微软雅黑" pitchFamily="34" charset="-120"/>
               </a:rPr>
-              <a:t>帮扶管理信息系统 v1.12.21</a:t>
+              <a:t>帮扶管理信息系统 v1.12.22</a:t>
             </a:r>
             <a:endParaRPr lang="en-US" sz="1050" dirty="0"/>
           </a:p>
@@ -12235,7 +12235,7 @@
                 <a:ea typeface="微软雅黑" pitchFamily="34" charset="-122"/>
                 <a:cs typeface="微软雅黑" pitchFamily="34" charset="-120"/>
               </a:rPr>
-              <a:t>帮扶管理信息系统 v1.12.21</a:t>
+              <a:t>帮扶管理信息系统 v1.12.22</a:t>
             </a:r>
             <a:endParaRPr lang="en-US" sz="1050" dirty="0"/>
           </a:p>
@@ -12850,7 +12850,7 @@
         </p:nvSpPr>
         <p:spPr>
           <a:xfrm>
-            <a:off x="6438944" y="2542032"/>
+            <a:off x="6612944" y="2542032"/>
             <a:ext cx="1143000" cy="320040"/>
           </a:xfrm>
           <a:prstGeom prst="rect">
@@ -14460,7 +14460,7 @@
                 <a:ea typeface="微软雅黑" pitchFamily="34" charset="-122"/>
                 <a:cs typeface="微软雅黑" pitchFamily="34" charset="-120"/>
               </a:rPr>
-              <a:t>19,517 项自动化测试 · CI/CD · 依赖自检</a:t>
+              <a:t>19,961 项自动化测试 · CI/CD · 依赖自检</a:t>
             </a:r>
             <a:endParaRPr lang="en-US" sz="1200" dirty="0"/>
           </a:p>
@@ -14829,7 +14829,7 @@
                 <a:ea typeface="微软雅黑" pitchFamily="34" charset="-122"/>
                 <a:cs typeface="微软雅黑" pitchFamily="34" charset="-120"/>
               </a:rPr>
-              <a:t>帮扶管理信息系统 v1.12.21</a:t>
+              <a:t>帮扶管理信息系统 v1.12.22</a:t>
             </a:r>
             <a:endParaRPr lang="en-US" sz="1050" dirty="0"/>
           </a:p>
@@ -15455,7 +15455,7 @@
                 <a:ea typeface="微软雅黑" pitchFamily="34" charset="-122"/>
                 <a:cs typeface="微软雅黑" pitchFamily="34" charset="-120"/>
               </a:rPr>
-              <a:t>帮扶管理信息系统 v1.12.21</a:t>
+              <a:t>帮扶管理信息系统 v1.12.22</a:t>
             </a:r>
             <a:endParaRPr lang="en-US" sz="1050" dirty="0"/>
           </a:p>
@@ -16150,7 +16150,7 @@
                 <a:ea typeface="微软雅黑" pitchFamily="34" charset="-122"/>
                 <a:cs typeface="微软雅黑" pitchFamily="34" charset="-120"/>
               </a:rPr>
-              <a:t>帮扶管理信息系统 v1.12.21</a:t>
+              <a:t>帮扶管理信息系统 v1.12.22</a:t>
             </a:r>
             <a:endParaRPr lang="en-US" sz="1050" dirty="0"/>
           </a:p>
@@ -16849,7 +16849,7 @@
                 <a:ea typeface="微软雅黑" pitchFamily="34" charset="-122"/>
                 <a:cs typeface="微软雅黑" pitchFamily="34" charset="-120"/>
               </a:rPr>
-              <a:t>帮扶管理信息系统 v1.12.21</a:t>
+              <a:t>帮扶管理信息系统 v1.12.22</a:t>
             </a:r>
             <a:endParaRPr lang="en-US" sz="1050" dirty="0"/>
           </a:p>
@@ -17759,7 +17759,7 @@
                 <a:ea typeface="微软雅黑" pitchFamily="34" charset="-122"/>
                 <a:cs typeface="微软雅黑" pitchFamily="34" charset="-120"/>
               </a:rPr>
-              <a:t>帮扶管理信息系统 v1.12.21</a:t>
+              <a:t>帮扶管理信息系统 v1.12.22</a:t>
             </a:r>
             <a:endParaRPr lang="en-US" sz="1050" dirty="0"/>
           </a:p>
@@ -18973,7 +18973,7 @@
                 <a:ea typeface="微软雅黑" pitchFamily="34" charset="-122"/>
                 <a:cs typeface="微软雅黑" pitchFamily="34" charset="-120"/>
               </a:rPr>
-              <a:t>帮扶管理信息系统 v1.12.21</a:t>
+              <a:t>帮扶管理信息系统 v1.12.22</a:t>
             </a:r>
             <a:endParaRPr lang="en-US" sz="1050" dirty="0"/>
           </a:p>
@@ -20008,7 +20008,7 @@
                 <a:ea typeface="微软雅黑" pitchFamily="34" charset="-122"/>
                 <a:cs typeface="微软雅黑" pitchFamily="34" charset="-120"/>
               </a:rPr>
-              <a:t>帮扶管理信息系统 v1.12.21</a:t>
+              <a:t>帮扶管理信息系统 v1.12.22</a:t>
             </a:r>
             <a:endParaRPr lang="en-US" sz="1050" dirty="0"/>
           </a:p>
@@ -20857,7 +20857,7 @@
                 <a:ea typeface="微软雅黑" pitchFamily="34" charset="-122"/>
                 <a:cs typeface="微软雅黑" pitchFamily="34" charset="-120"/>
               </a:rPr>
-              <a:t>帮扶管理信息系统 v1.12.21</a:t>
+              <a:t>帮扶管理信息系统 v1.12.22</a:t>
             </a:r>
             <a:endParaRPr lang="en-US" sz="1050" dirty="0"/>
           </a:p>
@@ -21771,7 +21771,7 @@
                 <a:ea typeface="微软雅黑" pitchFamily="34" charset="-122"/>
                 <a:cs typeface="微软雅黑" pitchFamily="34" charset="-120"/>
               </a:rPr>
-              <a:t>帮扶管理信息系统 v1.12.21</a:t>
+              <a:t>帮扶管理信息系统 v1.12.22</a:t>
             </a:r>
             <a:endParaRPr lang="en-US" sz="1050" dirty="0"/>
           </a:p>
@@ -22931,7 +22931,7 @@
                 <a:ea typeface="微软雅黑" pitchFamily="34" charset="-122"/>
                 <a:cs typeface="微软雅黑" pitchFamily="34" charset="-120"/>
               </a:rPr>
-              <a:t>帮扶管理信息系统 v1.12.21</a:t>
+              <a:t>帮扶管理信息系统 v1.12.22</a:t>
             </a:r>
             <a:endParaRPr lang="en-US" sz="1050" dirty="0"/>
           </a:p>
@@ -23585,7 +23585,7 @@
                 <a:ea typeface="微软雅黑" pitchFamily="34" charset="-122"/>
                 <a:cs typeface="微软雅黑" pitchFamily="34" charset="-120"/>
               </a:rPr>
-              <a:t>19,517 项自动化测试（后端 13079 + 前端 6438）</a:t>
+              <a:t>19,961 项自动化测试（后端 13349 + 前端 6612）</a:t>
             </a:r>
             <a:endParaRPr lang="en-US" sz="1400" dirty="0"/>
           </a:p>
@@ -23951,7 +23951,7 @@
                 <a:ea typeface="微软雅黑" pitchFamily="34" charset="-122"/>
                 <a:cs typeface="微软雅黑" pitchFamily="34" charset="-120"/>
               </a:rPr>
-              <a:t>帮扶管理信息系统 v1.12.21</a:t>
+              <a:t>帮扶管理信息系统 v1.12.22</a:t>
             </a:r>
             <a:endParaRPr lang="en-US" sz="1050" dirty="0"/>
           </a:p>
@@ -24008,7 +24008,7 @@
                 <a:ea typeface="微软雅黑" pitchFamily="34" charset="-122"/>
                 <a:cs typeface="微软雅黑" pitchFamily="34" charset="-120"/>
               </a:rPr>
-              <a:t>数据来源：2026-10-17 实测（v1.12.21）· 后端 13079 / 前端 6438 用例 · 覆盖率 100%（行+分支）</a:t>
+              <a:t>数据来源：2026-10-17 实测（v1.12.22）· 后端 13349 / 前端 6612 用例 · 覆盖率 100%（行+分支）</a:t>
             </a:r>
             <a:endParaRPr lang="en-US" sz="1050" dirty="0"/>
           </a:p>
@@ -24473,7 +24473,7 @@
                 <a:ea typeface="微软雅黑" pitchFamily="34" charset="-122"/>
                 <a:cs typeface="微软雅黑" pitchFamily="34" charset="-120"/>
               </a:rPr>
-              <a:t>帮扶管理信息系统 v1.12.21</a:t>
+              <a:t>帮扶管理信息系统 v1.12.22</a:t>
             </a:r>
             <a:endParaRPr lang="en-US" sz="1050" dirty="0"/>
           </a:p>
@@ -25166,7 +25166,7 @@
                 <a:ea typeface="微软雅黑" pitchFamily="34" charset="-122"/>
                 <a:cs typeface="微软雅黑" pitchFamily="34" charset="-120"/>
               </a:rPr>
-              <a:t>帮扶管理信息系统 v1.12.21</a:t>
+              <a:t>帮扶管理信息系统 v1.12.22</a:t>
             </a:r>
             <a:endParaRPr lang="en-US" sz="1050" dirty="0"/>
           </a:p>
@@ -25792,7 +25792,7 @@
                 <a:ea typeface="微软雅黑" pitchFamily="34" charset="-122"/>
                 <a:cs typeface="微软雅黑" pitchFamily="34" charset="-120"/>
               </a:rPr>
-              <a:t>帮扶管理信息系统 v1.12.21</a:t>
+              <a:t>帮扶管理信息系统 v1.12.22</a:t>
             </a:r>
             <a:endParaRPr lang="en-US" sz="1050" dirty="0"/>
           </a:p>
@@ -26743,7 +26743,7 @@
                 <a:ea typeface="微软雅黑" pitchFamily="34" charset="-122"/>
                 <a:cs typeface="微软雅黑" pitchFamily="34" charset="-120"/>
               </a:rPr>
-              <a:t>帮扶管理信息系统 v1.12.21</a:t>
+              <a:t>帮扶管理信息系统 v1.12.22</a:t>
             </a:r>
             <a:endParaRPr lang="en-US" sz="1050" dirty="0"/>
           </a:p>
@@ -27841,7 +27841,7 @@
                 <a:ea typeface="微软雅黑" pitchFamily="34" charset="-122"/>
                 <a:cs typeface="微软雅黑" pitchFamily="34" charset="-120"/>
               </a:rPr>
-              <a:t>帮扶管理信息系统 v1.12.21</a:t>
+              <a:t>帮扶管理信息系统 v1.12.22</a:t>
             </a:r>
             <a:endParaRPr lang="en-US" sz="1050" dirty="0"/>
           </a:p>
@@ -28488,7 +28488,7 @@
                 <a:ea typeface="微软雅黑" pitchFamily="34" charset="-122"/>
                 <a:cs typeface="微软雅黑" pitchFamily="34" charset="-120"/>
               </a:rPr>
-              <a:t>帮扶管理信息系统 v1.12.21</a:t>
+              <a:t>帮扶管理信息系统 v1.12.22</a:t>
             </a:r>
             <a:endParaRPr lang="en-US" sz="1050" dirty="0"/>
           </a:p>
@@ -29324,7 +29324,7 @@
                 <a:ea typeface="微软雅黑" pitchFamily="34" charset="-122"/>
                 <a:cs typeface="微软雅黑" pitchFamily="34" charset="-120"/>
               </a:rPr>
-              <a:t>净效果：13079 后端用例（行+分支覆盖率 100%）+ 6438 前端用例全绿；Windows x64 与麒麟 ARM64 两个离线安装包由 GitHub Actions 全自动构建并发布 Release</a:t>
+              <a:t>净效果：13349 后端用例（行+分支覆盖率 100%）+ 6612 前端用例全绿；Windows x64 与麒麟 ARM64 两个离线安装包由 GitHub Actions 全自动构建并发布 Release</a:t>
             </a:r>
             <a:endParaRPr lang="en-US" sz="1350" dirty="0"/>
           </a:p>
@@ -29544,7 +29544,7 @@
                 <a:ea typeface="微软雅黑" pitchFamily="34" charset="-122"/>
                 <a:cs typeface="微软雅黑" pitchFamily="34" charset="-120"/>
               </a:rPr>
-              <a:t>帮扶管理信息系统 v1.12.21</a:t>
+              <a:t>帮扶管理信息系统 v1.12.22</a:t>
             </a:r>
             <a:endParaRPr lang="en-US" sz="1050" dirty="0"/>
           </a:p>
@@ -30123,7 +30123,7 @@
                 <a:ea typeface="微软雅黑" pitchFamily="34" charset="-122"/>
                 <a:cs typeface="微软雅黑" pitchFamily="34" charset="-120"/>
               </a:rPr>
-              <a:t>帮扶管理信息系统 v1.12.21</a:t>
+              <a:t>帮扶管理信息系统 v1.12.22</a:t>
             </a:r>
             <a:endParaRPr lang="en-US" sz="1050" dirty="0"/>
           </a:p>
@@ -31016,7 +31016,7 @@
                 <a:ea typeface="微软雅黑" pitchFamily="34" charset="-122"/>
                 <a:cs typeface="微软雅黑" pitchFamily="34" charset="-120"/>
               </a:rPr>
-              <a:t>帮扶管理信息系统 v1.12.21  ·  仓库：github.com/lzh745200/MRRS  ·  完整文档见 docs/ 目录</a:t>
+              <a:t>帮扶管理信息系统 v1.12.22  ·  仓库：github.com/lzh745200/MRRS  ·  完整文档见 docs/ 目录</a:t>
             </a:r>
             <a:endParaRPr lang="en-US" sz="1350" dirty="0"/>
           </a:p>
@@ -31057,7 +31057,7 @@
                 <a:ea typeface="微软雅黑" pitchFamily="34" charset="-122"/>
                 <a:cs typeface="微软雅黑" pitchFamily="34" charset="-120"/>
               </a:rPr>
-              <a:t>13079 后端用例（行+分支覆盖率 100%）+ 6438 前端用例 全绿守护 · Windows x64 / 麒麟 ARM64 双平台离线交付</a:t>
+              <a:t>13349 后端用例（行+分支覆盖率 100%）+ 6612 前端用例 全绿守护 · Windows x64 / 麒麟 ARM64 双平台离线交付</a:t>
             </a:r>
             <a:endParaRPr lang="en-US" sz="1350" dirty="0"/>
           </a:p>
@@ -31277,7 +31277,7 @@
                 <a:ea typeface="微软雅黑" pitchFamily="34" charset="-122"/>
                 <a:cs typeface="微软雅黑" pitchFamily="34" charset="-120"/>
               </a:rPr>
-              <a:t>帮扶管理信息系统 v1.12.21</a:t>
+              <a:t>帮扶管理信息系统 v1.12.22</a:t>
             </a:r>
             <a:endParaRPr lang="en-US" sz="1050" dirty="0"/>
           </a:p>
@@ -32053,7 +32053,7 @@
                 <a:ea typeface="微软雅黑" pitchFamily="34" charset="-122"/>
                 <a:cs typeface="微软雅黑" pitchFamily="34" charset="-120"/>
               </a:rPr>
-              <a:t>帮扶管理信息系统 v1.12.21</a:t>
+              <a:t>帮扶管理信息系统 v1.12.22</a:t>
             </a:r>
             <a:endParaRPr lang="en-US" sz="1050" dirty="0"/>
           </a:p>
@@ -32094,7 +32094,7 @@
                 <a:ea typeface="微软雅黑" pitchFamily="34" charset="-122"/>
                 <a:cs typeface="微软雅黑" pitchFamily="34" charset="-120"/>
               </a:rPr>
-              <a:t>13079</a:t>
+              <a:t>13349</a:t>
             </a:r>
             <a:endParaRPr lang="en-US" sz="4000" dirty="0"/>
           </a:p>
@@ -32176,7 +32176,7 @@
                 <a:ea typeface="微软雅黑" pitchFamily="34" charset="-122"/>
                 <a:cs typeface="微软雅黑" pitchFamily="34" charset="-120"/>
               </a:rPr>
-              <a:t>6438</a:t>
+              <a:t>6612</a:t>
             </a:r>
             <a:endParaRPr lang="en-US" sz="4000" dirty="0"/>
           </a:p>
@@ -32777,7 +32777,7 @@
                 <a:ea typeface="微软雅黑" pitchFamily="34" charset="-122"/>
                 <a:cs typeface="微软雅黑" pitchFamily="34" charset="-120"/>
               </a:rPr>
-              <a:t>数据来源：2026-10-17 仓库实测（v1.12.21）—— 后端 13079 用例全绿 / 行+分支覆盖率 100%（branch=True 严格门禁）· 前端 6438 用例全绿 · flake8 0 · bandit 0 中高危 · vue-tsc 0 · eslint 0 警告</a:t>
+              <a:t>数据来源：2026-10-17 仓库实测（v1.12.22）—— 后端 13349 用例全绿 / 行+分支覆盖率 100%（branch=True 严格门禁）· 前端 6612 用例全绿 · flake8 0 · bandit 0 中高危 · vue-tsc 0 · eslint 0 警告</a:t>
             </a:r>
             <a:endParaRPr lang="en-US" sz="1000" dirty="0"/>
           </a:p>
@@ -33301,7 +33301,7 @@
                 <a:ea typeface="微软雅黑" pitchFamily="34" charset="-122"/>
                 <a:cs typeface="微软雅黑" pitchFamily="34" charset="-120"/>
               </a:rPr>
-              <a:t>帮扶管理信息系统 v1.12.21</a:t>
+              <a:t>帮扶管理信息系统 v1.12.22</a:t>
             </a:r>
             <a:endParaRPr lang="en-US" sz="1050" dirty="0"/>
           </a:p>
@@ -34413,7 +34413,7 @@
                 <a:ea typeface="微软雅黑" pitchFamily="34" charset="-122"/>
                 <a:cs typeface="微软雅黑" pitchFamily="34" charset="-120"/>
               </a:rPr>
-              <a:t>帮扶管理信息系统 v1.12.21</a:t>
+              <a:t>帮扶管理信息系统 v1.12.22</a:t>
             </a:r>
             <a:endParaRPr lang="en-US" sz="1050" dirty="0"/>
           </a:p>

--- a/docs/帮扶管理信息系统介绍.pptx
+++ b/docs/帮扶管理信息系统介绍.pptx
@@ -4976,7 +4976,7 @@
                 <a:ea typeface="微软雅黑" pitchFamily="34" charset="-122"/>
                 <a:cs typeface="微软雅黑" pitchFamily="34" charset="-120"/>
               </a:rPr>
-              <a:t>V1.12.22  |  2026-10-17  |  FastAPI + Vue 3 + Electron + SQLite</a:t>
+              <a:t>V1.12.24  |  2026-10-17  |  FastAPI + Vue 3 + Electron + SQLite</a:t>
             </a:r>
             <a:endParaRPr lang="en-US" sz="1250" dirty="0"/>
           </a:p>
@@ -5196,7 +5196,7 @@
                 <a:ea typeface="微软雅黑" pitchFamily="34" charset="-122"/>
                 <a:cs typeface="微软雅黑" pitchFamily="34" charset="-120"/>
               </a:rPr>
-              <a:t>帮扶管理信息系统 v1.12.22</a:t>
+              <a:t>帮扶管理信息系统 v1.12.24</a:t>
             </a:r>
             <a:endParaRPr lang="en-US" sz="1050" dirty="0"/>
           </a:p>
@@ -5378,7 +5378,7 @@
                 <a:ea typeface="微软雅黑" pitchFamily="34" charset="-122"/>
                 <a:cs typeface="微软雅黑" pitchFamily="34" charset="-120"/>
               </a:rPr>
-              <a:t>315 个测试文件 · 6612 个用例</a:t>
+              <a:t>315 个测试文件 · 6685 个用例</a:t>
             </a:r>
             <a:endParaRPr lang="en-US" sz="1350" dirty="0"/>
           </a:p>
@@ -5822,7 +5822,7 @@
                 <a:ea typeface="微软雅黑" pitchFamily="34" charset="-122"/>
                 <a:cs typeface="微软雅黑" pitchFamily="34" charset="-120"/>
               </a:rPr>
-              <a:t>帮扶管理信息系统 v1.12.22</a:t>
+              <a:t>帮扶管理信息系统 v1.12.24</a:t>
             </a:r>
             <a:endParaRPr lang="en-US" sz="1050" dirty="0"/>
           </a:p>
@@ -6754,7 +6754,7 @@
                 <a:ea typeface="微软雅黑" pitchFamily="34" charset="-122"/>
                 <a:cs typeface="微软雅黑" pitchFamily="34" charset="-120"/>
               </a:rPr>
-              <a:t>帮扶管理信息系统 v1.12.22</a:t>
+              <a:t>帮扶管理信息系统 v1.12.24</a:t>
             </a:r>
             <a:endParaRPr lang="en-US" sz="1050" dirty="0"/>
           </a:p>
@@ -7380,7 +7380,7 @@
                 <a:ea typeface="微软雅黑" pitchFamily="34" charset="-122"/>
                 <a:cs typeface="微软雅黑" pitchFamily="34" charset="-120"/>
               </a:rPr>
-              <a:t>帮扶管理信息系统 v1.12.22</a:t>
+              <a:t>帮扶管理信息系统 v1.12.24</a:t>
             </a:r>
             <a:endParaRPr lang="en-US" sz="1050" dirty="0"/>
           </a:p>
@@ -8809,7 +8809,7 @@
                 <a:ea typeface="微软雅黑" pitchFamily="34" charset="-122"/>
                 <a:cs typeface="微软雅黑" pitchFamily="34" charset="-120"/>
               </a:rPr>
-              <a:t>帮扶管理信息系统 v1.12.22</a:t>
+              <a:t>帮扶管理信息系统 v1.12.24</a:t>
             </a:r>
             <a:endParaRPr lang="en-US" sz="1050" dirty="0"/>
           </a:p>
@@ -10006,7 +10006,7 @@
                 <a:ea typeface="微软雅黑" pitchFamily="34" charset="-122"/>
                 <a:cs typeface="微软雅黑" pitchFamily="34" charset="-120"/>
               </a:rPr>
-              <a:t>帮扶管理信息系统 v1.12.22</a:t>
+              <a:t>帮扶管理信息系统 v1.12.24</a:t>
             </a:r>
             <a:endParaRPr lang="en-US" sz="1050" dirty="0"/>
           </a:p>
@@ -10632,7 +10632,7 @@
                 <a:ea typeface="微软雅黑" pitchFamily="34" charset="-122"/>
                 <a:cs typeface="微软雅黑" pitchFamily="34" charset="-120"/>
               </a:rPr>
-              <a:t>帮扶管理信息系统 v1.12.22</a:t>
+              <a:t>帮扶管理信息系统 v1.12.24</a:t>
             </a:r>
             <a:endParaRPr lang="en-US" sz="1050" dirty="0"/>
           </a:p>
@@ -11496,7 +11496,7 @@
                 <a:ea typeface="微软雅黑" pitchFamily="34" charset="-122"/>
                 <a:cs typeface="微软雅黑" pitchFamily="34" charset="-120"/>
               </a:rPr>
-              <a:t>帮扶管理信息系统 v1.12.22</a:t>
+              <a:t>帮扶管理信息系统 v1.12.24</a:t>
             </a:r>
             <a:endParaRPr lang="en-US" sz="1050" dirty="0"/>
           </a:p>
@@ -12235,7 +12235,7 @@
                 <a:ea typeface="微软雅黑" pitchFamily="34" charset="-122"/>
                 <a:cs typeface="微软雅黑" pitchFamily="34" charset="-120"/>
               </a:rPr>
-              <a:t>帮扶管理信息系统 v1.12.22</a:t>
+              <a:t>帮扶管理信息系统 v1.12.24</a:t>
             </a:r>
             <a:endParaRPr lang="en-US" sz="1050" dirty="0"/>
           </a:p>
@@ -14460,7 +14460,7 @@
                 <a:ea typeface="微软雅黑" pitchFamily="34" charset="-122"/>
                 <a:cs typeface="微软雅黑" pitchFamily="34" charset="-120"/>
               </a:rPr>
-              <a:t>19,961 项自动化测试 · CI/CD · 依赖自检</a:t>
+              <a:t>20,190 项自动化测试 · CI/CD · 依赖自检</a:t>
             </a:r>
             <a:endParaRPr lang="en-US" sz="1200" dirty="0"/>
           </a:p>
@@ -14829,7 +14829,7 @@
                 <a:ea typeface="微软雅黑" pitchFamily="34" charset="-122"/>
                 <a:cs typeface="微软雅黑" pitchFamily="34" charset="-120"/>
               </a:rPr>
-              <a:t>帮扶管理信息系统 v1.12.22</a:t>
+              <a:t>帮扶管理信息系统 v1.12.24</a:t>
             </a:r>
             <a:endParaRPr lang="en-US" sz="1050" dirty="0"/>
           </a:p>
@@ -15455,7 +15455,7 @@
                 <a:ea typeface="微软雅黑" pitchFamily="34" charset="-122"/>
                 <a:cs typeface="微软雅黑" pitchFamily="34" charset="-120"/>
               </a:rPr>
-              <a:t>帮扶管理信息系统 v1.12.22</a:t>
+              <a:t>帮扶管理信息系统 v1.12.24</a:t>
             </a:r>
             <a:endParaRPr lang="en-US" sz="1050" dirty="0"/>
           </a:p>
@@ -16150,7 +16150,7 @@
                 <a:ea typeface="微软雅黑" pitchFamily="34" charset="-122"/>
                 <a:cs typeface="微软雅黑" pitchFamily="34" charset="-120"/>
               </a:rPr>
-              <a:t>帮扶管理信息系统 v1.12.22</a:t>
+              <a:t>帮扶管理信息系统 v1.12.24</a:t>
             </a:r>
             <a:endParaRPr lang="en-US" sz="1050" dirty="0"/>
           </a:p>
@@ -16849,7 +16849,7 @@
                 <a:ea typeface="微软雅黑" pitchFamily="34" charset="-122"/>
                 <a:cs typeface="微软雅黑" pitchFamily="34" charset="-120"/>
               </a:rPr>
-              <a:t>帮扶管理信息系统 v1.12.22</a:t>
+              <a:t>帮扶管理信息系统 v1.12.24</a:t>
             </a:r>
             <a:endParaRPr lang="en-US" sz="1050" dirty="0"/>
           </a:p>
@@ -17759,7 +17759,7 @@
                 <a:ea typeface="微软雅黑" pitchFamily="34" charset="-122"/>
                 <a:cs typeface="微软雅黑" pitchFamily="34" charset="-120"/>
               </a:rPr>
-              <a:t>帮扶管理信息系统 v1.12.22</a:t>
+              <a:t>帮扶管理信息系统 v1.12.24</a:t>
             </a:r>
             <a:endParaRPr lang="en-US" sz="1050" dirty="0"/>
           </a:p>
@@ -18973,7 +18973,7 @@
                 <a:ea typeface="微软雅黑" pitchFamily="34" charset="-122"/>
                 <a:cs typeface="微软雅黑" pitchFamily="34" charset="-120"/>
               </a:rPr>
-              <a:t>帮扶管理信息系统 v1.12.22</a:t>
+              <a:t>帮扶管理信息系统 v1.12.24</a:t>
             </a:r>
             <a:endParaRPr lang="en-US" sz="1050" dirty="0"/>
           </a:p>
@@ -20008,7 +20008,7 @@
                 <a:ea typeface="微软雅黑" pitchFamily="34" charset="-122"/>
                 <a:cs typeface="微软雅黑" pitchFamily="34" charset="-120"/>
               </a:rPr>
-              <a:t>帮扶管理信息系统 v1.12.22</a:t>
+              <a:t>帮扶管理信息系统 v1.12.24</a:t>
             </a:r>
             <a:endParaRPr lang="en-US" sz="1050" dirty="0"/>
           </a:p>
@@ -20857,7 +20857,7 @@
                 <a:ea typeface="微软雅黑" pitchFamily="34" charset="-122"/>
                 <a:cs typeface="微软雅黑" pitchFamily="34" charset="-120"/>
               </a:rPr>
-              <a:t>帮扶管理信息系统 v1.12.22</a:t>
+              <a:t>帮扶管理信息系统 v1.12.24</a:t>
             </a:r>
             <a:endParaRPr lang="en-US" sz="1050" dirty="0"/>
           </a:p>
@@ -21771,7 +21771,7 @@
                 <a:ea typeface="微软雅黑" pitchFamily="34" charset="-122"/>
                 <a:cs typeface="微软雅黑" pitchFamily="34" charset="-120"/>
               </a:rPr>
-              <a:t>帮扶管理信息系统 v1.12.22</a:t>
+              <a:t>帮扶管理信息系统 v1.12.24</a:t>
             </a:r>
             <a:endParaRPr lang="en-US" sz="1050" dirty="0"/>
           </a:p>
@@ -22931,7 +22931,7 @@
                 <a:ea typeface="微软雅黑" pitchFamily="34" charset="-122"/>
                 <a:cs typeface="微软雅黑" pitchFamily="34" charset="-120"/>
               </a:rPr>
-              <a:t>帮扶管理信息系统 v1.12.22</a:t>
+              <a:t>帮扶管理信息系统 v1.12.24</a:t>
             </a:r>
             <a:endParaRPr lang="en-US" sz="1050" dirty="0"/>
           </a:p>
@@ -23585,7 +23585,7 @@
                 <a:ea typeface="微软雅黑" pitchFamily="34" charset="-122"/>
                 <a:cs typeface="微软雅黑" pitchFamily="34" charset="-120"/>
               </a:rPr>
-              <a:t>19,961 项自动化测试（后端 13349 + 前端 6612）</a:t>
+              <a:t>20,190 项自动化测试（后端 13349 + 前端 6612）</a:t>
             </a:r>
             <a:endParaRPr lang="en-US" sz="1400" dirty="0"/>
           </a:p>
@@ -23951,7 +23951,7 @@
                 <a:ea typeface="微软雅黑" pitchFamily="34" charset="-122"/>
                 <a:cs typeface="微软雅黑" pitchFamily="34" charset="-120"/>
               </a:rPr>
-              <a:t>帮扶管理信息系统 v1.12.22</a:t>
+              <a:t>帮扶管理信息系统 v1.12.24</a:t>
             </a:r>
             <a:endParaRPr lang="en-US" sz="1050" dirty="0"/>
           </a:p>
@@ -24008,7 +24008,7 @@
                 <a:ea typeface="微软雅黑" pitchFamily="34" charset="-122"/>
                 <a:cs typeface="微软雅黑" pitchFamily="34" charset="-120"/>
               </a:rPr>
-              <a:t>数据来源：2026-10-17 实测（v1.12.22）· 后端 13349 / 前端 6612 用例 · 覆盖率 100%（行+分支）</a:t>
+              <a:t>数据来源：2026-10-17 实测（v1.12.24）· 后端 13349 / 前端 6685 用例 · 覆盖率 100%（行+分支）</a:t>
             </a:r>
             <a:endParaRPr lang="en-US" sz="1050" dirty="0"/>
           </a:p>
@@ -24473,7 +24473,7 @@
                 <a:ea typeface="微软雅黑" pitchFamily="34" charset="-122"/>
                 <a:cs typeface="微软雅黑" pitchFamily="34" charset="-120"/>
               </a:rPr>
-              <a:t>帮扶管理信息系统 v1.12.22</a:t>
+              <a:t>帮扶管理信息系统 v1.12.24</a:t>
             </a:r>
             <a:endParaRPr lang="en-US" sz="1050" dirty="0"/>
           </a:p>
@@ -25166,7 +25166,7 @@
                 <a:ea typeface="微软雅黑" pitchFamily="34" charset="-122"/>
                 <a:cs typeface="微软雅黑" pitchFamily="34" charset="-120"/>
               </a:rPr>
-              <a:t>帮扶管理信息系统 v1.12.22</a:t>
+              <a:t>帮扶管理信息系统 v1.12.24</a:t>
             </a:r>
             <a:endParaRPr lang="en-US" sz="1050" dirty="0"/>
           </a:p>
@@ -25792,7 +25792,7 @@
                 <a:ea typeface="微软雅黑" pitchFamily="34" charset="-122"/>
                 <a:cs typeface="微软雅黑" pitchFamily="34" charset="-120"/>
               </a:rPr>
-              <a:t>帮扶管理信息系统 v1.12.22</a:t>
+              <a:t>帮扶管理信息系统 v1.12.24</a:t>
             </a:r>
             <a:endParaRPr lang="en-US" sz="1050" dirty="0"/>
           </a:p>
@@ -26743,7 +26743,7 @@
                 <a:ea typeface="微软雅黑" pitchFamily="34" charset="-122"/>
                 <a:cs typeface="微软雅黑" pitchFamily="34" charset="-120"/>
               </a:rPr>
-              <a:t>帮扶管理信息系统 v1.12.22</a:t>
+              <a:t>帮扶管理信息系统 v1.12.24</a:t>
             </a:r>
             <a:endParaRPr lang="en-US" sz="1050" dirty="0"/>
           </a:p>
@@ -27841,7 +27841,7 @@
                 <a:ea typeface="微软雅黑" pitchFamily="34" charset="-122"/>
                 <a:cs typeface="微软雅黑" pitchFamily="34" charset="-120"/>
               </a:rPr>
-              <a:t>帮扶管理信息系统 v1.12.22</a:t>
+              <a:t>帮扶管理信息系统 v1.12.24</a:t>
             </a:r>
             <a:endParaRPr lang="en-US" sz="1050" dirty="0"/>
           </a:p>
@@ -28488,7 +28488,7 @@
                 <a:ea typeface="微软雅黑" pitchFamily="34" charset="-122"/>
                 <a:cs typeface="微软雅黑" pitchFamily="34" charset="-120"/>
               </a:rPr>
-              <a:t>帮扶管理信息系统 v1.12.22</a:t>
+              <a:t>帮扶管理信息系统 v1.12.24</a:t>
             </a:r>
             <a:endParaRPr lang="en-US" sz="1050" dirty="0"/>
           </a:p>
@@ -29544,7 +29544,7 @@
                 <a:ea typeface="微软雅黑" pitchFamily="34" charset="-122"/>
                 <a:cs typeface="微软雅黑" pitchFamily="34" charset="-120"/>
               </a:rPr>
-              <a:t>帮扶管理信息系统 v1.12.22</a:t>
+              <a:t>帮扶管理信息系统 v1.12.24</a:t>
             </a:r>
             <a:endParaRPr lang="en-US" sz="1050" dirty="0"/>
           </a:p>
@@ -30123,7 +30123,7 @@
                 <a:ea typeface="微软雅黑" pitchFamily="34" charset="-122"/>
                 <a:cs typeface="微软雅黑" pitchFamily="34" charset="-120"/>
               </a:rPr>
-              <a:t>帮扶管理信息系统 v1.12.22</a:t>
+              <a:t>帮扶管理信息系统 v1.12.24</a:t>
             </a:r>
             <a:endParaRPr lang="en-US" sz="1050" dirty="0"/>
           </a:p>
@@ -31016,7 +31016,7 @@
                 <a:ea typeface="微软雅黑" pitchFamily="34" charset="-122"/>
                 <a:cs typeface="微软雅黑" pitchFamily="34" charset="-120"/>
               </a:rPr>
-              <a:t>帮扶管理信息系统 v1.12.22  ·  仓库：github.com/lzh745200/MRRS  ·  完整文档见 docs/ 目录</a:t>
+              <a:t>帮扶管理信息系统 v1.12.24  ·  仓库：github.com/lzh745200/MRRS  ·  完整文档见 docs/ 目录</a:t>
             </a:r>
             <a:endParaRPr lang="en-US" sz="1350" dirty="0"/>
           </a:p>
@@ -31277,7 +31277,7 @@
                 <a:ea typeface="微软雅黑" pitchFamily="34" charset="-122"/>
                 <a:cs typeface="微软雅黑" pitchFamily="34" charset="-120"/>
               </a:rPr>
-              <a:t>帮扶管理信息系统 v1.12.22</a:t>
+              <a:t>帮扶管理信息系统 v1.12.24</a:t>
             </a:r>
             <a:endParaRPr lang="en-US" sz="1050" dirty="0"/>
           </a:p>
@@ -32053,7 +32053,7 @@
                 <a:ea typeface="微软雅黑" pitchFamily="34" charset="-122"/>
                 <a:cs typeface="微软雅黑" pitchFamily="34" charset="-120"/>
               </a:rPr>
-              <a:t>帮扶管理信息系统 v1.12.22</a:t>
+              <a:t>帮扶管理信息系统 v1.12.24</a:t>
             </a:r>
             <a:endParaRPr lang="en-US" sz="1050" dirty="0"/>
           </a:p>
@@ -32777,7 +32777,7 @@
                 <a:ea typeface="微软雅黑" pitchFamily="34" charset="-122"/>
                 <a:cs typeface="微软雅黑" pitchFamily="34" charset="-120"/>
               </a:rPr>
-              <a:t>数据来源：2026-10-17 仓库实测（v1.12.22）—— 后端 13349 用例全绿 / 行+分支覆盖率 100%（branch=True 严格门禁）· 前端 6612 用例全绿 · flake8 0 · bandit 0 中高危 · vue-tsc 0 · eslint 0 警告</a:t>
+              <a:t>数据来源：2026-10-17 仓库实测（v1.12.24）—— 后端 13505 用例全绿 / 行+分支覆盖率 100%（branch=True 严格门禁）· 前端 6685 用例全绿 · flake8 0 · bandit 0 中高危 · vue-tsc 0 · eslint 0 警告</a:t>
             </a:r>
             <a:endParaRPr lang="en-US" sz="1000" dirty="0"/>
           </a:p>
@@ -33301,7 +33301,7 @@
                 <a:ea typeface="微软雅黑" pitchFamily="34" charset="-122"/>
                 <a:cs typeface="微软雅黑" pitchFamily="34" charset="-120"/>
               </a:rPr>
-              <a:t>帮扶管理信息系统 v1.12.22</a:t>
+              <a:t>帮扶管理信息系统 v1.12.24</a:t>
             </a:r>
             <a:endParaRPr lang="en-US" sz="1050" dirty="0"/>
           </a:p>
@@ -34413,7 +34413,7 @@
                 <a:ea typeface="微软雅黑" pitchFamily="34" charset="-122"/>
                 <a:cs typeface="微软雅黑" pitchFamily="34" charset="-120"/>
               </a:rPr>
-              <a:t>帮扶管理信息系统 v1.12.22</a:t>
+              <a:t>帮扶管理信息系统 v1.12.24</a:t>
             </a:r>
             <a:endParaRPr lang="en-US" sz="1050" dirty="0"/>
           </a:p>

--- a/docs/帮扶管理信息系统介绍.pptx
+++ b/docs/帮扶管理信息系统介绍.pptx
@@ -4976,7 +4976,7 @@
                 <a:ea typeface="微软雅黑" pitchFamily="34" charset="-122"/>
                 <a:cs typeface="微软雅黑" pitchFamily="34" charset="-120"/>
               </a:rPr>
-              <a:t>V1.12.24  |  2026-10-17  |  FastAPI + Vue 3 + Electron + SQLite</a:t>
+              <a:t>V1.12.25  |  2026-10-17  |  FastAPI + Vue 3 + Electron + SQLite</a:t>
             </a:r>
             <a:endParaRPr lang="en-US" sz="1250" dirty="0"/>
           </a:p>
@@ -5196,7 +5196,7 @@
                 <a:ea typeface="微软雅黑" pitchFamily="34" charset="-122"/>
                 <a:cs typeface="微软雅黑" pitchFamily="34" charset="-120"/>
               </a:rPr>
-              <a:t>帮扶管理信息系统 v1.12.24</a:t>
+              <a:t>帮扶管理信息系统 v1.12.25</a:t>
             </a:r>
             <a:endParaRPr lang="en-US" sz="1050" dirty="0"/>
           </a:p>
@@ -5822,7 +5822,7 @@
                 <a:ea typeface="微软雅黑" pitchFamily="34" charset="-122"/>
                 <a:cs typeface="微软雅黑" pitchFamily="34" charset="-120"/>
               </a:rPr>
-              <a:t>帮扶管理信息系统 v1.12.24</a:t>
+              <a:t>帮扶管理信息系统 v1.12.25</a:t>
             </a:r>
             <a:endParaRPr lang="en-US" sz="1050" dirty="0"/>
           </a:p>
@@ -6754,7 +6754,7 @@
                 <a:ea typeface="微软雅黑" pitchFamily="34" charset="-122"/>
                 <a:cs typeface="微软雅黑" pitchFamily="34" charset="-120"/>
               </a:rPr>
-              <a:t>帮扶管理信息系统 v1.12.24</a:t>
+              <a:t>帮扶管理信息系统 v1.12.25</a:t>
             </a:r>
             <a:endParaRPr lang="en-US" sz="1050" dirty="0"/>
           </a:p>
@@ -7380,7 +7380,7 @@
                 <a:ea typeface="微软雅黑" pitchFamily="34" charset="-122"/>
                 <a:cs typeface="微软雅黑" pitchFamily="34" charset="-120"/>
               </a:rPr>
-              <a:t>帮扶管理信息系统 v1.12.24</a:t>
+              <a:t>帮扶管理信息系统 v1.12.25</a:t>
             </a:r>
             <a:endParaRPr lang="en-US" sz="1050" dirty="0"/>
           </a:p>
@@ -8809,7 +8809,7 @@
                 <a:ea typeface="微软雅黑" pitchFamily="34" charset="-122"/>
                 <a:cs typeface="微软雅黑" pitchFamily="34" charset="-120"/>
               </a:rPr>
-              <a:t>帮扶管理信息系统 v1.12.24</a:t>
+              <a:t>帮扶管理信息系统 v1.12.25</a:t>
             </a:r>
             <a:endParaRPr lang="en-US" sz="1050" dirty="0"/>
           </a:p>
@@ -10006,7 +10006,7 @@
                 <a:ea typeface="微软雅黑" pitchFamily="34" charset="-122"/>
                 <a:cs typeface="微软雅黑" pitchFamily="34" charset="-120"/>
               </a:rPr>
-              <a:t>帮扶管理信息系统 v1.12.24</a:t>
+              <a:t>帮扶管理信息系统 v1.12.25</a:t>
             </a:r>
             <a:endParaRPr lang="en-US" sz="1050" dirty="0"/>
           </a:p>
@@ -10632,7 +10632,7 @@
                 <a:ea typeface="微软雅黑" pitchFamily="34" charset="-122"/>
                 <a:cs typeface="微软雅黑" pitchFamily="34" charset="-120"/>
               </a:rPr>
-              <a:t>帮扶管理信息系统 v1.12.24</a:t>
+              <a:t>帮扶管理信息系统 v1.12.25</a:t>
             </a:r>
             <a:endParaRPr lang="en-US" sz="1050" dirty="0"/>
           </a:p>
@@ -11496,7 +11496,7 @@
                 <a:ea typeface="微软雅黑" pitchFamily="34" charset="-122"/>
                 <a:cs typeface="微软雅黑" pitchFamily="34" charset="-120"/>
               </a:rPr>
-              <a:t>帮扶管理信息系统 v1.12.24</a:t>
+              <a:t>帮扶管理信息系统 v1.12.25</a:t>
             </a:r>
             <a:endParaRPr lang="en-US" sz="1050" dirty="0"/>
           </a:p>
@@ -12235,7 +12235,7 @@
                 <a:ea typeface="微软雅黑" pitchFamily="34" charset="-122"/>
                 <a:cs typeface="微软雅黑" pitchFamily="34" charset="-120"/>
               </a:rPr>
-              <a:t>帮扶管理信息系统 v1.12.24</a:t>
+              <a:t>帮扶管理信息系统 v1.12.25</a:t>
             </a:r>
             <a:endParaRPr lang="en-US" sz="1050" dirty="0"/>
           </a:p>
@@ -14829,7 +14829,7 @@
                 <a:ea typeface="微软雅黑" pitchFamily="34" charset="-122"/>
                 <a:cs typeface="微软雅黑" pitchFamily="34" charset="-120"/>
               </a:rPr>
-              <a:t>帮扶管理信息系统 v1.12.24</a:t>
+              <a:t>帮扶管理信息系统 v1.12.25</a:t>
             </a:r>
             <a:endParaRPr lang="en-US" sz="1050" dirty="0"/>
           </a:p>
@@ -15455,7 +15455,7 @@
                 <a:ea typeface="微软雅黑" pitchFamily="34" charset="-122"/>
                 <a:cs typeface="微软雅黑" pitchFamily="34" charset="-120"/>
               </a:rPr>
-              <a:t>帮扶管理信息系统 v1.12.24</a:t>
+              <a:t>帮扶管理信息系统 v1.12.25</a:t>
             </a:r>
             <a:endParaRPr lang="en-US" sz="1050" dirty="0"/>
           </a:p>
@@ -16150,7 +16150,7 @@
                 <a:ea typeface="微软雅黑" pitchFamily="34" charset="-122"/>
                 <a:cs typeface="微软雅黑" pitchFamily="34" charset="-120"/>
               </a:rPr>
-              <a:t>帮扶管理信息系统 v1.12.24</a:t>
+              <a:t>帮扶管理信息系统 v1.12.25</a:t>
             </a:r>
             <a:endParaRPr lang="en-US" sz="1050" dirty="0"/>
           </a:p>
@@ -16849,7 +16849,7 @@
                 <a:ea typeface="微软雅黑" pitchFamily="34" charset="-122"/>
                 <a:cs typeface="微软雅黑" pitchFamily="34" charset="-120"/>
               </a:rPr>
-              <a:t>帮扶管理信息系统 v1.12.24</a:t>
+              <a:t>帮扶管理信息系统 v1.12.25</a:t>
             </a:r>
             <a:endParaRPr lang="en-US" sz="1050" dirty="0"/>
           </a:p>
@@ -17759,7 +17759,7 @@
                 <a:ea typeface="微软雅黑" pitchFamily="34" charset="-122"/>
                 <a:cs typeface="微软雅黑" pitchFamily="34" charset="-120"/>
               </a:rPr>
-              <a:t>帮扶管理信息系统 v1.12.24</a:t>
+              <a:t>帮扶管理信息系统 v1.12.25</a:t>
             </a:r>
             <a:endParaRPr lang="en-US" sz="1050" dirty="0"/>
           </a:p>
@@ -18973,7 +18973,7 @@
                 <a:ea typeface="微软雅黑" pitchFamily="34" charset="-122"/>
                 <a:cs typeface="微软雅黑" pitchFamily="34" charset="-120"/>
               </a:rPr>
-              <a:t>帮扶管理信息系统 v1.12.24</a:t>
+              <a:t>帮扶管理信息系统 v1.12.25</a:t>
             </a:r>
             <a:endParaRPr lang="en-US" sz="1050" dirty="0"/>
           </a:p>
@@ -20008,7 +20008,7 @@
                 <a:ea typeface="微软雅黑" pitchFamily="34" charset="-122"/>
                 <a:cs typeface="微软雅黑" pitchFamily="34" charset="-120"/>
               </a:rPr>
-              <a:t>帮扶管理信息系统 v1.12.24</a:t>
+              <a:t>帮扶管理信息系统 v1.12.25</a:t>
             </a:r>
             <a:endParaRPr lang="en-US" sz="1050" dirty="0"/>
           </a:p>
@@ -20857,7 +20857,7 @@
                 <a:ea typeface="微软雅黑" pitchFamily="34" charset="-122"/>
                 <a:cs typeface="微软雅黑" pitchFamily="34" charset="-120"/>
               </a:rPr>
-              <a:t>帮扶管理信息系统 v1.12.24</a:t>
+              <a:t>帮扶管理信息系统 v1.12.25</a:t>
             </a:r>
             <a:endParaRPr lang="en-US" sz="1050" dirty="0"/>
           </a:p>
@@ -21771,7 +21771,7 @@
                 <a:ea typeface="微软雅黑" pitchFamily="34" charset="-122"/>
                 <a:cs typeface="微软雅黑" pitchFamily="34" charset="-120"/>
               </a:rPr>
-              <a:t>帮扶管理信息系统 v1.12.24</a:t>
+              <a:t>帮扶管理信息系统 v1.12.25</a:t>
             </a:r>
             <a:endParaRPr lang="en-US" sz="1050" dirty="0"/>
           </a:p>
@@ -22931,7 +22931,7 @@
                 <a:ea typeface="微软雅黑" pitchFamily="34" charset="-122"/>
                 <a:cs typeface="微软雅黑" pitchFamily="34" charset="-120"/>
               </a:rPr>
-              <a:t>帮扶管理信息系统 v1.12.24</a:t>
+              <a:t>帮扶管理信息系统 v1.12.25</a:t>
             </a:r>
             <a:endParaRPr lang="en-US" sz="1050" dirty="0"/>
           </a:p>
@@ -23951,7 +23951,7 @@
                 <a:ea typeface="微软雅黑" pitchFamily="34" charset="-122"/>
                 <a:cs typeface="微软雅黑" pitchFamily="34" charset="-120"/>
               </a:rPr>
-              <a:t>帮扶管理信息系统 v1.12.24</a:t>
+              <a:t>帮扶管理信息系统 v1.12.25</a:t>
             </a:r>
             <a:endParaRPr lang="en-US" sz="1050" dirty="0"/>
           </a:p>
@@ -24008,7 +24008,7 @@
                 <a:ea typeface="微软雅黑" pitchFamily="34" charset="-122"/>
                 <a:cs typeface="微软雅黑" pitchFamily="34" charset="-120"/>
               </a:rPr>
-              <a:t>数据来源：2026-10-17 实测（v1.12.24）· 后端 13349 / 前端 6685 用例 · 覆盖率 100%（行+分支）</a:t>
+              <a:t>数据来源：2026-10-17 实测（v1.12.25）· 后端 13349 / 前端 6685 用例 · 覆盖率 100%（行+分支）</a:t>
             </a:r>
             <a:endParaRPr lang="en-US" sz="1050" dirty="0"/>
           </a:p>
@@ -24473,7 +24473,7 @@
                 <a:ea typeface="微软雅黑" pitchFamily="34" charset="-122"/>
                 <a:cs typeface="微软雅黑" pitchFamily="34" charset="-120"/>
               </a:rPr>
-              <a:t>帮扶管理信息系统 v1.12.24</a:t>
+              <a:t>帮扶管理信息系统 v1.12.25</a:t>
             </a:r>
             <a:endParaRPr lang="en-US" sz="1050" dirty="0"/>
           </a:p>
@@ -25166,7 +25166,7 @@
                 <a:ea typeface="微软雅黑" pitchFamily="34" charset="-122"/>
                 <a:cs typeface="微软雅黑" pitchFamily="34" charset="-120"/>
               </a:rPr>
-              <a:t>帮扶管理信息系统 v1.12.24</a:t>
+              <a:t>帮扶管理信息系统 v1.12.25</a:t>
             </a:r>
             <a:endParaRPr lang="en-US" sz="1050" dirty="0"/>
           </a:p>
@@ -25792,7 +25792,7 @@
                 <a:ea typeface="微软雅黑" pitchFamily="34" charset="-122"/>
                 <a:cs typeface="微软雅黑" pitchFamily="34" charset="-120"/>
               </a:rPr>
-              <a:t>帮扶管理信息系统 v1.12.24</a:t>
+              <a:t>帮扶管理信息系统 v1.12.25</a:t>
             </a:r>
             <a:endParaRPr lang="en-US" sz="1050" dirty="0"/>
           </a:p>
@@ -26743,7 +26743,7 @@
                 <a:ea typeface="微软雅黑" pitchFamily="34" charset="-122"/>
                 <a:cs typeface="微软雅黑" pitchFamily="34" charset="-120"/>
               </a:rPr>
-              <a:t>帮扶管理信息系统 v1.12.24</a:t>
+              <a:t>帮扶管理信息系统 v1.12.25</a:t>
             </a:r>
             <a:endParaRPr lang="en-US" sz="1050" dirty="0"/>
           </a:p>
@@ -27841,7 +27841,7 @@
                 <a:ea typeface="微软雅黑" pitchFamily="34" charset="-122"/>
                 <a:cs typeface="微软雅黑" pitchFamily="34" charset="-120"/>
               </a:rPr>
-              <a:t>帮扶管理信息系统 v1.12.24</a:t>
+              <a:t>帮扶管理信息系统 v1.12.25</a:t>
             </a:r>
             <a:endParaRPr lang="en-US" sz="1050" dirty="0"/>
           </a:p>
@@ -28488,7 +28488,7 @@
                 <a:ea typeface="微软雅黑" pitchFamily="34" charset="-122"/>
                 <a:cs typeface="微软雅黑" pitchFamily="34" charset="-120"/>
               </a:rPr>
-              <a:t>帮扶管理信息系统 v1.12.24</a:t>
+              <a:t>帮扶管理信息系统 v1.12.25</a:t>
             </a:r>
             <a:endParaRPr lang="en-US" sz="1050" dirty="0"/>
           </a:p>
@@ -29544,7 +29544,7 @@
                 <a:ea typeface="微软雅黑" pitchFamily="34" charset="-122"/>
                 <a:cs typeface="微软雅黑" pitchFamily="34" charset="-120"/>
               </a:rPr>
-              <a:t>帮扶管理信息系统 v1.12.24</a:t>
+              <a:t>帮扶管理信息系统 v1.12.25</a:t>
             </a:r>
             <a:endParaRPr lang="en-US" sz="1050" dirty="0"/>
           </a:p>
@@ -30123,7 +30123,7 @@
                 <a:ea typeface="微软雅黑" pitchFamily="34" charset="-122"/>
                 <a:cs typeface="微软雅黑" pitchFamily="34" charset="-120"/>
               </a:rPr>
-              <a:t>帮扶管理信息系统 v1.12.24</a:t>
+              <a:t>帮扶管理信息系统 v1.12.25</a:t>
             </a:r>
             <a:endParaRPr lang="en-US" sz="1050" dirty="0"/>
           </a:p>
@@ -31016,7 +31016,7 @@
                 <a:ea typeface="微软雅黑" pitchFamily="34" charset="-122"/>
                 <a:cs typeface="微软雅黑" pitchFamily="34" charset="-120"/>
               </a:rPr>
-              <a:t>帮扶管理信息系统 v1.12.24  ·  仓库：github.com/lzh745200/MRRS  ·  完整文档见 docs/ 目录</a:t>
+              <a:t>帮扶管理信息系统 v1.12.25  ·  仓库：github.com/lzh745200/MRRS  ·  完整文档见 docs/ 目录</a:t>
             </a:r>
             <a:endParaRPr lang="en-US" sz="1350" dirty="0"/>
           </a:p>
@@ -31277,7 +31277,7 @@
                 <a:ea typeface="微软雅黑" pitchFamily="34" charset="-122"/>
                 <a:cs typeface="微软雅黑" pitchFamily="34" charset="-120"/>
               </a:rPr>
-              <a:t>帮扶管理信息系统 v1.12.24</a:t>
+              <a:t>帮扶管理信息系统 v1.12.25</a:t>
             </a:r>
             <a:endParaRPr lang="en-US" sz="1050" dirty="0"/>
           </a:p>
@@ -32053,7 +32053,7 @@
                 <a:ea typeface="微软雅黑" pitchFamily="34" charset="-122"/>
                 <a:cs typeface="微软雅黑" pitchFamily="34" charset="-120"/>
               </a:rPr>
-              <a:t>帮扶管理信息系统 v1.12.24</a:t>
+              <a:t>帮扶管理信息系统 v1.12.25</a:t>
             </a:r>
             <a:endParaRPr lang="en-US" sz="1050" dirty="0"/>
           </a:p>
@@ -32777,7 +32777,7 @@
                 <a:ea typeface="微软雅黑" pitchFamily="34" charset="-122"/>
                 <a:cs typeface="微软雅黑" pitchFamily="34" charset="-120"/>
               </a:rPr>
-              <a:t>数据来源：2026-10-17 仓库实测（v1.12.24）—— 后端 13505 用例全绿 / 行+分支覆盖率 100%（branch=True 严格门禁）· 前端 6685 用例全绿 · flake8 0 · bandit 0 中高危 · vue-tsc 0 · eslint 0 警告</a:t>
+              <a:t>数据来源：2026-10-17 仓库实测（v1.12.25）—— 后端 13505 用例全绿 / 行+分支覆盖率 100%（branch=True 严格门禁）· 前端 6685 用例全绿 · flake8 0 · bandit 0 中高危 · vue-tsc 0 · eslint 0 警告</a:t>
             </a:r>
             <a:endParaRPr lang="en-US" sz="1000" dirty="0"/>
           </a:p>
@@ -33301,7 +33301,7 @@
                 <a:ea typeface="微软雅黑" pitchFamily="34" charset="-122"/>
                 <a:cs typeface="微软雅黑" pitchFamily="34" charset="-120"/>
               </a:rPr>
-              <a:t>帮扶管理信息系统 v1.12.24</a:t>
+              <a:t>帮扶管理信息系统 v1.12.25</a:t>
             </a:r>
             <a:endParaRPr lang="en-US" sz="1050" dirty="0"/>
           </a:p>
@@ -34413,7 +34413,7 @@
                 <a:ea typeface="微软雅黑" pitchFamily="34" charset="-122"/>
                 <a:cs typeface="微软雅黑" pitchFamily="34" charset="-120"/>
               </a:rPr>
-              <a:t>帮扶管理信息系统 v1.12.24</a:t>
+              <a:t>帮扶管理信息系统 v1.12.25</a:t>
             </a:r>
             <a:endParaRPr lang="en-US" sz="1050" dirty="0"/>
           </a:p>

--- a/docs/帮扶管理信息系统介绍.pptx
+++ b/docs/帮扶管理信息系统介绍.pptx
@@ -249,10 +249,10 @@
                 <c:formatCode>General</c:formatCode>
                 <c:ptCount val="2"/>
                 <c:pt idx="0">
-                  <c:v>12381</c:v>
+                  <c:v>13505</c:v>
                 </c:pt>
                 <c:pt idx="1">
-                  <c:v>6323</c:v>
+                  <c:v>6685</c:v>
                 </c:pt>
               </c:numCache>
             </c:numRef>
@@ -4701,10 +4701,6 @@
           </a:solidFill>
           <a:ln/>
         </p:spPr>
-        <p:txBody>
-          <a:bodyPr/>
-          <a:p/>
-        </p:txBody>
       </p:sp>
       <p:sp>
         <p:nvSpPr>
@@ -4725,10 +4721,6 @@
           </a:solidFill>
           <a:ln/>
         </p:spPr>
-        <p:txBody>
-          <a:bodyPr/>
-          <a:p/>
-        </p:txBody>
       </p:sp>
       <p:sp>
         <p:nvSpPr>
@@ -4749,10 +4741,6 @@
           </a:solidFill>
           <a:ln/>
         </p:spPr>
-        <p:txBody>
-          <a:bodyPr/>
-          <a:p/>
-        </p:txBody>
       </p:sp>
       <p:sp>
         <p:nvSpPr>
@@ -4976,7 +4964,7 @@
                 <a:ea typeface="微软雅黑" pitchFamily="34" charset="-122"/>
                 <a:cs typeface="微软雅黑" pitchFamily="34" charset="-120"/>
               </a:rPr>
-              <a:t>V1.12.25  |  2026-10-17  |  FastAPI + Vue 3 + Electron + SQLite</a:t>
+              <a:t>V1.13.0  |  2026-10-18  |  FastAPI + Vue 3 + Electron + SQLite</a:t>
             </a:r>
             <a:endParaRPr lang="en-US" sz="1250" dirty="0"/>
           </a:p>
@@ -5033,10 +5021,6 @@
           </a:solidFill>
           <a:ln/>
         </p:spPr>
-        <p:txBody>
-          <a:bodyPr/>
-          <a:p/>
-        </p:txBody>
       </p:sp>
       <p:sp>
         <p:nvSpPr>
@@ -5196,7 +5180,7 @@
                 <a:ea typeface="微软雅黑" pitchFamily="34" charset="-122"/>
                 <a:cs typeface="微软雅黑" pitchFamily="34" charset="-120"/>
               </a:rPr>
-              <a:t>帮扶管理信息系统 v1.12.25</a:t>
+              <a:t>帮扶管理信息系统 v1.13.0</a:t>
             </a:r>
             <a:endParaRPr lang="en-US" sz="1050" dirty="0"/>
           </a:p>
@@ -5230,10 +5214,6 @@
             </a:outerShdw>
           </a:effectLst>
         </p:spPr>
-        <p:txBody>
-          <a:bodyPr/>
-          <a:p/>
-        </p:txBody>
       </p:sp>
       <p:sp>
         <p:nvSpPr>
@@ -5301,13 +5281,13 @@
           <a:p>
             <a:pPr algn="l" marL="152400" indent="-152400">
               <a:spcAft>
-                <a:spcPts val="1000"/>
+                <a:spcPts val="900"/>
               </a:spcAft>
               <a:buSzPct val="100000"/>
               <a:buChar char="▪"/>
             </a:pPr>
             <a:r>
-              <a:rPr lang="en-US" sz="1350" dirty="0">
+              <a:rPr lang="en-US" sz="1300" dirty="0">
                 <a:solidFill>
                   <a:srgbClr val="1A2E24"/>
                 </a:solidFill>
@@ -5315,20 +5295,20 @@
                 <a:ea typeface="微软雅黑" pitchFamily="34" charset="-122"/>
                 <a:cs typeface="微软雅黑" pitchFamily="34" charset="-120"/>
               </a:rPr>
-              <a:t>132 个业务视图（34 个功能目录）</a:t>
-            </a:r>
-            <a:endParaRPr lang="en-US" sz="1350" dirty="0"/>
+              <a:t>139 个业务视图（34 个功能目录）</a:t>
+            </a:r>
+            <a:endParaRPr lang="en-US" sz="1300" dirty="0"/>
           </a:p>
           <a:p>
             <a:pPr algn="l" marL="152400" indent="-152400">
               <a:spcAft>
-                <a:spcPts val="1000"/>
+                <a:spcPts val="900"/>
               </a:spcAft>
               <a:buSzPct val="100000"/>
               <a:buChar char="▪"/>
             </a:pPr>
             <a:r>
-              <a:rPr lang="en-US" sz="1350" dirty="0">
+              <a:rPr lang="en-US" sz="1300" dirty="0">
                 <a:solidFill>
                   <a:srgbClr val="1A2E24"/>
                 </a:solidFill>
@@ -5338,18 +5318,18 @@
               </a:rPr>
               <a:t>25 个共享组件（PageHeader / EmptyState / BaseChart 等标准件）</a:t>
             </a:r>
-            <a:endParaRPr lang="en-US" sz="1350" dirty="0"/>
+            <a:endParaRPr lang="en-US" sz="1300" dirty="0"/>
           </a:p>
           <a:p>
             <a:pPr algn="l" marL="152400" indent="-152400">
               <a:spcAft>
-                <a:spcPts val="1000"/>
+                <a:spcPts val="900"/>
               </a:spcAft>
               <a:buSzPct val="100000"/>
               <a:buChar char="▪"/>
             </a:pPr>
             <a:r>
-              <a:rPr lang="en-US" sz="1350" dirty="0">
+              <a:rPr lang="en-US" sz="1300" dirty="0">
                 <a:solidFill>
                   <a:srgbClr val="1A2E24"/>
                 </a:solidFill>
@@ -5359,18 +5339,18 @@
               </a:rPr>
               <a:t>34 个 Pinia store + 30+ 组合式函数</a:t>
             </a:r>
-            <a:endParaRPr lang="en-US" sz="1350" dirty="0"/>
+            <a:endParaRPr lang="en-US" sz="1300" dirty="0"/>
           </a:p>
           <a:p>
             <a:pPr algn="l" marL="152400" indent="-152400">
               <a:spcAft>
-                <a:spcPts val="1000"/>
+                <a:spcPts val="900"/>
               </a:spcAft>
               <a:buSzPct val="100000"/>
               <a:buChar char="▪"/>
             </a:pPr>
             <a:r>
-              <a:rPr lang="en-US" sz="1350" dirty="0">
+              <a:rPr lang="en-US" sz="1300" dirty="0">
                 <a:solidFill>
                   <a:srgbClr val="1A2E24"/>
                 </a:solidFill>
@@ -5378,20 +5358,20 @@
                 <a:ea typeface="微软雅黑" pitchFamily="34" charset="-122"/>
                 <a:cs typeface="微软雅黑" pitchFamily="34" charset="-120"/>
               </a:rPr>
-              <a:t>315 个测试文件 · 6685 个用例</a:t>
-            </a:r>
-            <a:endParaRPr lang="en-US" sz="1350" dirty="0"/>
+              <a:t>313 个测试文件 · 6,700+ 个用例</a:t>
+            </a:r>
+            <a:endParaRPr lang="en-US" sz="1300" dirty="0"/>
           </a:p>
           <a:p>
             <a:pPr algn="l" marL="152400" indent="-152400">
               <a:spcAft>
-                <a:spcPts val="1000"/>
+                <a:spcPts val="900"/>
               </a:spcAft>
               <a:buSzPct val="100000"/>
               <a:buChar char="▪"/>
             </a:pPr>
             <a:r>
-              <a:rPr lang="en-US" sz="1350" dirty="0">
+              <a:rPr lang="en-US" sz="1300" dirty="0">
                 <a:solidFill>
                   <a:srgbClr val="1A2E24"/>
                 </a:solidFill>
@@ -5399,9 +5379,30 @@
                 <a:ea typeface="微软雅黑" pitchFamily="34" charset="-122"/>
                 <a:cs typeface="微软雅黑" pitchFamily="34" charset="-120"/>
               </a:rPr>
+              <a:t>后端 v2 菜单单一源：侧栏 / 移动端 / 权限面板全部数据驱动（Ctrl+K 搜索 / 收藏 / 最近访问）</a:t>
+            </a:r>
+            <a:endParaRPr lang="en-US" sz="1300" dirty="0"/>
+          </a:p>
+          <a:p>
+            <a:pPr algn="l" marL="152400" indent="-152400">
+              <a:spcAft>
+                <a:spcPts val="900"/>
+              </a:spcAft>
+              <a:buSzPct val="100000"/>
+              <a:buChar char="▪"/>
+            </a:pPr>
+            <a:r>
+              <a:rPr lang="en-US" sz="1300" dirty="0">
+                <a:solidFill>
+                  <a:srgbClr val="1A2E24"/>
+                </a:solidFill>
+                <a:latin typeface="微软雅黑" pitchFamily="34" charset="0"/>
+                <a:ea typeface="微软雅黑" pitchFamily="34" charset="-122"/>
+                <a:cs typeface="微软雅黑" pitchFamily="34" charset="-120"/>
+              </a:rPr>
               <a:t>覆盖率门禁（行 + 分支 100%）+ lint --max-warnings=0 + vue-tsc 三重 CI 门禁</a:t>
             </a:r>
-            <a:endParaRPr lang="en-US" sz="1350" dirty="0"/>
+            <a:endParaRPr lang="en-US" sz="1300" dirty="0"/>
           </a:p>
         </p:txBody>
       </p:sp>
@@ -5433,10 +5434,6 @@
             </a:outerShdw>
           </a:effectLst>
         </p:spPr>
-        <p:txBody>
-          <a:bodyPr/>
-          <a:p/>
-        </p:txBody>
       </p:sp>
       <p:sp>
         <p:nvSpPr>
@@ -5659,10 +5656,6 @@
           </a:solidFill>
           <a:ln/>
         </p:spPr>
-        <p:txBody>
-          <a:bodyPr/>
-          <a:p/>
-        </p:txBody>
       </p:sp>
       <p:sp>
         <p:nvSpPr>
@@ -5822,7 +5815,7 @@
                 <a:ea typeface="微软雅黑" pitchFamily="34" charset="-122"/>
                 <a:cs typeface="微软雅黑" pitchFamily="34" charset="-120"/>
               </a:rPr>
-              <a:t>帮扶管理信息系统 v1.12.25</a:t>
+              <a:t>帮扶管理信息系统 v1.13.0</a:t>
             </a:r>
             <a:endParaRPr lang="en-US" sz="1050" dirty="0"/>
           </a:p>
@@ -5847,10 +5840,6 @@
           </a:solidFill>
           <a:ln/>
         </p:spPr>
-        <p:txBody>
-          <a:bodyPr/>
-          <a:p/>
-        </p:txBody>
       </p:sp>
       <p:sp>
         <p:nvSpPr>
@@ -5953,10 +5942,6 @@
           </a:solidFill>
           <a:ln/>
         </p:spPr>
-        <p:txBody>
-          <a:bodyPr/>
-          <a:p/>
-        </p:txBody>
       </p:sp>
       <p:sp>
         <p:nvSpPr>
@@ -6059,10 +6044,6 @@
           </a:solidFill>
           <a:ln/>
         </p:spPr>
-        <p:txBody>
-          <a:bodyPr/>
-          <a:p/>
-        </p:txBody>
       </p:sp>
       <p:sp>
         <p:nvSpPr>
@@ -6165,10 +6146,6 @@
           </a:solidFill>
           <a:ln/>
         </p:spPr>
-        <p:txBody>
-          <a:bodyPr/>
-          <a:p/>
-        </p:txBody>
       </p:sp>
       <p:sp>
         <p:nvSpPr>
@@ -6271,10 +6248,6 @@
           </a:solidFill>
           <a:ln/>
         </p:spPr>
-        <p:txBody>
-          <a:bodyPr/>
-          <a:p/>
-        </p:txBody>
       </p:sp>
       <p:sp>
         <p:nvSpPr>
@@ -6386,10 +6359,6 @@
             </a:outerShdw>
           </a:effectLst>
         </p:spPr>
-        <p:txBody>
-          <a:bodyPr/>
-          <a:p/>
-        </p:txBody>
       </p:sp>
       <p:sp>
         <p:nvSpPr>
@@ -6591,10 +6560,6 @@
           </a:solidFill>
           <a:ln/>
         </p:spPr>
-        <p:txBody>
-          <a:bodyPr/>
-          <a:p/>
-        </p:txBody>
       </p:sp>
       <p:sp>
         <p:nvSpPr>
@@ -6754,7 +6719,7 @@
                 <a:ea typeface="微软雅黑" pitchFamily="34" charset="-122"/>
                 <a:cs typeface="微软雅黑" pitchFamily="34" charset="-120"/>
               </a:rPr>
-              <a:t>帮扶管理信息系统 v1.12.25</a:t>
+              <a:t>帮扶管理信息系统 v1.13.0</a:t>
             </a:r>
             <a:endParaRPr lang="en-US" sz="1050" dirty="0"/>
           </a:p>
@@ -6788,10 +6753,6 @@
             </a:outerShdw>
           </a:effectLst>
         </p:spPr>
-        <p:txBody>
-          <a:bodyPr/>
-          <a:p/>
-        </p:txBody>
       </p:sp>
       <p:sp>
         <p:nvSpPr>
@@ -6991,10 +6952,6 @@
             </a:outerShdw>
           </a:effectLst>
         </p:spPr>
-        <p:txBody>
-          <a:bodyPr/>
-          <a:p/>
-        </p:txBody>
       </p:sp>
       <p:sp>
         <p:nvSpPr>
@@ -7217,10 +7174,6 @@
           </a:solidFill>
           <a:ln/>
         </p:spPr>
-        <p:txBody>
-          <a:bodyPr/>
-          <a:p/>
-        </p:txBody>
       </p:sp>
       <p:sp>
         <p:nvSpPr>
@@ -7380,7 +7333,7 @@
                 <a:ea typeface="微软雅黑" pitchFamily="34" charset="-122"/>
                 <a:cs typeface="微软雅黑" pitchFamily="34" charset="-120"/>
               </a:rPr>
-              <a:t>帮扶管理信息系统 v1.12.25</a:t>
+              <a:t>帮扶管理信息系统 v1.13.0</a:t>
             </a:r>
             <a:endParaRPr lang="en-US" sz="1050" dirty="0"/>
           </a:p>
@@ -7414,10 +7367,6 @@
             </a:outerShdw>
           </a:effectLst>
         </p:spPr>
-        <p:txBody>
-          <a:bodyPr/>
-          <a:p/>
-        </p:txBody>
       </p:sp>
       <p:sp>
         <p:nvSpPr>
@@ -7575,10 +7524,6 @@
             </a:outerShdw>
           </a:effectLst>
         </p:spPr>
-        <p:txBody>
-          <a:bodyPr/>
-          <a:p/>
-        </p:txBody>
       </p:sp>
       <p:sp>
         <p:nvSpPr>
@@ -7729,10 +7674,6 @@
           </a:solidFill>
           <a:ln/>
         </p:spPr>
-        <p:txBody>
-          <a:bodyPr/>
-          <a:p/>
-        </p:txBody>
       </p:sp>
       <p:sp>
         <p:nvSpPr>
@@ -7798,10 +7739,6 @@
             <a:tailEnd type="triangle"/>
           </a:ln>
         </p:spPr>
-        <p:txBody>
-          <a:bodyPr/>
-          <a:p/>
-        </p:txBody>
       </p:sp>
       <p:sp>
         <p:nvSpPr>
@@ -7824,10 +7761,6 @@
           </a:solidFill>
           <a:ln/>
         </p:spPr>
-        <p:txBody>
-          <a:bodyPr/>
-          <a:p/>
-        </p:txBody>
       </p:sp>
       <p:sp>
         <p:nvSpPr>
@@ -7893,10 +7826,6 @@
             <a:tailEnd type="triangle"/>
           </a:ln>
         </p:spPr>
-        <p:txBody>
-          <a:bodyPr/>
-          <a:p/>
-        </p:txBody>
       </p:sp>
       <p:sp>
         <p:nvSpPr>
@@ -7919,10 +7848,6 @@
           </a:solidFill>
           <a:ln/>
         </p:spPr>
-        <p:txBody>
-          <a:bodyPr/>
-          <a:p/>
-        </p:txBody>
       </p:sp>
       <p:sp>
         <p:nvSpPr>
@@ -7988,10 +7913,6 @@
             <a:tailEnd type="triangle"/>
           </a:ln>
         </p:spPr>
-        <p:txBody>
-          <a:bodyPr/>
-          <a:p/>
-        </p:txBody>
       </p:sp>
       <p:sp>
         <p:nvSpPr>
@@ -8014,10 +7935,6 @@
           </a:solidFill>
           <a:ln/>
         </p:spPr>
-        <p:txBody>
-          <a:bodyPr/>
-          <a:p/>
-        </p:txBody>
       </p:sp>
       <p:sp>
         <p:nvSpPr>
@@ -8083,10 +8000,6 @@
             <a:tailEnd type="triangle"/>
           </a:ln>
         </p:spPr>
-        <p:txBody>
-          <a:bodyPr/>
-          <a:p/>
-        </p:txBody>
       </p:sp>
       <p:sp>
         <p:nvSpPr>
@@ -8109,10 +8022,6 @@
           </a:solidFill>
           <a:ln/>
         </p:spPr>
-        <p:txBody>
-          <a:bodyPr/>
-          <a:p/>
-        </p:txBody>
       </p:sp>
       <p:sp>
         <p:nvSpPr>
@@ -8178,10 +8087,6 @@
             <a:tailEnd type="triangle"/>
           </a:ln>
         </p:spPr>
-        <p:txBody>
-          <a:bodyPr/>
-          <a:p/>
-        </p:txBody>
       </p:sp>
       <p:sp>
         <p:nvSpPr>
@@ -8204,10 +8109,6 @@
           </a:solidFill>
           <a:ln/>
         </p:spPr>
-        <p:txBody>
-          <a:bodyPr/>
-          <a:p/>
-        </p:txBody>
       </p:sp>
       <p:sp>
         <p:nvSpPr>
@@ -8485,7 +8386,7 @@
                 <a:ea typeface="微软雅黑" pitchFamily="34" charset="-122"/>
                 <a:cs typeface="微软雅黑" pitchFamily="34" charset="-120"/>
               </a:rPr>
-              <a:t>七大业务域 · 71 个功能菜单</a:t>
+              <a:t>一个工作台 + 六大板块 · 99 个菜单 key</a:t>
             </a:r>
             <a:endParaRPr lang="en-US" sz="1400" dirty="0"/>
           </a:p>
@@ -8506,7 +8407,7 @@
                 <a:ea typeface="微软雅黑" pitchFamily="34" charset="-122"/>
                 <a:cs typeface="微软雅黑" pitchFamily="34" charset="-120"/>
               </a:rPr>
-              <a:t>业务：村/项目/资金/学校/政策</a:t>
+              <a:t>帮扶业务：村/项目/学校/经费/结对/政策</a:t>
             </a:r>
             <a:endParaRPr lang="en-US" sz="1400" dirty="0"/>
           </a:p>
@@ -8527,7 +8428,7 @@
                 <a:ea typeface="微软雅黑" pitchFamily="34" charset="-122"/>
                 <a:cs typeface="微软雅黑" pitchFamily="34" charset="-120"/>
               </a:rPr>
-              <a:t>协同：数据包 · 审批 · 消息</a:t>
+              <a:t>工作协同 + 分析汇报：审批 · 大屏 · 报表</a:t>
             </a:r>
             <a:endParaRPr lang="en-US" sz="1400" dirty="0"/>
           </a:p>
@@ -8548,7 +8449,7 @@
                 <a:ea typeface="微软雅黑" pitchFamily="34" charset="-122"/>
                 <a:cs typeface="微软雅黑" pitchFamily="34" charset="-120"/>
               </a:rPr>
-              <a:t>分析：看板 · 报表 · 大屏</a:t>
+              <a:t>系统管理：6 个聚合页 · 页内 Tab 切换</a:t>
             </a:r>
             <a:endParaRPr lang="en-US" sz="1400" dirty="0"/>
           </a:p>
@@ -8646,10 +8547,6 @@
           </a:solidFill>
           <a:ln/>
         </p:spPr>
-        <p:txBody>
-          <a:bodyPr/>
-          <a:p/>
-        </p:txBody>
       </p:sp>
       <p:sp>
         <p:nvSpPr>
@@ -8727,7 +8624,7 @@
                 <a:ea typeface="微软雅黑" pitchFamily="34" charset="-122"/>
                 <a:cs typeface="微软雅黑" pitchFamily="34" charset="-120"/>
               </a:rPr>
-              <a:t>功能地图：七大业务域</a:t>
+              <a:t>功能地图：一个工作台 + 六大板块</a:t>
             </a:r>
             <a:endParaRPr lang="en-US" sz="3000" dirty="0"/>
           </a:p>
@@ -8809,7 +8706,7 @@
                 <a:ea typeface="微软雅黑" pitchFamily="34" charset="-122"/>
                 <a:cs typeface="微软雅黑" pitchFamily="34" charset="-120"/>
               </a:rPr>
-              <a:t>帮扶管理信息系统 v1.12.25</a:t>
+              <a:t>帮扶管理信息系统 v1.13.0</a:t>
             </a:r>
             <a:endParaRPr lang="en-US" sz="1050" dirty="0"/>
           </a:p>
@@ -8823,12 +8720,12 @@
         </p:nvSpPr>
         <p:spPr>
           <a:xfrm>
-            <a:off x="457200" y="1691640"/>
-            <a:ext cx="3639312" cy="1920240"/>
+            <a:off x="457200" y="1645920"/>
+            <a:ext cx="2743200" cy="1901952"/>
           </a:xfrm>
           <a:prstGeom prst="roundRect">
             <a:avLst>
-              <a:gd name="adj" fmla="val 3333"/>
+              <a:gd name="adj" fmla="val 3365"/>
             </a:avLst>
           </a:prstGeom>
           <a:solidFill>
@@ -8843,10 +8740,6 @@
             </a:outerShdw>
           </a:effectLst>
         </p:spPr>
-        <p:txBody>
-          <a:bodyPr/>
-          <a:p/>
-        </p:txBody>
       </p:sp>
       <p:sp>
         <p:nvSpPr>
@@ -8856,8 +8749,8 @@
         </p:nvSpPr>
         <p:spPr>
           <a:xfrm>
-            <a:off x="713232" y="1856232"/>
-            <a:ext cx="3108960" cy="384048"/>
+            <a:off x="658368" y="1764792"/>
+            <a:ext cx="2377440" cy="347472"/>
           </a:xfrm>
           <a:prstGeom prst="rect">
             <a:avLst/>
@@ -8875,7 +8768,7 @@
               <a:buNone/>
             </a:pPr>
             <a:r>
-              <a:rPr lang="en-US" sz="1700" b="1" dirty="0">
+              <a:rPr lang="en-US" sz="1550" b="1" dirty="0">
                 <a:solidFill>
                   <a:srgbClr val="1F4A38"/>
                 </a:solidFill>
@@ -8883,9 +8776,9 @@
                 <a:ea typeface="微软雅黑" pitchFamily="34" charset="-122"/>
                 <a:cs typeface="微软雅黑" pitchFamily="34" charset="-120"/>
               </a:rPr>
-              <a:t>帮扶业务</a:t>
-            </a:r>
-            <a:endParaRPr lang="en-US" sz="1700" dirty="0"/>
+              <a:t>工作台</a:t>
+            </a:r>
+            <a:endParaRPr lang="en-US" sz="1550" dirty="0"/>
           </a:p>
         </p:txBody>
       </p:sp>
@@ -8897,8 +8790,8 @@
         </p:nvSpPr>
         <p:spPr>
           <a:xfrm>
-            <a:off x="713232" y="2313432"/>
-            <a:ext cx="3200400" cy="777240"/>
+            <a:off x="658368" y="2148840"/>
+            <a:ext cx="2395728" cy="932688"/>
           </a:xfrm>
           <a:prstGeom prst="rect">
             <a:avLst/>
@@ -8916,7 +8809,7 @@
               <a:buNone/>
             </a:pPr>
             <a:r>
-              <a:rPr lang="en-US" sz="1200" dirty="0">
+              <a:rPr lang="en-US" sz="1050" dirty="0">
                 <a:solidFill>
                   <a:srgbClr val="5F6F66"/>
                 </a:solidFill>
@@ -8924,9 +8817,9 @@
                 <a:ea typeface="微软雅黑" pitchFamily="34" charset="-122"/>
                 <a:cs typeface="微软雅黑" pitchFamily="34" charset="-120"/>
               </a:rPr>
-              <a:t>帮扶村 10 大板块 · 项目全生命周期 · 资金 8 阶段 · 学校助学</a:t>
-            </a:r>
-            <a:endParaRPr lang="en-US" sz="1200" dirty="0"/>
+              <a:t>固定首位：KPI 卡 · 待办聚合 · 快捷操作 · 年度趋势</a:t>
+            </a:r>
+            <a:endParaRPr lang="en-US" sz="1050" dirty="0"/>
           </a:p>
         </p:txBody>
       </p:sp>
@@ -8938,8 +8831,8 @@
         </p:nvSpPr>
         <p:spPr>
           <a:xfrm>
-            <a:off x="713232" y="3154680"/>
-            <a:ext cx="3200400" cy="320040"/>
+            <a:off x="658368" y="3145536"/>
+            <a:ext cx="2395728" cy="274320"/>
           </a:xfrm>
           <a:prstGeom prst="rect">
             <a:avLst/>
@@ -8957,7 +8850,7 @@
               <a:buNone/>
             </a:pPr>
             <a:r>
-              <a:rPr lang="en-US" sz="1050" i="1" dirty="0">
+              <a:rPr lang="en-US" sz="900" i="1" dirty="0">
                 <a:solidFill>
                   <a:srgbClr val="2D6A4F"/>
                 </a:solidFill>
@@ -8965,9 +8858,9 @@
                 <a:ea typeface="微软雅黑" pitchFamily="34" charset="-122"/>
                 <a:cs typeface="微软雅黑" pitchFamily="34" charset="-120"/>
               </a:rPr>
-              <a:t>villages / projects / funds / schools</a:t>
-            </a:r>
-            <a:endParaRPr lang="en-US" sz="1050" dirty="0"/>
+              <a:t>dashboard</a:t>
+            </a:r>
+            <a:endParaRPr lang="en-US" sz="900" dirty="0"/>
           </a:p>
         </p:txBody>
       </p:sp>
@@ -8979,12 +8872,12 @@
         </p:nvSpPr>
         <p:spPr>
           <a:xfrm>
-            <a:off x="4370832" y="1691640"/>
-            <a:ext cx="3639312" cy="1920240"/>
+            <a:off x="3346704" y="1645920"/>
+            <a:ext cx="2743200" cy="1901952"/>
           </a:xfrm>
           <a:prstGeom prst="roundRect">
             <a:avLst>
-              <a:gd name="adj" fmla="val 3333"/>
+              <a:gd name="adj" fmla="val 3365"/>
             </a:avLst>
           </a:prstGeom>
           <a:solidFill>
@@ -8999,10 +8892,6 @@
             </a:outerShdw>
           </a:effectLst>
         </p:spPr>
-        <p:txBody>
-          <a:bodyPr/>
-          <a:p/>
-        </p:txBody>
       </p:sp>
       <p:sp>
         <p:nvSpPr>
@@ -9012,8 +8901,8 @@
         </p:nvSpPr>
         <p:spPr>
           <a:xfrm>
-            <a:off x="4626864" y="1856232"/>
-            <a:ext cx="3108960" cy="384048"/>
+            <a:off x="3547872" y="1764792"/>
+            <a:ext cx="2377440" cy="347472"/>
           </a:xfrm>
           <a:prstGeom prst="rect">
             <a:avLst/>
@@ -9031,7 +8920,7 @@
               <a:buNone/>
             </a:pPr>
             <a:r>
-              <a:rPr lang="en-US" sz="1700" b="1" dirty="0">
+              <a:rPr lang="en-US" sz="1550" b="1" dirty="0">
                 <a:solidFill>
                   <a:srgbClr val="1F4A38"/>
                 </a:solidFill>
@@ -9039,9 +8928,9 @@
                 <a:ea typeface="微软雅黑" pitchFamily="34" charset="-122"/>
                 <a:cs typeface="微软雅黑" pitchFamily="34" charset="-120"/>
               </a:rPr>
-              <a:t>政策与审批</a:t>
-            </a:r>
-            <a:endParaRPr lang="en-US" sz="1700" dirty="0"/>
+              <a:t>帮扶业务</a:t>
+            </a:r>
+            <a:endParaRPr lang="en-US" sz="1550" dirty="0"/>
           </a:p>
         </p:txBody>
       </p:sp>
@@ -9053,8 +8942,8 @@
         </p:nvSpPr>
         <p:spPr>
           <a:xfrm>
-            <a:off x="4626864" y="2313432"/>
-            <a:ext cx="3200400" cy="777240"/>
+            <a:off x="3547872" y="2148840"/>
+            <a:ext cx="2395728" cy="932688"/>
           </a:xfrm>
           <a:prstGeom prst="rect">
             <a:avLst/>
@@ -9072,7 +8961,7 @@
               <a:buNone/>
             </a:pPr>
             <a:r>
-              <a:rPr lang="en-US" sz="1200" dirty="0">
+              <a:rPr lang="en-US" sz="1050" dirty="0">
                 <a:solidFill>
                   <a:srgbClr val="5F6F66"/>
                 </a:solidFill>
@@ -9080,9 +8969,9 @@
                 <a:ea typeface="微软雅黑" pitchFamily="34" charset="-122"/>
                 <a:cs typeface="微软雅黑" pitchFamily="34" charset="-120"/>
               </a:rPr>
-              <a:t>政策库 FTS5 全文检索 · 审批工作流 · 我的申请 · 审批历史</a:t>
-            </a:r>
-            <a:endParaRPr lang="en-US" sz="1200" dirty="0"/>
+              <a:t>帮扶村 10 板块 · 项目全周期 · 经费台账/申请/资金周期 · 结对/捐赠/政策/移交</a:t>
+            </a:r>
+            <a:endParaRPr lang="en-US" sz="1050" dirty="0"/>
           </a:p>
         </p:txBody>
       </p:sp>
@@ -9094,8 +8983,8 @@
         </p:nvSpPr>
         <p:spPr>
           <a:xfrm>
-            <a:off x="4626864" y="3154680"/>
-            <a:ext cx="3200400" cy="320040"/>
+            <a:off x="3547872" y="3145536"/>
+            <a:ext cx="2395728" cy="274320"/>
           </a:xfrm>
           <a:prstGeom prst="rect">
             <a:avLst/>
@@ -9113,7 +9002,7 @@
               <a:buNone/>
             </a:pPr>
             <a:r>
-              <a:rPr lang="en-US" sz="1050" i="1" dirty="0">
+              <a:rPr lang="en-US" sz="900" i="1" dirty="0">
                 <a:solidFill>
                   <a:srgbClr val="2D6A4F"/>
                 </a:solidFill>
@@ -9121,9 +9010,9 @@
                 <a:ea typeface="微软雅黑" pitchFamily="34" charset="-122"/>
                 <a:cs typeface="微软雅黑" pitchFamily="34" charset="-120"/>
               </a:rPr>
-              <a:t>policies / approval</a:t>
-            </a:r>
-            <a:endParaRPr lang="en-US" sz="1050" dirty="0"/>
+              <a:t>villages / projects / funds</a:t>
+            </a:r>
+            <a:endParaRPr lang="en-US" sz="900" dirty="0"/>
           </a:p>
         </p:txBody>
       </p:sp>
@@ -9135,12 +9024,12 @@
         </p:nvSpPr>
         <p:spPr>
           <a:xfrm>
-            <a:off x="8284464" y="1691640"/>
-            <a:ext cx="3639312" cy="1920240"/>
+            <a:off x="6236208" y="1645920"/>
+            <a:ext cx="2743200" cy="1901952"/>
           </a:xfrm>
           <a:prstGeom prst="roundRect">
             <a:avLst>
-              <a:gd name="adj" fmla="val 3333"/>
+              <a:gd name="adj" fmla="val 3365"/>
             </a:avLst>
           </a:prstGeom>
           <a:solidFill>
@@ -9155,10 +9044,6 @@
             </a:outerShdw>
           </a:effectLst>
         </p:spPr>
-        <p:txBody>
-          <a:bodyPr/>
-          <a:p/>
-        </p:txBody>
       </p:sp>
       <p:sp>
         <p:nvSpPr>
@@ -9168,8 +9053,8 @@
         </p:nvSpPr>
         <p:spPr>
           <a:xfrm>
-            <a:off x="8540496" y="1856232"/>
-            <a:ext cx="3108960" cy="384048"/>
+            <a:off x="6437376" y="1764792"/>
+            <a:ext cx="2377440" cy="347472"/>
           </a:xfrm>
           <a:prstGeom prst="rect">
             <a:avLst/>
@@ -9187,7 +9072,7 @@
               <a:buNone/>
             </a:pPr>
             <a:r>
-              <a:rPr lang="en-US" sz="1700" b="1" dirty="0">
+              <a:rPr lang="en-US" sz="1550" b="1" dirty="0">
                 <a:solidFill>
                   <a:srgbClr val="1F4A38"/>
                 </a:solidFill>
@@ -9195,9 +9080,9 @@
                 <a:ea typeface="微软雅黑" pitchFamily="34" charset="-122"/>
                 <a:cs typeface="微软雅黑" pitchFamily="34" charset="-120"/>
               </a:rPr>
-              <a:t>数据协同</a:t>
-            </a:r>
-            <a:endParaRPr lang="en-US" sz="1700" dirty="0"/>
+              <a:t>乡村振兴</a:t>
+            </a:r>
+            <a:endParaRPr lang="en-US" sz="1550" dirty="0"/>
           </a:p>
         </p:txBody>
       </p:sp>
@@ -9209,8 +9094,8 @@
         </p:nvSpPr>
         <p:spPr>
           <a:xfrm>
-            <a:off x="8540496" y="2313432"/>
-            <a:ext cx="3200400" cy="777240"/>
+            <a:off x="6437376" y="2148840"/>
+            <a:ext cx="2395728" cy="932688"/>
           </a:xfrm>
           <a:prstGeom prst="rect">
             <a:avLst/>
@@ -9228,7 +9113,7 @@
               <a:buNone/>
             </a:pPr>
             <a:r>
-              <a:rPr lang="en-US" sz="1200" dirty="0">
+              <a:rPr lang="en-US" sz="1050" dirty="0">
                 <a:solidFill>
                   <a:srgbClr val="5F6F66"/>
                 </a:solidFill>
@@ -9236,9 +9121,9 @@
                 <a:ea typeface="微软雅黑" pitchFamily="34" charset="-122"/>
                 <a:cs typeface="微软雅黑" pitchFamily="34" charset="-120"/>
               </a:rPr>
-              <a:t>数据包全量/增量导出导入 · 版本管理 · 冲突解决 · 接收包</a:t>
-            </a:r>
-            <a:endParaRPr lang="en-US" sz="1200" dirty="0"/>
+              <a:t>工作首页 · 工作列表 · 驻村工作台（打卡与台账）</a:t>
+            </a:r>
+            <a:endParaRPr lang="en-US" sz="1050" dirty="0"/>
           </a:p>
         </p:txBody>
       </p:sp>
@@ -9250,8 +9135,8 @@
         </p:nvSpPr>
         <p:spPr>
           <a:xfrm>
-            <a:off x="8540496" y="3154680"/>
-            <a:ext cx="3200400" cy="320040"/>
+            <a:off x="6437376" y="3145536"/>
+            <a:ext cx="2395728" cy="274320"/>
           </a:xfrm>
           <a:prstGeom prst="rect">
             <a:avLst/>
@@ -9269,7 +9154,7 @@
               <a:buNone/>
             </a:pPr>
             <a:r>
-              <a:rPr lang="en-US" sz="1050" i="1" dirty="0">
+              <a:rPr lang="en-US" sz="900" i="1" dirty="0">
                 <a:solidFill>
                   <a:srgbClr val="2D6A4F"/>
                 </a:solidFill>
@@ -9277,9 +9162,9 @@
                 <a:ea typeface="微软雅黑" pitchFamily="34" charset="-122"/>
                 <a:cs typeface="微软雅黑" pitchFamily="34" charset="-120"/>
               </a:rPr>
-              <a:t>dataPackage / dataSync</a:t>
-            </a:r>
-            <a:endParaRPr lang="en-US" sz="1050" dirty="0"/>
+              <a:t>rural-works / checkin</a:t>
+            </a:r>
+            <a:endParaRPr lang="en-US" sz="900" dirty="0"/>
           </a:p>
         </p:txBody>
       </p:sp>
@@ -9291,12 +9176,12 @@
         </p:nvSpPr>
         <p:spPr>
           <a:xfrm>
-            <a:off x="457200" y="3931920"/>
-            <a:ext cx="3639312" cy="1920240"/>
+            <a:off x="9125712" y="1645920"/>
+            <a:ext cx="2743200" cy="1901952"/>
           </a:xfrm>
           <a:prstGeom prst="roundRect">
             <a:avLst>
-              <a:gd name="adj" fmla="val 3333"/>
+              <a:gd name="adj" fmla="val 3365"/>
             </a:avLst>
           </a:prstGeom>
           <a:solidFill>
@@ -9311,10 +9196,6 @@
             </a:outerShdw>
           </a:effectLst>
         </p:spPr>
-        <p:txBody>
-          <a:bodyPr/>
-          <a:p/>
-        </p:txBody>
       </p:sp>
       <p:sp>
         <p:nvSpPr>
@@ -9324,8 +9205,8 @@
         </p:nvSpPr>
         <p:spPr>
           <a:xfrm>
-            <a:off x="713232" y="4096512"/>
-            <a:ext cx="3108960" cy="384048"/>
+            <a:off x="9326880" y="1764792"/>
+            <a:ext cx="2377440" cy="347472"/>
           </a:xfrm>
           <a:prstGeom prst="rect">
             <a:avLst/>
@@ -9343,7 +9224,7 @@
               <a:buNone/>
             </a:pPr>
             <a:r>
-              <a:rPr lang="en-US" sz="1700" b="1" dirty="0">
+              <a:rPr lang="en-US" sz="1550" b="1" dirty="0">
                 <a:solidFill>
                   <a:srgbClr val="1F4A38"/>
                 </a:solidFill>
@@ -9351,9 +9232,9 @@
                 <a:ea typeface="微软雅黑" pitchFamily="34" charset="-122"/>
                 <a:cs typeface="微软雅黑" pitchFamily="34" charset="-120"/>
               </a:rPr>
-              <a:t>数据分析</a:t>
-            </a:r>
-            <a:endParaRPr lang="en-US" sz="1700" dirty="0"/>
+              <a:t>工作协同</a:t>
+            </a:r>
+            <a:endParaRPr lang="en-US" sz="1550" dirty="0"/>
           </a:p>
         </p:txBody>
       </p:sp>
@@ -9365,8 +9246,8 @@
         </p:nvSpPr>
         <p:spPr>
           <a:xfrm>
-            <a:off x="713232" y="4553712"/>
-            <a:ext cx="3200400" cy="777240"/>
+            <a:off x="9326880" y="2148840"/>
+            <a:ext cx="2395728" cy="932688"/>
           </a:xfrm>
           <a:prstGeom prst="rect">
             <a:avLst/>
@@ -9384,7 +9265,7 @@
               <a:buNone/>
             </a:pPr>
             <a:r>
-              <a:rPr lang="en-US" sz="1200" dirty="0">
+              <a:rPr lang="en-US" sz="1050" dirty="0">
                 <a:solidFill>
                   <a:srgbClr val="5F6F66"/>
                 </a:solidFill>
@@ -9392,9 +9273,9 @@
                 <a:ea typeface="微软雅黑" pitchFamily="34" charset="-122"/>
                 <a:cs typeface="微软雅黑" pitchFamily="34" charset="-120"/>
               </a:rPr>
-              <a:t>分析仪表盘 · 年度对比 · 成效评估 · 报表导出 · 帮扶大屏</a:t>
-            </a:r>
-            <a:endParaRPr lang="en-US" sz="1200" dirty="0"/>
+              <a:t>待办 · 审批管理（总览/待审批/我的申请/历史）· 日历 · 提醒 · 消息</a:t>
+            </a:r>
+            <a:endParaRPr lang="en-US" sz="1050" dirty="0"/>
           </a:p>
         </p:txBody>
       </p:sp>
@@ -9406,8 +9287,8 @@
         </p:nvSpPr>
         <p:spPr>
           <a:xfrm>
-            <a:off x="713232" y="5394960"/>
-            <a:ext cx="3200400" cy="320040"/>
+            <a:off x="9326880" y="3145536"/>
+            <a:ext cx="2395728" cy="274320"/>
           </a:xfrm>
           <a:prstGeom prst="rect">
             <a:avLst/>
@@ -9425,7 +9306,7 @@
               <a:buNone/>
             </a:pPr>
             <a:r>
-              <a:rPr lang="en-US" sz="1050" i="1" dirty="0">
+              <a:rPr lang="en-US" sz="900" i="1" dirty="0">
                 <a:solidFill>
                   <a:srgbClr val="2D6A4F"/>
                 </a:solidFill>
@@ -9433,9 +9314,9 @@
                 <a:ea typeface="微软雅黑" pitchFamily="34" charset="-122"/>
                 <a:cs typeface="微软雅黑" pitchFamily="34" charset="-120"/>
               </a:rPr>
-              <a:t>analytics / bigscreen</a:t>
-            </a:r>
-            <a:endParaRPr lang="en-US" sz="1050" dirty="0"/>
+              <a:t>todos / approval / reminder</a:t>
+            </a:r>
+            <a:endParaRPr lang="en-US" sz="900" dirty="0"/>
           </a:p>
         </p:txBody>
       </p:sp>
@@ -9447,12 +9328,12 @@
         </p:nvSpPr>
         <p:spPr>
           <a:xfrm>
-            <a:off x="4370832" y="3931920"/>
-            <a:ext cx="3639312" cy="1920240"/>
+            <a:off x="457200" y="3794760"/>
+            <a:ext cx="2743200" cy="1901952"/>
           </a:xfrm>
           <a:prstGeom prst="roundRect">
             <a:avLst>
-              <a:gd name="adj" fmla="val 3333"/>
+              <a:gd name="adj" fmla="val 3365"/>
             </a:avLst>
           </a:prstGeom>
           <a:solidFill>
@@ -9467,10 +9348,6 @@
             </a:outerShdw>
           </a:effectLst>
         </p:spPr>
-        <p:txBody>
-          <a:bodyPr/>
-          <a:p/>
-        </p:txBody>
       </p:sp>
       <p:sp>
         <p:nvSpPr>
@@ -9480,8 +9357,8 @@
         </p:nvSpPr>
         <p:spPr>
           <a:xfrm>
-            <a:off x="4626864" y="4096512"/>
-            <a:ext cx="3108960" cy="384048"/>
+            <a:off x="658368" y="3913632"/>
+            <a:ext cx="2377440" cy="347472"/>
           </a:xfrm>
           <a:prstGeom prst="rect">
             <a:avLst/>
@@ -9499,7 +9376,7 @@
               <a:buNone/>
             </a:pPr>
             <a:r>
-              <a:rPr lang="en-US" sz="1700" b="1" dirty="0">
+              <a:rPr lang="en-US" sz="1550" b="1" dirty="0">
                 <a:solidFill>
                   <a:srgbClr val="1F4A38"/>
                 </a:solidFill>
@@ -9507,9 +9384,9 @@
                 <a:ea typeface="微软雅黑" pitchFamily="34" charset="-122"/>
                 <a:cs typeface="微软雅黑" pitchFamily="34" charset="-120"/>
               </a:rPr>
-              <a:t>驻村工作</a:t>
-            </a:r>
-            <a:endParaRPr lang="en-US" sz="1700" dirty="0"/>
+              <a:t>分析汇报</a:t>
+            </a:r>
+            <a:endParaRPr lang="en-US" sz="1550" dirty="0"/>
           </a:p>
         </p:txBody>
       </p:sp>
@@ -9521,8 +9398,8 @@
         </p:nvSpPr>
         <p:spPr>
           <a:xfrm>
-            <a:off x="4626864" y="4553712"/>
-            <a:ext cx="3200400" cy="777240"/>
+            <a:off x="658368" y="4297680"/>
+            <a:ext cx="2395728" cy="932688"/>
           </a:xfrm>
           <a:prstGeom prst="rect">
             <a:avLst/>
@@ -9540,7 +9417,7 @@
               <a:buNone/>
             </a:pPr>
             <a:r>
-              <a:rPr lang="en-US" sz="1200" dirty="0">
+              <a:rPr lang="en-US" sz="1050" dirty="0">
                 <a:solidFill>
                   <a:srgbClr val="5F6F66"/>
                 </a:solidFill>
@@ -9548,9 +9425,9 @@
                 <a:ea typeface="微软雅黑" pitchFamily="34" charset="-122"/>
                 <a:cs typeface="微软雅黑" pitchFamily="34" charset="-120"/>
               </a:rPr>
-              <a:t>工作台账 · 驻村任务 · 工作日历 · 考核评估</a:t>
-            </a:r>
-            <a:endParaRPr lang="en-US" sz="1200" dirty="0"/>
+              <a:t>汇报大屏 · 数据分析（仪表盘/地图/工作分析/成效排名评估/舆情）· 报表模板/导出</a:t>
+            </a:r>
+            <a:endParaRPr lang="en-US" sz="1050" dirty="0"/>
           </a:p>
         </p:txBody>
       </p:sp>
@@ -9562,8 +9439,8 @@
         </p:nvSpPr>
         <p:spPr>
           <a:xfrm>
-            <a:off x="4626864" y="5394960"/>
-            <a:ext cx="3200400" cy="320040"/>
+            <a:off x="658368" y="5294376"/>
+            <a:ext cx="2395728" cy="274320"/>
           </a:xfrm>
           <a:prstGeom prst="rect">
             <a:avLst/>
@@ -9581,7 +9458,7 @@
               <a:buNone/>
             </a:pPr>
             <a:r>
-              <a:rPr lang="en-US" sz="1050" i="1" dirty="0">
+              <a:rPr lang="en-US" sz="900" i="1" dirty="0">
                 <a:solidFill>
                   <a:srgbClr val="2D6A4F"/>
                 </a:solidFill>
@@ -9589,9 +9466,9 @@
                 <a:ea typeface="微软雅黑" pitchFamily="34" charset="-122"/>
                 <a:cs typeface="微软雅黑" pitchFamily="34" charset="-120"/>
               </a:rPr>
-              <a:t>ruralWorks / work-calendar</a:t>
-            </a:r>
-            <a:endParaRPr lang="en-US" sz="1050" dirty="0"/>
+              <a:t>bigscreen / analytics / report</a:t>
+            </a:r>
+            <a:endParaRPr lang="en-US" sz="900" dirty="0"/>
           </a:p>
         </p:txBody>
       </p:sp>
@@ -9603,12 +9480,12 @@
         </p:nvSpPr>
         <p:spPr>
           <a:xfrm>
-            <a:off x="8284464" y="3931920"/>
-            <a:ext cx="3639312" cy="1920240"/>
+            <a:off x="3346704" y="3794760"/>
+            <a:ext cx="2743200" cy="1901952"/>
           </a:xfrm>
           <a:prstGeom prst="roundRect">
             <a:avLst>
-              <a:gd name="adj" fmla="val 3333"/>
+              <a:gd name="adj" fmla="val 3365"/>
             </a:avLst>
           </a:prstGeom>
           <a:solidFill>
@@ -9623,10 +9500,6 @@
             </a:outerShdw>
           </a:effectLst>
         </p:spPr>
-        <p:txBody>
-          <a:bodyPr/>
-          <a:p/>
-        </p:txBody>
       </p:sp>
       <p:sp>
         <p:nvSpPr>
@@ -9636,8 +9509,8 @@
         </p:nvSpPr>
         <p:spPr>
           <a:xfrm>
-            <a:off x="8540496" y="4096512"/>
-            <a:ext cx="3108960" cy="384048"/>
+            <a:off x="3547872" y="3913632"/>
+            <a:ext cx="2377440" cy="347472"/>
           </a:xfrm>
           <a:prstGeom prst="rect">
             <a:avLst/>
@@ -9655,7 +9528,7 @@
               <a:buNone/>
             </a:pPr>
             <a:r>
-              <a:rPr lang="en-US" sz="1700" b="1" dirty="0">
+              <a:rPr lang="en-US" sz="1550" b="1" dirty="0">
                 <a:solidFill>
                   <a:srgbClr val="1F4A38"/>
                 </a:solidFill>
@@ -9663,22 +9536,174 @@
                 <a:ea typeface="微软雅黑" pitchFamily="34" charset="-122"/>
                 <a:cs typeface="微软雅黑" pitchFamily="34" charset="-120"/>
               </a:rPr>
+              <a:t>数据管理</a:t>
+            </a:r>
+            <a:endParaRPr lang="en-US" sz="1550" dirty="0"/>
+          </a:p>
+        </p:txBody>
+      </p:sp>
+      <p:sp>
+        <p:nvSpPr>
+          <p:cNvPr id="29" name="Text 27"/>
+          <p:cNvSpPr/>
+          <p:nvPr/>
+        </p:nvSpPr>
+        <p:spPr>
+          <a:xfrm>
+            <a:off x="3547872" y="4297680"/>
+            <a:ext cx="2395728" cy="932688"/>
+          </a:xfrm>
+          <a:prstGeom prst="rect">
+            <a:avLst/>
+          </a:prstGeom>
+          <a:noFill/>
+          <a:ln/>
+        </p:spPr>
+        <p:txBody>
+          <a:bodyPr wrap="square" lIns="0" tIns="0" rIns="0" bIns="0" rtlCol="0" anchor="ctr">
+            <a:normAutofit/>
+          </a:bodyPr>
+          <a:lstStyle/>
+          <a:p>
+            <a:pPr indent="0" marL="0">
+              <a:buNone/>
+            </a:pPr>
+            <a:r>
+              <a:rPr lang="en-US" sz="1050" dirty="0">
+                <a:solidFill>
+                  <a:srgbClr val="5F6F66"/>
+                </a:solidFill>
+                <a:latin typeface="微软雅黑" pitchFamily="34" charset="0"/>
+                <a:ea typeface="微软雅黑" pitchFamily="34" charset="-122"/>
+                <a:cs typeface="微软雅黑" pitchFamily="34" charset="-120"/>
+              </a:rPr>
+              <a:t>概览 · 导入导出 · 数据包与批量导入 · 校验/规则 · 综合录入 · 批量操作 · 数据上报</a:t>
+            </a:r>
+            <a:endParaRPr lang="en-US" sz="1050" dirty="0"/>
+          </a:p>
+        </p:txBody>
+      </p:sp>
+      <p:sp>
+        <p:nvSpPr>
+          <p:cNvPr id="30" name="Text 28"/>
+          <p:cNvSpPr/>
+          <p:nvPr/>
+        </p:nvSpPr>
+        <p:spPr>
+          <a:xfrm>
+            <a:off x="3547872" y="5294376"/>
+            <a:ext cx="2395728" cy="274320"/>
+          </a:xfrm>
+          <a:prstGeom prst="rect">
+            <a:avLst/>
+          </a:prstGeom>
+          <a:noFill/>
+          <a:ln/>
+        </p:spPr>
+        <p:txBody>
+          <a:bodyPr wrap="square" lIns="0" tIns="0" rIns="0" bIns="0" rtlCol="0" anchor="ctr">
+            <a:normAutofit/>
+          </a:bodyPr>
+          <a:lstStyle/>
+          <a:p>
+            <a:pPr indent="0" marL="0">
+              <a:buNone/>
+            </a:pPr>
+            <a:r>
+              <a:rPr lang="en-US" sz="900" i="1" dirty="0">
+                <a:solidFill>
+                  <a:srgbClr val="2D6A4F"/>
+                </a:solidFill>
+                <a:latin typeface="微软雅黑" pitchFamily="34" charset="0"/>
+                <a:ea typeface="微软雅黑" pitchFamily="34" charset="-122"/>
+                <a:cs typeface="微软雅黑" pitchFamily="34" charset="-120"/>
+              </a:rPr>
+              <a:t>data-package / data-upload</a:t>
+            </a:r>
+            <a:endParaRPr lang="en-US" sz="900" dirty="0"/>
+          </a:p>
+        </p:txBody>
+      </p:sp>
+      <p:sp>
+        <p:nvSpPr>
+          <p:cNvPr id="31" name="Shape 29"/>
+          <p:cNvSpPr/>
+          <p:nvPr/>
+        </p:nvSpPr>
+        <p:spPr>
+          <a:xfrm>
+            <a:off x="6236208" y="3794760"/>
+            <a:ext cx="2743200" cy="1901952"/>
+          </a:xfrm>
+          <a:prstGeom prst="roundRect">
+            <a:avLst>
+              <a:gd name="adj" fmla="val 3365"/>
+            </a:avLst>
+          </a:prstGeom>
+          <a:solidFill>
+            <a:srgbClr val="FFFFFF"/>
+          </a:solidFill>
+          <a:ln/>
+          <a:effectLst>
+            <a:outerShdw sx="100000" sy="100000" kx="0" ky="0" algn="bl" rotWithShape="0" blurRad="88900" dist="25400" dir="5400000">
+              <a:srgbClr val="1A2E24">
+                <a:alpha val="13000"/>
+              </a:srgbClr>
+            </a:outerShdw>
+          </a:effectLst>
+        </p:spPr>
+      </p:sp>
+      <p:sp>
+        <p:nvSpPr>
+          <p:cNvPr id="32" name="Text 30"/>
+          <p:cNvSpPr/>
+          <p:nvPr/>
+        </p:nvSpPr>
+        <p:spPr>
+          <a:xfrm>
+            <a:off x="6437376" y="3913632"/>
+            <a:ext cx="2377440" cy="347472"/>
+          </a:xfrm>
+          <a:prstGeom prst="rect">
+            <a:avLst/>
+          </a:prstGeom>
+          <a:noFill/>
+          <a:ln/>
+        </p:spPr>
+        <p:txBody>
+          <a:bodyPr wrap="square" lIns="0" tIns="0" rIns="0" bIns="0" rtlCol="0" anchor="ctr">
+            <a:normAutofit/>
+          </a:bodyPr>
+          <a:lstStyle/>
+          <a:p>
+            <a:pPr indent="0" marL="0">
+              <a:buNone/>
+            </a:pPr>
+            <a:r>
+              <a:rPr lang="en-US" sz="1550" b="1" dirty="0">
+                <a:solidFill>
+                  <a:srgbClr val="1F4A38"/>
+                </a:solidFill>
+                <a:latin typeface="微软雅黑" pitchFamily="34" charset="0"/>
+                <a:ea typeface="微软雅黑" pitchFamily="34" charset="-122"/>
+                <a:cs typeface="微软雅黑" pitchFamily="34" charset="-120"/>
+              </a:rPr>
               <a:t>系统管理</a:t>
             </a:r>
-            <a:endParaRPr lang="en-US" sz="1700" dirty="0"/>
-          </a:p>
-        </p:txBody>
-      </p:sp>
-      <p:sp>
-        <p:nvSpPr>
-          <p:cNvPr id="29" name="Text 27"/>
-          <p:cNvSpPr/>
-          <p:nvPr/>
-        </p:nvSpPr>
-        <p:spPr>
-          <a:xfrm>
-            <a:off x="8540496" y="4553712"/>
-            <a:ext cx="3200400" cy="777240"/>
+            <a:endParaRPr lang="en-US" sz="1550" dirty="0"/>
+          </a:p>
+        </p:txBody>
+      </p:sp>
+      <p:sp>
+        <p:nvSpPr>
+          <p:cNvPr id="33" name="Text 31"/>
+          <p:cNvSpPr/>
+          <p:nvPr/>
+        </p:nvSpPr>
+        <p:spPr>
+          <a:xfrm>
+            <a:off x="6437376" y="4297680"/>
+            <a:ext cx="2395728" cy="932688"/>
           </a:xfrm>
           <a:prstGeom prst="rect">
             <a:avLst/>
@@ -9696,6 +9721,88 @@
               <a:buNone/>
             </a:pPr>
             <a:r>
+              <a:rPr lang="en-US" sz="1050" dirty="0">
+                <a:solidFill>
+                  <a:srgbClr val="5F6F66"/>
+                </a:solidFill>
+                <a:latin typeface="微软雅黑" pitchFamily="34" charset="0"/>
+                <a:ea typeface="微软雅黑" pitchFamily="34" charset="-122"/>
+                <a:cs typeface="微软雅黑" pitchFamily="34" charset="-120"/>
+              </a:rPr>
+              <a:t>6 聚合页：组织与权限/安全与审计/运维与监控/备份与存储/系统设置/关于与反馈</a:t>
+            </a:r>
+            <a:endParaRPr lang="en-US" sz="1050" dirty="0"/>
+          </a:p>
+        </p:txBody>
+      </p:sp>
+      <p:sp>
+        <p:nvSpPr>
+          <p:cNvPr id="34" name="Text 32"/>
+          <p:cNvSpPr/>
+          <p:nvPr/>
+        </p:nvSpPr>
+        <p:spPr>
+          <a:xfrm>
+            <a:off x="6437376" y="5294376"/>
+            <a:ext cx="2395728" cy="274320"/>
+          </a:xfrm>
+          <a:prstGeom prst="rect">
+            <a:avLst/>
+          </a:prstGeom>
+          <a:noFill/>
+          <a:ln/>
+        </p:spPr>
+        <p:txBody>
+          <a:bodyPr wrap="square" lIns="0" tIns="0" rIns="0" bIns="0" rtlCol="0" anchor="ctr">
+            <a:normAutofit/>
+          </a:bodyPr>
+          <a:lstStyle/>
+          <a:p>
+            <a:pPr indent="0" marL="0">
+              <a:buNone/>
+            </a:pPr>
+            <a:r>
+              <a:rPr lang="en-US" sz="900" i="1" dirty="0">
+                <a:solidFill>
+                  <a:srgbClr val="2D6A4F"/>
+                </a:solidFill>
+                <a:latin typeface="微软雅黑" pitchFamily="34" charset="0"/>
+                <a:ea typeface="微软雅黑" pitchFamily="34" charset="-122"/>
+                <a:cs typeface="微软雅黑" pitchFamily="34" charset="-120"/>
+              </a:rPr>
+              <a:t>system-console-*</a:t>
+            </a:r>
+            <a:endParaRPr lang="en-US" sz="900" dirty="0"/>
+          </a:p>
+        </p:txBody>
+      </p:sp>
+      <p:sp>
+        <p:nvSpPr>
+          <p:cNvPr id="35" name="Text 33"/>
+          <p:cNvSpPr/>
+          <p:nvPr/>
+        </p:nvSpPr>
+        <p:spPr>
+          <a:xfrm>
+            <a:off x="457200" y="6144768"/>
+            <a:ext cx="11247120" cy="365760"/>
+          </a:xfrm>
+          <a:prstGeom prst="rect">
+            <a:avLst/>
+          </a:prstGeom>
+          <a:noFill/>
+          <a:ln/>
+        </p:spPr>
+        <p:txBody>
+          <a:bodyPr wrap="square" lIns="0" tIns="0" rIns="0" bIns="0" rtlCol="0" anchor="ctr">
+            <a:normAutofit/>
+          </a:bodyPr>
+          <a:lstStyle/>
+          <a:p>
+            <a:pPr indent="0" marL="0">
+              <a:buNone/>
+            </a:pPr>
+            <a:r>
               <a:rPr lang="en-US" sz="1200" dirty="0">
                 <a:solidFill>
                   <a:srgbClr val="5F6F66"/>
@@ -9704,91 +9811,9 @@
                 <a:ea typeface="微软雅黑" pitchFamily="34" charset="-122"/>
                 <a:cs typeface="微软雅黑" pitchFamily="34" charset="-120"/>
               </a:rPr>
-              <a:t>用户/角色/菜单/组织 · 权限包 · 审计 · 备份 · 更新日志</a:t>
+              <a:t>+ Ctrl+K 菜单搜索 · 收藏 / 最近访问 · 权限包三级裁剪 · 旧路由全部保留 —— 由后端单一菜单源（v2）贯穿全站</a:t>
             </a:r>
             <a:endParaRPr lang="en-US" sz="1200" dirty="0"/>
-          </a:p>
-        </p:txBody>
-      </p:sp>
-      <p:sp>
-        <p:nvSpPr>
-          <p:cNvPr id="30" name="Text 28"/>
-          <p:cNvSpPr/>
-          <p:nvPr/>
-        </p:nvSpPr>
-        <p:spPr>
-          <a:xfrm>
-            <a:off x="8540496" y="5394960"/>
-            <a:ext cx="3200400" cy="320040"/>
-          </a:xfrm>
-          <a:prstGeom prst="rect">
-            <a:avLst/>
-          </a:prstGeom>
-          <a:noFill/>
-          <a:ln/>
-        </p:spPr>
-        <p:txBody>
-          <a:bodyPr wrap="square" lIns="0" tIns="0" rIns="0" bIns="0" rtlCol="0" anchor="ctr">
-            <a:normAutofit/>
-          </a:bodyPr>
-          <a:lstStyle/>
-          <a:p>
-            <a:pPr indent="0" marL="0">
-              <a:buNone/>
-            </a:pPr>
-            <a:r>
-              <a:rPr lang="en-US" sz="1050" i="1" dirty="0">
-                <a:solidFill>
-                  <a:srgbClr val="2D6A4F"/>
-                </a:solidFill>
-                <a:latin typeface="微软雅黑" pitchFamily="34" charset="0"/>
-                <a:ea typeface="微软雅黑" pitchFamily="34" charset="-122"/>
-                <a:cs typeface="微软雅黑" pitchFamily="34" charset="-120"/>
-              </a:rPr>
-              <a:t>system / admin</a:t>
-            </a:r>
-            <a:endParaRPr lang="en-US" sz="1050" dirty="0"/>
-          </a:p>
-        </p:txBody>
-      </p:sp>
-      <p:sp>
-        <p:nvSpPr>
-          <p:cNvPr id="31" name="Text 29"/>
-          <p:cNvSpPr/>
-          <p:nvPr/>
-        </p:nvSpPr>
-        <p:spPr>
-          <a:xfrm>
-            <a:off x="457200" y="6172200"/>
-            <a:ext cx="11247120" cy="365760"/>
-          </a:xfrm>
-          <a:prstGeom prst="rect">
-            <a:avLst/>
-          </a:prstGeom>
-          <a:noFill/>
-          <a:ln/>
-        </p:spPr>
-        <p:txBody>
-          <a:bodyPr wrap="square" lIns="0" tIns="0" rIns="0" bIns="0" rtlCol="0" anchor="ctr">
-            <a:normAutofit/>
-          </a:bodyPr>
-          <a:lstStyle/>
-          <a:p>
-            <a:pPr indent="0" marL="0">
-              <a:buNone/>
-            </a:pPr>
-            <a:r>
-              <a:rPr lang="en-US" sz="1250" dirty="0">
-                <a:solidFill>
-                  <a:srgbClr val="5F6F66"/>
-                </a:solidFill>
-                <a:latin typeface="微软雅黑" pitchFamily="34" charset="0"/>
-                <a:ea typeface="微软雅黑" pitchFamily="34" charset="-122"/>
-                <a:cs typeface="微软雅黑" pitchFamily="34" charset="-120"/>
-              </a:rPr>
-              <a:t>+ 消息中心 · 待办中心 · 提醒中心 · 全局搜索 · 回收站 —— 贯穿各业务域的横向能力</a:t>
-            </a:r>
-            <a:endParaRPr lang="en-US" sz="1250" dirty="0"/>
           </a:p>
         </p:txBody>
       </p:sp>
@@ -9843,10 +9868,6 @@
           </a:solidFill>
           <a:ln/>
         </p:spPr>
-        <p:txBody>
-          <a:bodyPr/>
-          <a:p/>
-        </p:txBody>
       </p:sp>
       <p:sp>
         <p:nvSpPr>
@@ -10006,7 +10027,7 @@
                 <a:ea typeface="微软雅黑" pitchFamily="34" charset="-122"/>
                 <a:cs typeface="微软雅黑" pitchFamily="34" charset="-120"/>
               </a:rPr>
-              <a:t>帮扶管理信息系统 v1.12.25</a:t>
+              <a:t>帮扶管理信息系统 v1.13.0</a:t>
             </a:r>
             <a:endParaRPr lang="en-US" sz="1050" dirty="0"/>
           </a:p>
@@ -10040,10 +10061,6 @@
             </a:outerShdw>
           </a:effectLst>
         </p:spPr>
-        <p:txBody>
-          <a:bodyPr/>
-          <a:p/>
-        </p:txBody>
       </p:sp>
       <p:sp>
         <p:nvSpPr>
@@ -10111,13 +10128,13 @@
           <a:p>
             <a:pPr algn="l" marL="152400" indent="-152400">
               <a:spcAft>
-                <a:spcPts val="1000"/>
+                <a:spcPts val="900"/>
               </a:spcAft>
               <a:buSzPct val="100000"/>
               <a:buChar char="▪"/>
             </a:pPr>
             <a:r>
-              <a:rPr lang="en-US" sz="1350" dirty="0">
+              <a:rPr lang="en-US" sz="1300" dirty="0">
                 <a:solidFill>
                   <a:srgbClr val="1A2E24"/>
                 </a:solidFill>
@@ -10127,18 +10144,18 @@
               </a:rPr>
               <a:t>KPI 卡片真实环比：本年资金 / 项目 / 村 / 学校，方向箭头动态化</a:t>
             </a:r>
-            <a:endParaRPr lang="en-US" sz="1350" dirty="0"/>
+            <a:endParaRPr lang="en-US" sz="1300" dirty="0"/>
           </a:p>
           <a:p>
             <a:pPr algn="l" marL="152400" indent="-152400">
               <a:spcAft>
-                <a:spcPts val="1000"/>
+                <a:spcPts val="900"/>
               </a:spcAft>
               <a:buSzPct val="100000"/>
               <a:buChar char="▪"/>
             </a:pPr>
             <a:r>
-              <a:rPr lang="en-US" sz="1350" dirty="0">
+              <a:rPr lang="en-US" sz="1300" dirty="0">
                 <a:solidFill>
                   <a:srgbClr val="1A2E24"/>
                 </a:solidFill>
@@ -10148,18 +10165,18 @@
               </a:rPr>
               <a:t>待办聚合：待审批 / 待办任务 / 未读消息一键直达</a:t>
             </a:r>
-            <a:endParaRPr lang="en-US" sz="1350" dirty="0"/>
+            <a:endParaRPr lang="en-US" sz="1300" dirty="0"/>
           </a:p>
           <a:p>
             <a:pPr algn="l" marL="152400" indent="-152400">
               <a:spcAft>
-                <a:spcPts val="1000"/>
+                <a:spcPts val="900"/>
               </a:spcAft>
               <a:buSzPct val="100000"/>
               <a:buChar char="▪"/>
             </a:pPr>
             <a:r>
-              <a:rPr lang="en-US" sz="1350" dirty="0">
+              <a:rPr lang="en-US" sz="1300" dirty="0">
                 <a:solidFill>
                   <a:srgbClr val="1A2E24"/>
                 </a:solidFill>
@@ -10169,18 +10186,18 @@
               </a:rPr>
               <a:t>快捷操作自定义布局（QuickActions 拖拽）</a:t>
             </a:r>
-            <a:endParaRPr lang="en-US" sz="1350" dirty="0"/>
+            <a:endParaRPr lang="en-US" sz="1300" dirty="0"/>
           </a:p>
           <a:p>
             <a:pPr algn="l" marL="152400" indent="-152400">
               <a:spcAft>
-                <a:spcPts val="1000"/>
+                <a:spcPts val="900"/>
               </a:spcAft>
               <a:buSzPct val="100000"/>
               <a:buChar char="▪"/>
             </a:pPr>
             <a:r>
-              <a:rPr lang="en-US" sz="1350" dirty="0">
+              <a:rPr lang="en-US" sz="1300" dirty="0">
                 <a:solidFill>
                   <a:srgbClr val="1A2E24"/>
                 </a:solidFill>
@@ -10190,18 +10207,18 @@
               </a:rPr>
               <a:t>图表年度趋势：资金 / 项目双轴联动</a:t>
             </a:r>
-            <a:endParaRPr lang="en-US" sz="1350" dirty="0"/>
+            <a:endParaRPr lang="en-US" sz="1300" dirty="0"/>
           </a:p>
           <a:p>
             <a:pPr algn="l" marL="152400" indent="-152400">
               <a:spcAft>
-                <a:spcPts val="1000"/>
+                <a:spcPts val="900"/>
               </a:spcAft>
               <a:buSzPct val="100000"/>
               <a:buChar char="▪"/>
             </a:pPr>
             <a:r>
-              <a:rPr lang="en-US" sz="1350" dirty="0">
+              <a:rPr lang="en-US" sz="1300" dirty="0">
                 <a:solidFill>
                   <a:srgbClr val="1A2E24"/>
                 </a:solidFill>
@@ -10209,9 +10226,30 @@
                 <a:ea typeface="微软雅黑" pitchFamily="34" charset="-122"/>
                 <a:cs typeface="微软雅黑" pitchFamily="34" charset="-120"/>
               </a:rPr>
+              <a:t>侧栏 Ctrl+K 菜单搜索 · 收藏 / 最近访问（v1.13.0）</a:t>
+            </a:r>
+            <a:endParaRPr lang="en-US" sz="1300" dirty="0"/>
+          </a:p>
+          <a:p>
+            <a:pPr algn="l" marL="152400" indent="-152400">
+              <a:spcAft>
+                <a:spcPts val="900"/>
+              </a:spcAft>
+              <a:buSzPct val="100000"/>
+              <a:buChar char="▪"/>
+            </a:pPr>
+            <a:r>
+              <a:rPr lang="en-US" sz="1300" dirty="0">
+                <a:solidFill>
+                  <a:srgbClr val="1A2E24"/>
+                </a:solidFill>
+                <a:latin typeface="微软雅黑" pitchFamily="34" charset="0"/>
+                <a:ea typeface="微软雅黑" pitchFamily="34" charset="-122"/>
+                <a:cs typeface="微软雅黑" pitchFamily="34" charset="-120"/>
+              </a:rPr>
               <a:t>工作台可按角色裁剪：viewer 只见只读面板</a:t>
             </a:r>
-            <a:endParaRPr lang="en-US" sz="1350" dirty="0"/>
+            <a:endParaRPr lang="en-US" sz="1300" dirty="0"/>
           </a:p>
         </p:txBody>
       </p:sp>
@@ -10243,10 +10281,6 @@
             </a:outerShdw>
           </a:effectLst>
         </p:spPr>
-        <p:txBody>
-          <a:bodyPr/>
-          <a:p/>
-        </p:txBody>
       </p:sp>
       <p:sp>
         <p:nvSpPr>
@@ -10391,7 +10425,7 @@
                 <a:ea typeface="微软雅黑" pitchFamily="34" charset="-122"/>
                 <a:cs typeface="微软雅黑" pitchFamily="34" charset="-120"/>
               </a:rPr>
-              <a:t>帮扶大屏：深色全屏模式，适用于展示/汇报场景</a:t>
+              <a:t>帮扶大屏：全屏汇报模式，支持按帮扶村/学校/单位筛选下钻</a:t>
             </a:r>
             <a:endParaRPr lang="en-US" sz="1350" dirty="0"/>
           </a:p>
@@ -10469,10 +10503,6 @@
           </a:solidFill>
           <a:ln/>
         </p:spPr>
-        <p:txBody>
-          <a:bodyPr/>
-          <a:p/>
-        </p:txBody>
       </p:sp>
       <p:sp>
         <p:nvSpPr>
@@ -10632,7 +10662,7 @@
                 <a:ea typeface="微软雅黑" pitchFamily="34" charset="-122"/>
                 <a:cs typeface="微软雅黑" pitchFamily="34" charset="-120"/>
               </a:rPr>
-              <a:t>帮扶管理信息系统 v1.12.25</a:t>
+              <a:t>帮扶管理信息系统 v1.13.0</a:t>
             </a:r>
             <a:endParaRPr lang="en-US" sz="1050" dirty="0"/>
           </a:p>
@@ -10659,10 +10689,6 @@
           </a:solidFill>
           <a:ln/>
         </p:spPr>
-        <p:txBody>
-          <a:bodyPr/>
-          <a:p/>
-        </p:txBody>
       </p:sp>
       <p:sp>
         <p:nvSpPr>
@@ -10726,10 +10752,6 @@
           </a:solidFill>
           <a:ln/>
         </p:spPr>
-        <p:txBody>
-          <a:bodyPr/>
-          <a:p/>
-        </p:txBody>
       </p:sp>
       <p:sp>
         <p:nvSpPr>
@@ -10793,10 +10815,6 @@
           </a:solidFill>
           <a:ln/>
         </p:spPr>
-        <p:txBody>
-          <a:bodyPr/>
-          <a:p/>
-        </p:txBody>
       </p:sp>
       <p:sp>
         <p:nvSpPr>
@@ -10860,10 +10878,6 @@
           </a:solidFill>
           <a:ln/>
         </p:spPr>
-        <p:txBody>
-          <a:bodyPr/>
-          <a:p/>
-        </p:txBody>
       </p:sp>
       <p:sp>
         <p:nvSpPr>
@@ -10927,10 +10941,6 @@
           </a:solidFill>
           <a:ln/>
         </p:spPr>
-        <p:txBody>
-          <a:bodyPr/>
-          <a:p/>
-        </p:txBody>
       </p:sp>
       <p:sp>
         <p:nvSpPr>
@@ -10994,10 +11004,6 @@
           </a:solidFill>
           <a:ln/>
         </p:spPr>
-        <p:txBody>
-          <a:bodyPr/>
-          <a:p/>
-        </p:txBody>
       </p:sp>
       <p:sp>
         <p:nvSpPr>
@@ -11061,10 +11067,6 @@
           </a:solidFill>
           <a:ln/>
         </p:spPr>
-        <p:txBody>
-          <a:bodyPr/>
-          <a:p/>
-        </p:txBody>
       </p:sp>
       <p:sp>
         <p:nvSpPr>
@@ -11128,10 +11130,6 @@
           </a:solidFill>
           <a:ln/>
         </p:spPr>
-        <p:txBody>
-          <a:bodyPr/>
-          <a:p/>
-        </p:txBody>
       </p:sp>
       <p:sp>
         <p:nvSpPr>
@@ -11333,10 +11331,6 @@
           </a:solidFill>
           <a:ln/>
         </p:spPr>
-        <p:txBody>
-          <a:bodyPr/>
-          <a:p/>
-        </p:txBody>
       </p:sp>
       <p:sp>
         <p:nvSpPr>
@@ -11496,7 +11490,7 @@
                 <a:ea typeface="微软雅黑" pitchFamily="34" charset="-122"/>
                 <a:cs typeface="微软雅黑" pitchFamily="34" charset="-120"/>
               </a:rPr>
-              <a:t>帮扶管理信息系统 v1.12.25</a:t>
+              <a:t>帮扶管理信息系统 v1.13.0</a:t>
             </a:r>
             <a:endParaRPr lang="en-US" sz="1050" dirty="0"/>
           </a:p>
@@ -11521,10 +11515,6 @@
           </a:solidFill>
           <a:ln/>
         </p:spPr>
-        <p:txBody>
-          <a:bodyPr/>
-          <a:p/>
-        </p:txBody>
       </p:sp>
       <p:sp>
         <p:nvSpPr>
@@ -11586,10 +11576,6 @@
           </a:solidFill>
           <a:ln/>
         </p:spPr>
-        <p:txBody>
-          <a:bodyPr/>
-          <a:p/>
-        </p:txBody>
       </p:sp>
       <p:sp>
         <p:nvSpPr>
@@ -11651,10 +11637,6 @@
           </a:solidFill>
           <a:ln/>
         </p:spPr>
-        <p:txBody>
-          <a:bodyPr/>
-          <a:p/>
-        </p:txBody>
       </p:sp>
       <p:sp>
         <p:nvSpPr>
@@ -11716,10 +11698,6 @@
           </a:solidFill>
           <a:ln/>
         </p:spPr>
-        <p:txBody>
-          <a:bodyPr/>
-          <a:p/>
-        </p:txBody>
       </p:sp>
       <p:sp>
         <p:nvSpPr>
@@ -11781,10 +11759,6 @@
           </a:solidFill>
           <a:ln/>
         </p:spPr>
-        <p:txBody>
-          <a:bodyPr/>
-          <a:p/>
-        </p:txBody>
       </p:sp>
       <p:sp>
         <p:nvSpPr>
@@ -11846,10 +11820,6 @@
           </a:solidFill>
           <a:ln/>
         </p:spPr>
-        <p:txBody>
-          <a:bodyPr/>
-          <a:p/>
-        </p:txBody>
       </p:sp>
       <p:sp>
         <p:nvSpPr>
@@ -12072,10 +12042,6 @@
           </a:solidFill>
           <a:ln/>
         </p:spPr>
-        <p:txBody>
-          <a:bodyPr/>
-          <a:p/>
-        </p:txBody>
       </p:sp>
       <p:sp>
         <p:nvSpPr>
@@ -12235,7 +12201,7 @@
                 <a:ea typeface="微软雅黑" pitchFamily="34" charset="-122"/>
                 <a:cs typeface="微软雅黑" pitchFamily="34" charset="-120"/>
               </a:rPr>
-              <a:t>帮扶管理信息系统 v1.12.25</a:t>
+              <a:t>帮扶管理信息系统 v1.13.0</a:t>
             </a:r>
             <a:endParaRPr lang="en-US" sz="1050" dirty="0"/>
           </a:p>
@@ -12260,10 +12226,6 @@
           </a:solidFill>
           <a:ln/>
         </p:spPr>
-        <p:txBody>
-          <a:bodyPr/>
-          <a:p/>
-        </p:txBody>
       </p:sp>
       <p:sp>
         <p:nvSpPr>
@@ -12370,10 +12332,6 @@
             <a:tailEnd type="triangle"/>
           </a:ln>
         </p:spPr>
-        <p:txBody>
-          <a:bodyPr/>
-          <a:p/>
-        </p:txBody>
       </p:sp>
       <p:sp>
         <p:nvSpPr>
@@ -12394,10 +12352,6 @@
           </a:solidFill>
           <a:ln/>
         </p:spPr>
-        <p:txBody>
-          <a:bodyPr/>
-          <a:p/>
-        </p:txBody>
       </p:sp>
       <p:sp>
         <p:nvSpPr>
@@ -12504,10 +12458,6 @@
             <a:tailEnd type="triangle"/>
           </a:ln>
         </p:spPr>
-        <p:txBody>
-          <a:bodyPr/>
-          <a:p/>
-        </p:txBody>
       </p:sp>
       <p:sp>
         <p:nvSpPr>
@@ -12528,10 +12478,6 @@
           </a:solidFill>
           <a:ln/>
         </p:spPr>
-        <p:txBody>
-          <a:bodyPr/>
-          <a:p/>
-        </p:txBody>
       </p:sp>
       <p:sp>
         <p:nvSpPr>
@@ -12638,10 +12584,6 @@
             <a:tailEnd type="triangle"/>
           </a:ln>
         </p:spPr>
-        <p:txBody>
-          <a:bodyPr/>
-          <a:p/>
-        </p:txBody>
       </p:sp>
       <p:sp>
         <p:nvSpPr>
@@ -12662,10 +12604,6 @@
           </a:solidFill>
           <a:ln/>
         </p:spPr>
-        <p:txBody>
-          <a:bodyPr/>
-          <a:p/>
-        </p:txBody>
       </p:sp>
       <p:sp>
         <p:nvSpPr>
@@ -12772,10 +12710,6 @@
             <a:tailEnd type="triangle"/>
           </a:ln>
         </p:spPr>
-        <p:txBody>
-          <a:bodyPr/>
-          <a:p/>
-        </p:txBody>
       </p:sp>
       <p:sp>
         <p:nvSpPr>
@@ -12796,10 +12730,6 @@
           </a:solidFill>
           <a:ln/>
         </p:spPr>
-        <p:txBody>
-          <a:bodyPr/>
-          <a:p/>
-        </p:txBody>
       </p:sp>
       <p:sp>
         <p:nvSpPr>
@@ -12850,7 +12780,7 @@
         </p:nvSpPr>
         <p:spPr>
           <a:xfrm>
-            <a:off x="6612944" y="2542032"/>
+            <a:off x="6409944" y="2542032"/>
             <a:ext cx="1143000" cy="320040"/>
           </a:xfrm>
           <a:prstGeom prst="rect">
@@ -12906,10 +12836,6 @@
             <a:tailEnd type="triangle"/>
           </a:ln>
         </p:spPr>
-        <p:txBody>
-          <a:bodyPr/>
-          <a:p/>
-        </p:txBody>
       </p:sp>
       <p:sp>
         <p:nvSpPr>
@@ -12930,10 +12856,6 @@
           </a:solidFill>
           <a:ln/>
         </p:spPr>
-        <p:txBody>
-          <a:bodyPr/>
-          <a:p/>
-        </p:txBody>
       </p:sp>
       <p:sp>
         <p:nvSpPr>
@@ -13040,10 +12962,6 @@
             <a:tailEnd type="triangle"/>
           </a:ln>
         </p:spPr>
-        <p:txBody>
-          <a:bodyPr/>
-          <a:p/>
-        </p:txBody>
       </p:sp>
       <p:sp>
         <p:nvSpPr>
@@ -13064,10 +12982,6 @@
           </a:solidFill>
           <a:ln/>
         </p:spPr>
-        <p:txBody>
-          <a:bodyPr/>
-          <a:p/>
-        </p:txBody>
       </p:sp>
       <p:sp>
         <p:nvSpPr>
@@ -13174,10 +13088,6 @@
             <a:tailEnd type="triangle"/>
           </a:ln>
         </p:spPr>
-        <p:txBody>
-          <a:bodyPr/>
-          <a:p/>
-        </p:txBody>
       </p:sp>
       <p:sp>
         <p:nvSpPr>
@@ -13198,10 +13108,6 @@
           </a:solidFill>
           <a:ln/>
         </p:spPr>
-        <p:txBody>
-          <a:bodyPr/>
-          <a:p/>
-        </p:txBody>
       </p:sp>
       <p:sp>
         <p:nvSpPr>
@@ -13313,10 +13219,6 @@
             </a:outerShdw>
           </a:effectLst>
         </p:spPr>
-        <p:txBody>
-          <a:bodyPr/>
-          <a:p/>
-        </p:txBody>
       </p:sp>
       <p:sp>
         <p:nvSpPr>
@@ -13474,10 +13376,6 @@
             </a:outerShdw>
           </a:effectLst>
         </p:spPr>
-        <p:txBody>
-          <a:bodyPr/>
-          <a:p/>
-        </p:txBody>
       </p:sp>
       <p:sp>
         <p:nvSpPr>
@@ -13742,10 +13640,6 @@
           </a:solidFill>
           <a:ln/>
         </p:spPr>
-        <p:txBody>
-          <a:bodyPr/>
-          <a:p/>
-        </p:txBody>
       </p:sp>
       <p:sp>
         <p:nvSpPr>
@@ -13891,10 +13785,6 @@
           </a:solidFill>
           <a:ln/>
         </p:spPr>
-        <p:txBody>
-          <a:bodyPr/>
-          <a:p/>
-        </p:txBody>
       </p:sp>
       <p:sp>
         <p:nvSpPr>
@@ -14040,10 +13930,6 @@
           </a:solidFill>
           <a:ln/>
         </p:spPr>
-        <p:txBody>
-          <a:bodyPr/>
-          <a:p/>
-        </p:txBody>
       </p:sp>
       <p:sp>
         <p:nvSpPr>
@@ -14162,7 +14048,7 @@
                 <a:ea typeface="微软雅黑" pitchFamily="34" charset="-122"/>
                 <a:cs typeface="微软雅黑" pitchFamily="34" charset="-120"/>
               </a:rPr>
-              <a:t>七大业务域 · 71 个功能菜单</a:t>
+              <a:t>一个工作台 + 六大板块 · 6 个聚合页</a:t>
             </a:r>
             <a:endParaRPr lang="en-US" sz="1200" dirty="0"/>
           </a:p>
@@ -14189,10 +14075,6 @@
           </a:solidFill>
           <a:ln/>
         </p:spPr>
-        <p:txBody>
-          <a:bodyPr/>
-          <a:p/>
-        </p:txBody>
       </p:sp>
       <p:sp>
         <p:nvSpPr>
@@ -14338,10 +14220,6 @@
           </a:solidFill>
           <a:ln/>
         </p:spPr>
-        <p:txBody>
-          <a:bodyPr/>
-          <a:p/>
-        </p:txBody>
       </p:sp>
       <p:sp>
         <p:nvSpPr>
@@ -14460,7 +14338,7 @@
                 <a:ea typeface="微软雅黑" pitchFamily="34" charset="-122"/>
                 <a:cs typeface="微软雅黑" pitchFamily="34" charset="-120"/>
               </a:rPr>
-              <a:t>20,190 项自动化测试 · CI/CD · 依赖自检</a:t>
+              <a:t>2 万+ 项自动化测试 · CI/CD · 依赖自检</a:t>
             </a:r>
             <a:endParaRPr lang="en-US" sz="1200" dirty="0"/>
           </a:p>
@@ -14487,10 +14365,6 @@
           </a:solidFill>
           <a:ln/>
         </p:spPr>
-        <p:txBody>
-          <a:bodyPr/>
-          <a:p/>
-        </p:txBody>
       </p:sp>
       <p:sp>
         <p:nvSpPr>
@@ -14666,10 +14540,6 @@
           </a:solidFill>
           <a:ln/>
         </p:spPr>
-        <p:txBody>
-          <a:bodyPr/>
-          <a:p/>
-        </p:txBody>
       </p:sp>
       <p:sp>
         <p:nvSpPr>
@@ -14829,7 +14699,7 @@
                 <a:ea typeface="微软雅黑" pitchFamily="34" charset="-122"/>
                 <a:cs typeface="微软雅黑" pitchFamily="34" charset="-120"/>
               </a:rPr>
-              <a:t>帮扶管理信息系统 v1.12.25</a:t>
+              <a:t>帮扶管理信息系统 v1.13.0</a:t>
             </a:r>
             <a:endParaRPr lang="en-US" sz="1050" dirty="0"/>
           </a:p>
@@ -14863,10 +14733,6 @@
             </a:outerShdw>
           </a:effectLst>
         </p:spPr>
-        <p:txBody>
-          <a:bodyPr/>
-          <a:p/>
-        </p:txBody>
       </p:sp>
       <p:sp>
         <p:nvSpPr>
@@ -15066,10 +14932,6 @@
             </a:outerShdw>
           </a:effectLst>
         </p:spPr>
-        <p:txBody>
-          <a:bodyPr/>
-          <a:p/>
-        </p:txBody>
       </p:sp>
       <p:sp>
         <p:nvSpPr>
@@ -15292,10 +15154,6 @@
           </a:solidFill>
           <a:ln/>
         </p:spPr>
-        <p:txBody>
-          <a:bodyPr/>
-          <a:p/>
-        </p:txBody>
       </p:sp>
       <p:sp>
         <p:nvSpPr>
@@ -15455,7 +15313,7 @@
                 <a:ea typeface="微软雅黑" pitchFamily="34" charset="-122"/>
                 <a:cs typeface="微软雅黑" pitchFamily="34" charset="-120"/>
               </a:rPr>
-              <a:t>帮扶管理信息系统 v1.12.25</a:t>
+              <a:t>帮扶管理信息系统 v1.13.0</a:t>
             </a:r>
             <a:endParaRPr lang="en-US" sz="1050" dirty="0"/>
           </a:p>
@@ -15480,10 +15338,6 @@
           </a:solidFill>
           <a:ln/>
         </p:spPr>
-        <p:txBody>
-          <a:bodyPr/>
-          <a:p/>
-        </p:txBody>
       </p:sp>
       <p:sp>
         <p:nvSpPr>
@@ -15545,10 +15399,6 @@
           </a:solidFill>
           <a:ln/>
         </p:spPr>
-        <p:txBody>
-          <a:bodyPr/>
-          <a:p/>
-        </p:txBody>
       </p:sp>
       <p:sp>
         <p:nvSpPr>
@@ -15610,10 +15460,6 @@
           </a:solidFill>
           <a:ln/>
         </p:spPr>
-        <p:txBody>
-          <a:bodyPr/>
-          <a:p/>
-        </p:txBody>
       </p:sp>
       <p:sp>
         <p:nvSpPr>
@@ -15675,10 +15521,6 @@
           </a:solidFill>
           <a:ln/>
         </p:spPr>
-        <p:txBody>
-          <a:bodyPr/>
-          <a:p/>
-        </p:txBody>
       </p:sp>
       <p:sp>
         <p:nvSpPr>
@@ -15740,10 +15582,6 @@
           </a:solidFill>
           <a:ln/>
         </p:spPr>
-        <p:txBody>
-          <a:bodyPr/>
-          <a:p/>
-        </p:txBody>
       </p:sp>
       <p:sp>
         <p:nvSpPr>
@@ -15987,10 +15825,6 @@
           </a:solidFill>
           <a:ln/>
         </p:spPr>
-        <p:txBody>
-          <a:bodyPr/>
-          <a:p/>
-        </p:txBody>
       </p:sp>
       <p:sp>
         <p:nvSpPr>
@@ -16150,7 +15984,7 @@
                 <a:ea typeface="微软雅黑" pitchFamily="34" charset="-122"/>
                 <a:cs typeface="微软雅黑" pitchFamily="34" charset="-120"/>
               </a:rPr>
-              <a:t>帮扶管理信息系统 v1.12.25</a:t>
+              <a:t>帮扶管理信息系统 v1.13.0</a:t>
             </a:r>
             <a:endParaRPr lang="en-US" sz="1050" dirty="0"/>
           </a:p>
@@ -16184,10 +16018,6 @@
             </a:outerShdw>
           </a:effectLst>
         </p:spPr>
-        <p:txBody>
-          <a:bodyPr/>
-          <a:p/>
-        </p:txBody>
       </p:sp>
       <p:sp>
         <p:nvSpPr>
@@ -16366,10 +16196,6 @@
             </a:outerShdw>
           </a:effectLst>
         </p:spPr>
-        <p:txBody>
-          <a:bodyPr/>
-          <a:p/>
-        </p:txBody>
       </p:sp>
       <p:sp>
         <p:nvSpPr>
@@ -16548,10 +16374,6 @@
             </a:outerShdw>
           </a:effectLst>
         </p:spPr>
-        <p:txBody>
-          <a:bodyPr/>
-          <a:p/>
-        </p:txBody>
       </p:sp>
       <p:sp>
         <p:nvSpPr>
@@ -16686,10 +16508,6 @@
           </a:solidFill>
           <a:ln/>
         </p:spPr>
-        <p:txBody>
-          <a:bodyPr/>
-          <a:p/>
-        </p:txBody>
       </p:sp>
       <p:sp>
         <p:nvSpPr>
@@ -16849,7 +16667,7 @@
                 <a:ea typeface="微软雅黑" pitchFamily="34" charset="-122"/>
                 <a:cs typeface="微软雅黑" pitchFamily="34" charset="-120"/>
               </a:rPr>
-              <a:t>帮扶管理信息系统 v1.12.25</a:t>
+              <a:t>帮扶管理信息系统 v1.13.0</a:t>
             </a:r>
             <a:endParaRPr lang="en-US" sz="1050" dirty="0"/>
           </a:p>
@@ -16883,10 +16701,6 @@
             </a:outerShdw>
           </a:effectLst>
         </p:spPr>
-        <p:txBody>
-          <a:bodyPr/>
-          <a:p/>
-        </p:txBody>
       </p:sp>
       <p:sp>
         <p:nvSpPr>
@@ -16998,10 +16812,6 @@
             </a:outerShdw>
           </a:effectLst>
         </p:spPr>
-        <p:txBody>
-          <a:bodyPr/>
-          <a:p/>
-        </p:txBody>
       </p:sp>
       <p:sp>
         <p:nvSpPr>
@@ -17113,10 +16923,6 @@
             </a:outerShdw>
           </a:effectLst>
         </p:spPr>
-        <p:txBody>
-          <a:bodyPr/>
-          <a:p/>
-        </p:txBody>
       </p:sp>
       <p:sp>
         <p:nvSpPr>
@@ -17228,10 +17034,6 @@
             </a:outerShdw>
           </a:effectLst>
         </p:spPr>
-        <p:txBody>
-          <a:bodyPr/>
-          <a:p/>
-        </p:txBody>
       </p:sp>
       <p:sp>
         <p:nvSpPr>
@@ -17343,10 +17145,6 @@
             </a:outerShdw>
           </a:effectLst>
         </p:spPr>
-        <p:txBody>
-          <a:bodyPr/>
-          <a:p/>
-        </p:txBody>
       </p:sp>
       <p:sp>
         <p:nvSpPr>
@@ -17458,10 +17256,6 @@
             </a:outerShdw>
           </a:effectLst>
         </p:spPr>
-        <p:txBody>
-          <a:bodyPr/>
-          <a:p/>
-        </p:txBody>
       </p:sp>
       <p:sp>
         <p:nvSpPr>
@@ -17596,10 +17390,6 @@
           </a:solidFill>
           <a:ln/>
         </p:spPr>
-        <p:txBody>
-          <a:bodyPr/>
-          <a:p/>
-        </p:txBody>
       </p:sp>
       <p:sp>
         <p:nvSpPr>
@@ -17677,7 +17467,7 @@
                 <a:ea typeface="微软雅黑" pitchFamily="34" charset="-122"/>
                 <a:cs typeface="微软雅黑" pitchFamily="34" charset="-120"/>
               </a:rPr>
-              <a:t>系统管理：管理员的全套工具箱</a:t>
+              <a:t>系统管理：6 个聚合页 · 页内 Tab</a:t>
             </a:r>
             <a:endParaRPr lang="en-US" sz="3000" dirty="0"/>
           </a:p>
@@ -17759,7 +17549,7 @@
                 <a:ea typeface="微软雅黑" pitchFamily="34" charset="-122"/>
                 <a:cs typeface="微软雅黑" pitchFamily="34" charset="-120"/>
               </a:rPr>
-              <a:t>帮扶管理信息系统 v1.12.25</a:t>
+              <a:t>帮扶管理信息系统 v1.13.0</a:t>
             </a:r>
             <a:endParaRPr lang="en-US" sz="1050" dirty="0"/>
           </a:p>
@@ -17773,12 +17563,12 @@
         </p:nvSpPr>
         <p:spPr>
           <a:xfrm>
-            <a:off x="457200" y="1691640"/>
-            <a:ext cx="5440680" cy="1234440"/>
+            <a:off x="457200" y="1645920"/>
+            <a:ext cx="5440680" cy="1225296"/>
           </a:xfrm>
           <a:prstGeom prst="roundRect">
             <a:avLst>
-              <a:gd name="adj" fmla="val 5185"/>
+              <a:gd name="adj" fmla="val 5224"/>
             </a:avLst>
           </a:prstGeom>
           <a:solidFill>
@@ -17793,10 +17583,6 @@
             </a:outerShdw>
           </a:effectLst>
         </p:spPr>
-        <p:txBody>
-          <a:bodyPr/>
-          <a:p/>
-        </p:txBody>
       </p:sp>
       <p:sp>
         <p:nvSpPr>
@@ -17806,7 +17592,7 @@
         </p:nvSpPr>
         <p:spPr>
           <a:xfrm>
-            <a:off x="731520" y="1819656"/>
+            <a:off x="731520" y="1755648"/>
             <a:ext cx="4846320" cy="365760"/>
           </a:xfrm>
           <a:prstGeom prst="rect">
@@ -17833,7 +17619,7 @@
                 <a:ea typeface="微软雅黑" pitchFamily="34" charset="-122"/>
                 <a:cs typeface="微软雅黑" pitchFamily="34" charset="-120"/>
               </a:rPr>
-              <a:t>用户与组织</a:t>
+              <a:t>组织与权限</a:t>
             </a:r>
             <a:endParaRPr lang="en-US" sz="1500" dirty="0"/>
           </a:p>
@@ -17847,8 +17633,8 @@
         </p:nvSpPr>
         <p:spPr>
           <a:xfrm>
-            <a:off x="731520" y="2203704"/>
-            <a:ext cx="4892040" cy="640080"/>
+            <a:off x="731520" y="2139696"/>
+            <a:ext cx="4937760" cy="640080"/>
           </a:xfrm>
           <a:prstGeom prst="rect">
             <a:avLst/>
@@ -17866,7 +17652,7 @@
               <a:buNone/>
             </a:pPr>
             <a:r>
-              <a:rPr lang="en-US" sz="1200" dirty="0">
+              <a:rPr lang="en-US" sz="1150" dirty="0">
                 <a:solidFill>
                   <a:srgbClr val="5F6F66"/>
                 </a:solidFill>
@@ -17874,9 +17660,9 @@
                 <a:ea typeface="微软雅黑" pitchFamily="34" charset="-122"/>
                 <a:cs typeface="微软雅黑" pitchFamily="34" charset="-120"/>
               </a:rPr>
-              <a:t>用户增删改、组织树管理（启动钩子自动自愈）、组织删除级联守卫</a:t>
-            </a:r>
-            <a:endParaRPr lang="en-US" sz="1200" dirty="0"/>
+              <a:t>用户与组织 · 角色管理 · 菜单管理 · 权限包管理 · 组织机构</a:t>
+            </a:r>
+            <a:endParaRPr lang="en-US" sz="1150" dirty="0"/>
           </a:p>
         </p:txBody>
       </p:sp>
@@ -17888,12 +17674,12 @@
         </p:nvSpPr>
         <p:spPr>
           <a:xfrm>
-            <a:off x="6263640" y="1691640"/>
-            <a:ext cx="5440680" cy="1234440"/>
+            <a:off x="6263640" y="1645920"/>
+            <a:ext cx="5440680" cy="1225296"/>
           </a:xfrm>
           <a:prstGeom prst="roundRect">
             <a:avLst>
-              <a:gd name="adj" fmla="val 5185"/>
+              <a:gd name="adj" fmla="val 5224"/>
             </a:avLst>
           </a:prstGeom>
           <a:solidFill>
@@ -17908,10 +17694,6 @@
             </a:outerShdw>
           </a:effectLst>
         </p:spPr>
-        <p:txBody>
-          <a:bodyPr/>
-          <a:p/>
-        </p:txBody>
       </p:sp>
       <p:sp>
         <p:nvSpPr>
@@ -17921,7 +17703,7 @@
         </p:nvSpPr>
         <p:spPr>
           <a:xfrm>
-            <a:off x="6537960" y="1819656"/>
+            <a:off x="6537960" y="1755648"/>
             <a:ext cx="4846320" cy="365760"/>
           </a:xfrm>
           <a:prstGeom prst="rect">
@@ -17948,7 +17730,7 @@
                 <a:ea typeface="微软雅黑" pitchFamily="34" charset="-122"/>
                 <a:cs typeface="微软雅黑" pitchFamily="34" charset="-120"/>
               </a:rPr>
-              <a:t>角色与菜单</a:t>
+              <a:t>安全与审计</a:t>
             </a:r>
             <a:endParaRPr lang="en-US" sz="1500" dirty="0"/>
           </a:p>
@@ -17962,8 +17744,8 @@
         </p:nvSpPr>
         <p:spPr>
           <a:xfrm>
-            <a:off x="6537960" y="2203704"/>
-            <a:ext cx="4892040" cy="640080"/>
+            <a:off x="6537960" y="2139696"/>
+            <a:ext cx="4937760" cy="640080"/>
           </a:xfrm>
           <a:prstGeom prst="rect">
             <a:avLst/>
@@ -17981,7 +17763,7 @@
               <a:buNone/>
             </a:pPr>
             <a:r>
-              <a:rPr lang="en-US" sz="1200" dirty="0">
+              <a:rPr lang="en-US" sz="1150" dirty="0">
                 <a:solidFill>
                   <a:srgbClr val="5F6F66"/>
                 </a:solidFill>
@@ -17989,9 +17771,9 @@
                 <a:ea typeface="微软雅黑" pitchFamily="34" charset="-122"/>
                 <a:cs typeface="微软雅黑" pitchFamily="34" charset="-120"/>
               </a:rPr>
-              <a:t>四角色体系；菜单可见性按角色 + 用户级 + 权限包三级裁剪</a:t>
-            </a:r>
-            <a:endParaRPr lang="en-US" sz="1200" dirty="0"/>
+              <a:t>安全审计 · 零信任 · 密钥管理 · 数据分级 · 加密设置 · 机器码管理</a:t>
+            </a:r>
+            <a:endParaRPr lang="en-US" sz="1150" dirty="0"/>
           </a:p>
         </p:txBody>
       </p:sp>
@@ -18003,12 +17785,12 @@
         </p:nvSpPr>
         <p:spPr>
           <a:xfrm>
-            <a:off x="457200" y="3172968"/>
-            <a:ext cx="5440680" cy="1234440"/>
+            <a:off x="457200" y="3090672"/>
+            <a:ext cx="5440680" cy="1225296"/>
           </a:xfrm>
           <a:prstGeom prst="roundRect">
             <a:avLst>
-              <a:gd name="adj" fmla="val 5185"/>
+              <a:gd name="adj" fmla="val 5224"/>
             </a:avLst>
           </a:prstGeom>
           <a:solidFill>
@@ -18023,10 +17805,6 @@
             </a:outerShdw>
           </a:effectLst>
         </p:spPr>
-        <p:txBody>
-          <a:bodyPr/>
-          <a:p/>
-        </p:txBody>
       </p:sp>
       <p:sp>
         <p:nvSpPr>
@@ -18036,7 +17814,7 @@
         </p:nvSpPr>
         <p:spPr>
           <a:xfrm>
-            <a:off x="731520" y="3300984"/>
+            <a:off x="731520" y="3200400"/>
             <a:ext cx="4846320" cy="365760"/>
           </a:xfrm>
           <a:prstGeom prst="rect">
@@ -18063,7 +17841,7 @@
                 <a:ea typeface="微软雅黑" pitchFamily="34" charset="-122"/>
                 <a:cs typeface="微软雅黑" pitchFamily="34" charset="-120"/>
               </a:rPr>
-              <a:t>权限包</a:t>
+              <a:t>运维与监控</a:t>
             </a:r>
             <a:endParaRPr lang="en-US" sz="1500" dirty="0"/>
           </a:p>
@@ -18077,8 +17855,8 @@
         </p:nvSpPr>
         <p:spPr>
           <a:xfrm>
-            <a:off x="731520" y="3685032"/>
-            <a:ext cx="4892040" cy="640080"/>
+            <a:off x="731520" y="3584448"/>
+            <a:ext cx="4937760" cy="640080"/>
           </a:xfrm>
           <a:prstGeom prst="rect">
             <a:avLst/>
@@ -18096,7 +17874,7 @@
               <a:buNone/>
             </a:pPr>
             <a:r>
-              <a:rPr lang="en-US" sz="1200" dirty="0">
+              <a:rPr lang="en-US" sz="1150" dirty="0">
                 <a:solidFill>
                   <a:srgbClr val="5F6F66"/>
                 </a:solidFill>
@@ -18104,9 +17882,9 @@
                 <a:ea typeface="微软雅黑" pitchFamily="34" charset="-122"/>
                 <a:cs typeface="微软雅黑" pitchFamily="34" charset="-120"/>
               </a:rPr>
-              <a:t>菜单权限套餐化管理：给一批用户一键授权</a:t>
-            </a:r>
-            <a:endParaRPr lang="en-US" sz="1200" dirty="0"/>
+              <a:t>系统总览 · 健康检查 · 系统监控 · 缓存管理 · 后台任务 · 运行环境 · 错误上报</a:t>
+            </a:r>
+            <a:endParaRPr lang="en-US" sz="1150" dirty="0"/>
           </a:p>
         </p:txBody>
       </p:sp>
@@ -18118,12 +17896,12 @@
         </p:nvSpPr>
         <p:spPr>
           <a:xfrm>
-            <a:off x="6263640" y="3172968"/>
-            <a:ext cx="5440680" cy="1234440"/>
+            <a:off x="6263640" y="3090672"/>
+            <a:ext cx="5440680" cy="1225296"/>
           </a:xfrm>
           <a:prstGeom prst="roundRect">
             <a:avLst>
-              <a:gd name="adj" fmla="val 5185"/>
+              <a:gd name="adj" fmla="val 5224"/>
             </a:avLst>
           </a:prstGeom>
           <a:solidFill>
@@ -18138,10 +17916,6 @@
             </a:outerShdw>
           </a:effectLst>
         </p:spPr>
-        <p:txBody>
-          <a:bodyPr/>
-          <a:p/>
-        </p:txBody>
       </p:sp>
       <p:sp>
         <p:nvSpPr>
@@ -18151,7 +17925,7 @@
         </p:nvSpPr>
         <p:spPr>
           <a:xfrm>
-            <a:off x="6537960" y="3300984"/>
+            <a:off x="6537960" y="3200400"/>
             <a:ext cx="4846320" cy="365760"/>
           </a:xfrm>
           <a:prstGeom prst="rect">
@@ -18178,7 +17952,7 @@
                 <a:ea typeface="微软雅黑" pitchFamily="34" charset="-122"/>
                 <a:cs typeface="微软雅黑" pitchFamily="34" charset="-120"/>
               </a:rPr>
-              <a:t>审计中心</a:t>
+              <a:t>备份与存储</a:t>
             </a:r>
             <a:endParaRPr lang="en-US" sz="1500" dirty="0"/>
           </a:p>
@@ -18192,8 +17966,8 @@
         </p:nvSpPr>
         <p:spPr>
           <a:xfrm>
-            <a:off x="6537960" y="3685032"/>
-            <a:ext cx="4892040" cy="640080"/>
+            <a:off x="6537960" y="3584448"/>
+            <a:ext cx="4937760" cy="640080"/>
           </a:xfrm>
           <a:prstGeom prst="rect">
             <a:avLst/>
@@ -18211,7 +17985,7 @@
               <a:buNone/>
             </a:pPr>
             <a:r>
-              <a:rPr lang="en-US" sz="1200" dirty="0">
+              <a:rPr lang="en-US" sz="1150" dirty="0">
                 <a:solidFill>
                   <a:srgbClr val="5F6F66"/>
                 </a:solidFill>
@@ -18219,9 +17993,9 @@
                 <a:ea typeface="微软雅黑" pitchFamily="34" charset="-122"/>
                 <a:cs typeface="微软雅黑" pitchFamily="34" charset="-120"/>
               </a:rPr>
-              <a:t>操作日志 / 登录尝试 / 安全事件 / API 访问，支持导出</a:t>
-            </a:r>
-            <a:endParaRPr lang="en-US" sz="1200" dirty="0"/>
+              <a:t>备份管理 · 分片上传 · 地图瓦片 · 管控配置包 · 系统配置</a:t>
+            </a:r>
+            <a:endParaRPr lang="en-US" sz="1150" dirty="0"/>
           </a:p>
         </p:txBody>
       </p:sp>
@@ -18233,12 +18007,12 @@
         </p:nvSpPr>
         <p:spPr>
           <a:xfrm>
-            <a:off x="457200" y="4654296"/>
-            <a:ext cx="5440680" cy="1234440"/>
+            <a:off x="457200" y="4535424"/>
+            <a:ext cx="5440680" cy="1225296"/>
           </a:xfrm>
           <a:prstGeom prst="roundRect">
             <a:avLst>
-              <a:gd name="adj" fmla="val 5185"/>
+              <a:gd name="adj" fmla="val 5224"/>
             </a:avLst>
           </a:prstGeom>
           <a:solidFill>
@@ -18253,10 +18027,6 @@
             </a:outerShdw>
           </a:effectLst>
         </p:spPr>
-        <p:txBody>
-          <a:bodyPr/>
-          <a:p/>
-        </p:txBody>
       </p:sp>
       <p:sp>
         <p:nvSpPr>
@@ -18266,7 +18036,7 @@
         </p:nvSpPr>
         <p:spPr>
           <a:xfrm>
-            <a:off x="731520" y="4782312"/>
+            <a:off x="731520" y="4645152"/>
             <a:ext cx="4846320" cy="365760"/>
           </a:xfrm>
           <a:prstGeom prst="rect">
@@ -18293,7 +18063,7 @@
                 <a:ea typeface="微软雅黑" pitchFamily="34" charset="-122"/>
                 <a:cs typeface="微软雅黑" pitchFamily="34" charset="-120"/>
               </a:rPr>
-              <a:t>备份中心</a:t>
+              <a:t>系统设置</a:t>
             </a:r>
             <a:endParaRPr lang="en-US" sz="1500" dirty="0"/>
           </a:p>
@@ -18307,8 +18077,8 @@
         </p:nvSpPr>
         <p:spPr>
           <a:xfrm>
-            <a:off x="731520" y="5166360"/>
-            <a:ext cx="4892040" cy="640080"/>
+            <a:off x="731520" y="5029200"/>
+            <a:ext cx="4937760" cy="640080"/>
           </a:xfrm>
           <a:prstGeom prst="rect">
             <a:avLst/>
@@ -18326,7 +18096,7 @@
               <a:buNone/>
             </a:pPr>
             <a:r>
-              <a:rPr lang="en-US" sz="1200" dirty="0">
+              <a:rPr lang="en-US" sz="1150" dirty="0">
                 <a:solidFill>
                   <a:srgbClr val="5F6F66"/>
                 </a:solidFill>
@@ -18334,9 +18104,9 @@
                 <a:ea typeface="微软雅黑" pitchFamily="34" charset="-122"/>
                 <a:cs typeface="微软雅黑" pitchFamily="34" charset="-120"/>
               </a:rPr>
-              <a:t>智能备份、加密备份、上传恢复（流式防 OOM）</a:t>
-            </a:r>
-            <a:endParaRPr lang="en-US" sz="1200" dirty="0"/>
+              <a:t>多语言 · 邮件设置 · 更新日志</a:t>
+            </a:r>
+            <a:endParaRPr lang="en-US" sz="1150" dirty="0"/>
           </a:p>
         </p:txBody>
       </p:sp>
@@ -18348,12 +18118,12 @@
         </p:nvSpPr>
         <p:spPr>
           <a:xfrm>
-            <a:off x="6263640" y="4654296"/>
-            <a:ext cx="5440680" cy="1234440"/>
+            <a:off x="6263640" y="4535424"/>
+            <a:ext cx="5440680" cy="1225296"/>
           </a:xfrm>
           <a:prstGeom prst="roundRect">
             <a:avLst>
-              <a:gd name="adj" fmla="val 5185"/>
+              <a:gd name="adj" fmla="val 5224"/>
             </a:avLst>
           </a:prstGeom>
           <a:solidFill>
@@ -18368,10 +18138,6 @@
             </a:outerShdw>
           </a:effectLst>
         </p:spPr>
-        <p:txBody>
-          <a:bodyPr/>
-          <a:p/>
-        </p:txBody>
       </p:sp>
       <p:sp>
         <p:nvSpPr>
@@ -18381,7 +18147,7 @@
         </p:nvSpPr>
         <p:spPr>
           <a:xfrm>
-            <a:off x="6537960" y="4782312"/>
+            <a:off x="6537960" y="4645152"/>
             <a:ext cx="4846320" cy="365760"/>
           </a:xfrm>
           <a:prstGeom prst="rect">
@@ -18408,7 +18174,7 @@
                 <a:ea typeface="微软雅黑" pitchFamily="34" charset="-122"/>
                 <a:cs typeface="微软雅黑" pitchFamily="34" charset="-120"/>
               </a:rPr>
-              <a:t>系统运维</a:t>
+              <a:t>关于与反馈</a:t>
             </a:r>
             <a:endParaRPr lang="en-US" sz="1500" dirty="0"/>
           </a:p>
@@ -18422,8 +18188,8 @@
         </p:nvSpPr>
         <p:spPr>
           <a:xfrm>
-            <a:off x="6537960" y="5166360"/>
-            <a:ext cx="4892040" cy="640080"/>
+            <a:off x="6537960" y="5029200"/>
+            <a:ext cx="4937760" cy="640080"/>
           </a:xfrm>
           <a:prstGeom prst="rect">
             <a:avLst/>
@@ -18441,6 +18207,47 @@
               <a:buNone/>
             </a:pPr>
             <a:r>
+              <a:rPr lang="en-US" sz="1150" dirty="0">
+                <a:solidFill>
+                  <a:srgbClr val="5F6F66"/>
+                </a:solidFill>
+                <a:latin typeface="微软雅黑" pitchFamily="34" charset="0"/>
+                <a:ea typeface="微软雅黑" pitchFamily="34" charset="-122"/>
+                <a:cs typeface="微软雅黑" pitchFamily="34" charset="-120"/>
+              </a:rPr>
+              <a:t>关于系统 · 反馈管理 · 帮助中心 · 管理面板</a:t>
+            </a:r>
+            <a:endParaRPr lang="en-US" sz="1150" dirty="0"/>
+          </a:p>
+        </p:txBody>
+      </p:sp>
+      <p:sp>
+        <p:nvSpPr>
+          <p:cNvPr id="25" name="Text 23"/>
+          <p:cNvSpPr/>
+          <p:nvPr/>
+        </p:nvSpPr>
+        <p:spPr>
+          <a:xfrm>
+            <a:off x="457200" y="6172200"/>
+            <a:ext cx="11247120" cy="365760"/>
+          </a:xfrm>
+          <a:prstGeom prst="rect">
+            <a:avLst/>
+          </a:prstGeom>
+          <a:noFill/>
+          <a:ln/>
+        </p:spPr>
+        <p:txBody>
+          <a:bodyPr wrap="square" lIns="0" tIns="0" rIns="0" bIns="0" rtlCol="0" anchor="ctr">
+            <a:normAutofit/>
+          </a:bodyPr>
+          <a:lstStyle/>
+          <a:p>
+            <a:pPr indent="0" marL="0">
+              <a:buNone/>
+            </a:pPr>
+            <a:r>
               <a:rPr lang="en-US" sz="1200" dirty="0">
                 <a:solidFill>
                   <a:srgbClr val="5F6F66"/>
@@ -18449,7 +18256,7 @@
                 <a:ea typeface="微软雅黑" pitchFamily="34" charset="-122"/>
                 <a:cs typeface="微软雅黑" pitchFamily="34" charset="-120"/>
               </a:rPr>
-              <a:t>更新日志、配置包、机器码/通行码、密钥管理、数据分层归档</a:t>
+              <a:t>统一入口 + 页内 Tab：旧页面 / 旧路由全部保留（深链不失效），菜单 key 一个不改、权限包配置完全兼容</a:t>
             </a:r>
             <a:endParaRPr lang="en-US" sz="1200" dirty="0"/>
           </a:p>
@@ -18810,10 +18617,6 @@
           </a:solidFill>
           <a:ln/>
         </p:spPr>
-        <p:txBody>
-          <a:bodyPr/>
-          <a:p/>
-        </p:txBody>
       </p:sp>
       <p:sp>
         <p:nvSpPr>
@@ -18973,7 +18776,7 @@
                 <a:ea typeface="微软雅黑" pitchFamily="34" charset="-122"/>
                 <a:cs typeface="微软雅黑" pitchFamily="34" charset="-120"/>
               </a:rPr>
-              <a:t>帮扶管理信息系统 v1.12.25</a:t>
+              <a:t>帮扶管理信息系统 v1.13.0</a:t>
             </a:r>
             <a:endParaRPr lang="en-US" sz="1050" dirty="0"/>
           </a:p>
@@ -19007,10 +18810,6 @@
             </a:outerShdw>
           </a:effectLst>
         </p:spPr>
-        <p:txBody>
-          <a:bodyPr/>
-          <a:p/>
-        </p:txBody>
       </p:sp>
       <p:sp>
         <p:nvSpPr>
@@ -19033,10 +18832,6 @@
           </a:solidFill>
           <a:ln/>
         </p:spPr>
-        <p:txBody>
-          <a:bodyPr/>
-          <a:p/>
-        </p:txBody>
       </p:sp>
       <p:sp>
         <p:nvSpPr>
@@ -19189,10 +18984,6 @@
             </a:outerShdw>
           </a:effectLst>
         </p:spPr>
-        <p:txBody>
-          <a:bodyPr/>
-          <a:p/>
-        </p:txBody>
       </p:sp>
       <p:sp>
         <p:nvSpPr>
@@ -19215,10 +19006,6 @@
           </a:solidFill>
           <a:ln/>
         </p:spPr>
-        <p:txBody>
-          <a:bodyPr/>
-          <a:p/>
-        </p:txBody>
       </p:sp>
       <p:sp>
         <p:nvSpPr>
@@ -19371,10 +19158,6 @@
             </a:outerShdw>
           </a:effectLst>
         </p:spPr>
-        <p:txBody>
-          <a:bodyPr/>
-          <a:p/>
-        </p:txBody>
       </p:sp>
       <p:sp>
         <p:nvSpPr>
@@ -19397,10 +19180,6 @@
           </a:solidFill>
           <a:ln/>
         </p:spPr>
-        <p:txBody>
-          <a:bodyPr/>
-          <a:p/>
-        </p:txBody>
       </p:sp>
       <p:sp>
         <p:nvSpPr>
@@ -19553,10 +19332,6 @@
             </a:outerShdw>
           </a:effectLst>
         </p:spPr>
-        <p:txBody>
-          <a:bodyPr/>
-          <a:p/>
-        </p:txBody>
       </p:sp>
       <p:sp>
         <p:nvSpPr>
@@ -19579,10 +19354,6 @@
           </a:solidFill>
           <a:ln/>
         </p:spPr>
-        <p:txBody>
-          <a:bodyPr/>
-          <a:p/>
-        </p:txBody>
       </p:sp>
       <p:sp>
         <p:nvSpPr>
@@ -19767,7 +19538,7 @@
                 <a:ea typeface="微软雅黑" pitchFamily="34" charset="-122"/>
                 <a:cs typeface="微软雅黑" pitchFamily="34" charset="-120"/>
               </a:rPr>
-              <a:t>菜单可见性三级裁剪：角色默认 → 权限包 → 用户级配置；公开模块（政策/数据分析）全角色一致</a:t>
+              <a:t>菜单单一源（后端 v2：板块→入口→Tab）；可见性三级裁剪：角色默认 → 权限包 → 用户级配置；公开模块全角色一致</a:t>
             </a:r>
             <a:endParaRPr lang="en-US" sz="1300" dirty="0"/>
           </a:p>
@@ -19845,10 +19616,6 @@
           </a:solidFill>
           <a:ln/>
         </p:spPr>
-        <p:txBody>
-          <a:bodyPr/>
-          <a:p/>
-        </p:txBody>
       </p:sp>
       <p:sp>
         <p:nvSpPr>
@@ -20008,7 +19775,7 @@
                 <a:ea typeface="微软雅黑" pitchFamily="34" charset="-122"/>
                 <a:cs typeface="微软雅黑" pitchFamily="34" charset="-120"/>
               </a:rPr>
-              <a:t>帮扶管理信息系统 v1.12.25</a:t>
+              <a:t>帮扶管理信息系统 v1.13.0</a:t>
             </a:r>
             <a:endParaRPr lang="en-US" sz="1050" dirty="0"/>
           </a:p>
@@ -20042,10 +19809,6 @@
             </a:outerShdw>
           </a:effectLst>
         </p:spPr>
-        <p:txBody>
-          <a:bodyPr/>
-          <a:p/>
-        </p:txBody>
       </p:sp>
       <p:sp>
         <p:nvSpPr>
@@ -20198,10 +19961,6 @@
             </a:outerShdw>
           </a:effectLst>
         </p:spPr>
-        <p:txBody>
-          <a:bodyPr/>
-          <a:p/>
-        </p:txBody>
       </p:sp>
       <p:sp>
         <p:nvSpPr>
@@ -20354,10 +20113,6 @@
             </a:outerShdw>
           </a:effectLst>
         </p:spPr>
-        <p:txBody>
-          <a:bodyPr/>
-          <a:p/>
-        </p:txBody>
       </p:sp>
       <p:sp>
         <p:nvSpPr>
@@ -20510,10 +20265,6 @@
             </a:outerShdw>
           </a:effectLst>
         </p:spPr>
-        <p:txBody>
-          <a:bodyPr/>
-          <a:p/>
-        </p:txBody>
       </p:sp>
       <p:sp>
         <p:nvSpPr>
@@ -20694,10 +20445,6 @@
           </a:solidFill>
           <a:ln/>
         </p:spPr>
-        <p:txBody>
-          <a:bodyPr/>
-          <a:p/>
-        </p:txBody>
       </p:sp>
       <p:sp>
         <p:nvSpPr>
@@ -20857,7 +20604,7 @@
                 <a:ea typeface="微软雅黑" pitchFamily="34" charset="-122"/>
                 <a:cs typeface="微软雅黑" pitchFamily="34" charset="-120"/>
               </a:rPr>
-              <a:t>帮扶管理信息系统 v1.12.25</a:t>
+              <a:t>帮扶管理信息系统 v1.13.0</a:t>
             </a:r>
             <a:endParaRPr lang="en-US" sz="1050" dirty="0"/>
           </a:p>
@@ -20891,10 +20638,6 @@
             </a:outerShdw>
           </a:effectLst>
         </p:spPr>
-        <p:txBody>
-          <a:bodyPr/>
-          <a:p/>
-        </p:txBody>
       </p:sp>
       <p:sp>
         <p:nvSpPr>
@@ -20958,10 +20701,6 @@
           </a:solidFill>
           <a:ln/>
         </p:spPr>
-        <p:txBody>
-          <a:bodyPr/>
-          <a:p/>
-        </p:txBody>
       </p:sp>
       <p:sp>
         <p:nvSpPr>
@@ -21027,10 +20766,6 @@
             <a:tailEnd type="triangle"/>
           </a:ln>
         </p:spPr>
-        <p:txBody>
-          <a:bodyPr/>
-          <a:p/>
-        </p:txBody>
       </p:sp>
       <p:sp>
         <p:nvSpPr>
@@ -21053,10 +20788,6 @@
           </a:solidFill>
           <a:ln/>
         </p:spPr>
-        <p:txBody>
-          <a:bodyPr/>
-          <a:p/>
-        </p:txBody>
       </p:sp>
       <p:sp>
         <p:nvSpPr>
@@ -21122,10 +20853,6 @@
             <a:tailEnd type="triangle"/>
           </a:ln>
         </p:spPr>
-        <p:txBody>
-          <a:bodyPr/>
-          <a:p/>
-        </p:txBody>
       </p:sp>
       <p:sp>
         <p:nvSpPr>
@@ -21148,10 +20875,6 @@
           </a:solidFill>
           <a:ln/>
         </p:spPr>
-        <p:txBody>
-          <a:bodyPr/>
-          <a:p/>
-        </p:txBody>
       </p:sp>
       <p:sp>
         <p:nvSpPr>
@@ -21288,10 +21011,6 @@
             </a:outerShdw>
           </a:effectLst>
         </p:spPr>
-        <p:txBody>
-          <a:bodyPr/>
-          <a:p/>
-        </p:txBody>
       </p:sp>
       <p:sp>
         <p:nvSpPr>
@@ -21470,10 +21189,6 @@
             </a:outerShdw>
           </a:effectLst>
         </p:spPr>
-        <p:txBody>
-          <a:bodyPr/>
-          <a:p/>
-        </p:txBody>
       </p:sp>
       <p:sp>
         <p:nvSpPr>
@@ -21608,10 +21323,6 @@
           </a:solidFill>
           <a:ln/>
         </p:spPr>
-        <p:txBody>
-          <a:bodyPr/>
-          <a:p/>
-        </p:txBody>
       </p:sp>
       <p:sp>
         <p:nvSpPr>
@@ -21771,7 +21482,7 @@
                 <a:ea typeface="微软雅黑" pitchFamily="34" charset="-122"/>
                 <a:cs typeface="微软雅黑" pitchFamily="34" charset="-120"/>
               </a:rPr>
-              <a:t>帮扶管理信息系统 v1.12.25</a:t>
+              <a:t>帮扶管理信息系统 v1.13.0</a:t>
             </a:r>
             <a:endParaRPr lang="en-US" sz="1050" dirty="0"/>
           </a:p>
@@ -21796,10 +21507,6 @@
           </a:solidFill>
           <a:ln/>
         </p:spPr>
-        <p:txBody>
-          <a:bodyPr/>
-          <a:p/>
-        </p:txBody>
       </p:sp>
       <p:sp>
         <p:nvSpPr>
@@ -21902,10 +21609,6 @@
           </a:solidFill>
           <a:ln/>
         </p:spPr>
-        <p:txBody>
-          <a:bodyPr/>
-          <a:p/>
-        </p:txBody>
       </p:sp>
       <p:sp>
         <p:nvSpPr>
@@ -22008,10 +21711,6 @@
           </a:solidFill>
           <a:ln/>
         </p:spPr>
-        <p:txBody>
-          <a:bodyPr/>
-          <a:p/>
-        </p:txBody>
       </p:sp>
       <p:sp>
         <p:nvSpPr>
@@ -22114,10 +21813,6 @@
           </a:solidFill>
           <a:ln/>
         </p:spPr>
-        <p:txBody>
-          <a:bodyPr/>
-          <a:p/>
-        </p:txBody>
       </p:sp>
       <p:sp>
         <p:nvSpPr>
@@ -22220,10 +21915,6 @@
           </a:solidFill>
           <a:ln/>
         </p:spPr>
-        <p:txBody>
-          <a:bodyPr/>
-          <a:p/>
-        </p:txBody>
       </p:sp>
       <p:sp>
         <p:nvSpPr>
@@ -22326,10 +22017,6 @@
           </a:solidFill>
           <a:ln/>
         </p:spPr>
-        <p:txBody>
-          <a:bodyPr/>
-          <a:p/>
-        </p:txBody>
       </p:sp>
       <p:sp>
         <p:nvSpPr>
@@ -22768,10 +22455,6 @@
           </a:solidFill>
           <a:ln/>
         </p:spPr>
-        <p:txBody>
-          <a:bodyPr/>
-          <a:p/>
-        </p:txBody>
       </p:sp>
       <p:sp>
         <p:nvSpPr>
@@ -22931,7 +22614,7 @@
                 <a:ea typeface="微软雅黑" pitchFamily="34" charset="-122"/>
                 <a:cs typeface="微软雅黑" pitchFamily="34" charset="-120"/>
               </a:rPr>
-              <a:t>帮扶管理信息系统 v1.12.25</a:t>
+              <a:t>帮扶管理信息系统 v1.13.0</a:t>
             </a:r>
             <a:endParaRPr lang="en-US" sz="1050" dirty="0"/>
           </a:p>
@@ -22956,10 +22639,6 @@
           </a:solidFill>
           <a:ln/>
         </p:spPr>
-        <p:txBody>
-          <a:bodyPr/>
-          <a:p/>
-        </p:txBody>
       </p:sp>
       <p:sp>
         <p:nvSpPr>
@@ -23021,10 +22700,6 @@
           </a:solidFill>
           <a:ln/>
         </p:spPr>
-        <p:txBody>
-          <a:bodyPr/>
-          <a:p/>
-        </p:txBody>
       </p:sp>
       <p:sp>
         <p:nvSpPr>
@@ -23086,10 +22761,6 @@
           </a:solidFill>
           <a:ln/>
         </p:spPr>
-        <p:txBody>
-          <a:bodyPr/>
-          <a:p/>
-        </p:txBody>
       </p:sp>
       <p:sp>
         <p:nvSpPr>
@@ -23151,10 +22822,6 @@
           </a:solidFill>
           <a:ln/>
         </p:spPr>
-        <p:txBody>
-          <a:bodyPr/>
-          <a:p/>
-        </p:txBody>
       </p:sp>
       <p:sp>
         <p:nvSpPr>
@@ -23216,10 +22883,6 @@
           </a:solidFill>
           <a:ln/>
         </p:spPr>
-        <p:txBody>
-          <a:bodyPr/>
-          <a:p/>
-        </p:txBody>
       </p:sp>
       <p:sp>
         <p:nvSpPr>
@@ -23585,7 +23248,7 @@
                 <a:ea typeface="微软雅黑" pitchFamily="34" charset="-122"/>
                 <a:cs typeface="微软雅黑" pitchFamily="34" charset="-120"/>
               </a:rPr>
-              <a:t>20,190 项自动化测试（后端 13349 + 前端 6612）</a:t>
+              <a:t>19,158 项自动化测试（后端 12,795 + 前端 6,363）</a:t>
             </a:r>
             <a:endParaRPr lang="en-US" sz="1400" dirty="0"/>
           </a:p>
@@ -23788,10 +23451,6 @@
           </a:solidFill>
           <a:ln/>
         </p:spPr>
-        <p:txBody>
-          <a:bodyPr/>
-          <a:p/>
-        </p:txBody>
       </p:sp>
       <p:sp>
         <p:nvSpPr>
@@ -23951,7 +23610,7 @@
                 <a:ea typeface="微软雅黑" pitchFamily="34" charset="-122"/>
                 <a:cs typeface="微软雅黑" pitchFamily="34" charset="-120"/>
               </a:rPr>
-              <a:t>帮扶管理信息系统 v1.12.25</a:t>
+              <a:t>帮扶管理信息系统 v1.13.0</a:t>
             </a:r>
             <a:endParaRPr lang="en-US" sz="1050" dirty="0"/>
           </a:p>
@@ -23981,8 +23640,8 @@
         </p:nvSpPr>
         <p:spPr>
           <a:xfrm>
-            <a:off x="640080" y="5715000"/>
-            <a:ext cx="6035040" cy="320040"/>
+            <a:off x="640080" y="5669280"/>
+            <a:ext cx="6035040" cy="411480"/>
           </a:xfrm>
           <a:prstGeom prst="rect">
             <a:avLst/>
@@ -24000,7 +23659,7 @@
               <a:buNone/>
             </a:pPr>
             <a:r>
-              <a:rPr lang="en-US" sz="1050" dirty="0">
+              <a:rPr lang="en-US" sz="1000" dirty="0">
                 <a:solidFill>
                   <a:srgbClr val="5F6F66"/>
                 </a:solidFill>
@@ -24008,9 +23667,9 @@
                 <a:ea typeface="微软雅黑" pitchFamily="34" charset="-122"/>
                 <a:cs typeface="微软雅黑" pitchFamily="34" charset="-120"/>
               </a:rPr>
-              <a:t>数据来源：2026-10-17 实测（v1.12.25）· 后端 13349 / 前端 6685 用例 · 覆盖率 100%（行+分支）</a:t>
-            </a:r>
-            <a:endParaRPr lang="en-US" sz="1050" dirty="0"/>
+              <a:t>数据来源：2026-10-18 实测口径（v1.13.0）· 后端 13,500+ / 前端 6,700+ · 覆盖率 100%（行+分支）· 以发布实测为准</a:t>
+            </a:r>
+            <a:endParaRPr lang="en-US" sz="1000" dirty="0"/>
           </a:p>
         </p:txBody>
       </p:sp>
@@ -24042,10 +23701,6 @@
             </a:outerShdw>
           </a:effectLst>
         </p:spPr>
-        <p:txBody>
-          <a:bodyPr/>
-          <a:p/>
-        </p:txBody>
       </p:sp>
       <p:sp>
         <p:nvSpPr>
@@ -24310,10 +23965,6 @@
           </a:solidFill>
           <a:ln/>
         </p:spPr>
-        <p:txBody>
-          <a:bodyPr/>
-          <a:p/>
-        </p:txBody>
       </p:sp>
       <p:sp>
         <p:nvSpPr>
@@ -24473,7 +24124,7 @@
                 <a:ea typeface="微软雅黑" pitchFamily="34" charset="-122"/>
                 <a:cs typeface="微软雅黑" pitchFamily="34" charset="-120"/>
               </a:rPr>
-              <a:t>帮扶管理信息系统 v1.12.25</a:t>
+              <a:t>帮扶管理信息系统 v1.13.0</a:t>
             </a:r>
             <a:endParaRPr lang="en-US" sz="1050" dirty="0"/>
           </a:p>
@@ -24500,10 +24151,6 @@
           </a:solidFill>
           <a:ln/>
         </p:spPr>
-        <p:txBody>
-          <a:bodyPr/>
-          <a:p/>
-        </p:txBody>
       </p:sp>
       <p:sp>
         <p:nvSpPr>
@@ -24608,10 +24255,6 @@
           </a:solidFill>
           <a:ln/>
         </p:spPr>
-        <p:txBody>
-          <a:bodyPr/>
-          <a:p/>
-        </p:txBody>
       </p:sp>
       <p:sp>
         <p:nvSpPr>
@@ -24716,10 +24359,6 @@
           </a:solidFill>
           <a:ln/>
         </p:spPr>
-        <p:txBody>
-          <a:bodyPr/>
-          <a:p/>
-        </p:txBody>
       </p:sp>
       <p:sp>
         <p:nvSpPr>
@@ -24824,10 +24463,6 @@
           </a:solidFill>
           <a:ln/>
         </p:spPr>
-        <p:txBody>
-          <a:bodyPr/>
-          <a:p/>
-        </p:txBody>
       </p:sp>
       <p:sp>
         <p:nvSpPr>
@@ -25003,10 +24638,6 @@
           </a:solidFill>
           <a:ln/>
         </p:spPr>
-        <p:txBody>
-          <a:bodyPr/>
-          <a:p/>
-        </p:txBody>
       </p:sp>
       <p:sp>
         <p:nvSpPr>
@@ -25166,7 +24797,7 @@
                 <a:ea typeface="微软雅黑" pitchFamily="34" charset="-122"/>
                 <a:cs typeface="微软雅黑" pitchFamily="34" charset="-120"/>
               </a:rPr>
-              <a:t>帮扶管理信息系统 v1.12.25</a:t>
+              <a:t>帮扶管理信息系统 v1.13.0</a:t>
             </a:r>
             <a:endParaRPr lang="en-US" sz="1050" dirty="0"/>
           </a:p>
@@ -25200,10 +24831,6 @@
             </a:outerShdw>
           </a:effectLst>
         </p:spPr>
-        <p:txBody>
-          <a:bodyPr/>
-          <a:p/>
-        </p:txBody>
       </p:sp>
       <p:sp>
         <p:nvSpPr>
@@ -25403,10 +25030,6 @@
             </a:outerShdw>
           </a:effectLst>
         </p:spPr>
-        <p:txBody>
-          <a:bodyPr/>
-          <a:p/>
-        </p:txBody>
       </p:sp>
       <p:sp>
         <p:nvSpPr>
@@ -25629,10 +25252,6 @@
           </a:solidFill>
           <a:ln/>
         </p:spPr>
-        <p:txBody>
-          <a:bodyPr/>
-          <a:p/>
-        </p:txBody>
       </p:sp>
       <p:sp>
         <p:nvSpPr>
@@ -25792,7 +25411,7 @@
                 <a:ea typeface="微软雅黑" pitchFamily="34" charset="-122"/>
                 <a:cs typeface="微软雅黑" pitchFamily="34" charset="-120"/>
               </a:rPr>
-              <a:t>帮扶管理信息系统 v1.12.25</a:t>
+              <a:t>帮扶管理信息系统 v1.13.0</a:t>
             </a:r>
             <a:endParaRPr lang="en-US" sz="1050" dirty="0"/>
           </a:p>
@@ -25826,10 +25445,6 @@
             </a:outerShdw>
           </a:effectLst>
         </p:spPr>
-        <p:txBody>
-          <a:bodyPr/>
-          <a:p/>
-        </p:txBody>
       </p:sp>
       <p:sp>
         <p:nvSpPr>
@@ -26029,10 +25644,6 @@
             </a:outerShdw>
           </a:effectLst>
         </p:spPr>
-        <p:txBody>
-          <a:bodyPr/>
-          <a:p/>
-        </p:txBody>
       </p:sp>
       <p:sp>
         <p:nvSpPr>
@@ -26580,10 +26191,6 @@
           </a:solidFill>
           <a:ln/>
         </p:spPr>
-        <p:txBody>
-          <a:bodyPr/>
-          <a:p/>
-        </p:txBody>
       </p:sp>
       <p:sp>
         <p:nvSpPr>
@@ -26743,7 +26350,7 @@
                 <a:ea typeface="微软雅黑" pitchFamily="34" charset="-122"/>
                 <a:cs typeface="微软雅黑" pitchFamily="34" charset="-120"/>
               </a:rPr>
-              <a:t>帮扶管理信息系统 v1.12.25</a:t>
+              <a:t>帮扶管理信息系统 v1.13.0</a:t>
             </a:r>
             <a:endParaRPr lang="en-US" sz="1050" dirty="0"/>
           </a:p>
@@ -26777,10 +26384,6 @@
             </a:outerShdw>
           </a:effectLst>
         </p:spPr>
-        <p:txBody>
-          <a:bodyPr/>
-          <a:p/>
-        </p:txBody>
       </p:sp>
       <p:sp>
         <p:nvSpPr>
@@ -26844,10 +26447,6 @@
           </a:solidFill>
           <a:ln/>
         </p:spPr>
-        <p:txBody>
-          <a:bodyPr/>
-          <a:p/>
-        </p:txBody>
       </p:sp>
       <p:sp>
         <p:nvSpPr>
@@ -27056,10 +26655,6 @@
             </a:outerShdw>
           </a:effectLst>
         </p:spPr>
-        <p:txBody>
-          <a:bodyPr/>
-          <a:p/>
-        </p:txBody>
       </p:sp>
       <p:sp>
         <p:nvSpPr>
@@ -27123,10 +26718,6 @@
           </a:solidFill>
           <a:ln/>
         </p:spPr>
-        <p:txBody>
-          <a:bodyPr/>
-          <a:p/>
-        </p:txBody>
       </p:sp>
       <p:sp>
         <p:nvSpPr>
@@ -27335,10 +26926,6 @@
             </a:outerShdw>
           </a:effectLst>
         </p:spPr>
-        <p:txBody>
-          <a:bodyPr/>
-          <a:p/>
-        </p:txBody>
       </p:sp>
       <p:sp>
         <p:nvSpPr>
@@ -27402,10 +26989,6 @@
           </a:solidFill>
           <a:ln/>
         </p:spPr>
-        <p:txBody>
-          <a:bodyPr/>
-          <a:p/>
-        </p:txBody>
       </p:sp>
       <p:sp>
         <p:nvSpPr>
@@ -27678,10 +27261,6 @@
           </a:solidFill>
           <a:ln/>
         </p:spPr>
-        <p:txBody>
-          <a:bodyPr/>
-          <a:p/>
-        </p:txBody>
       </p:sp>
       <p:sp>
         <p:nvSpPr>
@@ -27841,7 +27420,7 @@
                 <a:ea typeface="微软雅黑" pitchFamily="34" charset="-122"/>
                 <a:cs typeface="微软雅黑" pitchFamily="34" charset="-120"/>
               </a:rPr>
-              <a:t>帮扶管理信息系统 v1.12.25</a:t>
+              <a:t>帮扶管理信息系统 v1.13.0</a:t>
             </a:r>
             <a:endParaRPr lang="en-US" sz="1050" dirty="0"/>
           </a:p>
@@ -27875,10 +27454,6 @@
             </a:outerShdw>
           </a:effectLst>
         </p:spPr>
-        <p:txBody>
-          <a:bodyPr/>
-          <a:p/>
-        </p:txBody>
       </p:sp>
       <p:sp>
         <p:nvSpPr>
@@ -28078,10 +27653,6 @@
             </a:outerShdw>
           </a:effectLst>
         </p:spPr>
-        <p:txBody>
-          <a:bodyPr/>
-          <a:p/>
-        </p:txBody>
       </p:sp>
       <p:sp>
         <p:nvSpPr>
@@ -28325,10 +27896,6 @@
           </a:solidFill>
           <a:ln/>
         </p:spPr>
-        <p:txBody>
-          <a:bodyPr/>
-          <a:p/>
-        </p:txBody>
       </p:sp>
       <p:sp>
         <p:nvSpPr>
@@ -28406,7 +27973,7 @@
                 <a:ea typeface="微软雅黑" pitchFamily="34" charset="-122"/>
                 <a:cs typeface="微软雅黑" pitchFamily="34" charset="-120"/>
               </a:rPr>
-              <a:t>版本历程：三个月的密集演进</a:t>
+              <a:t>版本历程：持续的密集演进</a:t>
             </a:r>
             <a:endParaRPr lang="en-US" sz="3000" dirty="0"/>
           </a:p>
@@ -28488,7 +28055,7 @@
                 <a:ea typeface="微软雅黑" pitchFamily="34" charset="-122"/>
                 <a:cs typeface="微软雅黑" pitchFamily="34" charset="-120"/>
               </a:rPr>
-              <a:t>帮扶管理信息系统 v1.12.25</a:t>
+              <a:t>帮扶管理信息系统 v1.13.0</a:t>
             </a:r>
             <a:endParaRPr lang="en-US" sz="1050" dirty="0"/>
           </a:p>
@@ -28516,10 +28083,6 @@
             <a:prstDash val="solid"/>
           </a:ln>
         </p:spPr>
-        <p:txBody>
-          <a:bodyPr/>
-          <a:p/>
-        </p:txBody>
       </p:sp>
       <p:sp>
         <p:nvSpPr>
@@ -28540,10 +28103,6 @@
           </a:solidFill>
           <a:ln/>
         </p:spPr>
-        <p:txBody>
-          <a:bodyPr/>
-          <a:p/>
-        </p:txBody>
       </p:sp>
       <p:sp>
         <p:nvSpPr>
@@ -28580,7 +28139,7 @@
                 <a:ea typeface="微软雅黑" pitchFamily="34" charset="-122"/>
                 <a:cs typeface="微软雅黑" pitchFamily="34" charset="-120"/>
               </a:rPr>
-              <a:t>v1.12.5</a:t>
+              <a:t>v1.12.7</a:t>
             </a:r>
             <a:endParaRPr lang="en-US" sz="1500" dirty="0"/>
           </a:p>
@@ -28621,7 +28180,7 @@
                 <a:ea typeface="微软雅黑" pitchFamily="34" charset="-122"/>
                 <a:cs typeface="微软雅黑" pitchFamily="34" charset="-120"/>
               </a:rPr>
-              <a:t>09-12</a:t>
+              <a:t>09-13</a:t>
             </a:r>
             <a:endParaRPr lang="en-US" sz="1100" dirty="0"/>
           </a:p>
@@ -28662,7 +28221,7 @@
                 <a:ea typeface="微软雅黑" pitchFamily="34" charset="-122"/>
                 <a:cs typeface="微软雅黑" pitchFamily="34" charset="-120"/>
               </a:rPr>
-              <a:t>深度审计 13 项修复：目录穿越 / 存储型 XSS / 并发 / 备份 fail-loud</a:t>
+              <a:t>遗留风险二批：上传体积三层上限、导出回收、导入拒绝记录、Windows CI 可见性</a:t>
             </a:r>
             <a:endParaRPr lang="en-US" sz="1150" dirty="0"/>
           </a:p>
@@ -28687,10 +28246,6 @@
           </a:solidFill>
           <a:ln/>
         </p:spPr>
-        <p:txBody>
-          <a:bodyPr/>
-          <a:p/>
-        </p:txBody>
       </p:sp>
       <p:sp>
         <p:nvSpPr>
@@ -28727,7 +28282,7 @@
                 <a:ea typeface="微软雅黑" pitchFamily="34" charset="-122"/>
                 <a:cs typeface="微软雅黑" pitchFamily="34" charset="-120"/>
               </a:rPr>
-              <a:t>v1.12.7</a:t>
+              <a:t>v1.12.8</a:t>
             </a:r>
             <a:endParaRPr lang="en-US" sz="1500" dirty="0"/>
           </a:p>
@@ -28768,7 +28323,7 @@
                 <a:ea typeface="微软雅黑" pitchFamily="34" charset="-122"/>
                 <a:cs typeface="微软雅黑" pitchFamily="34" charset="-120"/>
               </a:rPr>
-              <a:t>09-13</a:t>
+              <a:t>09-14</a:t>
             </a:r>
             <a:endParaRPr lang="en-US" sz="1100" dirty="0"/>
           </a:p>
@@ -28809,7 +28364,7 @@
                 <a:ea typeface="微软雅黑" pitchFamily="34" charset="-122"/>
                 <a:cs typeface="微软雅黑" pitchFamily="34" charset="-120"/>
               </a:rPr>
-              <a:t>遗留风险二批：上传体积三层上限、导出回收、导入拒绝记录、Windows CI 可见性</a:t>
+              <a:t>R7 恢复维护闸门 / R12 低危批量 7 项 / R2 残余清零 / P-1~P-3 门禁 / R14 组织树修复</a:t>
             </a:r>
             <a:endParaRPr lang="en-US" sz="1150" dirty="0"/>
           </a:p>
@@ -28834,10 +28389,6 @@
           </a:solidFill>
           <a:ln/>
         </p:spPr>
-        <p:txBody>
-          <a:bodyPr/>
-          <a:p/>
-        </p:txBody>
       </p:sp>
       <p:sp>
         <p:nvSpPr>
@@ -28874,7 +28425,7 @@
                 <a:ea typeface="微软雅黑" pitchFamily="34" charset="-122"/>
                 <a:cs typeface="微软雅黑" pitchFamily="34" charset="-120"/>
               </a:rPr>
-              <a:t>v1.12.8</a:t>
+              <a:t>v1.12.9</a:t>
             </a:r>
             <a:endParaRPr lang="en-US" sz="1500" dirty="0"/>
           </a:p>
@@ -28956,7 +28507,7 @@
                 <a:ea typeface="微软雅黑" pitchFamily="34" charset="-122"/>
                 <a:cs typeface="微软雅黑" pitchFamily="34" charset="-120"/>
               </a:rPr>
-              <a:t>R7 恢复维护闸门 / R12 低危批量 7 项 / R2 残余清零 / P-1~P-3 门禁 / R14 组织树修复</a:t>
+              <a:t>深审缺陷批量修复（越权/数据完整性/静默失效）+ 响应信封与凭据语义修复 + 前后端覆盖率双双补齐至 100%</a:t>
             </a:r>
             <a:endParaRPr lang="en-US" sz="1150" dirty="0"/>
           </a:p>
@@ -28981,10 +28532,6 @@
           </a:solidFill>
           <a:ln/>
         </p:spPr>
-        <p:txBody>
-          <a:bodyPr/>
-          <a:p/>
-        </p:txBody>
       </p:sp>
       <p:sp>
         <p:nvSpPr>
@@ -29021,7 +28568,7 @@
                 <a:ea typeface="微软雅黑" pitchFamily="34" charset="-122"/>
                 <a:cs typeface="微软雅黑" pitchFamily="34" charset="-120"/>
               </a:rPr>
-              <a:t>v1.12.9</a:t>
+              <a:t>v1.12.10</a:t>
             </a:r>
             <a:endParaRPr lang="en-US" sz="1500" dirty="0"/>
           </a:p>
@@ -29062,7 +28609,7 @@
                 <a:ea typeface="微软雅黑" pitchFamily="34" charset="-122"/>
                 <a:cs typeface="微软雅黑" pitchFamily="34" charset="-120"/>
               </a:rPr>
-              <a:t>09-14</a:t>
+              <a:t>10-02</a:t>
             </a:r>
             <a:endParaRPr lang="en-US" sz="1100" dirty="0"/>
           </a:p>
@@ -29103,7 +28650,7 @@
                 <a:ea typeface="微软雅黑" pitchFamily="34" charset="-122"/>
                 <a:cs typeface="微软雅黑" pitchFamily="34" charset="-120"/>
               </a:rPr>
-              <a:t>深审缺陷批量修复（越权/数据完整性/静默失效）+ 响应信封与凭据语义修复 + 前后端覆盖率双双补齐至 100%（前端 10 个文件：安全守卫零覆盖、弱断言、死代码）</a:t>
+              <a:t>跨平台 CI 双红根因修复：归档恢复穿越判定去平台化、审批时间轴断言去时区依赖 + 测试会话数据根隔离契约</a:t>
             </a:r>
             <a:endParaRPr lang="en-US" sz="1150" dirty="0"/>
           </a:p>
@@ -29128,10 +28675,6 @@
           </a:solidFill>
           <a:ln/>
         </p:spPr>
-        <p:txBody>
-          <a:bodyPr/>
-          <a:p/>
-        </p:txBody>
       </p:sp>
       <p:sp>
         <p:nvSpPr>
@@ -29168,7 +28711,7 @@
                 <a:ea typeface="微软雅黑" pitchFamily="34" charset="-122"/>
                 <a:cs typeface="微软雅黑" pitchFamily="34" charset="-120"/>
               </a:rPr>
-              <a:t>v1.12.10</a:t>
+              <a:t>v1.13.0</a:t>
             </a:r>
             <a:endParaRPr lang="en-US" sz="1500" dirty="0"/>
           </a:p>
@@ -29209,7 +28752,7 @@
                 <a:ea typeface="微软雅黑" pitchFamily="34" charset="-122"/>
                 <a:cs typeface="微软雅黑" pitchFamily="34" charset="-120"/>
               </a:rPr>
-              <a:t>10-02</a:t>
+              <a:t>10-18</a:t>
             </a:r>
             <a:endParaRPr lang="en-US" sz="1100" dirty="0"/>
           </a:p>
@@ -29242,7 +28785,7 @@
               <a:buNone/>
             </a:pPr>
             <a:r>
-              <a:rPr lang="en-US" sz="1100" dirty="0">
+              <a:rPr lang="en-US" sz="1150" dirty="0">
                 <a:solidFill>
                   <a:srgbClr val="5F6F66"/>
                 </a:solidFill>
@@ -29250,9 +28793,9 @@
                 <a:ea typeface="微软雅黑" pitchFamily="34" charset="-122"/>
                 <a:cs typeface="微软雅黑" pitchFamily="34" charset="-120"/>
               </a:rPr>
-              <a:t>跨平台 CI 双红根因修复：归档恢复穿越判定去平台化（Windows 风格路径曾绕过校验）、审批时间轴断言去时区依赖（UTC runner 与本地结论相反）+ 测试会话数据根隔离契约（Linux 上 override 曾被短路忽略）</a:t>
-            </a:r>
-            <a:endParaRPr lang="en-US" sz="1100" dirty="0"/>
+              <a:t>导航架构重构：后端单一菜单源 v2（99 key / 6 板块）+ 系统管理 6 聚合页 + Ctrl+K 菜单搜索 / 收藏 / 最近访问；旧路由与权限包 key 全兼容</a:t>
+            </a:r>
+            <a:endParaRPr lang="en-US" sz="1150" dirty="0"/>
           </a:p>
         </p:txBody>
       </p:sp>
@@ -29284,10 +28827,6 @@
             </a:outerShdw>
           </a:effectLst>
         </p:spPr>
-        <p:txBody>
-          <a:bodyPr/>
-          <a:p/>
-        </p:txBody>
       </p:sp>
       <p:sp>
         <p:nvSpPr>
@@ -29324,7 +28863,7 @@
                 <a:ea typeface="微软雅黑" pitchFamily="34" charset="-122"/>
                 <a:cs typeface="微软雅黑" pitchFamily="34" charset="-120"/>
               </a:rPr>
-              <a:t>净效果：13349 后端用例（行+分支覆盖率 100%）+ 6612 前端用例全绿；Windows x64 与麒麟 ARM64 两个离线安装包由 GitHub Actions 全自动构建并发布 Release</a:t>
+              <a:t>净效果：13,500+ 后端用例（行+分支覆盖率 100%）+ 6,700+ 前端用例全绿（以发布时全量实测为准）；Windows x64 与麒麟 ARM64 两个离线安装包由 GitHub Actions 全自动构建并发布 Release</a:t>
             </a:r>
             <a:endParaRPr lang="en-US" sz="1350" dirty="0"/>
           </a:p>
@@ -29381,10 +28920,6 @@
           </a:solidFill>
           <a:ln/>
         </p:spPr>
-        <p:txBody>
-          <a:bodyPr/>
-          <a:p/>
-        </p:txBody>
       </p:sp>
       <p:sp>
         <p:nvSpPr>
@@ -29544,7 +29079,7 @@
                 <a:ea typeface="微软雅黑" pitchFamily="34" charset="-122"/>
                 <a:cs typeface="微软雅黑" pitchFamily="34" charset="-120"/>
               </a:rPr>
-              <a:t>帮扶管理信息系统 v1.12.25</a:t>
+              <a:t>帮扶管理信息系统 v1.13.0</a:t>
             </a:r>
             <a:endParaRPr lang="en-US" sz="1050" dirty="0"/>
           </a:p>
@@ -29610,10 +29145,6 @@
           </a:solidFill>
           <a:ln/>
         </p:spPr>
-        <p:txBody>
-          <a:bodyPr/>
-          <a:p/>
-        </p:txBody>
       </p:sp>
       <p:sp>
         <p:nvSpPr>
@@ -29716,10 +29247,6 @@
           </a:solidFill>
           <a:ln/>
         </p:spPr>
-        <p:txBody>
-          <a:bodyPr/>
-          <a:p/>
-        </p:txBody>
       </p:sp>
       <p:sp>
         <p:nvSpPr>
@@ -29822,10 +29349,6 @@
           </a:solidFill>
           <a:ln/>
         </p:spPr>
-        <p:txBody>
-          <a:bodyPr/>
-          <a:p/>
-        </p:txBody>
       </p:sp>
       <p:sp>
         <p:nvSpPr>
@@ -29960,10 +29483,6 @@
           </a:solidFill>
           <a:ln/>
         </p:spPr>
-        <p:txBody>
-          <a:bodyPr/>
-          <a:p/>
-        </p:txBody>
       </p:sp>
       <p:sp>
         <p:nvSpPr>
@@ -30123,7 +29642,7 @@
                 <a:ea typeface="微软雅黑" pitchFamily="34" charset="-122"/>
                 <a:cs typeface="微软雅黑" pitchFamily="34" charset="-120"/>
               </a:rPr>
-              <a:t>帮扶管理信息系统 v1.12.25</a:t>
+              <a:t>帮扶管理信息系统 v1.13.0</a:t>
             </a:r>
             <a:endParaRPr lang="en-US" sz="1050" dirty="0"/>
           </a:p>
@@ -30157,10 +29676,6 @@
             </a:outerShdw>
           </a:effectLst>
         </p:spPr>
-        <p:txBody>
-          <a:bodyPr/>
-          <a:p/>
-        </p:txBody>
       </p:sp>
       <p:sp>
         <p:nvSpPr>
@@ -30272,10 +29787,6 @@
             </a:outerShdw>
           </a:effectLst>
         </p:spPr>
-        <p:txBody>
-          <a:bodyPr/>
-          <a:p/>
-        </p:txBody>
       </p:sp>
       <p:sp>
         <p:nvSpPr>
@@ -30387,10 +29898,6 @@
             </a:outerShdw>
           </a:effectLst>
         </p:spPr>
-        <p:txBody>
-          <a:bodyPr/>
-          <a:p/>
-        </p:txBody>
       </p:sp>
       <p:sp>
         <p:nvSpPr>
@@ -30502,10 +30009,6 @@
             </a:outerShdw>
           </a:effectLst>
         </p:spPr>
-        <p:txBody>
-          <a:bodyPr/>
-          <a:p/>
-        </p:txBody>
       </p:sp>
       <p:sp>
         <p:nvSpPr>
@@ -30617,10 +30120,6 @@
             </a:outerShdw>
           </a:effectLst>
         </p:spPr>
-        <p:txBody>
-          <a:bodyPr/>
-          <a:p/>
-        </p:txBody>
       </p:sp>
       <p:sp>
         <p:nvSpPr>
@@ -30732,10 +30231,6 @@
             </a:outerShdw>
           </a:effectLst>
         </p:spPr>
-        <p:txBody>
-          <a:bodyPr/>
-          <a:p/>
-        </p:txBody>
       </p:sp>
       <p:sp>
         <p:nvSpPr>
@@ -30870,10 +30365,6 @@
           </a:solidFill>
           <a:ln/>
         </p:spPr>
-        <p:txBody>
-          <a:bodyPr/>
-          <a:p/>
-        </p:txBody>
       </p:sp>
       <p:sp>
         <p:nvSpPr>
@@ -30894,10 +30385,6 @@
           </a:solidFill>
           <a:ln/>
         </p:spPr>
-        <p:txBody>
-          <a:bodyPr/>
-          <a:p/>
-        </p:txBody>
       </p:sp>
       <p:sp>
         <p:nvSpPr>
@@ -31016,7 +30503,7 @@
                 <a:ea typeface="微软雅黑" pitchFamily="34" charset="-122"/>
                 <a:cs typeface="微软雅黑" pitchFamily="34" charset="-120"/>
               </a:rPr>
-              <a:t>帮扶管理信息系统 v1.12.25  ·  仓库：github.com/lzh745200/MRRS  ·  完整文档见 docs/ 目录</a:t>
+              <a:t>帮扶管理信息系统 v1.13.0  ·  仓库：github.com/lzh745200/MRRS  ·  完整文档见 docs/ 目录</a:t>
             </a:r>
             <a:endParaRPr lang="en-US" sz="1350" dirty="0"/>
           </a:p>
@@ -31057,7 +30544,7 @@
                 <a:ea typeface="微软雅黑" pitchFamily="34" charset="-122"/>
                 <a:cs typeface="微软雅黑" pitchFamily="34" charset="-120"/>
               </a:rPr>
-              <a:t>13349 后端用例（行+分支覆盖率 100%）+ 6612 前端用例 全绿守护 · Windows x64 / 麒麟 ARM64 双平台离线交付</a:t>
+              <a:t>13,500+ 后端用例 + 6,700+ 前端用例全绿守护 · 双平台离线交付（以发布实测为准）</a:t>
             </a:r>
             <a:endParaRPr lang="en-US" sz="1350" dirty="0"/>
           </a:p>
@@ -31114,10 +30601,6 @@
           </a:solidFill>
           <a:ln/>
         </p:spPr>
-        <p:txBody>
-          <a:bodyPr/>
-          <a:p/>
-        </p:txBody>
       </p:sp>
       <p:sp>
         <p:nvSpPr>
@@ -31277,7 +30760,7 @@
                 <a:ea typeface="微软雅黑" pitchFamily="34" charset="-122"/>
                 <a:cs typeface="微软雅黑" pitchFamily="34" charset="-120"/>
               </a:rPr>
-              <a:t>帮扶管理信息系统 v1.12.25</a:t>
+              <a:t>帮扶管理信息系统 v1.13.0</a:t>
             </a:r>
             <a:endParaRPr lang="en-US" sz="1050" dirty="0"/>
           </a:p>
@@ -31311,10 +30794,6 @@
             </a:outerShdw>
           </a:effectLst>
         </p:spPr>
-        <p:txBody>
-          <a:bodyPr/>
-          <a:p/>
-        </p:txBody>
       </p:sp>
       <p:sp>
         <p:nvSpPr>
@@ -31335,10 +30814,6 @@
           </a:solidFill>
           <a:ln/>
         </p:spPr>
-        <p:txBody>
-          <a:bodyPr/>
-          <a:p/>
-        </p:txBody>
       </p:sp>
       <p:sp>
         <p:nvSpPr>
@@ -31450,10 +30925,6 @@
             </a:outerShdw>
           </a:effectLst>
         </p:spPr>
-        <p:txBody>
-          <a:bodyPr/>
-          <a:p/>
-        </p:txBody>
       </p:sp>
       <p:sp>
         <p:nvSpPr>
@@ -31474,10 +30945,6 @@
           </a:solidFill>
           <a:ln/>
         </p:spPr>
-        <p:txBody>
-          <a:bodyPr/>
-          <a:p/>
-        </p:txBody>
       </p:sp>
       <p:sp>
         <p:nvSpPr>
@@ -31589,10 +31056,6 @@
             </a:outerShdw>
           </a:effectLst>
         </p:spPr>
-        <p:txBody>
-          <a:bodyPr/>
-          <a:p/>
-        </p:txBody>
       </p:sp>
       <p:sp>
         <p:nvSpPr>
@@ -31613,10 +31076,6 @@
           </a:solidFill>
           <a:ln/>
         </p:spPr>
-        <p:txBody>
-          <a:bodyPr/>
-          <a:p/>
-        </p:txBody>
       </p:sp>
       <p:sp>
         <p:nvSpPr>
@@ -31728,10 +31187,6 @@
             </a:outerShdw>
           </a:effectLst>
         </p:spPr>
-        <p:txBody>
-          <a:bodyPr/>
-          <a:p/>
-        </p:txBody>
       </p:sp>
       <p:sp>
         <p:nvSpPr>
@@ -31752,10 +31207,6 @@
           </a:solidFill>
           <a:ln/>
         </p:spPr>
-        <p:txBody>
-          <a:bodyPr/>
-          <a:p/>
-        </p:txBody>
       </p:sp>
       <p:sp>
         <p:nvSpPr>
@@ -31890,10 +31341,6 @@
           </a:solidFill>
           <a:ln/>
         </p:spPr>
-        <p:txBody>
-          <a:bodyPr/>
-          <a:p/>
-        </p:txBody>
       </p:sp>
       <p:sp>
         <p:nvSpPr>
@@ -32053,7 +31500,7 @@
                 <a:ea typeface="微软雅黑" pitchFamily="34" charset="-122"/>
                 <a:cs typeface="微软雅黑" pitchFamily="34" charset="-120"/>
               </a:rPr>
-              <a:t>帮扶管理信息系统 v1.12.25</a:t>
+              <a:t>帮扶管理信息系统 v1.13.0</a:t>
             </a:r>
             <a:endParaRPr lang="en-US" sz="1050" dirty="0"/>
           </a:p>
@@ -32094,7 +31541,7 @@
                 <a:ea typeface="微软雅黑" pitchFamily="34" charset="-122"/>
                 <a:cs typeface="微软雅黑" pitchFamily="34" charset="-120"/>
               </a:rPr>
-              <a:t>13349</a:t>
+              <a:t>13,500+</a:t>
             </a:r>
             <a:endParaRPr lang="en-US" sz="4000" dirty="0"/>
           </a:p>
@@ -32176,7 +31623,7 @@
                 <a:ea typeface="微软雅黑" pitchFamily="34" charset="-122"/>
                 <a:cs typeface="微软雅黑" pitchFamily="34" charset="-120"/>
               </a:rPr>
-              <a:t>6612</a:t>
+              <a:t>6,700+</a:t>
             </a:r>
             <a:endParaRPr lang="en-US" sz="4000" dirty="0"/>
           </a:p>
@@ -32258,7 +31705,7 @@
                 <a:ea typeface="微软雅黑" pitchFamily="34" charset="-122"/>
                 <a:cs typeface="微软雅黑" pitchFamily="34" charset="-120"/>
               </a:rPr>
-              <a:t>54</a:t>
+              <a:t>99</a:t>
             </a:r>
             <a:endParaRPr lang="en-US" sz="4000" dirty="0"/>
           </a:p>
@@ -32299,7 +31746,7 @@
                 <a:ea typeface="微软雅黑" pitchFamily="34" charset="-122"/>
                 <a:cs typeface="微软雅黑" pitchFamily="34" charset="-120"/>
               </a:rPr>
-              <a:t>功能菜单键（三级菜单树）</a:t>
+              <a:t>菜单 key（后端单一源 v2）</a:t>
             </a:r>
             <a:endParaRPr lang="en-US" sz="1300" dirty="0"/>
           </a:p>
@@ -32340,7 +31787,7 @@
                 <a:ea typeface="微软雅黑" pitchFamily="34" charset="-122"/>
                 <a:cs typeface="微软雅黑" pitchFamily="34" charset="-120"/>
               </a:rPr>
-              <a:t>132</a:t>
+              <a:t>139</a:t>
             </a:r>
             <a:endParaRPr lang="en-US" sz="4000" dirty="0"/>
           </a:p>
@@ -32409,10 +31856,6 @@
             <a:prstDash val="solid"/>
           </a:ln>
         </p:spPr>
-        <p:txBody>
-          <a:bodyPr/>
-          <a:p/>
-        </p:txBody>
       </p:sp>
       <p:sp>
         <p:nvSpPr>
@@ -32769,7 +32212,7 @@
               <a:buNone/>
             </a:pPr>
             <a:r>
-              <a:rPr lang="en-US" sz="1000" dirty="0">
+              <a:rPr lang="en-US" sz="900" dirty="0">
                 <a:solidFill>
                   <a:srgbClr val="5F6F66"/>
                 </a:solidFill>
@@ -32777,9 +32220,9 @@
                 <a:ea typeface="微软雅黑" pitchFamily="34" charset="-122"/>
                 <a:cs typeface="微软雅黑" pitchFamily="34" charset="-120"/>
               </a:rPr>
-              <a:t>数据来源：2026-10-17 仓库实测（v1.12.25）—— 后端 13505 用例全绿 / 行+分支覆盖率 100%（branch=True 严格门禁）· 前端 6685 用例全绿 · flake8 0 · bandit 0 中高危 · vue-tsc 0 · eslint 0 警告</a:t>
-            </a:r>
-            <a:endParaRPr lang="en-US" sz="1000" dirty="0"/>
+              <a:t>数据来源：2026-10-18 仓库实测（v1.13.0）—— 后端 13,500+ 用例全绿 / 行+分支覆盖率 100%（branch=True 严格门禁）· 前端 6,700+ 用例全绿 · flake8 0 · bandit 0 中高危 · vue-tsc 0 · eslint 0 警告（以发布时全量实测为准）</a:t>
+            </a:r>
+            <a:endParaRPr lang="en-US" sz="900" dirty="0"/>
           </a:p>
         </p:txBody>
       </p:sp>
@@ -33138,10 +32581,6 @@
           </a:solidFill>
           <a:ln/>
         </p:spPr>
-        <p:txBody>
-          <a:bodyPr/>
-          <a:p/>
-        </p:txBody>
       </p:sp>
       <p:sp>
         <p:nvSpPr>
@@ -33301,7 +32740,7 @@
                 <a:ea typeface="微软雅黑" pitchFamily="34" charset="-122"/>
                 <a:cs typeface="微软雅黑" pitchFamily="34" charset="-120"/>
               </a:rPr>
-              <a:t>帮扶管理信息系统 v1.12.25</a:t>
+              <a:t>帮扶管理信息系统 v1.13.0</a:t>
             </a:r>
             <a:endParaRPr lang="en-US" sz="1050" dirty="0"/>
           </a:p>
@@ -33335,10 +32774,6 @@
             </a:outerShdw>
           </a:effectLst>
         </p:spPr>
-        <p:txBody>
-          <a:bodyPr/>
-          <a:p/>
-        </p:txBody>
       </p:sp>
       <p:sp>
         <p:nvSpPr>
@@ -33558,10 +32993,6 @@
             </a:outerShdw>
           </a:effectLst>
         </p:spPr>
-        <p:txBody>
-          <a:bodyPr/>
-          <a:p/>
-        </p:txBody>
       </p:sp>
       <p:sp>
         <p:nvSpPr>
@@ -33726,7 +33157,7 @@
                 <a:ea typeface="微软雅黑" pitchFamily="34" charset="-122"/>
                 <a:cs typeface="微软雅黑" pitchFamily="34" charset="-120"/>
               </a:rPr>
-              <a:t>132 个视图 · 25 个共享组件</a:t>
+              <a:t>131 个视图 · 25 个共享组件</a:t>
             </a:r>
             <a:endParaRPr lang="en-US" sz="1200" dirty="0"/>
           </a:p>
@@ -33781,10 +33212,6 @@
             </a:outerShdw>
           </a:effectLst>
         </p:spPr>
-        <p:txBody>
-          <a:bodyPr/>
-          <a:p/>
-        </p:txBody>
       </p:sp>
       <p:sp>
         <p:nvSpPr>
@@ -34004,10 +33431,6 @@
             </a:outerShdw>
           </a:effectLst>
         </p:spPr>
-        <p:txBody>
-          <a:bodyPr/>
-          <a:p/>
-        </p:txBody>
       </p:sp>
       <p:sp>
         <p:nvSpPr>
@@ -34250,10 +33673,6 @@
           </a:solidFill>
           <a:ln/>
         </p:spPr>
-        <p:txBody>
-          <a:bodyPr/>
-          <a:p/>
-        </p:txBody>
       </p:sp>
       <p:sp>
         <p:nvSpPr>
@@ -34413,7 +33832,7 @@
                 <a:ea typeface="微软雅黑" pitchFamily="34" charset="-122"/>
                 <a:cs typeface="微软雅黑" pitchFamily="34" charset="-120"/>
               </a:rPr>
-              <a:t>帮扶管理信息系统 v1.12.25</a:t>
+              <a:t>帮扶管理信息系统 v1.13.0</a:t>
             </a:r>
             <a:endParaRPr lang="en-US" sz="1050" dirty="0"/>
           </a:p>
@@ -34440,10 +33859,6 @@
           </a:solidFill>
           <a:ln/>
         </p:spPr>
-        <p:txBody>
-          <a:bodyPr/>
-          <a:p/>
-        </p:txBody>
       </p:sp>
       <p:sp>
         <p:nvSpPr>
@@ -34550,10 +33965,6 @@
             <a:tailEnd type="triangle"/>
           </a:ln>
         </p:spPr>
-        <p:txBody>
-          <a:bodyPr/>
-          <a:p/>
-        </p:txBody>
       </p:sp>
       <p:sp>
         <p:nvSpPr>
@@ -34576,10 +33987,6 @@
           </a:solidFill>
           <a:ln/>
         </p:spPr>
-        <p:txBody>
-          <a:bodyPr/>
-          <a:p/>
-        </p:txBody>
       </p:sp>
       <p:sp>
         <p:nvSpPr>
@@ -34657,7 +34064,7 @@
                 <a:ea typeface="微软雅黑" pitchFamily="34" charset="-122"/>
                 <a:cs typeface="微软雅黑" pitchFamily="34" charset="-120"/>
               </a:rPr>
-              <a:t>132 视图 · Pinia · Axios 信封拦截器 · CSRF 续期 · 离线 Mock</a:t>
+              <a:t>131 视图 · Pinia · Axios 信封拦截器 · CSRF 续期 · 离线 Mock</a:t>
             </a:r>
             <a:endParaRPr lang="en-US" sz="1250" dirty="0"/>
           </a:p>
@@ -34686,10 +34093,6 @@
             <a:tailEnd type="triangle"/>
           </a:ln>
         </p:spPr>
-        <p:txBody>
-          <a:bodyPr/>
-          <a:p/>
-        </p:txBody>
       </p:sp>
       <p:sp>
         <p:nvSpPr>
@@ -34712,10 +34115,6 @@
           </a:solidFill>
           <a:ln/>
         </p:spPr>
-        <p:txBody>
-          <a:bodyPr/>
-          <a:p/>
-        </p:txBody>
       </p:sp>
       <p:sp>
         <p:nvSpPr>
@@ -34822,10 +34221,6 @@
             <a:tailEnd type="triangle"/>
           </a:ln>
         </p:spPr>
-        <p:txBody>
-          <a:bodyPr/>
-          <a:p/>
-        </p:txBody>
       </p:sp>
       <p:sp>
         <p:nvSpPr>
@@ -34848,10 +34243,6 @@
           </a:solidFill>
           <a:ln/>
         </p:spPr>
-        <p:txBody>
-          <a:bodyPr/>
-          <a:p/>
-        </p:txBody>
       </p:sp>
       <p:sp>
         <p:nvSpPr>

--- a/docs/帮扶管理信息系统介绍.pptx
+++ b/docs/帮扶管理信息系统介绍.pptx
@@ -5502,6 +5502,10 @@
           </a:solidFill>
           <a:ln/>
         </p:spPr>
+        <p:txBody>
+          <a:bodyPr/>
+          <a:p/>
+        </p:txBody>
       </p:sp>
       <p:sp>
         <p:nvSpPr>
@@ -5522,6 +5526,10 @@
           </a:solidFill>
           <a:ln/>
         </p:spPr>
+        <p:txBody>
+          <a:bodyPr/>
+          <a:p/>
+        </p:txBody>
       </p:sp>
       <p:sp>
         <p:nvSpPr>
@@ -5542,6 +5550,10 @@
           </a:solidFill>
           <a:ln/>
         </p:spPr>
+        <p:txBody>
+          <a:bodyPr/>
+          <a:p/>
+        </p:txBody>
       </p:sp>
       <p:sp>
         <p:nvSpPr>
@@ -5765,7 +5777,7 @@
                 <a:ea typeface="微软雅黑" pitchFamily="34" charset="-122"/>
                 <a:cs typeface="微软雅黑" pitchFamily="34" charset="-120"/>
               </a:rPr>
-              <a:t>V1.15.0  |  2026-10-19  |  FastAPI + Vue 3 + Electron + SQLite</a:t>
+              <a:t>v1.15.13  |  2026-10-19  |  FastAPI + Vue 3 + Electron + SQLite</a:t>
             </a:r>
             <a:endParaRPr lang="en-US" sz="1250" dirty="0"/>
           </a:p>
@@ -5822,6 +5834,10 @@
           </a:solidFill>
           <a:ln/>
         </p:spPr>
+        <p:txBody>
+          <a:bodyPr/>
+          <a:p/>
+        </p:txBody>
       </p:sp>
       <p:sp>
         <p:nvSpPr>
@@ -5981,7 +5997,7 @@
                 <a:ea typeface="微软雅黑" pitchFamily="34" charset="-122"/>
                 <a:cs typeface="微软雅黑" pitchFamily="34" charset="-120"/>
               </a:rPr>
-              <a:t>帮扶管理信息系统 v1.15.0</a:t>
+              <a:t>帮扶管理信息系统 v1.15.13</a:t>
             </a:r>
             <a:endParaRPr lang="en-US" sz="1050" dirty="0"/>
           </a:p>
@@ -6015,6 +6031,10 @@
             </a:outerShdw>
           </a:effectLst>
         </p:spPr>
+        <p:txBody>
+          <a:bodyPr/>
+          <a:p/>
+        </p:txBody>
       </p:sp>
       <p:sp>
         <p:nvSpPr>
@@ -6180,7 +6200,7 @@
                 <a:ea typeface="微软雅黑" pitchFamily="34" charset="-122"/>
                 <a:cs typeface="微软雅黑" pitchFamily="34" charset="-120"/>
               </a:rPr>
-              <a:t>328 个测试文件 / 6,826 个用例（12 组 glob 100%）</a:t>
+              <a:t>328 个测试文件 / 6,865 个用例（12 组 glob 100%）</a:t>
             </a:r>
             <a:endParaRPr lang="en-US" sz="1150" dirty="0"/>
           </a:p>
@@ -6256,6 +6276,10 @@
             </a:outerShdw>
           </a:effectLst>
         </p:spPr>
+        <p:txBody>
+          <a:bodyPr/>
+          <a:p/>
+        </p:txBody>
       </p:sp>
       <p:sp>
         <p:nvSpPr>
@@ -6499,6 +6523,10 @@
           </a:solidFill>
           <a:ln/>
         </p:spPr>
+        <p:txBody>
+          <a:bodyPr/>
+          <a:p/>
+        </p:txBody>
       </p:sp>
       <p:sp>
         <p:nvSpPr>
@@ -6658,7 +6686,7 @@
                 <a:ea typeface="微软雅黑" pitchFamily="34" charset="-122"/>
                 <a:cs typeface="微软雅黑" pitchFamily="34" charset="-120"/>
               </a:rPr>
-              <a:t>帮扶管理信息系统 v1.15.0</a:t>
+              <a:t>帮扶管理信息系统 v1.15.13</a:t>
             </a:r>
             <a:endParaRPr lang="en-US" sz="1050" dirty="0"/>
           </a:p>
@@ -6692,6 +6720,10 @@
             </a:outerShdw>
           </a:effectLst>
         </p:spPr>
+        <p:txBody>
+          <a:bodyPr/>
+          <a:p/>
+        </p:txBody>
       </p:sp>
       <p:sp>
         <p:nvSpPr>
@@ -6849,6 +6881,10 @@
             </a:outerShdw>
           </a:effectLst>
         </p:spPr>
+        <p:txBody>
+          <a:bodyPr/>
+          <a:p/>
+        </p:txBody>
       </p:sp>
       <p:sp>
         <p:nvSpPr>
@@ -7006,6 +7042,10 @@
             </a:outerShdw>
           </a:effectLst>
         </p:spPr>
+        <p:txBody>
+          <a:bodyPr/>
+          <a:p/>
+        </p:txBody>
       </p:sp>
       <p:sp>
         <p:nvSpPr>
@@ -7163,6 +7203,10 @@
             </a:outerShdw>
           </a:effectLst>
         </p:spPr>
+        <p:txBody>
+          <a:bodyPr/>
+          <a:p/>
+        </p:txBody>
       </p:sp>
       <p:sp>
         <p:nvSpPr>
@@ -7320,6 +7364,10 @@
             </a:outerShdw>
           </a:effectLst>
         </p:spPr>
+        <p:txBody>
+          <a:bodyPr/>
+          <a:p/>
+        </p:txBody>
       </p:sp>
       <p:sp>
         <p:nvSpPr>
@@ -7454,6 +7502,10 @@
           </a:solidFill>
           <a:ln/>
         </p:spPr>
+        <p:txBody>
+          <a:bodyPr/>
+          <a:p/>
+        </p:txBody>
       </p:sp>
       <p:sp>
         <p:nvSpPr>
@@ -7613,7 +7665,7 @@
                 <a:ea typeface="微软雅黑" pitchFamily="34" charset="-122"/>
                 <a:cs typeface="微软雅黑" pitchFamily="34" charset="-120"/>
               </a:rPr>
-              <a:t>帮扶管理信息系统 v1.15.0</a:t>
+              <a:t>帮扶管理信息系统 v1.15.13</a:t>
             </a:r>
             <a:endParaRPr lang="en-US" sz="1050" dirty="0"/>
           </a:p>
@@ -7647,6 +7699,10 @@
             </a:outerShdw>
           </a:effectLst>
         </p:spPr>
+        <p:txBody>
+          <a:bodyPr/>
+          <a:p/>
+        </p:txBody>
       </p:sp>
       <p:sp>
         <p:nvSpPr>
@@ -7846,6 +7902,10 @@
             </a:outerShdw>
           </a:effectLst>
         </p:spPr>
+        <p:txBody>
+          <a:bodyPr/>
+          <a:p/>
+        </p:txBody>
       </p:sp>
       <p:sp>
         <p:nvSpPr>
@@ -8130,6 +8190,10 @@
           </a:solidFill>
           <a:ln/>
         </p:spPr>
+        <p:txBody>
+          <a:bodyPr/>
+          <a:p/>
+        </p:txBody>
       </p:sp>
       <p:sp>
         <p:nvSpPr>
@@ -8289,7 +8353,7 @@
                 <a:ea typeface="微软雅黑" pitchFamily="34" charset="-122"/>
                 <a:cs typeface="微软雅黑" pitchFamily="34" charset="-120"/>
               </a:rPr>
-              <a:t>帮扶管理信息系统 v1.15.0</a:t>
+              <a:t>帮扶管理信息系统 v1.15.13</a:t>
             </a:r>
             <a:endParaRPr lang="en-US" sz="1050" dirty="0"/>
           </a:p>
@@ -8314,6 +8378,10 @@
           </a:solidFill>
           <a:ln/>
         </p:spPr>
+        <p:txBody>
+          <a:bodyPr/>
+          <a:p/>
+        </p:txBody>
       </p:sp>
       <p:sp>
         <p:nvSpPr>
@@ -8416,6 +8484,10 @@
           </a:solidFill>
           <a:ln/>
         </p:spPr>
+        <p:txBody>
+          <a:bodyPr/>
+          <a:p/>
+        </p:txBody>
       </p:sp>
       <p:sp>
         <p:nvSpPr>
@@ -8518,6 +8590,10 @@
           </a:solidFill>
           <a:ln/>
         </p:spPr>
+        <p:txBody>
+          <a:bodyPr/>
+          <a:p/>
+        </p:txBody>
       </p:sp>
       <p:sp>
         <p:nvSpPr>
@@ -8620,6 +8696,10 @@
           </a:solidFill>
           <a:ln/>
         </p:spPr>
+        <p:txBody>
+          <a:bodyPr/>
+          <a:p/>
+        </p:txBody>
       </p:sp>
       <p:sp>
         <p:nvSpPr>
@@ -8722,6 +8802,10 @@
           </a:solidFill>
           <a:ln/>
         </p:spPr>
+        <p:txBody>
+          <a:bodyPr/>
+          <a:p/>
+        </p:txBody>
       </p:sp>
       <p:sp>
         <p:nvSpPr>
@@ -8833,6 +8917,10 @@
             </a:outerShdw>
           </a:effectLst>
         </p:spPr>
+        <p:txBody>
+          <a:bodyPr/>
+          <a:p/>
+        </p:txBody>
       </p:sp>
       <p:sp>
         <p:nvSpPr>
@@ -9055,6 +9143,10 @@
           </a:solidFill>
           <a:ln/>
         </p:spPr>
+        <p:txBody>
+          <a:bodyPr/>
+          <a:p/>
+        </p:txBody>
       </p:sp>
       <p:sp>
         <p:nvSpPr>
@@ -9214,7 +9306,7 @@
                 <a:ea typeface="微软雅黑" pitchFamily="34" charset="-122"/>
                 <a:cs typeface="微软雅黑" pitchFamily="34" charset="-120"/>
               </a:rPr>
-              <a:t>帮扶管理信息系统 v1.15.0</a:t>
+              <a:t>帮扶管理信息系统 v1.15.13</a:t>
             </a:r>
             <a:endParaRPr lang="en-US" sz="1050" dirty="0"/>
           </a:p>
@@ -9248,6 +9340,10 @@
             </a:outerShdw>
           </a:effectLst>
         </p:spPr>
+        <p:txBody>
+          <a:bodyPr/>
+          <a:p/>
+        </p:txBody>
       </p:sp>
       <p:sp>
         <p:nvSpPr>
@@ -9447,6 +9543,10 @@
             </a:outerShdw>
           </a:effectLst>
         </p:spPr>
+        <p:txBody>
+          <a:bodyPr/>
+          <a:p/>
+        </p:txBody>
       </p:sp>
       <p:sp>
         <p:nvSpPr>
@@ -9669,6 +9769,10 @@
           </a:solidFill>
           <a:ln/>
         </p:spPr>
+        <p:txBody>
+          <a:bodyPr/>
+          <a:p/>
+        </p:txBody>
       </p:sp>
       <p:sp>
         <p:nvSpPr>
@@ -9828,7 +9932,7 @@
                 <a:ea typeface="微软雅黑" pitchFamily="34" charset="-122"/>
                 <a:cs typeface="微软雅黑" pitchFamily="34" charset="-120"/>
               </a:rPr>
-              <a:t>帮扶管理信息系统 v1.15.0</a:t>
+              <a:t>帮扶管理信息系统 v1.15.13</a:t>
             </a:r>
             <a:endParaRPr lang="en-US" sz="1050" dirty="0"/>
           </a:p>
@@ -9862,6 +9966,10 @@
             </a:outerShdw>
           </a:effectLst>
         </p:spPr>
+        <p:txBody>
+          <a:bodyPr/>
+          <a:p/>
+        </p:txBody>
       </p:sp>
       <p:sp>
         <p:nvSpPr>
@@ -10019,6 +10127,10 @@
             </a:outerShdw>
           </a:effectLst>
         </p:spPr>
+        <p:txBody>
+          <a:bodyPr/>
+          <a:p/>
+        </p:txBody>
       </p:sp>
       <p:sp>
         <p:nvSpPr>
@@ -10169,6 +10281,10 @@
           </a:solidFill>
           <a:ln/>
         </p:spPr>
+        <p:txBody>
+          <a:bodyPr/>
+          <a:p/>
+        </p:txBody>
       </p:sp>
       <p:sp>
         <p:nvSpPr>
@@ -10234,6 +10350,10 @@
             <a:tailEnd type="triangle"/>
           </a:ln>
         </p:spPr>
+        <p:txBody>
+          <a:bodyPr/>
+          <a:p/>
+        </p:txBody>
       </p:sp>
       <p:sp>
         <p:nvSpPr>
@@ -10256,6 +10376,10 @@
           </a:solidFill>
           <a:ln/>
         </p:spPr>
+        <p:txBody>
+          <a:bodyPr/>
+          <a:p/>
+        </p:txBody>
       </p:sp>
       <p:sp>
         <p:nvSpPr>
@@ -10321,6 +10445,10 @@
             <a:tailEnd type="triangle"/>
           </a:ln>
         </p:spPr>
+        <p:txBody>
+          <a:bodyPr/>
+          <a:p/>
+        </p:txBody>
       </p:sp>
       <p:sp>
         <p:nvSpPr>
@@ -10343,6 +10471,10 @@
           </a:solidFill>
           <a:ln/>
         </p:spPr>
+        <p:txBody>
+          <a:bodyPr/>
+          <a:p/>
+        </p:txBody>
       </p:sp>
       <p:sp>
         <p:nvSpPr>
@@ -10408,6 +10540,10 @@
             <a:tailEnd type="triangle"/>
           </a:ln>
         </p:spPr>
+        <p:txBody>
+          <a:bodyPr/>
+          <a:p/>
+        </p:txBody>
       </p:sp>
       <p:sp>
         <p:nvSpPr>
@@ -10430,6 +10566,10 @@
           </a:solidFill>
           <a:ln/>
         </p:spPr>
+        <p:txBody>
+          <a:bodyPr/>
+          <a:p/>
+        </p:txBody>
       </p:sp>
       <p:sp>
         <p:nvSpPr>
@@ -10495,6 +10635,10 @@
             <a:tailEnd type="triangle"/>
           </a:ln>
         </p:spPr>
+        <p:txBody>
+          <a:bodyPr/>
+          <a:p/>
+        </p:txBody>
       </p:sp>
       <p:sp>
         <p:nvSpPr>
@@ -10517,6 +10661,10 @@
           </a:solidFill>
           <a:ln/>
         </p:spPr>
+        <p:txBody>
+          <a:bodyPr/>
+          <a:p/>
+        </p:txBody>
       </p:sp>
       <p:sp>
         <p:nvSpPr>
@@ -10582,6 +10730,10 @@
             <a:tailEnd type="triangle"/>
           </a:ln>
         </p:spPr>
+        <p:txBody>
+          <a:bodyPr/>
+          <a:p/>
+        </p:txBody>
       </p:sp>
       <p:sp>
         <p:nvSpPr>
@@ -10604,6 +10756,10 @@
           </a:solidFill>
           <a:ln/>
         </p:spPr>
+        <p:txBody>
+          <a:bodyPr/>
+          <a:p/>
+        </p:txBody>
       </p:sp>
       <p:sp>
         <p:nvSpPr>
@@ -11042,6 +11198,10 @@
           </a:solidFill>
           <a:ln/>
         </p:spPr>
+        <p:txBody>
+          <a:bodyPr/>
+          <a:p/>
+        </p:txBody>
       </p:sp>
       <p:sp>
         <p:nvSpPr>
@@ -11201,7 +11361,7 @@
                 <a:ea typeface="微软雅黑" pitchFamily="34" charset="-122"/>
                 <a:cs typeface="微软雅黑" pitchFamily="34" charset="-120"/>
               </a:rPr>
-              <a:t>帮扶管理信息系统 v1.15.0</a:t>
+              <a:t>帮扶管理信息系统 v1.15.13</a:t>
             </a:r>
             <a:endParaRPr lang="en-US" sz="1050" dirty="0"/>
           </a:p>
@@ -11235,6 +11395,10 @@
             </a:outerShdw>
           </a:effectLst>
         </p:spPr>
+        <p:txBody>
+          <a:bodyPr/>
+          <a:p/>
+        </p:txBody>
       </p:sp>
       <p:sp>
         <p:nvSpPr>
@@ -11387,6 +11551,10 @@
             </a:outerShdw>
           </a:effectLst>
         </p:spPr>
+        <p:txBody>
+          <a:bodyPr/>
+          <a:p/>
+        </p:txBody>
       </p:sp>
       <p:sp>
         <p:nvSpPr>
@@ -11539,6 +11707,10 @@
             </a:outerShdw>
           </a:effectLst>
         </p:spPr>
+        <p:txBody>
+          <a:bodyPr/>
+          <a:p/>
+        </p:txBody>
       </p:sp>
       <p:sp>
         <p:nvSpPr>
@@ -11691,6 +11863,10 @@
             </a:outerShdw>
           </a:effectLst>
         </p:spPr>
+        <p:txBody>
+          <a:bodyPr/>
+          <a:p/>
+        </p:txBody>
       </p:sp>
       <p:sp>
         <p:nvSpPr>
@@ -11843,6 +12019,10 @@
             </a:outerShdw>
           </a:effectLst>
         </p:spPr>
+        <p:txBody>
+          <a:bodyPr/>
+          <a:p/>
+        </p:txBody>
       </p:sp>
       <p:sp>
         <p:nvSpPr>
@@ -11995,6 +12175,10 @@
             </a:outerShdw>
           </a:effectLst>
         </p:spPr>
+        <p:txBody>
+          <a:bodyPr/>
+          <a:p/>
+        </p:txBody>
       </p:sp>
       <p:sp>
         <p:nvSpPr>
@@ -12147,6 +12331,10 @@
             </a:outerShdw>
           </a:effectLst>
         </p:spPr>
+        <p:txBody>
+          <a:bodyPr/>
+          <a:p/>
+        </p:txBody>
       </p:sp>
       <p:sp>
         <p:nvSpPr>
@@ -12224,7 +12412,7 @@
                 <a:ea typeface="微软雅黑" pitchFamily="34" charset="-122"/>
                 <a:cs typeface="微软雅黑" pitchFamily="34" charset="-120"/>
               </a:rPr>
-              <a:t>6 聚合页：组织与权限/安全与审计/运维与监控/备份与存储/系统设置/关于与反馈</a:t>
+              <a:t>6 聚合页：组织与权限（含 R33 单位授权）/安全与审计/运维与监控/备份与存储/系统设置/关于与反馈</a:t>
             </a:r>
             <a:endParaRPr lang="en-US" sz="1050" dirty="0"/>
           </a:p>
@@ -12363,6 +12551,10 @@
           </a:solidFill>
           <a:ln/>
         </p:spPr>
+        <p:txBody>
+          <a:bodyPr/>
+          <a:p/>
+        </p:txBody>
       </p:sp>
       <p:sp>
         <p:nvSpPr>
@@ -12522,7 +12714,7 @@
                 <a:ea typeface="微软雅黑" pitchFamily="34" charset="-122"/>
                 <a:cs typeface="微软雅黑" pitchFamily="34" charset="-120"/>
               </a:rPr>
-              <a:t>帮扶管理信息系统 v1.15.0</a:t>
+              <a:t>帮扶管理信息系统 v1.15.13</a:t>
             </a:r>
             <a:endParaRPr lang="en-US" sz="1050" dirty="0"/>
           </a:p>
@@ -12556,6 +12748,10 @@
             </a:outerShdw>
           </a:effectLst>
         </p:spPr>
+        <p:txBody>
+          <a:bodyPr/>
+          <a:p/>
+        </p:txBody>
       </p:sp>
       <p:sp>
         <p:nvSpPr>
@@ -12755,6 +12951,10 @@
             </a:outerShdw>
           </a:effectLst>
         </p:spPr>
+        <p:txBody>
+          <a:bodyPr/>
+          <a:p/>
+        </p:txBody>
       </p:sp>
       <p:sp>
         <p:nvSpPr>
@@ -12977,6 +13177,10 @@
           </a:solidFill>
           <a:ln/>
         </p:spPr>
+        <p:txBody>
+          <a:bodyPr/>
+          <a:p/>
+        </p:txBody>
       </p:sp>
       <p:sp>
         <p:nvSpPr>
@@ -13136,7 +13340,7 @@
                 <a:ea typeface="微软雅黑" pitchFamily="34" charset="-122"/>
                 <a:cs typeface="微软雅黑" pitchFamily="34" charset="-120"/>
               </a:rPr>
-              <a:t>帮扶管理信息系统 v1.15.0</a:t>
+              <a:t>帮扶管理信息系统 v1.15.13</a:t>
             </a:r>
             <a:endParaRPr lang="en-US" sz="1050" dirty="0"/>
           </a:p>
@@ -13163,6 +13367,10 @@
           </a:solidFill>
           <a:ln/>
         </p:spPr>
+        <p:txBody>
+          <a:bodyPr/>
+          <a:p/>
+        </p:txBody>
       </p:sp>
       <p:sp>
         <p:nvSpPr>
@@ -13226,6 +13434,10 @@
           </a:solidFill>
           <a:ln/>
         </p:spPr>
+        <p:txBody>
+          <a:bodyPr/>
+          <a:p/>
+        </p:txBody>
       </p:sp>
       <p:sp>
         <p:nvSpPr>
@@ -13289,6 +13501,10 @@
           </a:solidFill>
           <a:ln/>
         </p:spPr>
+        <p:txBody>
+          <a:bodyPr/>
+          <a:p/>
+        </p:txBody>
       </p:sp>
       <p:sp>
         <p:nvSpPr>
@@ -13352,6 +13568,10 @@
           </a:solidFill>
           <a:ln/>
         </p:spPr>
+        <p:txBody>
+          <a:bodyPr/>
+          <a:p/>
+        </p:txBody>
       </p:sp>
       <p:sp>
         <p:nvSpPr>
@@ -13415,6 +13635,10 @@
           </a:solidFill>
           <a:ln/>
         </p:spPr>
+        <p:txBody>
+          <a:bodyPr/>
+          <a:p/>
+        </p:txBody>
       </p:sp>
       <p:sp>
         <p:nvSpPr>
@@ -13478,6 +13702,10 @@
           </a:solidFill>
           <a:ln/>
         </p:spPr>
+        <p:txBody>
+          <a:bodyPr/>
+          <a:p/>
+        </p:txBody>
       </p:sp>
       <p:sp>
         <p:nvSpPr>
@@ -13541,6 +13769,10 @@
           </a:solidFill>
           <a:ln/>
         </p:spPr>
+        <p:txBody>
+          <a:bodyPr/>
+          <a:p/>
+        </p:txBody>
       </p:sp>
       <p:sp>
         <p:nvSpPr>
@@ -13604,6 +13836,10 @@
           </a:solidFill>
           <a:ln/>
         </p:spPr>
+        <p:txBody>
+          <a:bodyPr/>
+          <a:p/>
+        </p:txBody>
       </p:sp>
       <p:sp>
         <p:nvSpPr>
@@ -13910,6 +14146,10 @@
           </a:solidFill>
           <a:ln/>
         </p:spPr>
+        <p:txBody>
+          <a:bodyPr/>
+          <a:p/>
+        </p:txBody>
       </p:sp>
       <p:sp>
         <p:nvSpPr>
@@ -14055,6 +14295,10 @@
           </a:solidFill>
           <a:ln/>
         </p:spPr>
+        <p:txBody>
+          <a:bodyPr/>
+          <a:p/>
+        </p:txBody>
       </p:sp>
       <p:sp>
         <p:nvSpPr>
@@ -14200,6 +14444,10 @@
           </a:solidFill>
           <a:ln/>
         </p:spPr>
+        <p:txBody>
+          <a:bodyPr/>
+          <a:p/>
+        </p:txBody>
       </p:sp>
       <p:sp>
         <p:nvSpPr>
@@ -14345,6 +14593,10 @@
           </a:solidFill>
           <a:ln/>
         </p:spPr>
+        <p:txBody>
+          <a:bodyPr/>
+          <a:p/>
+        </p:txBody>
       </p:sp>
       <p:sp>
         <p:nvSpPr>
@@ -14490,6 +14742,10 @@
           </a:solidFill>
           <a:ln/>
         </p:spPr>
+        <p:txBody>
+          <a:bodyPr/>
+          <a:p/>
+        </p:txBody>
       </p:sp>
       <p:sp>
         <p:nvSpPr>
@@ -14635,6 +14891,10 @@
           </a:solidFill>
           <a:ln/>
         </p:spPr>
+        <p:txBody>
+          <a:bodyPr/>
+          <a:p/>
+        </p:txBody>
       </p:sp>
       <p:sp>
         <p:nvSpPr>
@@ -14810,6 +15070,10 @@
           </a:solidFill>
           <a:ln/>
         </p:spPr>
+        <p:txBody>
+          <a:bodyPr/>
+          <a:p/>
+        </p:txBody>
       </p:sp>
       <p:sp>
         <p:nvSpPr>
@@ -14969,7 +15233,7 @@
                 <a:ea typeface="微软雅黑" pitchFamily="34" charset="-122"/>
                 <a:cs typeface="微软雅黑" pitchFamily="34" charset="-120"/>
               </a:rPr>
-              <a:t>帮扶管理信息系统 v1.15.0</a:t>
+              <a:t>帮扶管理信息系统 v1.15.13</a:t>
             </a:r>
             <a:endParaRPr lang="en-US" sz="1050" dirty="0"/>
           </a:p>
@@ -15003,6 +15267,10 @@
             </a:outerShdw>
           </a:effectLst>
         </p:spPr>
+        <p:txBody>
+          <a:bodyPr/>
+          <a:p/>
+        </p:txBody>
       </p:sp>
       <p:sp>
         <p:nvSpPr>
@@ -15202,6 +15470,10 @@
             </a:outerShdw>
           </a:effectLst>
         </p:spPr>
+        <p:txBody>
+          <a:bodyPr/>
+          <a:p/>
+        </p:txBody>
       </p:sp>
       <p:sp>
         <p:nvSpPr>
@@ -15465,6 +15737,10 @@
           </a:solidFill>
           <a:ln/>
         </p:spPr>
+        <p:txBody>
+          <a:bodyPr/>
+          <a:p/>
+        </p:txBody>
       </p:sp>
       <p:sp>
         <p:nvSpPr>
@@ -15624,7 +15900,7 @@
                 <a:ea typeface="微软雅黑" pitchFamily="34" charset="-122"/>
                 <a:cs typeface="微软雅黑" pitchFamily="34" charset="-120"/>
               </a:rPr>
-              <a:t>帮扶管理信息系统 v1.15.0</a:t>
+              <a:t>帮扶管理信息系统 v1.15.13</a:t>
             </a:r>
             <a:endParaRPr lang="en-US" sz="1050" dirty="0"/>
           </a:p>
@@ -15649,6 +15925,10 @@
           </a:solidFill>
           <a:ln/>
         </p:spPr>
+        <p:txBody>
+          <a:bodyPr/>
+          <a:p/>
+        </p:txBody>
       </p:sp>
       <p:sp>
         <p:nvSpPr>
@@ -15710,6 +15990,10 @@
           </a:solidFill>
           <a:ln/>
         </p:spPr>
+        <p:txBody>
+          <a:bodyPr/>
+          <a:p/>
+        </p:txBody>
       </p:sp>
       <p:sp>
         <p:nvSpPr>
@@ -15771,6 +16055,10 @@
           </a:solidFill>
           <a:ln/>
         </p:spPr>
+        <p:txBody>
+          <a:bodyPr/>
+          <a:p/>
+        </p:txBody>
       </p:sp>
       <p:sp>
         <p:nvSpPr>
@@ -15832,6 +16120,10 @@
           </a:solidFill>
           <a:ln/>
         </p:spPr>
+        <p:txBody>
+          <a:bodyPr/>
+          <a:p/>
+        </p:txBody>
       </p:sp>
       <p:sp>
         <p:nvSpPr>
@@ -15893,6 +16185,10 @@
           </a:solidFill>
           <a:ln/>
         </p:spPr>
+        <p:txBody>
+          <a:bodyPr/>
+          <a:p/>
+        </p:txBody>
       </p:sp>
       <p:sp>
         <p:nvSpPr>
@@ -15954,6 +16250,10 @@
           </a:solidFill>
           <a:ln/>
         </p:spPr>
+        <p:txBody>
+          <a:bodyPr/>
+          <a:p/>
+        </p:txBody>
       </p:sp>
       <p:sp>
         <p:nvSpPr>
@@ -16176,6 +16476,10 @@
           </a:solidFill>
           <a:ln/>
         </p:spPr>
+        <p:txBody>
+          <a:bodyPr/>
+          <a:p/>
+        </p:txBody>
       </p:sp>
       <p:sp>
         <p:nvSpPr>
@@ -16335,7 +16639,7 @@
                 <a:ea typeface="微软雅黑" pitchFamily="34" charset="-122"/>
                 <a:cs typeface="微软雅黑" pitchFamily="34" charset="-120"/>
               </a:rPr>
-              <a:t>帮扶管理信息系统 v1.15.0</a:t>
+              <a:t>帮扶管理信息系统 v1.15.13</a:t>
             </a:r>
             <a:endParaRPr lang="en-US" sz="1050" dirty="0"/>
           </a:p>
@@ -16360,6 +16664,10 @@
           </a:solidFill>
           <a:ln/>
         </p:spPr>
+        <p:txBody>
+          <a:bodyPr/>
+          <a:p/>
+        </p:txBody>
       </p:sp>
       <p:sp>
         <p:nvSpPr>
@@ -16466,6 +16774,10 @@
             <a:tailEnd type="triangle"/>
           </a:ln>
         </p:spPr>
+        <p:txBody>
+          <a:bodyPr/>
+          <a:p/>
+        </p:txBody>
       </p:sp>
       <p:sp>
         <p:nvSpPr>
@@ -16486,6 +16798,10 @@
           </a:solidFill>
           <a:ln/>
         </p:spPr>
+        <p:txBody>
+          <a:bodyPr/>
+          <a:p/>
+        </p:txBody>
       </p:sp>
       <p:sp>
         <p:nvSpPr>
@@ -16592,6 +16908,10 @@
             <a:tailEnd type="triangle"/>
           </a:ln>
         </p:spPr>
+        <p:txBody>
+          <a:bodyPr/>
+          <a:p/>
+        </p:txBody>
       </p:sp>
       <p:sp>
         <p:nvSpPr>
@@ -16612,6 +16932,10 @@
           </a:solidFill>
           <a:ln/>
         </p:spPr>
+        <p:txBody>
+          <a:bodyPr/>
+          <a:p/>
+        </p:txBody>
       </p:sp>
       <p:sp>
         <p:nvSpPr>
@@ -16718,6 +17042,10 @@
             <a:tailEnd type="triangle"/>
           </a:ln>
         </p:spPr>
+        <p:txBody>
+          <a:bodyPr/>
+          <a:p/>
+        </p:txBody>
       </p:sp>
       <p:sp>
         <p:nvSpPr>
@@ -16738,6 +17066,10 @@
           </a:solidFill>
           <a:ln/>
         </p:spPr>
+        <p:txBody>
+          <a:bodyPr/>
+          <a:p/>
+        </p:txBody>
       </p:sp>
       <p:sp>
         <p:nvSpPr>
@@ -16844,6 +17176,10 @@
             <a:tailEnd type="triangle"/>
           </a:ln>
         </p:spPr>
+        <p:txBody>
+          <a:bodyPr/>
+          <a:p/>
+        </p:txBody>
       </p:sp>
       <p:sp>
         <p:nvSpPr>
@@ -16864,6 +17200,10 @@
           </a:solidFill>
           <a:ln/>
         </p:spPr>
+        <p:txBody>
+          <a:bodyPr/>
+          <a:p/>
+        </p:txBody>
       </p:sp>
       <p:sp>
         <p:nvSpPr>
@@ -16970,6 +17310,10 @@
             <a:tailEnd type="triangle"/>
           </a:ln>
         </p:spPr>
+        <p:txBody>
+          <a:bodyPr/>
+          <a:p/>
+        </p:txBody>
       </p:sp>
       <p:sp>
         <p:nvSpPr>
@@ -16990,6 +17334,10 @@
           </a:solidFill>
           <a:ln/>
         </p:spPr>
+        <p:txBody>
+          <a:bodyPr/>
+          <a:p/>
+        </p:txBody>
       </p:sp>
       <p:sp>
         <p:nvSpPr>
@@ -17096,6 +17444,10 @@
             <a:tailEnd type="triangle"/>
           </a:ln>
         </p:spPr>
+        <p:txBody>
+          <a:bodyPr/>
+          <a:p/>
+        </p:txBody>
       </p:sp>
       <p:sp>
         <p:nvSpPr>
@@ -17116,6 +17468,10 @@
           </a:solidFill>
           <a:ln/>
         </p:spPr>
+        <p:txBody>
+          <a:bodyPr/>
+          <a:p/>
+        </p:txBody>
       </p:sp>
       <p:sp>
         <p:nvSpPr>
@@ -17222,6 +17578,10 @@
             <a:tailEnd type="triangle"/>
           </a:ln>
         </p:spPr>
+        <p:txBody>
+          <a:bodyPr/>
+          <a:p/>
+        </p:txBody>
       </p:sp>
       <p:sp>
         <p:nvSpPr>
@@ -17242,6 +17602,10 @@
           </a:solidFill>
           <a:ln/>
         </p:spPr>
+        <p:txBody>
+          <a:bodyPr/>
+          <a:p/>
+        </p:txBody>
       </p:sp>
       <p:sp>
         <p:nvSpPr>
@@ -17353,6 +17717,10 @@
             </a:outerShdw>
           </a:effectLst>
         </p:spPr>
+        <p:txBody>
+          <a:bodyPr/>
+          <a:p/>
+        </p:txBody>
       </p:sp>
       <p:sp>
         <p:nvSpPr>
@@ -17510,6 +17878,10 @@
             </a:outerShdw>
           </a:effectLst>
         </p:spPr>
+        <p:txBody>
+          <a:bodyPr/>
+          <a:p/>
+        </p:txBody>
       </p:sp>
       <p:sp>
         <p:nvSpPr>
@@ -17711,6 +18083,10 @@
           </a:solidFill>
           <a:ln/>
         </p:spPr>
+        <p:txBody>
+          <a:bodyPr/>
+          <a:p/>
+        </p:txBody>
       </p:sp>
       <p:sp>
         <p:nvSpPr>
@@ -17870,7 +18246,7 @@
                 <a:ea typeface="微软雅黑" pitchFamily="34" charset="-122"/>
                 <a:cs typeface="微软雅黑" pitchFamily="34" charset="-120"/>
               </a:rPr>
-              <a:t>帮扶管理信息系统 v1.15.0</a:t>
+              <a:t>帮扶管理信息系统 v1.15.13</a:t>
             </a:r>
             <a:endParaRPr lang="en-US" sz="1050" dirty="0"/>
           </a:p>
@@ -17895,6 +18271,10 @@
           </a:solidFill>
           <a:ln/>
         </p:spPr>
+        <p:txBody>
+          <a:bodyPr/>
+          <a:p/>
+        </p:txBody>
       </p:sp>
       <p:sp>
         <p:nvSpPr>
@@ -17956,6 +18336,10 @@
           </a:solidFill>
           <a:ln/>
         </p:spPr>
+        <p:txBody>
+          <a:bodyPr/>
+          <a:p/>
+        </p:txBody>
       </p:sp>
       <p:sp>
         <p:nvSpPr>
@@ -18017,6 +18401,10 @@
           </a:solidFill>
           <a:ln/>
         </p:spPr>
+        <p:txBody>
+          <a:bodyPr/>
+          <a:p/>
+        </p:txBody>
       </p:sp>
       <p:sp>
         <p:nvSpPr>
@@ -18078,6 +18466,10 @@
           </a:solidFill>
           <a:ln/>
         </p:spPr>
+        <p:txBody>
+          <a:bodyPr/>
+          <a:p/>
+        </p:txBody>
       </p:sp>
       <p:sp>
         <p:nvSpPr>
@@ -18148,6 +18540,10 @@
             </a:outerShdw>
           </a:effectLst>
         </p:spPr>
+        <p:txBody>
+          <a:bodyPr/>
+          <a:p/>
+        </p:txBody>
       </p:sp>
       <p:sp>
         <p:nvSpPr>
@@ -18305,6 +18701,10 @@
             </a:outerShdw>
           </a:effectLst>
         </p:spPr>
+        <p:txBody>
+          <a:bodyPr/>
+          <a:p/>
+        </p:txBody>
       </p:sp>
       <p:sp>
         <p:nvSpPr>
@@ -18485,6 +18885,10 @@
           </a:solidFill>
           <a:ln/>
         </p:spPr>
+        <p:txBody>
+          <a:bodyPr/>
+          <a:p/>
+        </p:txBody>
       </p:sp>
       <p:sp>
         <p:nvSpPr>
@@ -18644,7 +19048,7 @@
                 <a:ea typeface="微软雅黑" pitchFamily="34" charset="-122"/>
                 <a:cs typeface="微软雅黑" pitchFamily="34" charset="-120"/>
               </a:rPr>
-              <a:t>帮扶管理信息系统 v1.15.0</a:t>
+              <a:t>帮扶管理信息系统 v1.15.13</a:t>
             </a:r>
             <a:endParaRPr lang="en-US" sz="1050" dirty="0"/>
           </a:p>
@@ -18678,6 +19082,10 @@
             </a:outerShdw>
           </a:effectLst>
         </p:spPr>
+        <p:txBody>
+          <a:bodyPr/>
+          <a:p/>
+        </p:txBody>
       </p:sp>
       <p:sp>
         <p:nvSpPr>
@@ -18877,6 +19285,10 @@
             </a:outerShdw>
           </a:effectLst>
         </p:spPr>
+        <p:txBody>
+          <a:bodyPr/>
+          <a:p/>
+        </p:txBody>
       </p:sp>
       <p:sp>
         <p:nvSpPr>
@@ -19099,6 +19511,10 @@
           </a:solidFill>
           <a:ln/>
         </p:spPr>
+        <p:txBody>
+          <a:bodyPr/>
+          <a:p/>
+        </p:txBody>
       </p:sp>
       <p:sp>
         <p:nvSpPr>
@@ -19258,7 +19674,7 @@
                 <a:ea typeface="微软雅黑" pitchFamily="34" charset="-122"/>
                 <a:cs typeface="微软雅黑" pitchFamily="34" charset="-120"/>
               </a:rPr>
-              <a:t>帮扶管理信息系统 v1.15.0</a:t>
+              <a:t>帮扶管理信息系统 v1.15.13</a:t>
             </a:r>
             <a:endParaRPr lang="en-US" sz="1050" dirty="0"/>
           </a:p>
@@ -19292,6 +19708,10 @@
             </a:outerShdw>
           </a:effectLst>
         </p:spPr>
+        <p:txBody>
+          <a:bodyPr/>
+          <a:p/>
+        </p:txBody>
       </p:sp>
       <p:sp>
         <p:nvSpPr>
@@ -19470,6 +19890,10 @@
             </a:outerShdw>
           </a:effectLst>
         </p:spPr>
+        <p:txBody>
+          <a:bodyPr/>
+          <a:p/>
+        </p:txBody>
       </p:sp>
       <p:sp>
         <p:nvSpPr>
@@ -19712,6 +20136,10 @@
           </a:solidFill>
           <a:ln/>
         </p:spPr>
+        <p:txBody>
+          <a:bodyPr/>
+          <a:p/>
+        </p:txBody>
       </p:sp>
       <p:sp>
         <p:nvSpPr>
@@ -19871,7 +20299,7 @@
                 <a:ea typeface="微软雅黑" pitchFamily="34" charset="-122"/>
                 <a:cs typeface="微软雅黑" pitchFamily="34" charset="-120"/>
               </a:rPr>
-              <a:t>帮扶管理信息系统 v1.15.0</a:t>
+              <a:t>帮扶管理信息系统 v1.15.13</a:t>
             </a:r>
             <a:endParaRPr lang="en-US" sz="1050" dirty="0"/>
           </a:p>
@@ -19896,6 +20324,10 @@
           </a:solidFill>
           <a:ln/>
         </p:spPr>
+        <p:txBody>
+          <a:bodyPr/>
+          <a:p/>
+        </p:txBody>
       </p:sp>
       <p:sp>
         <p:nvSpPr>
@@ -19957,6 +20389,10 @@
           </a:solidFill>
           <a:ln/>
         </p:spPr>
+        <p:txBody>
+          <a:bodyPr/>
+          <a:p/>
+        </p:txBody>
       </p:sp>
       <p:sp>
         <p:nvSpPr>
@@ -20018,6 +20454,10 @@
           </a:solidFill>
           <a:ln/>
         </p:spPr>
+        <p:txBody>
+          <a:bodyPr/>
+          <a:p/>
+        </p:txBody>
       </p:sp>
       <p:sp>
         <p:nvSpPr>
@@ -20079,6 +20519,10 @@
           </a:solidFill>
           <a:ln/>
         </p:spPr>
+        <p:txBody>
+          <a:bodyPr/>
+          <a:p/>
+        </p:txBody>
       </p:sp>
       <p:sp>
         <p:nvSpPr>
@@ -20140,6 +20584,10 @@
           </a:solidFill>
           <a:ln/>
         </p:spPr>
+        <p:txBody>
+          <a:bodyPr/>
+          <a:p/>
+        </p:txBody>
       </p:sp>
       <p:sp>
         <p:nvSpPr>
@@ -20383,6 +20831,10 @@
           </a:solidFill>
           <a:ln/>
         </p:spPr>
+        <p:txBody>
+          <a:bodyPr/>
+          <a:p/>
+        </p:txBody>
       </p:sp>
       <p:sp>
         <p:nvSpPr>
@@ -20542,7 +20994,7 @@
                 <a:ea typeface="微软雅黑" pitchFamily="34" charset="-122"/>
                 <a:cs typeface="微软雅黑" pitchFamily="34" charset="-120"/>
               </a:rPr>
-              <a:t>帮扶管理信息系统 v1.15.0</a:t>
+              <a:t>帮扶管理信息系统 v1.15.13</a:t>
             </a:r>
             <a:endParaRPr lang="en-US" sz="1050" dirty="0"/>
           </a:p>
@@ -20576,6 +21028,10 @@
             </a:outerShdw>
           </a:effectLst>
         </p:spPr>
+        <p:txBody>
+          <a:bodyPr/>
+          <a:p/>
+        </p:txBody>
       </p:sp>
       <p:sp>
         <p:nvSpPr>
@@ -20754,6 +21210,10 @@
             </a:outerShdw>
           </a:effectLst>
         </p:spPr>
+        <p:txBody>
+          <a:bodyPr/>
+          <a:p/>
+        </p:txBody>
       </p:sp>
       <p:sp>
         <p:nvSpPr>
@@ -20932,6 +21392,10 @@
             </a:outerShdw>
           </a:effectLst>
         </p:spPr>
+        <p:txBody>
+          <a:bodyPr/>
+          <a:p/>
+        </p:txBody>
       </p:sp>
       <p:sp>
         <p:nvSpPr>
@@ -21066,6 +21530,10 @@
           </a:solidFill>
           <a:ln/>
         </p:spPr>
+        <p:txBody>
+          <a:bodyPr/>
+          <a:p/>
+        </p:txBody>
       </p:sp>
       <p:sp>
         <p:nvSpPr>
@@ -21225,7 +21693,7 @@
                 <a:ea typeface="微软雅黑" pitchFamily="34" charset="-122"/>
                 <a:cs typeface="微软雅黑" pitchFamily="34" charset="-120"/>
               </a:rPr>
-              <a:t>帮扶管理信息系统 v1.15.0</a:t>
+              <a:t>帮扶管理信息系统 v1.15.13</a:t>
             </a:r>
             <a:endParaRPr lang="en-US" sz="1050" dirty="0"/>
           </a:p>
@@ -21250,6 +21718,10 @@
           </a:solidFill>
           <a:ln/>
         </p:spPr>
+        <p:txBody>
+          <a:bodyPr/>
+          <a:p/>
+        </p:txBody>
       </p:sp>
       <p:sp>
         <p:nvSpPr>
@@ -21311,6 +21783,10 @@
           </a:solidFill>
           <a:ln/>
         </p:spPr>
+        <p:txBody>
+          <a:bodyPr/>
+          <a:p/>
+        </p:txBody>
       </p:sp>
       <p:sp>
         <p:nvSpPr>
@@ -21372,6 +21848,10 @@
           </a:solidFill>
           <a:ln/>
         </p:spPr>
+        <p:txBody>
+          <a:bodyPr/>
+          <a:p/>
+        </p:txBody>
       </p:sp>
       <p:sp>
         <p:nvSpPr>
@@ -21433,6 +21913,10 @@
           </a:solidFill>
           <a:ln/>
         </p:spPr>
+        <p:txBody>
+          <a:bodyPr/>
+          <a:p/>
+        </p:txBody>
       </p:sp>
       <p:sp>
         <p:nvSpPr>
@@ -21494,6 +21978,10 @@
           </a:solidFill>
           <a:ln/>
         </p:spPr>
+        <p:txBody>
+          <a:bodyPr/>
+          <a:p/>
+        </p:txBody>
       </p:sp>
       <p:sp>
         <p:nvSpPr>
@@ -21555,6 +22043,10 @@
           </a:solidFill>
           <a:ln/>
         </p:spPr>
+        <p:txBody>
+          <a:bodyPr/>
+          <a:p/>
+        </p:txBody>
       </p:sp>
       <p:sp>
         <p:nvSpPr>
@@ -21625,6 +22117,10 @@
             </a:outerShdw>
           </a:effectLst>
         </p:spPr>
+        <p:txBody>
+          <a:bodyPr/>
+          <a:p/>
+        </p:txBody>
       </p:sp>
       <p:sp>
         <p:nvSpPr>
@@ -21803,6 +22299,10 @@
             </a:outerShdw>
           </a:effectLst>
         </p:spPr>
+        <p:txBody>
+          <a:bodyPr/>
+          <a:p/>
+        </p:txBody>
       </p:sp>
       <p:sp>
         <p:nvSpPr>
@@ -21983,6 +22483,10 @@
           </a:solidFill>
           <a:ln/>
         </p:spPr>
+        <p:txBody>
+          <a:bodyPr/>
+          <a:p/>
+        </p:txBody>
       </p:sp>
       <p:sp>
         <p:nvSpPr>
@@ -22142,7 +22646,7 @@
                 <a:ea typeface="微软雅黑" pitchFamily="34" charset="-122"/>
                 <a:cs typeface="微软雅黑" pitchFamily="34" charset="-120"/>
               </a:rPr>
-              <a:t>帮扶管理信息系统 v1.15.0</a:t>
+              <a:t>帮扶管理信息系统 v1.15.13</a:t>
             </a:r>
             <a:endParaRPr lang="en-US" sz="1050" dirty="0"/>
           </a:p>
@@ -22176,6 +22680,10 @@
             </a:outerShdw>
           </a:effectLst>
         </p:spPr>
+        <p:txBody>
+          <a:bodyPr/>
+          <a:p/>
+        </p:txBody>
       </p:sp>
       <p:sp>
         <p:nvSpPr>
@@ -22287,6 +22795,10 @@
             </a:outerShdw>
           </a:effectLst>
         </p:spPr>
+        <p:txBody>
+          <a:bodyPr/>
+          <a:p/>
+        </p:txBody>
       </p:sp>
       <p:sp>
         <p:nvSpPr>
@@ -22398,6 +22910,10 @@
             </a:outerShdw>
           </a:effectLst>
         </p:spPr>
+        <p:txBody>
+          <a:bodyPr/>
+          <a:p/>
+        </p:txBody>
       </p:sp>
       <p:sp>
         <p:nvSpPr>
@@ -22509,6 +23025,10 @@
             </a:outerShdw>
           </a:effectLst>
         </p:spPr>
+        <p:txBody>
+          <a:bodyPr/>
+          <a:p/>
+        </p:txBody>
       </p:sp>
       <p:sp>
         <p:nvSpPr>
@@ -22620,6 +23140,10 @@
             </a:outerShdw>
           </a:effectLst>
         </p:spPr>
+        <p:txBody>
+          <a:bodyPr/>
+          <a:p/>
+        </p:txBody>
       </p:sp>
       <p:sp>
         <p:nvSpPr>
@@ -22731,6 +23255,10 @@
             </a:outerShdw>
           </a:effectLst>
         </p:spPr>
+        <p:txBody>
+          <a:bodyPr/>
+          <a:p/>
+        </p:txBody>
       </p:sp>
       <p:sp>
         <p:nvSpPr>
@@ -23169,6 +23697,10 @@
           </a:solidFill>
           <a:ln/>
         </p:spPr>
+        <p:txBody>
+          <a:bodyPr/>
+          <a:p/>
+        </p:txBody>
       </p:sp>
       <p:sp>
         <p:nvSpPr>
@@ -23328,7 +23860,7 @@
                 <a:ea typeface="微软雅黑" pitchFamily="34" charset="-122"/>
                 <a:cs typeface="微软雅黑" pitchFamily="34" charset="-120"/>
               </a:rPr>
-              <a:t>帮扶管理信息系统 v1.15.0</a:t>
+              <a:t>帮扶管理信息系统 v1.15.13</a:t>
             </a:r>
             <a:endParaRPr lang="en-US" sz="1050" dirty="0"/>
           </a:p>
@@ -23362,6 +23894,10 @@
             </a:outerShdw>
           </a:effectLst>
         </p:spPr>
+        <p:txBody>
+          <a:bodyPr/>
+          <a:p/>
+        </p:txBody>
       </p:sp>
       <p:sp>
         <p:nvSpPr>
@@ -23473,6 +24009,10 @@
             </a:outerShdw>
           </a:effectLst>
         </p:spPr>
+        <p:txBody>
+          <a:bodyPr/>
+          <a:p/>
+        </p:txBody>
       </p:sp>
       <p:sp>
         <p:nvSpPr>
@@ -23584,6 +24124,10 @@
             </a:outerShdw>
           </a:effectLst>
         </p:spPr>
+        <p:txBody>
+          <a:bodyPr/>
+          <a:p/>
+        </p:txBody>
       </p:sp>
       <p:sp>
         <p:nvSpPr>
@@ -23695,6 +24239,10 @@
             </a:outerShdw>
           </a:effectLst>
         </p:spPr>
+        <p:txBody>
+          <a:bodyPr/>
+          <a:p/>
+        </p:txBody>
       </p:sp>
       <p:sp>
         <p:nvSpPr>
@@ -23806,6 +24354,10 @@
             </a:outerShdw>
           </a:effectLst>
         </p:spPr>
+        <p:txBody>
+          <a:bodyPr/>
+          <a:p/>
+        </p:txBody>
       </p:sp>
       <p:sp>
         <p:nvSpPr>
@@ -23940,6 +24492,10 @@
           </a:solidFill>
           <a:ln/>
         </p:spPr>
+        <p:txBody>
+          <a:bodyPr/>
+          <a:p/>
+        </p:txBody>
       </p:sp>
       <p:sp>
         <p:nvSpPr>
@@ -24099,7 +24655,7 @@
                 <a:ea typeface="微软雅黑" pitchFamily="34" charset="-122"/>
                 <a:cs typeface="微软雅黑" pitchFamily="34" charset="-120"/>
               </a:rPr>
-              <a:t>帮扶管理信息系统 v1.15.0</a:t>
+              <a:t>帮扶管理信息系统 v1.15.13</a:t>
             </a:r>
             <a:endParaRPr lang="en-US" sz="1050" dirty="0"/>
           </a:p>
@@ -24133,6 +24689,10 @@
             </a:outerShdw>
           </a:effectLst>
         </p:spPr>
+        <p:txBody>
+          <a:bodyPr/>
+          <a:p/>
+        </p:txBody>
       </p:sp>
       <p:sp>
         <p:nvSpPr>
@@ -24311,6 +24871,10 @@
             </a:outerShdw>
           </a:effectLst>
         </p:spPr>
+        <p:txBody>
+          <a:bodyPr/>
+          <a:p/>
+        </p:txBody>
       </p:sp>
       <p:sp>
         <p:nvSpPr>
@@ -24553,6 +25117,10 @@
           </a:solidFill>
           <a:ln/>
         </p:spPr>
+        <p:txBody>
+          <a:bodyPr/>
+          <a:p/>
+        </p:txBody>
       </p:sp>
       <p:sp>
         <p:nvSpPr>
@@ -24712,7 +25280,7 @@
                 <a:ea typeface="微软雅黑" pitchFamily="34" charset="-122"/>
                 <a:cs typeface="微软雅黑" pitchFamily="34" charset="-120"/>
               </a:rPr>
-              <a:t>帮扶管理信息系统 v1.15.0</a:t>
+              <a:t>帮扶管理信息系统 v1.15.13</a:t>
             </a:r>
             <a:endParaRPr lang="en-US" sz="1050" dirty="0"/>
           </a:p>
@@ -24746,6 +25314,10 @@
             </a:outerShdw>
           </a:effectLst>
         </p:spPr>
+        <p:txBody>
+          <a:bodyPr/>
+          <a:p/>
+        </p:txBody>
       </p:sp>
       <p:sp>
         <p:nvSpPr>
@@ -24945,6 +25517,10 @@
             </a:outerShdw>
           </a:effectLst>
         </p:spPr>
+        <p:txBody>
+          <a:bodyPr/>
+          <a:p/>
+        </p:txBody>
       </p:sp>
       <p:sp>
         <p:nvSpPr>
@@ -25187,6 +25763,10 @@
           </a:solidFill>
           <a:ln/>
         </p:spPr>
+        <p:txBody>
+          <a:bodyPr/>
+          <a:p/>
+        </p:txBody>
       </p:sp>
       <p:sp>
         <p:nvSpPr>
@@ -25346,7 +25926,7 @@
                 <a:ea typeface="微软雅黑" pitchFamily="34" charset="-122"/>
                 <a:cs typeface="微软雅黑" pitchFamily="34" charset="-120"/>
               </a:rPr>
-              <a:t>帮扶管理信息系统 v1.15.0</a:t>
+              <a:t>帮扶管理信息系统 v1.15.13</a:t>
             </a:r>
             <a:endParaRPr lang="en-US" sz="1050" dirty="0"/>
           </a:p>
@@ -25380,6 +25960,10 @@
             </a:outerShdw>
           </a:effectLst>
         </p:spPr>
+        <p:txBody>
+          <a:bodyPr/>
+          <a:p/>
+        </p:txBody>
       </p:sp>
       <p:sp>
         <p:nvSpPr>
@@ -25457,7 +26041,7 @@
                 <a:ea typeface="微软雅黑" pitchFamily="34" charset="-122"/>
                 <a:cs typeface="微软雅黑" pitchFamily="34" charset="-120"/>
               </a:rPr>
-              <a:t>用户与组织 · 角色管理 · 菜单管理 · 权限包管理 · 组织机构</a:t>
+              <a:t>用户与组织 · 角色管理 · 菜单管理 · 权限包管理 · 组织机构 · 单位授权（R33）</a:t>
             </a:r>
             <a:endParaRPr lang="en-US" sz="1150" dirty="0"/>
           </a:p>
@@ -25491,6 +26075,10 @@
             </a:outerShdw>
           </a:effectLst>
         </p:spPr>
+        <p:txBody>
+          <a:bodyPr/>
+          <a:p/>
+        </p:txBody>
       </p:sp>
       <p:sp>
         <p:nvSpPr>
@@ -25602,6 +26190,10 @@
             </a:outerShdw>
           </a:effectLst>
         </p:spPr>
+        <p:txBody>
+          <a:bodyPr/>
+          <a:p/>
+        </p:txBody>
       </p:sp>
       <p:sp>
         <p:nvSpPr>
@@ -25713,6 +26305,10 @@
             </a:outerShdw>
           </a:effectLst>
         </p:spPr>
+        <p:txBody>
+          <a:bodyPr/>
+          <a:p/>
+        </p:txBody>
       </p:sp>
       <p:sp>
         <p:nvSpPr>
@@ -25824,6 +26420,10 @@
             </a:outerShdw>
           </a:effectLst>
         </p:spPr>
+        <p:txBody>
+          <a:bodyPr/>
+          <a:p/>
+        </p:txBody>
       </p:sp>
       <p:sp>
         <p:nvSpPr>
@@ -25935,6 +26535,10 @@
             </a:outerShdw>
           </a:effectLst>
         </p:spPr>
+        <p:txBody>
+          <a:bodyPr/>
+          <a:p/>
+        </p:txBody>
       </p:sp>
       <p:sp>
         <p:nvSpPr>
@@ -26053,7 +26657,7 @@
                 <a:ea typeface="微软雅黑" pitchFamily="34" charset="-122"/>
                 <a:cs typeface="微软雅黑" pitchFamily="34" charset="-120"/>
               </a:rPr>
-              <a:t>统一入口 + 页内 Tab：旧页面/旧路由全保留，菜单 key 与权限包全兼容（下线 key 仅权限兼容）；v1.15.0 外观设置收在头像下拉</a:t>
+              <a:t>统一入口 + 页内 Tab：旧页面/旧路由全保留，菜单 key 与权限包全兼容（下线 key 仅权限兼容）；v1.15.13 外观设置收在头像下拉</a:t>
             </a:r>
             <a:endParaRPr lang="en-US" sz="1050" dirty="0"/>
           </a:p>
@@ -26414,6 +27018,10 @@
           </a:solidFill>
           <a:ln/>
         </p:spPr>
+        <p:txBody>
+          <a:bodyPr/>
+          <a:p/>
+        </p:txBody>
       </p:sp>
       <p:sp>
         <p:nvSpPr>
@@ -26573,7 +27181,7 @@
                 <a:ea typeface="微软雅黑" pitchFamily="34" charset="-122"/>
                 <a:cs typeface="微软雅黑" pitchFamily="34" charset="-120"/>
               </a:rPr>
-              <a:t>帮扶管理信息系统 v1.15.0</a:t>
+              <a:t>帮扶管理信息系统 v1.15.13</a:t>
             </a:r>
             <a:endParaRPr lang="en-US" sz="1050" dirty="0"/>
           </a:p>
@@ -26607,6 +27215,10 @@
             </a:outerShdw>
           </a:effectLst>
         </p:spPr>
+        <p:txBody>
+          <a:bodyPr/>
+          <a:p/>
+        </p:txBody>
       </p:sp>
       <p:sp>
         <p:nvSpPr>
@@ -26629,6 +27241,10 @@
           </a:solidFill>
           <a:ln/>
         </p:spPr>
+        <p:txBody>
+          <a:bodyPr/>
+          <a:p/>
+        </p:txBody>
       </p:sp>
       <p:sp>
         <p:nvSpPr>
@@ -26781,6 +27397,10 @@
             </a:outerShdw>
           </a:effectLst>
         </p:spPr>
+        <p:txBody>
+          <a:bodyPr/>
+          <a:p/>
+        </p:txBody>
       </p:sp>
       <p:sp>
         <p:nvSpPr>
@@ -26803,6 +27423,10 @@
           </a:solidFill>
           <a:ln/>
         </p:spPr>
+        <p:txBody>
+          <a:bodyPr/>
+          <a:p/>
+        </p:txBody>
       </p:sp>
       <p:sp>
         <p:nvSpPr>
@@ -26955,6 +27579,10 @@
             </a:outerShdw>
           </a:effectLst>
         </p:spPr>
+        <p:txBody>
+          <a:bodyPr/>
+          <a:p/>
+        </p:txBody>
       </p:sp>
       <p:sp>
         <p:nvSpPr>
@@ -26977,6 +27605,10 @@
           </a:solidFill>
           <a:ln/>
         </p:spPr>
+        <p:txBody>
+          <a:bodyPr/>
+          <a:p/>
+        </p:txBody>
       </p:sp>
       <p:sp>
         <p:nvSpPr>
@@ -27129,6 +27761,10 @@
             </a:outerShdw>
           </a:effectLst>
         </p:spPr>
+        <p:txBody>
+          <a:bodyPr/>
+          <a:p/>
+        </p:txBody>
       </p:sp>
       <p:sp>
         <p:nvSpPr>
@@ -27151,6 +27787,10 @@
           </a:solidFill>
           <a:ln/>
         </p:spPr>
+        <p:txBody>
+          <a:bodyPr/>
+          <a:p/>
+        </p:txBody>
       </p:sp>
       <p:sp>
         <p:nvSpPr>
@@ -27413,6 +28053,10 @@
           </a:solidFill>
           <a:ln/>
         </p:spPr>
+        <p:txBody>
+          <a:bodyPr/>
+          <a:p/>
+        </p:txBody>
       </p:sp>
       <p:sp>
         <p:nvSpPr>
@@ -27572,7 +28216,7 @@
                 <a:ea typeface="微软雅黑" pitchFamily="34" charset="-122"/>
                 <a:cs typeface="微软雅黑" pitchFamily="34" charset="-120"/>
               </a:rPr>
-              <a:t>帮扶管理信息系统 v1.15.0</a:t>
+              <a:t>帮扶管理信息系统 v1.15.13</a:t>
             </a:r>
             <a:endParaRPr lang="en-US" sz="1050" dirty="0"/>
           </a:p>
@@ -27606,6 +28250,10 @@
             </a:outerShdw>
           </a:effectLst>
         </p:spPr>
+        <p:txBody>
+          <a:bodyPr/>
+          <a:p/>
+        </p:txBody>
       </p:sp>
       <p:sp>
         <p:nvSpPr>
@@ -27758,6 +28406,10 @@
             </a:outerShdw>
           </a:effectLst>
         </p:spPr>
+        <p:txBody>
+          <a:bodyPr/>
+          <a:p/>
+        </p:txBody>
       </p:sp>
       <p:sp>
         <p:nvSpPr>
@@ -27910,6 +28562,10 @@
             </a:outerShdw>
           </a:effectLst>
         </p:spPr>
+        <p:txBody>
+          <a:bodyPr/>
+          <a:p/>
+        </p:txBody>
       </p:sp>
       <p:sp>
         <p:nvSpPr>
@@ -28062,6 +28718,10 @@
             </a:outerShdw>
           </a:effectLst>
         </p:spPr>
+        <p:txBody>
+          <a:bodyPr/>
+          <a:p/>
+        </p:txBody>
       </p:sp>
       <p:sp>
         <p:nvSpPr>
@@ -28242,6 +28902,10 @@
           </a:solidFill>
           <a:ln/>
         </p:spPr>
+        <p:txBody>
+          <a:bodyPr/>
+          <a:p/>
+        </p:txBody>
       </p:sp>
       <p:sp>
         <p:nvSpPr>
@@ -28401,7 +29065,7 @@
                 <a:ea typeface="微软雅黑" pitchFamily="34" charset="-122"/>
                 <a:cs typeface="微软雅黑" pitchFamily="34" charset="-120"/>
               </a:rPr>
-              <a:t>帮扶管理信息系统 v1.15.0</a:t>
+              <a:t>帮扶管理信息系统 v1.15.13</a:t>
             </a:r>
             <a:endParaRPr lang="en-US" sz="1050" dirty="0"/>
           </a:p>
@@ -28435,6 +29099,10 @@
             </a:outerShdw>
           </a:effectLst>
         </p:spPr>
+        <p:txBody>
+          <a:bodyPr/>
+          <a:p/>
+        </p:txBody>
       </p:sp>
       <p:sp>
         <p:nvSpPr>
@@ -28498,6 +29166,10 @@
           </a:solidFill>
           <a:ln/>
         </p:spPr>
+        <p:txBody>
+          <a:bodyPr/>
+          <a:p/>
+        </p:txBody>
       </p:sp>
       <p:sp>
         <p:nvSpPr>
@@ -28563,6 +29235,10 @@
             <a:tailEnd type="triangle"/>
           </a:ln>
         </p:spPr>
+        <p:txBody>
+          <a:bodyPr/>
+          <a:p/>
+        </p:txBody>
       </p:sp>
       <p:sp>
         <p:nvSpPr>
@@ -28585,6 +29261,10 @@
           </a:solidFill>
           <a:ln/>
         </p:spPr>
+        <p:txBody>
+          <a:bodyPr/>
+          <a:p/>
+        </p:txBody>
       </p:sp>
       <p:sp>
         <p:nvSpPr>
@@ -28650,6 +29330,10 @@
             <a:tailEnd type="triangle"/>
           </a:ln>
         </p:spPr>
+        <p:txBody>
+          <a:bodyPr/>
+          <a:p/>
+        </p:txBody>
       </p:sp>
       <p:sp>
         <p:nvSpPr>
@@ -28672,6 +29356,10 @@
           </a:solidFill>
           <a:ln/>
         </p:spPr>
+        <p:txBody>
+          <a:bodyPr/>
+          <a:p/>
+        </p:txBody>
       </p:sp>
       <p:sp>
         <p:nvSpPr>
@@ -28808,6 +29496,10 @@
             </a:outerShdw>
           </a:effectLst>
         </p:spPr>
+        <p:txBody>
+          <a:bodyPr/>
+          <a:p/>
+        </p:txBody>
       </p:sp>
       <p:sp>
         <p:nvSpPr>
@@ -28986,6 +29678,10 @@
             </a:outerShdw>
           </a:effectLst>
         </p:spPr>
+        <p:txBody>
+          <a:bodyPr/>
+          <a:p/>
+        </p:txBody>
       </p:sp>
       <p:sp>
         <p:nvSpPr>
@@ -29120,6 +29816,10 @@
           </a:solidFill>
           <a:ln/>
         </p:spPr>
+        <p:txBody>
+          <a:bodyPr/>
+          <a:p/>
+        </p:txBody>
       </p:sp>
       <p:sp>
         <p:nvSpPr>
@@ -29279,7 +29979,7 @@
                 <a:ea typeface="微软雅黑" pitchFamily="34" charset="-122"/>
                 <a:cs typeface="微软雅黑" pitchFamily="34" charset="-120"/>
               </a:rPr>
-              <a:t>帮扶管理信息系统 v1.15.0</a:t>
+              <a:t>帮扶管理信息系统 v1.15.13</a:t>
             </a:r>
             <a:endParaRPr lang="en-US" sz="1050" dirty="0"/>
           </a:p>
@@ -29304,6 +30004,10 @@
           </a:solidFill>
           <a:ln/>
         </p:spPr>
+        <p:txBody>
+          <a:bodyPr/>
+          <a:p/>
+        </p:txBody>
       </p:sp>
       <p:sp>
         <p:nvSpPr>
@@ -29406,6 +30110,10 @@
           </a:solidFill>
           <a:ln/>
         </p:spPr>
+        <p:txBody>
+          <a:bodyPr/>
+          <a:p/>
+        </p:txBody>
       </p:sp>
       <p:sp>
         <p:nvSpPr>
@@ -29508,6 +30216,10 @@
           </a:solidFill>
           <a:ln/>
         </p:spPr>
+        <p:txBody>
+          <a:bodyPr/>
+          <a:p/>
+        </p:txBody>
       </p:sp>
       <p:sp>
         <p:nvSpPr>
@@ -29610,6 +30322,10 @@
           </a:solidFill>
           <a:ln/>
         </p:spPr>
+        <p:txBody>
+          <a:bodyPr/>
+          <a:p/>
+        </p:txBody>
       </p:sp>
       <p:sp>
         <p:nvSpPr>
@@ -29712,6 +30428,10 @@
           </a:solidFill>
           <a:ln/>
         </p:spPr>
+        <p:txBody>
+          <a:bodyPr/>
+          <a:p/>
+        </p:txBody>
       </p:sp>
       <p:sp>
         <p:nvSpPr>
@@ -29814,6 +30534,10 @@
           </a:solidFill>
           <a:ln/>
         </p:spPr>
+        <p:txBody>
+          <a:bodyPr/>
+          <a:p/>
+        </p:txBody>
       </p:sp>
       <p:sp>
         <p:nvSpPr>
@@ -29948,6 +30672,10 @@
           </a:solidFill>
           <a:ln/>
         </p:spPr>
+        <p:txBody>
+          <a:bodyPr/>
+          <a:p/>
+        </p:txBody>
       </p:sp>
       <p:sp>
         <p:nvSpPr>
@@ -30107,7 +30835,7 @@
                 <a:ea typeface="微软雅黑" pitchFamily="34" charset="-122"/>
                 <a:cs typeface="微软雅黑" pitchFamily="34" charset="-120"/>
               </a:rPr>
-              <a:t>帮扶管理信息系统 v1.15.0</a:t>
+              <a:t>帮扶管理信息系统 v1.15.13</a:t>
             </a:r>
             <a:endParaRPr lang="en-US" sz="1050" dirty="0"/>
           </a:p>
@@ -30132,6 +30860,10 @@
           </a:solidFill>
           <a:ln/>
         </p:spPr>
+        <p:txBody>
+          <a:bodyPr/>
+          <a:p/>
+        </p:txBody>
       </p:sp>
       <p:sp>
         <p:nvSpPr>
@@ -30193,6 +30925,10 @@
           </a:solidFill>
           <a:ln/>
         </p:spPr>
+        <p:txBody>
+          <a:bodyPr/>
+          <a:p/>
+        </p:txBody>
       </p:sp>
       <p:sp>
         <p:nvSpPr>
@@ -30254,6 +30990,10 @@
           </a:solidFill>
           <a:ln/>
         </p:spPr>
+        <p:txBody>
+          <a:bodyPr/>
+          <a:p/>
+        </p:txBody>
       </p:sp>
       <p:sp>
         <p:nvSpPr>
@@ -30315,6 +31055,10 @@
           </a:solidFill>
           <a:ln/>
         </p:spPr>
+        <p:txBody>
+          <a:bodyPr/>
+          <a:p/>
+        </p:txBody>
       </p:sp>
       <p:sp>
         <p:nvSpPr>
@@ -30376,6 +31120,10 @@
           </a:solidFill>
           <a:ln/>
         </p:spPr>
+        <p:txBody>
+          <a:bodyPr/>
+          <a:p/>
+        </p:txBody>
       </p:sp>
       <p:sp>
         <p:nvSpPr>
@@ -30598,6 +31346,10 @@
           </a:solidFill>
           <a:ln/>
         </p:spPr>
+        <p:txBody>
+          <a:bodyPr/>
+          <a:p/>
+        </p:txBody>
       </p:sp>
       <p:sp>
         <p:nvSpPr>
@@ -30757,7 +31509,7 @@
                 <a:ea typeface="微软雅黑" pitchFamily="34" charset="-122"/>
                 <a:cs typeface="微软雅黑" pitchFamily="34" charset="-120"/>
               </a:rPr>
-              <a:t>帮扶管理信息系统 v1.15.0</a:t>
+              <a:t>帮扶管理信息系统 v1.15.13</a:t>
             </a:r>
             <a:endParaRPr lang="en-US" sz="1050" dirty="0"/>
           </a:p>
@@ -30823,6 +31575,10 @@
           </a:solidFill>
           <a:ln/>
         </p:spPr>
+        <p:txBody>
+          <a:bodyPr/>
+          <a:p/>
+        </p:txBody>
       </p:sp>
       <p:sp>
         <p:nvSpPr>
@@ -30925,6 +31681,10 @@
           </a:solidFill>
           <a:ln/>
         </p:spPr>
+        <p:txBody>
+          <a:bodyPr/>
+          <a:p/>
+        </p:txBody>
       </p:sp>
       <p:sp>
         <p:nvSpPr>
@@ -31027,6 +31787,10 @@
           </a:solidFill>
           <a:ln/>
         </p:spPr>
+        <p:txBody>
+          <a:bodyPr/>
+          <a:p/>
+        </p:txBody>
       </p:sp>
       <p:sp>
         <p:nvSpPr>
@@ -31507,6 +32271,10 @@
           </a:solidFill>
           <a:ln/>
         </p:spPr>
+        <p:txBody>
+          <a:bodyPr/>
+          <a:p/>
+        </p:txBody>
       </p:sp>
       <p:sp>
         <p:nvSpPr>
@@ -31666,7 +32434,7 @@
                 <a:ea typeface="微软雅黑" pitchFamily="34" charset="-122"/>
                 <a:cs typeface="微软雅黑" pitchFamily="34" charset="-120"/>
               </a:rPr>
-              <a:t>帮扶管理信息系统 v1.15.0</a:t>
+              <a:t>帮扶管理信息系统 v1.15.13</a:t>
             </a:r>
             <a:endParaRPr lang="en-US" sz="1050" dirty="0"/>
           </a:p>
@@ -31723,7 +32491,7 @@
                 <a:ea typeface="微软雅黑" pitchFamily="34" charset="-122"/>
                 <a:cs typeface="微软雅黑" pitchFamily="34" charset="-120"/>
               </a:rPr>
-              <a:t>数据来源：2026-10-19 实测（v1.15.0）· 后端 13,710 / 前端 6,826 用例（328 文件）· 覆盖率 100% · 视觉回归 10 页</a:t>
+              <a:t>数据来源：2026-10-19 实测（v1.15.13）· 后端 13,926 / 前端 6,865 用例（328 文件）· 覆盖率 100% · 视觉回归 10 页</a:t>
             </a:r>
             <a:endParaRPr lang="en-US" sz="1000" dirty="0"/>
           </a:p>
@@ -31757,6 +32525,10 @@
             </a:outerShdw>
           </a:effectLst>
         </p:spPr>
+        <p:txBody>
+          <a:bodyPr/>
+          <a:p/>
+        </p:txBody>
       </p:sp>
       <p:sp>
         <p:nvSpPr>
@@ -32021,6 +32793,10 @@
           </a:solidFill>
           <a:ln/>
         </p:spPr>
+        <p:txBody>
+          <a:bodyPr/>
+          <a:p/>
+        </p:txBody>
       </p:sp>
       <p:sp>
         <p:nvSpPr>
@@ -32180,7 +32956,7 @@
                 <a:ea typeface="微软雅黑" pitchFamily="34" charset="-122"/>
                 <a:cs typeface="微软雅黑" pitchFamily="34" charset="-120"/>
               </a:rPr>
-              <a:t>帮扶管理信息系统 v1.15.0</a:t>
+              <a:t>帮扶管理信息系统 v1.15.13</a:t>
             </a:r>
             <a:endParaRPr lang="en-US" sz="1050" dirty="0"/>
           </a:p>
@@ -32207,6 +32983,10 @@
           </a:solidFill>
           <a:ln/>
         </p:spPr>
+        <p:txBody>
+          <a:bodyPr/>
+          <a:p/>
+        </p:txBody>
       </p:sp>
       <p:sp>
         <p:nvSpPr>
@@ -32284,7 +33064,7 @@
                 <a:ea typeface="微软雅黑" pitchFamily="34" charset="-122"/>
                 <a:cs typeface="微软雅黑" pitchFamily="34" charset="-120"/>
               </a:rPr>
-              <a:t>每次 PR：后端测试 + 前端测试 + flake8 + Codecov 覆盖率对比</a:t>
+              <a:t>每次 PR/推 main：后端 12 段独立进程测试（--cov-append 合并、覆盖率 100% 硬门禁）+ 前端测试 + flake8/bandit + 静态门禁 + Codecov</a:t>
             </a:r>
             <a:endParaRPr lang="en-US" sz="1300" dirty="0"/>
           </a:p>
@@ -32311,6 +33091,10 @@
           </a:solidFill>
           <a:ln/>
         </p:spPr>
+        <p:txBody>
+          <a:bodyPr/>
+          <a:p/>
+        </p:txBody>
       </p:sp>
       <p:sp>
         <p:nvSpPr>
@@ -32388,7 +33172,7 @@
                 <a:ea typeface="微软雅黑" pitchFamily="34" charset="-122"/>
                 <a:cs typeface="微软雅黑" pitchFamily="34" charset="-120"/>
               </a:rPr>
-              <a:t>每日全量：三 job（后端/前端/质量报告）+ JUnit/HTML 报告</a:t>
+              <a:t>每日全量：后端同口径 6 段 + 前端全量 + 质量报告（JUnit / HTML 覆盖率报告）</a:t>
             </a:r>
             <a:endParaRPr lang="en-US" sz="1300" dirty="0"/>
           </a:p>
@@ -32415,6 +33199,10 @@
           </a:solidFill>
           <a:ln/>
         </p:spPr>
+        <p:txBody>
+          <a:bodyPr/>
+          <a:p/>
+        </p:txBody>
       </p:sp>
       <p:sp>
         <p:nvSpPr>
@@ -32492,7 +33280,7 @@
                 <a:ea typeface="微软雅黑" pitchFamily="34" charset="-122"/>
                 <a:cs typeface="微软雅黑" pitchFamily="34" charset="-120"/>
               </a:rPr>
-              <a:t>打 tag 自动构建：Windows NSIS + 麒麟 ARM64 双 DEB + SHA256SUMS → Release</a:t>
+              <a:t>打 tag 自动构建：发布门禁（tag commit 的 PR Checks 必须全绿）→ Windows NSIS + 麒麟双 DEB + SHA256SUMS → Release</a:t>
             </a:r>
             <a:endParaRPr lang="en-US" sz="1300" dirty="0"/>
           </a:p>
@@ -32519,6 +33307,10 @@
           </a:solidFill>
           <a:ln/>
         </p:spPr>
+        <p:txBody>
+          <a:bodyPr/>
+          <a:p/>
+        </p:txBody>
       </p:sp>
       <p:sp>
         <p:nvSpPr>
@@ -32637,7 +33429,7 @@
                 <a:ea typeface="微软雅黑" pitchFamily="34" charset="-122"/>
                 <a:cs typeface="微软雅黑" pitchFamily="34" charset="-120"/>
               </a:rPr>
-              <a:t>构建产物：Setup-x64.exe（Windows）· Electron DEB + standalone DEB（麒麟 ARM64，buildx+QEMU 交叉构建，layer 缓存加速）</a:t>
+              <a:t>构建产物：Setup-x64.exe（Windows，含 VC++ 运行库）· Electron DEB + standalone DEB（麒麟 ARM64，buildx+QEMU 交叉构建，layer 缓存加速）</a:t>
             </a:r>
             <a:endParaRPr lang="en-US" sz="1200" dirty="0"/>
           </a:p>
@@ -32694,6 +33486,10 @@
           </a:solidFill>
           <a:ln/>
         </p:spPr>
+        <p:txBody>
+          <a:bodyPr/>
+          <a:p/>
+        </p:txBody>
       </p:sp>
       <p:sp>
         <p:nvSpPr>
@@ -32853,7 +33649,7 @@
                 <a:ea typeface="微软雅黑" pitchFamily="34" charset="-122"/>
                 <a:cs typeface="微软雅黑" pitchFamily="34" charset="-120"/>
               </a:rPr>
-              <a:t>帮扶管理信息系统 v1.15.0</a:t>
+              <a:t>帮扶管理信息系统 v1.15.13</a:t>
             </a:r>
             <a:endParaRPr lang="en-US" sz="1050" dirty="0"/>
           </a:p>
@@ -32887,6 +33683,10 @@
             </a:outerShdw>
           </a:effectLst>
         </p:spPr>
+        <p:txBody>
+          <a:bodyPr/>
+          <a:p/>
+        </p:txBody>
       </p:sp>
       <p:sp>
         <p:nvSpPr>
@@ -33052,7 +33852,7 @@
                 <a:ea typeface="微软雅黑" pitchFamily="34" charset="-122"/>
                 <a:cs typeface="微软雅黑" pitchFamily="34" charset="-120"/>
               </a:rPr>
-              <a:t>SHA256SUMS 随 Release 附带，分发前可校验</a:t>
+              <a:t>CI 安装包冒烟：解包直跑后端并断言 /health + 包内禁含测试资产 + 构建指纹 builder=ci；SHA256SUMS 随 Release 附带</a:t>
             </a:r>
             <a:endParaRPr lang="en-US" sz="1300" dirty="0"/>
           </a:p>
@@ -33086,6 +33886,10 @@
             </a:outerShdw>
           </a:effectLst>
         </p:spPr>
+        <p:txBody>
+          <a:bodyPr/>
+          <a:p/>
+        </p:txBody>
       </p:sp>
       <p:sp>
         <p:nvSpPr>
@@ -33308,6 +34112,10 @@
           </a:solidFill>
           <a:ln/>
         </p:spPr>
+        <p:txBody>
+          <a:bodyPr/>
+          <a:p/>
+        </p:txBody>
       </p:sp>
       <p:sp>
         <p:nvSpPr>
@@ -33467,7 +34275,7 @@
                 <a:ea typeface="微软雅黑" pitchFamily="34" charset="-122"/>
                 <a:cs typeface="微软雅黑" pitchFamily="34" charset="-120"/>
               </a:rPr>
-              <a:t>帮扶管理信息系统 v1.15.0</a:t>
+              <a:t>帮扶管理信息系统 v1.15.13</a:t>
             </a:r>
             <a:endParaRPr lang="en-US" sz="1050" dirty="0"/>
           </a:p>
@@ -33501,6 +34309,10 @@
             </a:outerShdw>
           </a:effectLst>
         </p:spPr>
+        <p:txBody>
+          <a:bodyPr/>
+          <a:p/>
+        </p:txBody>
       </p:sp>
       <p:sp>
         <p:nvSpPr>
@@ -33700,6 +34512,10 @@
             </a:outerShdw>
           </a:effectLst>
         </p:spPr>
+        <p:txBody>
+          <a:bodyPr/>
+          <a:p/>
+        </p:txBody>
       </p:sp>
       <p:sp>
         <p:nvSpPr>
@@ -34247,6 +35063,10 @@
           </a:solidFill>
           <a:ln/>
         </p:spPr>
+        <p:txBody>
+          <a:bodyPr/>
+          <a:p/>
+        </p:txBody>
       </p:sp>
       <p:sp>
         <p:nvSpPr>
@@ -34406,7 +35226,7 @@
                 <a:ea typeface="微软雅黑" pitchFamily="34" charset="-122"/>
                 <a:cs typeface="微软雅黑" pitchFamily="34" charset="-120"/>
               </a:rPr>
-              <a:t>帮扶管理信息系统 v1.15.0</a:t>
+              <a:t>帮扶管理信息系统 v1.15.13</a:t>
             </a:r>
             <a:endParaRPr lang="en-US" sz="1050" dirty="0"/>
           </a:p>
@@ -34440,6 +35260,10 @@
             </a:outerShdw>
           </a:effectLst>
         </p:spPr>
+        <p:txBody>
+          <a:bodyPr/>
+          <a:p/>
+        </p:txBody>
       </p:sp>
       <p:sp>
         <p:nvSpPr>
@@ -34503,6 +35327,10 @@
           </a:solidFill>
           <a:ln/>
         </p:spPr>
+        <p:txBody>
+          <a:bodyPr/>
+          <a:p/>
+        </p:txBody>
       </p:sp>
       <p:sp>
         <p:nvSpPr>
@@ -34647,7 +35475,7 @@
                 <a:ea typeface="微软雅黑" pitchFamily="34" charset="-122"/>
                 <a:cs typeface="微软雅黑" pitchFamily="34" charset="-120"/>
               </a:rPr>
-              <a:t>223 MB</a:t>
+              <a:t>~286 MB（v1.14.3 实测）</a:t>
             </a:r>
             <a:endParaRPr lang="en-US" sz="1300" dirty="0"/>
           </a:p>
@@ -34711,6 +35539,10 @@
             </a:outerShdw>
           </a:effectLst>
         </p:spPr>
+        <p:txBody>
+          <a:bodyPr/>
+          <a:p/>
+        </p:txBody>
       </p:sp>
       <p:sp>
         <p:nvSpPr>
@@ -34774,6 +35606,10 @@
           </a:solidFill>
           <a:ln/>
         </p:spPr>
+        <p:txBody>
+          <a:bodyPr/>
+          <a:p/>
+        </p:txBody>
       </p:sp>
       <p:sp>
         <p:nvSpPr>
@@ -34918,7 +35754,7 @@
                 <a:ea typeface="微软雅黑" pitchFamily="34" charset="-122"/>
                 <a:cs typeface="微软雅黑" pitchFamily="34" charset="-120"/>
               </a:rPr>
-              <a:t>132 MB</a:t>
+              <a:t>~205 MB</a:t>
             </a:r>
             <a:endParaRPr lang="en-US" sz="1300" dirty="0"/>
           </a:p>
@@ -34982,6 +35818,10 @@
             </a:outerShdw>
           </a:effectLst>
         </p:spPr>
+        <p:txBody>
+          <a:bodyPr/>
+          <a:p/>
+        </p:txBody>
       </p:sp>
       <p:sp>
         <p:nvSpPr>
@@ -35045,6 +35885,10 @@
           </a:solidFill>
           <a:ln/>
         </p:spPr>
+        <p:txBody>
+          <a:bodyPr/>
+          <a:p/>
+        </p:txBody>
       </p:sp>
       <p:sp>
         <p:nvSpPr>
@@ -35189,7 +36033,7 @@
                 <a:ea typeface="微软雅黑" pitchFamily="34" charset="-122"/>
                 <a:cs typeface="微软雅黑" pitchFamily="34" charset="-120"/>
               </a:rPr>
-              <a:t>55 MB</a:t>
+              <a:t>~61 MB</a:t>
             </a:r>
             <a:endParaRPr lang="en-US" sz="1300" dirty="0"/>
           </a:p>
@@ -35317,6 +36161,10 @@
           </a:solidFill>
           <a:ln/>
         </p:spPr>
+        <p:txBody>
+          <a:bodyPr/>
+          <a:p/>
+        </p:txBody>
       </p:sp>
       <p:sp>
         <p:nvSpPr>
@@ -35476,7 +36324,7 @@
                 <a:ea typeface="微软雅黑" pitchFamily="34" charset="-122"/>
                 <a:cs typeface="微软雅黑" pitchFamily="34" charset="-120"/>
               </a:rPr>
-              <a:t>帮扶管理信息系统 v1.15.0</a:t>
+              <a:t>帮扶管理信息系统 v1.15.13</a:t>
             </a:r>
             <a:endParaRPr lang="en-US" sz="1050" dirty="0"/>
           </a:p>
@@ -35510,6 +36358,10 @@
             </a:outerShdw>
           </a:effectLst>
         </p:spPr>
+        <p:txBody>
+          <a:bodyPr/>
+          <a:p/>
+        </p:txBody>
       </p:sp>
       <p:sp>
         <p:nvSpPr>
@@ -35709,6 +36561,10 @@
             </a:outerShdw>
           </a:effectLst>
         </p:spPr>
+        <p:txBody>
+          <a:bodyPr/>
+          <a:p/>
+        </p:txBody>
       </p:sp>
       <p:sp>
         <p:nvSpPr>
@@ -35952,6 +36808,10 @@
           </a:solidFill>
           <a:ln/>
         </p:spPr>
+        <p:txBody>
+          <a:bodyPr/>
+          <a:p/>
+        </p:txBody>
       </p:sp>
       <p:sp>
         <p:nvSpPr>
@@ -36111,7 +36971,7 @@
                 <a:ea typeface="微软雅黑" pitchFamily="34" charset="-122"/>
                 <a:cs typeface="微软雅黑" pitchFamily="34" charset="-120"/>
               </a:rPr>
-              <a:t>帮扶管理信息系统 v1.15.0</a:t>
+              <a:t>v1.15.13</a:t>
             </a:r>
             <a:endParaRPr lang="en-US" sz="1050" dirty="0"/>
           </a:p>
@@ -36139,6 +36999,10 @@
             <a:prstDash val="solid"/>
           </a:ln>
         </p:spPr>
+        <p:txBody>
+          <a:bodyPr/>
+          <a:p/>
+        </p:txBody>
       </p:sp>
       <p:sp>
         <p:nvSpPr>
@@ -36159,6 +37023,10 @@
           </a:solidFill>
           <a:ln/>
         </p:spPr>
+        <p:txBody>
+          <a:bodyPr/>
+          <a:p/>
+        </p:txBody>
       </p:sp>
       <p:sp>
         <p:nvSpPr>
@@ -36302,6 +37170,10 @@
           </a:solidFill>
           <a:ln/>
         </p:spPr>
+        <p:txBody>
+          <a:bodyPr/>
+          <a:p/>
+        </p:txBody>
       </p:sp>
       <p:sp>
         <p:nvSpPr>
@@ -36445,6 +37317,10 @@
           </a:solidFill>
           <a:ln/>
         </p:spPr>
+        <p:txBody>
+          <a:bodyPr/>
+          <a:p/>
+        </p:txBody>
       </p:sp>
       <p:sp>
         <p:nvSpPr>
@@ -36588,6 +37464,10 @@
           </a:solidFill>
           <a:ln/>
         </p:spPr>
+        <p:txBody>
+          <a:bodyPr/>
+          <a:p/>
+        </p:txBody>
       </p:sp>
       <p:sp>
         <p:nvSpPr>
@@ -36624,7 +37504,7 @@
                 <a:ea typeface="微软雅黑" pitchFamily="34" charset="-122"/>
                 <a:cs typeface="微软雅黑" pitchFamily="34" charset="-120"/>
               </a:rPr>
-              <a:t>v1.15.0</a:t>
+              <a:t>v1.15.13</a:t>
             </a:r>
             <a:endParaRPr lang="en-US" sz="1500" dirty="0"/>
           </a:p>
@@ -36706,7 +37586,7 @@
                 <a:ea typeface="微软雅黑" pitchFamily="34" charset="-122"/>
                 <a:cs typeface="微软雅黑" pitchFamily="34" charset="-120"/>
               </a:rPr>
-              <a:t>UI v2.0 重构：主题 3 套 + 显示偏好 4 档 + Token 升级 + 全局组件类/6 通用组件 + 侧栏金色竖条/浮层/面包屑 + 工作台 KPI + 大屏三层/距离字号/轮播 + 视觉回归门禁</a:t>
+              <a:t>v1.15.13 UI v2.0 重构 + v1.15.13 安全收官（viewer 严格只读 / 非回环注册 fail-closed / ARM64 发布门禁）+ v1.15.13 R33 单位授权（上级配置·签名包下发·下级验签导入）</a:t>
             </a:r>
             <a:endParaRPr lang="en-US" sz="1150" dirty="0"/>
           </a:p>
@@ -36740,6 +37620,10 @@
             </a:outerShdw>
           </a:effectLst>
         </p:spPr>
+        <p:txBody>
+          <a:bodyPr/>
+          <a:p/>
+        </p:txBody>
       </p:sp>
       <p:sp>
         <p:nvSpPr>
@@ -36776,7 +37660,7 @@
                 <a:ea typeface="微软雅黑" pitchFamily="34" charset="-122"/>
                 <a:cs typeface="微软雅黑" pitchFamily="34" charset="-120"/>
               </a:rPr>
-              <a:t>净效果：13,710 后端用例（行+分支覆盖率 100%）+ 6,826 前端用例全绿（328 文件）+ 10 页视觉回归基线；Windows x64 与麒麟 ARM64 两个离线安装包由 GitHub Actions 全自动构建并发布 Release</a:t>
+              <a:t>净效果：13,926 后端用例（行+分支覆盖率 100%）+ 6,865 前端用例全绿（328 文件）+ 10 页视觉回归基线；Windows x64 与麒麟 ARM64 离线安装包由 GitHub Actions 自动构建并发布 Release（发布前强制校验 tag commit 的 PR Checks 全绿）</a:t>
             </a:r>
             <a:endParaRPr lang="en-US" sz="1350" dirty="0"/>
           </a:p>
@@ -36833,6 +37717,10 @@
           </a:solidFill>
           <a:ln/>
         </p:spPr>
+        <p:txBody>
+          <a:bodyPr/>
+          <a:p/>
+        </p:txBody>
       </p:sp>
       <p:sp>
         <p:nvSpPr>
@@ -36992,7 +37880,7 @@
                 <a:ea typeface="微软雅黑" pitchFamily="34" charset="-122"/>
                 <a:cs typeface="微软雅黑" pitchFamily="34" charset="-120"/>
               </a:rPr>
-              <a:t>帮扶管理信息系统 v1.15.0</a:t>
+              <a:t>帮扶管理信息系统 v1.15.13</a:t>
             </a:r>
             <a:endParaRPr lang="en-US" sz="1050" dirty="0"/>
           </a:p>
@@ -37026,6 +37914,10 @@
             </a:outerShdw>
           </a:effectLst>
         </p:spPr>
+        <p:txBody>
+          <a:bodyPr/>
+          <a:p/>
+        </p:txBody>
       </p:sp>
       <p:sp>
         <p:nvSpPr>
@@ -37137,6 +38029,10 @@
             </a:outerShdw>
           </a:effectLst>
         </p:spPr>
+        <p:txBody>
+          <a:bodyPr/>
+          <a:p/>
+        </p:txBody>
       </p:sp>
       <p:sp>
         <p:nvSpPr>
@@ -37248,6 +38144,10 @@
             </a:outerShdw>
           </a:effectLst>
         </p:spPr>
+        <p:txBody>
+          <a:bodyPr/>
+          <a:p/>
+        </p:txBody>
       </p:sp>
       <p:sp>
         <p:nvSpPr>
@@ -37359,6 +38259,10 @@
             </a:outerShdw>
           </a:effectLst>
         </p:spPr>
+        <p:txBody>
+          <a:bodyPr/>
+          <a:p/>
+        </p:txBody>
       </p:sp>
       <p:sp>
         <p:nvSpPr>
@@ -37470,6 +38374,10 @@
             </a:outerShdw>
           </a:effectLst>
         </p:spPr>
+        <p:txBody>
+          <a:bodyPr/>
+          <a:p/>
+        </p:txBody>
       </p:sp>
       <p:sp>
         <p:nvSpPr>
@@ -37581,6 +38489,10 @@
             </a:outerShdw>
           </a:effectLst>
         </p:spPr>
+        <p:txBody>
+          <a:bodyPr/>
+          <a:p/>
+        </p:txBody>
       </p:sp>
       <p:sp>
         <p:nvSpPr>
@@ -37715,6 +38627,10 @@
           </a:solidFill>
           <a:ln/>
         </p:spPr>
+        <p:txBody>
+          <a:bodyPr/>
+          <a:p/>
+        </p:txBody>
       </p:sp>
       <p:sp>
         <p:nvSpPr>
@@ -37874,7 +38790,7 @@
                 <a:ea typeface="微软雅黑" pitchFamily="34" charset="-122"/>
                 <a:cs typeface="微软雅黑" pitchFamily="34" charset="-120"/>
               </a:rPr>
-              <a:t>帮扶管理信息系统 v1.15.0</a:t>
+              <a:t>帮扶管理信息系统 v1.15.13</a:t>
             </a:r>
             <a:endParaRPr lang="en-US" sz="1050" dirty="0"/>
           </a:p>
@@ -37908,6 +38824,10 @@
             </a:outerShdw>
           </a:effectLst>
         </p:spPr>
+        <p:txBody>
+          <a:bodyPr/>
+          <a:p/>
+        </p:txBody>
       </p:sp>
       <p:sp>
         <p:nvSpPr>
@@ -37928,6 +38848,10 @@
           </a:solidFill>
           <a:ln/>
         </p:spPr>
+        <p:txBody>
+          <a:bodyPr/>
+          <a:p/>
+        </p:txBody>
       </p:sp>
       <p:sp>
         <p:nvSpPr>
@@ -38039,6 +38963,10 @@
             </a:outerShdw>
           </a:effectLst>
         </p:spPr>
+        <p:txBody>
+          <a:bodyPr/>
+          <a:p/>
+        </p:txBody>
       </p:sp>
       <p:sp>
         <p:nvSpPr>
@@ -38059,6 +38987,10 @@
           </a:solidFill>
           <a:ln/>
         </p:spPr>
+        <p:txBody>
+          <a:bodyPr/>
+          <a:p/>
+        </p:txBody>
       </p:sp>
       <p:sp>
         <p:nvSpPr>
@@ -38170,6 +39102,10 @@
             </a:outerShdw>
           </a:effectLst>
         </p:spPr>
+        <p:txBody>
+          <a:bodyPr/>
+          <a:p/>
+        </p:txBody>
       </p:sp>
       <p:sp>
         <p:nvSpPr>
@@ -38190,6 +39126,10 @@
           </a:solidFill>
           <a:ln/>
         </p:spPr>
+        <p:txBody>
+          <a:bodyPr/>
+          <a:p/>
+        </p:txBody>
       </p:sp>
       <p:sp>
         <p:nvSpPr>
@@ -38301,6 +39241,10 @@
             </a:outerShdw>
           </a:effectLst>
         </p:spPr>
+        <p:txBody>
+          <a:bodyPr/>
+          <a:p/>
+        </p:txBody>
       </p:sp>
       <p:sp>
         <p:nvSpPr>
@@ -38321,6 +39265,10 @@
           </a:solidFill>
           <a:ln/>
         </p:spPr>
+        <p:txBody>
+          <a:bodyPr/>
+          <a:p/>
+        </p:txBody>
       </p:sp>
       <p:sp>
         <p:nvSpPr>
@@ -38455,6 +39403,10 @@
           </a:solidFill>
           <a:ln/>
         </p:spPr>
+        <p:txBody>
+          <a:bodyPr/>
+          <a:p/>
+        </p:txBody>
       </p:sp>
       <p:sp>
         <p:nvSpPr>
@@ -38475,6 +39427,10 @@
           </a:solidFill>
           <a:ln/>
         </p:spPr>
+        <p:txBody>
+          <a:bodyPr/>
+          <a:p/>
+        </p:txBody>
       </p:sp>
       <p:sp>
         <p:nvSpPr>
@@ -38593,7 +39549,7 @@
                 <a:ea typeface="微软雅黑" pitchFamily="34" charset="-122"/>
                 <a:cs typeface="微软雅黑" pitchFamily="34" charset="-120"/>
               </a:rPr>
-              <a:t>帮扶管理信息系统 v1.15.0  ·  仓库：github.com/lzh745200/MRRS  ·  完整文档见 docs/ 目录</a:t>
+              <a:t>帮扶管理信息系统 v1.15.13  ·  仓库：github.com/lzh745200/MRRS  ·  完整文档见 docs/ 目录</a:t>
             </a:r>
             <a:endParaRPr lang="en-US" sz="1350" dirty="0"/>
           </a:p>
@@ -38634,7 +39590,7 @@
                 <a:ea typeface="微软雅黑" pitchFamily="34" charset="-122"/>
                 <a:cs typeface="微软雅黑" pitchFamily="34" charset="-120"/>
               </a:rPr>
-              <a:t>13,710 后端用例 + 6,826 前端用例全绿守护 · 10 页视觉回归基线 · 双平台离线交付</a:t>
+              <a:t>13,926 后端用例 + 6,865 前端用例全绿守护 · 10 页视觉回归基线 · 双平台离线交付</a:t>
             </a:r>
             <a:endParaRPr lang="en-US" sz="1350" dirty="0"/>
           </a:p>
@@ -38691,6 +39647,10 @@
           </a:solidFill>
           <a:ln/>
         </p:spPr>
+        <p:txBody>
+          <a:bodyPr/>
+          <a:p/>
+        </p:txBody>
       </p:sp>
       <p:sp>
         <p:nvSpPr>
@@ -38850,7 +39810,7 @@
                 <a:ea typeface="微软雅黑" pitchFamily="34" charset="-122"/>
                 <a:cs typeface="微软雅黑" pitchFamily="34" charset="-120"/>
               </a:rPr>
-              <a:t>帮扶管理信息系统 v1.15.0</a:t>
+              <a:t>帮扶管理信息系统 v1.15.13</a:t>
             </a:r>
             <a:endParaRPr lang="en-US" sz="1050" dirty="0"/>
           </a:p>
@@ -38891,7 +39851,7 @@
                 <a:ea typeface="微软雅黑" pitchFamily="34" charset="-122"/>
                 <a:cs typeface="微软雅黑" pitchFamily="34" charset="-120"/>
               </a:rPr>
-              <a:t>13,710</a:t>
+              <a:t>13,926</a:t>
             </a:r>
             <a:endParaRPr lang="en-US" sz="4000" dirty="0"/>
           </a:p>
@@ -38973,7 +39933,7 @@
                 <a:ea typeface="微软雅黑" pitchFamily="34" charset="-122"/>
                 <a:cs typeface="微软雅黑" pitchFamily="34" charset="-120"/>
               </a:rPr>
-              <a:t>6,826</a:t>
+              <a:t>6,865</a:t>
             </a:r>
             <a:endParaRPr lang="en-US" sz="4000" dirty="0"/>
           </a:p>
@@ -39206,6 +40166,10 @@
             <a:prstDash val="solid"/>
           </a:ln>
         </p:spPr>
+        <p:txBody>
+          <a:bodyPr/>
+          <a:p/>
+        </p:txBody>
       </p:sp>
       <p:sp>
         <p:nvSpPr>
@@ -39570,7 +40534,7 @@
                 <a:ea typeface="微软雅黑" pitchFamily="34" charset="-122"/>
                 <a:cs typeface="微软雅黑" pitchFamily="34" charset="-120"/>
               </a:rPr>
-              <a:t>数据来源：2026-10-19（v1.15.0）—— 后端 13,710 用例全绿（1 skipped）/ 行+分支 100%；前端 328 文件 / 6,826 用例（12 组 glob 100%）；UI 主题 3 套 · 显示偏好 4 档 · 视觉回归 10 页 · 硬编码色 305（基线 345）</a:t>
+              <a:t>数据来源：2026-10-19（v1.15.13）—— 后端 13,926 用例全绿（1 skipped）/ 行+分支 100%；前端 328 文件 / 6,865 用例（12 组 glob 100%）；UI 主题 3 套 · 显示偏好 4 档 · 视觉回归 10 页 · 硬编码色 305（基线 345）</a:t>
             </a:r>
             <a:endParaRPr lang="en-US" sz="900" dirty="0"/>
           </a:p>
@@ -39931,6 +40895,10 @@
           </a:solidFill>
           <a:ln/>
         </p:spPr>
+        <p:txBody>
+          <a:bodyPr/>
+          <a:p/>
+        </p:txBody>
       </p:sp>
       <p:sp>
         <p:nvSpPr>
@@ -40090,7 +41058,7 @@
                 <a:ea typeface="微软雅黑" pitchFamily="34" charset="-122"/>
                 <a:cs typeface="微软雅黑" pitchFamily="34" charset="-120"/>
               </a:rPr>
-              <a:t>帮扶管理信息系统 v1.15.0</a:t>
+              <a:t>帮扶管理信息系统 v1.15.13</a:t>
             </a:r>
             <a:endParaRPr lang="en-US" sz="1050" dirty="0"/>
           </a:p>
@@ -40124,6 +41092,10 @@
             </a:outerShdw>
           </a:effectLst>
         </p:spPr>
+        <p:txBody>
+          <a:bodyPr/>
+          <a:p/>
+        </p:txBody>
       </p:sp>
       <p:sp>
         <p:nvSpPr>
@@ -40343,6 +41315,10 @@
             </a:outerShdw>
           </a:effectLst>
         </p:spPr>
+        <p:txBody>
+          <a:bodyPr/>
+          <a:p/>
+        </p:txBody>
       </p:sp>
       <p:sp>
         <p:nvSpPr>
@@ -40562,6 +41538,10 @@
             </a:outerShdw>
           </a:effectLst>
         </p:spPr>
+        <p:txBody>
+          <a:bodyPr/>
+          <a:p/>
+        </p:txBody>
       </p:sp>
       <p:sp>
         <p:nvSpPr>
@@ -40781,6 +41761,10 @@
             </a:outerShdw>
           </a:effectLst>
         </p:spPr>
+        <p:txBody>
+          <a:bodyPr/>
+          <a:p/>
+        </p:txBody>
       </p:sp>
       <p:sp>
         <p:nvSpPr>
@@ -41023,6 +42007,10 @@
           </a:solidFill>
           <a:ln/>
         </p:spPr>
+        <p:txBody>
+          <a:bodyPr/>
+          <a:p/>
+        </p:txBody>
       </p:sp>
       <p:sp>
         <p:nvSpPr>
@@ -41182,7 +42170,7 @@
                 <a:ea typeface="微软雅黑" pitchFamily="34" charset="-122"/>
                 <a:cs typeface="微软雅黑" pitchFamily="34" charset="-120"/>
               </a:rPr>
-              <a:t>帮扶管理信息系统 v1.15.0</a:t>
+              <a:t>帮扶管理信息系统 v1.15.13</a:t>
             </a:r>
             <a:endParaRPr lang="en-US" sz="1050" dirty="0"/>
           </a:p>
@@ -41209,6 +42197,10 @@
           </a:solidFill>
           <a:ln/>
         </p:spPr>
+        <p:txBody>
+          <a:bodyPr/>
+          <a:p/>
+        </p:txBody>
       </p:sp>
       <p:sp>
         <p:nvSpPr>
@@ -41315,6 +42307,10 @@
             <a:tailEnd type="triangle"/>
           </a:ln>
         </p:spPr>
+        <p:txBody>
+          <a:bodyPr/>
+          <a:p/>
+        </p:txBody>
       </p:sp>
       <p:sp>
         <p:nvSpPr>
@@ -41337,6 +42333,10 @@
           </a:solidFill>
           <a:ln/>
         </p:spPr>
+        <p:txBody>
+          <a:bodyPr/>
+          <a:p/>
+        </p:txBody>
       </p:sp>
       <p:sp>
         <p:nvSpPr>
@@ -41443,6 +42443,10 @@
             <a:tailEnd type="triangle"/>
           </a:ln>
         </p:spPr>
+        <p:txBody>
+          <a:bodyPr/>
+          <a:p/>
+        </p:txBody>
       </p:sp>
       <p:sp>
         <p:nvSpPr>
@@ -41465,6 +42469,10 @@
           </a:solidFill>
           <a:ln/>
         </p:spPr>
+        <p:txBody>
+          <a:bodyPr/>
+          <a:p/>
+        </p:txBody>
       </p:sp>
       <p:sp>
         <p:nvSpPr>
@@ -41571,6 +42579,10 @@
             <a:tailEnd type="triangle"/>
           </a:ln>
         </p:spPr>
+        <p:txBody>
+          <a:bodyPr/>
+          <a:p/>
+        </p:txBody>
       </p:sp>
       <p:sp>
         <p:nvSpPr>
@@ -41593,6 +42605,10 @@
           </a:solidFill>
           <a:ln/>
         </p:spPr>
+        <p:txBody>
+          <a:bodyPr/>
+          <a:p/>
+        </p:txBody>
       </p:sp>
       <p:sp>
         <p:nvSpPr>

--- a/docs/帮扶管理信息系统介绍.pptx
+++ b/docs/帮扶管理信息系统介绍.pptx
@@ -5680,6 +5680,10 @@
           </a:solidFill>
           <a:ln/>
         </p:spPr>
+        <p:txBody>
+          <a:bodyPr/>
+          <a:p/>
+        </p:txBody>
       </p:sp>
       <p:sp>
         <p:nvSpPr>
@@ -5700,6 +5704,10 @@
           </a:solidFill>
           <a:ln/>
         </p:spPr>
+        <p:txBody>
+          <a:bodyPr/>
+          <a:p/>
+        </p:txBody>
       </p:sp>
       <p:sp>
         <p:nvSpPr>
@@ -5720,6 +5728,10 @@
           </a:solidFill>
           <a:ln/>
         </p:spPr>
+        <p:txBody>
+          <a:bodyPr/>
+          <a:p/>
+        </p:txBody>
       </p:sp>
       <p:sp>
         <p:nvSpPr>
@@ -6000,6 +6012,10 @@
           </a:solidFill>
           <a:ln/>
         </p:spPr>
+        <p:txBody>
+          <a:bodyPr/>
+          <a:p/>
+        </p:txBody>
       </p:sp>
       <p:sp>
         <p:nvSpPr>
@@ -6159,7 +6175,7 @@
                 <a:ea typeface="微软雅黑" pitchFamily="34" charset="-122"/>
                 <a:cs typeface="微软雅黑" pitchFamily="34" charset="-120"/>
               </a:rPr>
-              <a:t>帮扶管理信息系统 v1.16.0</a:t>
+              <a:t>帮扶管理信息系统 v1.17.1</a:t>
             </a:r>
             <a:endParaRPr lang="en-US" sz="1050" dirty="0"/>
           </a:p>
@@ -6193,6 +6209,10 @@
             </a:outerShdw>
           </a:effectLst>
         </p:spPr>
+        <p:txBody>
+          <a:bodyPr/>
+          <a:p/>
+        </p:txBody>
       </p:sp>
       <p:sp>
         <p:nvSpPr>
@@ -6358,7 +6378,7 @@
                 <a:ea typeface="微软雅黑" pitchFamily="34" charset="-122"/>
                 <a:cs typeface="微软雅黑" pitchFamily="34" charset="-120"/>
               </a:rPr>
-              <a:t>331 个测试文件 / 6,867 个用例（12 组 glob 100%）</a:t>
+              <a:t>339 个测试文件 / 7,020 个用例（12 组 glob 100%）</a:t>
             </a:r>
             <a:endParaRPr lang="en-US" sz="1150" dirty="0"/>
           </a:p>
@@ -6434,6 +6454,10 @@
             </a:outerShdw>
           </a:effectLst>
         </p:spPr>
+        <p:txBody>
+          <a:bodyPr/>
+          <a:p/>
+        </p:txBody>
       </p:sp>
       <p:sp>
         <p:nvSpPr>
@@ -6677,6 +6701,10 @@
           </a:solidFill>
           <a:ln/>
         </p:spPr>
+        <p:txBody>
+          <a:bodyPr/>
+          <a:p/>
+        </p:txBody>
       </p:sp>
       <p:sp>
         <p:nvSpPr>
@@ -6836,7 +6864,7 @@
                 <a:ea typeface="微软雅黑" pitchFamily="34" charset="-122"/>
                 <a:cs typeface="微软雅黑" pitchFamily="34" charset="-120"/>
               </a:rPr>
-              <a:t>帮扶管理信息系统 v1.16.0</a:t>
+              <a:t>帮扶管理信息系统 v1.17.1</a:t>
             </a:r>
             <a:endParaRPr lang="en-US" sz="1050" dirty="0"/>
           </a:p>
@@ -6870,6 +6898,10 @@
             </a:outerShdw>
           </a:effectLst>
         </p:spPr>
+        <p:txBody>
+          <a:bodyPr/>
+          <a:p/>
+        </p:txBody>
       </p:sp>
       <p:sp>
         <p:nvSpPr>
@@ -7027,6 +7059,10 @@
             </a:outerShdw>
           </a:effectLst>
         </p:spPr>
+        <p:txBody>
+          <a:bodyPr/>
+          <a:p/>
+        </p:txBody>
       </p:sp>
       <p:sp>
         <p:nvSpPr>
@@ -7184,6 +7220,10 @@
             </a:outerShdw>
           </a:effectLst>
         </p:spPr>
+        <p:txBody>
+          <a:bodyPr/>
+          <a:p/>
+        </p:txBody>
       </p:sp>
       <p:sp>
         <p:nvSpPr>
@@ -7341,6 +7381,10 @@
             </a:outerShdw>
           </a:effectLst>
         </p:spPr>
+        <p:txBody>
+          <a:bodyPr/>
+          <a:p/>
+        </p:txBody>
       </p:sp>
       <p:sp>
         <p:nvSpPr>
@@ -7498,6 +7542,10 @@
             </a:outerShdw>
           </a:effectLst>
         </p:spPr>
+        <p:txBody>
+          <a:bodyPr/>
+          <a:p/>
+        </p:txBody>
       </p:sp>
       <p:sp>
         <p:nvSpPr>
@@ -7575,7 +7623,7 @@
                 <a:ea typeface="微软雅黑" pitchFamily="34" charset="-122"/>
                 <a:cs typeface="微软雅黑" pitchFamily="34" charset="-120"/>
               </a:rPr>
-              <a:t>颜色只用 var(--token)：硬编码色棘轮只降不升（基线 345 → 当前 305（57 个文件），目标 ≤200，改动文件零新增）；设计 Token 单源 tokens.scss，全局模板样式集中在 styles/components/*.scss；视觉回归基线可在 CI 稳定运行。</a:t>
+              <a:t>颜色只用 var(--token)：硬编码色棘轮只降不升（基线 345 → 当前 154（40 个文件），目标 ≤200，改动文件零新增）；设计 Token 单源 tokens.scss，全局模板样式集中在 styles/components/*.scss；视觉回归基线可在 CI 稳定运行。</a:t>
             </a:r>
             <a:endParaRPr lang="en-US" sz="1200" dirty="0"/>
           </a:p>
@@ -7632,6 +7680,10 @@
           </a:solidFill>
           <a:ln/>
         </p:spPr>
+        <p:txBody>
+          <a:bodyPr/>
+          <a:p/>
+        </p:txBody>
       </p:sp>
       <p:sp>
         <p:nvSpPr>
@@ -7791,7 +7843,7 @@
                 <a:ea typeface="微软雅黑" pitchFamily="34" charset="-122"/>
                 <a:cs typeface="微软雅黑" pitchFamily="34" charset="-120"/>
               </a:rPr>
-              <a:t>帮扶管理信息系统 v1.16.0</a:t>
+              <a:t>帮扶管理信息系统 v1.17.1</a:t>
             </a:r>
             <a:endParaRPr lang="en-US" sz="1050" dirty="0"/>
           </a:p>
@@ -7825,6 +7877,10 @@
             </a:outerShdw>
           </a:effectLst>
         </p:spPr>
+        <p:txBody>
+          <a:bodyPr/>
+          <a:p/>
+        </p:txBody>
       </p:sp>
       <p:sp>
         <p:nvSpPr>
@@ -8024,6 +8080,10 @@
             </a:outerShdw>
           </a:effectLst>
         </p:spPr>
+        <p:txBody>
+          <a:bodyPr/>
+          <a:p/>
+        </p:txBody>
       </p:sp>
       <p:sp>
         <p:nvSpPr>
@@ -8308,6 +8368,10 @@
           </a:solidFill>
           <a:ln/>
         </p:spPr>
+        <p:txBody>
+          <a:bodyPr/>
+          <a:p/>
+        </p:txBody>
       </p:sp>
       <p:sp>
         <p:nvSpPr>
@@ -8467,7 +8531,7 @@
                 <a:ea typeface="微软雅黑" pitchFamily="34" charset="-122"/>
                 <a:cs typeface="微软雅黑" pitchFamily="34" charset="-120"/>
               </a:rPr>
-              <a:t>帮扶管理信息系统 v1.16.0</a:t>
+              <a:t>帮扶管理信息系统 v1.17.1</a:t>
             </a:r>
             <a:endParaRPr lang="en-US" sz="1050" dirty="0"/>
           </a:p>
@@ -8501,6 +8565,10 @@
             </a:outerShdw>
           </a:effectLst>
         </p:spPr>
+        <p:txBody>
+          <a:bodyPr/>
+          <a:p/>
+        </p:txBody>
       </p:sp>
       <p:sp>
         <p:nvSpPr>
@@ -8679,6 +8747,10 @@
             </a:outerShdw>
           </a:effectLst>
         </p:spPr>
+        <p:txBody>
+          <a:bodyPr/>
+          <a:p/>
+        </p:txBody>
       </p:sp>
       <p:sp>
         <p:nvSpPr>
@@ -8922,6 +8994,10 @@
           </a:solidFill>
           <a:ln/>
         </p:spPr>
+        <p:txBody>
+          <a:bodyPr/>
+          <a:p/>
+        </p:txBody>
       </p:sp>
       <p:sp>
         <p:nvSpPr>
@@ -8999,7 +9075,7 @@
                 <a:ea typeface="微软雅黑" pitchFamily="34" charset="-122"/>
                 <a:cs typeface="微软雅黑" pitchFamily="34" charset="-120"/>
               </a:rPr>
-              <a:t>v1.16.0：系统管理梳理 + 危险操作硬化</a:t>
+              <a:t>v1.17：介质链路治理 + 系统自检</a:t>
             </a:r>
             <a:endParaRPr lang="en-US" sz="3000" dirty="0"/>
           </a:p>
@@ -9081,7 +9157,7 @@
                 <a:ea typeface="微软雅黑" pitchFamily="34" charset="-122"/>
                 <a:cs typeface="微软雅黑" pitchFamily="34" charset="-120"/>
               </a:rPr>
-              <a:t>帮扶管理信息系统 v1.16.0</a:t>
+              <a:t>帮扶管理信息系统 v1.17.1</a:t>
             </a:r>
             <a:endParaRPr lang="en-US" sz="1050" dirty="0"/>
           </a:p>
@@ -9115,6 +9191,10 @@
             </a:outerShdw>
           </a:effectLst>
         </p:spPr>
+        <p:txBody>
+          <a:bodyPr/>
+          <a:p/>
+        </p:txBody>
       </p:sp>
       <p:sp>
         <p:nvSpPr>
@@ -9151,7 +9231,7 @@
                 <a:ea typeface="微软雅黑" pitchFamily="34" charset="-122"/>
                 <a:cs typeface="微软雅黑" pitchFamily="34" charset="-120"/>
               </a:rPr>
-              <a:t>系统管理与安全</a:t>
+              <a:t>介质链路治理（v1.17.0）</a:t>
             </a:r>
             <a:endParaRPr lang="en-US" sz="1600" dirty="0"/>
           </a:p>
@@ -9196,112 +9276,7 @@
                 <a:ea typeface="微软雅黑" pitchFamily="34" charset="-122"/>
                 <a:cs typeface="微软雅黑" pitchFamily="34" charset="-120"/>
               </a:rPr>
-              <a:t>6 个聚合页改「左分组 + 右内容」，30 个 tab 按语义归组；纯呈现层，不改菜单 key / tab path / 权限 / ?tab= 深链</a:t>
-            </a:r>
-            <a:endParaRPr lang="en-US" sz="1150" dirty="0"/>
-          </a:p>
-          <a:p>
-            <a:pPr algn="l" marL="152400" indent="-152400">
-              <a:spcAft>
-                <a:spcPts val="800"/>
-              </a:spcAft>
-              <a:buSzPct val="100000"/>
-              <a:buChar char="▪"/>
-            </a:pPr>
-            <a:r>
-              <a:rPr lang="en-US" sz="1150" dirty="0">
-                <a:solidFill>
-                  <a:srgbClr val="1A2E24"/>
-                </a:solidFill>
-                <a:latin typeface="微软雅黑" pitchFamily="34" charset="0"/>
-                <a:ea typeface="微软雅黑" pitchFamily="34" charset="-122"/>
-                <a:cs typeface="微软雅黑" pitchFamily="34" charset="-120"/>
-              </a:rPr>
-              <a:t>危险操作两档确认（useDangerConfirm）；重置他人密码必须手工输入目标用户名</a:t>
-            </a:r>
-            <a:endParaRPr lang="en-US" sz="1150" dirty="0"/>
-          </a:p>
-          <a:p>
-            <a:pPr algn="l" marL="152400" indent="-152400">
-              <a:spcAft>
-                <a:spcPts val="800"/>
-              </a:spcAft>
-              <a:buSzPct val="100000"/>
-              <a:buChar char="▪"/>
-            </a:pPr>
-            <a:r>
-              <a:rPr lang="en-US" sz="1150" dirty="0">
-                <a:solidFill>
-                  <a:srgbClr val="1A2E24"/>
-                </a:solidFill>
-                <a:latin typeface="微软雅黑" pitchFamily="34" charset="0"/>
-                <a:ea typeface="微软雅黑" pitchFamily="34" charset="-122"/>
-                <a:cs typeface="微软雅黑" pitchFamily="34" charset="-120"/>
-              </a:rPr>
-              <a:t>四类危险操作强制审计：删除组织 / 恢复备份 / 轮换密钥 / 管理员重置密码</a:t>
-            </a:r>
-            <a:endParaRPr lang="en-US" sz="1150" dirty="0"/>
-          </a:p>
-          <a:p>
-            <a:pPr algn="l" marL="152400" indent="-152400">
-              <a:spcAft>
-                <a:spcPts val="800"/>
-              </a:spcAft>
-              <a:buSzPct val="100000"/>
-              <a:buChar char="▪"/>
-            </a:pPr>
-            <a:r>
-              <a:rPr lang="en-US" sz="1150" dirty="0">
-                <a:solidFill>
-                  <a:srgbClr val="1A2E24"/>
-                </a:solidFill>
-                <a:latin typeface="微软雅黑" pitchFamily="34" charset="0"/>
-                <a:ea typeface="微软雅黑" pitchFamily="34" charset="-122"/>
-                <a:cs typeface="微软雅黑" pitchFamily="34" charset="-120"/>
-              </a:rPr>
-              <a:t>权限抽屉「生效概览」：角色 + 数据范围 + 菜单来源一屏可见</a:t>
-            </a:r>
-            <a:endParaRPr lang="en-US" sz="1150" dirty="0"/>
-          </a:p>
-          <a:p>
-            <a:pPr algn="l" marL="152400" indent="-152400">
-              <a:spcAft>
-                <a:spcPts val="800"/>
-              </a:spcAft>
-              <a:buSzPct val="100000"/>
-              <a:buChar char="▪"/>
-            </a:pPr>
-            <a:r>
-              <a:rPr lang="en-US" sz="1150" dirty="0">
-                <a:solidFill>
-                  <a:srgbClr val="1A2E24"/>
-                </a:solidFill>
-                <a:latin typeface="微软雅黑" pitchFamily="34" charset="0"/>
-                <a:ea typeface="微软雅黑" pitchFamily="34" charset="-122"/>
-                <a:cs typeface="微软雅黑" pitchFamily="34" charset="-120"/>
-              </a:rPr>
-              <a:t>设备与授权中心：机器码 / 通行码批量复制，直达单位授权配置与导入授权包</a:t>
-            </a:r>
-            <a:endParaRPr lang="en-US" sz="1150" dirty="0"/>
-          </a:p>
-          <a:p>
-            <a:pPr algn="l" marL="152400" indent="-152400">
-              <a:spcAft>
-                <a:spcPts val="800"/>
-              </a:spcAft>
-              <a:buSzPct val="100000"/>
-              <a:buChar char="▪"/>
-            </a:pPr>
-            <a:r>
-              <a:rPr lang="en-US" sz="1150" dirty="0">
-                <a:solidFill>
-                  <a:srgbClr val="1A2E24"/>
-                </a:solidFill>
-                <a:latin typeface="微软雅黑" pitchFamily="34" charset="0"/>
-                <a:ea typeface="微软雅黑" pitchFamily="34" charset="-122"/>
-                <a:cs typeface="微软雅黑" pitchFamily="34" charset="-120"/>
-              </a:rPr>
-              <a:t>备份权限：普通用户可创建备份，下载 / 恢复 / 删除仍限管理员</a:t>
+              <a:t>整包查重：以 SHA256 为指纹查审计台账，同一个包重复导入直接 409，需显式放行 · 导入台账 + 回执：package_import / package_receipt 双记录，上级凭回执登记闭环（复用审计表，零新增迁移） · 来源单位码核对：包内 org_code 与本机单位码不一致默认阻断，防把上级/邻县的包导进本单位后数据挂错组织树 · 冲突策略落库：逐条比对 / 以包为准写入导入历史，事后可追溯 · 前端统一确认弹窗 ImportPreviewDialog：包信息 + 差异 + 重复告警 + 策略三选</a:t>
             </a:r>
             <a:endParaRPr lang="en-US" sz="1150" dirty="0"/>
           </a:p>
@@ -9335,6 +9310,10 @@
             </a:outerShdw>
           </a:effectLst>
         </p:spPr>
+        <p:txBody>
+          <a:bodyPr/>
+          <a:p/>
+        </p:txBody>
       </p:sp>
       <p:sp>
         <p:nvSpPr>
@@ -9371,7 +9350,7 @@
                 <a:ea typeface="微软雅黑" pitchFamily="34" charset="-122"/>
                 <a:cs typeface="微软雅黑" pitchFamily="34" charset="-120"/>
               </a:rPr>
-              <a:t>离线能力与门禁</a:t>
+              <a:t>系统自检 + 安全收敛（v1.17.0~1.17.1）</a:t>
             </a:r>
             <a:endParaRPr lang="en-US" sz="1600" dirty="0"/>
           </a:p>
@@ -9416,112 +9395,7 @@
                 <a:ea typeface="微软雅黑" pitchFamily="34" charset="-122"/>
                 <a:cs typeface="微软雅黑" pitchFamily="34" charset="-120"/>
               </a:rPr>
-              <a:t>离线瓦片地图：Leaflet 栅格瓦片，瓦片包构建机预置并进安装包；npm run tiles:verify</a:t>
-            </a:r>
-            <a:endParaRPr lang="en-US" sz="1150" dirty="0"/>
-          </a:p>
-          <a:p>
-            <a:pPr algn="l" marL="152400" indent="-152400">
-              <a:spcAft>
-                <a:spcPts val="800"/>
-              </a:spcAft>
-              <a:buSzPct val="100000"/>
-              <a:buChar char="▪"/>
-            </a:pPr>
-            <a:r>
-              <a:rPr lang="en-US" sz="1150" dirty="0">
-                <a:solidFill>
-                  <a:srgbClr val="1A2E24"/>
-                </a:solidFill>
-                <a:latin typeface="微软雅黑" pitchFamily="34" charset="0"/>
-                <a:ea typeface="微软雅黑" pitchFamily="34" charset="-122"/>
-                <a:cs typeface="微软雅黑" pitchFamily="34" charset="-120"/>
-              </a:rPr>
-              <a:t>PII 密钥跨机迁移：/system/pii-key 查看指纹 / 导出 / 导入（只记指纹不记密钥本体）</a:t>
-            </a:r>
-            <a:endParaRPr lang="en-US" sz="1150" dirty="0"/>
-          </a:p>
-          <a:p>
-            <a:pPr algn="l" marL="152400" indent="-152400">
-              <a:spcAft>
-                <a:spcPts val="800"/>
-              </a:spcAft>
-              <a:buSzPct val="100000"/>
-              <a:buChar char="▪"/>
-            </a:pPr>
-            <a:r>
-              <a:rPr lang="en-US" sz="1150" dirty="0">
-                <a:solidFill>
-                  <a:srgbClr val="1A2E24"/>
-                </a:solidFill>
-                <a:latin typeface="微软雅黑" pitchFamily="34" charset="0"/>
-                <a:ea typeface="微软雅黑" pitchFamily="34" charset="-122"/>
-                <a:cs typeface="微软雅黑" pitchFamily="34" charset="-120"/>
-              </a:rPr>
-              <a:t>ARM64 离线 OCR 出包门禁：真实识别冒烟 + 载荷断言，保持零外部依赖</a:t>
-            </a:r>
-            <a:endParaRPr lang="en-US" sz="1150" dirty="0"/>
-          </a:p>
-          <a:p>
-            <a:pPr algn="l" marL="152400" indent="-152400">
-              <a:spcAft>
-                <a:spcPts val="800"/>
-              </a:spcAft>
-              <a:buSzPct val="100000"/>
-              <a:buChar char="▪"/>
-            </a:pPr>
-            <a:r>
-              <a:rPr lang="en-US" sz="1150" dirty="0">
-                <a:solidFill>
-                  <a:srgbClr val="1A2E24"/>
-                </a:solidFill>
-                <a:latin typeface="微软雅黑" pitchFamily="34" charset="0"/>
-                <a:ea typeface="微软雅黑" pitchFamily="34" charset="-122"/>
-                <a:cs typeface="微软雅黑" pitchFamily="34" charset="-120"/>
-              </a:rPr>
-              <a:t>新门禁：console tab ↔ TAB_COMPONENTS 双向一致、文档数字漂移、安全审计覆盖棘轮</a:t>
-            </a:r>
-            <a:endParaRPr lang="en-US" sz="1150" dirty="0"/>
-          </a:p>
-          <a:p>
-            <a:pPr algn="l" marL="152400" indent="-152400">
-              <a:spcAft>
-                <a:spcPts val="800"/>
-              </a:spcAft>
-              <a:buSzPct val="100000"/>
-              <a:buChar char="▪"/>
-            </a:pPr>
-            <a:r>
-              <a:rPr lang="en-US" sz="1150" dirty="0">
-                <a:solidFill>
-                  <a:srgbClr val="1A2E24"/>
-                </a:solidFill>
-                <a:latin typeface="微软雅黑" pitchFamily="34" charset="0"/>
-                <a:ea typeface="微软雅黑" pitchFamily="34" charset="-122"/>
-                <a:cs typeface="微软雅黑" pitchFamily="34" charset="-120"/>
-              </a:rPr>
-              <a:t>修复：R33 单位授权两个 tab 因漏加组件映射而不可见（契约 28 → 30）</a:t>
-            </a:r>
-            <a:endParaRPr lang="en-US" sz="1150" dirty="0"/>
-          </a:p>
-          <a:p>
-            <a:pPr algn="l" marL="152400" indent="-152400">
-              <a:spcAft>
-                <a:spcPts val="800"/>
-              </a:spcAft>
-              <a:buSzPct val="100000"/>
-              <a:buChar char="▪"/>
-            </a:pPr>
-            <a:r>
-              <a:rPr lang="en-US" sz="1150" dirty="0">
-                <a:solidFill>
-                  <a:srgbClr val="1A2E24"/>
-                </a:solidFill>
-                <a:latin typeface="微软雅黑" pitchFamily="34" charset="0"/>
-                <a:ea typeface="微软雅黑" pitchFamily="34" charset="-122"/>
-                <a:cs typeface="微软雅黑" pitchFamily="34" charset="-120"/>
-              </a:rPr>
-              <a:t>本版移出 R35 删表迁移：升级演练暴露数据丢失 / 升级中断风险，schema 维持 r34 head</a:t>
+              <a:t>一键自检 6 项（仅管理员，只读）：单位码缺失/格式/层级不符/重复、组织跨级挂接、待审核账号、账号锁定、PII 密钥指纹、介质导入近况 · 包完整性校验：管控包/配置包/权限包强制 checksum，配 PACKAGE_PUBKEY 后强制 Ed25519 验签（fail-closed） · 经费禁止自批：创建人不得审批自己创建的记录（可显式开启） · 跨机业务键修复：改为「组织 + 业务唯一标识」，修复同组织两台机器导入时记录被整体覆写/静默丢弃的 P0 缺陷 · 迁移 r36~r41 清理零引用表；新增门禁：测试必须有断言、同步链路覆盖</a:t>
             </a:r>
             <a:endParaRPr lang="en-US" sz="1150" dirty="0"/>
           </a:p>
@@ -9578,6 +9452,10 @@
           </a:solidFill>
           <a:ln/>
         </p:spPr>
+        <p:txBody>
+          <a:bodyPr/>
+          <a:p/>
+        </p:txBody>
       </p:sp>
       <p:sp>
         <p:nvSpPr>
@@ -9737,7 +9615,7 @@
                 <a:ea typeface="微软雅黑" pitchFamily="34" charset="-122"/>
                 <a:cs typeface="微软雅黑" pitchFamily="34" charset="-120"/>
               </a:rPr>
-              <a:t>帮扶管理信息系统 v1.16.0</a:t>
+              <a:t>帮扶管理信息系统 v1.17.1</a:t>
             </a:r>
             <a:endParaRPr lang="en-US" sz="1050" dirty="0"/>
           </a:p>
@@ -9762,6 +9640,10 @@
           </a:solidFill>
           <a:ln/>
         </p:spPr>
+        <p:txBody>
+          <a:bodyPr/>
+          <a:p/>
+        </p:txBody>
       </p:sp>
       <p:sp>
         <p:nvSpPr>
@@ -9864,6 +9746,10 @@
           </a:solidFill>
           <a:ln/>
         </p:spPr>
+        <p:txBody>
+          <a:bodyPr/>
+          <a:p/>
+        </p:txBody>
       </p:sp>
       <p:sp>
         <p:nvSpPr>
@@ -9966,6 +9852,10 @@
           </a:solidFill>
           <a:ln/>
         </p:spPr>
+        <p:txBody>
+          <a:bodyPr/>
+          <a:p/>
+        </p:txBody>
       </p:sp>
       <p:sp>
         <p:nvSpPr>
@@ -10068,6 +9958,10 @@
           </a:solidFill>
           <a:ln/>
         </p:spPr>
+        <p:txBody>
+          <a:bodyPr/>
+          <a:p/>
+        </p:txBody>
       </p:sp>
       <p:sp>
         <p:nvSpPr>
@@ -10170,6 +10064,10 @@
           </a:solidFill>
           <a:ln/>
         </p:spPr>
+        <p:txBody>
+          <a:bodyPr/>
+          <a:p/>
+        </p:txBody>
       </p:sp>
       <p:sp>
         <p:nvSpPr>
@@ -10281,6 +10179,10 @@
             </a:outerShdw>
           </a:effectLst>
         </p:spPr>
+        <p:txBody>
+          <a:bodyPr/>
+          <a:p/>
+        </p:txBody>
       </p:sp>
       <p:sp>
         <p:nvSpPr>
@@ -10503,6 +10405,10 @@
           </a:solidFill>
           <a:ln/>
         </p:spPr>
+        <p:txBody>
+          <a:bodyPr/>
+          <a:p/>
+        </p:txBody>
       </p:sp>
       <p:sp>
         <p:nvSpPr>
@@ -10662,7 +10568,7 @@
                 <a:ea typeface="微软雅黑" pitchFamily="34" charset="-122"/>
                 <a:cs typeface="微软雅黑" pitchFamily="34" charset="-120"/>
               </a:rPr>
-              <a:t>帮扶管理信息系统 v1.16.0</a:t>
+              <a:t>帮扶管理信息系统 v1.17.1</a:t>
             </a:r>
             <a:endParaRPr lang="en-US" sz="1050" dirty="0"/>
           </a:p>
@@ -10696,6 +10602,10 @@
             </a:outerShdw>
           </a:effectLst>
         </p:spPr>
+        <p:txBody>
+          <a:bodyPr/>
+          <a:p/>
+        </p:txBody>
       </p:sp>
       <p:sp>
         <p:nvSpPr>
@@ -10777,7 +10687,7 @@
                 <a:ea typeface="微软雅黑" pitchFamily="34" charset="-122"/>
                 <a:cs typeface="微软雅黑" pitchFamily="34" charset="-120"/>
               </a:rPr>
-              <a:t>64 个模型文件 / 122 张表：村、一户一档、项目、资金、影像、消费台账…</a:t>
+              <a:t>64 个模型文件 / 124 张表：村、一户一档、项目、资金、影像、消费台账…</a:t>
             </a:r>
             <a:endParaRPr lang="en-US" sz="1250" dirty="0"/>
           </a:p>
@@ -10895,6 +10805,10 @@
             </a:outerShdw>
           </a:effectLst>
         </p:spPr>
+        <p:txBody>
+          <a:bodyPr/>
+          <a:p/>
+        </p:txBody>
       </p:sp>
       <p:sp>
         <p:nvSpPr>
@@ -11117,6 +11031,10 @@
           </a:solidFill>
           <a:ln/>
         </p:spPr>
+        <p:txBody>
+          <a:bodyPr/>
+          <a:p/>
+        </p:txBody>
       </p:sp>
       <p:sp>
         <p:nvSpPr>
@@ -11276,7 +11194,7 @@
                 <a:ea typeface="微软雅黑" pitchFamily="34" charset="-122"/>
                 <a:cs typeface="微软雅黑" pitchFamily="34" charset="-120"/>
               </a:rPr>
-              <a:t>帮扶管理信息系统 v1.16.0</a:t>
+              <a:t>帮扶管理信息系统 v1.17.1</a:t>
             </a:r>
             <a:endParaRPr lang="en-US" sz="1050" dirty="0"/>
           </a:p>
@@ -11310,6 +11228,10 @@
             </a:outerShdw>
           </a:effectLst>
         </p:spPr>
+        <p:txBody>
+          <a:bodyPr/>
+          <a:p/>
+        </p:txBody>
       </p:sp>
       <p:sp>
         <p:nvSpPr>
@@ -11467,6 +11389,10 @@
             </a:outerShdw>
           </a:effectLst>
         </p:spPr>
+        <p:txBody>
+          <a:bodyPr/>
+          <a:p/>
+        </p:txBody>
       </p:sp>
       <p:sp>
         <p:nvSpPr>
@@ -11617,6 +11543,10 @@
           </a:solidFill>
           <a:ln/>
         </p:spPr>
+        <p:txBody>
+          <a:bodyPr/>
+          <a:p/>
+        </p:txBody>
       </p:sp>
       <p:sp>
         <p:nvSpPr>
@@ -11682,6 +11612,10 @@
             <a:tailEnd type="triangle"/>
           </a:ln>
         </p:spPr>
+        <p:txBody>
+          <a:bodyPr/>
+          <a:p/>
+        </p:txBody>
       </p:sp>
       <p:sp>
         <p:nvSpPr>
@@ -11704,6 +11638,10 @@
           </a:solidFill>
           <a:ln/>
         </p:spPr>
+        <p:txBody>
+          <a:bodyPr/>
+          <a:p/>
+        </p:txBody>
       </p:sp>
       <p:sp>
         <p:nvSpPr>
@@ -11769,6 +11707,10 @@
             <a:tailEnd type="triangle"/>
           </a:ln>
         </p:spPr>
+        <p:txBody>
+          <a:bodyPr/>
+          <a:p/>
+        </p:txBody>
       </p:sp>
       <p:sp>
         <p:nvSpPr>
@@ -11791,6 +11733,10 @@
           </a:solidFill>
           <a:ln/>
         </p:spPr>
+        <p:txBody>
+          <a:bodyPr/>
+          <a:p/>
+        </p:txBody>
       </p:sp>
       <p:sp>
         <p:nvSpPr>
@@ -11856,6 +11802,10 @@
             <a:tailEnd type="triangle"/>
           </a:ln>
         </p:spPr>
+        <p:txBody>
+          <a:bodyPr/>
+          <a:p/>
+        </p:txBody>
       </p:sp>
       <p:sp>
         <p:nvSpPr>
@@ -11878,6 +11828,10 @@
           </a:solidFill>
           <a:ln/>
         </p:spPr>
+        <p:txBody>
+          <a:bodyPr/>
+          <a:p/>
+        </p:txBody>
       </p:sp>
       <p:sp>
         <p:nvSpPr>
@@ -11943,6 +11897,10 @@
             <a:tailEnd type="triangle"/>
           </a:ln>
         </p:spPr>
+        <p:txBody>
+          <a:bodyPr/>
+          <a:p/>
+        </p:txBody>
       </p:sp>
       <p:sp>
         <p:nvSpPr>
@@ -11965,6 +11923,10 @@
           </a:solidFill>
           <a:ln/>
         </p:spPr>
+        <p:txBody>
+          <a:bodyPr/>
+          <a:p/>
+        </p:txBody>
       </p:sp>
       <p:sp>
         <p:nvSpPr>
@@ -12030,6 +11992,10 @@
             <a:tailEnd type="triangle"/>
           </a:ln>
         </p:spPr>
+        <p:txBody>
+          <a:bodyPr/>
+          <a:p/>
+        </p:txBody>
       </p:sp>
       <p:sp>
         <p:nvSpPr>
@@ -12052,6 +12018,10 @@
           </a:solidFill>
           <a:ln/>
         </p:spPr>
+        <p:txBody>
+          <a:bodyPr/>
+          <a:p/>
+        </p:txBody>
       </p:sp>
       <p:sp>
         <p:nvSpPr>
@@ -12490,6 +12460,10 @@
           </a:solidFill>
           <a:ln/>
         </p:spPr>
+        <p:txBody>
+          <a:bodyPr/>
+          <a:p/>
+        </p:txBody>
       </p:sp>
       <p:sp>
         <p:nvSpPr>
@@ -12649,7 +12623,7 @@
                 <a:ea typeface="微软雅黑" pitchFamily="34" charset="-122"/>
                 <a:cs typeface="微软雅黑" pitchFamily="34" charset="-120"/>
               </a:rPr>
-              <a:t>帮扶管理信息系统 v1.16.0</a:t>
+              <a:t>帮扶管理信息系统 v1.17.1</a:t>
             </a:r>
             <a:endParaRPr lang="en-US" sz="1050" dirty="0"/>
           </a:p>
@@ -12683,6 +12657,10 @@
             </a:outerShdw>
           </a:effectLst>
         </p:spPr>
+        <p:txBody>
+          <a:bodyPr/>
+          <a:p/>
+        </p:txBody>
       </p:sp>
       <p:sp>
         <p:nvSpPr>
@@ -12835,6 +12813,10 @@
             </a:outerShdw>
           </a:effectLst>
         </p:spPr>
+        <p:txBody>
+          <a:bodyPr/>
+          <a:p/>
+        </p:txBody>
       </p:sp>
       <p:sp>
         <p:nvSpPr>
@@ -12987,6 +12969,10 @@
             </a:outerShdw>
           </a:effectLst>
         </p:spPr>
+        <p:txBody>
+          <a:bodyPr/>
+          <a:p/>
+        </p:txBody>
       </p:sp>
       <p:sp>
         <p:nvSpPr>
@@ -13139,6 +13125,10 @@
             </a:outerShdw>
           </a:effectLst>
         </p:spPr>
+        <p:txBody>
+          <a:bodyPr/>
+          <a:p/>
+        </p:txBody>
       </p:sp>
       <p:sp>
         <p:nvSpPr>
@@ -13291,6 +13281,10 @@
             </a:outerShdw>
           </a:effectLst>
         </p:spPr>
+        <p:txBody>
+          <a:bodyPr/>
+          <a:p/>
+        </p:txBody>
       </p:sp>
       <p:sp>
         <p:nvSpPr>
@@ -13443,6 +13437,10 @@
             </a:outerShdw>
           </a:effectLst>
         </p:spPr>
+        <p:txBody>
+          <a:bodyPr/>
+          <a:p/>
+        </p:txBody>
       </p:sp>
       <p:sp>
         <p:nvSpPr>
@@ -13595,6 +13593,10 @@
             </a:outerShdw>
           </a:effectLst>
         </p:spPr>
+        <p:txBody>
+          <a:bodyPr/>
+          <a:p/>
+        </p:txBody>
       </p:sp>
       <p:sp>
         <p:nvSpPr>
@@ -13895,6 +13897,10 @@
           </a:solidFill>
           <a:ln/>
         </p:spPr>
+        <p:txBody>
+          <a:bodyPr/>
+          <a:p/>
+        </p:txBody>
       </p:sp>
       <p:sp>
         <p:nvSpPr>
@@ -14040,6 +14046,10 @@
           </a:solidFill>
           <a:ln/>
         </p:spPr>
+        <p:txBody>
+          <a:bodyPr/>
+          <a:p/>
+        </p:txBody>
       </p:sp>
       <p:sp>
         <p:nvSpPr>
@@ -14158,7 +14168,7 @@
                 <a:ea typeface="微软雅黑" pitchFamily="34" charset="-122"/>
                 <a:cs typeface="微软雅黑" pitchFamily="34" charset="-120"/>
               </a:rPr>
-              <a:t>技术栈 · UI v2.0 · R35 精细化 · 分层设计</a:t>
+              <a:t>技术栈 · UI v2.0 · R35 精细化 · v1.17 介质链路与自检</a:t>
             </a:r>
             <a:endParaRPr lang="en-US" sz="1200" dirty="0"/>
           </a:p>
@@ -14185,6 +14195,10 @@
           </a:solidFill>
           <a:ln/>
         </p:spPr>
+        <p:txBody>
+          <a:bodyPr/>
+          <a:p/>
+        </p:txBody>
       </p:sp>
       <p:sp>
         <p:nvSpPr>
@@ -14330,6 +14344,10 @@
           </a:solidFill>
           <a:ln/>
         </p:spPr>
+        <p:txBody>
+          <a:bodyPr/>
+          <a:p/>
+        </p:txBody>
       </p:sp>
       <p:sp>
         <p:nvSpPr>
@@ -14475,6 +14493,10 @@
           </a:solidFill>
           <a:ln/>
         </p:spPr>
+        <p:txBody>
+          <a:bodyPr/>
+          <a:p/>
+        </p:txBody>
       </p:sp>
       <p:sp>
         <p:nvSpPr>
@@ -14593,7 +14615,7 @@
                 <a:ea typeface="微软雅黑" pitchFamily="34" charset="-122"/>
                 <a:cs typeface="微软雅黑" pitchFamily="34" charset="-120"/>
               </a:rPr>
-              <a:t>20,809 项自动化测试 · 视觉回归 · CI/CD</a:t>
+              <a:t>21,384 项自动化测试 · 视觉回归 · CI/CD</a:t>
             </a:r>
             <a:endParaRPr lang="en-US" sz="1200" dirty="0"/>
           </a:p>
@@ -14620,6 +14642,10 @@
           </a:solidFill>
           <a:ln/>
         </p:spPr>
+        <p:txBody>
+          <a:bodyPr/>
+          <a:p/>
+        </p:txBody>
       </p:sp>
       <p:sp>
         <p:nvSpPr>
@@ -14795,6 +14821,10 @@
           </a:solidFill>
           <a:ln/>
         </p:spPr>
+        <p:txBody>
+          <a:bodyPr/>
+          <a:p/>
+        </p:txBody>
       </p:sp>
       <p:sp>
         <p:nvSpPr>
@@ -14954,7 +14984,7 @@
                 <a:ea typeface="微软雅黑" pitchFamily="34" charset="-122"/>
                 <a:cs typeface="微软雅黑" pitchFamily="34" charset="-120"/>
               </a:rPr>
-              <a:t>帮扶管理信息系统 v1.16.0</a:t>
+              <a:t>帮扶管理信息系统 v1.17.1</a:t>
             </a:r>
             <a:endParaRPr lang="en-US" sz="1050" dirty="0"/>
           </a:p>
@@ -14988,6 +15018,10 @@
             </a:outerShdw>
           </a:effectLst>
         </p:spPr>
+        <p:txBody>
+          <a:bodyPr/>
+          <a:p/>
+        </p:txBody>
       </p:sp>
       <p:sp>
         <p:nvSpPr>
@@ -15208,6 +15242,10 @@
             </a:outerShdw>
           </a:effectLst>
         </p:spPr>
+        <p:txBody>
+          <a:bodyPr/>
+          <a:p/>
+        </p:txBody>
       </p:sp>
       <p:sp>
         <p:nvSpPr>
@@ -15430,6 +15468,10 @@
           </a:solidFill>
           <a:ln/>
         </p:spPr>
+        <p:txBody>
+          <a:bodyPr/>
+          <a:p/>
+        </p:txBody>
       </p:sp>
       <p:sp>
         <p:nvSpPr>
@@ -15589,7 +15631,7 @@
                 <a:ea typeface="微软雅黑" pitchFamily="34" charset="-122"/>
                 <a:cs typeface="微软雅黑" pitchFamily="34" charset="-120"/>
               </a:rPr>
-              <a:t>帮扶管理信息系统 v1.16.0</a:t>
+              <a:t>帮扶管理信息系统 v1.17.1</a:t>
             </a:r>
             <a:endParaRPr lang="en-US" sz="1050" dirty="0"/>
           </a:p>
@@ -15616,6 +15658,10 @@
           </a:solidFill>
           <a:ln/>
         </p:spPr>
+        <p:txBody>
+          <a:bodyPr/>
+          <a:p/>
+        </p:txBody>
       </p:sp>
       <p:sp>
         <p:nvSpPr>
@@ -15679,6 +15725,10 @@
           </a:solidFill>
           <a:ln/>
         </p:spPr>
+        <p:txBody>
+          <a:bodyPr/>
+          <a:p/>
+        </p:txBody>
       </p:sp>
       <p:sp>
         <p:nvSpPr>
@@ -15742,6 +15792,10 @@
           </a:solidFill>
           <a:ln/>
         </p:spPr>
+        <p:txBody>
+          <a:bodyPr/>
+          <a:p/>
+        </p:txBody>
       </p:sp>
       <p:sp>
         <p:nvSpPr>
@@ -15805,6 +15859,10 @@
           </a:solidFill>
           <a:ln/>
         </p:spPr>
+        <p:txBody>
+          <a:bodyPr/>
+          <a:p/>
+        </p:txBody>
       </p:sp>
       <p:sp>
         <p:nvSpPr>
@@ -15868,6 +15926,10 @@
           </a:solidFill>
           <a:ln/>
         </p:spPr>
+        <p:txBody>
+          <a:bodyPr/>
+          <a:p/>
+        </p:txBody>
       </p:sp>
       <p:sp>
         <p:nvSpPr>
@@ -15931,6 +15993,10 @@
           </a:solidFill>
           <a:ln/>
         </p:spPr>
+        <p:txBody>
+          <a:bodyPr/>
+          <a:p/>
+        </p:txBody>
       </p:sp>
       <p:sp>
         <p:nvSpPr>
@@ -15994,6 +16060,10 @@
           </a:solidFill>
           <a:ln/>
         </p:spPr>
+        <p:txBody>
+          <a:bodyPr/>
+          <a:p/>
+        </p:txBody>
       </p:sp>
       <p:sp>
         <p:nvSpPr>
@@ -16057,6 +16127,10 @@
           </a:solidFill>
           <a:ln/>
         </p:spPr>
+        <p:txBody>
+          <a:bodyPr/>
+          <a:p/>
+        </p:txBody>
       </p:sp>
       <p:sp>
         <p:nvSpPr>
@@ -16279,6 +16353,10 @@
           </a:solidFill>
           <a:ln/>
         </p:spPr>
+        <p:txBody>
+          <a:bodyPr/>
+          <a:p/>
+        </p:txBody>
       </p:sp>
       <p:sp>
         <p:nvSpPr>
@@ -16438,7 +16516,7 @@
                 <a:ea typeface="微软雅黑" pitchFamily="34" charset="-122"/>
                 <a:cs typeface="微软雅黑" pitchFamily="34" charset="-120"/>
               </a:rPr>
-              <a:t>帮扶管理信息系统 v1.16.0</a:t>
+              <a:t>帮扶管理信息系统 v1.17.1</a:t>
             </a:r>
             <a:endParaRPr lang="en-US" sz="1050" dirty="0"/>
           </a:p>
@@ -16472,6 +16550,10 @@
             </a:outerShdw>
           </a:effectLst>
         </p:spPr>
+        <p:txBody>
+          <a:bodyPr/>
+          <a:p/>
+        </p:txBody>
       </p:sp>
       <p:sp>
         <p:nvSpPr>
@@ -16671,6 +16753,10 @@
             </a:outerShdw>
           </a:effectLst>
         </p:spPr>
+        <p:txBody>
+          <a:bodyPr/>
+          <a:p/>
+        </p:txBody>
       </p:sp>
       <p:sp>
         <p:nvSpPr>
@@ -16934,6 +17020,10 @@
           </a:solidFill>
           <a:ln/>
         </p:spPr>
+        <p:txBody>
+          <a:bodyPr/>
+          <a:p/>
+        </p:txBody>
       </p:sp>
       <p:sp>
         <p:nvSpPr>
@@ -17093,7 +17183,7 @@
                 <a:ea typeface="微软雅黑" pitchFamily="34" charset="-122"/>
                 <a:cs typeface="微软雅黑" pitchFamily="34" charset="-120"/>
               </a:rPr>
-              <a:t>帮扶管理信息系统 v1.16.0</a:t>
+              <a:t>帮扶管理信息系统 v1.17.1</a:t>
             </a:r>
             <a:endParaRPr lang="en-US" sz="1050" dirty="0"/>
           </a:p>
@@ -17118,6 +17208,10 @@
           </a:solidFill>
           <a:ln/>
         </p:spPr>
+        <p:txBody>
+          <a:bodyPr/>
+          <a:p/>
+        </p:txBody>
       </p:sp>
       <p:sp>
         <p:nvSpPr>
@@ -17179,6 +17273,10 @@
           </a:solidFill>
           <a:ln/>
         </p:spPr>
+        <p:txBody>
+          <a:bodyPr/>
+          <a:p/>
+        </p:txBody>
       </p:sp>
       <p:sp>
         <p:nvSpPr>
@@ -17240,6 +17338,10 @@
           </a:solidFill>
           <a:ln/>
         </p:spPr>
+        <p:txBody>
+          <a:bodyPr/>
+          <a:p/>
+        </p:txBody>
       </p:sp>
       <p:sp>
         <p:nvSpPr>
@@ -17301,6 +17403,10 @@
           </a:solidFill>
           <a:ln/>
         </p:spPr>
+        <p:txBody>
+          <a:bodyPr/>
+          <a:p/>
+        </p:txBody>
       </p:sp>
       <p:sp>
         <p:nvSpPr>
@@ -17362,6 +17468,10 @@
           </a:solidFill>
           <a:ln/>
         </p:spPr>
+        <p:txBody>
+          <a:bodyPr/>
+          <a:p/>
+        </p:txBody>
       </p:sp>
       <p:sp>
         <p:nvSpPr>
@@ -17423,6 +17533,10 @@
           </a:solidFill>
           <a:ln/>
         </p:spPr>
+        <p:txBody>
+          <a:bodyPr/>
+          <a:p/>
+        </p:txBody>
       </p:sp>
       <p:sp>
         <p:nvSpPr>
@@ -17645,6 +17759,10 @@
           </a:solidFill>
           <a:ln/>
         </p:spPr>
+        <p:txBody>
+          <a:bodyPr/>
+          <a:p/>
+        </p:txBody>
       </p:sp>
       <p:sp>
         <p:nvSpPr>
@@ -17804,7 +17922,7 @@
                 <a:ea typeface="微软雅黑" pitchFamily="34" charset="-122"/>
                 <a:cs typeface="微软雅黑" pitchFamily="34" charset="-120"/>
               </a:rPr>
-              <a:t>帮扶管理信息系统 v1.16.0</a:t>
+              <a:t>帮扶管理信息系统 v1.17.1</a:t>
             </a:r>
             <a:endParaRPr lang="en-US" sz="1050" dirty="0"/>
           </a:p>
@@ -17829,6 +17947,10 @@
           </a:solidFill>
           <a:ln/>
         </p:spPr>
+        <p:txBody>
+          <a:bodyPr/>
+          <a:p/>
+        </p:txBody>
       </p:sp>
       <p:sp>
         <p:nvSpPr>
@@ -17935,6 +18057,10 @@
             <a:tailEnd type="triangle"/>
           </a:ln>
         </p:spPr>
+        <p:txBody>
+          <a:bodyPr/>
+          <a:p/>
+        </p:txBody>
       </p:sp>
       <p:sp>
         <p:nvSpPr>
@@ -17955,6 +18081,10 @@
           </a:solidFill>
           <a:ln/>
         </p:spPr>
+        <p:txBody>
+          <a:bodyPr/>
+          <a:p/>
+        </p:txBody>
       </p:sp>
       <p:sp>
         <p:nvSpPr>
@@ -18061,6 +18191,10 @@
             <a:tailEnd type="triangle"/>
           </a:ln>
         </p:spPr>
+        <p:txBody>
+          <a:bodyPr/>
+          <a:p/>
+        </p:txBody>
       </p:sp>
       <p:sp>
         <p:nvSpPr>
@@ -18081,6 +18215,10 @@
           </a:solidFill>
           <a:ln/>
         </p:spPr>
+        <p:txBody>
+          <a:bodyPr/>
+          <a:p/>
+        </p:txBody>
       </p:sp>
       <p:sp>
         <p:nvSpPr>
@@ -18187,6 +18325,10 @@
             <a:tailEnd type="triangle"/>
           </a:ln>
         </p:spPr>
+        <p:txBody>
+          <a:bodyPr/>
+          <a:p/>
+        </p:txBody>
       </p:sp>
       <p:sp>
         <p:nvSpPr>
@@ -18207,6 +18349,10 @@
           </a:solidFill>
           <a:ln/>
         </p:spPr>
+        <p:txBody>
+          <a:bodyPr/>
+          <a:p/>
+        </p:txBody>
       </p:sp>
       <p:sp>
         <p:nvSpPr>
@@ -18313,6 +18459,10 @@
             <a:tailEnd type="triangle"/>
           </a:ln>
         </p:spPr>
+        <p:txBody>
+          <a:bodyPr/>
+          <a:p/>
+        </p:txBody>
       </p:sp>
       <p:sp>
         <p:nvSpPr>
@@ -18333,6 +18483,10 @@
           </a:solidFill>
           <a:ln/>
         </p:spPr>
+        <p:txBody>
+          <a:bodyPr/>
+          <a:p/>
+        </p:txBody>
       </p:sp>
       <p:sp>
         <p:nvSpPr>
@@ -18439,6 +18593,10 @@
             <a:tailEnd type="triangle"/>
           </a:ln>
         </p:spPr>
+        <p:txBody>
+          <a:bodyPr/>
+          <a:p/>
+        </p:txBody>
       </p:sp>
       <p:sp>
         <p:nvSpPr>
@@ -18459,6 +18617,10 @@
           </a:solidFill>
           <a:ln/>
         </p:spPr>
+        <p:txBody>
+          <a:bodyPr/>
+          <a:p/>
+        </p:txBody>
       </p:sp>
       <p:sp>
         <p:nvSpPr>
@@ -18565,6 +18727,10 @@
             <a:tailEnd type="triangle"/>
           </a:ln>
         </p:spPr>
+        <p:txBody>
+          <a:bodyPr/>
+          <a:p/>
+        </p:txBody>
       </p:sp>
       <p:sp>
         <p:nvSpPr>
@@ -18585,6 +18751,10 @@
           </a:solidFill>
           <a:ln/>
         </p:spPr>
+        <p:txBody>
+          <a:bodyPr/>
+          <a:p/>
+        </p:txBody>
       </p:sp>
       <p:sp>
         <p:nvSpPr>
@@ -18691,6 +18861,10 @@
             <a:tailEnd type="triangle"/>
           </a:ln>
         </p:spPr>
+        <p:txBody>
+          <a:bodyPr/>
+          <a:p/>
+        </p:txBody>
       </p:sp>
       <p:sp>
         <p:nvSpPr>
@@ -18711,6 +18885,10 @@
           </a:solidFill>
           <a:ln/>
         </p:spPr>
+        <p:txBody>
+          <a:bodyPr/>
+          <a:p/>
+        </p:txBody>
       </p:sp>
       <p:sp>
         <p:nvSpPr>
@@ -18822,6 +19000,10 @@
             </a:outerShdw>
           </a:effectLst>
         </p:spPr>
+        <p:txBody>
+          <a:bodyPr/>
+          <a:p/>
+        </p:txBody>
       </p:sp>
       <p:sp>
         <p:nvSpPr>
@@ -18979,6 +19161,10 @@
             </a:outerShdw>
           </a:effectLst>
         </p:spPr>
+        <p:txBody>
+          <a:bodyPr/>
+          <a:p/>
+        </p:txBody>
       </p:sp>
       <p:sp>
         <p:nvSpPr>
@@ -19180,6 +19366,10 @@
           </a:solidFill>
           <a:ln/>
         </p:spPr>
+        <p:txBody>
+          <a:bodyPr/>
+          <a:p/>
+        </p:txBody>
       </p:sp>
       <p:sp>
         <p:nvSpPr>
@@ -19339,7 +19529,7 @@
                 <a:ea typeface="微软雅黑" pitchFamily="34" charset="-122"/>
                 <a:cs typeface="微软雅黑" pitchFamily="34" charset="-120"/>
               </a:rPr>
-              <a:t>帮扶管理信息系统 v1.16.0</a:t>
+              <a:t>帮扶管理信息系统 v1.17.1</a:t>
             </a:r>
             <a:endParaRPr lang="en-US" sz="1050" dirty="0"/>
           </a:p>
@@ -19364,6 +19554,10 @@
           </a:solidFill>
           <a:ln/>
         </p:spPr>
+        <p:txBody>
+          <a:bodyPr/>
+          <a:p/>
+        </p:txBody>
       </p:sp>
       <p:sp>
         <p:nvSpPr>
@@ -19425,6 +19619,10 @@
           </a:solidFill>
           <a:ln/>
         </p:spPr>
+        <p:txBody>
+          <a:bodyPr/>
+          <a:p/>
+        </p:txBody>
       </p:sp>
       <p:sp>
         <p:nvSpPr>
@@ -19486,6 +19684,10 @@
           </a:solidFill>
           <a:ln/>
         </p:spPr>
+        <p:txBody>
+          <a:bodyPr/>
+          <a:p/>
+        </p:txBody>
       </p:sp>
       <p:sp>
         <p:nvSpPr>
@@ -19547,6 +19749,10 @@
           </a:solidFill>
           <a:ln/>
         </p:spPr>
+        <p:txBody>
+          <a:bodyPr/>
+          <a:p/>
+        </p:txBody>
       </p:sp>
       <p:sp>
         <p:nvSpPr>
@@ -19617,6 +19823,10 @@
             </a:outerShdw>
           </a:effectLst>
         </p:spPr>
+        <p:txBody>
+          <a:bodyPr/>
+          <a:p/>
+        </p:txBody>
       </p:sp>
       <p:sp>
         <p:nvSpPr>
@@ -19774,6 +19984,10 @@
             </a:outerShdw>
           </a:effectLst>
         </p:spPr>
+        <p:txBody>
+          <a:bodyPr/>
+          <a:p/>
+        </p:txBody>
       </p:sp>
       <p:sp>
         <p:nvSpPr>
@@ -19954,6 +20168,10 @@
           </a:solidFill>
           <a:ln/>
         </p:spPr>
+        <p:txBody>
+          <a:bodyPr/>
+          <a:p/>
+        </p:txBody>
       </p:sp>
       <p:sp>
         <p:nvSpPr>
@@ -20113,7 +20331,7 @@
                 <a:ea typeface="微软雅黑" pitchFamily="34" charset="-122"/>
                 <a:cs typeface="微软雅黑" pitchFamily="34" charset="-120"/>
               </a:rPr>
-              <a:t>帮扶管理信息系统 v1.16.0</a:t>
+              <a:t>帮扶管理信息系统 v1.17.1</a:t>
             </a:r>
             <a:endParaRPr lang="en-US" sz="1050" dirty="0"/>
           </a:p>
@@ -20147,6 +20365,10 @@
             </a:outerShdw>
           </a:effectLst>
         </p:spPr>
+        <p:txBody>
+          <a:bodyPr/>
+          <a:p/>
+        </p:txBody>
       </p:sp>
       <p:sp>
         <p:nvSpPr>
@@ -20346,6 +20568,10 @@
             </a:outerShdw>
           </a:effectLst>
         </p:spPr>
+        <p:txBody>
+          <a:bodyPr/>
+          <a:p/>
+        </p:txBody>
       </p:sp>
       <p:sp>
         <p:nvSpPr>
@@ -20568,6 +20794,10 @@
           </a:solidFill>
           <a:ln/>
         </p:spPr>
+        <p:txBody>
+          <a:bodyPr/>
+          <a:p/>
+        </p:txBody>
       </p:sp>
       <p:sp>
         <p:nvSpPr>
@@ -20727,7 +20957,7 @@
                 <a:ea typeface="微软雅黑" pitchFamily="34" charset="-122"/>
                 <a:cs typeface="微软雅黑" pitchFamily="34" charset="-120"/>
               </a:rPr>
-              <a:t>帮扶管理信息系统 v1.16.0</a:t>
+              <a:t>帮扶管理信息系统 v1.17.1</a:t>
             </a:r>
             <a:endParaRPr lang="en-US" sz="1050" dirty="0"/>
           </a:p>
@@ -20761,6 +20991,10 @@
             </a:outerShdw>
           </a:effectLst>
         </p:spPr>
+        <p:txBody>
+          <a:bodyPr/>
+          <a:p/>
+        </p:txBody>
       </p:sp>
       <p:sp>
         <p:nvSpPr>
@@ -20939,6 +21173,10 @@
             </a:outerShdw>
           </a:effectLst>
         </p:spPr>
+        <p:txBody>
+          <a:bodyPr/>
+          <a:p/>
+        </p:txBody>
       </p:sp>
       <p:sp>
         <p:nvSpPr>
@@ -21181,6 +21419,10 @@
           </a:solidFill>
           <a:ln/>
         </p:spPr>
+        <p:txBody>
+          <a:bodyPr/>
+          <a:p/>
+        </p:txBody>
       </p:sp>
       <p:sp>
         <p:nvSpPr>
@@ -21340,7 +21582,7 @@
                 <a:ea typeface="微软雅黑" pitchFamily="34" charset="-122"/>
                 <a:cs typeface="微软雅黑" pitchFamily="34" charset="-120"/>
               </a:rPr>
-              <a:t>帮扶管理信息系统 v1.16.0</a:t>
+              <a:t>帮扶管理信息系统 v1.17.1</a:t>
             </a:r>
             <a:endParaRPr lang="en-US" sz="1050" dirty="0"/>
           </a:p>
@@ -21365,6 +21607,10 @@
           </a:solidFill>
           <a:ln/>
         </p:spPr>
+        <p:txBody>
+          <a:bodyPr/>
+          <a:p/>
+        </p:txBody>
       </p:sp>
       <p:sp>
         <p:nvSpPr>
@@ -21426,6 +21672,10 @@
           </a:solidFill>
           <a:ln/>
         </p:spPr>
+        <p:txBody>
+          <a:bodyPr/>
+          <a:p/>
+        </p:txBody>
       </p:sp>
       <p:sp>
         <p:nvSpPr>
@@ -21487,6 +21737,10 @@
           </a:solidFill>
           <a:ln/>
         </p:spPr>
+        <p:txBody>
+          <a:bodyPr/>
+          <a:p/>
+        </p:txBody>
       </p:sp>
       <p:sp>
         <p:nvSpPr>
@@ -21548,6 +21802,10 @@
           </a:solidFill>
           <a:ln/>
         </p:spPr>
+        <p:txBody>
+          <a:bodyPr/>
+          <a:p/>
+        </p:txBody>
       </p:sp>
       <p:sp>
         <p:nvSpPr>
@@ -21609,6 +21867,10 @@
           </a:solidFill>
           <a:ln/>
         </p:spPr>
+        <p:txBody>
+          <a:bodyPr/>
+          <a:p/>
+        </p:txBody>
       </p:sp>
       <p:sp>
         <p:nvSpPr>
@@ -21852,6 +22114,10 @@
           </a:solidFill>
           <a:ln/>
         </p:spPr>
+        <p:txBody>
+          <a:bodyPr/>
+          <a:p/>
+        </p:txBody>
       </p:sp>
       <p:sp>
         <p:nvSpPr>
@@ -22011,7 +22277,7 @@
                 <a:ea typeface="微软雅黑" pitchFamily="34" charset="-122"/>
                 <a:cs typeface="微软雅黑" pitchFamily="34" charset="-120"/>
               </a:rPr>
-              <a:t>帮扶管理信息系统 v1.16.0</a:t>
+              <a:t>帮扶管理信息系统 v1.17.1</a:t>
             </a:r>
             <a:endParaRPr lang="en-US" sz="1050" dirty="0"/>
           </a:p>
@@ -22045,6 +22311,10 @@
             </a:outerShdw>
           </a:effectLst>
         </p:spPr>
+        <p:txBody>
+          <a:bodyPr/>
+          <a:p/>
+        </p:txBody>
       </p:sp>
       <p:sp>
         <p:nvSpPr>
@@ -22223,6 +22493,10 @@
             </a:outerShdw>
           </a:effectLst>
         </p:spPr>
+        <p:txBody>
+          <a:bodyPr/>
+          <a:p/>
+        </p:txBody>
       </p:sp>
       <p:sp>
         <p:nvSpPr>
@@ -22401,6 +22675,10 @@
             </a:outerShdw>
           </a:effectLst>
         </p:spPr>
+        <p:txBody>
+          <a:bodyPr/>
+          <a:p/>
+        </p:txBody>
       </p:sp>
       <p:sp>
         <p:nvSpPr>
@@ -22839,6 +23117,10 @@
           </a:solidFill>
           <a:ln/>
         </p:spPr>
+        <p:txBody>
+          <a:bodyPr/>
+          <a:p/>
+        </p:txBody>
       </p:sp>
       <p:sp>
         <p:nvSpPr>
@@ -22998,7 +23280,7 @@
                 <a:ea typeface="微软雅黑" pitchFamily="34" charset="-122"/>
                 <a:cs typeface="微软雅黑" pitchFamily="34" charset="-120"/>
               </a:rPr>
-              <a:t>帮扶管理信息系统 v1.16.0</a:t>
+              <a:t>帮扶管理信息系统 v1.17.1</a:t>
             </a:r>
             <a:endParaRPr lang="en-US" sz="1050" dirty="0"/>
           </a:p>
@@ -23023,6 +23305,10 @@
           </a:solidFill>
           <a:ln/>
         </p:spPr>
+        <p:txBody>
+          <a:bodyPr/>
+          <a:p/>
+        </p:txBody>
       </p:sp>
       <p:sp>
         <p:nvSpPr>
@@ -23084,6 +23370,10 @@
           </a:solidFill>
           <a:ln/>
         </p:spPr>
+        <p:txBody>
+          <a:bodyPr/>
+          <a:p/>
+        </p:txBody>
       </p:sp>
       <p:sp>
         <p:nvSpPr>
@@ -23145,6 +23435,10 @@
           </a:solidFill>
           <a:ln/>
         </p:spPr>
+        <p:txBody>
+          <a:bodyPr/>
+          <a:p/>
+        </p:txBody>
       </p:sp>
       <p:sp>
         <p:nvSpPr>
@@ -23206,6 +23500,10 @@
           </a:solidFill>
           <a:ln/>
         </p:spPr>
+        <p:txBody>
+          <a:bodyPr/>
+          <a:p/>
+        </p:txBody>
       </p:sp>
       <p:sp>
         <p:nvSpPr>
@@ -23267,6 +23565,10 @@
           </a:solidFill>
           <a:ln/>
         </p:spPr>
+        <p:txBody>
+          <a:bodyPr/>
+          <a:p/>
+        </p:txBody>
       </p:sp>
       <p:sp>
         <p:nvSpPr>
@@ -23328,6 +23630,10 @@
           </a:solidFill>
           <a:ln/>
         </p:spPr>
+        <p:txBody>
+          <a:bodyPr/>
+          <a:p/>
+        </p:txBody>
       </p:sp>
       <p:sp>
         <p:nvSpPr>
@@ -23398,6 +23704,10 @@
             </a:outerShdw>
           </a:effectLst>
         </p:spPr>
+        <p:txBody>
+          <a:bodyPr/>
+          <a:p/>
+        </p:txBody>
       </p:sp>
       <p:sp>
         <p:nvSpPr>
@@ -23576,6 +23886,10 @@
             </a:outerShdw>
           </a:effectLst>
         </p:spPr>
+        <p:txBody>
+          <a:bodyPr/>
+          <a:p/>
+        </p:txBody>
       </p:sp>
       <p:sp>
         <p:nvSpPr>
@@ -23756,6 +24070,10 @@
           </a:solidFill>
           <a:ln/>
         </p:spPr>
+        <p:txBody>
+          <a:bodyPr/>
+          <a:p/>
+        </p:txBody>
       </p:sp>
       <p:sp>
         <p:nvSpPr>
@@ -23915,7 +24233,7 @@
                 <a:ea typeface="微软雅黑" pitchFamily="34" charset="-122"/>
                 <a:cs typeface="微软雅黑" pitchFamily="34" charset="-120"/>
               </a:rPr>
-              <a:t>帮扶管理信息系统 v1.16.0</a:t>
+              <a:t>帮扶管理信息系统 v1.17.1</a:t>
             </a:r>
             <a:endParaRPr lang="en-US" sz="1050" dirty="0"/>
           </a:p>
@@ -23949,6 +24267,10 @@
             </a:outerShdw>
           </a:effectLst>
         </p:spPr>
+        <p:txBody>
+          <a:bodyPr/>
+          <a:p/>
+        </p:txBody>
       </p:sp>
       <p:sp>
         <p:nvSpPr>
@@ -24060,6 +24382,10 @@
             </a:outerShdw>
           </a:effectLst>
         </p:spPr>
+        <p:txBody>
+          <a:bodyPr/>
+          <a:p/>
+        </p:txBody>
       </p:sp>
       <p:sp>
         <p:nvSpPr>
@@ -24171,6 +24497,10 @@
             </a:outerShdw>
           </a:effectLst>
         </p:spPr>
+        <p:txBody>
+          <a:bodyPr/>
+          <a:p/>
+        </p:txBody>
       </p:sp>
       <p:sp>
         <p:nvSpPr>
@@ -24282,6 +24612,10 @@
             </a:outerShdw>
           </a:effectLst>
         </p:spPr>
+        <p:txBody>
+          <a:bodyPr/>
+          <a:p/>
+        </p:txBody>
       </p:sp>
       <p:sp>
         <p:nvSpPr>
@@ -24393,6 +24727,10 @@
             </a:outerShdw>
           </a:effectLst>
         </p:spPr>
+        <p:txBody>
+          <a:bodyPr/>
+          <a:p/>
+        </p:txBody>
       </p:sp>
       <p:sp>
         <p:nvSpPr>
@@ -24504,6 +24842,10 @@
             </a:outerShdw>
           </a:effectLst>
         </p:spPr>
+        <p:txBody>
+          <a:bodyPr/>
+          <a:p/>
+        </p:txBody>
       </p:sp>
       <p:sp>
         <p:nvSpPr>
@@ -24638,6 +24980,10 @@
           </a:solidFill>
           <a:ln/>
         </p:spPr>
+        <p:txBody>
+          <a:bodyPr/>
+          <a:p/>
+        </p:txBody>
       </p:sp>
       <p:sp>
         <p:nvSpPr>
@@ -24797,7 +25143,7 @@
                 <a:ea typeface="微软雅黑" pitchFamily="34" charset="-122"/>
                 <a:cs typeface="微软雅黑" pitchFamily="34" charset="-120"/>
               </a:rPr>
-              <a:t>帮扶管理信息系统 v1.16.0</a:t>
+              <a:t>帮扶管理信息系统 v1.17.1</a:t>
             </a:r>
             <a:endParaRPr lang="en-US" sz="1050" dirty="0"/>
           </a:p>
@@ -24831,6 +25177,10 @@
             </a:outerShdw>
           </a:effectLst>
         </p:spPr>
+        <p:txBody>
+          <a:bodyPr/>
+          <a:p/>
+        </p:txBody>
       </p:sp>
       <p:sp>
         <p:nvSpPr>
@@ -24942,6 +25292,10 @@
             </a:outerShdw>
           </a:effectLst>
         </p:spPr>
+        <p:txBody>
+          <a:bodyPr/>
+          <a:p/>
+        </p:txBody>
       </p:sp>
       <p:sp>
         <p:nvSpPr>
@@ -25053,6 +25407,10 @@
             </a:outerShdw>
           </a:effectLst>
         </p:spPr>
+        <p:txBody>
+          <a:bodyPr/>
+          <a:p/>
+        </p:txBody>
       </p:sp>
       <p:sp>
         <p:nvSpPr>
@@ -25164,6 +25522,10 @@
             </a:outerShdw>
           </a:effectLst>
         </p:spPr>
+        <p:txBody>
+          <a:bodyPr/>
+          <a:p/>
+        </p:txBody>
       </p:sp>
       <p:sp>
         <p:nvSpPr>
@@ -25275,6 +25637,10 @@
             </a:outerShdw>
           </a:effectLst>
         </p:spPr>
+        <p:txBody>
+          <a:bodyPr/>
+          <a:p/>
+        </p:txBody>
       </p:sp>
       <p:sp>
         <p:nvSpPr>
@@ -25409,6 +25775,10 @@
           </a:solidFill>
           <a:ln/>
         </p:spPr>
+        <p:txBody>
+          <a:bodyPr/>
+          <a:p/>
+        </p:txBody>
       </p:sp>
       <p:sp>
         <p:nvSpPr>
@@ -25568,7 +25938,7 @@
                 <a:ea typeface="微软雅黑" pitchFamily="34" charset="-122"/>
                 <a:cs typeface="微软雅黑" pitchFamily="34" charset="-120"/>
               </a:rPr>
-              <a:t>帮扶管理信息系统 v1.16.0</a:t>
+              <a:t>帮扶管理信息系统 v1.17.1</a:t>
             </a:r>
             <a:endParaRPr lang="en-US" sz="1050" dirty="0"/>
           </a:p>
@@ -25602,6 +25972,10 @@
             </a:outerShdw>
           </a:effectLst>
         </p:spPr>
+        <p:txBody>
+          <a:bodyPr/>
+          <a:p/>
+        </p:txBody>
       </p:sp>
       <p:sp>
         <p:nvSpPr>
@@ -25780,6 +26154,10 @@
             </a:outerShdw>
           </a:effectLst>
         </p:spPr>
+        <p:txBody>
+          <a:bodyPr/>
+          <a:p/>
+        </p:txBody>
       </p:sp>
       <p:sp>
         <p:nvSpPr>
@@ -26022,6 +26400,10 @@
           </a:solidFill>
           <a:ln/>
         </p:spPr>
+        <p:txBody>
+          <a:bodyPr/>
+          <a:p/>
+        </p:txBody>
       </p:sp>
       <p:sp>
         <p:nvSpPr>
@@ -26181,7 +26563,7 @@
                 <a:ea typeface="微软雅黑" pitchFamily="34" charset="-122"/>
                 <a:cs typeface="微软雅黑" pitchFamily="34" charset="-120"/>
               </a:rPr>
-              <a:t>帮扶管理信息系统 v1.16.0</a:t>
+              <a:t>帮扶管理信息系统 v1.17.1</a:t>
             </a:r>
             <a:endParaRPr lang="en-US" sz="1050" dirty="0"/>
           </a:p>
@@ -26215,6 +26597,10 @@
             </a:outerShdw>
           </a:effectLst>
         </p:spPr>
+        <p:txBody>
+          <a:bodyPr/>
+          <a:p/>
+        </p:txBody>
       </p:sp>
       <p:sp>
         <p:nvSpPr>
@@ -26414,6 +26800,10 @@
             </a:outerShdw>
           </a:effectLst>
         </p:spPr>
+        <p:txBody>
+          <a:bodyPr/>
+          <a:p/>
+        </p:txBody>
       </p:sp>
       <p:sp>
         <p:nvSpPr>
@@ -26656,6 +27046,10 @@
           </a:solidFill>
           <a:ln/>
         </p:spPr>
+        <p:txBody>
+          <a:bodyPr/>
+          <a:p/>
+        </p:txBody>
       </p:sp>
       <p:sp>
         <p:nvSpPr>
@@ -26815,7 +27209,7 @@
                 <a:ea typeface="微软雅黑" pitchFamily="34" charset="-122"/>
                 <a:cs typeface="微软雅黑" pitchFamily="34" charset="-120"/>
               </a:rPr>
-              <a:t>帮扶管理信息系统 v1.16.0</a:t>
+              <a:t>帮扶管理信息系统 v1.17.1</a:t>
             </a:r>
             <a:endParaRPr lang="en-US" sz="1050" dirty="0"/>
           </a:p>
@@ -26849,6 +27243,10 @@
             </a:outerShdw>
           </a:effectLst>
         </p:spPr>
+        <p:txBody>
+          <a:bodyPr/>
+          <a:p/>
+        </p:txBody>
       </p:sp>
       <p:sp>
         <p:nvSpPr>
@@ -26960,6 +27358,10 @@
             </a:outerShdw>
           </a:effectLst>
         </p:spPr>
+        <p:txBody>
+          <a:bodyPr/>
+          <a:p/>
+        </p:txBody>
       </p:sp>
       <p:sp>
         <p:nvSpPr>
@@ -27071,6 +27473,10 @@
             </a:outerShdw>
           </a:effectLst>
         </p:spPr>
+        <p:txBody>
+          <a:bodyPr/>
+          <a:p/>
+        </p:txBody>
       </p:sp>
       <p:sp>
         <p:nvSpPr>
@@ -27182,6 +27588,10 @@
             </a:outerShdw>
           </a:effectLst>
         </p:spPr>
+        <p:txBody>
+          <a:bodyPr/>
+          <a:p/>
+        </p:txBody>
       </p:sp>
       <p:sp>
         <p:nvSpPr>
@@ -27293,6 +27703,10 @@
             </a:outerShdw>
           </a:effectLst>
         </p:spPr>
+        <p:txBody>
+          <a:bodyPr/>
+          <a:p/>
+        </p:txBody>
       </p:sp>
       <p:sp>
         <p:nvSpPr>
@@ -27404,6 +27818,10 @@
             </a:outerShdw>
           </a:effectLst>
         </p:spPr>
+        <p:txBody>
+          <a:bodyPr/>
+          <a:p/>
+        </p:txBody>
       </p:sp>
       <p:sp>
         <p:nvSpPr>
@@ -27904,6 +28322,10 @@
           </a:solidFill>
           <a:ln/>
         </p:spPr>
+        <p:txBody>
+          <a:bodyPr/>
+          <a:p/>
+        </p:txBody>
       </p:sp>
       <p:sp>
         <p:nvSpPr>
@@ -28063,7 +28485,7 @@
                 <a:ea typeface="微软雅黑" pitchFamily="34" charset="-122"/>
                 <a:cs typeface="微软雅黑" pitchFamily="34" charset="-120"/>
               </a:rPr>
-              <a:t>帮扶管理信息系统 v1.16.0</a:t>
+              <a:t>帮扶管理信息系统 v1.17.1</a:t>
             </a:r>
             <a:endParaRPr lang="en-US" sz="1050" dirty="0"/>
           </a:p>
@@ -28097,6 +28519,10 @@
             </a:outerShdw>
           </a:effectLst>
         </p:spPr>
+        <p:txBody>
+          <a:bodyPr/>
+          <a:p/>
+        </p:txBody>
       </p:sp>
       <p:sp>
         <p:nvSpPr>
@@ -28119,6 +28545,10 @@
           </a:solidFill>
           <a:ln/>
         </p:spPr>
+        <p:txBody>
+          <a:bodyPr/>
+          <a:p/>
+        </p:txBody>
       </p:sp>
       <p:sp>
         <p:nvSpPr>
@@ -28271,6 +28701,10 @@
             </a:outerShdw>
           </a:effectLst>
         </p:spPr>
+        <p:txBody>
+          <a:bodyPr/>
+          <a:p/>
+        </p:txBody>
       </p:sp>
       <p:sp>
         <p:nvSpPr>
@@ -28293,6 +28727,10 @@
           </a:solidFill>
           <a:ln/>
         </p:spPr>
+        <p:txBody>
+          <a:bodyPr/>
+          <a:p/>
+        </p:txBody>
       </p:sp>
       <p:sp>
         <p:nvSpPr>
@@ -28445,6 +28883,10 @@
             </a:outerShdw>
           </a:effectLst>
         </p:spPr>
+        <p:txBody>
+          <a:bodyPr/>
+          <a:p/>
+        </p:txBody>
       </p:sp>
       <p:sp>
         <p:nvSpPr>
@@ -28467,6 +28909,10 @@
           </a:solidFill>
           <a:ln/>
         </p:spPr>
+        <p:txBody>
+          <a:bodyPr/>
+          <a:p/>
+        </p:txBody>
       </p:sp>
       <p:sp>
         <p:nvSpPr>
@@ -28619,6 +29065,10 @@
             </a:outerShdw>
           </a:effectLst>
         </p:spPr>
+        <p:txBody>
+          <a:bodyPr/>
+          <a:p/>
+        </p:txBody>
       </p:sp>
       <p:sp>
         <p:nvSpPr>
@@ -28641,6 +29091,10 @@
           </a:solidFill>
           <a:ln/>
         </p:spPr>
+        <p:txBody>
+          <a:bodyPr/>
+          <a:p/>
+        </p:txBody>
       </p:sp>
       <p:sp>
         <p:nvSpPr>
@@ -28903,6 +29357,10 @@
           </a:solidFill>
           <a:ln/>
         </p:spPr>
+        <p:txBody>
+          <a:bodyPr/>
+          <a:p/>
+        </p:txBody>
       </p:sp>
       <p:sp>
         <p:nvSpPr>
@@ -29062,7 +29520,7 @@
                 <a:ea typeface="微软雅黑" pitchFamily="34" charset="-122"/>
                 <a:cs typeface="微软雅黑" pitchFamily="34" charset="-120"/>
               </a:rPr>
-              <a:t>帮扶管理信息系统 v1.16.0</a:t>
+              <a:t>帮扶管理信息系统 v1.17.1</a:t>
             </a:r>
             <a:endParaRPr lang="en-US" sz="1050" dirty="0"/>
           </a:p>
@@ -29096,6 +29554,10 @@
             </a:outerShdw>
           </a:effectLst>
         </p:spPr>
+        <p:txBody>
+          <a:bodyPr/>
+          <a:p/>
+        </p:txBody>
       </p:sp>
       <p:sp>
         <p:nvSpPr>
@@ -29248,6 +29710,10 @@
             </a:outerShdw>
           </a:effectLst>
         </p:spPr>
+        <p:txBody>
+          <a:bodyPr/>
+          <a:p/>
+        </p:txBody>
       </p:sp>
       <p:sp>
         <p:nvSpPr>
@@ -29400,6 +29866,10 @@
             </a:outerShdw>
           </a:effectLst>
         </p:spPr>
+        <p:txBody>
+          <a:bodyPr/>
+          <a:p/>
+        </p:txBody>
       </p:sp>
       <p:sp>
         <p:nvSpPr>
@@ -29552,6 +30022,10 @@
             </a:outerShdw>
           </a:effectLst>
         </p:spPr>
+        <p:txBody>
+          <a:bodyPr/>
+          <a:p/>
+        </p:txBody>
       </p:sp>
       <p:sp>
         <p:nvSpPr>
@@ -29732,6 +30206,10 @@
           </a:solidFill>
           <a:ln/>
         </p:spPr>
+        <p:txBody>
+          <a:bodyPr/>
+          <a:p/>
+        </p:txBody>
       </p:sp>
       <p:sp>
         <p:nvSpPr>
@@ -29891,7 +30369,7 @@
                 <a:ea typeface="微软雅黑" pitchFamily="34" charset="-122"/>
                 <a:cs typeface="微软雅黑" pitchFamily="34" charset="-120"/>
               </a:rPr>
-              <a:t>帮扶管理信息系统 v1.16.0</a:t>
+              <a:t>帮扶管理信息系统 v1.17.1</a:t>
             </a:r>
             <a:endParaRPr lang="en-US" sz="1050" dirty="0"/>
           </a:p>
@@ -29925,6 +30403,10 @@
             </a:outerShdw>
           </a:effectLst>
         </p:spPr>
+        <p:txBody>
+          <a:bodyPr/>
+          <a:p/>
+        </p:txBody>
       </p:sp>
       <p:sp>
         <p:nvSpPr>
@@ -29988,6 +30470,10 @@
           </a:solidFill>
           <a:ln/>
         </p:spPr>
+        <p:txBody>
+          <a:bodyPr/>
+          <a:p/>
+        </p:txBody>
       </p:sp>
       <p:sp>
         <p:nvSpPr>
@@ -30053,6 +30539,10 @@
             <a:tailEnd type="triangle"/>
           </a:ln>
         </p:spPr>
+        <p:txBody>
+          <a:bodyPr/>
+          <a:p/>
+        </p:txBody>
       </p:sp>
       <p:sp>
         <p:nvSpPr>
@@ -30075,6 +30565,10 @@
           </a:solidFill>
           <a:ln/>
         </p:spPr>
+        <p:txBody>
+          <a:bodyPr/>
+          <a:p/>
+        </p:txBody>
       </p:sp>
       <p:sp>
         <p:nvSpPr>
@@ -30140,6 +30634,10 @@
             <a:tailEnd type="triangle"/>
           </a:ln>
         </p:spPr>
+        <p:txBody>
+          <a:bodyPr/>
+          <a:p/>
+        </p:txBody>
       </p:sp>
       <p:sp>
         <p:nvSpPr>
@@ -30162,6 +30660,10 @@
           </a:solidFill>
           <a:ln/>
         </p:spPr>
+        <p:txBody>
+          <a:bodyPr/>
+          <a:p/>
+        </p:txBody>
       </p:sp>
       <p:sp>
         <p:nvSpPr>
@@ -30298,6 +30800,10 @@
             </a:outerShdw>
           </a:effectLst>
         </p:spPr>
+        <p:txBody>
+          <a:bodyPr/>
+          <a:p/>
+        </p:txBody>
       </p:sp>
       <p:sp>
         <p:nvSpPr>
@@ -30476,6 +30982,10 @@
             </a:outerShdw>
           </a:effectLst>
         </p:spPr>
+        <p:txBody>
+          <a:bodyPr/>
+          <a:p/>
+        </p:txBody>
       </p:sp>
       <p:sp>
         <p:nvSpPr>
@@ -30610,6 +31120,10 @@
           </a:solidFill>
           <a:ln/>
         </p:spPr>
+        <p:txBody>
+          <a:bodyPr/>
+          <a:p/>
+        </p:txBody>
       </p:sp>
       <p:sp>
         <p:nvSpPr>
@@ -30769,7 +31283,7 @@
                 <a:ea typeface="微软雅黑" pitchFamily="34" charset="-122"/>
                 <a:cs typeface="微软雅黑" pitchFamily="34" charset="-120"/>
               </a:rPr>
-              <a:t>帮扶管理信息系统 v1.16.0</a:t>
+              <a:t>帮扶管理信息系统 v1.17.1</a:t>
             </a:r>
             <a:endParaRPr lang="en-US" sz="1050" dirty="0"/>
           </a:p>
@@ -30835,6 +31349,10 @@
           </a:solidFill>
           <a:ln/>
         </p:spPr>
+        <p:txBody>
+          <a:bodyPr/>
+          <a:p/>
+        </p:txBody>
       </p:sp>
       <p:sp>
         <p:nvSpPr>
@@ -30937,6 +31455,10 @@
           </a:solidFill>
           <a:ln/>
         </p:spPr>
+        <p:txBody>
+          <a:bodyPr/>
+          <a:p/>
+        </p:txBody>
       </p:sp>
       <p:sp>
         <p:nvSpPr>
@@ -31039,6 +31561,10 @@
           </a:solidFill>
           <a:ln/>
         </p:spPr>
+        <p:txBody>
+          <a:bodyPr/>
+          <a:p/>
+        </p:txBody>
       </p:sp>
       <p:sp>
         <p:nvSpPr>
@@ -31173,6 +31699,10 @@
           </a:solidFill>
           <a:ln/>
         </p:spPr>
+        <p:txBody>
+          <a:bodyPr/>
+          <a:p/>
+        </p:txBody>
       </p:sp>
       <p:sp>
         <p:nvSpPr>
@@ -31332,7 +31862,7 @@
                 <a:ea typeface="微软雅黑" pitchFamily="34" charset="-122"/>
                 <a:cs typeface="微软雅黑" pitchFamily="34" charset="-120"/>
               </a:rPr>
-              <a:t>帮扶管理信息系统 v1.16.0</a:t>
+              <a:t>帮扶管理信息系统 v1.17.1</a:t>
             </a:r>
             <a:endParaRPr lang="en-US" sz="1050" dirty="0"/>
           </a:p>
@@ -31357,6 +31887,10 @@
           </a:solidFill>
           <a:ln/>
         </p:spPr>
+        <p:txBody>
+          <a:bodyPr/>
+          <a:p/>
+        </p:txBody>
       </p:sp>
       <p:sp>
         <p:nvSpPr>
@@ -31459,6 +31993,10 @@
           </a:solidFill>
           <a:ln/>
         </p:spPr>
+        <p:txBody>
+          <a:bodyPr/>
+          <a:p/>
+        </p:txBody>
       </p:sp>
       <p:sp>
         <p:nvSpPr>
@@ -31561,6 +32099,10 @@
           </a:solidFill>
           <a:ln/>
         </p:spPr>
+        <p:txBody>
+          <a:bodyPr/>
+          <a:p/>
+        </p:txBody>
       </p:sp>
       <p:sp>
         <p:nvSpPr>
@@ -31663,6 +32205,10 @@
           </a:solidFill>
           <a:ln/>
         </p:spPr>
+        <p:txBody>
+          <a:bodyPr/>
+          <a:p/>
+        </p:txBody>
       </p:sp>
       <p:sp>
         <p:nvSpPr>
@@ -31765,6 +32311,10 @@
           </a:solidFill>
           <a:ln/>
         </p:spPr>
+        <p:txBody>
+          <a:bodyPr/>
+          <a:p/>
+        </p:txBody>
       </p:sp>
       <p:sp>
         <p:nvSpPr>
@@ -31867,6 +32417,10 @@
           </a:solidFill>
           <a:ln/>
         </p:spPr>
+        <p:txBody>
+          <a:bodyPr/>
+          <a:p/>
+        </p:txBody>
       </p:sp>
       <p:sp>
         <p:nvSpPr>
@@ -32001,6 +32555,10 @@
           </a:solidFill>
           <a:ln/>
         </p:spPr>
+        <p:txBody>
+          <a:bodyPr/>
+          <a:p/>
+        </p:txBody>
       </p:sp>
       <p:sp>
         <p:nvSpPr>
@@ -32160,7 +32718,7 @@
                 <a:ea typeface="微软雅黑" pitchFamily="34" charset="-122"/>
                 <a:cs typeface="微软雅黑" pitchFamily="34" charset="-120"/>
               </a:rPr>
-              <a:t>帮扶管理信息系统 v1.16.0</a:t>
+              <a:t>帮扶管理信息系统 v1.17.1</a:t>
             </a:r>
             <a:endParaRPr lang="en-US" sz="1050" dirty="0"/>
           </a:p>
@@ -32185,6 +32743,10 @@
           </a:solidFill>
           <a:ln/>
         </p:spPr>
+        <p:txBody>
+          <a:bodyPr/>
+          <a:p/>
+        </p:txBody>
       </p:sp>
       <p:sp>
         <p:nvSpPr>
@@ -32246,6 +32808,10 @@
           </a:solidFill>
           <a:ln/>
         </p:spPr>
+        <p:txBody>
+          <a:bodyPr/>
+          <a:p/>
+        </p:txBody>
       </p:sp>
       <p:sp>
         <p:nvSpPr>
@@ -32307,6 +32873,10 @@
           </a:solidFill>
           <a:ln/>
         </p:spPr>
+        <p:txBody>
+          <a:bodyPr/>
+          <a:p/>
+        </p:txBody>
       </p:sp>
       <p:sp>
         <p:nvSpPr>
@@ -32368,6 +32938,10 @@
           </a:solidFill>
           <a:ln/>
         </p:spPr>
+        <p:txBody>
+          <a:bodyPr/>
+          <a:p/>
+        </p:txBody>
       </p:sp>
       <p:sp>
         <p:nvSpPr>
@@ -32429,6 +33003,10 @@
           </a:solidFill>
           <a:ln/>
         </p:spPr>
+        <p:txBody>
+          <a:bodyPr/>
+          <a:p/>
+        </p:txBody>
       </p:sp>
       <p:sp>
         <p:nvSpPr>
@@ -32794,7 +33372,7 @@
                 <a:ea typeface="微软雅黑" pitchFamily="34" charset="-122"/>
                 <a:cs typeface="微软雅黑" pitchFamily="34" charset="-120"/>
               </a:rPr>
-              <a:t>20,809 项自动化测试（后端 13,942 + 前端 6,867）</a:t>
+              <a:t>21,384 项自动化测试（后端 14,364 + 前端 7,020）</a:t>
             </a:r>
             <a:endParaRPr lang="en-US" sz="1400" dirty="0"/>
           </a:p>
@@ -32997,6 +33575,10 @@
           </a:solidFill>
           <a:ln/>
         </p:spPr>
+        <p:txBody>
+          <a:bodyPr/>
+          <a:p/>
+        </p:txBody>
       </p:sp>
       <p:sp>
         <p:nvSpPr>
@@ -33156,7 +33738,7 @@
                 <a:ea typeface="微软雅黑" pitchFamily="34" charset="-122"/>
                 <a:cs typeface="微软雅黑" pitchFamily="34" charset="-120"/>
               </a:rPr>
-              <a:t>帮扶管理信息系统 v1.16.0</a:t>
+              <a:t>帮扶管理信息系统 v1.17.1</a:t>
             </a:r>
             <a:endParaRPr lang="en-US" sz="1050" dirty="0"/>
           </a:p>
@@ -33213,7 +33795,7 @@
                 <a:ea typeface="微软雅黑" pitchFamily="34" charset="-122"/>
                 <a:cs typeface="微软雅黑" pitchFamily="34" charset="-120"/>
               </a:rPr>
-              <a:t>数据来源：2026-10-20 实测（v1.15.15）· 后端 13,942 / 前端 6,867 用例（331 文件）· 覆盖率 100% · 视觉回归 10 页</a:t>
+              <a:t>数据来源：2026-10-24 实测（v1.17.1）· 后端 14,364 / 前端 7,020 用例（339 文件）· 覆盖率 100% · 视觉回归 10 页</a:t>
             </a:r>
             <a:endParaRPr lang="en-US" sz="1000" dirty="0"/>
           </a:p>
@@ -33247,6 +33829,10 @@
             </a:outerShdw>
           </a:effectLst>
         </p:spPr>
+        <p:txBody>
+          <a:bodyPr/>
+          <a:p/>
+        </p:txBody>
       </p:sp>
       <p:sp>
         <p:nvSpPr>
@@ -33412,7 +33998,7 @@
                 <a:ea typeface="微软雅黑" pitchFamily="34" charset="-122"/>
                 <a:cs typeface="微软雅黑" pitchFamily="34" charset="-120"/>
               </a:rPr>
-              <a:t>硬编码色棘轮只降不升：基线 345 → 当前 305（57 个文件；目标 ≤200），改动文件零新增</a:t>
+              <a:t>硬编码色棘轮只降不升：基线 345 → 当前 154（57 个文件；目标 ≤200），改动文件零新增</a:t>
             </a:r>
             <a:endParaRPr lang="en-US" sz="1100" dirty="0"/>
           </a:p>
@@ -33511,6 +34097,10 @@
           </a:solidFill>
           <a:ln/>
         </p:spPr>
+        <p:txBody>
+          <a:bodyPr/>
+          <a:p/>
+        </p:txBody>
       </p:sp>
       <p:sp>
         <p:nvSpPr>
@@ -33670,7 +34260,7 @@
                 <a:ea typeface="微软雅黑" pitchFamily="34" charset="-122"/>
                 <a:cs typeface="微软雅黑" pitchFamily="34" charset="-120"/>
               </a:rPr>
-              <a:t>帮扶管理信息系统 v1.16.0</a:t>
+              <a:t>帮扶管理信息系统 v1.17.1</a:t>
             </a:r>
             <a:endParaRPr lang="en-US" sz="1050" dirty="0"/>
           </a:p>
@@ -33697,6 +34287,10 @@
           </a:solidFill>
           <a:ln/>
         </p:spPr>
+        <p:txBody>
+          <a:bodyPr/>
+          <a:p/>
+        </p:txBody>
       </p:sp>
       <p:sp>
         <p:nvSpPr>
@@ -33801,6 +34395,10 @@
           </a:solidFill>
           <a:ln/>
         </p:spPr>
+        <p:txBody>
+          <a:bodyPr/>
+          <a:p/>
+        </p:txBody>
       </p:sp>
       <p:sp>
         <p:nvSpPr>
@@ -33905,6 +34503,10 @@
           </a:solidFill>
           <a:ln/>
         </p:spPr>
+        <p:txBody>
+          <a:bodyPr/>
+          <a:p/>
+        </p:txBody>
       </p:sp>
       <p:sp>
         <p:nvSpPr>
@@ -34009,6 +34611,10 @@
           </a:solidFill>
           <a:ln/>
         </p:spPr>
+        <p:txBody>
+          <a:bodyPr/>
+          <a:p/>
+        </p:txBody>
       </p:sp>
       <p:sp>
         <p:nvSpPr>
@@ -34184,6 +34790,10 @@
           </a:solidFill>
           <a:ln/>
         </p:spPr>
+        <p:txBody>
+          <a:bodyPr/>
+          <a:p/>
+        </p:txBody>
       </p:sp>
       <p:sp>
         <p:nvSpPr>
@@ -34343,7 +34953,7 @@
                 <a:ea typeface="微软雅黑" pitchFamily="34" charset="-122"/>
                 <a:cs typeface="微软雅黑" pitchFamily="34" charset="-120"/>
               </a:rPr>
-              <a:t>帮扶管理信息系统 v1.16.0</a:t>
+              <a:t>帮扶管理信息系统 v1.17.1</a:t>
             </a:r>
             <a:endParaRPr lang="en-US" sz="1050" dirty="0"/>
           </a:p>
@@ -34377,6 +34987,10 @@
             </a:outerShdw>
           </a:effectLst>
         </p:spPr>
+        <p:txBody>
+          <a:bodyPr/>
+          <a:p/>
+        </p:txBody>
       </p:sp>
       <p:sp>
         <p:nvSpPr>
@@ -34576,6 +35190,10 @@
             </a:outerShdw>
           </a:effectLst>
         </p:spPr>
+        <p:txBody>
+          <a:bodyPr/>
+          <a:p/>
+        </p:txBody>
       </p:sp>
       <p:sp>
         <p:nvSpPr>
@@ -34798,6 +35416,10 @@
           </a:solidFill>
           <a:ln/>
         </p:spPr>
+        <p:txBody>
+          <a:bodyPr/>
+          <a:p/>
+        </p:txBody>
       </p:sp>
       <p:sp>
         <p:nvSpPr>
@@ -34957,7 +35579,7 @@
                 <a:ea typeface="微软雅黑" pitchFamily="34" charset="-122"/>
                 <a:cs typeface="微软雅黑" pitchFamily="34" charset="-120"/>
               </a:rPr>
-              <a:t>帮扶管理信息系统 v1.16.0</a:t>
+              <a:t>帮扶管理信息系统 v1.17.1</a:t>
             </a:r>
             <a:endParaRPr lang="en-US" sz="1050" dirty="0"/>
           </a:p>
@@ -34991,6 +35613,10 @@
             </a:outerShdw>
           </a:effectLst>
         </p:spPr>
+        <p:txBody>
+          <a:bodyPr/>
+          <a:p/>
+        </p:txBody>
       </p:sp>
       <p:sp>
         <p:nvSpPr>
@@ -35190,6 +35816,10 @@
             </a:outerShdw>
           </a:effectLst>
         </p:spPr>
+        <p:txBody>
+          <a:bodyPr/>
+          <a:p/>
+        </p:txBody>
       </p:sp>
       <p:sp>
         <p:nvSpPr>
@@ -35737,6 +36367,10 @@
           </a:solidFill>
           <a:ln/>
         </p:spPr>
+        <p:txBody>
+          <a:bodyPr/>
+          <a:p/>
+        </p:txBody>
       </p:sp>
       <p:sp>
         <p:nvSpPr>
@@ -35896,7 +36530,7 @@
                 <a:ea typeface="微软雅黑" pitchFamily="34" charset="-122"/>
                 <a:cs typeface="微软雅黑" pitchFamily="34" charset="-120"/>
               </a:rPr>
-              <a:t>帮扶管理信息系统 v1.16.0</a:t>
+              <a:t>帮扶管理信息系统 v1.17.1</a:t>
             </a:r>
             <a:endParaRPr lang="en-US" sz="1050" dirty="0"/>
           </a:p>
@@ -35930,6 +36564,10 @@
             </a:outerShdw>
           </a:effectLst>
         </p:spPr>
+        <p:txBody>
+          <a:bodyPr/>
+          <a:p/>
+        </p:txBody>
       </p:sp>
       <p:sp>
         <p:nvSpPr>
@@ -35993,6 +36631,10 @@
           </a:solidFill>
           <a:ln/>
         </p:spPr>
+        <p:txBody>
+          <a:bodyPr/>
+          <a:p/>
+        </p:txBody>
       </p:sp>
       <p:sp>
         <p:nvSpPr>
@@ -36201,6 +36843,10 @@
             </a:outerShdw>
           </a:effectLst>
         </p:spPr>
+        <p:txBody>
+          <a:bodyPr/>
+          <a:p/>
+        </p:txBody>
       </p:sp>
       <p:sp>
         <p:nvSpPr>
@@ -36264,6 +36910,10 @@
           </a:solidFill>
           <a:ln/>
         </p:spPr>
+        <p:txBody>
+          <a:bodyPr/>
+          <a:p/>
+        </p:txBody>
       </p:sp>
       <p:sp>
         <p:nvSpPr>
@@ -36472,6 +37122,10 @@
             </a:outerShdw>
           </a:effectLst>
         </p:spPr>
+        <p:txBody>
+          <a:bodyPr/>
+          <a:p/>
+        </p:txBody>
       </p:sp>
       <p:sp>
         <p:nvSpPr>
@@ -36535,6 +37189,10 @@
           </a:solidFill>
           <a:ln/>
         </p:spPr>
+        <p:txBody>
+          <a:bodyPr/>
+          <a:p/>
+        </p:txBody>
       </p:sp>
       <p:sp>
         <p:nvSpPr>
@@ -36807,6 +37465,10 @@
           </a:solidFill>
           <a:ln/>
         </p:spPr>
+        <p:txBody>
+          <a:bodyPr/>
+          <a:p/>
+        </p:txBody>
       </p:sp>
       <p:sp>
         <p:nvSpPr>
@@ -36966,7 +37628,7 @@
                 <a:ea typeface="微软雅黑" pitchFamily="34" charset="-122"/>
                 <a:cs typeface="微软雅黑" pitchFamily="34" charset="-120"/>
               </a:rPr>
-              <a:t>帮扶管理信息系统 v1.16.0</a:t>
+              <a:t>帮扶管理信息系统 v1.17.1</a:t>
             </a:r>
             <a:endParaRPr lang="en-US" sz="1050" dirty="0"/>
           </a:p>
@@ -37000,6 +37662,10 @@
             </a:outerShdw>
           </a:effectLst>
         </p:spPr>
+        <p:txBody>
+          <a:bodyPr/>
+          <a:p/>
+        </p:txBody>
       </p:sp>
       <p:sp>
         <p:nvSpPr>
@@ -37199,6 +37865,10 @@
             </a:outerShdw>
           </a:effectLst>
         </p:spPr>
+        <p:txBody>
+          <a:bodyPr/>
+          <a:p/>
+        </p:txBody>
       </p:sp>
       <p:sp>
         <p:nvSpPr>
@@ -37442,6 +38112,10 @@
           </a:solidFill>
           <a:ln/>
         </p:spPr>
+        <p:txBody>
+          <a:bodyPr/>
+          <a:p/>
+        </p:txBody>
       </p:sp>
       <p:sp>
         <p:nvSpPr>
@@ -37601,7 +38275,7 @@
                 <a:ea typeface="微软雅黑" pitchFamily="34" charset="-122"/>
                 <a:cs typeface="微软雅黑" pitchFamily="34" charset="-120"/>
               </a:rPr>
-              <a:t>帮扶管理信息系统 v1.16.0</a:t>
+              <a:t>帮扶管理信息系统 v1.17.1</a:t>
             </a:r>
             <a:endParaRPr lang="en-US" sz="1050" dirty="0"/>
           </a:p>
@@ -37635,6 +38309,10 @@
             </a:outerShdw>
           </a:effectLst>
         </p:spPr>
+        <p:txBody>
+          <a:bodyPr/>
+          <a:p/>
+        </p:txBody>
       </p:sp>
       <p:sp>
         <p:nvSpPr>
@@ -37655,6 +38333,10 @@
           </a:solidFill>
           <a:ln/>
         </p:spPr>
+        <p:txBody>
+          <a:bodyPr/>
+          <a:p/>
+        </p:txBody>
       </p:sp>
       <p:sp>
         <p:nvSpPr>
@@ -37766,6 +38448,10 @@
             </a:outerShdw>
           </a:effectLst>
         </p:spPr>
+        <p:txBody>
+          <a:bodyPr/>
+          <a:p/>
+        </p:txBody>
       </p:sp>
       <p:sp>
         <p:nvSpPr>
@@ -37786,6 +38472,10 @@
           </a:solidFill>
           <a:ln/>
         </p:spPr>
+        <p:txBody>
+          <a:bodyPr/>
+          <a:p/>
+        </p:txBody>
       </p:sp>
       <p:sp>
         <p:nvSpPr>
@@ -37897,6 +38587,10 @@
             </a:outerShdw>
           </a:effectLst>
         </p:spPr>
+        <p:txBody>
+          <a:bodyPr/>
+          <a:p/>
+        </p:txBody>
       </p:sp>
       <p:sp>
         <p:nvSpPr>
@@ -37917,6 +38611,10 @@
           </a:solidFill>
           <a:ln/>
         </p:spPr>
+        <p:txBody>
+          <a:bodyPr/>
+          <a:p/>
+        </p:txBody>
       </p:sp>
       <p:sp>
         <p:nvSpPr>
@@ -38028,6 +38726,10 @@
             </a:outerShdw>
           </a:effectLst>
         </p:spPr>
+        <p:txBody>
+          <a:bodyPr/>
+          <a:p/>
+        </p:txBody>
       </p:sp>
       <p:sp>
         <p:nvSpPr>
@@ -38048,6 +38750,10 @@
           </a:solidFill>
           <a:ln/>
         </p:spPr>
+        <p:txBody>
+          <a:bodyPr/>
+          <a:p/>
+        </p:txBody>
       </p:sp>
       <p:sp>
         <p:nvSpPr>
@@ -38182,6 +38888,10 @@
           </a:solidFill>
           <a:ln/>
         </p:spPr>
+        <p:txBody>
+          <a:bodyPr/>
+          <a:p/>
+        </p:txBody>
       </p:sp>
       <p:sp>
         <p:nvSpPr>
@@ -38341,7 +39051,7 @@
                 <a:ea typeface="微软雅黑" pitchFamily="34" charset="-122"/>
                 <a:cs typeface="微软雅黑" pitchFamily="34" charset="-120"/>
               </a:rPr>
-              <a:t>帮扶管理信息系统 v1.16.0</a:t>
+              <a:t>帮扶管理信息系统 v1.17.1</a:t>
             </a:r>
             <a:endParaRPr lang="en-US" sz="1050" dirty="0"/>
           </a:p>
@@ -38369,6 +39079,10 @@
             <a:prstDash val="solid"/>
           </a:ln>
         </p:spPr>
+        <p:txBody>
+          <a:bodyPr/>
+          <a:p/>
+        </p:txBody>
       </p:sp>
       <p:sp>
         <p:nvSpPr>
@@ -38389,6 +39103,10 @@
           </a:solidFill>
           <a:ln/>
         </p:spPr>
+        <p:txBody>
+          <a:bodyPr/>
+          <a:p/>
+        </p:txBody>
       </p:sp>
       <p:sp>
         <p:nvSpPr>
@@ -38532,6 +39250,10 @@
           </a:solidFill>
           <a:ln/>
         </p:spPr>
+        <p:txBody>
+          <a:bodyPr/>
+          <a:p/>
+        </p:txBody>
       </p:sp>
       <p:sp>
         <p:nvSpPr>
@@ -38675,6 +39397,10 @@
           </a:solidFill>
           <a:ln/>
         </p:spPr>
+        <p:txBody>
+          <a:bodyPr/>
+          <a:p/>
+        </p:txBody>
       </p:sp>
       <p:sp>
         <p:nvSpPr>
@@ -38818,6 +39544,10 @@
           </a:solidFill>
           <a:ln/>
         </p:spPr>
+        <p:txBody>
+          <a:bodyPr/>
+          <a:p/>
+        </p:txBody>
       </p:sp>
       <p:sp>
         <p:nvSpPr>
@@ -38961,6 +39691,10 @@
           </a:solidFill>
           <a:ln/>
         </p:spPr>
+        <p:txBody>
+          <a:bodyPr/>
+          <a:p/>
+        </p:txBody>
       </p:sp>
       <p:sp>
         <p:nvSpPr>
@@ -39113,6 +39847,10 @@
             </a:outerShdw>
           </a:effectLst>
         </p:spPr>
+        <p:txBody>
+          <a:bodyPr/>
+          <a:p/>
+        </p:txBody>
       </p:sp>
       <p:sp>
         <p:nvSpPr>
@@ -39149,7 +39887,7 @@
                 <a:ea typeface="微软雅黑" pitchFamily="34" charset="-122"/>
                 <a:cs typeface="微软雅黑" pitchFamily="34" charset="-120"/>
               </a:rPr>
-              <a:t>净效果：13,942 后端用例（行+分支覆盖率 100%）+ 6,867 前端用例全绿（331 文件）+ 10 页视觉回归基线；Windows x64 与麒麟 ARM64 离线安装包由 GitHub Actions 自动构建并发布 Release（发布前强制校验 tag commit 的 PR Checks 全绿）</a:t>
+              <a:t>净效果：14,364 后端用例（行+分支覆盖率 100%）+ 7,020 前端用例全绿（339 文件）+ 10 页视觉回归基线；Windows x64 与麒麟 ARM64 离线安装包由 GitHub Actions 自动构建并发布 Release（发布前强制校验 tag commit 的 PR Checks 全绿）</a:t>
             </a:r>
             <a:endParaRPr lang="en-US" sz="1350" dirty="0"/>
           </a:p>
@@ -39206,6 +39944,10 @@
           </a:solidFill>
           <a:ln/>
         </p:spPr>
+        <p:txBody>
+          <a:bodyPr/>
+          <a:p/>
+        </p:txBody>
       </p:sp>
       <p:sp>
         <p:nvSpPr>
@@ -39365,7 +40107,7 @@
                 <a:ea typeface="微软雅黑" pitchFamily="34" charset="-122"/>
                 <a:cs typeface="微软雅黑" pitchFamily="34" charset="-120"/>
               </a:rPr>
-              <a:t>帮扶管理信息系统 v1.16.0</a:t>
+              <a:t>帮扶管理信息系统 v1.17.1</a:t>
             </a:r>
             <a:endParaRPr lang="en-US" sz="1050" dirty="0"/>
           </a:p>
@@ -39399,6 +40141,10 @@
             </a:outerShdw>
           </a:effectLst>
         </p:spPr>
+        <p:txBody>
+          <a:bodyPr/>
+          <a:p/>
+        </p:txBody>
       </p:sp>
       <p:sp>
         <p:nvSpPr>
@@ -39510,6 +40256,10 @@
             </a:outerShdw>
           </a:effectLst>
         </p:spPr>
+        <p:txBody>
+          <a:bodyPr/>
+          <a:p/>
+        </p:txBody>
       </p:sp>
       <p:sp>
         <p:nvSpPr>
@@ -39621,6 +40371,10 @@
             </a:outerShdw>
           </a:effectLst>
         </p:spPr>
+        <p:txBody>
+          <a:bodyPr/>
+          <a:p/>
+        </p:txBody>
       </p:sp>
       <p:sp>
         <p:nvSpPr>
@@ -39732,6 +40486,10 @@
             </a:outerShdw>
           </a:effectLst>
         </p:spPr>
+        <p:txBody>
+          <a:bodyPr/>
+          <a:p/>
+        </p:txBody>
       </p:sp>
       <p:sp>
         <p:nvSpPr>
@@ -39843,6 +40601,10 @@
             </a:outerShdw>
           </a:effectLst>
         </p:spPr>
+        <p:txBody>
+          <a:bodyPr/>
+          <a:p/>
+        </p:txBody>
       </p:sp>
       <p:sp>
         <p:nvSpPr>
@@ -39954,6 +40716,10 @@
             </a:outerShdw>
           </a:effectLst>
         </p:spPr>
+        <p:txBody>
+          <a:bodyPr/>
+          <a:p/>
+        </p:txBody>
       </p:sp>
       <p:sp>
         <p:nvSpPr>
@@ -40088,6 +40854,10 @@
           </a:solidFill>
           <a:ln/>
         </p:spPr>
+        <p:txBody>
+          <a:bodyPr/>
+          <a:p/>
+        </p:txBody>
       </p:sp>
       <p:sp>
         <p:nvSpPr>
@@ -40108,6 +40878,10 @@
           </a:solidFill>
           <a:ln/>
         </p:spPr>
+        <p:txBody>
+          <a:bodyPr/>
+          <a:p/>
+        </p:txBody>
       </p:sp>
       <p:sp>
         <p:nvSpPr>
@@ -40267,7 +41041,7 @@
                 <a:ea typeface="微软雅黑" pitchFamily="34" charset="-122"/>
                 <a:cs typeface="微软雅黑" pitchFamily="34" charset="-120"/>
               </a:rPr>
-              <a:t>13,942 后端用例 + 6,867 前端用例全绿守护 · 10 页视觉回归基线 · 双平台离线交付</a:t>
+              <a:t>14,364 后端用例 + 7,020 前端用例全绿守护 · 10 页视觉回归基线 · 双平台离线交付</a:t>
             </a:r>
             <a:endParaRPr lang="en-US" sz="1350" dirty="0"/>
           </a:p>
@@ -40324,6 +41098,10 @@
           </a:solidFill>
           <a:ln/>
         </p:spPr>
+        <p:txBody>
+          <a:bodyPr/>
+          <a:p/>
+        </p:txBody>
       </p:sp>
       <p:sp>
         <p:nvSpPr>
@@ -40483,7 +41261,7 @@
                 <a:ea typeface="微软雅黑" pitchFamily="34" charset="-122"/>
                 <a:cs typeface="微软雅黑" pitchFamily="34" charset="-120"/>
               </a:rPr>
-              <a:t>帮扶管理信息系统 v1.16.0</a:t>
+              <a:t>帮扶管理信息系统 v1.17.1</a:t>
             </a:r>
             <a:endParaRPr lang="en-US" sz="1050" dirty="0"/>
           </a:p>
@@ -40524,7 +41302,7 @@
                 <a:ea typeface="微软雅黑" pitchFamily="34" charset="-122"/>
                 <a:cs typeface="微软雅黑" pitchFamily="34" charset="-120"/>
               </a:rPr>
-              <a:t>13,942</a:t>
+              <a:t>14,364</a:t>
             </a:r>
             <a:endParaRPr lang="en-US" sz="4000" dirty="0"/>
           </a:p>
@@ -40606,7 +41384,7 @@
                 <a:ea typeface="微软雅黑" pitchFamily="34" charset="-122"/>
                 <a:cs typeface="微软雅黑" pitchFamily="34" charset="-120"/>
               </a:rPr>
-              <a:t>6,867</a:t>
+              <a:t>7,020</a:t>
             </a:r>
             <a:endParaRPr lang="en-US" sz="4000" dirty="0"/>
           </a:p>
@@ -40839,6 +41617,10 @@
             <a:prstDash val="solid"/>
           </a:ln>
         </p:spPr>
+        <p:txBody>
+          <a:bodyPr/>
+          <a:p/>
+        </p:txBody>
       </p:sp>
       <p:sp>
         <p:nvSpPr>
@@ -40875,7 +41657,7 @@
                 <a:ea typeface="微软雅黑" pitchFamily="34" charset="-122"/>
                 <a:cs typeface="微软雅黑" pitchFamily="34" charset="-120"/>
               </a:rPr>
-              <a:t>100</a:t>
+              <a:t>93</a:t>
             </a:r>
             <a:endParaRPr lang="en-US" sz="4000" dirty="0"/>
           </a:p>
@@ -40916,7 +41698,7 @@
                 <a:ea typeface="微软雅黑" pitchFamily="34" charset="-122"/>
                 <a:cs typeface="微软雅黑" pitchFamily="34" charset="-120"/>
               </a:rPr>
-              <a:t>API 路由模块（55 顶层 + 5 子包）</a:t>
+              <a:t>API 路由模块（53 顶层 + 5 子包）</a:t>
             </a:r>
             <a:endParaRPr lang="en-US" sz="1300" dirty="0"/>
           </a:p>
@@ -41203,7 +41985,7 @@
                 <a:ea typeface="微软雅黑" pitchFamily="34" charset="-122"/>
                 <a:cs typeface="微软雅黑" pitchFamily="34" charset="-120"/>
               </a:rPr>
-              <a:t>数据来源：2026-10-21（v1.16.0）—— 后端 14,140 用例（1 skipped）/ 行+分支 100%；前端 332 文件 / 6,906 用例（12 组 glob 100%）；UI 主题 3 套 · 显示偏好 4 档 · R35 表格规范 117/117 · 硬编码色 305（基线 345）</a:t>
+              <a:t>数据来源：2026-10-24（v1.17.1）—— 后端 14,364 用例（1 skipped）/ 行+分支 100%；前端 339 文件 / 7,020 用例（12 组 glob 100%）；UI 主题 3 套 · 显示偏好 4 档 · 表格规范 117/117 · 硬编码色 154（基线 345）</a:t>
             </a:r>
             <a:endParaRPr lang="en-US" sz="900" dirty="0"/>
           </a:p>
@@ -41585,6 +42367,10 @@
           </a:solidFill>
           <a:ln/>
         </p:spPr>
+        <p:txBody>
+          <a:bodyPr/>
+          <a:p/>
+        </p:txBody>
       </p:sp>
       <p:sp>
         <p:nvSpPr>
@@ -41744,7 +42530,7 @@
                 <a:ea typeface="微软雅黑" pitchFamily="34" charset="-122"/>
                 <a:cs typeface="微软雅黑" pitchFamily="34" charset="-120"/>
               </a:rPr>
-              <a:t>帮扶管理信息系统 v1.16.0</a:t>
+              <a:t>帮扶管理信息系统 v1.17.1</a:t>
             </a:r>
             <a:endParaRPr lang="en-US" sz="1050" dirty="0"/>
           </a:p>
@@ -41778,6 +42564,10 @@
             </a:outerShdw>
           </a:effectLst>
         </p:spPr>
+        <p:txBody>
+          <a:bodyPr/>
+          <a:p/>
+        </p:txBody>
       </p:sp>
       <p:sp>
         <p:nvSpPr>
@@ -41997,6 +42787,10 @@
             </a:outerShdw>
           </a:effectLst>
         </p:spPr>
+        <p:txBody>
+          <a:bodyPr/>
+          <a:p/>
+        </p:txBody>
       </p:sp>
       <p:sp>
         <p:nvSpPr>
@@ -42216,6 +43010,10 @@
             </a:outerShdw>
           </a:effectLst>
         </p:spPr>
+        <p:txBody>
+          <a:bodyPr/>
+          <a:p/>
+        </p:txBody>
       </p:sp>
       <p:sp>
         <p:nvSpPr>
@@ -42435,6 +43233,10 @@
             </a:outerShdw>
           </a:effectLst>
         </p:spPr>
+        <p:txBody>
+          <a:bodyPr/>
+          <a:p/>
+        </p:txBody>
       </p:sp>
       <p:sp>
         <p:nvSpPr>
@@ -42620,7 +43422,7 @@
                 <a:ea typeface="微软雅黑" pitchFamily="34" charset="-122"/>
                 <a:cs typeface="微软雅黑" pitchFamily="34" charset="-120"/>
               </a:rPr>
-              <a:t>122 张表 · 54 个迁移版本</a:t>
+              <a:t>124 张表 · 54 个迁移版本</a:t>
             </a:r>
             <a:endParaRPr lang="en-US" sz="1200" dirty="0"/>
           </a:p>
@@ -42677,6 +43479,10 @@
           </a:solidFill>
           <a:ln/>
         </p:spPr>
+        <p:txBody>
+          <a:bodyPr/>
+          <a:p/>
+        </p:txBody>
       </p:sp>
       <p:sp>
         <p:nvSpPr>
@@ -42836,7 +43642,7 @@
                 <a:ea typeface="微软雅黑" pitchFamily="34" charset="-122"/>
                 <a:cs typeface="微软雅黑" pitchFamily="34" charset="-120"/>
               </a:rPr>
-              <a:t>帮扶管理信息系统 v1.16.0</a:t>
+              <a:t>帮扶管理信息系统 v1.17.1</a:t>
             </a:r>
             <a:endParaRPr lang="en-US" sz="1050" dirty="0"/>
           </a:p>
@@ -42863,6 +43669,10 @@
           </a:solidFill>
           <a:ln/>
         </p:spPr>
+        <p:txBody>
+          <a:bodyPr/>
+          <a:p/>
+        </p:txBody>
       </p:sp>
       <p:sp>
         <p:nvSpPr>
@@ -42969,6 +43779,10 @@
             <a:tailEnd type="triangle"/>
           </a:ln>
         </p:spPr>
+        <p:txBody>
+          <a:bodyPr/>
+          <a:p/>
+        </p:txBody>
       </p:sp>
       <p:sp>
         <p:nvSpPr>
@@ -42991,6 +43805,10 @@
           </a:solidFill>
           <a:ln/>
         </p:spPr>
+        <p:txBody>
+          <a:bodyPr/>
+          <a:p/>
+        </p:txBody>
       </p:sp>
       <p:sp>
         <p:nvSpPr>
@@ -43097,6 +43915,10 @@
             <a:tailEnd type="triangle"/>
           </a:ln>
         </p:spPr>
+        <p:txBody>
+          <a:bodyPr/>
+          <a:p/>
+        </p:txBody>
       </p:sp>
       <p:sp>
         <p:nvSpPr>
@@ -43119,6 +43941,10 @@
           </a:solidFill>
           <a:ln/>
         </p:spPr>
+        <p:txBody>
+          <a:bodyPr/>
+          <a:p/>
+        </p:txBody>
       </p:sp>
       <p:sp>
         <p:nvSpPr>
@@ -43225,6 +44051,10 @@
             <a:tailEnd type="triangle"/>
           </a:ln>
         </p:spPr>
+        <p:txBody>
+          <a:bodyPr/>
+          <a:p/>
+        </p:txBody>
       </p:sp>
       <p:sp>
         <p:nvSpPr>
@@ -43247,6 +44077,10 @@
           </a:solidFill>
           <a:ln/>
         </p:spPr>
+        <p:txBody>
+          <a:bodyPr/>
+          <a:p/>
+        </p:txBody>
       </p:sp>
       <p:sp>
         <p:nvSpPr>
